--- a/Seminario de Sistemas/Clases/Clase 6 - Requerimientos de software/Presentacion.pptx
+++ b/Seminario de Sistemas/Clases/Clase 6 - Requerimientos de software/Presentacion.pptx
@@ -19,6 +19,11 @@
     <p:sldId id="267" r:id="rId18"/>
     <p:sldId id="268" r:id="rId19"/>
     <p:sldId id="269" r:id="rId20"/>
+    <p:sldId id="270" r:id="rId21"/>
+    <p:sldId id="271" r:id="rId22"/>
+    <p:sldId id="272" r:id="rId23"/>
+    <p:sldId id="273" r:id="rId24"/>
+    <p:sldId id="274" r:id="rId25"/>
   </p:sldIdLst>
   <p:sldSz cx="12191695" cy="6858000" type="screen4x3"/>
   <p:notesSz cx="6858000" cy="9144000"/>
@@ -3619,7 +3624,7 @@
                 </a:solidFill>
                 <a:latin typeface="Calibri"/>
               </a:rPr>
-              <a:t>Taller PI — pasos guiados</a:t>
+              <a:t>Ficha de requisito RF-03 (plantilla proyectable)</a:t>
             </a:r>
           </a:p>
         </p:txBody>
@@ -3632,8 +3637,8 @@
         </p:nvSpPr>
         <p:spPr>
           <a:xfrm>
-            <a:off x="457200" y="1234440"/>
-            <a:ext cx="11277295" cy="950976"/>
+            <a:off x="457200" y="1261872"/>
+            <a:ext cx="11277295" cy="4773168"/>
           </a:xfrm>
           <a:prstGeom prst="roundRect">
             <a:avLst>
@@ -3641,7 +3646,7 @@
             </a:avLst>
           </a:prstGeom>
           <a:solidFill>
-            <a:srgbClr val="F2F2F2"/>
+            <a:srgbClr val="1E2A38"/>
           </a:solidFill>
           <a:ln>
             <a:noFill/>
@@ -3671,19 +3676,17 @@
       </p:sp>
       <p:sp>
         <p:nvSpPr>
-          <p:cNvPr id="6" name="Rounded Rectangle 5"/>
+          <p:cNvPr id="6" name="Rectangle 5"/>
           <p:cNvSpPr/>
           <p:nvPr/>
         </p:nvSpPr>
         <p:spPr>
           <a:xfrm>
-            <a:off x="594360" y="1490472"/>
-            <a:ext cx="438912" cy="438912"/>
-          </a:xfrm>
-          <a:prstGeom prst="roundRect">
-            <a:avLst>
-              <a:gd name="adj" fmla="val 12000"/>
-            </a:avLst>
+            <a:off x="457200" y="1261872"/>
+            <a:ext cx="11277295" cy="320040"/>
+          </a:xfrm>
+          <a:prstGeom prst="rect">
+            <a:avLst/>
           </a:prstGeom>
           <a:solidFill>
             <a:srgbClr val="095292"/>
@@ -3722,8 +3725,8 @@
         </p:nvSpPr>
         <p:spPr>
           <a:xfrm>
-            <a:off x="594360" y="1490472"/>
-            <a:ext cx="438912" cy="438912"/>
+            <a:off x="685800" y="1307592"/>
+            <a:ext cx="10820095" cy="256032"/>
           </a:xfrm>
           <a:prstGeom prst="rect">
             <a:avLst/>
@@ -3734,15 +3737,14 @@
           <a:bodyPr wrap="square" anchor="ctr"/>
           <a:lstStyle/>
           <a:p>
-            <a:pPr algn="ctr"/>
-            <a:r>
-              <a:rPr sz="1600" b="1" i="0">
-                <a:solidFill>
-                  <a:srgbClr val="FFFFFF"/>
-                </a:solidFill>
-                <a:latin typeface="Calibri"/>
-              </a:rPr>
-              <a:t>1</a:t>
+            <a:r>
+              <a:rPr sz="1000" b="1" i="0">
+                <a:solidFill>
+                  <a:srgbClr val="269CCB"/>
+                </a:solidFill>
+                <a:latin typeface="Calibri"/>
+              </a:rPr>
+              <a:t>● ● ●</a:t>
             </a:r>
           </a:p>
         </p:txBody>
@@ -3755,8 +3757,8 @@
         </p:nvSpPr>
         <p:spPr>
           <a:xfrm>
-            <a:off x="1188720" y="1325880"/>
-            <a:ext cx="10271455" cy="786384"/>
+            <a:off x="777240" y="1719072"/>
+            <a:ext cx="10637215" cy="4133087"/>
           </a:xfrm>
           <a:prstGeom prst="rect">
             <a:avLst/>
@@ -3764,644 +3766,242 @@
           <a:noFill/>
         </p:spPr>
         <p:txBody>
-          <a:bodyPr wrap="square" anchor="ctr"/>
-          <a:lstStyle/>
-          <a:p>
-            <a:r>
-              <a:rPr sz="1500" b="1" i="0">
-                <a:solidFill>
-                  <a:srgbClr val="095292"/>
-                </a:solidFill>
-                <a:latin typeface="Calibri"/>
-              </a:rPr>
-              <a:t>Paso 1: copie en la plantilla las cinco frases crudas de la entrevista al Dr. Ramirez y marque cada una como NECESIDAD, anotando al lado quien la dijo y en que contexto; esa columna es el origen y no se puede dejar vacia.</a:t>
-            </a:r>
-          </a:p>
-        </p:txBody>
-      </p:sp>
-      <p:sp>
-        <p:nvSpPr>
-          <p:cNvPr id="9" name="Rounded Rectangle 8"/>
-          <p:cNvSpPr/>
-          <p:nvPr/>
-        </p:nvSpPr>
-        <p:spPr>
-          <a:xfrm>
-            <a:off x="457200" y="2276856"/>
-            <a:ext cx="11277295" cy="950976"/>
-          </a:xfrm>
-          <a:prstGeom prst="roundRect">
-            <a:avLst>
-              <a:gd name="adj" fmla="val 12000"/>
-            </a:avLst>
-          </a:prstGeom>
-          <a:solidFill>
-            <a:srgbClr val="E8F4FA"/>
-          </a:solidFill>
-          <a:ln>
-            <a:noFill/>
-          </a:ln>
-        </p:spPr>
-        <p:style>
-          <a:lnRef idx="1">
-            <a:schemeClr val="accent1"/>
-          </a:lnRef>
-          <a:fillRef idx="3">
-            <a:schemeClr val="accent1"/>
-          </a:fillRef>
-          <a:effectRef idx="2">
-            <a:schemeClr val="accent1"/>
-          </a:effectRef>
-          <a:fontRef idx="minor">
-            <a:schemeClr val="lt1"/>
-          </a:fontRef>
-        </p:style>
-        <p:txBody>
-          <a:bodyPr rtlCol="0" anchor="ctr"/>
+          <a:bodyPr wrap="square">
+            <a:spAutoFit/>
+          </a:bodyPr>
+          <a:lstStyle/>
+          <a:p>
+            <a:pPr>
+              <a:spcAft>
+                <a:spcPts val="400"/>
+              </a:spcAft>
+            </a:pPr>
+            <a:r>
+              <a:rPr sz="1400" b="0" i="0">
+                <a:solidFill>
+                  <a:srgbClr val="FFFFFF"/>
+                </a:solidFill>
+                <a:latin typeface="Calibri"/>
+              </a:rPr>
+              <a:t>ID: RF-03</a:t>
+            </a:r>
+          </a:p>
+          <a:p>
+            <a:pPr>
+              <a:spcAft>
+                <a:spcPts val="400"/>
+              </a:spcAft>
+            </a:pPr>
+            <a:r>
+              <a:rPr sz="1400" b="0" i="0">
+                <a:solidFill>
+                  <a:srgbClr val="FFFFFF"/>
+                </a:solidFill>
+                <a:latin typeface="Calibri"/>
+              </a:rPr>
+              <a:t>Nombre: Consultar historial clinico de una mascota</a:t>
+            </a:r>
+          </a:p>
+          <a:p>
+            <a:pPr>
+              <a:spcAft>
+                <a:spcPts val="400"/>
+              </a:spcAft>
+            </a:pPr>
+            <a:r>
+              <a:rPr sz="1400" b="0" i="0">
+                <a:solidFill>
+                  <a:srgbClr val="FFFFFF"/>
+                </a:solidFill>
+                <a:latin typeface="Calibri"/>
+              </a:rPr>
+              <a:t>Actor: Veterinario (consulta completa) / Auxiliar (consulta sin diagnostico)</a:t>
+            </a:r>
+          </a:p>
+          <a:p>
+            <a:pPr>
+              <a:spcAft>
+                <a:spcPts val="400"/>
+              </a:spcAft>
+            </a:pPr>
+            <a:r>
+              <a:rPr sz="1400" b="0" i="0">
+                <a:solidFill>
+                  <a:srgbClr val="FFFFFF"/>
+                </a:solidFill>
+                <a:latin typeface="Calibri"/>
+              </a:rPr>
+              <a:t>Descripcion: El sistema debe permitir consultar el historial de atenciones de una mascota a partir del documento del dueno.</a:t>
+            </a:r>
+          </a:p>
+          <a:p>
+            <a:pPr>
+              <a:spcAft>
+                <a:spcPts val="400"/>
+              </a:spcAft>
+            </a:pPr>
+            <a:r>
+              <a:rPr sz="1400" b="0" i="0">
+                <a:solidFill>
+                  <a:srgbClr val="FFFFFF"/>
+                </a:solidFill>
+                <a:latin typeface="Calibri"/>
+              </a:rPr>
+              <a:t>Entrada: documento del dueno o codigo de la mascota</a:t>
+            </a:r>
+          </a:p>
+          <a:p>
+            <a:pPr>
+              <a:spcAft>
+                <a:spcPts val="400"/>
+              </a:spcAft>
+            </a:pPr>
+            <a:r>
+              <a:rPr sz="1400" b="0" i="0">
+                <a:solidFill>
+                  <a:srgbClr val="FFFFFF"/>
+                </a:solidFill>
+                <a:latin typeface="Calibri"/>
+              </a:rPr>
+              <a:t>Salida: lista de atenciones con fecha, motivo, diagnostico y veterinario, ordenada de la mas reciente a la mas antigua</a:t>
+            </a:r>
+          </a:p>
+          <a:p>
+            <a:pPr>
+              <a:spcAft>
+                <a:spcPts val="400"/>
+              </a:spcAft>
+            </a:pPr>
+            <a:r>
+              <a:rPr sz="1400" b="0" i="0">
+                <a:solidFill>
+                  <a:srgbClr val="FFFFFF"/>
+                </a:solidFill>
+                <a:latin typeface="Calibri"/>
+              </a:rPr>
+              <a:t>Regla de negocio: RN-02 una mascota siempre pertenece a un unico dueno registrado</a:t>
+            </a:r>
+          </a:p>
+          <a:p>
+            <a:pPr>
+              <a:spcAft>
+                <a:spcPts val="400"/>
+              </a:spcAft>
+            </a:pPr>
+            <a:r>
+              <a:rPr sz="1400" b="0" i="0">
+                <a:solidFill>
+                  <a:srgbClr val="FFFFFF"/>
+                </a:solidFill>
+                <a:latin typeface="Calibri"/>
+              </a:rPr>
+              <a:t>Criterio de verificacion: dado un dueno con 12 atenciones, la busqueda por documento devuelve las 12 en 3 segundos o menos</a:t>
+            </a:r>
+          </a:p>
+          <a:p>
+            <a:pPr>
+              <a:spcAft>
+                <a:spcPts val="400"/>
+              </a:spcAft>
+            </a:pPr>
+            <a:r>
+              <a:rPr sz="1400" b="0" i="0">
+                <a:solidFill>
+                  <a:srgbClr val="FFFFFF"/>
+                </a:solidFill>
+                <a:latin typeface="Calibri"/>
+              </a:rPr>
+              <a:t>Prioridad MoSCoW: Must</a:t>
+            </a:r>
+          </a:p>
+          <a:p>
+            <a:pPr>
+              <a:spcAft>
+                <a:spcPts val="400"/>
+              </a:spcAft>
+            </a:pPr>
+            <a:r>
+              <a:rPr sz="1400" b="0" i="0">
+                <a:solidFill>
+                  <a:srgbClr val="FFFFFF"/>
+                </a:solidFill>
+                <a:latin typeface="Calibri"/>
+              </a:rPr>
+              <a:t>Origen: entrevista Dr. Ramirez, frase 2 (necesidad NEC-02)</a:t>
+            </a:r>
+          </a:p>
+          <a:p>
+            <a:pPr>
+              <a:spcAft>
+                <a:spcPts val="400"/>
+              </a:spcAft>
+            </a:pPr>
+            <a:r>
+              <a:rPr sz="1400" b="0" i="0">
+                <a:solidFill>
+                  <a:srgbClr val="FFFFFF"/>
+                </a:solidFill>
+                <a:latin typeface="Calibri"/>
+              </a:rPr>
+              <a:t>Trazabilidad: NEC-02 -&gt; RF-03 -&gt; CU-04 -&gt; Pantalla P-02 -&gt; Prueba PR-07</a:t>
+            </a:r>
+          </a:p>
+          <a:p>
+            <a:pPr>
+              <a:spcAft>
+                <a:spcPts val="400"/>
+              </a:spcAft>
+            </a:pPr>
+            <a:r>
+              <a:rPr sz="1400" b="0" i="0">
+                <a:solidFill>
+                  <a:srgbClr val="FFFFFF"/>
+                </a:solidFill>
+                <a:latin typeface="Calibri"/>
+              </a:rPr>
+              <a:t>Estado: aprobado por el cliente</a:t>
+            </a:r>
+          </a:p>
+        </p:txBody>
+      </p:sp>
+      <p:sp>
+        <p:nvSpPr>
+          <p:cNvPr id="9" name="TextBox 8"/>
+          <p:cNvSpPr txBox="1"/>
+          <p:nvPr/>
+        </p:nvSpPr>
+        <p:spPr>
+          <a:xfrm>
+            <a:off x="457200" y="6080760"/>
+            <a:ext cx="11277295" cy="320040"/>
+          </a:xfrm>
+          <a:prstGeom prst="rect">
+            <a:avLst/>
+          </a:prstGeom>
+          <a:noFill/>
+        </p:spPr>
+        <p:txBody>
+          <a:bodyPr wrap="square">
+            <a:spAutoFit/>
+          </a:bodyPr>
           <a:lstStyle/>
           <a:p>
             <a:pPr algn="ctr"/>
-          </a:p>
-        </p:txBody>
-      </p:sp>
-      <p:sp>
-        <p:nvSpPr>
-          <p:cNvPr id="10" name="Rounded Rectangle 9"/>
-          <p:cNvSpPr/>
-          <p:nvPr/>
-        </p:nvSpPr>
-        <p:spPr>
-          <a:xfrm>
-            <a:off x="594360" y="2532888"/>
-            <a:ext cx="438912" cy="438912"/>
-          </a:xfrm>
-          <a:prstGeom prst="roundRect">
-            <a:avLst>
-              <a:gd name="adj" fmla="val 12000"/>
-            </a:avLst>
-          </a:prstGeom>
-          <a:solidFill>
-            <a:srgbClr val="095292"/>
-          </a:solidFill>
-          <a:ln>
-            <a:noFill/>
-          </a:ln>
-        </p:spPr>
-        <p:style>
-          <a:lnRef idx="1">
-            <a:schemeClr val="accent1"/>
-          </a:lnRef>
-          <a:fillRef idx="3">
-            <a:schemeClr val="accent1"/>
-          </a:fillRef>
-          <a:effectRef idx="2">
-            <a:schemeClr val="accent1"/>
-          </a:effectRef>
-          <a:fontRef idx="minor">
-            <a:schemeClr val="lt1"/>
-          </a:fontRef>
-        </p:style>
-        <p:txBody>
-          <a:bodyPr rtlCol="0" anchor="ctr"/>
-          <a:lstStyle/>
-          <a:p>
-            <a:pPr algn="ctr"/>
-          </a:p>
-        </p:txBody>
-      </p:sp>
-      <p:sp>
-        <p:nvSpPr>
-          <p:cNvPr id="11" name="TextBox 10"/>
-          <p:cNvSpPr txBox="1"/>
-          <p:nvPr/>
-        </p:nvSpPr>
-        <p:spPr>
-          <a:xfrm>
-            <a:off x="594360" y="2532888"/>
-            <a:ext cx="438912" cy="438912"/>
-          </a:xfrm>
-          <a:prstGeom prst="rect">
-            <a:avLst/>
-          </a:prstGeom>
-          <a:noFill/>
-        </p:spPr>
-        <p:txBody>
-          <a:bodyPr wrap="square" anchor="ctr"/>
-          <a:lstStyle/>
-          <a:p>
-            <a:pPr algn="ctr"/>
-            <a:r>
-              <a:rPr sz="1600" b="1" i="0">
-                <a:solidFill>
-                  <a:srgbClr val="FFFFFF"/>
-                </a:solidFill>
-                <a:latin typeface="Calibri"/>
-              </a:rPr>
-              <a:t>2</a:t>
-            </a:r>
-          </a:p>
-        </p:txBody>
-      </p:sp>
-      <p:sp>
-        <p:nvSpPr>
-          <p:cNvPr id="12" name="TextBox 11"/>
-          <p:cNvSpPr txBox="1"/>
-          <p:nvPr/>
-        </p:nvSpPr>
-        <p:spPr>
-          <a:xfrm>
-            <a:off x="1188720" y="2368296"/>
-            <a:ext cx="10271455" cy="786384"/>
-          </a:xfrm>
-          <a:prstGeom prst="rect">
-            <a:avLst/>
-          </a:prstGeom>
-          <a:noFill/>
-        </p:spPr>
-        <p:txBody>
-          <a:bodyPr wrap="square" anchor="ctr"/>
-          <a:lstStyle/>
-          <a:p>
-            <a:r>
-              <a:rPr sz="1400" b="1" i="0">
-                <a:solidFill>
-                  <a:srgbClr val="095292"/>
-                </a:solidFill>
-                <a:latin typeface="Calibri"/>
-              </a:rPr>
-              <a:t>Paso 2: traduzca las necesidades a requisitos funcionales usando la plantilla el sistema debe permitir a &lt;actor&gt; &lt;accion&gt; &lt;objeto&gt;, hasta llegar a minimo 8 RF numerados de RF-01 a RF-08; ningun RF puede contener la palabra y uniendo dos capacidades distintas.</a:t>
-            </a:r>
-          </a:p>
-        </p:txBody>
-      </p:sp>
-      <p:sp>
-        <p:nvSpPr>
-          <p:cNvPr id="13" name="Rounded Rectangle 12"/>
-          <p:cNvSpPr/>
-          <p:nvPr/>
-        </p:nvSpPr>
-        <p:spPr>
-          <a:xfrm>
-            <a:off x="457200" y="3319272"/>
-            <a:ext cx="11277295" cy="950976"/>
-          </a:xfrm>
-          <a:prstGeom prst="roundRect">
-            <a:avLst>
-              <a:gd name="adj" fmla="val 12000"/>
-            </a:avLst>
-          </a:prstGeom>
-          <a:solidFill>
-            <a:srgbClr val="F2F2F2"/>
-          </a:solidFill>
-          <a:ln>
-            <a:noFill/>
-          </a:ln>
-        </p:spPr>
-        <p:style>
-          <a:lnRef idx="1">
-            <a:schemeClr val="accent1"/>
-          </a:lnRef>
-          <a:fillRef idx="3">
-            <a:schemeClr val="accent1"/>
-          </a:fillRef>
-          <a:effectRef idx="2">
-            <a:schemeClr val="accent1"/>
-          </a:effectRef>
-          <a:fontRef idx="minor">
-            <a:schemeClr val="lt1"/>
-          </a:fontRef>
-        </p:style>
-        <p:txBody>
-          <a:bodyPr rtlCol="0" anchor="ctr"/>
-          <a:lstStyle/>
-          <a:p>
-            <a:pPr algn="ctr"/>
-          </a:p>
-        </p:txBody>
-      </p:sp>
-      <p:sp>
-        <p:nvSpPr>
-          <p:cNvPr id="14" name="Rounded Rectangle 13"/>
-          <p:cNvSpPr/>
-          <p:nvPr/>
-        </p:nvSpPr>
-        <p:spPr>
-          <a:xfrm>
-            <a:off x="594360" y="3575304"/>
-            <a:ext cx="438912" cy="438912"/>
-          </a:xfrm>
-          <a:prstGeom prst="roundRect">
-            <a:avLst>
-              <a:gd name="adj" fmla="val 12000"/>
-            </a:avLst>
-          </a:prstGeom>
-          <a:solidFill>
-            <a:srgbClr val="095292"/>
-          </a:solidFill>
-          <a:ln>
-            <a:noFill/>
-          </a:ln>
-        </p:spPr>
-        <p:style>
-          <a:lnRef idx="1">
-            <a:schemeClr val="accent1"/>
-          </a:lnRef>
-          <a:fillRef idx="3">
-            <a:schemeClr val="accent1"/>
-          </a:fillRef>
-          <a:effectRef idx="2">
-            <a:schemeClr val="accent1"/>
-          </a:effectRef>
-          <a:fontRef idx="minor">
-            <a:schemeClr val="lt1"/>
-          </a:fontRef>
-        </p:style>
-        <p:txBody>
-          <a:bodyPr rtlCol="0" anchor="ctr"/>
-          <a:lstStyle/>
-          <a:p>
-            <a:pPr algn="ctr"/>
-          </a:p>
-        </p:txBody>
-      </p:sp>
-      <p:sp>
-        <p:nvSpPr>
-          <p:cNvPr id="15" name="TextBox 14"/>
-          <p:cNvSpPr txBox="1"/>
-          <p:nvPr/>
-        </p:nvSpPr>
-        <p:spPr>
-          <a:xfrm>
-            <a:off x="594360" y="3575304"/>
-            <a:ext cx="438912" cy="438912"/>
-          </a:xfrm>
-          <a:prstGeom prst="rect">
-            <a:avLst/>
-          </a:prstGeom>
-          <a:noFill/>
-        </p:spPr>
-        <p:txBody>
-          <a:bodyPr wrap="square" anchor="ctr"/>
-          <a:lstStyle/>
-          <a:p>
-            <a:pPr algn="ctr"/>
-            <a:r>
-              <a:rPr sz="1600" b="1" i="0">
-                <a:solidFill>
-                  <a:srgbClr val="FFFFFF"/>
-                </a:solidFill>
-                <a:latin typeface="Calibri"/>
-              </a:rPr>
-              <a:t>3</a:t>
-            </a:r>
-          </a:p>
-        </p:txBody>
-      </p:sp>
-      <p:sp>
-        <p:nvSpPr>
-          <p:cNvPr id="16" name="TextBox 15"/>
-          <p:cNvSpPr txBox="1"/>
-          <p:nvPr/>
-        </p:nvSpPr>
-        <p:spPr>
-          <a:xfrm>
-            <a:off x="1188720" y="3410712"/>
-            <a:ext cx="10271455" cy="786384"/>
-          </a:xfrm>
-          <a:prstGeom prst="rect">
-            <a:avLst/>
-          </a:prstGeom>
-          <a:noFill/>
-        </p:spPr>
-        <p:txBody>
-          <a:bodyPr wrap="square" anchor="ctr"/>
-          <a:lstStyle/>
-          <a:p>
-            <a:r>
-              <a:rPr sz="1500" b="1" i="0">
-                <a:solidFill>
-                  <a:srgbClr val="095292"/>
-                </a:solidFill>
-                <a:latin typeface="Calibri"/>
-              </a:rPr>
-              <a:t>Paso 3: derive 4 RNF, uno por categoria (desempeno, control de acceso, usabilidad y respaldo), y escriba en cada uno al menos un numero: segundos, cantidad de registros, frecuencia o porcentaje.</a:t>
-            </a:r>
-          </a:p>
-        </p:txBody>
-      </p:sp>
-      <p:sp>
-        <p:nvSpPr>
-          <p:cNvPr id="17" name="Rounded Rectangle 16"/>
-          <p:cNvSpPr/>
-          <p:nvPr/>
-        </p:nvSpPr>
-        <p:spPr>
-          <a:xfrm>
-            <a:off x="457200" y="4361688"/>
-            <a:ext cx="11277295" cy="950976"/>
-          </a:xfrm>
-          <a:prstGeom prst="roundRect">
-            <a:avLst>
-              <a:gd name="adj" fmla="val 12000"/>
-            </a:avLst>
-          </a:prstGeom>
-          <a:solidFill>
-            <a:srgbClr val="E8F4FA"/>
-          </a:solidFill>
-          <a:ln>
-            <a:noFill/>
-          </a:ln>
-        </p:spPr>
-        <p:style>
-          <a:lnRef idx="1">
-            <a:schemeClr val="accent1"/>
-          </a:lnRef>
-          <a:fillRef idx="3">
-            <a:schemeClr val="accent1"/>
-          </a:fillRef>
-          <a:effectRef idx="2">
-            <a:schemeClr val="accent1"/>
-          </a:effectRef>
-          <a:fontRef idx="minor">
-            <a:schemeClr val="lt1"/>
-          </a:fontRef>
-        </p:style>
-        <p:txBody>
-          <a:bodyPr rtlCol="0" anchor="ctr"/>
-          <a:lstStyle/>
-          <a:p>
-            <a:pPr algn="ctr"/>
-          </a:p>
-        </p:txBody>
-      </p:sp>
-      <p:sp>
-        <p:nvSpPr>
-          <p:cNvPr id="18" name="Rounded Rectangle 17"/>
-          <p:cNvSpPr/>
-          <p:nvPr/>
-        </p:nvSpPr>
-        <p:spPr>
-          <a:xfrm>
-            <a:off x="594360" y="4617720"/>
-            <a:ext cx="438912" cy="438912"/>
-          </a:xfrm>
-          <a:prstGeom prst="roundRect">
-            <a:avLst>
-              <a:gd name="adj" fmla="val 12000"/>
-            </a:avLst>
-          </a:prstGeom>
-          <a:solidFill>
-            <a:srgbClr val="095292"/>
-          </a:solidFill>
-          <a:ln>
-            <a:noFill/>
-          </a:ln>
-        </p:spPr>
-        <p:style>
-          <a:lnRef idx="1">
-            <a:schemeClr val="accent1"/>
-          </a:lnRef>
-          <a:fillRef idx="3">
-            <a:schemeClr val="accent1"/>
-          </a:fillRef>
-          <a:effectRef idx="2">
-            <a:schemeClr val="accent1"/>
-          </a:effectRef>
-          <a:fontRef idx="minor">
-            <a:schemeClr val="lt1"/>
-          </a:fontRef>
-        </p:style>
-        <p:txBody>
-          <a:bodyPr rtlCol="0" anchor="ctr"/>
-          <a:lstStyle/>
-          <a:p>
-            <a:pPr algn="ctr"/>
-          </a:p>
-        </p:txBody>
-      </p:sp>
-      <p:sp>
-        <p:nvSpPr>
-          <p:cNvPr id="19" name="TextBox 18"/>
-          <p:cNvSpPr txBox="1"/>
-          <p:nvPr/>
-        </p:nvSpPr>
-        <p:spPr>
-          <a:xfrm>
-            <a:off x="594360" y="4617720"/>
-            <a:ext cx="438912" cy="438912"/>
-          </a:xfrm>
-          <a:prstGeom prst="rect">
-            <a:avLst/>
-          </a:prstGeom>
-          <a:noFill/>
-        </p:spPr>
-        <p:txBody>
-          <a:bodyPr wrap="square" anchor="ctr"/>
-          <a:lstStyle/>
-          <a:p>
-            <a:pPr algn="ctr"/>
-            <a:r>
-              <a:rPr sz="1600" b="1" i="0">
-                <a:solidFill>
-                  <a:srgbClr val="FFFFFF"/>
-                </a:solidFill>
-                <a:latin typeface="Calibri"/>
-              </a:rPr>
-              <a:t>4</a:t>
-            </a:r>
-          </a:p>
-        </p:txBody>
-      </p:sp>
-      <p:sp>
-        <p:nvSpPr>
-          <p:cNvPr id="20" name="TextBox 19"/>
-          <p:cNvSpPr txBox="1"/>
-          <p:nvPr/>
-        </p:nvSpPr>
-        <p:spPr>
-          <a:xfrm>
-            <a:off x="1188720" y="4453128"/>
-            <a:ext cx="10271455" cy="786384"/>
-          </a:xfrm>
-          <a:prstGeom prst="rect">
-            <a:avLst/>
-          </a:prstGeom>
-          <a:noFill/>
-        </p:spPr>
-        <p:txBody>
-          <a:bodyPr wrap="square" anchor="ctr"/>
-          <a:lstStyle/>
-          <a:p>
-            <a:r>
-              <a:rPr sz="1500" b="1" i="0">
-                <a:solidFill>
-                  <a:srgbClr val="095292"/>
-                </a:solidFill>
-                <a:latin typeface="Calibri"/>
-              </a:rPr>
-              <a:t>Paso 4: asigne prioridad MoSCoW a los 12 requisitos, verifique que los Must no pasen de seis y justifique en una linea por que los dos Won't quedan fuera de esta version de VetCare.</a:t>
-            </a:r>
-          </a:p>
-        </p:txBody>
-      </p:sp>
-      <p:sp>
-        <p:nvSpPr>
-          <p:cNvPr id="21" name="Rounded Rectangle 20"/>
-          <p:cNvSpPr/>
-          <p:nvPr/>
-        </p:nvSpPr>
-        <p:spPr>
-          <a:xfrm>
-            <a:off x="457200" y="5404104"/>
-            <a:ext cx="11277295" cy="950976"/>
-          </a:xfrm>
-          <a:prstGeom prst="roundRect">
-            <a:avLst>
-              <a:gd name="adj" fmla="val 12000"/>
-            </a:avLst>
-          </a:prstGeom>
-          <a:solidFill>
-            <a:srgbClr val="F2F2F2"/>
-          </a:solidFill>
-          <a:ln>
-            <a:noFill/>
-          </a:ln>
-        </p:spPr>
-        <p:style>
-          <a:lnRef idx="1">
-            <a:schemeClr val="accent1"/>
-          </a:lnRef>
-          <a:fillRef idx="3">
-            <a:schemeClr val="accent1"/>
-          </a:fillRef>
-          <a:effectRef idx="2">
-            <a:schemeClr val="accent1"/>
-          </a:effectRef>
-          <a:fontRef idx="minor">
-            <a:schemeClr val="lt1"/>
-          </a:fontRef>
-        </p:style>
-        <p:txBody>
-          <a:bodyPr rtlCol="0" anchor="ctr"/>
-          <a:lstStyle/>
-          <a:p>
-            <a:pPr algn="ctr"/>
-          </a:p>
-        </p:txBody>
-      </p:sp>
-      <p:sp>
-        <p:nvSpPr>
-          <p:cNvPr id="22" name="Rounded Rectangle 21"/>
-          <p:cNvSpPr/>
-          <p:nvPr/>
-        </p:nvSpPr>
-        <p:spPr>
-          <a:xfrm>
-            <a:off x="594360" y="5660136"/>
-            <a:ext cx="438912" cy="438912"/>
-          </a:xfrm>
-          <a:prstGeom prst="roundRect">
-            <a:avLst>
-              <a:gd name="adj" fmla="val 12000"/>
-            </a:avLst>
-          </a:prstGeom>
-          <a:solidFill>
-            <a:srgbClr val="095292"/>
-          </a:solidFill>
-          <a:ln>
-            <a:noFill/>
-          </a:ln>
-        </p:spPr>
-        <p:style>
-          <a:lnRef idx="1">
-            <a:schemeClr val="accent1"/>
-          </a:lnRef>
-          <a:fillRef idx="3">
-            <a:schemeClr val="accent1"/>
-          </a:fillRef>
-          <a:effectRef idx="2">
-            <a:schemeClr val="accent1"/>
-          </a:effectRef>
-          <a:fontRef idx="minor">
-            <a:schemeClr val="lt1"/>
-          </a:fontRef>
-        </p:style>
-        <p:txBody>
-          <a:bodyPr rtlCol="0" anchor="ctr"/>
-          <a:lstStyle/>
-          <a:p>
-            <a:pPr algn="ctr"/>
-          </a:p>
-        </p:txBody>
-      </p:sp>
-      <p:sp>
-        <p:nvSpPr>
-          <p:cNvPr id="23" name="TextBox 22"/>
-          <p:cNvSpPr txBox="1"/>
-          <p:nvPr/>
-        </p:nvSpPr>
-        <p:spPr>
-          <a:xfrm>
-            <a:off x="594360" y="5660136"/>
-            <a:ext cx="438912" cy="438912"/>
-          </a:xfrm>
-          <a:prstGeom prst="rect">
-            <a:avLst/>
-          </a:prstGeom>
-          <a:noFill/>
-        </p:spPr>
-        <p:txBody>
-          <a:bodyPr wrap="square" anchor="ctr"/>
-          <a:lstStyle/>
-          <a:p>
-            <a:pPr algn="ctr"/>
-            <a:r>
-              <a:rPr sz="1600" b="1" i="0">
-                <a:solidFill>
-                  <a:srgbClr val="FFFFFF"/>
-                </a:solidFill>
-                <a:latin typeface="Calibri"/>
-              </a:rPr>
-              <a:t>5</a:t>
-            </a:r>
-          </a:p>
-        </p:txBody>
-      </p:sp>
-      <p:sp>
-        <p:nvSpPr>
-          <p:cNvPr id="24" name="TextBox 23"/>
-          <p:cNvSpPr txBox="1"/>
-          <p:nvPr/>
-        </p:nvSpPr>
-        <p:spPr>
-          <a:xfrm>
-            <a:off x="1188720" y="5495544"/>
-            <a:ext cx="10271455" cy="786384"/>
-          </a:xfrm>
-          <a:prstGeom prst="rect">
-            <a:avLst/>
-          </a:prstGeom>
-          <a:noFill/>
-        </p:spPr>
-        <p:txBody>
-          <a:bodyPr wrap="square" anchor="ctr"/>
-          <a:lstStyle/>
-          <a:p>
-            <a:r>
-              <a:rPr sz="1500" b="1" i="0">
-                <a:solidFill>
-                  <a:srgbClr val="095292"/>
-                </a:solidFill>
-                <a:latin typeface="Calibri"/>
-              </a:rPr>
-              <a:t>Paso 5: complete la matriz de trazabilidad con las columnas Necesidad, RF/RNF, Pantalla prevista y Prueba de aceptacion, exporte el documento a PDF y subalo a la plataforma del curso con el nombre RF-RNF-VetCare-&lt;sus apellidos&gt;.pdf.</a:t>
-            </a:r>
-          </a:p>
-        </p:txBody>
-      </p:sp>
-      <p:sp>
-        <p:nvSpPr>
-          <p:cNvPr id="25" name="TextBox 24"/>
+            <a:r>
+              <a:rPr sz="1200" b="0" i="1">
+                <a:solidFill>
+                  <a:srgbClr val="666666"/>
+                </a:solidFill>
+                <a:latin typeface="Calibri"/>
+              </a:rPr>
+              <a:t>Un requisito sin criterio de verificacion y sin origen es una opinion con numero de identificacion.</a:t>
+            </a:r>
+          </a:p>
+        </p:txBody>
+      </p:sp>
+      <p:sp>
+        <p:nvSpPr>
+          <p:cNvPr id="10" name="TextBox 9"/>
           <p:cNvSpPr txBox="1"/>
           <p:nvPr/>
         </p:nvSpPr>
@@ -4575,154 +4175,21 @@
                 </a:solidFill>
                 <a:latin typeface="Calibri"/>
               </a:rPr>
-              <a:t>Antes de entregar — autochequeo</a:t>
-            </a:r>
-          </a:p>
-        </p:txBody>
-      </p:sp>
-      <p:sp>
-        <p:nvSpPr>
-          <p:cNvPr id="5" name="Rounded Rectangle 4"/>
-          <p:cNvSpPr/>
-          <p:nvPr/>
-        </p:nvSpPr>
-        <p:spPr>
-          <a:xfrm>
-            <a:off x="457200" y="1261872"/>
-            <a:ext cx="11277295" cy="566928"/>
-          </a:xfrm>
-          <a:prstGeom prst="roundRect">
-            <a:avLst>
-              <a:gd name="adj" fmla="val 12000"/>
-            </a:avLst>
-          </a:prstGeom>
-          <a:solidFill>
-            <a:srgbClr val="F2F2F2"/>
-          </a:solidFill>
-          <a:ln>
-            <a:noFill/>
-          </a:ln>
-        </p:spPr>
-        <p:style>
-          <a:lnRef idx="1">
-            <a:schemeClr val="accent1"/>
-          </a:lnRef>
-          <a:fillRef idx="3">
-            <a:schemeClr val="accent1"/>
-          </a:fillRef>
-          <a:effectRef idx="2">
-            <a:schemeClr val="accent1"/>
-          </a:effectRef>
-          <a:fontRef idx="minor">
-            <a:schemeClr val="lt1"/>
-          </a:fontRef>
-        </p:style>
-        <p:txBody>
-          <a:bodyPr rtlCol="0" anchor="ctr"/>
-          <a:lstStyle/>
-          <a:p>
-            <a:pPr algn="ctr"/>
-          </a:p>
-        </p:txBody>
-      </p:sp>
-      <p:sp>
-        <p:nvSpPr>
-          <p:cNvPr id="6" name="Rectangle 5"/>
-          <p:cNvSpPr/>
-          <p:nvPr/>
-        </p:nvSpPr>
-        <p:spPr>
-          <a:xfrm>
-            <a:off x="640080" y="1408175"/>
-            <a:ext cx="274320" cy="274320"/>
-          </a:xfrm>
-          <a:prstGeom prst="rect">
-            <a:avLst/>
-          </a:prstGeom>
-          <a:solidFill>
-            <a:srgbClr val="FFFFFF"/>
-          </a:solidFill>
-          <a:ln>
-            <a:solidFill>
-              <a:srgbClr val="333333"/>
-            </a:solidFill>
-          </a:ln>
-        </p:spPr>
-        <p:style>
-          <a:lnRef idx="1">
-            <a:schemeClr val="accent1"/>
-          </a:lnRef>
-          <a:fillRef idx="3">
-            <a:schemeClr val="accent1"/>
-          </a:fillRef>
-          <a:effectRef idx="2">
-            <a:schemeClr val="accent1"/>
-          </a:effectRef>
-          <a:fontRef idx="minor">
-            <a:schemeClr val="lt1"/>
-          </a:fontRef>
-        </p:style>
-        <p:txBody>
-          <a:bodyPr rtlCol="0" anchor="ctr"/>
-          <a:lstStyle/>
-          <a:p>
-            <a:pPr algn="ctr"/>
-          </a:p>
-        </p:txBody>
-      </p:sp>
-      <p:sp>
-        <p:nvSpPr>
-          <p:cNvPr id="7" name="Rectangle 6"/>
-          <p:cNvSpPr/>
-          <p:nvPr/>
-        </p:nvSpPr>
-        <p:spPr>
-          <a:xfrm>
-            <a:off x="640080" y="1408175"/>
-            <a:ext cx="73152" cy="274320"/>
-          </a:xfrm>
-          <a:prstGeom prst="rect">
-            <a:avLst/>
-          </a:prstGeom>
-          <a:solidFill>
-            <a:srgbClr val="269CCB"/>
-          </a:solidFill>
-          <a:ln>
-            <a:noFill/>
-          </a:ln>
-        </p:spPr>
-        <p:style>
-          <a:lnRef idx="1">
-            <a:schemeClr val="accent1"/>
-          </a:lnRef>
-          <a:fillRef idx="3">
-            <a:schemeClr val="accent1"/>
-          </a:fillRef>
-          <a:effectRef idx="2">
-            <a:schemeClr val="accent1"/>
-          </a:effectRef>
-          <a:fontRef idx="minor">
-            <a:schemeClr val="lt1"/>
-          </a:fontRef>
-        </p:style>
-        <p:txBody>
-          <a:bodyPr rtlCol="0" anchor="ctr"/>
-          <a:lstStyle/>
-          <a:p>
-            <a:pPr algn="ctr"/>
-          </a:p>
-        </p:txBody>
-      </p:sp>
-      <p:sp>
-        <p:nvSpPr>
-          <p:cNvPr id="8" name="TextBox 7"/>
+              <a:t>Demo del dia</a:t>
+            </a:r>
+          </a:p>
+        </p:txBody>
+      </p:sp>
+      <p:sp>
+        <p:nvSpPr>
+          <p:cNvPr id="5" name="TextBox 4"/>
           <p:cNvSpPr txBox="1"/>
           <p:nvPr/>
         </p:nvSpPr>
         <p:spPr>
           <a:xfrm>
-            <a:off x="1097280" y="1353312"/>
-            <a:ext cx="10362895" cy="402336"/>
+            <a:off x="457200" y="1170432"/>
+            <a:ext cx="11277295" cy="5230368"/>
           </a:xfrm>
           <a:prstGeom prst="rect">
             <a:avLst/>
@@ -4730,354 +4197,99 @@
           <a:noFill/>
         </p:spPr>
         <p:txBody>
-          <a:bodyPr wrap="square" anchor="ctr"/>
-          <a:lstStyle/>
-          <a:p>
-            <a:r>
-              <a:rPr sz="1500" b="0" i="0">
+          <a:bodyPr wrap="square">
+            <a:spAutoFit/>
+          </a:bodyPr>
+          <a:lstStyle/>
+          <a:p>
+            <a:pPr>
+              <a:spcAft>
+                <a:spcPts val="800"/>
+              </a:spcAft>
+            </a:pPr>
+            <a:r>
+              <a:rPr sz="2000" b="0" i="0">
                 <a:solidFill>
                   <a:srgbClr val="333333"/>
                 </a:solidFill>
                 <a:latin typeface="Calibri"/>
               </a:rPr>
-              <a:t>Con que prueba concreta, hecha en menos de dos minutos delante del Dr. Ramirez, demostraria que este requisito quedo cumplido?</a:t>
-            </a:r>
-          </a:p>
-        </p:txBody>
-      </p:sp>
-      <p:sp>
-        <p:nvSpPr>
-          <p:cNvPr id="9" name="Rounded Rectangle 8"/>
-          <p:cNvSpPr/>
-          <p:nvPr/>
-        </p:nvSpPr>
-        <p:spPr>
-          <a:xfrm>
-            <a:off x="457200" y="1938528"/>
-            <a:ext cx="11277295" cy="566928"/>
-          </a:xfrm>
-          <a:prstGeom prst="roundRect">
-            <a:avLst>
-              <a:gd name="adj" fmla="val 12000"/>
-            </a:avLst>
-          </a:prstGeom>
-          <a:solidFill>
-            <a:srgbClr val="F2F2F2"/>
-          </a:solidFill>
-          <a:ln>
-            <a:noFill/>
-          </a:ln>
-        </p:spPr>
-        <p:style>
-          <a:lnRef idx="1">
-            <a:schemeClr val="accent1"/>
-          </a:lnRef>
-          <a:fillRef idx="3">
-            <a:schemeClr val="accent1"/>
-          </a:fillRef>
-          <a:effectRef idx="2">
-            <a:schemeClr val="accent1"/>
-          </a:effectRef>
-          <a:fontRef idx="minor">
-            <a:schemeClr val="lt1"/>
-          </a:fontRef>
-        </p:style>
-        <p:txBody>
-          <a:bodyPr rtlCol="0" anchor="ctr"/>
-          <a:lstStyle/>
-          <a:p>
-            <a:pPr algn="ctr"/>
-          </a:p>
-        </p:txBody>
-      </p:sp>
-      <p:sp>
-        <p:nvSpPr>
-          <p:cNvPr id="10" name="Rectangle 9"/>
-          <p:cNvSpPr/>
-          <p:nvPr/>
-        </p:nvSpPr>
-        <p:spPr>
-          <a:xfrm>
-            <a:off x="640080" y="2084832"/>
-            <a:ext cx="274320" cy="274320"/>
-          </a:xfrm>
-          <a:prstGeom prst="rect">
-            <a:avLst/>
-          </a:prstGeom>
-          <a:solidFill>
-            <a:srgbClr val="FFFFFF"/>
-          </a:solidFill>
-          <a:ln>
-            <a:solidFill>
-              <a:srgbClr val="333333"/>
-            </a:solidFill>
-          </a:ln>
-        </p:spPr>
-        <p:style>
-          <a:lnRef idx="1">
-            <a:schemeClr val="accent1"/>
-          </a:lnRef>
-          <a:fillRef idx="3">
-            <a:schemeClr val="accent1"/>
-          </a:fillRef>
-          <a:effectRef idx="2">
-            <a:schemeClr val="accent1"/>
-          </a:effectRef>
-          <a:fontRef idx="minor">
-            <a:schemeClr val="lt1"/>
-          </a:fontRef>
-        </p:style>
-        <p:txBody>
-          <a:bodyPr rtlCol="0" anchor="ctr"/>
-          <a:lstStyle/>
-          <a:p>
-            <a:pPr algn="ctr"/>
-          </a:p>
-        </p:txBody>
-      </p:sp>
-      <p:sp>
-        <p:nvSpPr>
-          <p:cNvPr id="11" name="Rectangle 10"/>
-          <p:cNvSpPr/>
-          <p:nvPr/>
-        </p:nvSpPr>
-        <p:spPr>
-          <a:xfrm>
-            <a:off x="640080" y="2084832"/>
-            <a:ext cx="73152" cy="274320"/>
-          </a:xfrm>
-          <a:prstGeom prst="rect">
-            <a:avLst/>
-          </a:prstGeom>
-          <a:solidFill>
-            <a:srgbClr val="269CCB"/>
-          </a:solidFill>
-          <a:ln>
-            <a:noFill/>
-          </a:ln>
-        </p:spPr>
-        <p:style>
-          <a:lnRef idx="1">
-            <a:schemeClr val="accent1"/>
-          </a:lnRef>
-          <a:fillRef idx="3">
-            <a:schemeClr val="accent1"/>
-          </a:fillRef>
-          <a:effectRef idx="2">
-            <a:schemeClr val="accent1"/>
-          </a:effectRef>
-          <a:fontRef idx="minor">
-            <a:schemeClr val="lt1"/>
-          </a:fontRef>
-        </p:style>
-        <p:txBody>
-          <a:bodyPr rtlCol="0" anchor="ctr"/>
-          <a:lstStyle/>
-          <a:p>
-            <a:pPr algn="ctr"/>
-          </a:p>
-        </p:txBody>
-      </p:sp>
-      <p:sp>
-        <p:nvSpPr>
-          <p:cNvPr id="12" name="TextBox 11"/>
-          <p:cNvSpPr txBox="1"/>
-          <p:nvPr/>
-        </p:nvSpPr>
-        <p:spPr>
-          <a:xfrm>
-            <a:off x="1097280" y="2029968"/>
-            <a:ext cx="10362895" cy="402336"/>
-          </a:xfrm>
-          <a:prstGeom prst="rect">
-            <a:avLst/>
-          </a:prstGeom>
-          <a:noFill/>
-        </p:spPr>
-        <p:txBody>
-          <a:bodyPr wrap="square" anchor="ctr"/>
-          <a:lstStyle/>
-          <a:p>
-            <a:r>
-              <a:rPr sz="1500" b="0" i="0">
+              <a:t>–   </a:t>
+            </a:r>
+            <a:r>
+              <a:rPr sz="2000" b="1" i="0">
                 <a:solidFill>
                   <a:srgbClr val="333333"/>
                 </a:solidFill>
                 <a:latin typeface="Calibri"/>
               </a:rPr>
-              <a:t>Si borro este requisito de la lista, VetCare deja de resolver alguno de los tres dolores de Huellitas o solamente queda menos vistoso?</a:t>
-            </a:r>
-          </a:p>
-        </p:txBody>
-      </p:sp>
-      <p:sp>
-        <p:nvSpPr>
-          <p:cNvPr id="13" name="Rounded Rectangle 12"/>
-          <p:cNvSpPr/>
-          <p:nvPr/>
-        </p:nvSpPr>
-        <p:spPr>
-          <a:xfrm>
-            <a:off x="457200" y="2615184"/>
-            <a:ext cx="11277295" cy="566928"/>
-          </a:xfrm>
-          <a:prstGeom prst="roundRect">
-            <a:avLst>
-              <a:gd name="adj" fmla="val 12000"/>
-            </a:avLst>
-          </a:prstGeom>
-          <a:solidFill>
-            <a:srgbClr val="F2F2F2"/>
-          </a:solidFill>
-          <a:ln>
-            <a:noFill/>
-          </a:ln>
-        </p:spPr>
-        <p:style>
-          <a:lnRef idx="1">
-            <a:schemeClr val="accent1"/>
-          </a:lnRef>
-          <a:fillRef idx="3">
-            <a:schemeClr val="accent1"/>
-          </a:fillRef>
-          <a:effectRef idx="2">
-            <a:schemeClr val="accent1"/>
-          </a:effectRef>
-          <a:fontRef idx="minor">
-            <a:schemeClr val="lt1"/>
-          </a:fontRef>
-        </p:style>
-        <p:txBody>
-          <a:bodyPr rtlCol="0" anchor="ctr"/>
-          <a:lstStyle/>
-          <a:p>
-            <a:pPr algn="ctr"/>
-          </a:p>
-        </p:txBody>
-      </p:sp>
-      <p:sp>
-        <p:nvSpPr>
-          <p:cNvPr id="14" name="Rectangle 13"/>
-          <p:cNvSpPr/>
-          <p:nvPr/>
-        </p:nvSpPr>
-        <p:spPr>
-          <a:xfrm>
-            <a:off x="640080" y="2761488"/>
-            <a:ext cx="274320" cy="274320"/>
-          </a:xfrm>
-          <a:prstGeom prst="rect">
-            <a:avLst/>
-          </a:prstGeom>
-          <a:solidFill>
-            <a:srgbClr val="FFFFFF"/>
-          </a:solidFill>
-          <a:ln>
-            <a:solidFill>
-              <a:srgbClr val="333333"/>
-            </a:solidFill>
-          </a:ln>
-        </p:spPr>
-        <p:style>
-          <a:lnRef idx="1">
-            <a:schemeClr val="accent1"/>
-          </a:lnRef>
-          <a:fillRef idx="3">
-            <a:schemeClr val="accent1"/>
-          </a:fillRef>
-          <a:effectRef idx="2">
-            <a:schemeClr val="accent1"/>
-          </a:effectRef>
-          <a:fontRef idx="minor">
-            <a:schemeClr val="lt1"/>
-          </a:fontRef>
-        </p:style>
-        <p:txBody>
-          <a:bodyPr rtlCol="0" anchor="ctr"/>
-          <a:lstStyle/>
-          <a:p>
-            <a:pPr algn="ctr"/>
-          </a:p>
-        </p:txBody>
-      </p:sp>
-      <p:sp>
-        <p:nvSpPr>
-          <p:cNvPr id="15" name="Rectangle 14"/>
-          <p:cNvSpPr/>
-          <p:nvPr/>
-        </p:nvSpPr>
-        <p:spPr>
-          <a:xfrm>
-            <a:off x="640080" y="2761488"/>
-            <a:ext cx="73152" cy="274320"/>
-          </a:xfrm>
-          <a:prstGeom prst="rect">
-            <a:avLst/>
-          </a:prstGeom>
-          <a:solidFill>
-            <a:srgbClr val="269CCB"/>
-          </a:solidFill>
-          <a:ln>
-            <a:noFill/>
-          </a:ln>
-        </p:spPr>
-        <p:style>
-          <a:lnRef idx="1">
-            <a:schemeClr val="accent1"/>
-          </a:lnRef>
-          <a:fillRef idx="3">
-            <a:schemeClr val="accent1"/>
-          </a:fillRef>
-          <a:effectRef idx="2">
-            <a:schemeClr val="accent1"/>
-          </a:effectRef>
-          <a:fontRef idx="minor">
-            <a:schemeClr val="lt1"/>
-          </a:fontRef>
-        </p:style>
-        <p:txBody>
-          <a:bodyPr rtlCol="0" anchor="ctr"/>
-          <a:lstStyle/>
-          <a:p>
-            <a:pPr algn="ctr"/>
-          </a:p>
-        </p:txBody>
-      </p:sp>
-      <p:sp>
-        <p:nvSpPr>
-          <p:cNvPr id="16" name="TextBox 15"/>
-          <p:cNvSpPr txBox="1"/>
-          <p:nvPr/>
-        </p:nvSpPr>
-        <p:spPr>
-          <a:xfrm>
-            <a:off x="1097280" y="2706624"/>
-            <a:ext cx="10362895" cy="402336"/>
-          </a:xfrm>
-          <a:prstGeom prst="rect">
-            <a:avLst/>
-          </a:prstGeom>
-          <a:noFill/>
-        </p:spPr>
-        <p:txBody>
-          <a:bodyPr wrap="square" anchor="ctr"/>
-          <a:lstStyle/>
-          <a:p>
-            <a:r>
-              <a:rPr sz="1500" b="0" i="0">
+              <a:t>Herramienta:</a:t>
+            </a:r>
+            <a:r>
+              <a:rPr sz="2000" b="0" i="0">
                 <a:solidFill>
                   <a:srgbClr val="333333"/>
                 </a:solidFill>
                 <a:latin typeface="Calibri"/>
               </a:rPr>
-              <a:t>Esta frase describe una sola accion de un solo actor, o estoy escondiendo dos o tres requisitos detras de una y?</a:t>
-            </a:r>
-          </a:p>
-        </p:txBody>
-      </p:sp>
-      <p:sp>
-        <p:nvSpPr>
-          <p:cNvPr id="17" name="TextBox 16"/>
+              <a:t> Google Docs · draw.io</a:t>
+            </a:r>
+          </a:p>
+          <a:p>
+            <a:pPr>
+              <a:spcAft>
+                <a:spcPts val="800"/>
+              </a:spcAft>
+            </a:pPr>
+            <a:r>
+              <a:rPr sz="2000" b="0" i="0">
+                <a:solidFill>
+                  <a:srgbClr val="333333"/>
+                </a:solidFill>
+                <a:latin typeface="Calibri"/>
+              </a:rPr>
+              <a:t>–   </a:t>
+            </a:r>
+            <a:r>
+              <a:rPr sz="2000" b="1" i="0">
+                <a:solidFill>
+                  <a:srgbClr val="333333"/>
+                </a:solidFill>
+                <a:latin typeface="Calibri"/>
+              </a:rPr>
+              <a:t>Demo:</a:t>
+            </a:r>
+            <a:r>
+              <a:rPr sz="2000" b="0" i="0">
+                <a:solidFill>
+                  <a:srgbClr val="333333"/>
+                </a:solidFill>
+                <a:latin typeface="Calibri"/>
+              </a:rPr>
+              <a:t> El docente toma en vivo dos frases crudas de la entrevista al Dr. Ramirez y las convierte, frente al grupo, en un RF y un RNF usando la plantilla.</a:t>
+            </a:r>
+          </a:p>
+          <a:p>
+            <a:pPr>
+              <a:spcAft>
+                <a:spcPts val="800"/>
+              </a:spcAft>
+            </a:pPr>
+            <a:r>
+              <a:rPr sz="2000" b="0" i="0">
+                <a:solidFill>
+                  <a:srgbClr val="333333"/>
+                </a:solidFill>
+                <a:latin typeface="Calibri"/>
+              </a:rPr>
+              <a:t>–   Mismo dominio VetCare — no otro ejemplo. Aqui se diseña, no se programa.</a:t>
+            </a:r>
+          </a:p>
+        </p:txBody>
+      </p:sp>
+      <p:sp>
+        <p:nvSpPr>
+          <p:cNvPr id="6" name="TextBox 5"/>
           <p:cNvSpPr txBox="1"/>
           <p:nvPr/>
         </p:nvSpPr>
@@ -5145,7 +4357,7 @@
         <p:spPr>
           <a:xfrm>
             <a:off x="0" y="0"/>
-            <a:ext cx="12191695" cy="960120"/>
+            <a:ext cx="12191695" cy="1170432"/>
           </a:xfrm>
           <a:prstGeom prst="rect">
             <a:avLst/>
@@ -5187,7 +4399,7 @@
         </p:nvSpPr>
         <p:spPr>
           <a:xfrm>
-            <a:off x="0" y="960120"/>
+            <a:off x="0" y="1170432"/>
             <a:ext cx="12191695" cy="41148"/>
           </a:xfrm>
           <a:prstGeom prst="rect">
@@ -5231,7 +4443,7 @@
         <p:spPr>
           <a:xfrm>
             <a:off x="457200" y="164592"/>
-            <a:ext cx="11277295" cy="502920"/>
+            <a:ext cx="11277295" cy="384048"/>
           </a:xfrm>
           <a:prstGeom prst="rect">
             <a:avLst/>
@@ -5251,7 +4463,7 @@
                 </a:solidFill>
                 <a:latin typeface="Calibri"/>
               </a:rPr>
-              <a:t>Criterios de exito / entregable</a:t>
+              <a:t>Herramientas de hoy</a:t>
             </a:r>
           </a:p>
         </p:txBody>
@@ -5264,8 +4476,8 @@
         </p:nvSpPr>
         <p:spPr>
           <a:xfrm>
-            <a:off x="457200" y="1170432"/>
-            <a:ext cx="11277295" cy="5230368"/>
+            <a:off x="457200" y="566928"/>
+            <a:ext cx="11277295" cy="411480"/>
           </a:xfrm>
           <a:prstGeom prst="rect">
             <a:avLst/>
@@ -5278,214 +4490,633 @@
           </a:bodyPr>
           <a:lstStyle/>
           <a:p>
-            <a:pPr>
-              <a:spcAft>
-                <a:spcPts val="800"/>
-              </a:spcAft>
+            <a:r>
+              <a:rPr sz="1400" b="0" i="0">
+                <a:solidFill>
+                  <a:srgbClr val="B8D8EE"/>
+                </a:solidFill>
+                <a:latin typeface="Calibri"/>
+              </a:rPr>
+              <a:t>Gratis · funcionan en el navegador</a:t>
+            </a:r>
+          </a:p>
+        </p:txBody>
+      </p:sp>
+      <p:sp>
+        <p:nvSpPr>
+          <p:cNvPr id="6" name="Rounded Rectangle 5"/>
+          <p:cNvSpPr/>
+          <p:nvPr/>
+        </p:nvSpPr>
+        <p:spPr>
+          <a:xfrm>
+            <a:off x="457200" y="1591056"/>
+            <a:ext cx="3624986" cy="2331720"/>
+          </a:xfrm>
+          <a:prstGeom prst="roundRect">
+            <a:avLst>
+              <a:gd name="adj" fmla="val 12000"/>
+            </a:avLst>
+          </a:prstGeom>
+          <a:solidFill>
+            <a:srgbClr val="F2F2F2"/>
+          </a:solidFill>
+          <a:ln>
+            <a:noFill/>
+          </a:ln>
+        </p:spPr>
+        <p:style>
+          <a:lnRef idx="1">
+            <a:schemeClr val="accent1"/>
+          </a:lnRef>
+          <a:fillRef idx="3">
+            <a:schemeClr val="accent1"/>
+          </a:fillRef>
+          <a:effectRef idx="2">
+            <a:schemeClr val="accent1"/>
+          </a:effectRef>
+          <a:fontRef idx="minor">
+            <a:schemeClr val="lt1"/>
+          </a:fontRef>
+        </p:style>
+        <p:txBody>
+          <a:bodyPr rtlCol="0" anchor="ctr"/>
+          <a:lstStyle/>
+          <a:p>
+            <a:pPr algn="ctr"/>
+          </a:p>
+        </p:txBody>
+      </p:sp>
+      <p:sp>
+        <p:nvSpPr>
+          <p:cNvPr id="7" name="Rectangle 6"/>
+          <p:cNvSpPr/>
+          <p:nvPr/>
+        </p:nvSpPr>
+        <p:spPr>
+          <a:xfrm>
+            <a:off x="457200" y="1591056"/>
+            <a:ext cx="3624986" cy="64008"/>
+          </a:xfrm>
+          <a:prstGeom prst="rect">
+            <a:avLst/>
+          </a:prstGeom>
+          <a:solidFill>
+            <a:srgbClr val="095292"/>
+          </a:solidFill>
+          <a:ln>
+            <a:noFill/>
+          </a:ln>
+        </p:spPr>
+        <p:style>
+          <a:lnRef idx="1">
+            <a:schemeClr val="accent1"/>
+          </a:lnRef>
+          <a:fillRef idx="3">
+            <a:schemeClr val="accent1"/>
+          </a:fillRef>
+          <a:effectRef idx="2">
+            <a:schemeClr val="accent1"/>
+          </a:effectRef>
+          <a:fontRef idx="minor">
+            <a:schemeClr val="lt1"/>
+          </a:fontRef>
+        </p:style>
+        <p:txBody>
+          <a:bodyPr rtlCol="0" anchor="ctr"/>
+          <a:lstStyle/>
+          <a:p>
+            <a:pPr algn="ctr"/>
+          </a:p>
+        </p:txBody>
+      </p:sp>
+      <p:sp>
+        <p:nvSpPr>
+          <p:cNvPr id="8" name="Rectangle 7"/>
+          <p:cNvSpPr/>
+          <p:nvPr/>
+        </p:nvSpPr>
+        <p:spPr>
+          <a:xfrm>
+            <a:off x="457200" y="1655064"/>
+            <a:ext cx="3624986" cy="27432"/>
+          </a:xfrm>
+          <a:prstGeom prst="rect">
+            <a:avLst/>
+          </a:prstGeom>
+          <a:solidFill>
+            <a:srgbClr val="FFD000"/>
+          </a:solidFill>
+          <a:ln>
+            <a:noFill/>
+          </a:ln>
+        </p:spPr>
+        <p:style>
+          <a:lnRef idx="1">
+            <a:schemeClr val="accent1"/>
+          </a:lnRef>
+          <a:fillRef idx="3">
+            <a:schemeClr val="accent1"/>
+          </a:fillRef>
+          <a:effectRef idx="2">
+            <a:schemeClr val="accent1"/>
+          </a:effectRef>
+          <a:fontRef idx="minor">
+            <a:schemeClr val="lt1"/>
+          </a:fontRef>
+        </p:style>
+        <p:txBody>
+          <a:bodyPr rtlCol="0" anchor="ctr"/>
+          <a:lstStyle/>
+          <a:p>
+            <a:pPr algn="ctr"/>
+          </a:p>
+        </p:txBody>
+      </p:sp>
+      <p:pic>
+        <p:nvPicPr>
+          <p:cNvPr id="9" name="Picture 8" descr="drawio.png"/>
+          <p:cNvPicPr>
+            <a:picLocks noChangeAspect="1"/>
+          </p:cNvPicPr>
+          <p:nvPr/>
+        </p:nvPicPr>
+        <p:blipFill>
+          <a:blip r:embed="rId2"/>
+          <a:stretch>
+            <a:fillRect/>
+          </a:stretch>
+        </p:blipFill>
+        <p:spPr>
+          <a:xfrm>
+            <a:off x="1643329" y="1847087"/>
+            <a:ext cx="1252728" cy="1252728"/>
+          </a:xfrm>
+          <a:prstGeom prst="rect">
+            <a:avLst/>
+          </a:prstGeom>
+        </p:spPr>
+      </p:pic>
+      <p:sp>
+        <p:nvSpPr>
+          <p:cNvPr id="10" name="TextBox 9"/>
+          <p:cNvSpPr txBox="1"/>
+          <p:nvPr/>
+        </p:nvSpPr>
+        <p:spPr>
+          <a:xfrm>
+            <a:off x="530352" y="3191256"/>
+            <a:ext cx="3478682" cy="621792"/>
+          </a:xfrm>
+          <a:prstGeom prst="rect">
+            <a:avLst/>
+          </a:prstGeom>
+          <a:noFill/>
+        </p:spPr>
+        <p:txBody>
+          <a:bodyPr wrap="square" anchor="t"/>
+          <a:lstStyle/>
+          <a:p>
+            <a:pPr algn="ctr"/>
+            <a:r>
+              <a:rPr sz="1300" b="1" i="0">
+                <a:solidFill>
+                  <a:srgbClr val="095292"/>
+                </a:solidFill>
+                <a:latin typeface="Calibri"/>
+              </a:rPr>
+              <a:t>Draw.Io</a:t>
+            </a:r>
+          </a:p>
+          <a:p>
+            <a:pPr algn="ctr">
+              <a:spcBef>
+                <a:spcPts val="200"/>
+              </a:spcBef>
             </a:pPr>
             <a:r>
-              <a:rPr sz="2000" b="0" i="0">
-                <a:solidFill>
-                  <a:srgbClr val="333333"/>
-                </a:solidFill>
-                <a:latin typeface="Calibri"/>
-              </a:rPr>
-              <a:t>–   </a:t>
-            </a:r>
-            <a:r>
-              <a:rPr sz="2000" b="1" i="0">
-                <a:solidFill>
-                  <a:srgbClr val="333333"/>
-                </a:solidFill>
-                <a:latin typeface="Calibri"/>
-              </a:rPr>
-              <a:t>Entregable:</a:t>
-            </a:r>
-            <a:r>
-              <a:rPr sz="2000" b="0" i="0">
-                <a:solidFill>
-                  <a:srgbClr val="333333"/>
-                </a:solidFill>
-                <a:latin typeface="Calibri"/>
-              </a:rPr>
-              <a:t> Documento de requisitos de VetCare en PDF, con minimo 8 RF, 4 RNF cuantificados, priorizacion MoSCoW y matriz de trazabilidad, subido a la plataforma del curso.</a:t>
-            </a:r>
-          </a:p>
-          <a:p>
-            <a:pPr>
-              <a:spcAft>
-                <a:spcPts val="800"/>
-              </a:spcAft>
+              <a:rPr sz="1000" b="0" i="0">
+                <a:solidFill>
+                  <a:srgbClr val="666666"/>
+                </a:solidFill>
+                <a:latin typeface="Calibri"/>
+              </a:rPr>
+              <a:t>Diagramas UML y de contexto</a:t>
+            </a:r>
+          </a:p>
+        </p:txBody>
+      </p:sp>
+      <p:sp>
+        <p:nvSpPr>
+          <p:cNvPr id="11" name="Rounded Rectangle 10"/>
+          <p:cNvSpPr/>
+          <p:nvPr/>
+        </p:nvSpPr>
+        <p:spPr>
+          <a:xfrm>
+            <a:off x="4283354" y="1591056"/>
+            <a:ext cx="3624986" cy="2331720"/>
+          </a:xfrm>
+          <a:prstGeom prst="roundRect">
+            <a:avLst>
+              <a:gd name="adj" fmla="val 12000"/>
+            </a:avLst>
+          </a:prstGeom>
+          <a:solidFill>
+            <a:srgbClr val="F2F2F2"/>
+          </a:solidFill>
+          <a:ln>
+            <a:noFill/>
+          </a:ln>
+        </p:spPr>
+        <p:style>
+          <a:lnRef idx="1">
+            <a:schemeClr val="accent1"/>
+          </a:lnRef>
+          <a:fillRef idx="3">
+            <a:schemeClr val="accent1"/>
+          </a:fillRef>
+          <a:effectRef idx="2">
+            <a:schemeClr val="accent1"/>
+          </a:effectRef>
+          <a:fontRef idx="minor">
+            <a:schemeClr val="lt1"/>
+          </a:fontRef>
+        </p:style>
+        <p:txBody>
+          <a:bodyPr rtlCol="0" anchor="ctr"/>
+          <a:lstStyle/>
+          <a:p>
+            <a:pPr algn="ctr"/>
+          </a:p>
+        </p:txBody>
+      </p:sp>
+      <p:sp>
+        <p:nvSpPr>
+          <p:cNvPr id="12" name="Rectangle 11"/>
+          <p:cNvSpPr/>
+          <p:nvPr/>
+        </p:nvSpPr>
+        <p:spPr>
+          <a:xfrm>
+            <a:off x="4283354" y="1591056"/>
+            <a:ext cx="3624986" cy="64008"/>
+          </a:xfrm>
+          <a:prstGeom prst="rect">
+            <a:avLst/>
+          </a:prstGeom>
+          <a:solidFill>
+            <a:srgbClr val="095292"/>
+          </a:solidFill>
+          <a:ln>
+            <a:noFill/>
+          </a:ln>
+        </p:spPr>
+        <p:style>
+          <a:lnRef idx="1">
+            <a:schemeClr val="accent1"/>
+          </a:lnRef>
+          <a:fillRef idx="3">
+            <a:schemeClr val="accent1"/>
+          </a:fillRef>
+          <a:effectRef idx="2">
+            <a:schemeClr val="accent1"/>
+          </a:effectRef>
+          <a:fontRef idx="minor">
+            <a:schemeClr val="lt1"/>
+          </a:fontRef>
+        </p:style>
+        <p:txBody>
+          <a:bodyPr rtlCol="0" anchor="ctr"/>
+          <a:lstStyle/>
+          <a:p>
+            <a:pPr algn="ctr"/>
+          </a:p>
+        </p:txBody>
+      </p:sp>
+      <p:sp>
+        <p:nvSpPr>
+          <p:cNvPr id="13" name="Rectangle 12"/>
+          <p:cNvSpPr/>
+          <p:nvPr/>
+        </p:nvSpPr>
+        <p:spPr>
+          <a:xfrm>
+            <a:off x="4283354" y="1655064"/>
+            <a:ext cx="3624986" cy="27432"/>
+          </a:xfrm>
+          <a:prstGeom prst="rect">
+            <a:avLst/>
+          </a:prstGeom>
+          <a:solidFill>
+            <a:srgbClr val="FFD000"/>
+          </a:solidFill>
+          <a:ln>
+            <a:noFill/>
+          </a:ln>
+        </p:spPr>
+        <p:style>
+          <a:lnRef idx="1">
+            <a:schemeClr val="accent1"/>
+          </a:lnRef>
+          <a:fillRef idx="3">
+            <a:schemeClr val="accent1"/>
+          </a:fillRef>
+          <a:effectRef idx="2">
+            <a:schemeClr val="accent1"/>
+          </a:effectRef>
+          <a:fontRef idx="minor">
+            <a:schemeClr val="lt1"/>
+          </a:fontRef>
+        </p:style>
+        <p:txBody>
+          <a:bodyPr rtlCol="0" anchor="ctr"/>
+          <a:lstStyle/>
+          <a:p>
+            <a:pPr algn="ctr"/>
+          </a:p>
+        </p:txBody>
+      </p:sp>
+      <p:pic>
+        <p:nvPicPr>
+          <p:cNvPr id="14" name="Picture 13" descr="google_docs.png"/>
+          <p:cNvPicPr>
+            <a:picLocks noChangeAspect="1"/>
+          </p:cNvPicPr>
+          <p:nvPr/>
+        </p:nvPicPr>
+        <p:blipFill>
+          <a:blip r:embed="rId3"/>
+          <a:stretch>
+            <a:fillRect/>
+          </a:stretch>
+        </p:blipFill>
+        <p:spPr>
+          <a:xfrm>
+            <a:off x="5469483" y="1847087"/>
+            <a:ext cx="1252728" cy="1252728"/>
+          </a:xfrm>
+          <a:prstGeom prst="rect">
+            <a:avLst/>
+          </a:prstGeom>
+        </p:spPr>
+      </p:pic>
+      <p:sp>
+        <p:nvSpPr>
+          <p:cNvPr id="15" name="TextBox 14"/>
+          <p:cNvSpPr txBox="1"/>
+          <p:nvPr/>
+        </p:nvSpPr>
+        <p:spPr>
+          <a:xfrm>
+            <a:off x="4356506" y="3191256"/>
+            <a:ext cx="3478682" cy="621792"/>
+          </a:xfrm>
+          <a:prstGeom prst="rect">
+            <a:avLst/>
+          </a:prstGeom>
+          <a:noFill/>
+        </p:spPr>
+        <p:txBody>
+          <a:bodyPr wrap="square" anchor="t"/>
+          <a:lstStyle/>
+          <a:p>
+            <a:pPr algn="ctr"/>
+            <a:r>
+              <a:rPr sz="1300" b="1" i="0">
+                <a:solidFill>
+                  <a:srgbClr val="095292"/>
+                </a:solidFill>
+                <a:latin typeface="Calibri"/>
+              </a:rPr>
+              <a:t>google docs</a:t>
+            </a:r>
+          </a:p>
+          <a:p>
+            <a:pPr algn="ctr">
+              <a:spcBef>
+                <a:spcPts val="200"/>
+              </a:spcBef>
             </a:pPr>
             <a:r>
-              <a:rPr sz="2000" b="0" i="0">
-                <a:solidFill>
-                  <a:srgbClr val="333333"/>
-                </a:solidFill>
-                <a:latin typeface="Calibri"/>
-              </a:rPr>
-              <a:t>–   </a:t>
-            </a:r>
-            <a:r>
-              <a:rPr sz="2000" b="1" i="0">
-                <a:solidFill>
-                  <a:srgbClr val="333333"/>
-                </a:solidFill>
-                <a:latin typeface="Calibri"/>
-              </a:rPr>
-              <a:t>Exito:</a:t>
-            </a:r>
-            <a:r>
-              <a:rPr sz="2000" b="0" i="0">
-                <a:solidFill>
-                  <a:srgbClr val="333333"/>
-                </a:solidFill>
-                <a:latin typeface="Calibri"/>
-              </a:rPr>
-              <a:t> El documento tiene minimo 8 RF y 4 RNF, todos con ID unico, actor explicito y redaccion en plantilla.</a:t>
-            </a:r>
-          </a:p>
-          <a:p>
-            <a:pPr>
-              <a:spcAft>
-                <a:spcPts val="800"/>
-              </a:spcAft>
+              <a:rPr sz="1000" b="0" i="0">
+                <a:solidFill>
+                  <a:srgbClr val="666666"/>
+                </a:solidFill>
+                <a:latin typeface="Calibri"/>
+              </a:rPr>
+              <a:t>Documentos del paquete de diseño</a:t>
+            </a:r>
+          </a:p>
+        </p:txBody>
+      </p:sp>
+      <p:sp>
+        <p:nvSpPr>
+          <p:cNvPr id="16" name="Rounded Rectangle 15"/>
+          <p:cNvSpPr/>
+          <p:nvPr/>
+        </p:nvSpPr>
+        <p:spPr>
+          <a:xfrm>
+            <a:off x="8109508" y="1591056"/>
+            <a:ext cx="3624986" cy="2331720"/>
+          </a:xfrm>
+          <a:prstGeom prst="roundRect">
+            <a:avLst>
+              <a:gd name="adj" fmla="val 12000"/>
+            </a:avLst>
+          </a:prstGeom>
+          <a:solidFill>
+            <a:srgbClr val="F2F2F2"/>
+          </a:solidFill>
+          <a:ln>
+            <a:noFill/>
+          </a:ln>
+        </p:spPr>
+        <p:style>
+          <a:lnRef idx="1">
+            <a:schemeClr val="accent1"/>
+          </a:lnRef>
+          <a:fillRef idx="3">
+            <a:schemeClr val="accent1"/>
+          </a:fillRef>
+          <a:effectRef idx="2">
+            <a:schemeClr val="accent1"/>
+          </a:effectRef>
+          <a:fontRef idx="minor">
+            <a:schemeClr val="lt1"/>
+          </a:fontRef>
+        </p:style>
+        <p:txBody>
+          <a:bodyPr rtlCol="0" anchor="ctr"/>
+          <a:lstStyle/>
+          <a:p>
+            <a:pPr algn="ctr"/>
+          </a:p>
+        </p:txBody>
+      </p:sp>
+      <p:sp>
+        <p:nvSpPr>
+          <p:cNvPr id="17" name="Rectangle 16"/>
+          <p:cNvSpPr/>
+          <p:nvPr/>
+        </p:nvSpPr>
+        <p:spPr>
+          <a:xfrm>
+            <a:off x="8109508" y="1591056"/>
+            <a:ext cx="3624986" cy="64008"/>
+          </a:xfrm>
+          <a:prstGeom prst="rect">
+            <a:avLst/>
+          </a:prstGeom>
+          <a:solidFill>
+            <a:srgbClr val="095292"/>
+          </a:solidFill>
+          <a:ln>
+            <a:noFill/>
+          </a:ln>
+        </p:spPr>
+        <p:style>
+          <a:lnRef idx="1">
+            <a:schemeClr val="accent1"/>
+          </a:lnRef>
+          <a:fillRef idx="3">
+            <a:schemeClr val="accent1"/>
+          </a:fillRef>
+          <a:effectRef idx="2">
+            <a:schemeClr val="accent1"/>
+          </a:effectRef>
+          <a:fontRef idx="minor">
+            <a:schemeClr val="lt1"/>
+          </a:fontRef>
+        </p:style>
+        <p:txBody>
+          <a:bodyPr rtlCol="0" anchor="ctr"/>
+          <a:lstStyle/>
+          <a:p>
+            <a:pPr algn="ctr"/>
+          </a:p>
+        </p:txBody>
+      </p:sp>
+      <p:sp>
+        <p:nvSpPr>
+          <p:cNvPr id="18" name="Rectangle 17"/>
+          <p:cNvSpPr/>
+          <p:nvPr/>
+        </p:nvSpPr>
+        <p:spPr>
+          <a:xfrm>
+            <a:off x="8109508" y="1655064"/>
+            <a:ext cx="3624986" cy="27432"/>
+          </a:xfrm>
+          <a:prstGeom prst="rect">
+            <a:avLst/>
+          </a:prstGeom>
+          <a:solidFill>
+            <a:srgbClr val="FFD000"/>
+          </a:solidFill>
+          <a:ln>
+            <a:noFill/>
+          </a:ln>
+        </p:spPr>
+        <p:style>
+          <a:lnRef idx="1">
+            <a:schemeClr val="accent1"/>
+          </a:lnRef>
+          <a:fillRef idx="3">
+            <a:schemeClr val="accent1"/>
+          </a:fillRef>
+          <a:effectRef idx="2">
+            <a:schemeClr val="accent1"/>
+          </a:effectRef>
+          <a:fontRef idx="minor">
+            <a:schemeClr val="lt1"/>
+          </a:fontRef>
+        </p:style>
+        <p:txBody>
+          <a:bodyPr rtlCol="0" anchor="ctr"/>
+          <a:lstStyle/>
+          <a:p>
+            <a:pPr algn="ctr"/>
+          </a:p>
+        </p:txBody>
+      </p:sp>
+      <p:pic>
+        <p:nvPicPr>
+          <p:cNvPr id="19" name="Picture 18" descr="examlab.png"/>
+          <p:cNvPicPr>
+            <a:picLocks noChangeAspect="1"/>
+          </p:cNvPicPr>
+          <p:nvPr/>
+        </p:nvPicPr>
+        <p:blipFill>
+          <a:blip r:embed="rId4"/>
+          <a:stretch>
+            <a:fillRect/>
+          </a:stretch>
+        </p:blipFill>
+        <p:spPr>
+          <a:xfrm>
+            <a:off x="9295638" y="1847087"/>
+            <a:ext cx="1252728" cy="1252728"/>
+          </a:xfrm>
+          <a:prstGeom prst="rect">
+            <a:avLst/>
+          </a:prstGeom>
+        </p:spPr>
+      </p:pic>
+      <p:sp>
+        <p:nvSpPr>
+          <p:cNvPr id="20" name="TextBox 19"/>
+          <p:cNvSpPr txBox="1"/>
+          <p:nvPr/>
+        </p:nvSpPr>
+        <p:spPr>
+          <a:xfrm>
+            <a:off x="8182660" y="3191256"/>
+            <a:ext cx="3478682" cy="621792"/>
+          </a:xfrm>
+          <a:prstGeom prst="rect">
+            <a:avLst/>
+          </a:prstGeom>
+          <a:noFill/>
+        </p:spPr>
+        <p:txBody>
+          <a:bodyPr wrap="square" anchor="t"/>
+          <a:lstStyle/>
+          <a:p>
+            <a:pPr algn="ctr"/>
+            <a:r>
+              <a:rPr sz="1300" b="1" i="0">
+                <a:solidFill>
+                  <a:srgbClr val="095292"/>
+                </a:solidFill>
+                <a:latin typeface="Calibri"/>
+              </a:rPr>
+              <a:t>la plataforma del curso</a:t>
+            </a:r>
+          </a:p>
+          <a:p>
+            <a:pPr algn="ctr">
+              <a:spcBef>
+                <a:spcPts val="200"/>
+              </a:spcBef>
             </a:pPr>
             <a:r>
-              <a:rPr sz="2000" b="0" i="0">
-                <a:solidFill>
-                  <a:srgbClr val="333333"/>
-                </a:solidFill>
-                <a:latin typeface="Calibri"/>
-              </a:rPr>
-              <a:t>–   </a:t>
-            </a:r>
-            <a:r>
-              <a:rPr sz="2000" b="1" i="0">
-                <a:solidFill>
-                  <a:srgbClr val="333333"/>
-                </a:solidFill>
-                <a:latin typeface="Calibri"/>
-              </a:rPr>
-              <a:t>Exito:</a:t>
-            </a:r>
-            <a:r>
-              <a:rPr sz="2000" b="0" i="0">
-                <a:solidFill>
-                  <a:srgbClr val="333333"/>
-                </a:solidFill>
-                <a:latin typeface="Calibri"/>
-              </a:rPr>
-              <a:t> Cada RNF trae al menos un valor medible (segundos, cantidad, frecuencia o porcentaje) y su forma de verificacion.</a:t>
-            </a:r>
-          </a:p>
-          <a:p>
-            <a:pPr>
-              <a:spcAft>
-                <a:spcPts val="800"/>
-              </a:spcAft>
-            </a:pPr>
-            <a:r>
-              <a:rPr sz="2000" b="0" i="0">
-                <a:solidFill>
-                  <a:srgbClr val="333333"/>
-                </a:solidFill>
-                <a:latin typeface="Calibri"/>
-              </a:rPr>
-              <a:t>–   </a:t>
-            </a:r>
-            <a:r>
-              <a:rPr sz="2000" b="1" i="0">
-                <a:solidFill>
-                  <a:srgbClr val="333333"/>
-                </a:solidFill>
-                <a:latin typeface="Calibri"/>
-              </a:rPr>
-              <a:t>Exito:</a:t>
-            </a:r>
-            <a:r>
-              <a:rPr sz="2000" b="0" i="0">
-                <a:solidFill>
-                  <a:srgbClr val="333333"/>
-                </a:solidFill>
-                <a:latin typeface="Calibri"/>
-              </a:rPr>
-              <a:t> Ningun requisito usa las palabras rapido, amigable, facil, intuitivo, robusto u optimo sin cuantificarlas.</a:t>
-            </a:r>
-          </a:p>
-          <a:p>
-            <a:pPr>
-              <a:spcAft>
-                <a:spcPts val="800"/>
-              </a:spcAft>
-            </a:pPr>
-            <a:r>
-              <a:rPr sz="2000" b="0" i="0">
-                <a:solidFill>
-                  <a:srgbClr val="333333"/>
-                </a:solidFill>
-                <a:latin typeface="Calibri"/>
-              </a:rPr>
-              <a:t>–   </a:t>
-            </a:r>
-            <a:r>
-              <a:rPr sz="2000" b="1" i="0">
-                <a:solidFill>
-                  <a:srgbClr val="333333"/>
-                </a:solidFill>
-                <a:latin typeface="Calibri"/>
-              </a:rPr>
-              <a:t>Exito:</a:t>
-            </a:r>
-            <a:r>
-              <a:rPr sz="2000" b="0" i="0">
-                <a:solidFill>
-                  <a:srgbClr val="333333"/>
-                </a:solidFill>
-                <a:latin typeface="Calibri"/>
-              </a:rPr>
-              <a:t> La matriz de trazabilidad conecta las cinco frases de la entrevista con al menos un requisito cada una, y ningun requisito queda huerfano de origen.</a:t>
-            </a:r>
-          </a:p>
-          <a:p>
-            <a:pPr>
-              <a:spcAft>
-                <a:spcPts val="800"/>
-              </a:spcAft>
-            </a:pPr>
-            <a:r>
-              <a:rPr sz="2000" b="0" i="0">
-                <a:solidFill>
-                  <a:srgbClr val="333333"/>
-                </a:solidFill>
-                <a:latin typeface="Calibri"/>
-              </a:rPr>
-              <a:t>–   </a:t>
-            </a:r>
-            <a:r>
-              <a:rPr sz="2000" b="1" i="0">
-                <a:solidFill>
-                  <a:srgbClr val="333333"/>
-                </a:solidFill>
-                <a:latin typeface="Calibri"/>
-              </a:rPr>
-              <a:t>Entrega en la plataforma del curso</a:t>
-            </a:r>
-            <a:r>
-              <a:rPr sz="2000" b="0" i="0">
-                <a:solidFill>
-                  <a:srgbClr val="333333"/>
-                </a:solidFill>
-                <a:latin typeface="Calibri"/>
-              </a:rPr>
-              <a:t> — en la fecha que indique el docente.</a:t>
-            </a:r>
-          </a:p>
-        </p:txBody>
-      </p:sp>
-      <p:sp>
-        <p:nvSpPr>
-          <p:cNvPr id="6" name="TextBox 5"/>
+              <a:rPr sz="1000" b="0" i="0">
+                <a:solidFill>
+                  <a:srgbClr val="666666"/>
+                </a:solidFill>
+                <a:latin typeface="Calibri"/>
+              </a:rPr>
+              <a:t>Entrega del taller · en la fecha que indique el docente</a:t>
+            </a:r>
+          </a:p>
+        </p:txBody>
+      </p:sp>
+      <p:sp>
+        <p:nvSpPr>
+          <p:cNvPr id="21" name="TextBox 20"/>
           <p:cNvSpPr txBox="1"/>
           <p:nvPr/>
         </p:nvSpPr>
@@ -5659,109 +5290,21 @@
                 </a:solidFill>
                 <a:latin typeface="Calibri"/>
               </a:rPr>
-              <a:t>Para el PI esta semana</a:t>
-            </a:r>
-          </a:p>
-        </p:txBody>
-      </p:sp>
-      <p:sp>
-        <p:nvSpPr>
-          <p:cNvPr id="5" name="Rounded Rectangle 4"/>
-          <p:cNvSpPr/>
-          <p:nvPr/>
-        </p:nvSpPr>
-        <p:spPr>
-          <a:xfrm>
-            <a:off x="457200" y="1261872"/>
-            <a:ext cx="11277295" cy="1051560"/>
-          </a:xfrm>
-          <a:prstGeom prst="roundRect">
-            <a:avLst>
-              <a:gd name="adj" fmla="val 12000"/>
-            </a:avLst>
-          </a:prstGeom>
-          <a:solidFill>
-            <a:srgbClr val="E8F4FA"/>
-          </a:solidFill>
-          <a:ln>
-            <a:noFill/>
-          </a:ln>
-        </p:spPr>
-        <p:style>
-          <a:lnRef idx="1">
-            <a:schemeClr val="accent1"/>
-          </a:lnRef>
-          <a:fillRef idx="3">
-            <a:schemeClr val="accent1"/>
-          </a:fillRef>
-          <a:effectRef idx="2">
-            <a:schemeClr val="accent1"/>
-          </a:effectRef>
-          <a:fontRef idx="minor">
-            <a:schemeClr val="lt1"/>
-          </a:fontRef>
-        </p:style>
-        <p:txBody>
-          <a:bodyPr rtlCol="0" anchor="ctr"/>
-          <a:lstStyle/>
-          <a:p>
-            <a:pPr algn="ctr"/>
-          </a:p>
-        </p:txBody>
-      </p:sp>
-      <p:sp>
-        <p:nvSpPr>
-          <p:cNvPr id="6" name="Rectangle 5"/>
-          <p:cNvSpPr/>
-          <p:nvPr/>
-        </p:nvSpPr>
-        <p:spPr>
-          <a:xfrm>
-            <a:off x="457200" y="1261872"/>
-            <a:ext cx="128016" cy="1051560"/>
-          </a:xfrm>
-          <a:prstGeom prst="rect">
-            <a:avLst/>
-          </a:prstGeom>
-          <a:solidFill>
-            <a:srgbClr val="269CCB"/>
-          </a:solidFill>
-          <a:ln>
-            <a:noFill/>
-          </a:ln>
-        </p:spPr>
-        <p:style>
-          <a:lnRef idx="1">
-            <a:schemeClr val="accent1"/>
-          </a:lnRef>
-          <a:fillRef idx="3">
-            <a:schemeClr val="accent1"/>
-          </a:fillRef>
-          <a:effectRef idx="2">
-            <a:schemeClr val="accent1"/>
-          </a:effectRef>
-          <a:fontRef idx="minor">
-            <a:schemeClr val="lt1"/>
-          </a:fontRef>
-        </p:style>
-        <p:txBody>
-          <a:bodyPr rtlCol="0" anchor="ctr"/>
-          <a:lstStyle/>
-          <a:p>
-            <a:pPr algn="ctr"/>
-          </a:p>
-        </p:txBody>
-      </p:sp>
-      <p:sp>
-        <p:nvSpPr>
-          <p:cNvPr id="7" name="TextBox 6"/>
+              <a:t>Taller PI — por que importa</a:t>
+            </a:r>
+          </a:p>
+        </p:txBody>
+      </p:sp>
+      <p:sp>
+        <p:nvSpPr>
+          <p:cNvPr id="5" name="TextBox 4"/>
           <p:cNvSpPr txBox="1"/>
           <p:nvPr/>
         </p:nvSpPr>
         <p:spPr>
           <a:xfrm>
-            <a:off x="777240" y="1399031"/>
-            <a:ext cx="10774375" cy="822959"/>
+            <a:off x="457200" y="1170432"/>
+            <a:ext cx="11277295" cy="5230368"/>
           </a:xfrm>
           <a:prstGeom prst="rect">
             <a:avLst/>
@@ -5774,313 +5317,76 @@
           </a:bodyPr>
           <a:lstStyle/>
           <a:p>
-            <a:r>
-              <a:rPr sz="1200" b="1" i="0">
-                <a:solidFill>
-                  <a:srgbClr val="269CCB"/>
-                </a:solidFill>
-                <a:latin typeface="Calibri"/>
-              </a:rPr>
-              <a:t>Info</a:t>
-            </a:r>
-          </a:p>
-          <a:p>
             <a:pPr>
-              <a:spcBef>
-                <a:spcPts val="400"/>
-              </a:spcBef>
+              <a:spcAft>
+                <a:spcPts val="800"/>
+              </a:spcAft>
             </a:pPr>
             <a:r>
-              <a:rPr sz="1400" b="0" i="0">
+              <a:rPr sz="2000" b="0" i="0">
                 <a:solidFill>
                   <a:srgbClr val="333333"/>
                 </a:solidFill>
                 <a:latin typeface="Calibri"/>
               </a:rPr>
-              <a:t>Hito: Queda listo el catalogo de requisitos de VetCare: 8 RF y 4 RNF con criterio de verificacion y prioridad MoSCoW.</a:t>
-            </a:r>
-          </a:p>
-        </p:txBody>
-      </p:sp>
-      <p:sp>
-        <p:nvSpPr>
-          <p:cNvPr id="8" name="Rounded Rectangle 7"/>
-          <p:cNvSpPr/>
-          <p:nvPr/>
-        </p:nvSpPr>
-        <p:spPr>
-          <a:xfrm>
-            <a:off x="457200" y="2478024"/>
-            <a:ext cx="11277295" cy="1051560"/>
-          </a:xfrm>
-          <a:prstGeom prst="roundRect">
-            <a:avLst>
-              <a:gd name="adj" fmla="val 12000"/>
-            </a:avLst>
-          </a:prstGeom>
-          <a:solidFill>
-            <a:srgbClr val="FFF8E1"/>
-          </a:solidFill>
-          <a:ln>
-            <a:noFill/>
-          </a:ln>
-        </p:spPr>
-        <p:style>
-          <a:lnRef idx="1">
-            <a:schemeClr val="accent1"/>
-          </a:lnRef>
-          <a:fillRef idx="3">
-            <a:schemeClr val="accent1"/>
-          </a:fillRef>
-          <a:effectRef idx="2">
-            <a:schemeClr val="accent1"/>
-          </a:effectRef>
-          <a:fontRef idx="minor">
-            <a:schemeClr val="lt1"/>
-          </a:fontRef>
-        </p:style>
-        <p:txBody>
-          <a:bodyPr rtlCol="0" anchor="ctr"/>
-          <a:lstStyle/>
-          <a:p>
-            <a:pPr algn="ctr"/>
-          </a:p>
-        </p:txBody>
-      </p:sp>
-      <p:sp>
-        <p:nvSpPr>
-          <p:cNvPr id="9" name="Rectangle 8"/>
-          <p:cNvSpPr/>
-          <p:nvPr/>
-        </p:nvSpPr>
-        <p:spPr>
-          <a:xfrm>
-            <a:off x="457200" y="2478024"/>
-            <a:ext cx="128016" cy="1051560"/>
-          </a:xfrm>
-          <a:prstGeom prst="rect">
-            <a:avLst/>
-          </a:prstGeom>
-          <a:solidFill>
-            <a:srgbClr val="FFD000"/>
-          </a:solidFill>
-          <a:ln>
-            <a:noFill/>
-          </a:ln>
-        </p:spPr>
-        <p:style>
-          <a:lnRef idx="1">
-            <a:schemeClr val="accent1"/>
-          </a:lnRef>
-          <a:fillRef idx="3">
-            <a:schemeClr val="accent1"/>
-          </a:fillRef>
-          <a:effectRef idx="2">
-            <a:schemeClr val="accent1"/>
-          </a:effectRef>
-          <a:fontRef idx="minor">
-            <a:schemeClr val="lt1"/>
-          </a:fontRef>
-        </p:style>
-        <p:txBody>
-          <a:bodyPr rtlCol="0" anchor="ctr"/>
-          <a:lstStyle/>
-          <a:p>
-            <a:pPr algn="ctr"/>
-          </a:p>
-        </p:txBody>
-      </p:sp>
-      <p:sp>
-        <p:nvSpPr>
-          <p:cNvPr id="10" name="TextBox 9"/>
-          <p:cNvSpPr txBox="1"/>
-          <p:nvPr/>
-        </p:nvSpPr>
-        <p:spPr>
-          <a:xfrm>
-            <a:off x="777240" y="2615184"/>
-            <a:ext cx="10774375" cy="822959"/>
-          </a:xfrm>
-          <a:prstGeom prst="rect">
-            <a:avLst/>
-          </a:prstGeom>
-          <a:noFill/>
-        </p:spPr>
-        <p:txBody>
-          <a:bodyPr wrap="square">
-            <a:spAutoFit/>
-          </a:bodyPr>
-          <a:lstStyle/>
-          <a:p>
-            <a:r>
-              <a:rPr sz="1200" b="1" i="0">
-                <a:solidFill>
-                  <a:srgbClr val="FFD000"/>
-                </a:solidFill>
-                <a:latin typeface="Calibri"/>
-              </a:rPr>
-              <a:t>Aclaración</a:t>
+              <a:t>–   </a:t>
+            </a:r>
+            <a:r>
+              <a:rPr sz="2000" b="1" i="0">
+                <a:solidFill>
+                  <a:srgbClr val="333333"/>
+                </a:solidFill>
+                <a:latin typeface="Calibri"/>
+              </a:rPr>
+              <a:t>Por que importa al PI:</a:t>
+            </a:r>
+            <a:r>
+              <a:rPr sz="2000" b="0" i="0">
+                <a:solidFill>
+                  <a:srgbClr val="333333"/>
+                </a:solidFill>
+                <a:latin typeface="Calibri"/>
+              </a:rPr>
+              <a:t> este catalogo es el contrato del Proyecto Integrador; todo lo que se dibuje en las clases siguientes (casos de uso, clases, mockups, diccionario de datos) debe poder rastrearse hasta un requisito de esta lista.</a:t>
             </a:r>
           </a:p>
           <a:p>
             <a:pPr>
-              <a:spcBef>
-                <a:spcPts val="400"/>
-              </a:spcBef>
+              <a:spcAft>
+                <a:spcPts val="800"/>
+              </a:spcAft>
             </a:pPr>
             <a:r>
-              <a:rPr sz="1400" b="0" i="0">
+              <a:rPr sz="2000" b="0" i="0">
                 <a:solidFill>
                   <a:srgbClr val="333333"/>
                 </a:solidFill>
                 <a:latin typeface="Calibri"/>
               </a:rPr>
-              <a:t>Enunciado completo: Clases/Proyecto Integrador/ (VetCare).</a:t>
-            </a:r>
-          </a:p>
-        </p:txBody>
-      </p:sp>
-      <p:sp>
-        <p:nvSpPr>
-          <p:cNvPr id="11" name="Rounded Rectangle 10"/>
-          <p:cNvSpPr/>
-          <p:nvPr/>
-        </p:nvSpPr>
-        <p:spPr>
-          <a:xfrm>
-            <a:off x="457200" y="3694176"/>
-            <a:ext cx="11277295" cy="1051560"/>
-          </a:xfrm>
-          <a:prstGeom prst="roundRect">
-            <a:avLst>
-              <a:gd name="adj" fmla="val 12000"/>
-            </a:avLst>
-          </a:prstGeom>
-          <a:solidFill>
-            <a:srgbClr val="FBE4E4"/>
-          </a:solidFill>
-          <a:ln>
-            <a:noFill/>
-          </a:ln>
-        </p:spPr>
-        <p:style>
-          <a:lnRef idx="1">
-            <a:schemeClr val="accent1"/>
-          </a:lnRef>
-          <a:fillRef idx="3">
-            <a:schemeClr val="accent1"/>
-          </a:fillRef>
-          <a:effectRef idx="2">
-            <a:schemeClr val="accent1"/>
-          </a:effectRef>
-          <a:fontRef idx="minor">
-            <a:schemeClr val="lt1"/>
-          </a:fontRef>
-        </p:style>
-        <p:txBody>
-          <a:bodyPr rtlCol="0" anchor="ctr"/>
-          <a:lstStyle/>
-          <a:p>
-            <a:pPr algn="ctr"/>
-          </a:p>
-        </p:txBody>
-      </p:sp>
-      <p:sp>
-        <p:nvSpPr>
-          <p:cNvPr id="12" name="Rectangle 11"/>
-          <p:cNvSpPr/>
-          <p:nvPr/>
-        </p:nvSpPr>
-        <p:spPr>
-          <a:xfrm>
-            <a:off x="457200" y="3694176"/>
-            <a:ext cx="128016" cy="1051560"/>
-          </a:xfrm>
-          <a:prstGeom prst="rect">
-            <a:avLst/>
-          </a:prstGeom>
-          <a:solidFill>
-            <a:srgbClr val="A02030"/>
-          </a:solidFill>
-          <a:ln>
-            <a:noFill/>
-          </a:ln>
-        </p:spPr>
-        <p:style>
-          <a:lnRef idx="1">
-            <a:schemeClr val="accent1"/>
-          </a:lnRef>
-          <a:fillRef idx="3">
-            <a:schemeClr val="accent1"/>
-          </a:fillRef>
-          <a:effectRef idx="2">
-            <a:schemeClr val="accent1"/>
-          </a:effectRef>
-          <a:fontRef idx="minor">
-            <a:schemeClr val="lt1"/>
-          </a:fontRef>
-        </p:style>
-        <p:txBody>
-          <a:bodyPr rtlCol="0" anchor="ctr"/>
-          <a:lstStyle/>
-          <a:p>
-            <a:pPr algn="ctr"/>
-          </a:p>
-        </p:txBody>
-      </p:sp>
-      <p:sp>
-        <p:nvSpPr>
-          <p:cNvPr id="13" name="TextBox 12"/>
-          <p:cNvSpPr txBox="1"/>
-          <p:nvPr/>
-        </p:nvSpPr>
-        <p:spPr>
-          <a:xfrm>
-            <a:off x="777240" y="3831336"/>
-            <a:ext cx="10774375" cy="822959"/>
-          </a:xfrm>
-          <a:prstGeom prst="rect">
-            <a:avLst/>
-          </a:prstGeom>
-          <a:noFill/>
-        </p:spPr>
-        <p:txBody>
-          <a:bodyPr wrap="square">
-            <a:spAutoFit/>
-          </a:bodyPr>
-          <a:lstStyle/>
-          <a:p>
-            <a:r>
-              <a:rPr sz="1200" b="1" i="0">
-                <a:solidFill>
-                  <a:srgbClr val="A02030"/>
-                </a:solidFill>
-                <a:latin typeface="Calibri"/>
-              </a:rPr>
-              <a:t>Atención</a:t>
+              <a:t>–   Si un requisito no queda hoy en el documento, sencillamente no existe para VetCare: no se disena, no se dibuja y no se programa en Programacion II.</a:t>
             </a:r>
           </a:p>
           <a:p>
             <a:pPr>
-              <a:spcBef>
-                <a:spcPts val="400"/>
-              </a:spcBef>
+              <a:spcAft>
+                <a:spcPts val="800"/>
+              </a:spcAft>
             </a:pPr>
             <a:r>
-              <a:rPr sz="1400" b="0" i="0">
+              <a:rPr sz="2000" b="0" i="0">
                 <a:solidFill>
                   <a:srgbClr val="333333"/>
                 </a:solidFill>
                 <a:latin typeface="Calibri"/>
               </a:rPr>
-              <a:t>Entrega del taller, si el docente lo asigna · en la fecha que indique el docente.</a:t>
-            </a:r>
-          </a:p>
-        </p:txBody>
-      </p:sp>
-      <p:sp>
-        <p:nvSpPr>
-          <p:cNvPr id="14" name="TextBox 13"/>
+              <a:t>–   Es tambien la primera entrega que se defiende hablando: usted debe poder explicarle al Dr. Ramirez, en dos minutos, que se le va a construir y que no.</a:t>
+            </a:r>
+          </a:p>
+        </p:txBody>
+      </p:sp>
+      <p:sp>
+        <p:nvSpPr>
+          <p:cNvPr id="6" name="TextBox 5"/>
           <p:cNvSpPr txBox="1"/>
           <p:nvPr/>
         </p:nvSpPr>
@@ -6148,6 +5454,2893 @@
         <p:spPr>
           <a:xfrm>
             <a:off x="0" y="0"/>
+            <a:ext cx="12191695" cy="960120"/>
+          </a:xfrm>
+          <a:prstGeom prst="rect">
+            <a:avLst/>
+          </a:prstGeom>
+          <a:solidFill>
+            <a:srgbClr val="095292"/>
+          </a:solidFill>
+          <a:ln>
+            <a:noFill/>
+          </a:ln>
+        </p:spPr>
+        <p:style>
+          <a:lnRef idx="1">
+            <a:schemeClr val="accent1"/>
+          </a:lnRef>
+          <a:fillRef idx="3">
+            <a:schemeClr val="accent1"/>
+          </a:fillRef>
+          <a:effectRef idx="2">
+            <a:schemeClr val="accent1"/>
+          </a:effectRef>
+          <a:fontRef idx="minor">
+            <a:schemeClr val="lt1"/>
+          </a:fontRef>
+        </p:style>
+        <p:txBody>
+          <a:bodyPr rtlCol="0" anchor="ctr"/>
+          <a:lstStyle/>
+          <a:p>
+            <a:pPr algn="ctr"/>
+          </a:p>
+        </p:txBody>
+      </p:sp>
+      <p:sp>
+        <p:nvSpPr>
+          <p:cNvPr id="3" name="Rectangle 2"/>
+          <p:cNvSpPr/>
+          <p:nvPr/>
+        </p:nvSpPr>
+        <p:spPr>
+          <a:xfrm>
+            <a:off x="0" y="960120"/>
+            <a:ext cx="12191695" cy="41148"/>
+          </a:xfrm>
+          <a:prstGeom prst="rect">
+            <a:avLst/>
+          </a:prstGeom>
+          <a:solidFill>
+            <a:srgbClr val="FFD000"/>
+          </a:solidFill>
+          <a:ln>
+            <a:noFill/>
+          </a:ln>
+        </p:spPr>
+        <p:style>
+          <a:lnRef idx="1">
+            <a:schemeClr val="accent1"/>
+          </a:lnRef>
+          <a:fillRef idx="3">
+            <a:schemeClr val="accent1"/>
+          </a:fillRef>
+          <a:effectRef idx="2">
+            <a:schemeClr val="accent1"/>
+          </a:effectRef>
+          <a:fontRef idx="minor">
+            <a:schemeClr val="lt1"/>
+          </a:fontRef>
+        </p:style>
+        <p:txBody>
+          <a:bodyPr rtlCol="0" anchor="ctr"/>
+          <a:lstStyle/>
+          <a:p>
+            <a:pPr algn="ctr"/>
+          </a:p>
+        </p:txBody>
+      </p:sp>
+      <p:sp>
+        <p:nvSpPr>
+          <p:cNvPr id="4" name="TextBox 3"/>
+          <p:cNvSpPr txBox="1"/>
+          <p:nvPr/>
+        </p:nvSpPr>
+        <p:spPr>
+          <a:xfrm>
+            <a:off x="457200" y="164592"/>
+            <a:ext cx="11277295" cy="502920"/>
+          </a:xfrm>
+          <a:prstGeom prst="rect">
+            <a:avLst/>
+          </a:prstGeom>
+          <a:noFill/>
+        </p:spPr>
+        <p:txBody>
+          <a:bodyPr wrap="square">
+            <a:spAutoFit/>
+          </a:bodyPr>
+          <a:lstStyle/>
+          <a:p>
+            <a:r>
+              <a:rPr sz="2600" b="1" i="0">
+                <a:solidFill>
+                  <a:srgbClr val="FFFFFF"/>
+                </a:solidFill>
+                <a:latin typeface="Calibri"/>
+              </a:rPr>
+              <a:t>Taller PI — punto de partida</a:t>
+            </a:r>
+          </a:p>
+        </p:txBody>
+      </p:sp>
+      <p:sp>
+        <p:nvSpPr>
+          <p:cNvPr id="5" name="TextBox 4"/>
+          <p:cNvSpPr txBox="1"/>
+          <p:nvPr/>
+        </p:nvSpPr>
+        <p:spPr>
+          <a:xfrm>
+            <a:off x="457200" y="1170432"/>
+            <a:ext cx="11277295" cy="5230368"/>
+          </a:xfrm>
+          <a:prstGeom prst="rect">
+            <a:avLst/>
+          </a:prstGeom>
+          <a:noFill/>
+        </p:spPr>
+        <p:txBody>
+          <a:bodyPr wrap="square">
+            <a:spAutoFit/>
+          </a:bodyPr>
+          <a:lstStyle/>
+          <a:p>
+            <a:pPr>
+              <a:spcAft>
+                <a:spcPts val="800"/>
+              </a:spcAft>
+            </a:pPr>
+            <a:r>
+              <a:rPr sz="2000" b="0" i="0">
+                <a:solidFill>
+                  <a:srgbClr val="333333"/>
+                </a:solidFill>
+                <a:latin typeface="Calibri"/>
+              </a:rPr>
+              <a:t>–   Hoy solo existe la transcripcion de la entrevista al Dr. Ramirez: cinco frases sueltas, dichas en lenguaje de veterinario y no de analista.</a:t>
+            </a:r>
+          </a:p>
+          <a:p>
+            <a:pPr>
+              <a:spcAft>
+                <a:spcPts val="800"/>
+              </a:spcAft>
+            </a:pPr>
+            <a:r>
+              <a:rPr sz="2000" b="0" i="0">
+                <a:solidFill>
+                  <a:srgbClr val="333333"/>
+                </a:solidFill>
+                <a:latin typeface="Calibri"/>
+              </a:rPr>
+              <a:t>–   La clinica Huellitas sigue en papel: fichas que se extravian, busquedas de historial que toman varios minutos con el paciente esperando y cero metricas mensuales.</a:t>
+            </a:r>
+          </a:p>
+          <a:p>
+            <a:pPr>
+              <a:spcAft>
+                <a:spcPts val="800"/>
+              </a:spcAft>
+            </a:pPr>
+            <a:r>
+              <a:rPr sz="2000" b="0" i="0">
+                <a:solidFill>
+                  <a:srgbClr val="333333"/>
+                </a:solidFill>
+                <a:latin typeface="Calibri"/>
+              </a:rPr>
+              <a:t>–   No hay documento de requisitos, no hay prioridades acordadas y nadie sabe todavia que queda dentro y que queda fuera de la primera version de VetCare.</a:t>
+            </a:r>
+          </a:p>
+        </p:txBody>
+      </p:sp>
+      <p:sp>
+        <p:nvSpPr>
+          <p:cNvPr id="6" name="TextBox 5"/>
+          <p:cNvSpPr txBox="1"/>
+          <p:nvPr/>
+        </p:nvSpPr>
+        <p:spPr>
+          <a:xfrm>
+            <a:off x="11185855" y="6473952"/>
+            <a:ext cx="640080" cy="274320"/>
+          </a:xfrm>
+          <a:prstGeom prst="rect">
+            <a:avLst/>
+          </a:prstGeom>
+          <a:noFill/>
+        </p:spPr>
+        <p:txBody>
+          <a:bodyPr wrap="square">
+            <a:spAutoFit/>
+          </a:bodyPr>
+          <a:lstStyle/>
+          <a:p>
+            <a:pPr algn="r"/>
+            <a:r>
+              <a:rPr sz="1100" b="0" i="0">
+                <a:solidFill>
+                  <a:srgbClr val="666666"/>
+                </a:solidFill>
+                <a:latin typeface="Calibri"/>
+              </a:rPr>
+              <a:t>14</a:t>
+            </a:r>
+          </a:p>
+        </p:txBody>
+      </p:sp>
+    </p:spTree>
+  </p:cSld>
+  <p:clrMapOvr>
+    <a:masterClrMapping/>
+  </p:clrMapOvr>
+</p:sld>
+</file>
+
+<file path=ppt/slides/slide15.xml><?xml version="1.0" encoding="utf-8"?>
+<p:sld xmlns:a="http://schemas.openxmlformats.org/drawingml/2006/main" xmlns:p="http://schemas.openxmlformats.org/presentationml/2006/main" xmlns:r="http://schemas.openxmlformats.org/officeDocument/2006/relationships">
+  <p:cSld>
+    <p:bg>
+      <p:bgPr>
+        <a:solidFill>
+          <a:srgbClr val="FFFFFF"/>
+        </a:solidFill>
+        <a:effectLst/>
+      </p:bgPr>
+    </p:bg>
+    <p:spTree>
+      <p:nvGrpSpPr>
+        <p:cNvPr id="1" name=""/>
+        <p:cNvGrpSpPr/>
+        <p:nvPr/>
+      </p:nvGrpSpPr>
+      <p:grpSpPr/>
+      <p:sp>
+        <p:nvSpPr>
+          <p:cNvPr id="2" name="Rectangle 1"/>
+          <p:cNvSpPr/>
+          <p:nvPr/>
+        </p:nvSpPr>
+        <p:spPr>
+          <a:xfrm>
+            <a:off x="0" y="0"/>
+            <a:ext cx="12191695" cy="960120"/>
+          </a:xfrm>
+          <a:prstGeom prst="rect">
+            <a:avLst/>
+          </a:prstGeom>
+          <a:solidFill>
+            <a:srgbClr val="095292"/>
+          </a:solidFill>
+          <a:ln>
+            <a:noFill/>
+          </a:ln>
+        </p:spPr>
+        <p:style>
+          <a:lnRef idx="1">
+            <a:schemeClr val="accent1"/>
+          </a:lnRef>
+          <a:fillRef idx="3">
+            <a:schemeClr val="accent1"/>
+          </a:fillRef>
+          <a:effectRef idx="2">
+            <a:schemeClr val="accent1"/>
+          </a:effectRef>
+          <a:fontRef idx="minor">
+            <a:schemeClr val="lt1"/>
+          </a:fontRef>
+        </p:style>
+        <p:txBody>
+          <a:bodyPr rtlCol="0" anchor="ctr"/>
+          <a:lstStyle/>
+          <a:p>
+            <a:pPr algn="ctr"/>
+          </a:p>
+        </p:txBody>
+      </p:sp>
+      <p:sp>
+        <p:nvSpPr>
+          <p:cNvPr id="3" name="Rectangle 2"/>
+          <p:cNvSpPr/>
+          <p:nvPr/>
+        </p:nvSpPr>
+        <p:spPr>
+          <a:xfrm>
+            <a:off x="0" y="960120"/>
+            <a:ext cx="12191695" cy="41148"/>
+          </a:xfrm>
+          <a:prstGeom prst="rect">
+            <a:avLst/>
+          </a:prstGeom>
+          <a:solidFill>
+            <a:srgbClr val="FFD000"/>
+          </a:solidFill>
+          <a:ln>
+            <a:noFill/>
+          </a:ln>
+        </p:spPr>
+        <p:style>
+          <a:lnRef idx="1">
+            <a:schemeClr val="accent1"/>
+          </a:lnRef>
+          <a:fillRef idx="3">
+            <a:schemeClr val="accent1"/>
+          </a:fillRef>
+          <a:effectRef idx="2">
+            <a:schemeClr val="accent1"/>
+          </a:effectRef>
+          <a:fontRef idx="minor">
+            <a:schemeClr val="lt1"/>
+          </a:fontRef>
+        </p:style>
+        <p:txBody>
+          <a:bodyPr rtlCol="0" anchor="ctr"/>
+          <a:lstStyle/>
+          <a:p>
+            <a:pPr algn="ctr"/>
+          </a:p>
+        </p:txBody>
+      </p:sp>
+      <p:sp>
+        <p:nvSpPr>
+          <p:cNvPr id="4" name="TextBox 3"/>
+          <p:cNvSpPr txBox="1"/>
+          <p:nvPr/>
+        </p:nvSpPr>
+        <p:spPr>
+          <a:xfrm>
+            <a:off x="457200" y="164592"/>
+            <a:ext cx="11277295" cy="502920"/>
+          </a:xfrm>
+          <a:prstGeom prst="rect">
+            <a:avLst/>
+          </a:prstGeom>
+          <a:noFill/>
+        </p:spPr>
+        <p:txBody>
+          <a:bodyPr wrap="square">
+            <a:spAutoFit/>
+          </a:bodyPr>
+          <a:lstStyle/>
+          <a:p>
+            <a:r>
+              <a:rPr sz="2600" b="1" i="0">
+                <a:solidFill>
+                  <a:srgbClr val="FFFFFF"/>
+                </a:solidFill>
+                <a:latin typeface="Calibri"/>
+              </a:rPr>
+              <a:t>Taller PI — pasos guiados</a:t>
+            </a:r>
+          </a:p>
+        </p:txBody>
+      </p:sp>
+      <p:sp>
+        <p:nvSpPr>
+          <p:cNvPr id="5" name="Rounded Rectangle 4"/>
+          <p:cNvSpPr/>
+          <p:nvPr/>
+        </p:nvSpPr>
+        <p:spPr>
+          <a:xfrm>
+            <a:off x="457200" y="1234440"/>
+            <a:ext cx="11277295" cy="950976"/>
+          </a:xfrm>
+          <a:prstGeom prst="roundRect">
+            <a:avLst>
+              <a:gd name="adj" fmla="val 12000"/>
+            </a:avLst>
+          </a:prstGeom>
+          <a:solidFill>
+            <a:srgbClr val="F2F2F2"/>
+          </a:solidFill>
+          <a:ln>
+            <a:noFill/>
+          </a:ln>
+        </p:spPr>
+        <p:style>
+          <a:lnRef idx="1">
+            <a:schemeClr val="accent1"/>
+          </a:lnRef>
+          <a:fillRef idx="3">
+            <a:schemeClr val="accent1"/>
+          </a:fillRef>
+          <a:effectRef idx="2">
+            <a:schemeClr val="accent1"/>
+          </a:effectRef>
+          <a:fontRef idx="minor">
+            <a:schemeClr val="lt1"/>
+          </a:fontRef>
+        </p:style>
+        <p:txBody>
+          <a:bodyPr rtlCol="0" anchor="ctr"/>
+          <a:lstStyle/>
+          <a:p>
+            <a:pPr algn="ctr"/>
+          </a:p>
+        </p:txBody>
+      </p:sp>
+      <p:sp>
+        <p:nvSpPr>
+          <p:cNvPr id="6" name="Rounded Rectangle 5"/>
+          <p:cNvSpPr/>
+          <p:nvPr/>
+        </p:nvSpPr>
+        <p:spPr>
+          <a:xfrm>
+            <a:off x="594360" y="1490472"/>
+            <a:ext cx="438912" cy="438912"/>
+          </a:xfrm>
+          <a:prstGeom prst="roundRect">
+            <a:avLst>
+              <a:gd name="adj" fmla="val 12000"/>
+            </a:avLst>
+          </a:prstGeom>
+          <a:solidFill>
+            <a:srgbClr val="095292"/>
+          </a:solidFill>
+          <a:ln>
+            <a:noFill/>
+          </a:ln>
+        </p:spPr>
+        <p:style>
+          <a:lnRef idx="1">
+            <a:schemeClr val="accent1"/>
+          </a:lnRef>
+          <a:fillRef idx="3">
+            <a:schemeClr val="accent1"/>
+          </a:fillRef>
+          <a:effectRef idx="2">
+            <a:schemeClr val="accent1"/>
+          </a:effectRef>
+          <a:fontRef idx="minor">
+            <a:schemeClr val="lt1"/>
+          </a:fontRef>
+        </p:style>
+        <p:txBody>
+          <a:bodyPr rtlCol="0" anchor="ctr"/>
+          <a:lstStyle/>
+          <a:p>
+            <a:pPr algn="ctr"/>
+          </a:p>
+        </p:txBody>
+      </p:sp>
+      <p:sp>
+        <p:nvSpPr>
+          <p:cNvPr id="7" name="TextBox 6"/>
+          <p:cNvSpPr txBox="1"/>
+          <p:nvPr/>
+        </p:nvSpPr>
+        <p:spPr>
+          <a:xfrm>
+            <a:off x="594360" y="1490472"/>
+            <a:ext cx="438912" cy="438912"/>
+          </a:xfrm>
+          <a:prstGeom prst="rect">
+            <a:avLst/>
+          </a:prstGeom>
+          <a:noFill/>
+        </p:spPr>
+        <p:txBody>
+          <a:bodyPr wrap="square" anchor="ctr"/>
+          <a:lstStyle/>
+          <a:p>
+            <a:pPr algn="ctr"/>
+            <a:r>
+              <a:rPr sz="1600" b="1" i="0">
+                <a:solidFill>
+                  <a:srgbClr val="FFFFFF"/>
+                </a:solidFill>
+                <a:latin typeface="Calibri"/>
+              </a:rPr>
+              <a:t>1</a:t>
+            </a:r>
+          </a:p>
+        </p:txBody>
+      </p:sp>
+      <p:sp>
+        <p:nvSpPr>
+          <p:cNvPr id="8" name="TextBox 7"/>
+          <p:cNvSpPr txBox="1"/>
+          <p:nvPr/>
+        </p:nvSpPr>
+        <p:spPr>
+          <a:xfrm>
+            <a:off x="1188720" y="1325880"/>
+            <a:ext cx="10271455" cy="786384"/>
+          </a:xfrm>
+          <a:prstGeom prst="rect">
+            <a:avLst/>
+          </a:prstGeom>
+          <a:noFill/>
+        </p:spPr>
+        <p:txBody>
+          <a:bodyPr wrap="square" anchor="ctr"/>
+          <a:lstStyle/>
+          <a:p>
+            <a:r>
+              <a:rPr sz="1500" b="1" i="0">
+                <a:solidFill>
+                  <a:srgbClr val="095292"/>
+                </a:solidFill>
+                <a:latin typeface="Calibri"/>
+              </a:rPr>
+              <a:t>Paso 1: copie en la plantilla las cinco frases crudas de la entrevista al Dr. Ramirez y marque cada una como NECESIDAD, anotando al lado quien la dijo y en que contexto; esa columna es el origen y no se puede dejar vacia.</a:t>
+            </a:r>
+          </a:p>
+        </p:txBody>
+      </p:sp>
+      <p:sp>
+        <p:nvSpPr>
+          <p:cNvPr id="9" name="Rounded Rectangle 8"/>
+          <p:cNvSpPr/>
+          <p:nvPr/>
+        </p:nvSpPr>
+        <p:spPr>
+          <a:xfrm>
+            <a:off x="457200" y="2276856"/>
+            <a:ext cx="11277295" cy="950976"/>
+          </a:xfrm>
+          <a:prstGeom prst="roundRect">
+            <a:avLst>
+              <a:gd name="adj" fmla="val 12000"/>
+            </a:avLst>
+          </a:prstGeom>
+          <a:solidFill>
+            <a:srgbClr val="E8F4FA"/>
+          </a:solidFill>
+          <a:ln>
+            <a:noFill/>
+          </a:ln>
+        </p:spPr>
+        <p:style>
+          <a:lnRef idx="1">
+            <a:schemeClr val="accent1"/>
+          </a:lnRef>
+          <a:fillRef idx="3">
+            <a:schemeClr val="accent1"/>
+          </a:fillRef>
+          <a:effectRef idx="2">
+            <a:schemeClr val="accent1"/>
+          </a:effectRef>
+          <a:fontRef idx="minor">
+            <a:schemeClr val="lt1"/>
+          </a:fontRef>
+        </p:style>
+        <p:txBody>
+          <a:bodyPr rtlCol="0" anchor="ctr"/>
+          <a:lstStyle/>
+          <a:p>
+            <a:pPr algn="ctr"/>
+          </a:p>
+        </p:txBody>
+      </p:sp>
+      <p:sp>
+        <p:nvSpPr>
+          <p:cNvPr id="10" name="Rounded Rectangle 9"/>
+          <p:cNvSpPr/>
+          <p:nvPr/>
+        </p:nvSpPr>
+        <p:spPr>
+          <a:xfrm>
+            <a:off x="594360" y="2532888"/>
+            <a:ext cx="438912" cy="438912"/>
+          </a:xfrm>
+          <a:prstGeom prst="roundRect">
+            <a:avLst>
+              <a:gd name="adj" fmla="val 12000"/>
+            </a:avLst>
+          </a:prstGeom>
+          <a:solidFill>
+            <a:srgbClr val="095292"/>
+          </a:solidFill>
+          <a:ln>
+            <a:noFill/>
+          </a:ln>
+        </p:spPr>
+        <p:style>
+          <a:lnRef idx="1">
+            <a:schemeClr val="accent1"/>
+          </a:lnRef>
+          <a:fillRef idx="3">
+            <a:schemeClr val="accent1"/>
+          </a:fillRef>
+          <a:effectRef idx="2">
+            <a:schemeClr val="accent1"/>
+          </a:effectRef>
+          <a:fontRef idx="minor">
+            <a:schemeClr val="lt1"/>
+          </a:fontRef>
+        </p:style>
+        <p:txBody>
+          <a:bodyPr rtlCol="0" anchor="ctr"/>
+          <a:lstStyle/>
+          <a:p>
+            <a:pPr algn="ctr"/>
+          </a:p>
+        </p:txBody>
+      </p:sp>
+      <p:sp>
+        <p:nvSpPr>
+          <p:cNvPr id="11" name="TextBox 10"/>
+          <p:cNvSpPr txBox="1"/>
+          <p:nvPr/>
+        </p:nvSpPr>
+        <p:spPr>
+          <a:xfrm>
+            <a:off x="594360" y="2532888"/>
+            <a:ext cx="438912" cy="438912"/>
+          </a:xfrm>
+          <a:prstGeom prst="rect">
+            <a:avLst/>
+          </a:prstGeom>
+          <a:noFill/>
+        </p:spPr>
+        <p:txBody>
+          <a:bodyPr wrap="square" anchor="ctr"/>
+          <a:lstStyle/>
+          <a:p>
+            <a:pPr algn="ctr"/>
+            <a:r>
+              <a:rPr sz="1600" b="1" i="0">
+                <a:solidFill>
+                  <a:srgbClr val="FFFFFF"/>
+                </a:solidFill>
+                <a:latin typeface="Calibri"/>
+              </a:rPr>
+              <a:t>2</a:t>
+            </a:r>
+          </a:p>
+        </p:txBody>
+      </p:sp>
+      <p:sp>
+        <p:nvSpPr>
+          <p:cNvPr id="12" name="TextBox 11"/>
+          <p:cNvSpPr txBox="1"/>
+          <p:nvPr/>
+        </p:nvSpPr>
+        <p:spPr>
+          <a:xfrm>
+            <a:off x="1188720" y="2368296"/>
+            <a:ext cx="10271455" cy="786384"/>
+          </a:xfrm>
+          <a:prstGeom prst="rect">
+            <a:avLst/>
+          </a:prstGeom>
+          <a:noFill/>
+        </p:spPr>
+        <p:txBody>
+          <a:bodyPr wrap="square" anchor="ctr"/>
+          <a:lstStyle/>
+          <a:p>
+            <a:r>
+              <a:rPr sz="1400" b="1" i="0">
+                <a:solidFill>
+                  <a:srgbClr val="095292"/>
+                </a:solidFill>
+                <a:latin typeface="Calibri"/>
+              </a:rPr>
+              <a:t>Paso 2: traduzca las necesidades a requisitos funcionales usando la plantilla el sistema debe permitir a &lt;actor&gt; &lt;accion&gt; &lt;objeto&gt;, hasta llegar a minimo 8 RF numerados de RF-01 a RF-08; ningun RF puede contener la palabra y uniendo dos capacidades distintas.</a:t>
+            </a:r>
+          </a:p>
+        </p:txBody>
+      </p:sp>
+      <p:sp>
+        <p:nvSpPr>
+          <p:cNvPr id="13" name="Rounded Rectangle 12"/>
+          <p:cNvSpPr/>
+          <p:nvPr/>
+        </p:nvSpPr>
+        <p:spPr>
+          <a:xfrm>
+            <a:off x="457200" y="3319272"/>
+            <a:ext cx="11277295" cy="950976"/>
+          </a:xfrm>
+          <a:prstGeom prst="roundRect">
+            <a:avLst>
+              <a:gd name="adj" fmla="val 12000"/>
+            </a:avLst>
+          </a:prstGeom>
+          <a:solidFill>
+            <a:srgbClr val="F2F2F2"/>
+          </a:solidFill>
+          <a:ln>
+            <a:noFill/>
+          </a:ln>
+        </p:spPr>
+        <p:style>
+          <a:lnRef idx="1">
+            <a:schemeClr val="accent1"/>
+          </a:lnRef>
+          <a:fillRef idx="3">
+            <a:schemeClr val="accent1"/>
+          </a:fillRef>
+          <a:effectRef idx="2">
+            <a:schemeClr val="accent1"/>
+          </a:effectRef>
+          <a:fontRef idx="minor">
+            <a:schemeClr val="lt1"/>
+          </a:fontRef>
+        </p:style>
+        <p:txBody>
+          <a:bodyPr rtlCol="0" anchor="ctr"/>
+          <a:lstStyle/>
+          <a:p>
+            <a:pPr algn="ctr"/>
+          </a:p>
+        </p:txBody>
+      </p:sp>
+      <p:sp>
+        <p:nvSpPr>
+          <p:cNvPr id="14" name="Rounded Rectangle 13"/>
+          <p:cNvSpPr/>
+          <p:nvPr/>
+        </p:nvSpPr>
+        <p:spPr>
+          <a:xfrm>
+            <a:off x="594360" y="3575304"/>
+            <a:ext cx="438912" cy="438912"/>
+          </a:xfrm>
+          <a:prstGeom prst="roundRect">
+            <a:avLst>
+              <a:gd name="adj" fmla="val 12000"/>
+            </a:avLst>
+          </a:prstGeom>
+          <a:solidFill>
+            <a:srgbClr val="095292"/>
+          </a:solidFill>
+          <a:ln>
+            <a:noFill/>
+          </a:ln>
+        </p:spPr>
+        <p:style>
+          <a:lnRef idx="1">
+            <a:schemeClr val="accent1"/>
+          </a:lnRef>
+          <a:fillRef idx="3">
+            <a:schemeClr val="accent1"/>
+          </a:fillRef>
+          <a:effectRef idx="2">
+            <a:schemeClr val="accent1"/>
+          </a:effectRef>
+          <a:fontRef idx="minor">
+            <a:schemeClr val="lt1"/>
+          </a:fontRef>
+        </p:style>
+        <p:txBody>
+          <a:bodyPr rtlCol="0" anchor="ctr"/>
+          <a:lstStyle/>
+          <a:p>
+            <a:pPr algn="ctr"/>
+          </a:p>
+        </p:txBody>
+      </p:sp>
+      <p:sp>
+        <p:nvSpPr>
+          <p:cNvPr id="15" name="TextBox 14"/>
+          <p:cNvSpPr txBox="1"/>
+          <p:nvPr/>
+        </p:nvSpPr>
+        <p:spPr>
+          <a:xfrm>
+            <a:off x="594360" y="3575304"/>
+            <a:ext cx="438912" cy="438912"/>
+          </a:xfrm>
+          <a:prstGeom prst="rect">
+            <a:avLst/>
+          </a:prstGeom>
+          <a:noFill/>
+        </p:spPr>
+        <p:txBody>
+          <a:bodyPr wrap="square" anchor="ctr"/>
+          <a:lstStyle/>
+          <a:p>
+            <a:pPr algn="ctr"/>
+            <a:r>
+              <a:rPr sz="1600" b="1" i="0">
+                <a:solidFill>
+                  <a:srgbClr val="FFFFFF"/>
+                </a:solidFill>
+                <a:latin typeface="Calibri"/>
+              </a:rPr>
+              <a:t>3</a:t>
+            </a:r>
+          </a:p>
+        </p:txBody>
+      </p:sp>
+      <p:sp>
+        <p:nvSpPr>
+          <p:cNvPr id="16" name="TextBox 15"/>
+          <p:cNvSpPr txBox="1"/>
+          <p:nvPr/>
+        </p:nvSpPr>
+        <p:spPr>
+          <a:xfrm>
+            <a:off x="1188720" y="3410712"/>
+            <a:ext cx="10271455" cy="786384"/>
+          </a:xfrm>
+          <a:prstGeom prst="rect">
+            <a:avLst/>
+          </a:prstGeom>
+          <a:noFill/>
+        </p:spPr>
+        <p:txBody>
+          <a:bodyPr wrap="square" anchor="ctr"/>
+          <a:lstStyle/>
+          <a:p>
+            <a:r>
+              <a:rPr sz="1500" b="1" i="0">
+                <a:solidFill>
+                  <a:srgbClr val="095292"/>
+                </a:solidFill>
+                <a:latin typeface="Calibri"/>
+              </a:rPr>
+              <a:t>Paso 3: derive 4 RNF, uno por categoria (desempeno, control de acceso, usabilidad y respaldo), y escriba en cada uno al menos un numero: segundos, cantidad de registros, frecuencia o porcentaje.</a:t>
+            </a:r>
+          </a:p>
+        </p:txBody>
+      </p:sp>
+      <p:sp>
+        <p:nvSpPr>
+          <p:cNvPr id="17" name="Rounded Rectangle 16"/>
+          <p:cNvSpPr/>
+          <p:nvPr/>
+        </p:nvSpPr>
+        <p:spPr>
+          <a:xfrm>
+            <a:off x="457200" y="4361688"/>
+            <a:ext cx="11277295" cy="950976"/>
+          </a:xfrm>
+          <a:prstGeom prst="roundRect">
+            <a:avLst>
+              <a:gd name="adj" fmla="val 12000"/>
+            </a:avLst>
+          </a:prstGeom>
+          <a:solidFill>
+            <a:srgbClr val="E8F4FA"/>
+          </a:solidFill>
+          <a:ln>
+            <a:noFill/>
+          </a:ln>
+        </p:spPr>
+        <p:style>
+          <a:lnRef idx="1">
+            <a:schemeClr val="accent1"/>
+          </a:lnRef>
+          <a:fillRef idx="3">
+            <a:schemeClr val="accent1"/>
+          </a:fillRef>
+          <a:effectRef idx="2">
+            <a:schemeClr val="accent1"/>
+          </a:effectRef>
+          <a:fontRef idx="minor">
+            <a:schemeClr val="lt1"/>
+          </a:fontRef>
+        </p:style>
+        <p:txBody>
+          <a:bodyPr rtlCol="0" anchor="ctr"/>
+          <a:lstStyle/>
+          <a:p>
+            <a:pPr algn="ctr"/>
+          </a:p>
+        </p:txBody>
+      </p:sp>
+      <p:sp>
+        <p:nvSpPr>
+          <p:cNvPr id="18" name="Rounded Rectangle 17"/>
+          <p:cNvSpPr/>
+          <p:nvPr/>
+        </p:nvSpPr>
+        <p:spPr>
+          <a:xfrm>
+            <a:off x="594360" y="4617720"/>
+            <a:ext cx="438912" cy="438912"/>
+          </a:xfrm>
+          <a:prstGeom prst="roundRect">
+            <a:avLst>
+              <a:gd name="adj" fmla="val 12000"/>
+            </a:avLst>
+          </a:prstGeom>
+          <a:solidFill>
+            <a:srgbClr val="095292"/>
+          </a:solidFill>
+          <a:ln>
+            <a:noFill/>
+          </a:ln>
+        </p:spPr>
+        <p:style>
+          <a:lnRef idx="1">
+            <a:schemeClr val="accent1"/>
+          </a:lnRef>
+          <a:fillRef idx="3">
+            <a:schemeClr val="accent1"/>
+          </a:fillRef>
+          <a:effectRef idx="2">
+            <a:schemeClr val="accent1"/>
+          </a:effectRef>
+          <a:fontRef idx="minor">
+            <a:schemeClr val="lt1"/>
+          </a:fontRef>
+        </p:style>
+        <p:txBody>
+          <a:bodyPr rtlCol="0" anchor="ctr"/>
+          <a:lstStyle/>
+          <a:p>
+            <a:pPr algn="ctr"/>
+          </a:p>
+        </p:txBody>
+      </p:sp>
+      <p:sp>
+        <p:nvSpPr>
+          <p:cNvPr id="19" name="TextBox 18"/>
+          <p:cNvSpPr txBox="1"/>
+          <p:nvPr/>
+        </p:nvSpPr>
+        <p:spPr>
+          <a:xfrm>
+            <a:off x="594360" y="4617720"/>
+            <a:ext cx="438912" cy="438912"/>
+          </a:xfrm>
+          <a:prstGeom prst="rect">
+            <a:avLst/>
+          </a:prstGeom>
+          <a:noFill/>
+        </p:spPr>
+        <p:txBody>
+          <a:bodyPr wrap="square" anchor="ctr"/>
+          <a:lstStyle/>
+          <a:p>
+            <a:pPr algn="ctr"/>
+            <a:r>
+              <a:rPr sz="1600" b="1" i="0">
+                <a:solidFill>
+                  <a:srgbClr val="FFFFFF"/>
+                </a:solidFill>
+                <a:latin typeface="Calibri"/>
+              </a:rPr>
+              <a:t>4</a:t>
+            </a:r>
+          </a:p>
+        </p:txBody>
+      </p:sp>
+      <p:sp>
+        <p:nvSpPr>
+          <p:cNvPr id="20" name="TextBox 19"/>
+          <p:cNvSpPr txBox="1"/>
+          <p:nvPr/>
+        </p:nvSpPr>
+        <p:spPr>
+          <a:xfrm>
+            <a:off x="1188720" y="4453128"/>
+            <a:ext cx="10271455" cy="786384"/>
+          </a:xfrm>
+          <a:prstGeom prst="rect">
+            <a:avLst/>
+          </a:prstGeom>
+          <a:noFill/>
+        </p:spPr>
+        <p:txBody>
+          <a:bodyPr wrap="square" anchor="ctr"/>
+          <a:lstStyle/>
+          <a:p>
+            <a:r>
+              <a:rPr sz="1500" b="1" i="0">
+                <a:solidFill>
+                  <a:srgbClr val="095292"/>
+                </a:solidFill>
+                <a:latin typeface="Calibri"/>
+              </a:rPr>
+              <a:t>Paso 4: asigne prioridad MoSCoW a los 12 requisitos, verifique que los Must no pasen de seis y justifique en una linea por que los dos Won't quedan fuera de esta version de VetCare.</a:t>
+            </a:r>
+          </a:p>
+        </p:txBody>
+      </p:sp>
+      <p:sp>
+        <p:nvSpPr>
+          <p:cNvPr id="21" name="Rounded Rectangle 20"/>
+          <p:cNvSpPr/>
+          <p:nvPr/>
+        </p:nvSpPr>
+        <p:spPr>
+          <a:xfrm>
+            <a:off x="457200" y="5404104"/>
+            <a:ext cx="11277295" cy="950976"/>
+          </a:xfrm>
+          <a:prstGeom prst="roundRect">
+            <a:avLst>
+              <a:gd name="adj" fmla="val 12000"/>
+            </a:avLst>
+          </a:prstGeom>
+          <a:solidFill>
+            <a:srgbClr val="F2F2F2"/>
+          </a:solidFill>
+          <a:ln>
+            <a:noFill/>
+          </a:ln>
+        </p:spPr>
+        <p:style>
+          <a:lnRef idx="1">
+            <a:schemeClr val="accent1"/>
+          </a:lnRef>
+          <a:fillRef idx="3">
+            <a:schemeClr val="accent1"/>
+          </a:fillRef>
+          <a:effectRef idx="2">
+            <a:schemeClr val="accent1"/>
+          </a:effectRef>
+          <a:fontRef idx="minor">
+            <a:schemeClr val="lt1"/>
+          </a:fontRef>
+        </p:style>
+        <p:txBody>
+          <a:bodyPr rtlCol="0" anchor="ctr"/>
+          <a:lstStyle/>
+          <a:p>
+            <a:pPr algn="ctr"/>
+          </a:p>
+        </p:txBody>
+      </p:sp>
+      <p:sp>
+        <p:nvSpPr>
+          <p:cNvPr id="22" name="Rounded Rectangle 21"/>
+          <p:cNvSpPr/>
+          <p:nvPr/>
+        </p:nvSpPr>
+        <p:spPr>
+          <a:xfrm>
+            <a:off x="594360" y="5660136"/>
+            <a:ext cx="438912" cy="438912"/>
+          </a:xfrm>
+          <a:prstGeom prst="roundRect">
+            <a:avLst>
+              <a:gd name="adj" fmla="val 12000"/>
+            </a:avLst>
+          </a:prstGeom>
+          <a:solidFill>
+            <a:srgbClr val="095292"/>
+          </a:solidFill>
+          <a:ln>
+            <a:noFill/>
+          </a:ln>
+        </p:spPr>
+        <p:style>
+          <a:lnRef idx="1">
+            <a:schemeClr val="accent1"/>
+          </a:lnRef>
+          <a:fillRef idx="3">
+            <a:schemeClr val="accent1"/>
+          </a:fillRef>
+          <a:effectRef idx="2">
+            <a:schemeClr val="accent1"/>
+          </a:effectRef>
+          <a:fontRef idx="minor">
+            <a:schemeClr val="lt1"/>
+          </a:fontRef>
+        </p:style>
+        <p:txBody>
+          <a:bodyPr rtlCol="0" anchor="ctr"/>
+          <a:lstStyle/>
+          <a:p>
+            <a:pPr algn="ctr"/>
+          </a:p>
+        </p:txBody>
+      </p:sp>
+      <p:sp>
+        <p:nvSpPr>
+          <p:cNvPr id="23" name="TextBox 22"/>
+          <p:cNvSpPr txBox="1"/>
+          <p:nvPr/>
+        </p:nvSpPr>
+        <p:spPr>
+          <a:xfrm>
+            <a:off x="594360" y="5660136"/>
+            <a:ext cx="438912" cy="438912"/>
+          </a:xfrm>
+          <a:prstGeom prst="rect">
+            <a:avLst/>
+          </a:prstGeom>
+          <a:noFill/>
+        </p:spPr>
+        <p:txBody>
+          <a:bodyPr wrap="square" anchor="ctr"/>
+          <a:lstStyle/>
+          <a:p>
+            <a:pPr algn="ctr"/>
+            <a:r>
+              <a:rPr sz="1600" b="1" i="0">
+                <a:solidFill>
+                  <a:srgbClr val="FFFFFF"/>
+                </a:solidFill>
+                <a:latin typeface="Calibri"/>
+              </a:rPr>
+              <a:t>5</a:t>
+            </a:r>
+          </a:p>
+        </p:txBody>
+      </p:sp>
+      <p:sp>
+        <p:nvSpPr>
+          <p:cNvPr id="24" name="TextBox 23"/>
+          <p:cNvSpPr txBox="1"/>
+          <p:nvPr/>
+        </p:nvSpPr>
+        <p:spPr>
+          <a:xfrm>
+            <a:off x="1188720" y="5495544"/>
+            <a:ext cx="10271455" cy="786384"/>
+          </a:xfrm>
+          <a:prstGeom prst="rect">
+            <a:avLst/>
+          </a:prstGeom>
+          <a:noFill/>
+        </p:spPr>
+        <p:txBody>
+          <a:bodyPr wrap="square" anchor="ctr"/>
+          <a:lstStyle/>
+          <a:p>
+            <a:r>
+              <a:rPr sz="1500" b="1" i="0">
+                <a:solidFill>
+                  <a:srgbClr val="095292"/>
+                </a:solidFill>
+                <a:latin typeface="Calibri"/>
+              </a:rPr>
+              <a:t>Paso 5: complete la matriz de trazabilidad con las columnas Necesidad, RF/RNF, Pantalla prevista y Prueba de aceptacion, exporte el documento a PDF y subalo a la plataforma del curso con el nombre RF-RNF-VetCare-&lt;sus apellidos&gt;.pdf.</a:t>
+            </a:r>
+          </a:p>
+        </p:txBody>
+      </p:sp>
+      <p:sp>
+        <p:nvSpPr>
+          <p:cNvPr id="25" name="TextBox 24"/>
+          <p:cNvSpPr txBox="1"/>
+          <p:nvPr/>
+        </p:nvSpPr>
+        <p:spPr>
+          <a:xfrm>
+            <a:off x="11185855" y="6473952"/>
+            <a:ext cx="640080" cy="274320"/>
+          </a:xfrm>
+          <a:prstGeom prst="rect">
+            <a:avLst/>
+          </a:prstGeom>
+          <a:noFill/>
+        </p:spPr>
+        <p:txBody>
+          <a:bodyPr wrap="square">
+            <a:spAutoFit/>
+          </a:bodyPr>
+          <a:lstStyle/>
+          <a:p>
+            <a:pPr algn="r"/>
+            <a:r>
+              <a:rPr sz="1100" b="0" i="0">
+                <a:solidFill>
+                  <a:srgbClr val="666666"/>
+                </a:solidFill>
+                <a:latin typeface="Calibri"/>
+              </a:rPr>
+              <a:t>15</a:t>
+            </a:r>
+          </a:p>
+        </p:txBody>
+      </p:sp>
+    </p:spTree>
+  </p:cSld>
+  <p:clrMapOvr>
+    <a:masterClrMapping/>
+  </p:clrMapOvr>
+</p:sld>
+</file>
+
+<file path=ppt/slides/slide16.xml><?xml version="1.0" encoding="utf-8"?>
+<p:sld xmlns:a="http://schemas.openxmlformats.org/drawingml/2006/main" xmlns:p="http://schemas.openxmlformats.org/presentationml/2006/main" xmlns:r="http://schemas.openxmlformats.org/officeDocument/2006/relationships">
+  <p:cSld>
+    <p:bg>
+      <p:bgPr>
+        <a:solidFill>
+          <a:srgbClr val="FFFFFF"/>
+        </a:solidFill>
+        <a:effectLst/>
+      </p:bgPr>
+    </p:bg>
+    <p:spTree>
+      <p:nvGrpSpPr>
+        <p:cNvPr id="1" name=""/>
+        <p:cNvGrpSpPr/>
+        <p:nvPr/>
+      </p:nvGrpSpPr>
+      <p:grpSpPr/>
+      <p:sp>
+        <p:nvSpPr>
+          <p:cNvPr id="2" name="Rectangle 1"/>
+          <p:cNvSpPr/>
+          <p:nvPr/>
+        </p:nvSpPr>
+        <p:spPr>
+          <a:xfrm>
+            <a:off x="0" y="0"/>
+            <a:ext cx="12191695" cy="960120"/>
+          </a:xfrm>
+          <a:prstGeom prst="rect">
+            <a:avLst/>
+          </a:prstGeom>
+          <a:solidFill>
+            <a:srgbClr val="095292"/>
+          </a:solidFill>
+          <a:ln>
+            <a:noFill/>
+          </a:ln>
+        </p:spPr>
+        <p:style>
+          <a:lnRef idx="1">
+            <a:schemeClr val="accent1"/>
+          </a:lnRef>
+          <a:fillRef idx="3">
+            <a:schemeClr val="accent1"/>
+          </a:fillRef>
+          <a:effectRef idx="2">
+            <a:schemeClr val="accent1"/>
+          </a:effectRef>
+          <a:fontRef idx="minor">
+            <a:schemeClr val="lt1"/>
+          </a:fontRef>
+        </p:style>
+        <p:txBody>
+          <a:bodyPr rtlCol="0" anchor="ctr"/>
+          <a:lstStyle/>
+          <a:p>
+            <a:pPr algn="ctr"/>
+          </a:p>
+        </p:txBody>
+      </p:sp>
+      <p:sp>
+        <p:nvSpPr>
+          <p:cNvPr id="3" name="Rectangle 2"/>
+          <p:cNvSpPr/>
+          <p:nvPr/>
+        </p:nvSpPr>
+        <p:spPr>
+          <a:xfrm>
+            <a:off x="0" y="960120"/>
+            <a:ext cx="12191695" cy="41148"/>
+          </a:xfrm>
+          <a:prstGeom prst="rect">
+            <a:avLst/>
+          </a:prstGeom>
+          <a:solidFill>
+            <a:srgbClr val="FFD000"/>
+          </a:solidFill>
+          <a:ln>
+            <a:noFill/>
+          </a:ln>
+        </p:spPr>
+        <p:style>
+          <a:lnRef idx="1">
+            <a:schemeClr val="accent1"/>
+          </a:lnRef>
+          <a:fillRef idx="3">
+            <a:schemeClr val="accent1"/>
+          </a:fillRef>
+          <a:effectRef idx="2">
+            <a:schemeClr val="accent1"/>
+          </a:effectRef>
+          <a:fontRef idx="minor">
+            <a:schemeClr val="lt1"/>
+          </a:fontRef>
+        </p:style>
+        <p:txBody>
+          <a:bodyPr rtlCol="0" anchor="ctr"/>
+          <a:lstStyle/>
+          <a:p>
+            <a:pPr algn="ctr"/>
+          </a:p>
+        </p:txBody>
+      </p:sp>
+      <p:sp>
+        <p:nvSpPr>
+          <p:cNvPr id="4" name="TextBox 3"/>
+          <p:cNvSpPr txBox="1"/>
+          <p:nvPr/>
+        </p:nvSpPr>
+        <p:spPr>
+          <a:xfrm>
+            <a:off x="457200" y="164592"/>
+            <a:ext cx="11277295" cy="502920"/>
+          </a:xfrm>
+          <a:prstGeom prst="rect">
+            <a:avLst/>
+          </a:prstGeom>
+          <a:noFill/>
+        </p:spPr>
+        <p:txBody>
+          <a:bodyPr wrap="square">
+            <a:spAutoFit/>
+          </a:bodyPr>
+          <a:lstStyle/>
+          <a:p>
+            <a:r>
+              <a:rPr sz="2600" b="1" i="0">
+                <a:solidFill>
+                  <a:srgbClr val="FFFFFF"/>
+                </a:solidFill>
+                <a:latin typeface="Calibri"/>
+              </a:rPr>
+              <a:t>Antes de entregar — autochequeo</a:t>
+            </a:r>
+          </a:p>
+        </p:txBody>
+      </p:sp>
+      <p:sp>
+        <p:nvSpPr>
+          <p:cNvPr id="5" name="Rounded Rectangle 4"/>
+          <p:cNvSpPr/>
+          <p:nvPr/>
+        </p:nvSpPr>
+        <p:spPr>
+          <a:xfrm>
+            <a:off x="457200" y="1261872"/>
+            <a:ext cx="11277295" cy="566928"/>
+          </a:xfrm>
+          <a:prstGeom prst="roundRect">
+            <a:avLst>
+              <a:gd name="adj" fmla="val 12000"/>
+            </a:avLst>
+          </a:prstGeom>
+          <a:solidFill>
+            <a:srgbClr val="F2F2F2"/>
+          </a:solidFill>
+          <a:ln>
+            <a:noFill/>
+          </a:ln>
+        </p:spPr>
+        <p:style>
+          <a:lnRef idx="1">
+            <a:schemeClr val="accent1"/>
+          </a:lnRef>
+          <a:fillRef idx="3">
+            <a:schemeClr val="accent1"/>
+          </a:fillRef>
+          <a:effectRef idx="2">
+            <a:schemeClr val="accent1"/>
+          </a:effectRef>
+          <a:fontRef idx="minor">
+            <a:schemeClr val="lt1"/>
+          </a:fontRef>
+        </p:style>
+        <p:txBody>
+          <a:bodyPr rtlCol="0" anchor="ctr"/>
+          <a:lstStyle/>
+          <a:p>
+            <a:pPr algn="ctr"/>
+          </a:p>
+        </p:txBody>
+      </p:sp>
+      <p:sp>
+        <p:nvSpPr>
+          <p:cNvPr id="6" name="Rectangle 5"/>
+          <p:cNvSpPr/>
+          <p:nvPr/>
+        </p:nvSpPr>
+        <p:spPr>
+          <a:xfrm>
+            <a:off x="640080" y="1408175"/>
+            <a:ext cx="274320" cy="274320"/>
+          </a:xfrm>
+          <a:prstGeom prst="rect">
+            <a:avLst/>
+          </a:prstGeom>
+          <a:solidFill>
+            <a:srgbClr val="FFFFFF"/>
+          </a:solidFill>
+          <a:ln>
+            <a:solidFill>
+              <a:srgbClr val="333333"/>
+            </a:solidFill>
+          </a:ln>
+        </p:spPr>
+        <p:style>
+          <a:lnRef idx="1">
+            <a:schemeClr val="accent1"/>
+          </a:lnRef>
+          <a:fillRef idx="3">
+            <a:schemeClr val="accent1"/>
+          </a:fillRef>
+          <a:effectRef idx="2">
+            <a:schemeClr val="accent1"/>
+          </a:effectRef>
+          <a:fontRef idx="minor">
+            <a:schemeClr val="lt1"/>
+          </a:fontRef>
+        </p:style>
+        <p:txBody>
+          <a:bodyPr rtlCol="0" anchor="ctr"/>
+          <a:lstStyle/>
+          <a:p>
+            <a:pPr algn="ctr"/>
+          </a:p>
+        </p:txBody>
+      </p:sp>
+      <p:sp>
+        <p:nvSpPr>
+          <p:cNvPr id="7" name="Rectangle 6"/>
+          <p:cNvSpPr/>
+          <p:nvPr/>
+        </p:nvSpPr>
+        <p:spPr>
+          <a:xfrm>
+            <a:off x="640080" y="1408175"/>
+            <a:ext cx="73152" cy="274320"/>
+          </a:xfrm>
+          <a:prstGeom prst="rect">
+            <a:avLst/>
+          </a:prstGeom>
+          <a:solidFill>
+            <a:srgbClr val="269CCB"/>
+          </a:solidFill>
+          <a:ln>
+            <a:noFill/>
+          </a:ln>
+        </p:spPr>
+        <p:style>
+          <a:lnRef idx="1">
+            <a:schemeClr val="accent1"/>
+          </a:lnRef>
+          <a:fillRef idx="3">
+            <a:schemeClr val="accent1"/>
+          </a:fillRef>
+          <a:effectRef idx="2">
+            <a:schemeClr val="accent1"/>
+          </a:effectRef>
+          <a:fontRef idx="minor">
+            <a:schemeClr val="lt1"/>
+          </a:fontRef>
+        </p:style>
+        <p:txBody>
+          <a:bodyPr rtlCol="0" anchor="ctr"/>
+          <a:lstStyle/>
+          <a:p>
+            <a:pPr algn="ctr"/>
+          </a:p>
+        </p:txBody>
+      </p:sp>
+      <p:sp>
+        <p:nvSpPr>
+          <p:cNvPr id="8" name="TextBox 7"/>
+          <p:cNvSpPr txBox="1"/>
+          <p:nvPr/>
+        </p:nvSpPr>
+        <p:spPr>
+          <a:xfrm>
+            <a:off x="1097280" y="1353312"/>
+            <a:ext cx="10362895" cy="402336"/>
+          </a:xfrm>
+          <a:prstGeom prst="rect">
+            <a:avLst/>
+          </a:prstGeom>
+          <a:noFill/>
+        </p:spPr>
+        <p:txBody>
+          <a:bodyPr wrap="square" anchor="ctr"/>
+          <a:lstStyle/>
+          <a:p>
+            <a:r>
+              <a:rPr sz="1500" b="0" i="0">
+                <a:solidFill>
+                  <a:srgbClr val="333333"/>
+                </a:solidFill>
+                <a:latin typeface="Calibri"/>
+              </a:rPr>
+              <a:t>Con que prueba concreta, hecha en menos de dos minutos delante del Dr. Ramirez, demostraria que este requisito quedo cumplido?</a:t>
+            </a:r>
+          </a:p>
+        </p:txBody>
+      </p:sp>
+      <p:sp>
+        <p:nvSpPr>
+          <p:cNvPr id="9" name="Rounded Rectangle 8"/>
+          <p:cNvSpPr/>
+          <p:nvPr/>
+        </p:nvSpPr>
+        <p:spPr>
+          <a:xfrm>
+            <a:off x="457200" y="1938528"/>
+            <a:ext cx="11277295" cy="566928"/>
+          </a:xfrm>
+          <a:prstGeom prst="roundRect">
+            <a:avLst>
+              <a:gd name="adj" fmla="val 12000"/>
+            </a:avLst>
+          </a:prstGeom>
+          <a:solidFill>
+            <a:srgbClr val="F2F2F2"/>
+          </a:solidFill>
+          <a:ln>
+            <a:noFill/>
+          </a:ln>
+        </p:spPr>
+        <p:style>
+          <a:lnRef idx="1">
+            <a:schemeClr val="accent1"/>
+          </a:lnRef>
+          <a:fillRef idx="3">
+            <a:schemeClr val="accent1"/>
+          </a:fillRef>
+          <a:effectRef idx="2">
+            <a:schemeClr val="accent1"/>
+          </a:effectRef>
+          <a:fontRef idx="minor">
+            <a:schemeClr val="lt1"/>
+          </a:fontRef>
+        </p:style>
+        <p:txBody>
+          <a:bodyPr rtlCol="0" anchor="ctr"/>
+          <a:lstStyle/>
+          <a:p>
+            <a:pPr algn="ctr"/>
+          </a:p>
+        </p:txBody>
+      </p:sp>
+      <p:sp>
+        <p:nvSpPr>
+          <p:cNvPr id="10" name="Rectangle 9"/>
+          <p:cNvSpPr/>
+          <p:nvPr/>
+        </p:nvSpPr>
+        <p:spPr>
+          <a:xfrm>
+            <a:off x="640080" y="2084832"/>
+            <a:ext cx="274320" cy="274320"/>
+          </a:xfrm>
+          <a:prstGeom prst="rect">
+            <a:avLst/>
+          </a:prstGeom>
+          <a:solidFill>
+            <a:srgbClr val="FFFFFF"/>
+          </a:solidFill>
+          <a:ln>
+            <a:solidFill>
+              <a:srgbClr val="333333"/>
+            </a:solidFill>
+          </a:ln>
+        </p:spPr>
+        <p:style>
+          <a:lnRef idx="1">
+            <a:schemeClr val="accent1"/>
+          </a:lnRef>
+          <a:fillRef idx="3">
+            <a:schemeClr val="accent1"/>
+          </a:fillRef>
+          <a:effectRef idx="2">
+            <a:schemeClr val="accent1"/>
+          </a:effectRef>
+          <a:fontRef idx="minor">
+            <a:schemeClr val="lt1"/>
+          </a:fontRef>
+        </p:style>
+        <p:txBody>
+          <a:bodyPr rtlCol="0" anchor="ctr"/>
+          <a:lstStyle/>
+          <a:p>
+            <a:pPr algn="ctr"/>
+          </a:p>
+        </p:txBody>
+      </p:sp>
+      <p:sp>
+        <p:nvSpPr>
+          <p:cNvPr id="11" name="Rectangle 10"/>
+          <p:cNvSpPr/>
+          <p:nvPr/>
+        </p:nvSpPr>
+        <p:spPr>
+          <a:xfrm>
+            <a:off x="640080" y="2084832"/>
+            <a:ext cx="73152" cy="274320"/>
+          </a:xfrm>
+          <a:prstGeom prst="rect">
+            <a:avLst/>
+          </a:prstGeom>
+          <a:solidFill>
+            <a:srgbClr val="269CCB"/>
+          </a:solidFill>
+          <a:ln>
+            <a:noFill/>
+          </a:ln>
+        </p:spPr>
+        <p:style>
+          <a:lnRef idx="1">
+            <a:schemeClr val="accent1"/>
+          </a:lnRef>
+          <a:fillRef idx="3">
+            <a:schemeClr val="accent1"/>
+          </a:fillRef>
+          <a:effectRef idx="2">
+            <a:schemeClr val="accent1"/>
+          </a:effectRef>
+          <a:fontRef idx="minor">
+            <a:schemeClr val="lt1"/>
+          </a:fontRef>
+        </p:style>
+        <p:txBody>
+          <a:bodyPr rtlCol="0" anchor="ctr"/>
+          <a:lstStyle/>
+          <a:p>
+            <a:pPr algn="ctr"/>
+          </a:p>
+        </p:txBody>
+      </p:sp>
+      <p:sp>
+        <p:nvSpPr>
+          <p:cNvPr id="12" name="TextBox 11"/>
+          <p:cNvSpPr txBox="1"/>
+          <p:nvPr/>
+        </p:nvSpPr>
+        <p:spPr>
+          <a:xfrm>
+            <a:off x="1097280" y="2029968"/>
+            <a:ext cx="10362895" cy="402336"/>
+          </a:xfrm>
+          <a:prstGeom prst="rect">
+            <a:avLst/>
+          </a:prstGeom>
+          <a:noFill/>
+        </p:spPr>
+        <p:txBody>
+          <a:bodyPr wrap="square" anchor="ctr"/>
+          <a:lstStyle/>
+          <a:p>
+            <a:r>
+              <a:rPr sz="1500" b="0" i="0">
+                <a:solidFill>
+                  <a:srgbClr val="333333"/>
+                </a:solidFill>
+                <a:latin typeface="Calibri"/>
+              </a:rPr>
+              <a:t>Si borro este requisito de la lista, VetCare deja de resolver alguno de los tres dolores de Huellitas o solamente queda menos vistoso?</a:t>
+            </a:r>
+          </a:p>
+        </p:txBody>
+      </p:sp>
+      <p:sp>
+        <p:nvSpPr>
+          <p:cNvPr id="13" name="Rounded Rectangle 12"/>
+          <p:cNvSpPr/>
+          <p:nvPr/>
+        </p:nvSpPr>
+        <p:spPr>
+          <a:xfrm>
+            <a:off x="457200" y="2615184"/>
+            <a:ext cx="11277295" cy="566928"/>
+          </a:xfrm>
+          <a:prstGeom prst="roundRect">
+            <a:avLst>
+              <a:gd name="adj" fmla="val 12000"/>
+            </a:avLst>
+          </a:prstGeom>
+          <a:solidFill>
+            <a:srgbClr val="F2F2F2"/>
+          </a:solidFill>
+          <a:ln>
+            <a:noFill/>
+          </a:ln>
+        </p:spPr>
+        <p:style>
+          <a:lnRef idx="1">
+            <a:schemeClr val="accent1"/>
+          </a:lnRef>
+          <a:fillRef idx="3">
+            <a:schemeClr val="accent1"/>
+          </a:fillRef>
+          <a:effectRef idx="2">
+            <a:schemeClr val="accent1"/>
+          </a:effectRef>
+          <a:fontRef idx="minor">
+            <a:schemeClr val="lt1"/>
+          </a:fontRef>
+        </p:style>
+        <p:txBody>
+          <a:bodyPr rtlCol="0" anchor="ctr"/>
+          <a:lstStyle/>
+          <a:p>
+            <a:pPr algn="ctr"/>
+          </a:p>
+        </p:txBody>
+      </p:sp>
+      <p:sp>
+        <p:nvSpPr>
+          <p:cNvPr id="14" name="Rectangle 13"/>
+          <p:cNvSpPr/>
+          <p:nvPr/>
+        </p:nvSpPr>
+        <p:spPr>
+          <a:xfrm>
+            <a:off x="640080" y="2761488"/>
+            <a:ext cx="274320" cy="274320"/>
+          </a:xfrm>
+          <a:prstGeom prst="rect">
+            <a:avLst/>
+          </a:prstGeom>
+          <a:solidFill>
+            <a:srgbClr val="FFFFFF"/>
+          </a:solidFill>
+          <a:ln>
+            <a:solidFill>
+              <a:srgbClr val="333333"/>
+            </a:solidFill>
+          </a:ln>
+        </p:spPr>
+        <p:style>
+          <a:lnRef idx="1">
+            <a:schemeClr val="accent1"/>
+          </a:lnRef>
+          <a:fillRef idx="3">
+            <a:schemeClr val="accent1"/>
+          </a:fillRef>
+          <a:effectRef idx="2">
+            <a:schemeClr val="accent1"/>
+          </a:effectRef>
+          <a:fontRef idx="minor">
+            <a:schemeClr val="lt1"/>
+          </a:fontRef>
+        </p:style>
+        <p:txBody>
+          <a:bodyPr rtlCol="0" anchor="ctr"/>
+          <a:lstStyle/>
+          <a:p>
+            <a:pPr algn="ctr"/>
+          </a:p>
+        </p:txBody>
+      </p:sp>
+      <p:sp>
+        <p:nvSpPr>
+          <p:cNvPr id="15" name="Rectangle 14"/>
+          <p:cNvSpPr/>
+          <p:nvPr/>
+        </p:nvSpPr>
+        <p:spPr>
+          <a:xfrm>
+            <a:off x="640080" y="2761488"/>
+            <a:ext cx="73152" cy="274320"/>
+          </a:xfrm>
+          <a:prstGeom prst="rect">
+            <a:avLst/>
+          </a:prstGeom>
+          <a:solidFill>
+            <a:srgbClr val="269CCB"/>
+          </a:solidFill>
+          <a:ln>
+            <a:noFill/>
+          </a:ln>
+        </p:spPr>
+        <p:style>
+          <a:lnRef idx="1">
+            <a:schemeClr val="accent1"/>
+          </a:lnRef>
+          <a:fillRef idx="3">
+            <a:schemeClr val="accent1"/>
+          </a:fillRef>
+          <a:effectRef idx="2">
+            <a:schemeClr val="accent1"/>
+          </a:effectRef>
+          <a:fontRef idx="minor">
+            <a:schemeClr val="lt1"/>
+          </a:fontRef>
+        </p:style>
+        <p:txBody>
+          <a:bodyPr rtlCol="0" anchor="ctr"/>
+          <a:lstStyle/>
+          <a:p>
+            <a:pPr algn="ctr"/>
+          </a:p>
+        </p:txBody>
+      </p:sp>
+      <p:sp>
+        <p:nvSpPr>
+          <p:cNvPr id="16" name="TextBox 15"/>
+          <p:cNvSpPr txBox="1"/>
+          <p:nvPr/>
+        </p:nvSpPr>
+        <p:spPr>
+          <a:xfrm>
+            <a:off x="1097280" y="2706624"/>
+            <a:ext cx="10362895" cy="402336"/>
+          </a:xfrm>
+          <a:prstGeom prst="rect">
+            <a:avLst/>
+          </a:prstGeom>
+          <a:noFill/>
+        </p:spPr>
+        <p:txBody>
+          <a:bodyPr wrap="square" anchor="ctr"/>
+          <a:lstStyle/>
+          <a:p>
+            <a:r>
+              <a:rPr sz="1500" b="0" i="0">
+                <a:solidFill>
+                  <a:srgbClr val="333333"/>
+                </a:solidFill>
+                <a:latin typeface="Calibri"/>
+              </a:rPr>
+              <a:t>Esta frase describe una sola accion de un solo actor, o estoy escondiendo dos o tres requisitos detras de una y?</a:t>
+            </a:r>
+          </a:p>
+        </p:txBody>
+      </p:sp>
+      <p:sp>
+        <p:nvSpPr>
+          <p:cNvPr id="17" name="TextBox 16"/>
+          <p:cNvSpPr txBox="1"/>
+          <p:nvPr/>
+        </p:nvSpPr>
+        <p:spPr>
+          <a:xfrm>
+            <a:off x="11185855" y="6473952"/>
+            <a:ext cx="640080" cy="274320"/>
+          </a:xfrm>
+          <a:prstGeom prst="rect">
+            <a:avLst/>
+          </a:prstGeom>
+          <a:noFill/>
+        </p:spPr>
+        <p:txBody>
+          <a:bodyPr wrap="square">
+            <a:spAutoFit/>
+          </a:bodyPr>
+          <a:lstStyle/>
+          <a:p>
+            <a:pPr algn="r"/>
+            <a:r>
+              <a:rPr sz="1100" b="0" i="0">
+                <a:solidFill>
+                  <a:srgbClr val="666666"/>
+                </a:solidFill>
+                <a:latin typeface="Calibri"/>
+              </a:rPr>
+              <a:t>16</a:t>
+            </a:r>
+          </a:p>
+        </p:txBody>
+      </p:sp>
+    </p:spTree>
+  </p:cSld>
+  <p:clrMapOvr>
+    <a:masterClrMapping/>
+  </p:clrMapOvr>
+</p:sld>
+</file>
+
+<file path=ppt/slides/slide17.xml><?xml version="1.0" encoding="utf-8"?>
+<p:sld xmlns:a="http://schemas.openxmlformats.org/drawingml/2006/main" xmlns:p="http://schemas.openxmlformats.org/presentationml/2006/main" xmlns:r="http://schemas.openxmlformats.org/officeDocument/2006/relationships">
+  <p:cSld>
+    <p:bg>
+      <p:bgPr>
+        <a:solidFill>
+          <a:srgbClr val="FFFFFF"/>
+        </a:solidFill>
+        <a:effectLst/>
+      </p:bgPr>
+    </p:bg>
+    <p:spTree>
+      <p:nvGrpSpPr>
+        <p:cNvPr id="1" name=""/>
+        <p:cNvGrpSpPr/>
+        <p:nvPr/>
+      </p:nvGrpSpPr>
+      <p:grpSpPr/>
+      <p:sp>
+        <p:nvSpPr>
+          <p:cNvPr id="2" name="Rectangle 1"/>
+          <p:cNvSpPr/>
+          <p:nvPr/>
+        </p:nvSpPr>
+        <p:spPr>
+          <a:xfrm>
+            <a:off x="0" y="0"/>
+            <a:ext cx="12191695" cy="960120"/>
+          </a:xfrm>
+          <a:prstGeom prst="rect">
+            <a:avLst/>
+          </a:prstGeom>
+          <a:solidFill>
+            <a:srgbClr val="095292"/>
+          </a:solidFill>
+          <a:ln>
+            <a:noFill/>
+          </a:ln>
+        </p:spPr>
+        <p:style>
+          <a:lnRef idx="1">
+            <a:schemeClr val="accent1"/>
+          </a:lnRef>
+          <a:fillRef idx="3">
+            <a:schemeClr val="accent1"/>
+          </a:fillRef>
+          <a:effectRef idx="2">
+            <a:schemeClr val="accent1"/>
+          </a:effectRef>
+          <a:fontRef idx="minor">
+            <a:schemeClr val="lt1"/>
+          </a:fontRef>
+        </p:style>
+        <p:txBody>
+          <a:bodyPr rtlCol="0" anchor="ctr"/>
+          <a:lstStyle/>
+          <a:p>
+            <a:pPr algn="ctr"/>
+          </a:p>
+        </p:txBody>
+      </p:sp>
+      <p:sp>
+        <p:nvSpPr>
+          <p:cNvPr id="3" name="Rectangle 2"/>
+          <p:cNvSpPr/>
+          <p:nvPr/>
+        </p:nvSpPr>
+        <p:spPr>
+          <a:xfrm>
+            <a:off x="0" y="960120"/>
+            <a:ext cx="12191695" cy="41148"/>
+          </a:xfrm>
+          <a:prstGeom prst="rect">
+            <a:avLst/>
+          </a:prstGeom>
+          <a:solidFill>
+            <a:srgbClr val="FFD000"/>
+          </a:solidFill>
+          <a:ln>
+            <a:noFill/>
+          </a:ln>
+        </p:spPr>
+        <p:style>
+          <a:lnRef idx="1">
+            <a:schemeClr val="accent1"/>
+          </a:lnRef>
+          <a:fillRef idx="3">
+            <a:schemeClr val="accent1"/>
+          </a:fillRef>
+          <a:effectRef idx="2">
+            <a:schemeClr val="accent1"/>
+          </a:effectRef>
+          <a:fontRef idx="minor">
+            <a:schemeClr val="lt1"/>
+          </a:fontRef>
+        </p:style>
+        <p:txBody>
+          <a:bodyPr rtlCol="0" anchor="ctr"/>
+          <a:lstStyle/>
+          <a:p>
+            <a:pPr algn="ctr"/>
+          </a:p>
+        </p:txBody>
+      </p:sp>
+      <p:sp>
+        <p:nvSpPr>
+          <p:cNvPr id="4" name="TextBox 3"/>
+          <p:cNvSpPr txBox="1"/>
+          <p:nvPr/>
+        </p:nvSpPr>
+        <p:spPr>
+          <a:xfrm>
+            <a:off x="457200" y="164592"/>
+            <a:ext cx="11277295" cy="502920"/>
+          </a:xfrm>
+          <a:prstGeom prst="rect">
+            <a:avLst/>
+          </a:prstGeom>
+          <a:noFill/>
+        </p:spPr>
+        <p:txBody>
+          <a:bodyPr wrap="square">
+            <a:spAutoFit/>
+          </a:bodyPr>
+          <a:lstStyle/>
+          <a:p>
+            <a:r>
+              <a:rPr sz="2600" b="1" i="0">
+                <a:solidFill>
+                  <a:srgbClr val="FFFFFF"/>
+                </a:solidFill>
+                <a:latin typeface="Calibri"/>
+              </a:rPr>
+              <a:t>Criterios de exito / entregable</a:t>
+            </a:r>
+          </a:p>
+        </p:txBody>
+      </p:sp>
+      <p:sp>
+        <p:nvSpPr>
+          <p:cNvPr id="5" name="TextBox 4"/>
+          <p:cNvSpPr txBox="1"/>
+          <p:nvPr/>
+        </p:nvSpPr>
+        <p:spPr>
+          <a:xfrm>
+            <a:off x="457200" y="1170432"/>
+            <a:ext cx="11277295" cy="5230368"/>
+          </a:xfrm>
+          <a:prstGeom prst="rect">
+            <a:avLst/>
+          </a:prstGeom>
+          <a:noFill/>
+        </p:spPr>
+        <p:txBody>
+          <a:bodyPr wrap="square">
+            <a:spAutoFit/>
+          </a:bodyPr>
+          <a:lstStyle/>
+          <a:p>
+            <a:pPr>
+              <a:spcAft>
+                <a:spcPts val="800"/>
+              </a:spcAft>
+            </a:pPr>
+            <a:r>
+              <a:rPr sz="2000" b="0" i="0">
+                <a:solidFill>
+                  <a:srgbClr val="333333"/>
+                </a:solidFill>
+                <a:latin typeface="Calibri"/>
+              </a:rPr>
+              <a:t>–   </a:t>
+            </a:r>
+            <a:r>
+              <a:rPr sz="2000" b="1" i="0">
+                <a:solidFill>
+                  <a:srgbClr val="333333"/>
+                </a:solidFill>
+                <a:latin typeface="Calibri"/>
+              </a:rPr>
+              <a:t>Entregable:</a:t>
+            </a:r>
+            <a:r>
+              <a:rPr sz="2000" b="0" i="0">
+                <a:solidFill>
+                  <a:srgbClr val="333333"/>
+                </a:solidFill>
+                <a:latin typeface="Calibri"/>
+              </a:rPr>
+              <a:t> Documento de requisitos de VetCare en PDF, con minimo 8 RF, 4 RNF cuantificados, priorizacion MoSCoW y matriz de trazabilidad, subido a la plataforma del curso.</a:t>
+            </a:r>
+          </a:p>
+          <a:p>
+            <a:pPr>
+              <a:spcAft>
+                <a:spcPts val="800"/>
+              </a:spcAft>
+            </a:pPr>
+            <a:r>
+              <a:rPr sz="2000" b="0" i="0">
+                <a:solidFill>
+                  <a:srgbClr val="333333"/>
+                </a:solidFill>
+                <a:latin typeface="Calibri"/>
+              </a:rPr>
+              <a:t>–   </a:t>
+            </a:r>
+            <a:r>
+              <a:rPr sz="2000" b="1" i="0">
+                <a:solidFill>
+                  <a:srgbClr val="333333"/>
+                </a:solidFill>
+                <a:latin typeface="Calibri"/>
+              </a:rPr>
+              <a:t>Exito:</a:t>
+            </a:r>
+            <a:r>
+              <a:rPr sz="2000" b="0" i="0">
+                <a:solidFill>
+                  <a:srgbClr val="333333"/>
+                </a:solidFill>
+                <a:latin typeface="Calibri"/>
+              </a:rPr>
+              <a:t> El documento tiene minimo 8 RF y 4 RNF, todos con ID unico, actor explicito y redaccion en plantilla.</a:t>
+            </a:r>
+          </a:p>
+          <a:p>
+            <a:pPr>
+              <a:spcAft>
+                <a:spcPts val="800"/>
+              </a:spcAft>
+            </a:pPr>
+            <a:r>
+              <a:rPr sz="2000" b="0" i="0">
+                <a:solidFill>
+                  <a:srgbClr val="333333"/>
+                </a:solidFill>
+                <a:latin typeface="Calibri"/>
+              </a:rPr>
+              <a:t>–   </a:t>
+            </a:r>
+            <a:r>
+              <a:rPr sz="2000" b="1" i="0">
+                <a:solidFill>
+                  <a:srgbClr val="333333"/>
+                </a:solidFill>
+                <a:latin typeface="Calibri"/>
+              </a:rPr>
+              <a:t>Exito:</a:t>
+            </a:r>
+            <a:r>
+              <a:rPr sz="2000" b="0" i="0">
+                <a:solidFill>
+                  <a:srgbClr val="333333"/>
+                </a:solidFill>
+                <a:latin typeface="Calibri"/>
+              </a:rPr>
+              <a:t> Cada RNF trae al menos un valor medible (segundos, cantidad, frecuencia o porcentaje) y su forma de verificacion.</a:t>
+            </a:r>
+          </a:p>
+          <a:p>
+            <a:pPr>
+              <a:spcAft>
+                <a:spcPts val="800"/>
+              </a:spcAft>
+            </a:pPr>
+            <a:r>
+              <a:rPr sz="2000" b="0" i="0">
+                <a:solidFill>
+                  <a:srgbClr val="333333"/>
+                </a:solidFill>
+                <a:latin typeface="Calibri"/>
+              </a:rPr>
+              <a:t>–   </a:t>
+            </a:r>
+            <a:r>
+              <a:rPr sz="2000" b="1" i="0">
+                <a:solidFill>
+                  <a:srgbClr val="333333"/>
+                </a:solidFill>
+                <a:latin typeface="Calibri"/>
+              </a:rPr>
+              <a:t>Exito:</a:t>
+            </a:r>
+            <a:r>
+              <a:rPr sz="2000" b="0" i="0">
+                <a:solidFill>
+                  <a:srgbClr val="333333"/>
+                </a:solidFill>
+                <a:latin typeface="Calibri"/>
+              </a:rPr>
+              <a:t> Ningun requisito usa las palabras rapido, amigable, facil, intuitivo, robusto u optimo sin cuantificarlas.</a:t>
+            </a:r>
+          </a:p>
+          <a:p>
+            <a:pPr>
+              <a:spcAft>
+                <a:spcPts val="800"/>
+              </a:spcAft>
+            </a:pPr>
+            <a:r>
+              <a:rPr sz="2000" b="0" i="0">
+                <a:solidFill>
+                  <a:srgbClr val="333333"/>
+                </a:solidFill>
+                <a:latin typeface="Calibri"/>
+              </a:rPr>
+              <a:t>–   </a:t>
+            </a:r>
+            <a:r>
+              <a:rPr sz="2000" b="1" i="0">
+                <a:solidFill>
+                  <a:srgbClr val="333333"/>
+                </a:solidFill>
+                <a:latin typeface="Calibri"/>
+              </a:rPr>
+              <a:t>Exito:</a:t>
+            </a:r>
+            <a:r>
+              <a:rPr sz="2000" b="0" i="0">
+                <a:solidFill>
+                  <a:srgbClr val="333333"/>
+                </a:solidFill>
+                <a:latin typeface="Calibri"/>
+              </a:rPr>
+              <a:t> La matriz de trazabilidad conecta las cinco frases de la entrevista con al menos un requisito cada una, y ningun requisito queda huerfano de origen.</a:t>
+            </a:r>
+          </a:p>
+          <a:p>
+            <a:pPr>
+              <a:spcAft>
+                <a:spcPts val="800"/>
+              </a:spcAft>
+            </a:pPr>
+            <a:r>
+              <a:rPr sz="2000" b="0" i="0">
+                <a:solidFill>
+                  <a:srgbClr val="333333"/>
+                </a:solidFill>
+                <a:latin typeface="Calibri"/>
+              </a:rPr>
+              <a:t>–   </a:t>
+            </a:r>
+            <a:r>
+              <a:rPr sz="2000" b="1" i="0">
+                <a:solidFill>
+                  <a:srgbClr val="333333"/>
+                </a:solidFill>
+                <a:latin typeface="Calibri"/>
+              </a:rPr>
+              <a:t>Entrega en la plataforma del curso</a:t>
+            </a:r>
+            <a:r>
+              <a:rPr sz="2000" b="0" i="0">
+                <a:solidFill>
+                  <a:srgbClr val="333333"/>
+                </a:solidFill>
+                <a:latin typeface="Calibri"/>
+              </a:rPr>
+              <a:t> — en la fecha que indique el docente.</a:t>
+            </a:r>
+          </a:p>
+        </p:txBody>
+      </p:sp>
+      <p:sp>
+        <p:nvSpPr>
+          <p:cNvPr id="6" name="TextBox 5"/>
+          <p:cNvSpPr txBox="1"/>
+          <p:nvPr/>
+        </p:nvSpPr>
+        <p:spPr>
+          <a:xfrm>
+            <a:off x="11185855" y="6473952"/>
+            <a:ext cx="640080" cy="274320"/>
+          </a:xfrm>
+          <a:prstGeom prst="rect">
+            <a:avLst/>
+          </a:prstGeom>
+          <a:noFill/>
+        </p:spPr>
+        <p:txBody>
+          <a:bodyPr wrap="square">
+            <a:spAutoFit/>
+          </a:bodyPr>
+          <a:lstStyle/>
+          <a:p>
+            <a:pPr algn="r"/>
+            <a:r>
+              <a:rPr sz="1100" b="0" i="0">
+                <a:solidFill>
+                  <a:srgbClr val="666666"/>
+                </a:solidFill>
+                <a:latin typeface="Calibri"/>
+              </a:rPr>
+              <a:t>17</a:t>
+            </a:r>
+          </a:p>
+        </p:txBody>
+      </p:sp>
+    </p:spTree>
+  </p:cSld>
+  <p:clrMapOvr>
+    <a:masterClrMapping/>
+  </p:clrMapOvr>
+</p:sld>
+</file>
+
+<file path=ppt/slides/slide18.xml><?xml version="1.0" encoding="utf-8"?>
+<p:sld xmlns:a="http://schemas.openxmlformats.org/drawingml/2006/main" xmlns:p="http://schemas.openxmlformats.org/presentationml/2006/main" xmlns:r="http://schemas.openxmlformats.org/officeDocument/2006/relationships">
+  <p:cSld>
+    <p:bg>
+      <p:bgPr>
+        <a:solidFill>
+          <a:srgbClr val="FFFFFF"/>
+        </a:solidFill>
+        <a:effectLst/>
+      </p:bgPr>
+    </p:bg>
+    <p:spTree>
+      <p:nvGrpSpPr>
+        <p:cNvPr id="1" name=""/>
+        <p:cNvGrpSpPr/>
+        <p:nvPr/>
+      </p:nvGrpSpPr>
+      <p:grpSpPr/>
+      <p:sp>
+        <p:nvSpPr>
+          <p:cNvPr id="2" name="Rectangle 1"/>
+          <p:cNvSpPr/>
+          <p:nvPr/>
+        </p:nvSpPr>
+        <p:spPr>
+          <a:xfrm>
+            <a:off x="0" y="0"/>
+            <a:ext cx="12191695" cy="960120"/>
+          </a:xfrm>
+          <a:prstGeom prst="rect">
+            <a:avLst/>
+          </a:prstGeom>
+          <a:solidFill>
+            <a:srgbClr val="095292"/>
+          </a:solidFill>
+          <a:ln>
+            <a:noFill/>
+          </a:ln>
+        </p:spPr>
+        <p:style>
+          <a:lnRef idx="1">
+            <a:schemeClr val="accent1"/>
+          </a:lnRef>
+          <a:fillRef idx="3">
+            <a:schemeClr val="accent1"/>
+          </a:fillRef>
+          <a:effectRef idx="2">
+            <a:schemeClr val="accent1"/>
+          </a:effectRef>
+          <a:fontRef idx="minor">
+            <a:schemeClr val="lt1"/>
+          </a:fontRef>
+        </p:style>
+        <p:txBody>
+          <a:bodyPr rtlCol="0" anchor="ctr"/>
+          <a:lstStyle/>
+          <a:p>
+            <a:pPr algn="ctr"/>
+          </a:p>
+        </p:txBody>
+      </p:sp>
+      <p:sp>
+        <p:nvSpPr>
+          <p:cNvPr id="3" name="Rectangle 2"/>
+          <p:cNvSpPr/>
+          <p:nvPr/>
+        </p:nvSpPr>
+        <p:spPr>
+          <a:xfrm>
+            <a:off x="0" y="960120"/>
+            <a:ext cx="12191695" cy="41148"/>
+          </a:xfrm>
+          <a:prstGeom prst="rect">
+            <a:avLst/>
+          </a:prstGeom>
+          <a:solidFill>
+            <a:srgbClr val="FFD000"/>
+          </a:solidFill>
+          <a:ln>
+            <a:noFill/>
+          </a:ln>
+        </p:spPr>
+        <p:style>
+          <a:lnRef idx="1">
+            <a:schemeClr val="accent1"/>
+          </a:lnRef>
+          <a:fillRef idx="3">
+            <a:schemeClr val="accent1"/>
+          </a:fillRef>
+          <a:effectRef idx="2">
+            <a:schemeClr val="accent1"/>
+          </a:effectRef>
+          <a:fontRef idx="minor">
+            <a:schemeClr val="lt1"/>
+          </a:fontRef>
+        </p:style>
+        <p:txBody>
+          <a:bodyPr rtlCol="0" anchor="ctr"/>
+          <a:lstStyle/>
+          <a:p>
+            <a:pPr algn="ctr"/>
+          </a:p>
+        </p:txBody>
+      </p:sp>
+      <p:sp>
+        <p:nvSpPr>
+          <p:cNvPr id="4" name="TextBox 3"/>
+          <p:cNvSpPr txBox="1"/>
+          <p:nvPr/>
+        </p:nvSpPr>
+        <p:spPr>
+          <a:xfrm>
+            <a:off x="457200" y="164592"/>
+            <a:ext cx="11277295" cy="502920"/>
+          </a:xfrm>
+          <a:prstGeom prst="rect">
+            <a:avLst/>
+          </a:prstGeom>
+          <a:noFill/>
+        </p:spPr>
+        <p:txBody>
+          <a:bodyPr wrap="square">
+            <a:spAutoFit/>
+          </a:bodyPr>
+          <a:lstStyle/>
+          <a:p>
+            <a:r>
+              <a:rPr sz="2600" b="1" i="0">
+                <a:solidFill>
+                  <a:srgbClr val="FFFFFF"/>
+                </a:solidFill>
+                <a:latin typeface="Calibri"/>
+              </a:rPr>
+              <a:t>Para el PI esta semana</a:t>
+            </a:r>
+          </a:p>
+        </p:txBody>
+      </p:sp>
+      <p:sp>
+        <p:nvSpPr>
+          <p:cNvPr id="5" name="Rounded Rectangle 4"/>
+          <p:cNvSpPr/>
+          <p:nvPr/>
+        </p:nvSpPr>
+        <p:spPr>
+          <a:xfrm>
+            <a:off x="457200" y="1261872"/>
+            <a:ext cx="11277295" cy="1051560"/>
+          </a:xfrm>
+          <a:prstGeom prst="roundRect">
+            <a:avLst>
+              <a:gd name="adj" fmla="val 12000"/>
+            </a:avLst>
+          </a:prstGeom>
+          <a:solidFill>
+            <a:srgbClr val="E8F4FA"/>
+          </a:solidFill>
+          <a:ln>
+            <a:noFill/>
+          </a:ln>
+        </p:spPr>
+        <p:style>
+          <a:lnRef idx="1">
+            <a:schemeClr val="accent1"/>
+          </a:lnRef>
+          <a:fillRef idx="3">
+            <a:schemeClr val="accent1"/>
+          </a:fillRef>
+          <a:effectRef idx="2">
+            <a:schemeClr val="accent1"/>
+          </a:effectRef>
+          <a:fontRef idx="minor">
+            <a:schemeClr val="lt1"/>
+          </a:fontRef>
+        </p:style>
+        <p:txBody>
+          <a:bodyPr rtlCol="0" anchor="ctr"/>
+          <a:lstStyle/>
+          <a:p>
+            <a:pPr algn="ctr"/>
+          </a:p>
+        </p:txBody>
+      </p:sp>
+      <p:sp>
+        <p:nvSpPr>
+          <p:cNvPr id="6" name="Rectangle 5"/>
+          <p:cNvSpPr/>
+          <p:nvPr/>
+        </p:nvSpPr>
+        <p:spPr>
+          <a:xfrm>
+            <a:off x="457200" y="1261872"/>
+            <a:ext cx="128016" cy="1051560"/>
+          </a:xfrm>
+          <a:prstGeom prst="rect">
+            <a:avLst/>
+          </a:prstGeom>
+          <a:solidFill>
+            <a:srgbClr val="269CCB"/>
+          </a:solidFill>
+          <a:ln>
+            <a:noFill/>
+          </a:ln>
+        </p:spPr>
+        <p:style>
+          <a:lnRef idx="1">
+            <a:schemeClr val="accent1"/>
+          </a:lnRef>
+          <a:fillRef idx="3">
+            <a:schemeClr val="accent1"/>
+          </a:fillRef>
+          <a:effectRef idx="2">
+            <a:schemeClr val="accent1"/>
+          </a:effectRef>
+          <a:fontRef idx="minor">
+            <a:schemeClr val="lt1"/>
+          </a:fontRef>
+        </p:style>
+        <p:txBody>
+          <a:bodyPr rtlCol="0" anchor="ctr"/>
+          <a:lstStyle/>
+          <a:p>
+            <a:pPr algn="ctr"/>
+          </a:p>
+        </p:txBody>
+      </p:sp>
+      <p:sp>
+        <p:nvSpPr>
+          <p:cNvPr id="7" name="TextBox 6"/>
+          <p:cNvSpPr txBox="1"/>
+          <p:nvPr/>
+        </p:nvSpPr>
+        <p:spPr>
+          <a:xfrm>
+            <a:off x="777240" y="1399031"/>
+            <a:ext cx="10774375" cy="822959"/>
+          </a:xfrm>
+          <a:prstGeom prst="rect">
+            <a:avLst/>
+          </a:prstGeom>
+          <a:noFill/>
+        </p:spPr>
+        <p:txBody>
+          <a:bodyPr wrap="square">
+            <a:spAutoFit/>
+          </a:bodyPr>
+          <a:lstStyle/>
+          <a:p>
+            <a:r>
+              <a:rPr sz="1200" b="1" i="0">
+                <a:solidFill>
+                  <a:srgbClr val="269CCB"/>
+                </a:solidFill>
+                <a:latin typeface="Calibri"/>
+              </a:rPr>
+              <a:t>Info</a:t>
+            </a:r>
+          </a:p>
+          <a:p>
+            <a:pPr>
+              <a:spcBef>
+                <a:spcPts val="400"/>
+              </a:spcBef>
+            </a:pPr>
+            <a:r>
+              <a:rPr sz="1400" b="0" i="0">
+                <a:solidFill>
+                  <a:srgbClr val="333333"/>
+                </a:solidFill>
+                <a:latin typeface="Calibri"/>
+              </a:rPr>
+              <a:t>Hito: Queda listo el catalogo de requisitos de VetCare: 8 RF y 4 RNF con criterio de verificacion y prioridad MoSCoW.</a:t>
+            </a:r>
+          </a:p>
+        </p:txBody>
+      </p:sp>
+      <p:sp>
+        <p:nvSpPr>
+          <p:cNvPr id="8" name="Rounded Rectangle 7"/>
+          <p:cNvSpPr/>
+          <p:nvPr/>
+        </p:nvSpPr>
+        <p:spPr>
+          <a:xfrm>
+            <a:off x="457200" y="2478024"/>
+            <a:ext cx="11277295" cy="1051560"/>
+          </a:xfrm>
+          <a:prstGeom prst="roundRect">
+            <a:avLst>
+              <a:gd name="adj" fmla="val 12000"/>
+            </a:avLst>
+          </a:prstGeom>
+          <a:solidFill>
+            <a:srgbClr val="FFF8E1"/>
+          </a:solidFill>
+          <a:ln>
+            <a:noFill/>
+          </a:ln>
+        </p:spPr>
+        <p:style>
+          <a:lnRef idx="1">
+            <a:schemeClr val="accent1"/>
+          </a:lnRef>
+          <a:fillRef idx="3">
+            <a:schemeClr val="accent1"/>
+          </a:fillRef>
+          <a:effectRef idx="2">
+            <a:schemeClr val="accent1"/>
+          </a:effectRef>
+          <a:fontRef idx="minor">
+            <a:schemeClr val="lt1"/>
+          </a:fontRef>
+        </p:style>
+        <p:txBody>
+          <a:bodyPr rtlCol="0" anchor="ctr"/>
+          <a:lstStyle/>
+          <a:p>
+            <a:pPr algn="ctr"/>
+          </a:p>
+        </p:txBody>
+      </p:sp>
+      <p:sp>
+        <p:nvSpPr>
+          <p:cNvPr id="9" name="Rectangle 8"/>
+          <p:cNvSpPr/>
+          <p:nvPr/>
+        </p:nvSpPr>
+        <p:spPr>
+          <a:xfrm>
+            <a:off x="457200" y="2478024"/>
+            <a:ext cx="128016" cy="1051560"/>
+          </a:xfrm>
+          <a:prstGeom prst="rect">
+            <a:avLst/>
+          </a:prstGeom>
+          <a:solidFill>
+            <a:srgbClr val="FFD000"/>
+          </a:solidFill>
+          <a:ln>
+            <a:noFill/>
+          </a:ln>
+        </p:spPr>
+        <p:style>
+          <a:lnRef idx="1">
+            <a:schemeClr val="accent1"/>
+          </a:lnRef>
+          <a:fillRef idx="3">
+            <a:schemeClr val="accent1"/>
+          </a:fillRef>
+          <a:effectRef idx="2">
+            <a:schemeClr val="accent1"/>
+          </a:effectRef>
+          <a:fontRef idx="minor">
+            <a:schemeClr val="lt1"/>
+          </a:fontRef>
+        </p:style>
+        <p:txBody>
+          <a:bodyPr rtlCol="0" anchor="ctr"/>
+          <a:lstStyle/>
+          <a:p>
+            <a:pPr algn="ctr"/>
+          </a:p>
+        </p:txBody>
+      </p:sp>
+      <p:sp>
+        <p:nvSpPr>
+          <p:cNvPr id="10" name="TextBox 9"/>
+          <p:cNvSpPr txBox="1"/>
+          <p:nvPr/>
+        </p:nvSpPr>
+        <p:spPr>
+          <a:xfrm>
+            <a:off x="777240" y="2615184"/>
+            <a:ext cx="10774375" cy="822959"/>
+          </a:xfrm>
+          <a:prstGeom prst="rect">
+            <a:avLst/>
+          </a:prstGeom>
+          <a:noFill/>
+        </p:spPr>
+        <p:txBody>
+          <a:bodyPr wrap="square">
+            <a:spAutoFit/>
+          </a:bodyPr>
+          <a:lstStyle/>
+          <a:p>
+            <a:r>
+              <a:rPr sz="1200" b="1" i="0">
+                <a:solidFill>
+                  <a:srgbClr val="FFD000"/>
+                </a:solidFill>
+                <a:latin typeface="Calibri"/>
+              </a:rPr>
+              <a:t>Aclaración</a:t>
+            </a:r>
+          </a:p>
+          <a:p>
+            <a:pPr>
+              <a:spcBef>
+                <a:spcPts val="400"/>
+              </a:spcBef>
+            </a:pPr>
+            <a:r>
+              <a:rPr sz="1400" b="0" i="0">
+                <a:solidFill>
+                  <a:srgbClr val="333333"/>
+                </a:solidFill>
+                <a:latin typeface="Calibri"/>
+              </a:rPr>
+              <a:t>Enunciado completo: Clases/Proyecto Integrador/ (VetCare).</a:t>
+            </a:r>
+          </a:p>
+        </p:txBody>
+      </p:sp>
+      <p:sp>
+        <p:nvSpPr>
+          <p:cNvPr id="11" name="Rounded Rectangle 10"/>
+          <p:cNvSpPr/>
+          <p:nvPr/>
+        </p:nvSpPr>
+        <p:spPr>
+          <a:xfrm>
+            <a:off x="457200" y="3694176"/>
+            <a:ext cx="11277295" cy="1051560"/>
+          </a:xfrm>
+          <a:prstGeom prst="roundRect">
+            <a:avLst>
+              <a:gd name="adj" fmla="val 12000"/>
+            </a:avLst>
+          </a:prstGeom>
+          <a:solidFill>
+            <a:srgbClr val="FBE4E4"/>
+          </a:solidFill>
+          <a:ln>
+            <a:noFill/>
+          </a:ln>
+        </p:spPr>
+        <p:style>
+          <a:lnRef idx="1">
+            <a:schemeClr val="accent1"/>
+          </a:lnRef>
+          <a:fillRef idx="3">
+            <a:schemeClr val="accent1"/>
+          </a:fillRef>
+          <a:effectRef idx="2">
+            <a:schemeClr val="accent1"/>
+          </a:effectRef>
+          <a:fontRef idx="minor">
+            <a:schemeClr val="lt1"/>
+          </a:fontRef>
+        </p:style>
+        <p:txBody>
+          <a:bodyPr rtlCol="0" anchor="ctr"/>
+          <a:lstStyle/>
+          <a:p>
+            <a:pPr algn="ctr"/>
+          </a:p>
+        </p:txBody>
+      </p:sp>
+      <p:sp>
+        <p:nvSpPr>
+          <p:cNvPr id="12" name="Rectangle 11"/>
+          <p:cNvSpPr/>
+          <p:nvPr/>
+        </p:nvSpPr>
+        <p:spPr>
+          <a:xfrm>
+            <a:off x="457200" y="3694176"/>
+            <a:ext cx="128016" cy="1051560"/>
+          </a:xfrm>
+          <a:prstGeom prst="rect">
+            <a:avLst/>
+          </a:prstGeom>
+          <a:solidFill>
+            <a:srgbClr val="A02030"/>
+          </a:solidFill>
+          <a:ln>
+            <a:noFill/>
+          </a:ln>
+        </p:spPr>
+        <p:style>
+          <a:lnRef idx="1">
+            <a:schemeClr val="accent1"/>
+          </a:lnRef>
+          <a:fillRef idx="3">
+            <a:schemeClr val="accent1"/>
+          </a:fillRef>
+          <a:effectRef idx="2">
+            <a:schemeClr val="accent1"/>
+          </a:effectRef>
+          <a:fontRef idx="minor">
+            <a:schemeClr val="lt1"/>
+          </a:fontRef>
+        </p:style>
+        <p:txBody>
+          <a:bodyPr rtlCol="0" anchor="ctr"/>
+          <a:lstStyle/>
+          <a:p>
+            <a:pPr algn="ctr"/>
+          </a:p>
+        </p:txBody>
+      </p:sp>
+      <p:sp>
+        <p:nvSpPr>
+          <p:cNvPr id="13" name="TextBox 12"/>
+          <p:cNvSpPr txBox="1"/>
+          <p:nvPr/>
+        </p:nvSpPr>
+        <p:spPr>
+          <a:xfrm>
+            <a:off x="777240" y="3831336"/>
+            <a:ext cx="10774375" cy="822959"/>
+          </a:xfrm>
+          <a:prstGeom prst="rect">
+            <a:avLst/>
+          </a:prstGeom>
+          <a:noFill/>
+        </p:spPr>
+        <p:txBody>
+          <a:bodyPr wrap="square">
+            <a:spAutoFit/>
+          </a:bodyPr>
+          <a:lstStyle/>
+          <a:p>
+            <a:r>
+              <a:rPr sz="1200" b="1" i="0">
+                <a:solidFill>
+                  <a:srgbClr val="A02030"/>
+                </a:solidFill>
+                <a:latin typeface="Calibri"/>
+              </a:rPr>
+              <a:t>Atención</a:t>
+            </a:r>
+          </a:p>
+          <a:p>
+            <a:pPr>
+              <a:spcBef>
+                <a:spcPts val="400"/>
+              </a:spcBef>
+            </a:pPr>
+            <a:r>
+              <a:rPr sz="1400" b="0" i="0">
+                <a:solidFill>
+                  <a:srgbClr val="333333"/>
+                </a:solidFill>
+                <a:latin typeface="Calibri"/>
+              </a:rPr>
+              <a:t>Entrega del taller, si el docente lo asigna · en la fecha que indique el docente.</a:t>
+            </a:r>
+          </a:p>
+        </p:txBody>
+      </p:sp>
+      <p:sp>
+        <p:nvSpPr>
+          <p:cNvPr id="14" name="TextBox 13"/>
+          <p:cNvSpPr txBox="1"/>
+          <p:nvPr/>
+        </p:nvSpPr>
+        <p:spPr>
+          <a:xfrm>
+            <a:off x="11185855" y="6473952"/>
+            <a:ext cx="640080" cy="274320"/>
+          </a:xfrm>
+          <a:prstGeom prst="rect">
+            <a:avLst/>
+          </a:prstGeom>
+          <a:noFill/>
+        </p:spPr>
+        <p:txBody>
+          <a:bodyPr wrap="square">
+            <a:spAutoFit/>
+          </a:bodyPr>
+          <a:lstStyle/>
+          <a:p>
+            <a:pPr algn="r"/>
+            <a:r>
+              <a:rPr sz="1100" b="0" i="0">
+                <a:solidFill>
+                  <a:srgbClr val="666666"/>
+                </a:solidFill>
+                <a:latin typeface="Calibri"/>
+              </a:rPr>
+              <a:t>18</a:t>
+            </a:r>
+          </a:p>
+        </p:txBody>
+      </p:sp>
+    </p:spTree>
+  </p:cSld>
+  <p:clrMapOvr>
+    <a:masterClrMapping/>
+  </p:clrMapOvr>
+</p:sld>
+</file>
+
+<file path=ppt/slides/slide19.xml><?xml version="1.0" encoding="utf-8"?>
+<p:sld xmlns:a="http://schemas.openxmlformats.org/drawingml/2006/main" xmlns:p="http://schemas.openxmlformats.org/presentationml/2006/main" xmlns:r="http://schemas.openxmlformats.org/officeDocument/2006/relationships">
+  <p:cSld>
+    <p:bg>
+      <p:bgPr>
+        <a:solidFill>
+          <a:srgbClr val="FFFFFF"/>
+        </a:solidFill>
+        <a:effectLst/>
+      </p:bgPr>
+    </p:bg>
+    <p:spTree>
+      <p:nvGrpSpPr>
+        <p:cNvPr id="1" name=""/>
+        <p:cNvGrpSpPr/>
+        <p:nvPr/>
+      </p:nvGrpSpPr>
+      <p:grpSpPr/>
+      <p:sp>
+        <p:nvSpPr>
+          <p:cNvPr id="2" name="Rectangle 1"/>
+          <p:cNvSpPr/>
+          <p:nvPr/>
+        </p:nvSpPr>
+        <p:spPr>
+          <a:xfrm>
+            <a:off x="0" y="0"/>
             <a:ext cx="12191695" cy="164592"/>
           </a:xfrm>
           <a:prstGeom prst="rect">
@@ -7669,7 +9862,7 @@
                 </a:solidFill>
                 <a:latin typeface="Calibri"/>
               </a:rPr>
-              <a:t>Teoria Core</a:t>
+              <a:t>Un requerimiento no es lo que el cliente dijo, es lo que el sistema... (1/2)</a:t>
             </a:r>
           </a:p>
         </p:txBody>
@@ -7708,7 +9901,7 @@
                 </a:solidFill>
                 <a:latin typeface="Calibri"/>
               </a:rPr>
-              <a:t>–   Un requerimiento no es lo que el cliente dijo, es lo que el sistema debe hacer para que el problema del cliente…</a:t>
+              <a:t>–   Un requerimiento no es lo que el cliente dijo, es lo que el sistema debe hacer para que el problema del cliente desaparezca</a:t>
             </a:r>
           </a:p>
           <a:p>
@@ -7724,7 +9917,7 @@
                 </a:solidFill>
                 <a:latin typeface="Calibri"/>
               </a:rPr>
-              <a:t>–   Con las necesidades en la mano se separan dos familias</a:t>
+              <a:t>–   Entre esas dos cosas hay un trabajo de traduccion que se llama elicitacion, palabra que viene de sacar a la luz algo que estaba implicito.</a:t>
             </a:r>
           </a:p>
           <a:p>
@@ -7740,7 +9933,7 @@
                 </a:solidFill>
                 <a:latin typeface="Calibri"/>
               </a:rPr>
-              <a:t>–   La regla de oro del oficio es dura y se enuncia asi: si no se puede verificar, no es un requisito, es un deseo</a:t>
+              <a:t>–   Las tres tecnicas que caben en este curso son baratas y no necesitan software especializado: la entrevista, donde se arranca con preguntas abiertas (cuenteme como es un dia normal en la clinica) y solo al final se cierran con preguntas de si o no</a:t>
             </a:r>
           </a:p>
           <a:p>
@@ -7756,23 +9949,7 @@
                 </a:solidFill>
                 <a:latin typeface="Calibri"/>
               </a:rPr>
-              <a:t>–   Priorizar no es ordenar por gusto sino decidir con el cliente que pasa si algo no esta el dia de la entrega, y…</a:t>
-            </a:r>
-          </a:p>
-          <a:p>
-            <a:pPr>
-              <a:spcAft>
-                <a:spcPts val="800"/>
-              </a:spcAft>
-            </a:pPr>
-            <a:r>
-              <a:rPr sz="2000" b="0" i="0">
-                <a:solidFill>
-                  <a:srgbClr val="333333"/>
-                </a:solidFill>
-                <a:latin typeface="Calibri"/>
-              </a:rPr>
-              <a:t>–   El ultimo pedazo es la trazabilidad, que es poder seguir cada requisito hacia atras y hacia adelante</a:t>
+              <a:t>–   La observacion, donde uno se para media hora en la recepcion un sabado y cronometra cuanto tarda la auxiliar en encontrar una carpeta; y el prototipo desechable, donde uno dibuja una pantalla fea a mano o en draw.io y la pone frente al veterinario</a:t>
             </a:r>
           </a:p>
         </p:txBody>
@@ -7953,141 +10130,21 @@
                 </a:solidFill>
                 <a:latin typeface="Calibri"/>
               </a:rPr>
-              <a:t>Ficha de requisito RF-03 (plantilla proyectable)</a:t>
-            </a:r>
-          </a:p>
-        </p:txBody>
-      </p:sp>
-      <p:sp>
-        <p:nvSpPr>
-          <p:cNvPr id="5" name="Rounded Rectangle 4"/>
-          <p:cNvSpPr/>
-          <p:nvPr/>
-        </p:nvSpPr>
-        <p:spPr>
-          <a:xfrm>
-            <a:off x="457200" y="1261872"/>
-            <a:ext cx="11277295" cy="4773168"/>
-          </a:xfrm>
-          <a:prstGeom prst="roundRect">
-            <a:avLst>
-              <a:gd name="adj" fmla="val 12000"/>
-            </a:avLst>
-          </a:prstGeom>
-          <a:solidFill>
-            <a:srgbClr val="1E2A38"/>
-          </a:solidFill>
-          <a:ln>
-            <a:noFill/>
-          </a:ln>
-        </p:spPr>
-        <p:style>
-          <a:lnRef idx="1">
-            <a:schemeClr val="accent1"/>
-          </a:lnRef>
-          <a:fillRef idx="3">
-            <a:schemeClr val="accent1"/>
-          </a:fillRef>
-          <a:effectRef idx="2">
-            <a:schemeClr val="accent1"/>
-          </a:effectRef>
-          <a:fontRef idx="minor">
-            <a:schemeClr val="lt1"/>
-          </a:fontRef>
-        </p:style>
-        <p:txBody>
-          <a:bodyPr rtlCol="0" anchor="ctr"/>
-          <a:lstStyle/>
-          <a:p>
-            <a:pPr algn="ctr"/>
-          </a:p>
-        </p:txBody>
-      </p:sp>
-      <p:sp>
-        <p:nvSpPr>
-          <p:cNvPr id="6" name="Rectangle 5"/>
-          <p:cNvSpPr/>
-          <p:nvPr/>
-        </p:nvSpPr>
-        <p:spPr>
-          <a:xfrm>
-            <a:off x="457200" y="1261872"/>
-            <a:ext cx="11277295" cy="320040"/>
-          </a:xfrm>
-          <a:prstGeom prst="rect">
-            <a:avLst/>
-          </a:prstGeom>
-          <a:solidFill>
-            <a:srgbClr val="095292"/>
-          </a:solidFill>
-          <a:ln>
-            <a:noFill/>
-          </a:ln>
-        </p:spPr>
-        <p:style>
-          <a:lnRef idx="1">
-            <a:schemeClr val="accent1"/>
-          </a:lnRef>
-          <a:fillRef idx="3">
-            <a:schemeClr val="accent1"/>
-          </a:fillRef>
-          <a:effectRef idx="2">
-            <a:schemeClr val="accent1"/>
-          </a:effectRef>
-          <a:fontRef idx="minor">
-            <a:schemeClr val="lt1"/>
-          </a:fontRef>
-        </p:style>
-        <p:txBody>
-          <a:bodyPr rtlCol="0" anchor="ctr"/>
-          <a:lstStyle/>
-          <a:p>
-            <a:pPr algn="ctr"/>
-          </a:p>
-        </p:txBody>
-      </p:sp>
-      <p:sp>
-        <p:nvSpPr>
-          <p:cNvPr id="7" name="TextBox 6"/>
+              <a:t>Un requerimiento no es lo que el cliente dijo, es lo que el sistema... (2/2)</a:t>
+            </a:r>
+          </a:p>
+        </p:txBody>
+      </p:sp>
+      <p:sp>
+        <p:nvSpPr>
+          <p:cNvPr id="5" name="TextBox 4"/>
           <p:cNvSpPr txBox="1"/>
           <p:nvPr/>
         </p:nvSpPr>
         <p:spPr>
           <a:xfrm>
-            <a:off x="685800" y="1307592"/>
-            <a:ext cx="10820095" cy="256032"/>
-          </a:xfrm>
-          <a:prstGeom prst="rect">
-            <a:avLst/>
-          </a:prstGeom>
-          <a:noFill/>
-        </p:spPr>
-        <p:txBody>
-          <a:bodyPr wrap="square" anchor="ctr"/>
-          <a:lstStyle/>
-          <a:p>
-            <a:r>
-              <a:rPr sz="1000" b="1" i="0">
-                <a:solidFill>
-                  <a:srgbClr val="269CCB"/>
-                </a:solidFill>
-                <a:latin typeface="Calibri"/>
-              </a:rPr>
-              <a:t>● ● ●</a:t>
-            </a:r>
-          </a:p>
-        </p:txBody>
-      </p:sp>
-      <p:sp>
-        <p:nvSpPr>
-          <p:cNvPr id="8" name="TextBox 7"/>
-          <p:cNvSpPr txBox="1"/>
-          <p:nvPr/>
-        </p:nvSpPr>
-        <p:spPr>
-          <a:xfrm>
-            <a:off x="777240" y="1719072"/>
-            <a:ext cx="10637215" cy="4133087"/>
+            <a:off x="457200" y="1170432"/>
+            <a:ext cx="11277295" cy="5230368"/>
           </a:xfrm>
           <a:prstGeom prst="rect">
             <a:avLst/>
@@ -8102,235 +10159,56 @@
           <a:p>
             <a:pPr>
               <a:spcAft>
-                <a:spcPts val="400"/>
+                <a:spcPts val="800"/>
               </a:spcAft>
             </a:pPr>
             <a:r>
-              <a:rPr sz="1400" b="0" i="0">
-                <a:solidFill>
-                  <a:srgbClr val="FFFFFF"/>
-                </a:solidFill>
-                <a:latin typeface="Calibri"/>
-              </a:rPr>
-              <a:t>ID: RF-03</a:t>
+              <a:rPr sz="2000" b="0" i="0">
+                <a:solidFill>
+                  <a:srgbClr val="333333"/>
+                </a:solidFill>
+                <a:latin typeface="Calibri"/>
+              </a:rPr>
+              <a:t>–   Porque la gente no sabe decir lo que quiere pero sabe perfectamente decir lo que NO quiere cuando lo ve.</a:t>
             </a:r>
           </a:p>
           <a:p>
             <a:pPr>
               <a:spcAft>
-                <a:spcPts val="400"/>
+                <a:spcPts val="800"/>
               </a:spcAft>
             </a:pPr>
             <a:r>
-              <a:rPr sz="1400" b="0" i="0">
-                <a:solidFill>
-                  <a:srgbClr val="FFFFFF"/>
-                </a:solidFill>
-                <a:latin typeface="Calibri"/>
-              </a:rPr>
-              <a:t>Nombre: Consultar historial clinico de una mascota</a:t>
+              <a:rPr sz="2000" b="0" i="0">
+                <a:solidFill>
+                  <a:srgbClr val="333333"/>
+                </a:solidFill>
+                <a:latin typeface="Calibri"/>
+              </a:rPr>
+              <a:t>–   En VetCare la entrevista al Dr. Ramirez dejo cinco frases crudas: que las fichas no se pierdan, ver de una lo que le han hecho antes al paciente, que la auxiliar agende sin llamarlo, que el sistema sea rapido, y saber cuantas consultas se hicieron en el mes.</a:t>
             </a:r>
           </a:p>
           <a:p>
             <a:pPr>
               <a:spcAft>
-                <a:spcPts val="400"/>
+                <a:spcPts val="800"/>
               </a:spcAft>
             </a:pPr>
             <a:r>
-              <a:rPr sz="1400" b="0" i="0">
-                <a:solidFill>
-                  <a:srgbClr val="FFFFFF"/>
-                </a:solidFill>
-                <a:latin typeface="Calibri"/>
-              </a:rPr>
-              <a:t>Actor: Veterinario (consulta completa) / Auxiliar (consulta sin diagnostico)</a:t>
-            </a:r>
-          </a:p>
-          <a:p>
-            <a:pPr>
-              <a:spcAft>
-                <a:spcPts val="400"/>
-              </a:spcAft>
-            </a:pPr>
-            <a:r>
-              <a:rPr sz="1400" b="0" i="0">
-                <a:solidFill>
-                  <a:srgbClr val="FFFFFF"/>
-                </a:solidFill>
-                <a:latin typeface="Calibri"/>
-              </a:rPr>
-              <a:t>Descripcion: El sistema debe permitir consultar el historial de atenciones de una mascota a partir del documento del dueno.</a:t>
-            </a:r>
-          </a:p>
-          <a:p>
-            <a:pPr>
-              <a:spcAft>
-                <a:spcPts val="400"/>
-              </a:spcAft>
-            </a:pPr>
-            <a:r>
-              <a:rPr sz="1400" b="0" i="0">
-                <a:solidFill>
-                  <a:srgbClr val="FFFFFF"/>
-                </a:solidFill>
-                <a:latin typeface="Calibri"/>
-              </a:rPr>
-              <a:t>Entrada: documento del dueno o codigo de la mascota</a:t>
-            </a:r>
-          </a:p>
-          <a:p>
-            <a:pPr>
-              <a:spcAft>
-                <a:spcPts val="400"/>
-              </a:spcAft>
-            </a:pPr>
-            <a:r>
-              <a:rPr sz="1400" b="0" i="0">
-                <a:solidFill>
-                  <a:srgbClr val="FFFFFF"/>
-                </a:solidFill>
-                <a:latin typeface="Calibri"/>
-              </a:rPr>
-              <a:t>Salida: lista de atenciones con fecha, motivo, diagnostico y veterinario, ordenada de la mas reciente a la mas antigua</a:t>
-            </a:r>
-          </a:p>
-          <a:p>
-            <a:pPr>
-              <a:spcAft>
-                <a:spcPts val="400"/>
-              </a:spcAft>
-            </a:pPr>
-            <a:r>
-              <a:rPr sz="1400" b="0" i="0">
-                <a:solidFill>
-                  <a:srgbClr val="FFFFFF"/>
-                </a:solidFill>
-                <a:latin typeface="Calibri"/>
-              </a:rPr>
-              <a:t>Regla de negocio: RN-02 una mascota siempre pertenece a un unico dueno registrado</a:t>
-            </a:r>
-          </a:p>
-          <a:p>
-            <a:pPr>
-              <a:spcAft>
-                <a:spcPts val="400"/>
-              </a:spcAft>
-            </a:pPr>
-            <a:r>
-              <a:rPr sz="1400" b="0" i="0">
-                <a:solidFill>
-                  <a:srgbClr val="FFFFFF"/>
-                </a:solidFill>
-                <a:latin typeface="Calibri"/>
-              </a:rPr>
-              <a:t>Criterio de verificacion: dado un dueno con 12 atenciones, la busqueda por documento devuelve las 12 en 3 segundos o menos</a:t>
-            </a:r>
-          </a:p>
-          <a:p>
-            <a:pPr>
-              <a:spcAft>
-                <a:spcPts val="400"/>
-              </a:spcAft>
-            </a:pPr>
-            <a:r>
-              <a:rPr sz="1400" b="0" i="0">
-                <a:solidFill>
-                  <a:srgbClr val="FFFFFF"/>
-                </a:solidFill>
-                <a:latin typeface="Calibri"/>
-              </a:rPr>
-              <a:t>Prioridad MoSCoW: Must</a:t>
-            </a:r>
-          </a:p>
-          <a:p>
-            <a:pPr>
-              <a:spcAft>
-                <a:spcPts val="400"/>
-              </a:spcAft>
-            </a:pPr>
-            <a:r>
-              <a:rPr sz="1400" b="0" i="0">
-                <a:solidFill>
-                  <a:srgbClr val="FFFFFF"/>
-                </a:solidFill>
-                <a:latin typeface="Calibri"/>
-              </a:rPr>
-              <a:t>Origen: entrevista Dr. Ramirez, frase 2 (necesidad NEC-02)</a:t>
-            </a:r>
-          </a:p>
-          <a:p>
-            <a:pPr>
-              <a:spcAft>
-                <a:spcPts val="400"/>
-              </a:spcAft>
-            </a:pPr>
-            <a:r>
-              <a:rPr sz="1400" b="0" i="0">
-                <a:solidFill>
-                  <a:srgbClr val="FFFFFF"/>
-                </a:solidFill>
-                <a:latin typeface="Calibri"/>
-              </a:rPr>
-              <a:t>Trazabilidad: NEC-02 -&gt; RF-03 -&gt; CU-04 -&gt; Pantalla P-02 -&gt; Prueba PR-07</a:t>
-            </a:r>
-          </a:p>
-          <a:p>
-            <a:pPr>
-              <a:spcAft>
-                <a:spcPts val="400"/>
-              </a:spcAft>
-            </a:pPr>
-            <a:r>
-              <a:rPr sz="1400" b="0" i="0">
-                <a:solidFill>
-                  <a:srgbClr val="FFFFFF"/>
-                </a:solidFill>
-                <a:latin typeface="Calibri"/>
-              </a:rPr>
-              <a:t>Estado: aprobado por el cliente</a:t>
-            </a:r>
-          </a:p>
-        </p:txBody>
-      </p:sp>
-      <p:sp>
-        <p:nvSpPr>
-          <p:cNvPr id="9" name="TextBox 8"/>
-          <p:cNvSpPr txBox="1"/>
-          <p:nvPr/>
-        </p:nvSpPr>
-        <p:spPr>
-          <a:xfrm>
-            <a:off x="457200" y="6080760"/>
-            <a:ext cx="11277295" cy="320040"/>
-          </a:xfrm>
-          <a:prstGeom prst="rect">
-            <a:avLst/>
-          </a:prstGeom>
-          <a:noFill/>
-        </p:spPr>
-        <p:txBody>
-          <a:bodyPr wrap="square">
-            <a:spAutoFit/>
-          </a:bodyPr>
-          <a:lstStyle/>
-          <a:p>
-            <a:pPr algn="ctr"/>
-            <a:r>
-              <a:rPr sz="1200" b="0" i="1">
-                <a:solidFill>
-                  <a:srgbClr val="666666"/>
-                </a:solidFill>
-                <a:latin typeface="Calibri"/>
-              </a:rPr>
-              <a:t>Un requisito sin criterio de verificacion y sin origen es una opinion con numero de identificacion.</a:t>
-            </a:r>
-          </a:p>
-        </p:txBody>
-      </p:sp>
-      <p:sp>
-        <p:nvSpPr>
-          <p:cNvPr id="10" name="TextBox 9"/>
+              <a:rPr sz="2000" b="0" i="0">
+                <a:solidFill>
+                  <a:srgbClr val="333333"/>
+                </a:solidFill>
+                <a:latin typeface="Calibri"/>
+              </a:rPr>
+              <a:t>–   Ninguna de esas cinco frases es todavia un requisito: son necesidades, y confundirlas es el primer error del analista novato.</a:t>
+            </a:r>
+          </a:p>
+        </p:txBody>
+      </p:sp>
+      <p:sp>
+        <p:nvSpPr>
+          <p:cNvPr id="6" name="TextBox 5"/>
           <p:cNvSpPr txBox="1"/>
           <p:nvPr/>
         </p:nvSpPr>
@@ -8504,7 +10382,7 @@
                 </a:solidFill>
                 <a:latin typeface="Calibri"/>
               </a:rPr>
-              <a:t>Demo del dia</a:t>
+              <a:t>Con las necesidades en la mano se separan dos familias</a:t>
             </a:r>
           </a:p>
         </p:txBody>
@@ -8537,31 +10415,13 @@
               </a:spcAft>
             </a:pPr>
             <a:r>
-              <a:rPr sz="2000" b="0" i="0">
+              <a:rPr sz="1900" b="0" i="0">
                 <a:solidFill>
                   <a:srgbClr val="333333"/>
                 </a:solidFill>
                 <a:latin typeface="Calibri"/>
               </a:rPr>
-              <a:t>–   </a:t>
-            </a:r>
-            <a:r>
-              <a:rPr sz="2000" b="1" i="0">
-                <a:solidFill>
-                  <a:srgbClr val="333333"/>
-                </a:solidFill>
-                <a:latin typeface="Calibri"/>
-              </a:rPr>
-              <a:t>Herramienta:</a:t>
-            </a:r>
-            <a:r>
-              <a:rPr sz="2000" b="0" i="0">
-                <a:solidFill>
-                  <a:srgbClr val="333333"/>
-                </a:solidFill>
-                <a:latin typeface="Calibri"/>
-              </a:rPr>
-              <a:t> Google Docs · draw.io</a:t>
+              <a:t>–   Con las necesidades en la mano se separan dos familias.</a:t>
             </a:r>
           </a:p>
           <a:p>
@@ -8571,31 +10431,13 @@
               </a:spcAft>
             </a:pPr>
             <a:r>
-              <a:rPr sz="2000" b="0" i="0">
+              <a:rPr sz="1900" b="0" i="0">
                 <a:solidFill>
                   <a:srgbClr val="333333"/>
                 </a:solidFill>
                 <a:latin typeface="Calibri"/>
               </a:rPr>
-              <a:t>–   </a:t>
-            </a:r>
-            <a:r>
-              <a:rPr sz="2000" b="1" i="0">
-                <a:solidFill>
-                  <a:srgbClr val="333333"/>
-                </a:solidFill>
-                <a:latin typeface="Calibri"/>
-              </a:rPr>
-              <a:t>Demo:</a:t>
-            </a:r>
-            <a:r>
-              <a:rPr sz="2000" b="0" i="0">
-                <a:solidFill>
-                  <a:srgbClr val="333333"/>
-                </a:solidFill>
-                <a:latin typeface="Calibri"/>
-              </a:rPr>
-              <a:t> El docente toma en vivo dos frases crudas de la entrevista al Dr. Ramirez y las convierte, frente al grupo, en un RF y un RNF usando la plantilla.</a:t>
+              <a:t>–   Un requisito funcional (RF) describe una capacidad observable del sistema, algo que alguien puede hacer con el</a:t>
             </a:r>
           </a:p>
           <a:p>
@@ -8605,13 +10447,77 @@
               </a:spcAft>
             </a:pPr>
             <a:r>
-              <a:rPr sz="2000" b="0" i="0">
+              <a:rPr sz="1900" b="0" i="0">
                 <a:solidFill>
                   <a:srgbClr val="333333"/>
                 </a:solidFill>
                 <a:latin typeface="Calibri"/>
               </a:rPr>
-              <a:t>–   Mismo dominio VetCare — no otro ejemplo. Aqui se diseña, no se programa.</a:t>
+              <a:t>–   Y se escribe con la plantilla el sistema debe permitir a &lt;actor&gt; &lt;accion&gt; &lt;objeto&gt; [bajo &lt;condicion&gt;]; el truco practico es que si al leerlo usted puede imaginar un boton, un formulario o una pantalla, es funcional.</a:t>
+            </a:r>
+          </a:p>
+          <a:p>
+            <a:pPr>
+              <a:spcAft>
+                <a:spcPts val="800"/>
+              </a:spcAft>
+            </a:pPr>
+            <a:r>
+              <a:rPr sz="1900" b="0" i="0">
+                <a:solidFill>
+                  <a:srgbClr val="333333"/>
+                </a:solidFill>
+                <a:latin typeface="Calibri"/>
+              </a:rPr>
+              <a:t>–   Un requisito no funcional (RNF) no describe QUE hace el sistema sino QUE TAN BIEN lo hace, y se agrupa en categorias conocidas: desempeno, seguridad y control de acceso, usabilidad, disponibilidad, respaldo, mantenibilidad y portabilidad.</a:t>
+            </a:r>
+          </a:p>
+          <a:p>
+            <a:pPr>
+              <a:spcAft>
+                <a:spcPts val="800"/>
+              </a:spcAft>
+            </a:pPr>
+            <a:r>
+              <a:rPr sz="1900" b="0" i="0">
+                <a:solidFill>
+                  <a:srgbClr val="333333"/>
+                </a:solidFill>
+                <a:latin typeface="Calibri"/>
+              </a:rPr>
+              <a:t>–   En VetCare, la frase que la auxiliar pueda agendar sin llamarme se convierte en dos cosas distintas al mismo tiempo: RF-05 el sistema debe permitir a la auxiliar registrar una cita seleccionando mascota, veterinario, fecha y hora</a:t>
+            </a:r>
+          </a:p>
+          <a:p>
+            <a:pPr>
+              <a:spcAft>
+                <a:spcPts val="800"/>
+              </a:spcAft>
+            </a:pPr>
+            <a:r>
+              <a:rPr sz="1900" b="0" i="0">
+                <a:solidFill>
+                  <a:srgbClr val="333333"/>
+                </a:solidFill>
+                <a:latin typeface="Calibri"/>
+              </a:rPr>
+              <a:t>–   Y RNF-02 el sistema debe manejar dos perfiles de acceso, auxiliar y veterinario, donde la auxiliar puede crear citas pero no puede editar ni ver el diagnostico clinico.</a:t>
+            </a:r>
+          </a:p>
+          <a:p>
+            <a:pPr>
+              <a:spcAft>
+                <a:spcPts val="800"/>
+              </a:spcAft>
+            </a:pPr>
+            <a:r>
+              <a:rPr sz="1900" b="0" i="0">
+                <a:solidFill>
+                  <a:srgbClr val="333333"/>
+                </a:solidFill>
+                <a:latin typeface="Calibri"/>
+              </a:rPr>
+              <a:t>–   Esa separacion importa porque el RF se prueba haciendo clic y el RNF se prueba midiendo o intentando lo prohibido.</a:t>
             </a:r>
           </a:p>
         </p:txBody>
@@ -8686,7 +10592,7 @@
         <p:spPr>
           <a:xfrm>
             <a:off x="0" y="0"/>
-            <a:ext cx="12191695" cy="1170432"/>
+            <a:ext cx="12191695" cy="960120"/>
           </a:xfrm>
           <a:prstGeom prst="rect">
             <a:avLst/>
@@ -8728,7 +10634,7 @@
         </p:nvSpPr>
         <p:spPr>
           <a:xfrm>
-            <a:off x="0" y="1170432"/>
+            <a:off x="0" y="960120"/>
             <a:ext cx="12191695" cy="41148"/>
           </a:xfrm>
           <a:prstGeom prst="rect">
@@ -8772,7 +10678,7 @@
         <p:spPr>
           <a:xfrm>
             <a:off x="457200" y="164592"/>
-            <a:ext cx="11277295" cy="384048"/>
+            <a:ext cx="11277295" cy="502920"/>
           </a:xfrm>
           <a:prstGeom prst="rect">
             <a:avLst/>
@@ -8792,7 +10698,7 @@
                 </a:solidFill>
                 <a:latin typeface="Calibri"/>
               </a:rPr>
-              <a:t>Herramientas de hoy</a:t>
+              <a:t>La regla de oro del oficio es dura y se enuncia asi: si no se puede...</a:t>
             </a:r>
           </a:p>
         </p:txBody>
@@ -8805,8 +10711,8 @@
         </p:nvSpPr>
         <p:spPr>
           <a:xfrm>
-            <a:off x="457200" y="566928"/>
-            <a:ext cx="11277295" cy="411480"/>
+            <a:off x="457200" y="1170432"/>
+            <a:ext cx="11277295" cy="5230368"/>
           </a:xfrm>
           <a:prstGeom prst="rect">
             <a:avLst/>
@@ -8819,633 +10725,122 @@
           </a:bodyPr>
           <a:lstStyle/>
           <a:p>
-            <a:r>
-              <a:rPr sz="1400" b="0" i="0">
-                <a:solidFill>
-                  <a:srgbClr val="B8D8EE"/>
-                </a:solidFill>
-                <a:latin typeface="Calibri"/>
-              </a:rPr>
-              <a:t>Gratis · funcionan en el navegador</a:t>
-            </a:r>
-          </a:p>
-        </p:txBody>
-      </p:sp>
-      <p:sp>
-        <p:nvSpPr>
-          <p:cNvPr id="6" name="Rounded Rectangle 5"/>
-          <p:cNvSpPr/>
-          <p:nvPr/>
-        </p:nvSpPr>
-        <p:spPr>
-          <a:xfrm>
-            <a:off x="457200" y="1591056"/>
-            <a:ext cx="3624986" cy="2331720"/>
-          </a:xfrm>
-          <a:prstGeom prst="roundRect">
-            <a:avLst>
-              <a:gd name="adj" fmla="val 12000"/>
-            </a:avLst>
-          </a:prstGeom>
-          <a:solidFill>
-            <a:srgbClr val="F2F2F2"/>
-          </a:solidFill>
-          <a:ln>
-            <a:noFill/>
-          </a:ln>
-        </p:spPr>
-        <p:style>
-          <a:lnRef idx="1">
-            <a:schemeClr val="accent1"/>
-          </a:lnRef>
-          <a:fillRef idx="3">
-            <a:schemeClr val="accent1"/>
-          </a:fillRef>
-          <a:effectRef idx="2">
-            <a:schemeClr val="accent1"/>
-          </a:effectRef>
-          <a:fontRef idx="minor">
-            <a:schemeClr val="lt1"/>
-          </a:fontRef>
-        </p:style>
-        <p:txBody>
-          <a:bodyPr rtlCol="0" anchor="ctr"/>
-          <a:lstStyle/>
-          <a:p>
-            <a:pPr algn="ctr"/>
-          </a:p>
-        </p:txBody>
-      </p:sp>
-      <p:sp>
-        <p:nvSpPr>
-          <p:cNvPr id="7" name="Rectangle 6"/>
-          <p:cNvSpPr/>
-          <p:nvPr/>
-        </p:nvSpPr>
-        <p:spPr>
-          <a:xfrm>
-            <a:off x="457200" y="1591056"/>
-            <a:ext cx="3624986" cy="64008"/>
-          </a:xfrm>
-          <a:prstGeom prst="rect">
-            <a:avLst/>
-          </a:prstGeom>
-          <a:solidFill>
-            <a:srgbClr val="095292"/>
-          </a:solidFill>
-          <a:ln>
-            <a:noFill/>
-          </a:ln>
-        </p:spPr>
-        <p:style>
-          <a:lnRef idx="1">
-            <a:schemeClr val="accent1"/>
-          </a:lnRef>
-          <a:fillRef idx="3">
-            <a:schemeClr val="accent1"/>
-          </a:fillRef>
-          <a:effectRef idx="2">
-            <a:schemeClr val="accent1"/>
-          </a:effectRef>
-          <a:fontRef idx="minor">
-            <a:schemeClr val="lt1"/>
-          </a:fontRef>
-        </p:style>
-        <p:txBody>
-          <a:bodyPr rtlCol="0" anchor="ctr"/>
-          <a:lstStyle/>
-          <a:p>
-            <a:pPr algn="ctr"/>
-          </a:p>
-        </p:txBody>
-      </p:sp>
-      <p:sp>
-        <p:nvSpPr>
-          <p:cNvPr id="8" name="Rectangle 7"/>
-          <p:cNvSpPr/>
-          <p:nvPr/>
-        </p:nvSpPr>
-        <p:spPr>
-          <a:xfrm>
-            <a:off x="457200" y="1655064"/>
-            <a:ext cx="3624986" cy="27432"/>
-          </a:xfrm>
-          <a:prstGeom prst="rect">
-            <a:avLst/>
-          </a:prstGeom>
-          <a:solidFill>
-            <a:srgbClr val="FFD000"/>
-          </a:solidFill>
-          <a:ln>
-            <a:noFill/>
-          </a:ln>
-        </p:spPr>
-        <p:style>
-          <a:lnRef idx="1">
-            <a:schemeClr val="accent1"/>
-          </a:lnRef>
-          <a:fillRef idx="3">
-            <a:schemeClr val="accent1"/>
-          </a:fillRef>
-          <a:effectRef idx="2">
-            <a:schemeClr val="accent1"/>
-          </a:effectRef>
-          <a:fontRef idx="minor">
-            <a:schemeClr val="lt1"/>
-          </a:fontRef>
-        </p:style>
-        <p:txBody>
-          <a:bodyPr rtlCol="0" anchor="ctr"/>
-          <a:lstStyle/>
-          <a:p>
-            <a:pPr algn="ctr"/>
-          </a:p>
-        </p:txBody>
-      </p:sp>
-      <p:pic>
-        <p:nvPicPr>
-          <p:cNvPr id="9" name="Picture 8" descr="drawio.png"/>
-          <p:cNvPicPr>
-            <a:picLocks noChangeAspect="1"/>
-          </p:cNvPicPr>
-          <p:nvPr/>
-        </p:nvPicPr>
-        <p:blipFill>
-          <a:blip r:embed="rId2"/>
-          <a:stretch>
-            <a:fillRect/>
-          </a:stretch>
-        </p:blipFill>
-        <p:spPr>
-          <a:xfrm>
-            <a:off x="1643329" y="1847087"/>
-            <a:ext cx="1252728" cy="1252728"/>
-          </a:xfrm>
-          <a:prstGeom prst="rect">
-            <a:avLst/>
-          </a:prstGeom>
-        </p:spPr>
-      </p:pic>
-      <p:sp>
-        <p:nvSpPr>
-          <p:cNvPr id="10" name="TextBox 9"/>
-          <p:cNvSpPr txBox="1"/>
-          <p:nvPr/>
-        </p:nvSpPr>
-        <p:spPr>
-          <a:xfrm>
-            <a:off x="530352" y="3191256"/>
-            <a:ext cx="3478682" cy="621792"/>
-          </a:xfrm>
-          <a:prstGeom prst="rect">
-            <a:avLst/>
-          </a:prstGeom>
-          <a:noFill/>
-        </p:spPr>
-        <p:txBody>
-          <a:bodyPr wrap="square" anchor="t"/>
-          <a:lstStyle/>
-          <a:p>
-            <a:pPr algn="ctr"/>
-            <a:r>
-              <a:rPr sz="1300" b="1" i="0">
-                <a:solidFill>
-                  <a:srgbClr val="095292"/>
-                </a:solidFill>
-                <a:latin typeface="Calibri"/>
-              </a:rPr>
-              <a:t>Draw.Io</a:t>
-            </a:r>
-          </a:p>
-          <a:p>
-            <a:pPr algn="ctr">
-              <a:spcBef>
-                <a:spcPts val="200"/>
-              </a:spcBef>
+            <a:pPr>
+              <a:spcAft>
+                <a:spcPts val="800"/>
+              </a:spcAft>
             </a:pPr>
             <a:r>
-              <a:rPr sz="1000" b="0" i="0">
-                <a:solidFill>
-                  <a:srgbClr val="666666"/>
-                </a:solidFill>
-                <a:latin typeface="Calibri"/>
-              </a:rPr>
-              <a:t>Diagramas UML y de contexto</a:t>
-            </a:r>
-          </a:p>
-        </p:txBody>
-      </p:sp>
-      <p:sp>
-        <p:nvSpPr>
-          <p:cNvPr id="11" name="Rounded Rectangle 10"/>
-          <p:cNvSpPr/>
-          <p:nvPr/>
-        </p:nvSpPr>
-        <p:spPr>
-          <a:xfrm>
-            <a:off x="4283354" y="1591056"/>
-            <a:ext cx="3624986" cy="2331720"/>
-          </a:xfrm>
-          <a:prstGeom prst="roundRect">
-            <a:avLst>
-              <a:gd name="adj" fmla="val 12000"/>
-            </a:avLst>
-          </a:prstGeom>
-          <a:solidFill>
-            <a:srgbClr val="F2F2F2"/>
-          </a:solidFill>
-          <a:ln>
-            <a:noFill/>
-          </a:ln>
-        </p:spPr>
-        <p:style>
-          <a:lnRef idx="1">
-            <a:schemeClr val="accent1"/>
-          </a:lnRef>
-          <a:fillRef idx="3">
-            <a:schemeClr val="accent1"/>
-          </a:fillRef>
-          <a:effectRef idx="2">
-            <a:schemeClr val="accent1"/>
-          </a:effectRef>
-          <a:fontRef idx="minor">
-            <a:schemeClr val="lt1"/>
-          </a:fontRef>
-        </p:style>
-        <p:txBody>
-          <a:bodyPr rtlCol="0" anchor="ctr"/>
-          <a:lstStyle/>
-          <a:p>
-            <a:pPr algn="ctr"/>
-          </a:p>
-        </p:txBody>
-      </p:sp>
-      <p:sp>
-        <p:nvSpPr>
-          <p:cNvPr id="12" name="Rectangle 11"/>
-          <p:cNvSpPr/>
-          <p:nvPr/>
-        </p:nvSpPr>
-        <p:spPr>
-          <a:xfrm>
-            <a:off x="4283354" y="1591056"/>
-            <a:ext cx="3624986" cy="64008"/>
-          </a:xfrm>
-          <a:prstGeom prst="rect">
-            <a:avLst/>
-          </a:prstGeom>
-          <a:solidFill>
-            <a:srgbClr val="095292"/>
-          </a:solidFill>
-          <a:ln>
-            <a:noFill/>
-          </a:ln>
-        </p:spPr>
-        <p:style>
-          <a:lnRef idx="1">
-            <a:schemeClr val="accent1"/>
-          </a:lnRef>
-          <a:fillRef idx="3">
-            <a:schemeClr val="accent1"/>
-          </a:fillRef>
-          <a:effectRef idx="2">
-            <a:schemeClr val="accent1"/>
-          </a:effectRef>
-          <a:fontRef idx="minor">
-            <a:schemeClr val="lt1"/>
-          </a:fontRef>
-        </p:style>
-        <p:txBody>
-          <a:bodyPr rtlCol="0" anchor="ctr"/>
-          <a:lstStyle/>
-          <a:p>
-            <a:pPr algn="ctr"/>
-          </a:p>
-        </p:txBody>
-      </p:sp>
-      <p:sp>
-        <p:nvSpPr>
-          <p:cNvPr id="13" name="Rectangle 12"/>
-          <p:cNvSpPr/>
-          <p:nvPr/>
-        </p:nvSpPr>
-        <p:spPr>
-          <a:xfrm>
-            <a:off x="4283354" y="1655064"/>
-            <a:ext cx="3624986" cy="27432"/>
-          </a:xfrm>
-          <a:prstGeom prst="rect">
-            <a:avLst/>
-          </a:prstGeom>
-          <a:solidFill>
-            <a:srgbClr val="FFD000"/>
-          </a:solidFill>
-          <a:ln>
-            <a:noFill/>
-          </a:ln>
-        </p:spPr>
-        <p:style>
-          <a:lnRef idx="1">
-            <a:schemeClr val="accent1"/>
-          </a:lnRef>
-          <a:fillRef idx="3">
-            <a:schemeClr val="accent1"/>
-          </a:fillRef>
-          <a:effectRef idx="2">
-            <a:schemeClr val="accent1"/>
-          </a:effectRef>
-          <a:fontRef idx="minor">
-            <a:schemeClr val="lt1"/>
-          </a:fontRef>
-        </p:style>
-        <p:txBody>
-          <a:bodyPr rtlCol="0" anchor="ctr"/>
-          <a:lstStyle/>
-          <a:p>
-            <a:pPr algn="ctr"/>
-          </a:p>
-        </p:txBody>
-      </p:sp>
-      <p:pic>
-        <p:nvPicPr>
-          <p:cNvPr id="14" name="Picture 13" descr="google_docs.png"/>
-          <p:cNvPicPr>
-            <a:picLocks noChangeAspect="1"/>
-          </p:cNvPicPr>
-          <p:nvPr/>
-        </p:nvPicPr>
-        <p:blipFill>
-          <a:blip r:embed="rId3"/>
-          <a:stretch>
-            <a:fillRect/>
-          </a:stretch>
-        </p:blipFill>
-        <p:spPr>
-          <a:xfrm>
-            <a:off x="5469483" y="1847087"/>
-            <a:ext cx="1252728" cy="1252728"/>
-          </a:xfrm>
-          <a:prstGeom prst="rect">
-            <a:avLst/>
-          </a:prstGeom>
-        </p:spPr>
-      </p:pic>
-      <p:sp>
-        <p:nvSpPr>
-          <p:cNvPr id="15" name="TextBox 14"/>
-          <p:cNvSpPr txBox="1"/>
-          <p:nvPr/>
-        </p:nvSpPr>
-        <p:spPr>
-          <a:xfrm>
-            <a:off x="4356506" y="3191256"/>
-            <a:ext cx="3478682" cy="621792"/>
-          </a:xfrm>
-          <a:prstGeom prst="rect">
-            <a:avLst/>
-          </a:prstGeom>
-          <a:noFill/>
-        </p:spPr>
-        <p:txBody>
-          <a:bodyPr wrap="square" anchor="t"/>
-          <a:lstStyle/>
-          <a:p>
-            <a:pPr algn="ctr"/>
-            <a:r>
-              <a:rPr sz="1300" b="1" i="0">
-                <a:solidFill>
-                  <a:srgbClr val="095292"/>
-                </a:solidFill>
-                <a:latin typeface="Calibri"/>
-              </a:rPr>
-              <a:t>google docs</a:t>
-            </a:r>
-          </a:p>
-          <a:p>
-            <a:pPr algn="ctr">
-              <a:spcBef>
-                <a:spcPts val="200"/>
-              </a:spcBef>
+              <a:rPr sz="2000" b="0" i="0">
+                <a:solidFill>
+                  <a:srgbClr val="333333"/>
+                </a:solidFill>
+                <a:latin typeface="Calibri"/>
+              </a:rPr>
+              <a:t>–   La regla de oro del oficio es dura y se enuncia asi: si no se puede verificar, no es un requisito, es un deseo.</a:t>
+            </a:r>
+          </a:p>
+          <a:p>
+            <a:pPr>
+              <a:spcAft>
+                <a:spcPts val="800"/>
+              </a:spcAft>
             </a:pPr>
             <a:r>
-              <a:rPr sz="1000" b="0" i="0">
-                <a:solidFill>
-                  <a:srgbClr val="666666"/>
-                </a:solidFill>
-                <a:latin typeface="Calibri"/>
-              </a:rPr>
-              <a:t>Documentos del paquete de diseño</a:t>
-            </a:r>
-          </a:p>
-        </p:txBody>
-      </p:sp>
-      <p:sp>
-        <p:nvSpPr>
-          <p:cNvPr id="16" name="Rounded Rectangle 15"/>
-          <p:cNvSpPr/>
-          <p:nvPr/>
-        </p:nvSpPr>
-        <p:spPr>
-          <a:xfrm>
-            <a:off x="8109508" y="1591056"/>
-            <a:ext cx="3624986" cy="2331720"/>
-          </a:xfrm>
-          <a:prstGeom prst="roundRect">
-            <a:avLst>
-              <a:gd name="adj" fmla="val 12000"/>
-            </a:avLst>
-          </a:prstGeom>
-          <a:solidFill>
-            <a:srgbClr val="F2F2F2"/>
-          </a:solidFill>
-          <a:ln>
-            <a:noFill/>
-          </a:ln>
-        </p:spPr>
-        <p:style>
-          <a:lnRef idx="1">
-            <a:schemeClr val="accent1"/>
-          </a:lnRef>
-          <a:fillRef idx="3">
-            <a:schemeClr val="accent1"/>
-          </a:fillRef>
-          <a:effectRef idx="2">
-            <a:schemeClr val="accent1"/>
-          </a:effectRef>
-          <a:fontRef idx="minor">
-            <a:schemeClr val="lt1"/>
-          </a:fontRef>
-        </p:style>
-        <p:txBody>
-          <a:bodyPr rtlCol="0" anchor="ctr"/>
-          <a:lstStyle/>
-          <a:p>
-            <a:pPr algn="ctr"/>
-          </a:p>
-        </p:txBody>
-      </p:sp>
-      <p:sp>
-        <p:nvSpPr>
-          <p:cNvPr id="17" name="Rectangle 16"/>
-          <p:cNvSpPr/>
-          <p:nvPr/>
-        </p:nvSpPr>
-        <p:spPr>
-          <a:xfrm>
-            <a:off x="8109508" y="1591056"/>
-            <a:ext cx="3624986" cy="64008"/>
-          </a:xfrm>
-          <a:prstGeom prst="rect">
-            <a:avLst/>
-          </a:prstGeom>
-          <a:solidFill>
-            <a:srgbClr val="095292"/>
-          </a:solidFill>
-          <a:ln>
-            <a:noFill/>
-          </a:ln>
-        </p:spPr>
-        <p:style>
-          <a:lnRef idx="1">
-            <a:schemeClr val="accent1"/>
-          </a:lnRef>
-          <a:fillRef idx="3">
-            <a:schemeClr val="accent1"/>
-          </a:fillRef>
-          <a:effectRef idx="2">
-            <a:schemeClr val="accent1"/>
-          </a:effectRef>
-          <a:fontRef idx="minor">
-            <a:schemeClr val="lt1"/>
-          </a:fontRef>
-        </p:style>
-        <p:txBody>
-          <a:bodyPr rtlCol="0" anchor="ctr"/>
-          <a:lstStyle/>
-          <a:p>
-            <a:pPr algn="ctr"/>
-          </a:p>
-        </p:txBody>
-      </p:sp>
-      <p:sp>
-        <p:nvSpPr>
-          <p:cNvPr id="18" name="Rectangle 17"/>
-          <p:cNvSpPr/>
-          <p:nvPr/>
-        </p:nvSpPr>
-        <p:spPr>
-          <a:xfrm>
-            <a:off x="8109508" y="1655064"/>
-            <a:ext cx="3624986" cy="27432"/>
-          </a:xfrm>
-          <a:prstGeom prst="rect">
-            <a:avLst/>
-          </a:prstGeom>
-          <a:solidFill>
-            <a:srgbClr val="FFD000"/>
-          </a:solidFill>
-          <a:ln>
-            <a:noFill/>
-          </a:ln>
-        </p:spPr>
-        <p:style>
-          <a:lnRef idx="1">
-            <a:schemeClr val="accent1"/>
-          </a:lnRef>
-          <a:fillRef idx="3">
-            <a:schemeClr val="accent1"/>
-          </a:fillRef>
-          <a:effectRef idx="2">
-            <a:schemeClr val="accent1"/>
-          </a:effectRef>
-          <a:fontRef idx="minor">
-            <a:schemeClr val="lt1"/>
-          </a:fontRef>
-        </p:style>
-        <p:txBody>
-          <a:bodyPr rtlCol="0" anchor="ctr"/>
-          <a:lstStyle/>
-          <a:p>
-            <a:pPr algn="ctr"/>
-          </a:p>
-        </p:txBody>
-      </p:sp>
-      <p:pic>
-        <p:nvPicPr>
-          <p:cNvPr id="19" name="Picture 18" descr="examlab.png"/>
-          <p:cNvPicPr>
-            <a:picLocks noChangeAspect="1"/>
-          </p:cNvPicPr>
-          <p:nvPr/>
-        </p:nvPicPr>
-        <p:blipFill>
-          <a:blip r:embed="rId4"/>
-          <a:stretch>
-            <a:fillRect/>
-          </a:stretch>
-        </p:blipFill>
-        <p:spPr>
-          <a:xfrm>
-            <a:off x="9295638" y="1847087"/>
-            <a:ext cx="1252728" cy="1252728"/>
-          </a:xfrm>
-          <a:prstGeom prst="rect">
-            <a:avLst/>
-          </a:prstGeom>
-        </p:spPr>
-      </p:pic>
-      <p:sp>
-        <p:nvSpPr>
-          <p:cNvPr id="20" name="TextBox 19"/>
-          <p:cNvSpPr txBox="1"/>
-          <p:nvPr/>
-        </p:nvSpPr>
-        <p:spPr>
-          <a:xfrm>
-            <a:off x="8182660" y="3191256"/>
-            <a:ext cx="3478682" cy="621792"/>
-          </a:xfrm>
-          <a:prstGeom prst="rect">
-            <a:avLst/>
-          </a:prstGeom>
-          <a:noFill/>
-        </p:spPr>
-        <p:txBody>
-          <a:bodyPr wrap="square" anchor="t"/>
-          <a:lstStyle/>
-          <a:p>
-            <a:pPr algn="ctr"/>
-            <a:r>
-              <a:rPr sz="1300" b="1" i="0">
-                <a:solidFill>
-                  <a:srgbClr val="095292"/>
-                </a:solidFill>
-                <a:latin typeface="Calibri"/>
-              </a:rPr>
-              <a:t>la plataforma del curso</a:t>
-            </a:r>
-          </a:p>
-          <a:p>
-            <a:pPr algn="ctr">
-              <a:spcBef>
-                <a:spcPts val="200"/>
-              </a:spcBef>
+              <a:rPr sz="2000" b="0" i="0">
+                <a:solidFill>
+                  <a:srgbClr val="333333"/>
+                </a:solidFill>
+                <a:latin typeface="Calibri"/>
+              </a:rPr>
+              <a:t>–   Hay una lista negra de palabras que suenan a compromiso pero no comprometen a nada: rapido, amigable, facil, intuitivo, robusto, moderno, optimo, eficiente, seguro.</a:t>
+            </a:r>
+          </a:p>
+          <a:p>
+            <a:pPr>
+              <a:spcAft>
+                <a:spcPts val="800"/>
+              </a:spcAft>
             </a:pPr>
             <a:r>
-              <a:rPr sz="1000" b="0" i="0">
-                <a:solidFill>
-                  <a:srgbClr val="666666"/>
-                </a:solidFill>
-                <a:latin typeface="Calibri"/>
-              </a:rPr>
-              <a:t>Entrega del taller · en la fecha que indique el docente</a:t>
-            </a:r>
-          </a:p>
-        </p:txBody>
-      </p:sp>
-      <p:sp>
-        <p:nvSpPr>
-          <p:cNvPr id="21" name="TextBox 20"/>
+              <a:rPr sz="2000" b="0" i="0">
+                <a:solidFill>
+                  <a:srgbClr val="333333"/>
+                </a:solidFill>
+                <a:latin typeface="Calibri"/>
+              </a:rPr>
+              <a:t>–   Cada vez que aparece una de esas palabras hay que preguntar cuanto, en que condiciones y como lo mediriamos delante del cliente.</a:t>
+            </a:r>
+          </a:p>
+          <a:p>
+            <a:pPr>
+              <a:spcAft>
+                <a:spcPts val="800"/>
+              </a:spcAft>
+            </a:pPr>
+            <a:r>
+              <a:rPr sz="2000" b="0" i="0">
+                <a:solidFill>
+                  <a:srgbClr val="333333"/>
+                </a:solidFill>
+                <a:latin typeface="Calibri"/>
+              </a:rPr>
+              <a:t>–   La frase 4 del Dr. Ramirez, el sistema tiene que ser rapido, no se puede calificar ni aprobar ni rechazar</a:t>
+            </a:r>
+          </a:p>
+          <a:p>
+            <a:pPr>
+              <a:spcAft>
+                <a:spcPts val="800"/>
+              </a:spcAft>
+            </a:pPr>
+            <a:r>
+              <a:rPr sz="2000" b="0" i="0">
+                <a:solidFill>
+                  <a:srgbClr val="333333"/>
+                </a:solidFill>
+                <a:latin typeface="Calibri"/>
+              </a:rPr>
+              <a:t>–   Convertida queda RNF-01: la busqueda de historial por documento del dueno debe devolver resultados en maximo 3 segundos, con 5.000 fichas cargadas y 10 usuarios trabajando al mismo tiempo.</a:t>
+            </a:r>
+          </a:p>
+          <a:p>
+            <a:pPr>
+              <a:spcAft>
+                <a:spcPts val="800"/>
+              </a:spcAft>
+            </a:pPr>
+            <a:r>
+              <a:rPr sz="2000" b="0" i="0">
+                <a:solidFill>
+                  <a:srgbClr val="333333"/>
+                </a:solidFill>
+                <a:latin typeface="Calibri"/>
+              </a:rPr>
+              <a:t>–   Ahora si existe una prueba: se carga la base de ejemplo, se cronometra y el requisito pasa o no pasa.</a:t>
+            </a:r>
+          </a:p>
+          <a:p>
+            <a:pPr>
+              <a:spcAft>
+                <a:spcPts val="800"/>
+              </a:spcAft>
+            </a:pPr>
+            <a:r>
+              <a:rPr sz="2000" b="0" i="0">
+                <a:solidFill>
+                  <a:srgbClr val="333333"/>
+                </a:solidFill>
+                <a:latin typeface="Calibri"/>
+              </a:rPr>
+              <a:t>–   Lo mismo con la frase 1: que las fichas no se pierdan no es requisito, pero RF-01 registrar una ficha con codigo unico e irrepetible mas RNF-04 respaldo automatico diario con restauracion probada una vez al mes, si lo son.</a:t>
+            </a:r>
+          </a:p>
+        </p:txBody>
+      </p:sp>
+      <p:sp>
+        <p:nvSpPr>
+          <p:cNvPr id="6" name="TextBox 5"/>
           <p:cNvSpPr txBox="1"/>
           <p:nvPr/>
         </p:nvSpPr>
@@ -9619,7 +11014,7 @@
                 </a:solidFill>
                 <a:latin typeface="Calibri"/>
               </a:rPr>
-              <a:t>Taller PI — por que importa</a:t>
+              <a:t>Priorizar no es ordenar por gusto sino decidir con el cliente que pasa...</a:t>
             </a:r>
           </a:p>
         </p:txBody>
@@ -9658,25 +11053,7 @@
                 </a:solidFill>
                 <a:latin typeface="Calibri"/>
               </a:rPr>
-              <a:t>–   </a:t>
-            </a:r>
-            <a:r>
-              <a:rPr sz="2000" b="1" i="0">
-                <a:solidFill>
-                  <a:srgbClr val="333333"/>
-                </a:solidFill>
-                <a:latin typeface="Calibri"/>
-              </a:rPr>
-              <a:t>Por que importa al PI:</a:t>
-            </a:r>
-            <a:r>
-              <a:rPr sz="2000" b="0" i="0">
-                <a:solidFill>
-                  <a:srgbClr val="333333"/>
-                </a:solidFill>
-                <a:latin typeface="Calibri"/>
-              </a:rPr>
-              <a:t> este catalogo es el contrato del Proyecto Integrador; todo lo que se dibuje en las clases siguientes (casos de uso, clases, mockups, diccionario de datos) debe poder rastrearse hasta un requisito de esta lista.</a:t>
+              <a:t>–   Priorizar no es ordenar por gusto sino decidir con el cliente que pasa si algo no esta el dia de la entrega, y para eso se usa MoSCoW: Must es lo que sin ello el sistema no sirve y no se sale a produccion</a:t>
             </a:r>
           </a:p>
           <a:p>
@@ -9692,7 +11069,7 @@
                 </a:solidFill>
                 <a:latin typeface="Calibri"/>
               </a:rPr>
-              <a:t>–   Si un requisito no queda hoy en el documento, sencillamente no existe para VetCare: no se disena, no se dibuja y no se programa en Programacion II.</a:t>
+              <a:t>–   Should es importante pero existe un plan B manual mientras tanto</a:t>
             </a:r>
           </a:p>
           <a:p>
@@ -9708,7 +11085,71 @@
                 </a:solidFill>
                 <a:latin typeface="Calibri"/>
               </a:rPr>
-              <a:t>–   Es tambien la primera entrega que se defiende hablando: usted debe poder explicarle al Dr. Ramirez, en dos minutos, que se le va a construir y que no.</a:t>
+              <a:t>–   Could es lo que se hace si sobra tiempo; y Won't es lo que se declara explicitamente fuera de ESTA version, que es la categoria mas valiosa de las cuatro porque es la unica que le pone freno al alcance infinito.</a:t>
+            </a:r>
+          </a:p>
+          <a:p>
+            <a:pPr>
+              <a:spcAft>
+                <a:spcPts val="800"/>
+              </a:spcAft>
+            </a:pPr>
+            <a:r>
+              <a:rPr sz="2000" b="0" i="0">
+                <a:solidFill>
+                  <a:srgbClr val="333333"/>
+                </a:solidFill>
+                <a:latin typeface="Calibri"/>
+              </a:rPr>
+              <a:t>–   La regla practica es que los Must no deberian superar el 60% del esfuerzo estimado, porque si todo es Must nada es Must.</a:t>
+            </a:r>
+          </a:p>
+          <a:p>
+            <a:pPr>
+              <a:spcAft>
+                <a:spcPts val="800"/>
+              </a:spcAft>
+            </a:pPr>
+            <a:r>
+              <a:rPr sz="2000" b="0" i="0">
+                <a:solidFill>
+                  <a:srgbClr val="333333"/>
+                </a:solidFill>
+                <a:latin typeface="Calibri"/>
+              </a:rPr>
+              <a:t>–   En VetCare: registrar dueno y mascota, consultar historial y agendar cita son Must, porque atacan los tres dolores de Huellitas; el reporte mensual de consultas es Should</a:t>
+            </a:r>
+          </a:p>
+          <a:p>
+            <a:pPr>
+              <a:spcAft>
+                <a:spcPts val="800"/>
+              </a:spcAft>
+            </a:pPr>
+            <a:r>
+              <a:rPr sz="2000" b="0" i="0">
+                <a:solidFill>
+                  <a:srgbClr val="333333"/>
+                </a:solidFill>
+                <a:latin typeface="Calibri"/>
+              </a:rPr>
+              <a:t>–   Porque hoy el Dr. Ramirez lo hace contando a mano y puede sobrevivir un mes mas; el envio de recordatorios por WhatsApp y la facturacion electronica son Won't de esta version</a:t>
+            </a:r>
+          </a:p>
+          <a:p>
+            <a:pPr>
+              <a:spcAft>
+                <a:spcPts val="800"/>
+              </a:spcAft>
+            </a:pPr>
+            <a:r>
+              <a:rPr sz="2000" b="0" i="0">
+                <a:solidFill>
+                  <a:srgbClr val="333333"/>
+                </a:solidFill>
+                <a:latin typeface="Calibri"/>
+              </a:rPr>
+              <a:t>–   Y se escriben en el documento con esa etiqueta para que nadie los reclame despues como si hubieran sido prometidos.</a:t>
             </a:r>
           </a:p>
         </p:txBody>
@@ -9889,7 +11330,7 @@
                 </a:solidFill>
                 <a:latin typeface="Calibri"/>
               </a:rPr>
-              <a:t>Taller PI — punto de partida</a:t>
+              <a:t>El ultimo pedazo es la trazabilidad, que es poder seguir cada requisito...</a:t>
             </a:r>
           </a:p>
         </p:txBody>
@@ -9928,7 +11369,7 @@
                 </a:solidFill>
                 <a:latin typeface="Calibri"/>
               </a:rPr>
-              <a:t>–   Hoy solo existe la transcripcion de la entrevista al Dr. Ramirez: cinco frases sueltas, dichas en lenguaje de veterinario y no de analista.</a:t>
+              <a:t>–   El ultimo pedazo es la trazabilidad, que es poder seguir cada requisito hacia atras y hacia adelante.</a:t>
             </a:r>
           </a:p>
           <a:p>
@@ -9944,7 +11385,7 @@
                 </a:solidFill>
                 <a:latin typeface="Calibri"/>
               </a:rPr>
-              <a:t>–   La clinica Huellitas sigue en papel: fichas que se extravian, busquedas de historial que toman varios minutos con el paciente esperando y cero metricas mensuales.</a:t>
+              <a:t>–   Hacia atras: de donde salio este RF, quien lo pidio, en que frase de la entrevista, en que fecha; asi cuando alguien pregunte y esto por que esta aqui hay respuesta y no cara de sorpresa.</a:t>
             </a:r>
           </a:p>
           <a:p>
@@ -9960,7 +11401,71 @@
                 </a:solidFill>
                 <a:latin typeface="Calibri"/>
               </a:rPr>
-              <a:t>–   No hay documento de requisitos, no hay prioridades acordadas y nadie sabe todavia que queda dentro y que queda fuera de la primera version de VetCare.</a:t>
+              <a:t>–   Hacia adelante: en que caso de uso se desarrolla, en que pantalla del mockup se ve, en que clase del diagrama UML aparece y con que prueba se acepta.</a:t>
+            </a:r>
+          </a:p>
+          <a:p>
+            <a:pPr>
+              <a:spcAft>
+                <a:spcPts val="800"/>
+              </a:spcAft>
+            </a:pPr>
+            <a:r>
+              <a:rPr sz="2000" b="0" i="0">
+                <a:solidFill>
+                  <a:srgbClr val="333333"/>
+                </a:solidFill>
+                <a:latin typeface="Calibri"/>
+              </a:rPr>
+              <a:t>–   Se lleva en una matriz simple de cuatro columnas y se actualiza cada clase.</a:t>
+            </a:r>
+          </a:p>
+          <a:p>
+            <a:pPr>
+              <a:spcAft>
+                <a:spcPts val="800"/>
+              </a:spcAft>
+            </a:pPr>
+            <a:r>
+              <a:rPr sz="2000" b="0" i="0">
+                <a:solidFill>
+                  <a:srgbClr val="333333"/>
+                </a:solidFill>
+                <a:latin typeface="Calibri"/>
+              </a:rPr>
+              <a:t>–   Esto no es burocracia: es lo que permite que cuando el cliente cambie de opinion, usted sepa en dos minutos que se rompe y cuanto cuesta</a:t>
+            </a:r>
+          </a:p>
+          <a:p>
+            <a:pPr>
+              <a:spcAft>
+                <a:spcPts val="800"/>
+              </a:spcAft>
+            </a:pPr>
+            <a:r>
+              <a:rPr sz="2000" b="0" i="0">
+                <a:solidFill>
+                  <a:srgbClr val="333333"/>
+                </a:solidFill>
+                <a:latin typeface="Calibri"/>
+              </a:rPr>
+              <a:t>–   Y en el Proyecto Integrador es lo que hace posible que el companero que solo cursa Programacion II reciba estos planos y sepa exactamente que implementar y por que, sin tener que volver a entrevistar al veterinario.</a:t>
+            </a:r>
+          </a:p>
+          <a:p>
+            <a:pPr>
+              <a:spcAft>
+                <a:spcPts val="800"/>
+              </a:spcAft>
+            </a:pPr>
+            <a:r>
+              <a:rPr sz="2000" b="0" i="0">
+                <a:solidFill>
+                  <a:srgbClr val="333333"/>
+                </a:solidFill>
+                <a:latin typeface="Calibri"/>
+              </a:rPr>
+              <a:t>–   Quien solo cursa Seminario cierra el ciclo distinto pero completo: su matriz termina en el prototipo navegable y en el documento de diseno, y eso es una entrega profesional valida, no una version reducida.</a:t>
             </a:r>
           </a:p>
         </p:txBody>

--- a/Seminario de Sistemas/Clases/Clase 6 - Requerimientos de software/Presentacion.pptx
+++ b/Seminario de Sistemas/Clases/Clase 6 - Requerimientos de software/Presentacion.pptx
@@ -24,6 +24,9 @@
     <p:sldId id="272" r:id="rId23"/>
     <p:sldId id="273" r:id="rId24"/>
     <p:sldId id="274" r:id="rId25"/>
+    <p:sldId id="275" r:id="rId26"/>
+    <p:sldId id="276" r:id="rId27"/>
+    <p:sldId id="277" r:id="rId28"/>
   </p:sldIdLst>
   <p:sldSz cx="12191695" cy="6858000" type="screen4x3"/>
   <p:notesSz cx="6858000" cy="9144000"/>
@@ -3624,141 +3627,21 @@
                 </a:solidFill>
                 <a:latin typeface="Calibri"/>
               </a:rPr>
-              <a:t>Ficha de requisito RF-03 (plantilla proyectable)</a:t>
-            </a:r>
-          </a:p>
-        </p:txBody>
-      </p:sp>
-      <p:sp>
-        <p:nvSpPr>
-          <p:cNvPr id="5" name="Rounded Rectangle 4"/>
-          <p:cNvSpPr/>
-          <p:nvPr/>
-        </p:nvSpPr>
-        <p:spPr>
-          <a:xfrm>
-            <a:off x="457200" y="1261872"/>
-            <a:ext cx="11277295" cy="4773168"/>
-          </a:xfrm>
-          <a:prstGeom prst="roundRect">
-            <a:avLst>
-              <a:gd name="adj" fmla="val 12000"/>
-            </a:avLst>
-          </a:prstGeom>
-          <a:solidFill>
-            <a:srgbClr val="1E2A38"/>
-          </a:solidFill>
-          <a:ln>
-            <a:noFill/>
-          </a:ln>
-        </p:spPr>
-        <p:style>
-          <a:lnRef idx="1">
-            <a:schemeClr val="accent1"/>
-          </a:lnRef>
-          <a:fillRef idx="3">
-            <a:schemeClr val="accent1"/>
-          </a:fillRef>
-          <a:effectRef idx="2">
-            <a:schemeClr val="accent1"/>
-          </a:effectRef>
-          <a:fontRef idx="minor">
-            <a:schemeClr val="lt1"/>
-          </a:fontRef>
-        </p:style>
-        <p:txBody>
-          <a:bodyPr rtlCol="0" anchor="ctr"/>
-          <a:lstStyle/>
-          <a:p>
-            <a:pPr algn="ctr"/>
-          </a:p>
-        </p:txBody>
-      </p:sp>
-      <p:sp>
-        <p:nvSpPr>
-          <p:cNvPr id="6" name="Rectangle 5"/>
-          <p:cNvSpPr/>
-          <p:nvPr/>
-        </p:nvSpPr>
-        <p:spPr>
-          <a:xfrm>
-            <a:off x="457200" y="1261872"/>
-            <a:ext cx="11277295" cy="320040"/>
-          </a:xfrm>
-          <a:prstGeom prst="rect">
-            <a:avLst/>
-          </a:prstGeom>
-          <a:solidFill>
-            <a:srgbClr val="095292"/>
-          </a:solidFill>
-          <a:ln>
-            <a:noFill/>
-          </a:ln>
-        </p:spPr>
-        <p:style>
-          <a:lnRef idx="1">
-            <a:schemeClr val="accent1"/>
-          </a:lnRef>
-          <a:fillRef idx="3">
-            <a:schemeClr val="accent1"/>
-          </a:fillRef>
-          <a:effectRef idx="2">
-            <a:schemeClr val="accent1"/>
-          </a:effectRef>
-          <a:fontRef idx="minor">
-            <a:schemeClr val="lt1"/>
-          </a:fontRef>
-        </p:style>
-        <p:txBody>
-          <a:bodyPr rtlCol="0" anchor="ctr"/>
-          <a:lstStyle/>
-          <a:p>
-            <a:pPr algn="ctr"/>
-          </a:p>
-        </p:txBody>
-      </p:sp>
-      <p:sp>
-        <p:nvSpPr>
-          <p:cNvPr id="7" name="TextBox 6"/>
+              <a:t>Priorizar no es ordenar por gusto sino decidir con el cliente que pasa... (1/2)</a:t>
+            </a:r>
+          </a:p>
+        </p:txBody>
+      </p:sp>
+      <p:sp>
+        <p:nvSpPr>
+          <p:cNvPr id="5" name="TextBox 4"/>
           <p:cNvSpPr txBox="1"/>
           <p:nvPr/>
         </p:nvSpPr>
         <p:spPr>
           <a:xfrm>
-            <a:off x="685800" y="1307592"/>
-            <a:ext cx="10820095" cy="256032"/>
-          </a:xfrm>
-          <a:prstGeom prst="rect">
-            <a:avLst/>
-          </a:prstGeom>
-          <a:noFill/>
-        </p:spPr>
-        <p:txBody>
-          <a:bodyPr wrap="square" anchor="ctr"/>
-          <a:lstStyle/>
-          <a:p>
-            <a:r>
-              <a:rPr sz="1000" b="1" i="0">
-                <a:solidFill>
-                  <a:srgbClr val="269CCB"/>
-                </a:solidFill>
-                <a:latin typeface="Calibri"/>
-              </a:rPr>
-              <a:t>● ● ●</a:t>
-            </a:r>
-          </a:p>
-        </p:txBody>
-      </p:sp>
-      <p:sp>
-        <p:nvSpPr>
-          <p:cNvPr id="8" name="TextBox 7"/>
-          <p:cNvSpPr txBox="1"/>
-          <p:nvPr/>
-        </p:nvSpPr>
-        <p:spPr>
-          <a:xfrm>
-            <a:off x="777240" y="1719072"/>
-            <a:ext cx="10637215" cy="4133087"/>
+            <a:off x="457200" y="1170432"/>
+            <a:ext cx="11277295" cy="5230368"/>
           </a:xfrm>
           <a:prstGeom prst="rect">
             <a:avLst/>
@@ -3773,235 +3656,72 @@
           <a:p>
             <a:pPr>
               <a:spcAft>
-                <a:spcPts val="400"/>
+                <a:spcPts val="800"/>
               </a:spcAft>
             </a:pPr>
             <a:r>
-              <a:rPr sz="1400" b="0" i="0">
-                <a:solidFill>
-                  <a:srgbClr val="FFFFFF"/>
-                </a:solidFill>
-                <a:latin typeface="Calibri"/>
-              </a:rPr>
-              <a:t>ID: RF-03</a:t>
+              <a:rPr sz="2000" b="0" i="0">
+                <a:solidFill>
+                  <a:srgbClr val="333333"/>
+                </a:solidFill>
+                <a:latin typeface="Calibri"/>
+              </a:rPr>
+              <a:t>–   Priorizar no es ordenar por gusto sino decidir con el cliente que pasa si algo no esta el dia de la entrega, y para eso se usa MoSCoW: Must es lo que sin ello el sistema no sirve y no se sale a produccion</a:t>
             </a:r>
           </a:p>
           <a:p>
             <a:pPr>
               <a:spcAft>
-                <a:spcPts val="400"/>
+                <a:spcPts val="800"/>
               </a:spcAft>
             </a:pPr>
             <a:r>
-              <a:rPr sz="1400" b="0" i="0">
-                <a:solidFill>
-                  <a:srgbClr val="FFFFFF"/>
-                </a:solidFill>
-                <a:latin typeface="Calibri"/>
-              </a:rPr>
-              <a:t>Nombre: Consultar historial clinico de una mascota</a:t>
+              <a:rPr sz="2000" b="0" i="0">
+                <a:solidFill>
+                  <a:srgbClr val="333333"/>
+                </a:solidFill>
+                <a:latin typeface="Calibri"/>
+              </a:rPr>
+              <a:t>–   Should es importante pero existe un plan B manual mientras tanto</a:t>
             </a:r>
           </a:p>
           <a:p>
             <a:pPr>
               <a:spcAft>
-                <a:spcPts val="400"/>
+                <a:spcPts val="800"/>
               </a:spcAft>
             </a:pPr>
             <a:r>
-              <a:rPr sz="1400" b="0" i="0">
-                <a:solidFill>
-                  <a:srgbClr val="FFFFFF"/>
-                </a:solidFill>
-                <a:latin typeface="Calibri"/>
-              </a:rPr>
-              <a:t>Actor: Veterinario (consulta completa) / Auxiliar (consulta sin diagnostico)</a:t>
+              <a:rPr sz="2000" b="0" i="0">
+                <a:solidFill>
+                  <a:srgbClr val="333333"/>
+                </a:solidFill>
+                <a:latin typeface="Calibri"/>
+              </a:rPr>
+              <a:t>–   Could es lo que se hace si sobra tiempo; y Won't es lo que se declara explicitamente fuera de ESTA version, que es la categoria mas valiosa de las cuatro porque es la unica que le pone freno al alcance infinito.</a:t>
             </a:r>
           </a:p>
           <a:p>
             <a:pPr>
               <a:spcAft>
-                <a:spcPts val="400"/>
+                <a:spcPts val="800"/>
               </a:spcAft>
             </a:pPr>
             <a:r>
-              <a:rPr sz="1400" b="0" i="0">
-                <a:solidFill>
-                  <a:srgbClr val="FFFFFF"/>
-                </a:solidFill>
-                <a:latin typeface="Calibri"/>
-              </a:rPr>
-              <a:t>Descripcion: El sistema debe permitir consultar el historial de atenciones de una mascota a partir del documento del dueno.</a:t>
-            </a:r>
-          </a:p>
-          <a:p>
-            <a:pPr>
-              <a:spcAft>
-                <a:spcPts val="400"/>
-              </a:spcAft>
-            </a:pPr>
-            <a:r>
-              <a:rPr sz="1400" b="0" i="0">
-                <a:solidFill>
-                  <a:srgbClr val="FFFFFF"/>
-                </a:solidFill>
-                <a:latin typeface="Calibri"/>
-              </a:rPr>
-              <a:t>Entrada: documento del dueno o codigo de la mascota</a:t>
-            </a:r>
-          </a:p>
-          <a:p>
-            <a:pPr>
-              <a:spcAft>
-                <a:spcPts val="400"/>
-              </a:spcAft>
-            </a:pPr>
-            <a:r>
-              <a:rPr sz="1400" b="0" i="0">
-                <a:solidFill>
-                  <a:srgbClr val="FFFFFF"/>
-                </a:solidFill>
-                <a:latin typeface="Calibri"/>
-              </a:rPr>
-              <a:t>Salida: lista de atenciones con fecha, motivo, diagnostico y veterinario, ordenada de la mas reciente a la mas antigua</a:t>
-            </a:r>
-          </a:p>
-          <a:p>
-            <a:pPr>
-              <a:spcAft>
-                <a:spcPts val="400"/>
-              </a:spcAft>
-            </a:pPr>
-            <a:r>
-              <a:rPr sz="1400" b="0" i="0">
-                <a:solidFill>
-                  <a:srgbClr val="FFFFFF"/>
-                </a:solidFill>
-                <a:latin typeface="Calibri"/>
-              </a:rPr>
-              <a:t>Regla de negocio: RN-02 una mascota siempre pertenece a un unico dueno registrado</a:t>
-            </a:r>
-          </a:p>
-          <a:p>
-            <a:pPr>
-              <a:spcAft>
-                <a:spcPts val="400"/>
-              </a:spcAft>
-            </a:pPr>
-            <a:r>
-              <a:rPr sz="1400" b="0" i="0">
-                <a:solidFill>
-                  <a:srgbClr val="FFFFFF"/>
-                </a:solidFill>
-                <a:latin typeface="Calibri"/>
-              </a:rPr>
-              <a:t>Criterio de verificacion: dado un dueno con 12 atenciones, la busqueda por documento devuelve las 12 en 3 segundos o menos</a:t>
-            </a:r>
-          </a:p>
-          <a:p>
-            <a:pPr>
-              <a:spcAft>
-                <a:spcPts val="400"/>
-              </a:spcAft>
-            </a:pPr>
-            <a:r>
-              <a:rPr sz="1400" b="0" i="0">
-                <a:solidFill>
-                  <a:srgbClr val="FFFFFF"/>
-                </a:solidFill>
-                <a:latin typeface="Calibri"/>
-              </a:rPr>
-              <a:t>Prioridad MoSCoW: Must</a:t>
-            </a:r>
-          </a:p>
-          <a:p>
-            <a:pPr>
-              <a:spcAft>
-                <a:spcPts val="400"/>
-              </a:spcAft>
-            </a:pPr>
-            <a:r>
-              <a:rPr sz="1400" b="0" i="0">
-                <a:solidFill>
-                  <a:srgbClr val="FFFFFF"/>
-                </a:solidFill>
-                <a:latin typeface="Calibri"/>
-              </a:rPr>
-              <a:t>Origen: entrevista Dr. Ramirez, frase 2 (necesidad NEC-02)</a:t>
-            </a:r>
-          </a:p>
-          <a:p>
-            <a:pPr>
-              <a:spcAft>
-                <a:spcPts val="400"/>
-              </a:spcAft>
-            </a:pPr>
-            <a:r>
-              <a:rPr sz="1400" b="0" i="0">
-                <a:solidFill>
-                  <a:srgbClr val="FFFFFF"/>
-                </a:solidFill>
-                <a:latin typeface="Calibri"/>
-              </a:rPr>
-              <a:t>Trazabilidad: NEC-02 -&gt; RF-03 -&gt; CU-04 -&gt; Pantalla P-02 -&gt; Prueba PR-07</a:t>
-            </a:r>
-          </a:p>
-          <a:p>
-            <a:pPr>
-              <a:spcAft>
-                <a:spcPts val="400"/>
-              </a:spcAft>
-            </a:pPr>
-            <a:r>
-              <a:rPr sz="1400" b="0" i="0">
-                <a:solidFill>
-                  <a:srgbClr val="FFFFFF"/>
-                </a:solidFill>
-                <a:latin typeface="Calibri"/>
-              </a:rPr>
-              <a:t>Estado: aprobado por el cliente</a:t>
-            </a:r>
-          </a:p>
-        </p:txBody>
-      </p:sp>
-      <p:sp>
-        <p:nvSpPr>
-          <p:cNvPr id="9" name="TextBox 8"/>
-          <p:cNvSpPr txBox="1"/>
-          <p:nvPr/>
-        </p:nvSpPr>
-        <p:spPr>
-          <a:xfrm>
-            <a:off x="457200" y="6080760"/>
-            <a:ext cx="11277295" cy="320040"/>
-          </a:xfrm>
-          <a:prstGeom prst="rect">
-            <a:avLst/>
-          </a:prstGeom>
-          <a:noFill/>
-        </p:spPr>
-        <p:txBody>
-          <a:bodyPr wrap="square">
-            <a:spAutoFit/>
-          </a:bodyPr>
-          <a:lstStyle/>
-          <a:p>
-            <a:pPr algn="ctr"/>
-            <a:r>
-              <a:rPr sz="1200" b="0" i="1">
-                <a:solidFill>
-                  <a:srgbClr val="666666"/>
-                </a:solidFill>
-                <a:latin typeface="Calibri"/>
-              </a:rPr>
-              <a:t>Un requisito sin criterio de verificacion y sin origen es una opinion con numero de identificacion.</a:t>
-            </a:r>
-          </a:p>
-        </p:txBody>
-      </p:sp>
-      <p:sp>
-        <p:nvSpPr>
-          <p:cNvPr id="10" name="TextBox 9"/>
+              <a:rPr sz="2000" b="0" i="0">
+                <a:solidFill>
+                  <a:srgbClr val="333333"/>
+                </a:solidFill>
+                <a:latin typeface="Calibri"/>
+              </a:rPr>
+              <a:t>–   La regla practica es que los Must no deberian superar el 60% del esfuerzo estimado, porque si todo es Must nada es Must.</a:t>
+            </a:r>
+          </a:p>
+        </p:txBody>
+      </p:sp>
+      <p:sp>
+        <p:nvSpPr>
+          <p:cNvPr id="6" name="TextBox 5"/>
           <p:cNvSpPr txBox="1"/>
           <p:nvPr/>
         </p:nvSpPr>
@@ -4175,7 +3895,7 @@
                 </a:solidFill>
                 <a:latin typeface="Calibri"/>
               </a:rPr>
-              <a:t>Demo del dia</a:t>
+              <a:t>Priorizar no es ordenar por gusto sino decidir con el cliente que pasa... (2/2)</a:t>
             </a:r>
           </a:p>
         </p:txBody>
@@ -4214,25 +3934,7 @@
                 </a:solidFill>
                 <a:latin typeface="Calibri"/>
               </a:rPr>
-              <a:t>–   </a:t>
-            </a:r>
-            <a:r>
-              <a:rPr sz="2000" b="1" i="0">
-                <a:solidFill>
-                  <a:srgbClr val="333333"/>
-                </a:solidFill>
-                <a:latin typeface="Calibri"/>
-              </a:rPr>
-              <a:t>Herramienta:</a:t>
-            </a:r>
-            <a:r>
-              <a:rPr sz="2000" b="0" i="0">
-                <a:solidFill>
-                  <a:srgbClr val="333333"/>
-                </a:solidFill>
-                <a:latin typeface="Calibri"/>
-              </a:rPr>
-              <a:t> Google Docs · draw.io</a:t>
+              <a:t>–   En VetCare: registrar dueno y mascota, consultar historial y agendar cita son Must, porque atacan los tres dolores de Huellitas; el reporte mensual de consultas es Should</a:t>
             </a:r>
           </a:p>
           <a:p>
@@ -4248,25 +3950,7 @@
                 </a:solidFill>
                 <a:latin typeface="Calibri"/>
               </a:rPr>
-              <a:t>–   </a:t>
-            </a:r>
-            <a:r>
-              <a:rPr sz="2000" b="1" i="0">
-                <a:solidFill>
-                  <a:srgbClr val="333333"/>
-                </a:solidFill>
-                <a:latin typeface="Calibri"/>
-              </a:rPr>
-              <a:t>Demo:</a:t>
-            </a:r>
-            <a:r>
-              <a:rPr sz="2000" b="0" i="0">
-                <a:solidFill>
-                  <a:srgbClr val="333333"/>
-                </a:solidFill>
-                <a:latin typeface="Calibri"/>
-              </a:rPr>
-              <a:t> El docente toma en vivo dos frases crudas de la entrevista al Dr. Ramirez y las convierte, frente al grupo, en un RF y un RNF usando la plantilla.</a:t>
+              <a:t>–   Porque hoy el Dr. Ramirez lo hace contando a mano y puede sobrevivir un mes mas; el envio de recordatorios por WhatsApp y la facturacion electronica son Won't de esta version</a:t>
             </a:r>
           </a:p>
           <a:p>
@@ -4282,7 +3966,7 @@
                 </a:solidFill>
                 <a:latin typeface="Calibri"/>
               </a:rPr>
-              <a:t>–   Mismo dominio VetCare — no otro ejemplo. Aqui se diseña, no se programa.</a:t>
+              <a:t>–   Y se escriben en el documento con esa etiqueta para que nadie los reclame despues como si hubieran sido prometidos.</a:t>
             </a:r>
           </a:p>
         </p:txBody>
@@ -4357,7 +4041,7 @@
         <p:spPr>
           <a:xfrm>
             <a:off x="0" y="0"/>
-            <a:ext cx="12191695" cy="1170432"/>
+            <a:ext cx="12191695" cy="960120"/>
           </a:xfrm>
           <a:prstGeom prst="rect">
             <a:avLst/>
@@ -4399,7 +4083,7 @@
         </p:nvSpPr>
         <p:spPr>
           <a:xfrm>
-            <a:off x="0" y="1170432"/>
+            <a:off x="0" y="960120"/>
             <a:ext cx="12191695" cy="41148"/>
           </a:xfrm>
           <a:prstGeom prst="rect">
@@ -4443,7 +4127,7 @@
         <p:spPr>
           <a:xfrm>
             <a:off x="457200" y="164592"/>
-            <a:ext cx="11277295" cy="384048"/>
+            <a:ext cx="11277295" cy="502920"/>
           </a:xfrm>
           <a:prstGeom prst="rect">
             <a:avLst/>
@@ -4463,7 +4147,7 @@
                 </a:solidFill>
                 <a:latin typeface="Calibri"/>
               </a:rPr>
-              <a:t>Herramientas de hoy</a:t>
+              <a:t>El ultimo pedazo es la trazabilidad, que es poder seguir cada requisito...</a:t>
             </a:r>
           </a:p>
         </p:txBody>
@@ -4476,8 +4160,8 @@
         </p:nvSpPr>
         <p:spPr>
           <a:xfrm>
-            <a:off x="457200" y="566928"/>
-            <a:ext cx="11277295" cy="411480"/>
+            <a:off x="457200" y="1170432"/>
+            <a:ext cx="11277295" cy="5230368"/>
           </a:xfrm>
           <a:prstGeom prst="rect">
             <a:avLst/>
@@ -4490,633 +4174,74 @@
           </a:bodyPr>
           <a:lstStyle/>
           <a:p>
-            <a:r>
-              <a:rPr sz="1400" b="0" i="0">
-                <a:solidFill>
-                  <a:srgbClr val="B8D8EE"/>
-                </a:solidFill>
-                <a:latin typeface="Calibri"/>
-              </a:rPr>
-              <a:t>Gratis · funcionan en el navegador</a:t>
-            </a:r>
-          </a:p>
-        </p:txBody>
-      </p:sp>
-      <p:sp>
-        <p:nvSpPr>
-          <p:cNvPr id="6" name="Rounded Rectangle 5"/>
-          <p:cNvSpPr/>
-          <p:nvPr/>
-        </p:nvSpPr>
-        <p:spPr>
-          <a:xfrm>
-            <a:off x="457200" y="1591056"/>
-            <a:ext cx="3624986" cy="2331720"/>
-          </a:xfrm>
-          <a:prstGeom prst="roundRect">
-            <a:avLst>
-              <a:gd name="adj" fmla="val 12000"/>
-            </a:avLst>
-          </a:prstGeom>
-          <a:solidFill>
-            <a:srgbClr val="F2F2F2"/>
-          </a:solidFill>
-          <a:ln>
-            <a:noFill/>
-          </a:ln>
-        </p:spPr>
-        <p:style>
-          <a:lnRef idx="1">
-            <a:schemeClr val="accent1"/>
-          </a:lnRef>
-          <a:fillRef idx="3">
-            <a:schemeClr val="accent1"/>
-          </a:fillRef>
-          <a:effectRef idx="2">
-            <a:schemeClr val="accent1"/>
-          </a:effectRef>
-          <a:fontRef idx="minor">
-            <a:schemeClr val="lt1"/>
-          </a:fontRef>
-        </p:style>
-        <p:txBody>
-          <a:bodyPr rtlCol="0" anchor="ctr"/>
-          <a:lstStyle/>
-          <a:p>
-            <a:pPr algn="ctr"/>
-          </a:p>
-        </p:txBody>
-      </p:sp>
-      <p:sp>
-        <p:nvSpPr>
-          <p:cNvPr id="7" name="Rectangle 6"/>
-          <p:cNvSpPr/>
-          <p:nvPr/>
-        </p:nvSpPr>
-        <p:spPr>
-          <a:xfrm>
-            <a:off x="457200" y="1591056"/>
-            <a:ext cx="3624986" cy="64008"/>
-          </a:xfrm>
-          <a:prstGeom prst="rect">
-            <a:avLst/>
-          </a:prstGeom>
-          <a:solidFill>
-            <a:srgbClr val="095292"/>
-          </a:solidFill>
-          <a:ln>
-            <a:noFill/>
-          </a:ln>
-        </p:spPr>
-        <p:style>
-          <a:lnRef idx="1">
-            <a:schemeClr val="accent1"/>
-          </a:lnRef>
-          <a:fillRef idx="3">
-            <a:schemeClr val="accent1"/>
-          </a:fillRef>
-          <a:effectRef idx="2">
-            <a:schemeClr val="accent1"/>
-          </a:effectRef>
-          <a:fontRef idx="minor">
-            <a:schemeClr val="lt1"/>
-          </a:fontRef>
-        </p:style>
-        <p:txBody>
-          <a:bodyPr rtlCol="0" anchor="ctr"/>
-          <a:lstStyle/>
-          <a:p>
-            <a:pPr algn="ctr"/>
-          </a:p>
-        </p:txBody>
-      </p:sp>
-      <p:sp>
-        <p:nvSpPr>
-          <p:cNvPr id="8" name="Rectangle 7"/>
-          <p:cNvSpPr/>
-          <p:nvPr/>
-        </p:nvSpPr>
-        <p:spPr>
-          <a:xfrm>
-            <a:off x="457200" y="1655064"/>
-            <a:ext cx="3624986" cy="27432"/>
-          </a:xfrm>
-          <a:prstGeom prst="rect">
-            <a:avLst/>
-          </a:prstGeom>
-          <a:solidFill>
-            <a:srgbClr val="FFD000"/>
-          </a:solidFill>
-          <a:ln>
-            <a:noFill/>
-          </a:ln>
-        </p:spPr>
-        <p:style>
-          <a:lnRef idx="1">
-            <a:schemeClr val="accent1"/>
-          </a:lnRef>
-          <a:fillRef idx="3">
-            <a:schemeClr val="accent1"/>
-          </a:fillRef>
-          <a:effectRef idx="2">
-            <a:schemeClr val="accent1"/>
-          </a:effectRef>
-          <a:fontRef idx="minor">
-            <a:schemeClr val="lt1"/>
-          </a:fontRef>
-        </p:style>
-        <p:txBody>
-          <a:bodyPr rtlCol="0" anchor="ctr"/>
-          <a:lstStyle/>
-          <a:p>
-            <a:pPr algn="ctr"/>
-          </a:p>
-        </p:txBody>
-      </p:sp>
-      <p:pic>
-        <p:nvPicPr>
-          <p:cNvPr id="9" name="Picture 8" descr="drawio.png"/>
-          <p:cNvPicPr>
-            <a:picLocks noChangeAspect="1"/>
-          </p:cNvPicPr>
-          <p:nvPr/>
-        </p:nvPicPr>
-        <p:blipFill>
-          <a:blip r:embed="rId2"/>
-          <a:stretch>
-            <a:fillRect/>
-          </a:stretch>
-        </p:blipFill>
-        <p:spPr>
-          <a:xfrm>
-            <a:off x="1643329" y="1847087"/>
-            <a:ext cx="1252728" cy="1252728"/>
-          </a:xfrm>
-          <a:prstGeom prst="rect">
-            <a:avLst/>
-          </a:prstGeom>
-        </p:spPr>
-      </p:pic>
-      <p:sp>
-        <p:nvSpPr>
-          <p:cNvPr id="10" name="TextBox 9"/>
-          <p:cNvSpPr txBox="1"/>
-          <p:nvPr/>
-        </p:nvSpPr>
-        <p:spPr>
-          <a:xfrm>
-            <a:off x="530352" y="3191256"/>
-            <a:ext cx="3478682" cy="621792"/>
-          </a:xfrm>
-          <a:prstGeom prst="rect">
-            <a:avLst/>
-          </a:prstGeom>
-          <a:noFill/>
-        </p:spPr>
-        <p:txBody>
-          <a:bodyPr wrap="square" anchor="t"/>
-          <a:lstStyle/>
-          <a:p>
-            <a:pPr algn="ctr"/>
-            <a:r>
-              <a:rPr sz="1300" b="1" i="0">
-                <a:solidFill>
-                  <a:srgbClr val="095292"/>
-                </a:solidFill>
-                <a:latin typeface="Calibri"/>
-              </a:rPr>
-              <a:t>Draw.Io</a:t>
-            </a:r>
-          </a:p>
-          <a:p>
-            <a:pPr algn="ctr">
-              <a:spcBef>
-                <a:spcPts val="200"/>
-              </a:spcBef>
+            <a:pPr>
+              <a:spcAft>
+                <a:spcPts val="800"/>
+              </a:spcAft>
             </a:pPr>
             <a:r>
-              <a:rPr sz="1000" b="0" i="0">
-                <a:solidFill>
-                  <a:srgbClr val="666666"/>
-                </a:solidFill>
-                <a:latin typeface="Calibri"/>
-              </a:rPr>
-              <a:t>Diagramas UML y de contexto</a:t>
-            </a:r>
-          </a:p>
-        </p:txBody>
-      </p:sp>
-      <p:sp>
-        <p:nvSpPr>
-          <p:cNvPr id="11" name="Rounded Rectangle 10"/>
-          <p:cNvSpPr/>
-          <p:nvPr/>
-        </p:nvSpPr>
-        <p:spPr>
-          <a:xfrm>
-            <a:off x="4283354" y="1591056"/>
-            <a:ext cx="3624986" cy="2331720"/>
-          </a:xfrm>
-          <a:prstGeom prst="roundRect">
-            <a:avLst>
-              <a:gd name="adj" fmla="val 12000"/>
-            </a:avLst>
-          </a:prstGeom>
-          <a:solidFill>
-            <a:srgbClr val="F2F2F2"/>
-          </a:solidFill>
-          <a:ln>
-            <a:noFill/>
-          </a:ln>
-        </p:spPr>
-        <p:style>
-          <a:lnRef idx="1">
-            <a:schemeClr val="accent1"/>
-          </a:lnRef>
-          <a:fillRef idx="3">
-            <a:schemeClr val="accent1"/>
-          </a:fillRef>
-          <a:effectRef idx="2">
-            <a:schemeClr val="accent1"/>
-          </a:effectRef>
-          <a:fontRef idx="minor">
-            <a:schemeClr val="lt1"/>
-          </a:fontRef>
-        </p:style>
-        <p:txBody>
-          <a:bodyPr rtlCol="0" anchor="ctr"/>
-          <a:lstStyle/>
-          <a:p>
-            <a:pPr algn="ctr"/>
-          </a:p>
-        </p:txBody>
-      </p:sp>
-      <p:sp>
-        <p:nvSpPr>
-          <p:cNvPr id="12" name="Rectangle 11"/>
-          <p:cNvSpPr/>
-          <p:nvPr/>
-        </p:nvSpPr>
-        <p:spPr>
-          <a:xfrm>
-            <a:off x="4283354" y="1591056"/>
-            <a:ext cx="3624986" cy="64008"/>
-          </a:xfrm>
-          <a:prstGeom prst="rect">
-            <a:avLst/>
-          </a:prstGeom>
-          <a:solidFill>
-            <a:srgbClr val="095292"/>
-          </a:solidFill>
-          <a:ln>
-            <a:noFill/>
-          </a:ln>
-        </p:spPr>
-        <p:style>
-          <a:lnRef idx="1">
-            <a:schemeClr val="accent1"/>
-          </a:lnRef>
-          <a:fillRef idx="3">
-            <a:schemeClr val="accent1"/>
-          </a:fillRef>
-          <a:effectRef idx="2">
-            <a:schemeClr val="accent1"/>
-          </a:effectRef>
-          <a:fontRef idx="minor">
-            <a:schemeClr val="lt1"/>
-          </a:fontRef>
-        </p:style>
-        <p:txBody>
-          <a:bodyPr rtlCol="0" anchor="ctr"/>
-          <a:lstStyle/>
-          <a:p>
-            <a:pPr algn="ctr"/>
-          </a:p>
-        </p:txBody>
-      </p:sp>
-      <p:sp>
-        <p:nvSpPr>
-          <p:cNvPr id="13" name="Rectangle 12"/>
-          <p:cNvSpPr/>
-          <p:nvPr/>
-        </p:nvSpPr>
-        <p:spPr>
-          <a:xfrm>
-            <a:off x="4283354" y="1655064"/>
-            <a:ext cx="3624986" cy="27432"/>
-          </a:xfrm>
-          <a:prstGeom prst="rect">
-            <a:avLst/>
-          </a:prstGeom>
-          <a:solidFill>
-            <a:srgbClr val="FFD000"/>
-          </a:solidFill>
-          <a:ln>
-            <a:noFill/>
-          </a:ln>
-        </p:spPr>
-        <p:style>
-          <a:lnRef idx="1">
-            <a:schemeClr val="accent1"/>
-          </a:lnRef>
-          <a:fillRef idx="3">
-            <a:schemeClr val="accent1"/>
-          </a:fillRef>
-          <a:effectRef idx="2">
-            <a:schemeClr val="accent1"/>
-          </a:effectRef>
-          <a:fontRef idx="minor">
-            <a:schemeClr val="lt1"/>
-          </a:fontRef>
-        </p:style>
-        <p:txBody>
-          <a:bodyPr rtlCol="0" anchor="ctr"/>
-          <a:lstStyle/>
-          <a:p>
-            <a:pPr algn="ctr"/>
-          </a:p>
-        </p:txBody>
-      </p:sp>
-      <p:pic>
-        <p:nvPicPr>
-          <p:cNvPr id="14" name="Picture 13" descr="google_docs.png"/>
-          <p:cNvPicPr>
-            <a:picLocks noChangeAspect="1"/>
-          </p:cNvPicPr>
-          <p:nvPr/>
-        </p:nvPicPr>
-        <p:blipFill>
-          <a:blip r:embed="rId3"/>
-          <a:stretch>
-            <a:fillRect/>
-          </a:stretch>
-        </p:blipFill>
-        <p:spPr>
-          <a:xfrm>
-            <a:off x="5469483" y="1847087"/>
-            <a:ext cx="1252728" cy="1252728"/>
-          </a:xfrm>
-          <a:prstGeom prst="rect">
-            <a:avLst/>
-          </a:prstGeom>
-        </p:spPr>
-      </p:pic>
-      <p:sp>
-        <p:nvSpPr>
-          <p:cNvPr id="15" name="TextBox 14"/>
-          <p:cNvSpPr txBox="1"/>
-          <p:nvPr/>
-        </p:nvSpPr>
-        <p:spPr>
-          <a:xfrm>
-            <a:off x="4356506" y="3191256"/>
-            <a:ext cx="3478682" cy="621792"/>
-          </a:xfrm>
-          <a:prstGeom prst="rect">
-            <a:avLst/>
-          </a:prstGeom>
-          <a:noFill/>
-        </p:spPr>
-        <p:txBody>
-          <a:bodyPr wrap="square" anchor="t"/>
-          <a:lstStyle/>
-          <a:p>
-            <a:pPr algn="ctr"/>
-            <a:r>
-              <a:rPr sz="1300" b="1" i="0">
-                <a:solidFill>
-                  <a:srgbClr val="095292"/>
-                </a:solidFill>
-                <a:latin typeface="Calibri"/>
-              </a:rPr>
-              <a:t>google docs</a:t>
-            </a:r>
-          </a:p>
-          <a:p>
-            <a:pPr algn="ctr">
-              <a:spcBef>
-                <a:spcPts val="200"/>
-              </a:spcBef>
+              <a:rPr sz="2000" b="0" i="0">
+                <a:solidFill>
+                  <a:srgbClr val="333333"/>
+                </a:solidFill>
+                <a:latin typeface="Calibri"/>
+              </a:rPr>
+              <a:t>–   El ultimo pedazo es la trazabilidad, que es poder seguir cada requisito hacia atras y hacia adelante.</a:t>
+            </a:r>
+          </a:p>
+          <a:p>
+            <a:pPr>
+              <a:spcAft>
+                <a:spcPts val="800"/>
+              </a:spcAft>
             </a:pPr>
             <a:r>
-              <a:rPr sz="1000" b="0" i="0">
-                <a:solidFill>
-                  <a:srgbClr val="666666"/>
-                </a:solidFill>
-                <a:latin typeface="Calibri"/>
-              </a:rPr>
-              <a:t>Documentos del paquete de diseño</a:t>
-            </a:r>
-          </a:p>
-        </p:txBody>
-      </p:sp>
-      <p:sp>
-        <p:nvSpPr>
-          <p:cNvPr id="16" name="Rounded Rectangle 15"/>
-          <p:cNvSpPr/>
-          <p:nvPr/>
-        </p:nvSpPr>
-        <p:spPr>
-          <a:xfrm>
-            <a:off x="8109508" y="1591056"/>
-            <a:ext cx="3624986" cy="2331720"/>
-          </a:xfrm>
-          <a:prstGeom prst="roundRect">
-            <a:avLst>
-              <a:gd name="adj" fmla="val 12000"/>
-            </a:avLst>
-          </a:prstGeom>
-          <a:solidFill>
-            <a:srgbClr val="F2F2F2"/>
-          </a:solidFill>
-          <a:ln>
-            <a:noFill/>
-          </a:ln>
-        </p:spPr>
-        <p:style>
-          <a:lnRef idx="1">
-            <a:schemeClr val="accent1"/>
-          </a:lnRef>
-          <a:fillRef idx="3">
-            <a:schemeClr val="accent1"/>
-          </a:fillRef>
-          <a:effectRef idx="2">
-            <a:schemeClr val="accent1"/>
-          </a:effectRef>
-          <a:fontRef idx="minor">
-            <a:schemeClr val="lt1"/>
-          </a:fontRef>
-        </p:style>
-        <p:txBody>
-          <a:bodyPr rtlCol="0" anchor="ctr"/>
-          <a:lstStyle/>
-          <a:p>
-            <a:pPr algn="ctr"/>
-          </a:p>
-        </p:txBody>
-      </p:sp>
-      <p:sp>
-        <p:nvSpPr>
-          <p:cNvPr id="17" name="Rectangle 16"/>
-          <p:cNvSpPr/>
-          <p:nvPr/>
-        </p:nvSpPr>
-        <p:spPr>
-          <a:xfrm>
-            <a:off x="8109508" y="1591056"/>
-            <a:ext cx="3624986" cy="64008"/>
-          </a:xfrm>
-          <a:prstGeom prst="rect">
-            <a:avLst/>
-          </a:prstGeom>
-          <a:solidFill>
-            <a:srgbClr val="095292"/>
-          </a:solidFill>
-          <a:ln>
-            <a:noFill/>
-          </a:ln>
-        </p:spPr>
-        <p:style>
-          <a:lnRef idx="1">
-            <a:schemeClr val="accent1"/>
-          </a:lnRef>
-          <a:fillRef idx="3">
-            <a:schemeClr val="accent1"/>
-          </a:fillRef>
-          <a:effectRef idx="2">
-            <a:schemeClr val="accent1"/>
-          </a:effectRef>
-          <a:fontRef idx="minor">
-            <a:schemeClr val="lt1"/>
-          </a:fontRef>
-        </p:style>
-        <p:txBody>
-          <a:bodyPr rtlCol="0" anchor="ctr"/>
-          <a:lstStyle/>
-          <a:p>
-            <a:pPr algn="ctr"/>
-          </a:p>
-        </p:txBody>
-      </p:sp>
-      <p:sp>
-        <p:nvSpPr>
-          <p:cNvPr id="18" name="Rectangle 17"/>
-          <p:cNvSpPr/>
-          <p:nvPr/>
-        </p:nvSpPr>
-        <p:spPr>
-          <a:xfrm>
-            <a:off x="8109508" y="1655064"/>
-            <a:ext cx="3624986" cy="27432"/>
-          </a:xfrm>
-          <a:prstGeom prst="rect">
-            <a:avLst/>
-          </a:prstGeom>
-          <a:solidFill>
-            <a:srgbClr val="FFD000"/>
-          </a:solidFill>
-          <a:ln>
-            <a:noFill/>
-          </a:ln>
-        </p:spPr>
-        <p:style>
-          <a:lnRef idx="1">
-            <a:schemeClr val="accent1"/>
-          </a:lnRef>
-          <a:fillRef idx="3">
-            <a:schemeClr val="accent1"/>
-          </a:fillRef>
-          <a:effectRef idx="2">
-            <a:schemeClr val="accent1"/>
-          </a:effectRef>
-          <a:fontRef idx="minor">
-            <a:schemeClr val="lt1"/>
-          </a:fontRef>
-        </p:style>
-        <p:txBody>
-          <a:bodyPr rtlCol="0" anchor="ctr"/>
-          <a:lstStyle/>
-          <a:p>
-            <a:pPr algn="ctr"/>
-          </a:p>
-        </p:txBody>
-      </p:sp>
-      <p:pic>
-        <p:nvPicPr>
-          <p:cNvPr id="19" name="Picture 18" descr="examlab.png"/>
-          <p:cNvPicPr>
-            <a:picLocks noChangeAspect="1"/>
-          </p:cNvPicPr>
-          <p:nvPr/>
-        </p:nvPicPr>
-        <p:blipFill>
-          <a:blip r:embed="rId4"/>
-          <a:stretch>
-            <a:fillRect/>
-          </a:stretch>
-        </p:blipFill>
-        <p:spPr>
-          <a:xfrm>
-            <a:off x="9295638" y="1847087"/>
-            <a:ext cx="1252728" cy="1252728"/>
-          </a:xfrm>
-          <a:prstGeom prst="rect">
-            <a:avLst/>
-          </a:prstGeom>
-        </p:spPr>
-      </p:pic>
-      <p:sp>
-        <p:nvSpPr>
-          <p:cNvPr id="20" name="TextBox 19"/>
-          <p:cNvSpPr txBox="1"/>
-          <p:nvPr/>
-        </p:nvSpPr>
-        <p:spPr>
-          <a:xfrm>
-            <a:off x="8182660" y="3191256"/>
-            <a:ext cx="3478682" cy="621792"/>
-          </a:xfrm>
-          <a:prstGeom prst="rect">
-            <a:avLst/>
-          </a:prstGeom>
-          <a:noFill/>
-        </p:spPr>
-        <p:txBody>
-          <a:bodyPr wrap="square" anchor="t"/>
-          <a:lstStyle/>
-          <a:p>
-            <a:pPr algn="ctr"/>
-            <a:r>
-              <a:rPr sz="1300" b="1" i="0">
-                <a:solidFill>
-                  <a:srgbClr val="095292"/>
-                </a:solidFill>
-                <a:latin typeface="Calibri"/>
-              </a:rPr>
-              <a:t>la plataforma del curso</a:t>
-            </a:r>
-          </a:p>
-          <a:p>
-            <a:pPr algn="ctr">
-              <a:spcBef>
-                <a:spcPts val="200"/>
-              </a:spcBef>
+              <a:rPr sz="2000" b="0" i="0">
+                <a:solidFill>
+                  <a:srgbClr val="333333"/>
+                </a:solidFill>
+                <a:latin typeface="Calibri"/>
+              </a:rPr>
+              <a:t>–   Hacia atras: de donde salio este RF, quien lo pidio, en que frase de la entrevista, en que fecha; asi cuando alguien pregunte y esto por que esta aqui hay respuesta y no cara de sorpresa.</a:t>
+            </a:r>
+          </a:p>
+          <a:p>
+            <a:pPr>
+              <a:spcAft>
+                <a:spcPts val="800"/>
+              </a:spcAft>
             </a:pPr>
             <a:r>
-              <a:rPr sz="1000" b="0" i="0">
-                <a:solidFill>
-                  <a:srgbClr val="666666"/>
-                </a:solidFill>
-                <a:latin typeface="Calibri"/>
-              </a:rPr>
-              <a:t>Entrega del taller · en la fecha que indique el docente</a:t>
-            </a:r>
-          </a:p>
-        </p:txBody>
-      </p:sp>
-      <p:sp>
-        <p:nvSpPr>
-          <p:cNvPr id="21" name="TextBox 20"/>
+              <a:rPr sz="2000" b="0" i="0">
+                <a:solidFill>
+                  <a:srgbClr val="333333"/>
+                </a:solidFill>
+                <a:latin typeface="Calibri"/>
+              </a:rPr>
+              <a:t>–   Hacia adelante: en que caso de uso se desarrolla, en que pantalla del mockup se ve, en que clase del diagrama UML aparece y con que prueba se acepta.</a:t>
+            </a:r>
+          </a:p>
+          <a:p>
+            <a:pPr>
+              <a:spcAft>
+                <a:spcPts val="800"/>
+              </a:spcAft>
+            </a:pPr>
+            <a:r>
+              <a:rPr sz="2000" b="0" i="0">
+                <a:solidFill>
+                  <a:srgbClr val="333333"/>
+                </a:solidFill>
+                <a:latin typeface="Calibri"/>
+              </a:rPr>
+              <a:t>–   Quien solo cursa Seminario cierra el ciclo distinto pero completo: su matriz termina en el prototipo navegable y en el documento de diseno, y eso es una entrega profesional valida, no una version reducida.</a:t>
+            </a:r>
+          </a:p>
+        </p:txBody>
+      </p:sp>
+      <p:sp>
+        <p:nvSpPr>
+          <p:cNvPr id="6" name="TextBox 5"/>
           <p:cNvSpPr txBox="1"/>
           <p:nvPr/>
         </p:nvSpPr>
@@ -5290,21 +4415,141 @@
                 </a:solidFill>
                 <a:latin typeface="Calibri"/>
               </a:rPr>
-              <a:t>Taller PI — por que importa</a:t>
-            </a:r>
-          </a:p>
-        </p:txBody>
-      </p:sp>
-      <p:sp>
-        <p:nvSpPr>
-          <p:cNvPr id="5" name="TextBox 4"/>
+              <a:t>Ficha de requisito RF-03 (plantilla proyectable)</a:t>
+            </a:r>
+          </a:p>
+        </p:txBody>
+      </p:sp>
+      <p:sp>
+        <p:nvSpPr>
+          <p:cNvPr id="5" name="Rounded Rectangle 4"/>
+          <p:cNvSpPr/>
+          <p:nvPr/>
+        </p:nvSpPr>
+        <p:spPr>
+          <a:xfrm>
+            <a:off x="457200" y="1261872"/>
+            <a:ext cx="11277295" cy="4773168"/>
+          </a:xfrm>
+          <a:prstGeom prst="roundRect">
+            <a:avLst>
+              <a:gd name="adj" fmla="val 12000"/>
+            </a:avLst>
+          </a:prstGeom>
+          <a:solidFill>
+            <a:srgbClr val="1E2A38"/>
+          </a:solidFill>
+          <a:ln>
+            <a:noFill/>
+          </a:ln>
+        </p:spPr>
+        <p:style>
+          <a:lnRef idx="1">
+            <a:schemeClr val="accent1"/>
+          </a:lnRef>
+          <a:fillRef idx="3">
+            <a:schemeClr val="accent1"/>
+          </a:fillRef>
+          <a:effectRef idx="2">
+            <a:schemeClr val="accent1"/>
+          </a:effectRef>
+          <a:fontRef idx="minor">
+            <a:schemeClr val="lt1"/>
+          </a:fontRef>
+        </p:style>
+        <p:txBody>
+          <a:bodyPr rtlCol="0" anchor="ctr"/>
+          <a:lstStyle/>
+          <a:p>
+            <a:pPr algn="ctr"/>
+          </a:p>
+        </p:txBody>
+      </p:sp>
+      <p:sp>
+        <p:nvSpPr>
+          <p:cNvPr id="6" name="Rectangle 5"/>
+          <p:cNvSpPr/>
+          <p:nvPr/>
+        </p:nvSpPr>
+        <p:spPr>
+          <a:xfrm>
+            <a:off x="457200" y="1261872"/>
+            <a:ext cx="11277295" cy="320040"/>
+          </a:xfrm>
+          <a:prstGeom prst="rect">
+            <a:avLst/>
+          </a:prstGeom>
+          <a:solidFill>
+            <a:srgbClr val="095292"/>
+          </a:solidFill>
+          <a:ln>
+            <a:noFill/>
+          </a:ln>
+        </p:spPr>
+        <p:style>
+          <a:lnRef idx="1">
+            <a:schemeClr val="accent1"/>
+          </a:lnRef>
+          <a:fillRef idx="3">
+            <a:schemeClr val="accent1"/>
+          </a:fillRef>
+          <a:effectRef idx="2">
+            <a:schemeClr val="accent1"/>
+          </a:effectRef>
+          <a:fontRef idx="minor">
+            <a:schemeClr val="lt1"/>
+          </a:fontRef>
+        </p:style>
+        <p:txBody>
+          <a:bodyPr rtlCol="0" anchor="ctr"/>
+          <a:lstStyle/>
+          <a:p>
+            <a:pPr algn="ctr"/>
+          </a:p>
+        </p:txBody>
+      </p:sp>
+      <p:sp>
+        <p:nvSpPr>
+          <p:cNvPr id="7" name="TextBox 6"/>
           <p:cNvSpPr txBox="1"/>
           <p:nvPr/>
         </p:nvSpPr>
         <p:spPr>
           <a:xfrm>
-            <a:off x="457200" y="1170432"/>
-            <a:ext cx="11277295" cy="5230368"/>
+            <a:off x="685800" y="1307592"/>
+            <a:ext cx="10820095" cy="256032"/>
+          </a:xfrm>
+          <a:prstGeom prst="rect">
+            <a:avLst/>
+          </a:prstGeom>
+          <a:noFill/>
+        </p:spPr>
+        <p:txBody>
+          <a:bodyPr wrap="square" anchor="ctr"/>
+          <a:lstStyle/>
+          <a:p>
+            <a:r>
+              <a:rPr sz="1000" b="1" i="0">
+                <a:solidFill>
+                  <a:srgbClr val="269CCB"/>
+                </a:solidFill>
+                <a:latin typeface="Calibri"/>
+              </a:rPr>
+              <a:t>● ● ●</a:t>
+            </a:r>
+          </a:p>
+        </p:txBody>
+      </p:sp>
+      <p:sp>
+        <p:nvSpPr>
+          <p:cNvPr id="8" name="TextBox 7"/>
+          <p:cNvSpPr txBox="1"/>
+          <p:nvPr/>
+        </p:nvSpPr>
+        <p:spPr>
+          <a:xfrm>
+            <a:off x="777240" y="1719072"/>
+            <a:ext cx="10637215" cy="4133087"/>
           </a:xfrm>
           <a:prstGeom prst="rect">
             <a:avLst/>
@@ -5319,74 +4564,235 @@
           <a:p>
             <a:pPr>
               <a:spcAft>
-                <a:spcPts val="800"/>
+                <a:spcPts val="400"/>
               </a:spcAft>
             </a:pPr>
             <a:r>
-              <a:rPr sz="2000" b="0" i="0">
-                <a:solidFill>
-                  <a:srgbClr val="333333"/>
-                </a:solidFill>
-                <a:latin typeface="Calibri"/>
-              </a:rPr>
-              <a:t>–   </a:t>
-            </a:r>
-            <a:r>
-              <a:rPr sz="2000" b="1" i="0">
-                <a:solidFill>
-                  <a:srgbClr val="333333"/>
-                </a:solidFill>
-                <a:latin typeface="Calibri"/>
-              </a:rPr>
-              <a:t>Por que importa al PI:</a:t>
-            </a:r>
-            <a:r>
-              <a:rPr sz="2000" b="0" i="0">
-                <a:solidFill>
-                  <a:srgbClr val="333333"/>
-                </a:solidFill>
-                <a:latin typeface="Calibri"/>
-              </a:rPr>
-              <a:t> este catalogo es el contrato del Proyecto Integrador; todo lo que se dibuje en las clases siguientes (casos de uso, clases, mockups, diccionario de datos) debe poder rastrearse hasta un requisito de esta lista.</a:t>
+              <a:rPr sz="1400" b="0" i="0">
+                <a:solidFill>
+                  <a:srgbClr val="FFFFFF"/>
+                </a:solidFill>
+                <a:latin typeface="Calibri"/>
+              </a:rPr>
+              <a:t>ID: RF-03</a:t>
             </a:r>
           </a:p>
           <a:p>
             <a:pPr>
               <a:spcAft>
-                <a:spcPts val="800"/>
+                <a:spcPts val="400"/>
               </a:spcAft>
             </a:pPr>
             <a:r>
-              <a:rPr sz="2000" b="0" i="0">
-                <a:solidFill>
-                  <a:srgbClr val="333333"/>
-                </a:solidFill>
-                <a:latin typeface="Calibri"/>
-              </a:rPr>
-              <a:t>–   Si un requisito no queda hoy en el documento, sencillamente no existe para VetCare: no se disena, no se dibuja y no se programa en Programacion II.</a:t>
+              <a:rPr sz="1400" b="0" i="0">
+                <a:solidFill>
+                  <a:srgbClr val="FFFFFF"/>
+                </a:solidFill>
+                <a:latin typeface="Calibri"/>
+              </a:rPr>
+              <a:t>Nombre: Consultar historial clinico de una mascota</a:t>
             </a:r>
           </a:p>
           <a:p>
             <a:pPr>
               <a:spcAft>
-                <a:spcPts val="800"/>
+                <a:spcPts val="400"/>
               </a:spcAft>
             </a:pPr>
             <a:r>
-              <a:rPr sz="2000" b="0" i="0">
-                <a:solidFill>
-                  <a:srgbClr val="333333"/>
-                </a:solidFill>
-                <a:latin typeface="Calibri"/>
-              </a:rPr>
-              <a:t>–   Es tambien la primera entrega que se defiende hablando: usted debe poder explicarle al Dr. Ramirez, en dos minutos, que se le va a construir y que no.</a:t>
-            </a:r>
-          </a:p>
-        </p:txBody>
-      </p:sp>
-      <p:sp>
-        <p:nvSpPr>
-          <p:cNvPr id="6" name="TextBox 5"/>
+              <a:rPr sz="1400" b="0" i="0">
+                <a:solidFill>
+                  <a:srgbClr val="FFFFFF"/>
+                </a:solidFill>
+                <a:latin typeface="Calibri"/>
+              </a:rPr>
+              <a:t>Actor: Veterinario (consulta completa) / Auxiliar (consulta sin diagnostico)</a:t>
+            </a:r>
+          </a:p>
+          <a:p>
+            <a:pPr>
+              <a:spcAft>
+                <a:spcPts val="400"/>
+              </a:spcAft>
+            </a:pPr>
+            <a:r>
+              <a:rPr sz="1400" b="0" i="0">
+                <a:solidFill>
+                  <a:srgbClr val="FFFFFF"/>
+                </a:solidFill>
+                <a:latin typeface="Calibri"/>
+              </a:rPr>
+              <a:t>Descripcion: El sistema debe permitir consultar el historial de atenciones de una mascota a partir del documento del dueno.</a:t>
+            </a:r>
+          </a:p>
+          <a:p>
+            <a:pPr>
+              <a:spcAft>
+                <a:spcPts val="400"/>
+              </a:spcAft>
+            </a:pPr>
+            <a:r>
+              <a:rPr sz="1400" b="0" i="0">
+                <a:solidFill>
+                  <a:srgbClr val="FFFFFF"/>
+                </a:solidFill>
+                <a:latin typeface="Calibri"/>
+              </a:rPr>
+              <a:t>Entrada: documento del dueno o codigo de la mascota</a:t>
+            </a:r>
+          </a:p>
+          <a:p>
+            <a:pPr>
+              <a:spcAft>
+                <a:spcPts val="400"/>
+              </a:spcAft>
+            </a:pPr>
+            <a:r>
+              <a:rPr sz="1400" b="0" i="0">
+                <a:solidFill>
+                  <a:srgbClr val="FFFFFF"/>
+                </a:solidFill>
+                <a:latin typeface="Calibri"/>
+              </a:rPr>
+              <a:t>Salida: lista de atenciones con fecha, motivo, diagnostico y veterinario, ordenada de la mas reciente a la mas antigua</a:t>
+            </a:r>
+          </a:p>
+          <a:p>
+            <a:pPr>
+              <a:spcAft>
+                <a:spcPts val="400"/>
+              </a:spcAft>
+            </a:pPr>
+            <a:r>
+              <a:rPr sz="1400" b="0" i="0">
+                <a:solidFill>
+                  <a:srgbClr val="FFFFFF"/>
+                </a:solidFill>
+                <a:latin typeface="Calibri"/>
+              </a:rPr>
+              <a:t>Regla de negocio: RN-02 una mascota siempre pertenece a un unico dueno registrado</a:t>
+            </a:r>
+          </a:p>
+          <a:p>
+            <a:pPr>
+              <a:spcAft>
+                <a:spcPts val="400"/>
+              </a:spcAft>
+            </a:pPr>
+            <a:r>
+              <a:rPr sz="1400" b="0" i="0">
+                <a:solidFill>
+                  <a:srgbClr val="FFFFFF"/>
+                </a:solidFill>
+                <a:latin typeface="Calibri"/>
+              </a:rPr>
+              <a:t>Criterio de verificacion: dado un dueno con 12 atenciones, la busqueda por documento devuelve las 12 en 3 segundos o menos</a:t>
+            </a:r>
+          </a:p>
+          <a:p>
+            <a:pPr>
+              <a:spcAft>
+                <a:spcPts val="400"/>
+              </a:spcAft>
+            </a:pPr>
+            <a:r>
+              <a:rPr sz="1400" b="0" i="0">
+                <a:solidFill>
+                  <a:srgbClr val="FFFFFF"/>
+                </a:solidFill>
+                <a:latin typeface="Calibri"/>
+              </a:rPr>
+              <a:t>Prioridad MoSCoW: Must</a:t>
+            </a:r>
+          </a:p>
+          <a:p>
+            <a:pPr>
+              <a:spcAft>
+                <a:spcPts val="400"/>
+              </a:spcAft>
+            </a:pPr>
+            <a:r>
+              <a:rPr sz="1400" b="0" i="0">
+                <a:solidFill>
+                  <a:srgbClr val="FFFFFF"/>
+                </a:solidFill>
+                <a:latin typeface="Calibri"/>
+              </a:rPr>
+              <a:t>Origen: entrevista Dr. Ramirez, frase 2 (necesidad NEC-02)</a:t>
+            </a:r>
+          </a:p>
+          <a:p>
+            <a:pPr>
+              <a:spcAft>
+                <a:spcPts val="400"/>
+              </a:spcAft>
+            </a:pPr>
+            <a:r>
+              <a:rPr sz="1400" b="0" i="0">
+                <a:solidFill>
+                  <a:srgbClr val="FFFFFF"/>
+                </a:solidFill>
+                <a:latin typeface="Calibri"/>
+              </a:rPr>
+              <a:t>Trazabilidad: NEC-02 -&gt; RF-03 -&gt; CU-04 -&gt; Pantalla P-02 -&gt; Prueba PR-07</a:t>
+            </a:r>
+          </a:p>
+          <a:p>
+            <a:pPr>
+              <a:spcAft>
+                <a:spcPts val="400"/>
+              </a:spcAft>
+            </a:pPr>
+            <a:r>
+              <a:rPr sz="1400" b="0" i="0">
+                <a:solidFill>
+                  <a:srgbClr val="FFFFFF"/>
+                </a:solidFill>
+                <a:latin typeface="Calibri"/>
+              </a:rPr>
+              <a:t>Estado: aprobado por el cliente</a:t>
+            </a:r>
+          </a:p>
+        </p:txBody>
+      </p:sp>
+      <p:sp>
+        <p:nvSpPr>
+          <p:cNvPr id="9" name="TextBox 8"/>
+          <p:cNvSpPr txBox="1"/>
+          <p:nvPr/>
+        </p:nvSpPr>
+        <p:spPr>
+          <a:xfrm>
+            <a:off x="457200" y="6080760"/>
+            <a:ext cx="11277295" cy="320040"/>
+          </a:xfrm>
+          <a:prstGeom prst="rect">
+            <a:avLst/>
+          </a:prstGeom>
+          <a:noFill/>
+        </p:spPr>
+        <p:txBody>
+          <a:bodyPr wrap="square">
+            <a:spAutoFit/>
+          </a:bodyPr>
+          <a:lstStyle/>
+          <a:p>
+            <a:pPr algn="ctr"/>
+            <a:r>
+              <a:rPr sz="1200" b="0" i="1">
+                <a:solidFill>
+                  <a:srgbClr val="666666"/>
+                </a:solidFill>
+                <a:latin typeface="Calibri"/>
+              </a:rPr>
+              <a:t>Un requisito sin criterio de verificacion y sin origen es una opinion con numero de identificacion.</a:t>
+            </a:r>
+          </a:p>
+        </p:txBody>
+      </p:sp>
+      <p:sp>
+        <p:nvSpPr>
+          <p:cNvPr id="10" name="TextBox 9"/>
           <p:cNvSpPr txBox="1"/>
           <p:nvPr/>
         </p:nvSpPr>
@@ -5560,7 +4966,7 @@
                 </a:solidFill>
                 <a:latin typeface="Calibri"/>
               </a:rPr>
-              <a:t>Taller PI — punto de partida</a:t>
+              <a:t>Demo del dia</a:t>
             </a:r>
           </a:p>
         </p:txBody>
@@ -5599,7 +5005,25 @@
                 </a:solidFill>
                 <a:latin typeface="Calibri"/>
               </a:rPr>
-              <a:t>–   Hoy solo existe la transcripcion de la entrevista al Dr. Ramirez: cinco frases sueltas, dichas en lenguaje de veterinario y no de analista.</a:t>
+              <a:t>–   </a:t>
+            </a:r>
+            <a:r>
+              <a:rPr sz="2000" b="1" i="0">
+                <a:solidFill>
+                  <a:srgbClr val="333333"/>
+                </a:solidFill>
+                <a:latin typeface="Calibri"/>
+              </a:rPr>
+              <a:t>Herramienta:</a:t>
+            </a:r>
+            <a:r>
+              <a:rPr sz="2000" b="0" i="0">
+                <a:solidFill>
+                  <a:srgbClr val="333333"/>
+                </a:solidFill>
+                <a:latin typeface="Calibri"/>
+              </a:rPr>
+              <a:t> Google Docs · draw.io</a:t>
             </a:r>
           </a:p>
           <a:p>
@@ -5615,7 +5039,25 @@
                 </a:solidFill>
                 <a:latin typeface="Calibri"/>
               </a:rPr>
-              <a:t>–   La clinica Huellitas sigue en papel: fichas que se extravian, busquedas de historial que toman varios minutos con el paciente esperando y cero metricas mensuales.</a:t>
+              <a:t>–   </a:t>
+            </a:r>
+            <a:r>
+              <a:rPr sz="2000" b="1" i="0">
+                <a:solidFill>
+                  <a:srgbClr val="333333"/>
+                </a:solidFill>
+                <a:latin typeface="Calibri"/>
+              </a:rPr>
+              <a:t>Demo:</a:t>
+            </a:r>
+            <a:r>
+              <a:rPr sz="2000" b="0" i="0">
+                <a:solidFill>
+                  <a:srgbClr val="333333"/>
+                </a:solidFill>
+                <a:latin typeface="Calibri"/>
+              </a:rPr>
+              <a:t> El docente toma en vivo dos frases crudas de la entrevista al Dr. Ramirez y las convierte, frente al grupo, en un RF y un RNF usando la plantilla.</a:t>
             </a:r>
           </a:p>
           <a:p>
@@ -5631,7 +5073,7 @@
                 </a:solidFill>
                 <a:latin typeface="Calibri"/>
               </a:rPr>
-              <a:t>–   No hay documento de requisitos, no hay prioridades acordadas y nadie sabe todavia que queda dentro y que queda fuera de la primera version de VetCare.</a:t>
+              <a:t>–   Mismo dominio VetCare — no otro ejemplo. Aqui se diseña, no se programa.</a:t>
             </a:r>
           </a:p>
         </p:txBody>
@@ -5706,7 +5148,7 @@
         <p:spPr>
           <a:xfrm>
             <a:off x="0" y="0"/>
-            <a:ext cx="12191695" cy="960120"/>
+            <a:ext cx="12191695" cy="1170432"/>
           </a:xfrm>
           <a:prstGeom prst="rect">
             <a:avLst/>
@@ -5748,7 +5190,7 @@
         </p:nvSpPr>
         <p:spPr>
           <a:xfrm>
-            <a:off x="0" y="960120"/>
+            <a:off x="0" y="1170432"/>
             <a:ext cx="12191695" cy="41148"/>
           </a:xfrm>
           <a:prstGeom prst="rect">
@@ -5792,7 +5234,7 @@
         <p:spPr>
           <a:xfrm>
             <a:off x="457200" y="164592"/>
-            <a:ext cx="11277295" cy="502920"/>
+            <a:ext cx="11277295" cy="384048"/>
           </a:xfrm>
           <a:prstGeom prst="rect">
             <a:avLst/>
@@ -5812,21 +5254,55 @@
                 </a:solidFill>
                 <a:latin typeface="Calibri"/>
               </a:rPr>
-              <a:t>Taller PI — pasos guiados</a:t>
-            </a:r>
-          </a:p>
-        </p:txBody>
-      </p:sp>
-      <p:sp>
-        <p:nvSpPr>
-          <p:cNvPr id="5" name="Rounded Rectangle 4"/>
+              <a:t>Herramientas de hoy</a:t>
+            </a:r>
+          </a:p>
+        </p:txBody>
+      </p:sp>
+      <p:sp>
+        <p:nvSpPr>
+          <p:cNvPr id="5" name="TextBox 4"/>
+          <p:cNvSpPr txBox="1"/>
+          <p:nvPr/>
+        </p:nvSpPr>
+        <p:spPr>
+          <a:xfrm>
+            <a:off x="457200" y="566928"/>
+            <a:ext cx="11277295" cy="411480"/>
+          </a:xfrm>
+          <a:prstGeom prst="rect">
+            <a:avLst/>
+          </a:prstGeom>
+          <a:noFill/>
+        </p:spPr>
+        <p:txBody>
+          <a:bodyPr wrap="square">
+            <a:spAutoFit/>
+          </a:bodyPr>
+          <a:lstStyle/>
+          <a:p>
+            <a:r>
+              <a:rPr sz="1400" b="0" i="0">
+                <a:solidFill>
+                  <a:srgbClr val="B8D8EE"/>
+                </a:solidFill>
+                <a:latin typeface="Calibri"/>
+              </a:rPr>
+              <a:t>Gratis · funcionan en el navegador</a:t>
+            </a:r>
+          </a:p>
+        </p:txBody>
+      </p:sp>
+      <p:sp>
+        <p:nvSpPr>
+          <p:cNvPr id="6" name="Rounded Rectangle 5"/>
           <p:cNvSpPr/>
           <p:nvPr/>
         </p:nvSpPr>
         <p:spPr>
           <a:xfrm>
-            <a:off x="457200" y="1234440"/>
-            <a:ext cx="11277295" cy="950976"/>
+            <a:off x="457200" y="1591056"/>
+            <a:ext cx="3624986" cy="2331720"/>
           </a:xfrm>
           <a:prstGeom prst="roundRect">
             <a:avLst>
@@ -5864,19 +5340,17 @@
       </p:sp>
       <p:sp>
         <p:nvSpPr>
-          <p:cNvPr id="6" name="Rounded Rectangle 5"/>
+          <p:cNvPr id="7" name="Rectangle 6"/>
           <p:cNvSpPr/>
           <p:nvPr/>
         </p:nvSpPr>
         <p:spPr>
           <a:xfrm>
-            <a:off x="594360" y="1490472"/>
-            <a:ext cx="438912" cy="438912"/>
-          </a:xfrm>
-          <a:prstGeom prst="roundRect">
-            <a:avLst>
-              <a:gd name="adj" fmla="val 12000"/>
-            </a:avLst>
+            <a:off x="457200" y="1591056"/>
+            <a:ext cx="3624986" cy="64008"/>
+          </a:xfrm>
+          <a:prstGeom prst="rect">
+            <a:avLst/>
           </a:prstGeom>
           <a:solidFill>
             <a:srgbClr val="095292"/>
@@ -5909,87 +5383,20 @@
       </p:sp>
       <p:sp>
         <p:nvSpPr>
-          <p:cNvPr id="7" name="TextBox 6"/>
-          <p:cNvSpPr txBox="1"/>
-          <p:nvPr/>
-        </p:nvSpPr>
-        <p:spPr>
-          <a:xfrm>
-            <a:off x="594360" y="1490472"/>
-            <a:ext cx="438912" cy="438912"/>
-          </a:xfrm>
-          <a:prstGeom prst="rect">
-            <a:avLst/>
-          </a:prstGeom>
-          <a:noFill/>
-        </p:spPr>
-        <p:txBody>
-          <a:bodyPr wrap="square" anchor="ctr"/>
-          <a:lstStyle/>
-          <a:p>
-            <a:pPr algn="ctr"/>
-            <a:r>
-              <a:rPr sz="1600" b="1" i="0">
-                <a:solidFill>
-                  <a:srgbClr val="FFFFFF"/>
-                </a:solidFill>
-                <a:latin typeface="Calibri"/>
-              </a:rPr>
-              <a:t>1</a:t>
-            </a:r>
-          </a:p>
-        </p:txBody>
-      </p:sp>
-      <p:sp>
-        <p:nvSpPr>
-          <p:cNvPr id="8" name="TextBox 7"/>
-          <p:cNvSpPr txBox="1"/>
-          <p:nvPr/>
-        </p:nvSpPr>
-        <p:spPr>
-          <a:xfrm>
-            <a:off x="1188720" y="1325880"/>
-            <a:ext cx="10271455" cy="786384"/>
-          </a:xfrm>
-          <a:prstGeom prst="rect">
-            <a:avLst/>
-          </a:prstGeom>
-          <a:noFill/>
-        </p:spPr>
-        <p:txBody>
-          <a:bodyPr wrap="square" anchor="ctr"/>
-          <a:lstStyle/>
-          <a:p>
-            <a:r>
-              <a:rPr sz="1500" b="1" i="0">
-                <a:solidFill>
-                  <a:srgbClr val="095292"/>
-                </a:solidFill>
-                <a:latin typeface="Calibri"/>
-              </a:rPr>
-              <a:t>Paso 1: copie en la plantilla las cinco frases crudas de la entrevista al Dr. Ramirez y marque cada una como NECESIDAD, anotando al lado quien la dijo y en que contexto; esa columna es el origen y no se puede dejar vacia.</a:t>
-            </a:r>
-          </a:p>
-        </p:txBody>
-      </p:sp>
-      <p:sp>
-        <p:nvSpPr>
-          <p:cNvPr id="9" name="Rounded Rectangle 8"/>
+          <p:cNvPr id="8" name="Rectangle 7"/>
           <p:cNvSpPr/>
           <p:nvPr/>
         </p:nvSpPr>
         <p:spPr>
           <a:xfrm>
-            <a:off x="457200" y="2276856"/>
-            <a:ext cx="11277295" cy="950976"/>
-          </a:xfrm>
-          <a:prstGeom prst="roundRect">
-            <a:avLst>
-              <a:gd name="adj" fmla="val 12000"/>
-            </a:avLst>
+            <a:off x="457200" y="1655064"/>
+            <a:ext cx="3624986" cy="27432"/>
+          </a:xfrm>
+          <a:prstGeom prst="rect">
+            <a:avLst/>
           </a:prstGeom>
           <a:solidFill>
-            <a:srgbClr val="E8F4FA"/>
+            <a:srgbClr val="FFD000"/>
           </a:solidFill>
           <a:ln>
             <a:noFill/>
@@ -6017,21 +5424,137 @@
           </a:p>
         </p:txBody>
       </p:sp>
-      <p:sp>
-        <p:nvSpPr>
-          <p:cNvPr id="10" name="Rounded Rectangle 9"/>
+      <p:pic>
+        <p:nvPicPr>
+          <p:cNvPr id="9" name="Picture 8" descr="drawio.png"/>
+          <p:cNvPicPr>
+            <a:picLocks noChangeAspect="1"/>
+          </p:cNvPicPr>
+          <p:nvPr/>
+        </p:nvPicPr>
+        <p:blipFill>
+          <a:blip r:embed="rId2"/>
+          <a:stretch>
+            <a:fillRect/>
+          </a:stretch>
+        </p:blipFill>
+        <p:spPr>
+          <a:xfrm>
+            <a:off x="1643329" y="1847087"/>
+            <a:ext cx="1252728" cy="1252728"/>
+          </a:xfrm>
+          <a:prstGeom prst="rect">
+            <a:avLst/>
+          </a:prstGeom>
+        </p:spPr>
+      </p:pic>
+      <p:sp>
+        <p:nvSpPr>
+          <p:cNvPr id="10" name="TextBox 9"/>
+          <p:cNvSpPr txBox="1"/>
+          <p:nvPr/>
+        </p:nvSpPr>
+        <p:spPr>
+          <a:xfrm>
+            <a:off x="530352" y="3191256"/>
+            <a:ext cx="3478682" cy="621792"/>
+          </a:xfrm>
+          <a:prstGeom prst="rect">
+            <a:avLst/>
+          </a:prstGeom>
+          <a:noFill/>
+        </p:spPr>
+        <p:txBody>
+          <a:bodyPr wrap="square" anchor="t"/>
+          <a:lstStyle/>
+          <a:p>
+            <a:pPr algn="ctr"/>
+            <a:r>
+              <a:rPr sz="1300" b="1" i="0">
+                <a:solidFill>
+                  <a:srgbClr val="095292"/>
+                </a:solidFill>
+                <a:latin typeface="Calibri"/>
+              </a:rPr>
+              <a:t>Draw.Io</a:t>
+            </a:r>
+          </a:p>
+          <a:p>
+            <a:pPr algn="ctr">
+              <a:spcBef>
+                <a:spcPts val="200"/>
+              </a:spcBef>
+            </a:pPr>
+            <a:r>
+              <a:rPr sz="1000" b="0" i="0">
+                <a:solidFill>
+                  <a:srgbClr val="666666"/>
+                </a:solidFill>
+                <a:latin typeface="Calibri"/>
+              </a:rPr>
+              <a:t>Diagramas UML y de contexto</a:t>
+            </a:r>
+          </a:p>
+        </p:txBody>
+      </p:sp>
+      <p:sp>
+        <p:nvSpPr>
+          <p:cNvPr id="11" name="Rounded Rectangle 10"/>
           <p:cNvSpPr/>
           <p:nvPr/>
         </p:nvSpPr>
         <p:spPr>
           <a:xfrm>
-            <a:off x="594360" y="2532888"/>
-            <a:ext cx="438912" cy="438912"/>
+            <a:off x="4283354" y="1591056"/>
+            <a:ext cx="3624986" cy="2331720"/>
           </a:xfrm>
           <a:prstGeom prst="roundRect">
             <a:avLst>
               <a:gd name="adj" fmla="val 12000"/>
             </a:avLst>
+          </a:prstGeom>
+          <a:solidFill>
+            <a:srgbClr val="F2F2F2"/>
+          </a:solidFill>
+          <a:ln>
+            <a:noFill/>
+          </a:ln>
+        </p:spPr>
+        <p:style>
+          <a:lnRef idx="1">
+            <a:schemeClr val="accent1"/>
+          </a:lnRef>
+          <a:fillRef idx="3">
+            <a:schemeClr val="accent1"/>
+          </a:fillRef>
+          <a:effectRef idx="2">
+            <a:schemeClr val="accent1"/>
+          </a:effectRef>
+          <a:fontRef idx="minor">
+            <a:schemeClr val="lt1"/>
+          </a:fontRef>
+        </p:style>
+        <p:txBody>
+          <a:bodyPr rtlCol="0" anchor="ctr"/>
+          <a:lstStyle/>
+          <a:p>
+            <a:pPr algn="ctr"/>
+          </a:p>
+        </p:txBody>
+      </p:sp>
+      <p:sp>
+        <p:nvSpPr>
+          <p:cNvPr id="12" name="Rectangle 11"/>
+          <p:cNvSpPr/>
+          <p:nvPr/>
+        </p:nvSpPr>
+        <p:spPr>
+          <a:xfrm>
+            <a:off x="4283354" y="1591056"/>
+            <a:ext cx="3624986" cy="64008"/>
+          </a:xfrm>
+          <a:prstGeom prst="rect">
+            <a:avLst/>
           </a:prstGeom>
           <a:solidFill>
             <a:srgbClr val="095292"/>
@@ -6064,14 +5587,81 @@
       </p:sp>
       <p:sp>
         <p:nvSpPr>
-          <p:cNvPr id="11" name="TextBox 10"/>
+          <p:cNvPr id="13" name="Rectangle 12"/>
+          <p:cNvSpPr/>
+          <p:nvPr/>
+        </p:nvSpPr>
+        <p:spPr>
+          <a:xfrm>
+            <a:off x="4283354" y="1655064"/>
+            <a:ext cx="3624986" cy="27432"/>
+          </a:xfrm>
+          <a:prstGeom prst="rect">
+            <a:avLst/>
+          </a:prstGeom>
+          <a:solidFill>
+            <a:srgbClr val="FFD000"/>
+          </a:solidFill>
+          <a:ln>
+            <a:noFill/>
+          </a:ln>
+        </p:spPr>
+        <p:style>
+          <a:lnRef idx="1">
+            <a:schemeClr val="accent1"/>
+          </a:lnRef>
+          <a:fillRef idx="3">
+            <a:schemeClr val="accent1"/>
+          </a:fillRef>
+          <a:effectRef idx="2">
+            <a:schemeClr val="accent1"/>
+          </a:effectRef>
+          <a:fontRef idx="minor">
+            <a:schemeClr val="lt1"/>
+          </a:fontRef>
+        </p:style>
+        <p:txBody>
+          <a:bodyPr rtlCol="0" anchor="ctr"/>
+          <a:lstStyle/>
+          <a:p>
+            <a:pPr algn="ctr"/>
+          </a:p>
+        </p:txBody>
+      </p:sp>
+      <p:pic>
+        <p:nvPicPr>
+          <p:cNvPr id="14" name="Picture 13" descr="google_docs.png"/>
+          <p:cNvPicPr>
+            <a:picLocks noChangeAspect="1"/>
+          </p:cNvPicPr>
+          <p:nvPr/>
+        </p:nvPicPr>
+        <p:blipFill>
+          <a:blip r:embed="rId3"/>
+          <a:stretch>
+            <a:fillRect/>
+          </a:stretch>
+        </p:blipFill>
+        <p:spPr>
+          <a:xfrm>
+            <a:off x="5469483" y="1847087"/>
+            <a:ext cx="1252728" cy="1252728"/>
+          </a:xfrm>
+          <a:prstGeom prst="rect">
+            <a:avLst/>
+          </a:prstGeom>
+        </p:spPr>
+      </p:pic>
+      <p:sp>
+        <p:nvSpPr>
+          <p:cNvPr id="15" name="TextBox 14"/>
           <p:cNvSpPr txBox="1"/>
           <p:nvPr/>
         </p:nvSpPr>
         <p:spPr>
           <a:xfrm>
-            <a:off x="594360" y="2532888"/>
-            <a:ext cx="438912" cy="438912"/>
+            <a:off x="4356506" y="3191256"/>
+            <a:ext cx="3478682" cy="621792"/>
           </a:xfrm>
           <a:prstGeom prst="rect">
             <a:avLst/>
@@ -6079,64 +5669,48 @@
           <a:noFill/>
         </p:spPr>
         <p:txBody>
-          <a:bodyPr wrap="square" anchor="ctr"/>
+          <a:bodyPr wrap="square" anchor="t"/>
           <a:lstStyle/>
           <a:p>
             <a:pPr algn="ctr"/>
             <a:r>
-              <a:rPr sz="1600" b="1" i="0">
-                <a:solidFill>
-                  <a:srgbClr val="FFFFFF"/>
-                </a:solidFill>
-                <a:latin typeface="Calibri"/>
-              </a:rPr>
-              <a:t>2</a:t>
-            </a:r>
-          </a:p>
-        </p:txBody>
-      </p:sp>
-      <p:sp>
-        <p:nvSpPr>
-          <p:cNvPr id="12" name="TextBox 11"/>
-          <p:cNvSpPr txBox="1"/>
-          <p:nvPr/>
-        </p:nvSpPr>
-        <p:spPr>
-          <a:xfrm>
-            <a:off x="1188720" y="2368296"/>
-            <a:ext cx="10271455" cy="786384"/>
-          </a:xfrm>
-          <a:prstGeom prst="rect">
-            <a:avLst/>
-          </a:prstGeom>
-          <a:noFill/>
-        </p:spPr>
-        <p:txBody>
-          <a:bodyPr wrap="square" anchor="ctr"/>
-          <a:lstStyle/>
-          <a:p>
-            <a:r>
-              <a:rPr sz="1400" b="1" i="0">
+              <a:rPr sz="1300" b="1" i="0">
                 <a:solidFill>
                   <a:srgbClr val="095292"/>
                 </a:solidFill>
                 <a:latin typeface="Calibri"/>
               </a:rPr>
-              <a:t>Paso 2: traduzca las necesidades a requisitos funcionales usando la plantilla el sistema debe permitir a &lt;actor&gt; &lt;accion&gt; &lt;objeto&gt;, hasta llegar a minimo 8 RF numerados de RF-01 a RF-08; ningun RF puede contener la palabra y uniendo dos capacidades distintas.</a:t>
-            </a:r>
-          </a:p>
-        </p:txBody>
-      </p:sp>
-      <p:sp>
-        <p:nvSpPr>
-          <p:cNvPr id="13" name="Rounded Rectangle 12"/>
+              <a:t>google docs</a:t>
+            </a:r>
+          </a:p>
+          <a:p>
+            <a:pPr algn="ctr">
+              <a:spcBef>
+                <a:spcPts val="200"/>
+              </a:spcBef>
+            </a:pPr>
+            <a:r>
+              <a:rPr sz="1000" b="0" i="0">
+                <a:solidFill>
+                  <a:srgbClr val="666666"/>
+                </a:solidFill>
+                <a:latin typeface="Calibri"/>
+              </a:rPr>
+              <a:t>Documentos del paquete de diseño</a:t>
+            </a:r>
+          </a:p>
+        </p:txBody>
+      </p:sp>
+      <p:sp>
+        <p:nvSpPr>
+          <p:cNvPr id="16" name="Rounded Rectangle 15"/>
           <p:cNvSpPr/>
           <p:nvPr/>
         </p:nvSpPr>
         <p:spPr>
           <a:xfrm>
-            <a:off x="457200" y="3319272"/>
-            <a:ext cx="11277295" cy="950976"/>
+            <a:off x="8109508" y="1591056"/>
+            <a:ext cx="3624986" cy="2331720"/>
           </a:xfrm>
           <a:prstGeom prst="roundRect">
             <a:avLst>
@@ -6174,19 +5748,17 @@
       </p:sp>
       <p:sp>
         <p:nvSpPr>
-          <p:cNvPr id="14" name="Rounded Rectangle 13"/>
+          <p:cNvPr id="17" name="Rectangle 16"/>
           <p:cNvSpPr/>
           <p:nvPr/>
         </p:nvSpPr>
         <p:spPr>
           <a:xfrm>
-            <a:off x="594360" y="3575304"/>
-            <a:ext cx="438912" cy="438912"/>
-          </a:xfrm>
-          <a:prstGeom prst="roundRect">
-            <a:avLst>
-              <a:gd name="adj" fmla="val 12000"/>
-            </a:avLst>
+            <a:off x="8109508" y="1591056"/>
+            <a:ext cx="3624986" cy="64008"/>
+          </a:xfrm>
+          <a:prstGeom prst="rect">
+            <a:avLst/>
           </a:prstGeom>
           <a:solidFill>
             <a:srgbClr val="095292"/>
@@ -6219,87 +5791,20 @@
       </p:sp>
       <p:sp>
         <p:nvSpPr>
-          <p:cNvPr id="15" name="TextBox 14"/>
-          <p:cNvSpPr txBox="1"/>
-          <p:nvPr/>
-        </p:nvSpPr>
-        <p:spPr>
-          <a:xfrm>
-            <a:off x="594360" y="3575304"/>
-            <a:ext cx="438912" cy="438912"/>
-          </a:xfrm>
-          <a:prstGeom prst="rect">
-            <a:avLst/>
-          </a:prstGeom>
-          <a:noFill/>
-        </p:spPr>
-        <p:txBody>
-          <a:bodyPr wrap="square" anchor="ctr"/>
-          <a:lstStyle/>
-          <a:p>
-            <a:pPr algn="ctr"/>
-            <a:r>
-              <a:rPr sz="1600" b="1" i="0">
-                <a:solidFill>
-                  <a:srgbClr val="FFFFFF"/>
-                </a:solidFill>
-                <a:latin typeface="Calibri"/>
-              </a:rPr>
-              <a:t>3</a:t>
-            </a:r>
-          </a:p>
-        </p:txBody>
-      </p:sp>
-      <p:sp>
-        <p:nvSpPr>
-          <p:cNvPr id="16" name="TextBox 15"/>
-          <p:cNvSpPr txBox="1"/>
-          <p:nvPr/>
-        </p:nvSpPr>
-        <p:spPr>
-          <a:xfrm>
-            <a:off x="1188720" y="3410712"/>
-            <a:ext cx="10271455" cy="786384"/>
-          </a:xfrm>
-          <a:prstGeom prst="rect">
-            <a:avLst/>
-          </a:prstGeom>
-          <a:noFill/>
-        </p:spPr>
-        <p:txBody>
-          <a:bodyPr wrap="square" anchor="ctr"/>
-          <a:lstStyle/>
-          <a:p>
-            <a:r>
-              <a:rPr sz="1500" b="1" i="0">
-                <a:solidFill>
-                  <a:srgbClr val="095292"/>
-                </a:solidFill>
-                <a:latin typeface="Calibri"/>
-              </a:rPr>
-              <a:t>Paso 3: derive 4 RNF, uno por categoria (desempeno, control de acceso, usabilidad y respaldo), y escriba en cada uno al menos un numero: segundos, cantidad de registros, frecuencia o porcentaje.</a:t>
-            </a:r>
-          </a:p>
-        </p:txBody>
-      </p:sp>
-      <p:sp>
-        <p:nvSpPr>
-          <p:cNvPr id="17" name="Rounded Rectangle 16"/>
+          <p:cNvPr id="18" name="Rectangle 17"/>
           <p:cNvSpPr/>
           <p:nvPr/>
         </p:nvSpPr>
         <p:spPr>
           <a:xfrm>
-            <a:off x="457200" y="4361688"/>
-            <a:ext cx="11277295" cy="950976"/>
-          </a:xfrm>
-          <a:prstGeom prst="roundRect">
-            <a:avLst>
-              <a:gd name="adj" fmla="val 12000"/>
-            </a:avLst>
+            <a:off x="8109508" y="1655064"/>
+            <a:ext cx="3624986" cy="27432"/>
+          </a:xfrm>
+          <a:prstGeom prst="rect">
+            <a:avLst/>
           </a:prstGeom>
           <a:solidFill>
-            <a:srgbClr val="E8F4FA"/>
+            <a:srgbClr val="FFD000"/>
           </a:solidFill>
           <a:ln>
             <a:noFill/>
@@ -6327,84 +5832,30 @@
           </a:p>
         </p:txBody>
       </p:sp>
-      <p:sp>
-        <p:nvSpPr>
-          <p:cNvPr id="18" name="Rounded Rectangle 17"/>
-          <p:cNvSpPr/>
-          <p:nvPr/>
-        </p:nvSpPr>
-        <p:spPr>
-          <a:xfrm>
-            <a:off x="594360" y="4617720"/>
-            <a:ext cx="438912" cy="438912"/>
-          </a:xfrm>
-          <a:prstGeom prst="roundRect">
-            <a:avLst>
-              <a:gd name="adj" fmla="val 12000"/>
-            </a:avLst>
-          </a:prstGeom>
-          <a:solidFill>
-            <a:srgbClr val="095292"/>
-          </a:solidFill>
-          <a:ln>
-            <a:noFill/>
-          </a:ln>
-        </p:spPr>
-        <p:style>
-          <a:lnRef idx="1">
-            <a:schemeClr val="accent1"/>
-          </a:lnRef>
-          <a:fillRef idx="3">
-            <a:schemeClr val="accent1"/>
-          </a:fillRef>
-          <a:effectRef idx="2">
-            <a:schemeClr val="accent1"/>
-          </a:effectRef>
-          <a:fontRef idx="minor">
-            <a:schemeClr val="lt1"/>
-          </a:fontRef>
-        </p:style>
-        <p:txBody>
-          <a:bodyPr rtlCol="0" anchor="ctr"/>
-          <a:lstStyle/>
-          <a:p>
-            <a:pPr algn="ctr"/>
-          </a:p>
-        </p:txBody>
-      </p:sp>
-      <p:sp>
-        <p:nvSpPr>
-          <p:cNvPr id="19" name="TextBox 18"/>
-          <p:cNvSpPr txBox="1"/>
-          <p:nvPr/>
-        </p:nvSpPr>
-        <p:spPr>
-          <a:xfrm>
-            <a:off x="594360" y="4617720"/>
-            <a:ext cx="438912" cy="438912"/>
-          </a:xfrm>
-          <a:prstGeom prst="rect">
-            <a:avLst/>
-          </a:prstGeom>
-          <a:noFill/>
-        </p:spPr>
-        <p:txBody>
-          <a:bodyPr wrap="square" anchor="ctr"/>
-          <a:lstStyle/>
-          <a:p>
-            <a:pPr algn="ctr"/>
-            <a:r>
-              <a:rPr sz="1600" b="1" i="0">
-                <a:solidFill>
-                  <a:srgbClr val="FFFFFF"/>
-                </a:solidFill>
-                <a:latin typeface="Calibri"/>
-              </a:rPr>
-              <a:t>4</a:t>
-            </a:r>
-          </a:p>
-        </p:txBody>
-      </p:sp>
+      <p:pic>
+        <p:nvPicPr>
+          <p:cNvPr id="19" name="Picture 18" descr="examlab.png"/>
+          <p:cNvPicPr>
+            <a:picLocks noChangeAspect="1"/>
+          </p:cNvPicPr>
+          <p:nvPr/>
+        </p:nvPicPr>
+        <p:blipFill>
+          <a:blip r:embed="rId4"/>
+          <a:stretch>
+            <a:fillRect/>
+          </a:stretch>
+        </p:blipFill>
+        <p:spPr>
+          <a:xfrm>
+            <a:off x="9295638" y="1847087"/>
+            <a:ext cx="1252728" cy="1252728"/>
+          </a:xfrm>
+          <a:prstGeom prst="rect">
+            <a:avLst/>
+          </a:prstGeom>
+        </p:spPr>
+      </p:pic>
       <p:sp>
         <p:nvSpPr>
           <p:cNvPr id="20" name="TextBox 19"/>
@@ -6413,8 +5864,8 @@
         </p:nvSpPr>
         <p:spPr>
           <a:xfrm>
-            <a:off x="1188720" y="4453128"/>
-            <a:ext cx="10271455" cy="786384"/>
+            <a:off x="8182660" y="3191256"/>
+            <a:ext cx="3478682" cy="621792"/>
           </a:xfrm>
           <a:prstGeom prst="rect">
             <a:avLst/>
@@ -6422,179 +5873,41 @@
           <a:noFill/>
         </p:spPr>
         <p:txBody>
-          <a:bodyPr wrap="square" anchor="ctr"/>
-          <a:lstStyle/>
-          <a:p>
-            <a:r>
-              <a:rPr sz="1500" b="1" i="0">
+          <a:bodyPr wrap="square" anchor="t"/>
+          <a:lstStyle/>
+          <a:p>
+            <a:pPr algn="ctr"/>
+            <a:r>
+              <a:rPr sz="1300" b="1" i="0">
                 <a:solidFill>
                   <a:srgbClr val="095292"/>
                 </a:solidFill>
                 <a:latin typeface="Calibri"/>
               </a:rPr>
-              <a:t>Paso 4: asigne prioridad MoSCoW a los 12 requisitos, verifique que los Must no pasen de seis y justifique en una linea por que los dos Won't quedan fuera de esta version de VetCare.</a:t>
-            </a:r>
-          </a:p>
-        </p:txBody>
-      </p:sp>
-      <p:sp>
-        <p:nvSpPr>
-          <p:cNvPr id="21" name="Rounded Rectangle 20"/>
-          <p:cNvSpPr/>
-          <p:nvPr/>
-        </p:nvSpPr>
-        <p:spPr>
-          <a:xfrm>
-            <a:off x="457200" y="5404104"/>
-            <a:ext cx="11277295" cy="950976"/>
-          </a:xfrm>
-          <a:prstGeom prst="roundRect">
-            <a:avLst>
-              <a:gd name="adj" fmla="val 12000"/>
-            </a:avLst>
-          </a:prstGeom>
-          <a:solidFill>
-            <a:srgbClr val="F2F2F2"/>
-          </a:solidFill>
-          <a:ln>
-            <a:noFill/>
-          </a:ln>
-        </p:spPr>
-        <p:style>
-          <a:lnRef idx="1">
-            <a:schemeClr val="accent1"/>
-          </a:lnRef>
-          <a:fillRef idx="3">
-            <a:schemeClr val="accent1"/>
-          </a:fillRef>
-          <a:effectRef idx="2">
-            <a:schemeClr val="accent1"/>
-          </a:effectRef>
-          <a:fontRef idx="minor">
-            <a:schemeClr val="lt1"/>
-          </a:fontRef>
-        </p:style>
-        <p:txBody>
-          <a:bodyPr rtlCol="0" anchor="ctr"/>
-          <a:lstStyle/>
-          <a:p>
-            <a:pPr algn="ctr"/>
-          </a:p>
-        </p:txBody>
-      </p:sp>
-      <p:sp>
-        <p:nvSpPr>
-          <p:cNvPr id="22" name="Rounded Rectangle 21"/>
-          <p:cNvSpPr/>
-          <p:nvPr/>
-        </p:nvSpPr>
-        <p:spPr>
-          <a:xfrm>
-            <a:off x="594360" y="5660136"/>
-            <a:ext cx="438912" cy="438912"/>
-          </a:xfrm>
-          <a:prstGeom prst="roundRect">
-            <a:avLst>
-              <a:gd name="adj" fmla="val 12000"/>
-            </a:avLst>
-          </a:prstGeom>
-          <a:solidFill>
-            <a:srgbClr val="095292"/>
-          </a:solidFill>
-          <a:ln>
-            <a:noFill/>
-          </a:ln>
-        </p:spPr>
-        <p:style>
-          <a:lnRef idx="1">
-            <a:schemeClr val="accent1"/>
-          </a:lnRef>
-          <a:fillRef idx="3">
-            <a:schemeClr val="accent1"/>
-          </a:fillRef>
-          <a:effectRef idx="2">
-            <a:schemeClr val="accent1"/>
-          </a:effectRef>
-          <a:fontRef idx="minor">
-            <a:schemeClr val="lt1"/>
-          </a:fontRef>
-        </p:style>
-        <p:txBody>
-          <a:bodyPr rtlCol="0" anchor="ctr"/>
-          <a:lstStyle/>
-          <a:p>
-            <a:pPr algn="ctr"/>
-          </a:p>
-        </p:txBody>
-      </p:sp>
-      <p:sp>
-        <p:nvSpPr>
-          <p:cNvPr id="23" name="TextBox 22"/>
-          <p:cNvSpPr txBox="1"/>
-          <p:nvPr/>
-        </p:nvSpPr>
-        <p:spPr>
-          <a:xfrm>
-            <a:off x="594360" y="5660136"/>
-            <a:ext cx="438912" cy="438912"/>
-          </a:xfrm>
-          <a:prstGeom prst="rect">
-            <a:avLst/>
-          </a:prstGeom>
-          <a:noFill/>
-        </p:spPr>
-        <p:txBody>
-          <a:bodyPr wrap="square" anchor="ctr"/>
-          <a:lstStyle/>
-          <a:p>
-            <a:pPr algn="ctr"/>
-            <a:r>
-              <a:rPr sz="1600" b="1" i="0">
-                <a:solidFill>
-                  <a:srgbClr val="FFFFFF"/>
-                </a:solidFill>
-                <a:latin typeface="Calibri"/>
-              </a:rPr>
-              <a:t>5</a:t>
-            </a:r>
-          </a:p>
-        </p:txBody>
-      </p:sp>
-      <p:sp>
-        <p:nvSpPr>
-          <p:cNvPr id="24" name="TextBox 23"/>
-          <p:cNvSpPr txBox="1"/>
-          <p:nvPr/>
-        </p:nvSpPr>
-        <p:spPr>
-          <a:xfrm>
-            <a:off x="1188720" y="5495544"/>
-            <a:ext cx="10271455" cy="786384"/>
-          </a:xfrm>
-          <a:prstGeom prst="rect">
-            <a:avLst/>
-          </a:prstGeom>
-          <a:noFill/>
-        </p:spPr>
-        <p:txBody>
-          <a:bodyPr wrap="square" anchor="ctr"/>
-          <a:lstStyle/>
-          <a:p>
-            <a:r>
-              <a:rPr sz="1500" b="1" i="0">
-                <a:solidFill>
-                  <a:srgbClr val="095292"/>
-                </a:solidFill>
-                <a:latin typeface="Calibri"/>
-              </a:rPr>
-              <a:t>Paso 5: complete la matriz de trazabilidad con las columnas Necesidad, RF/RNF, Pantalla prevista y Prueba de aceptacion, exporte el documento a PDF y subalo a la plataforma del curso con el nombre RF-RNF-VetCare-&lt;sus apellidos&gt;.pdf.</a:t>
-            </a:r>
-          </a:p>
-        </p:txBody>
-      </p:sp>
-      <p:sp>
-        <p:nvSpPr>
-          <p:cNvPr id="25" name="TextBox 24"/>
+              <a:t>la plataforma del curso</a:t>
+            </a:r>
+          </a:p>
+          <a:p>
+            <a:pPr algn="ctr">
+              <a:spcBef>
+                <a:spcPts val="200"/>
+              </a:spcBef>
+            </a:pPr>
+            <a:r>
+              <a:rPr sz="1000" b="0" i="0">
+                <a:solidFill>
+                  <a:srgbClr val="666666"/>
+                </a:solidFill>
+                <a:latin typeface="Calibri"/>
+              </a:rPr>
+              <a:t>Entrega del taller · en la fecha que indique el docente</a:t>
+            </a:r>
+          </a:p>
+        </p:txBody>
+      </p:sp>
+      <p:sp>
+        <p:nvSpPr>
+          <p:cNvPr id="21" name="TextBox 20"/>
           <p:cNvSpPr txBox="1"/>
           <p:nvPr/>
         </p:nvSpPr>
@@ -6768,154 +6081,21 @@
                 </a:solidFill>
                 <a:latin typeface="Calibri"/>
               </a:rPr>
-              <a:t>Antes de entregar — autochequeo</a:t>
-            </a:r>
-          </a:p>
-        </p:txBody>
-      </p:sp>
-      <p:sp>
-        <p:nvSpPr>
-          <p:cNvPr id="5" name="Rounded Rectangle 4"/>
-          <p:cNvSpPr/>
-          <p:nvPr/>
-        </p:nvSpPr>
-        <p:spPr>
-          <a:xfrm>
-            <a:off x="457200" y="1261872"/>
-            <a:ext cx="11277295" cy="566928"/>
-          </a:xfrm>
-          <a:prstGeom prst="roundRect">
-            <a:avLst>
-              <a:gd name="adj" fmla="val 12000"/>
-            </a:avLst>
-          </a:prstGeom>
-          <a:solidFill>
-            <a:srgbClr val="F2F2F2"/>
-          </a:solidFill>
-          <a:ln>
-            <a:noFill/>
-          </a:ln>
-        </p:spPr>
-        <p:style>
-          <a:lnRef idx="1">
-            <a:schemeClr val="accent1"/>
-          </a:lnRef>
-          <a:fillRef idx="3">
-            <a:schemeClr val="accent1"/>
-          </a:fillRef>
-          <a:effectRef idx="2">
-            <a:schemeClr val="accent1"/>
-          </a:effectRef>
-          <a:fontRef idx="minor">
-            <a:schemeClr val="lt1"/>
-          </a:fontRef>
-        </p:style>
-        <p:txBody>
-          <a:bodyPr rtlCol="0" anchor="ctr"/>
-          <a:lstStyle/>
-          <a:p>
-            <a:pPr algn="ctr"/>
-          </a:p>
-        </p:txBody>
-      </p:sp>
-      <p:sp>
-        <p:nvSpPr>
-          <p:cNvPr id="6" name="Rectangle 5"/>
-          <p:cNvSpPr/>
-          <p:nvPr/>
-        </p:nvSpPr>
-        <p:spPr>
-          <a:xfrm>
-            <a:off x="640080" y="1408175"/>
-            <a:ext cx="274320" cy="274320"/>
-          </a:xfrm>
-          <a:prstGeom prst="rect">
-            <a:avLst/>
-          </a:prstGeom>
-          <a:solidFill>
-            <a:srgbClr val="FFFFFF"/>
-          </a:solidFill>
-          <a:ln>
-            <a:solidFill>
-              <a:srgbClr val="333333"/>
-            </a:solidFill>
-          </a:ln>
-        </p:spPr>
-        <p:style>
-          <a:lnRef idx="1">
-            <a:schemeClr val="accent1"/>
-          </a:lnRef>
-          <a:fillRef idx="3">
-            <a:schemeClr val="accent1"/>
-          </a:fillRef>
-          <a:effectRef idx="2">
-            <a:schemeClr val="accent1"/>
-          </a:effectRef>
-          <a:fontRef idx="minor">
-            <a:schemeClr val="lt1"/>
-          </a:fontRef>
-        </p:style>
-        <p:txBody>
-          <a:bodyPr rtlCol="0" anchor="ctr"/>
-          <a:lstStyle/>
-          <a:p>
-            <a:pPr algn="ctr"/>
-          </a:p>
-        </p:txBody>
-      </p:sp>
-      <p:sp>
-        <p:nvSpPr>
-          <p:cNvPr id="7" name="Rectangle 6"/>
-          <p:cNvSpPr/>
-          <p:nvPr/>
-        </p:nvSpPr>
-        <p:spPr>
-          <a:xfrm>
-            <a:off x="640080" y="1408175"/>
-            <a:ext cx="73152" cy="274320"/>
-          </a:xfrm>
-          <a:prstGeom prst="rect">
-            <a:avLst/>
-          </a:prstGeom>
-          <a:solidFill>
-            <a:srgbClr val="269CCB"/>
-          </a:solidFill>
-          <a:ln>
-            <a:noFill/>
-          </a:ln>
-        </p:spPr>
-        <p:style>
-          <a:lnRef idx="1">
-            <a:schemeClr val="accent1"/>
-          </a:lnRef>
-          <a:fillRef idx="3">
-            <a:schemeClr val="accent1"/>
-          </a:fillRef>
-          <a:effectRef idx="2">
-            <a:schemeClr val="accent1"/>
-          </a:effectRef>
-          <a:fontRef idx="minor">
-            <a:schemeClr val="lt1"/>
-          </a:fontRef>
-        </p:style>
-        <p:txBody>
-          <a:bodyPr rtlCol="0" anchor="ctr"/>
-          <a:lstStyle/>
-          <a:p>
-            <a:pPr algn="ctr"/>
-          </a:p>
-        </p:txBody>
-      </p:sp>
-      <p:sp>
-        <p:nvSpPr>
-          <p:cNvPr id="8" name="TextBox 7"/>
+              <a:t>Taller PI — por que importa</a:t>
+            </a:r>
+          </a:p>
+        </p:txBody>
+      </p:sp>
+      <p:sp>
+        <p:nvSpPr>
+          <p:cNvPr id="5" name="TextBox 4"/>
           <p:cNvSpPr txBox="1"/>
           <p:nvPr/>
         </p:nvSpPr>
         <p:spPr>
           <a:xfrm>
-            <a:off x="1097280" y="1353312"/>
-            <a:ext cx="10362895" cy="402336"/>
+            <a:off x="457200" y="1170432"/>
+            <a:ext cx="11277295" cy="5230368"/>
           </a:xfrm>
           <a:prstGeom prst="rect">
             <a:avLst/>
@@ -6923,354 +6103,81 @@
           <a:noFill/>
         </p:spPr>
         <p:txBody>
-          <a:bodyPr wrap="square" anchor="ctr"/>
-          <a:lstStyle/>
-          <a:p>
-            <a:r>
-              <a:rPr sz="1500" b="0" i="0">
+          <a:bodyPr wrap="square">
+            <a:spAutoFit/>
+          </a:bodyPr>
+          <a:lstStyle/>
+          <a:p>
+            <a:pPr>
+              <a:spcAft>
+                <a:spcPts val="800"/>
+              </a:spcAft>
+            </a:pPr>
+            <a:r>
+              <a:rPr sz="2000" b="0" i="0">
                 <a:solidFill>
                   <a:srgbClr val="333333"/>
                 </a:solidFill>
                 <a:latin typeface="Calibri"/>
               </a:rPr>
-              <a:t>Con que prueba concreta, hecha en menos de dos minutos delante del Dr. Ramirez, demostraria que este requisito quedo cumplido?</a:t>
-            </a:r>
-          </a:p>
-        </p:txBody>
-      </p:sp>
-      <p:sp>
-        <p:nvSpPr>
-          <p:cNvPr id="9" name="Rounded Rectangle 8"/>
-          <p:cNvSpPr/>
-          <p:nvPr/>
-        </p:nvSpPr>
-        <p:spPr>
-          <a:xfrm>
-            <a:off x="457200" y="1938528"/>
-            <a:ext cx="11277295" cy="566928"/>
-          </a:xfrm>
-          <a:prstGeom prst="roundRect">
-            <a:avLst>
-              <a:gd name="adj" fmla="val 12000"/>
-            </a:avLst>
-          </a:prstGeom>
-          <a:solidFill>
-            <a:srgbClr val="F2F2F2"/>
-          </a:solidFill>
-          <a:ln>
-            <a:noFill/>
-          </a:ln>
-        </p:spPr>
-        <p:style>
-          <a:lnRef idx="1">
-            <a:schemeClr val="accent1"/>
-          </a:lnRef>
-          <a:fillRef idx="3">
-            <a:schemeClr val="accent1"/>
-          </a:fillRef>
-          <a:effectRef idx="2">
-            <a:schemeClr val="accent1"/>
-          </a:effectRef>
-          <a:fontRef idx="minor">
-            <a:schemeClr val="lt1"/>
-          </a:fontRef>
-        </p:style>
-        <p:txBody>
-          <a:bodyPr rtlCol="0" anchor="ctr"/>
-          <a:lstStyle/>
-          <a:p>
-            <a:pPr algn="ctr"/>
-          </a:p>
-        </p:txBody>
-      </p:sp>
-      <p:sp>
-        <p:nvSpPr>
-          <p:cNvPr id="10" name="Rectangle 9"/>
-          <p:cNvSpPr/>
-          <p:nvPr/>
-        </p:nvSpPr>
-        <p:spPr>
-          <a:xfrm>
-            <a:off x="640080" y="2084832"/>
-            <a:ext cx="274320" cy="274320"/>
-          </a:xfrm>
-          <a:prstGeom prst="rect">
-            <a:avLst/>
-          </a:prstGeom>
-          <a:solidFill>
-            <a:srgbClr val="FFFFFF"/>
-          </a:solidFill>
-          <a:ln>
-            <a:solidFill>
-              <a:srgbClr val="333333"/>
-            </a:solidFill>
-          </a:ln>
-        </p:spPr>
-        <p:style>
-          <a:lnRef idx="1">
-            <a:schemeClr val="accent1"/>
-          </a:lnRef>
-          <a:fillRef idx="3">
-            <a:schemeClr val="accent1"/>
-          </a:fillRef>
-          <a:effectRef idx="2">
-            <a:schemeClr val="accent1"/>
-          </a:effectRef>
-          <a:fontRef idx="minor">
-            <a:schemeClr val="lt1"/>
-          </a:fontRef>
-        </p:style>
-        <p:txBody>
-          <a:bodyPr rtlCol="0" anchor="ctr"/>
-          <a:lstStyle/>
-          <a:p>
-            <a:pPr algn="ctr"/>
-          </a:p>
-        </p:txBody>
-      </p:sp>
-      <p:sp>
-        <p:nvSpPr>
-          <p:cNvPr id="11" name="Rectangle 10"/>
-          <p:cNvSpPr/>
-          <p:nvPr/>
-        </p:nvSpPr>
-        <p:spPr>
-          <a:xfrm>
-            <a:off x="640080" y="2084832"/>
-            <a:ext cx="73152" cy="274320"/>
-          </a:xfrm>
-          <a:prstGeom prst="rect">
-            <a:avLst/>
-          </a:prstGeom>
-          <a:solidFill>
-            <a:srgbClr val="269CCB"/>
-          </a:solidFill>
-          <a:ln>
-            <a:noFill/>
-          </a:ln>
-        </p:spPr>
-        <p:style>
-          <a:lnRef idx="1">
-            <a:schemeClr val="accent1"/>
-          </a:lnRef>
-          <a:fillRef idx="3">
-            <a:schemeClr val="accent1"/>
-          </a:fillRef>
-          <a:effectRef idx="2">
-            <a:schemeClr val="accent1"/>
-          </a:effectRef>
-          <a:fontRef idx="minor">
-            <a:schemeClr val="lt1"/>
-          </a:fontRef>
-        </p:style>
-        <p:txBody>
-          <a:bodyPr rtlCol="0" anchor="ctr"/>
-          <a:lstStyle/>
-          <a:p>
-            <a:pPr algn="ctr"/>
-          </a:p>
-        </p:txBody>
-      </p:sp>
-      <p:sp>
-        <p:nvSpPr>
-          <p:cNvPr id="12" name="TextBox 11"/>
-          <p:cNvSpPr txBox="1"/>
-          <p:nvPr/>
-        </p:nvSpPr>
-        <p:spPr>
-          <a:xfrm>
-            <a:off x="1097280" y="2029968"/>
-            <a:ext cx="10362895" cy="402336"/>
-          </a:xfrm>
-          <a:prstGeom prst="rect">
-            <a:avLst/>
-          </a:prstGeom>
-          <a:noFill/>
-        </p:spPr>
-        <p:txBody>
-          <a:bodyPr wrap="square" anchor="ctr"/>
-          <a:lstStyle/>
-          <a:p>
-            <a:r>
-              <a:rPr sz="1500" b="0" i="0">
+              <a:t>–   </a:t>
+            </a:r>
+            <a:r>
+              <a:rPr sz="2000" b="1" i="0">
                 <a:solidFill>
                   <a:srgbClr val="333333"/>
                 </a:solidFill>
                 <a:latin typeface="Calibri"/>
               </a:rPr>
-              <a:t>Si borro este requisito de la lista, VetCare deja de resolver alguno de los tres dolores de Huellitas o solamente queda menos vistoso?</a:t>
-            </a:r>
-          </a:p>
-        </p:txBody>
-      </p:sp>
-      <p:sp>
-        <p:nvSpPr>
-          <p:cNvPr id="13" name="Rounded Rectangle 12"/>
-          <p:cNvSpPr/>
-          <p:nvPr/>
-        </p:nvSpPr>
-        <p:spPr>
-          <a:xfrm>
-            <a:off x="457200" y="2615184"/>
-            <a:ext cx="11277295" cy="566928"/>
-          </a:xfrm>
-          <a:prstGeom prst="roundRect">
-            <a:avLst>
-              <a:gd name="adj" fmla="val 12000"/>
-            </a:avLst>
-          </a:prstGeom>
-          <a:solidFill>
-            <a:srgbClr val="F2F2F2"/>
-          </a:solidFill>
-          <a:ln>
-            <a:noFill/>
-          </a:ln>
-        </p:spPr>
-        <p:style>
-          <a:lnRef idx="1">
-            <a:schemeClr val="accent1"/>
-          </a:lnRef>
-          <a:fillRef idx="3">
-            <a:schemeClr val="accent1"/>
-          </a:fillRef>
-          <a:effectRef idx="2">
-            <a:schemeClr val="accent1"/>
-          </a:effectRef>
-          <a:fontRef idx="minor">
-            <a:schemeClr val="lt1"/>
-          </a:fontRef>
-        </p:style>
-        <p:txBody>
-          <a:bodyPr rtlCol="0" anchor="ctr"/>
-          <a:lstStyle/>
-          <a:p>
-            <a:pPr algn="ctr"/>
-          </a:p>
-        </p:txBody>
-      </p:sp>
-      <p:sp>
-        <p:nvSpPr>
-          <p:cNvPr id="14" name="Rectangle 13"/>
-          <p:cNvSpPr/>
-          <p:nvPr/>
-        </p:nvSpPr>
-        <p:spPr>
-          <a:xfrm>
-            <a:off x="640080" y="2761488"/>
-            <a:ext cx="274320" cy="274320"/>
-          </a:xfrm>
-          <a:prstGeom prst="rect">
-            <a:avLst/>
-          </a:prstGeom>
-          <a:solidFill>
-            <a:srgbClr val="FFFFFF"/>
-          </a:solidFill>
-          <a:ln>
-            <a:solidFill>
-              <a:srgbClr val="333333"/>
-            </a:solidFill>
-          </a:ln>
-        </p:spPr>
-        <p:style>
-          <a:lnRef idx="1">
-            <a:schemeClr val="accent1"/>
-          </a:lnRef>
-          <a:fillRef idx="3">
-            <a:schemeClr val="accent1"/>
-          </a:fillRef>
-          <a:effectRef idx="2">
-            <a:schemeClr val="accent1"/>
-          </a:effectRef>
-          <a:fontRef idx="minor">
-            <a:schemeClr val="lt1"/>
-          </a:fontRef>
-        </p:style>
-        <p:txBody>
-          <a:bodyPr rtlCol="0" anchor="ctr"/>
-          <a:lstStyle/>
-          <a:p>
-            <a:pPr algn="ctr"/>
-          </a:p>
-        </p:txBody>
-      </p:sp>
-      <p:sp>
-        <p:nvSpPr>
-          <p:cNvPr id="15" name="Rectangle 14"/>
-          <p:cNvSpPr/>
-          <p:nvPr/>
-        </p:nvSpPr>
-        <p:spPr>
-          <a:xfrm>
-            <a:off x="640080" y="2761488"/>
-            <a:ext cx="73152" cy="274320"/>
-          </a:xfrm>
-          <a:prstGeom prst="rect">
-            <a:avLst/>
-          </a:prstGeom>
-          <a:solidFill>
-            <a:srgbClr val="269CCB"/>
-          </a:solidFill>
-          <a:ln>
-            <a:noFill/>
-          </a:ln>
-        </p:spPr>
-        <p:style>
-          <a:lnRef idx="1">
-            <a:schemeClr val="accent1"/>
-          </a:lnRef>
-          <a:fillRef idx="3">
-            <a:schemeClr val="accent1"/>
-          </a:fillRef>
-          <a:effectRef idx="2">
-            <a:schemeClr val="accent1"/>
-          </a:effectRef>
-          <a:fontRef idx="minor">
-            <a:schemeClr val="lt1"/>
-          </a:fontRef>
-        </p:style>
-        <p:txBody>
-          <a:bodyPr rtlCol="0" anchor="ctr"/>
-          <a:lstStyle/>
-          <a:p>
-            <a:pPr algn="ctr"/>
-          </a:p>
-        </p:txBody>
-      </p:sp>
-      <p:sp>
-        <p:nvSpPr>
-          <p:cNvPr id="16" name="TextBox 15"/>
-          <p:cNvSpPr txBox="1"/>
-          <p:nvPr/>
-        </p:nvSpPr>
-        <p:spPr>
-          <a:xfrm>
-            <a:off x="1097280" y="2706624"/>
-            <a:ext cx="10362895" cy="402336"/>
-          </a:xfrm>
-          <a:prstGeom prst="rect">
-            <a:avLst/>
-          </a:prstGeom>
-          <a:noFill/>
-        </p:spPr>
-        <p:txBody>
-          <a:bodyPr wrap="square" anchor="ctr"/>
-          <a:lstStyle/>
-          <a:p>
-            <a:r>
-              <a:rPr sz="1500" b="0" i="0">
+              <a:t>Por que importa al PI:</a:t>
+            </a:r>
+            <a:r>
+              <a:rPr sz="2000" b="0" i="0">
                 <a:solidFill>
                   <a:srgbClr val="333333"/>
                 </a:solidFill>
                 <a:latin typeface="Calibri"/>
               </a:rPr>
-              <a:t>Esta frase describe una sola accion de un solo actor, o estoy escondiendo dos o tres requisitos detras de una y?</a:t>
-            </a:r>
-          </a:p>
-        </p:txBody>
-      </p:sp>
-      <p:sp>
-        <p:nvSpPr>
-          <p:cNvPr id="17" name="TextBox 16"/>
+              <a:t> este catalogo es el contrato del Proyecto Integrador; todo lo que se dibuje en las clases siguientes (casos de uso, clases, mockups, diccionario de datos) debe poder rastrearse hasta un requisito de esta lista.</a:t>
+            </a:r>
+          </a:p>
+          <a:p>
+            <a:pPr>
+              <a:spcAft>
+                <a:spcPts val="800"/>
+              </a:spcAft>
+            </a:pPr>
+            <a:r>
+              <a:rPr sz="2000" b="0" i="0">
+                <a:solidFill>
+                  <a:srgbClr val="333333"/>
+                </a:solidFill>
+                <a:latin typeface="Calibri"/>
+              </a:rPr>
+              <a:t>–   Si un requisito no queda hoy en el documento, sencillamente no existe para VetCare: no se disena, no se dibuja y no se programa en Programacion II.</a:t>
+            </a:r>
+          </a:p>
+          <a:p>
+            <a:pPr>
+              <a:spcAft>
+                <a:spcPts val="800"/>
+              </a:spcAft>
+            </a:pPr>
+            <a:r>
+              <a:rPr sz="2000" b="0" i="0">
+                <a:solidFill>
+                  <a:srgbClr val="333333"/>
+                </a:solidFill>
+                <a:latin typeface="Calibri"/>
+              </a:rPr>
+              <a:t>–   Es tambien la primera entrega que se defiende hablando: usted debe poder explicarle al Dr. Ramirez, en dos minutos, que se le va a construir y que no.</a:t>
+            </a:r>
+          </a:p>
+        </p:txBody>
+      </p:sp>
+      <p:sp>
+        <p:nvSpPr>
+          <p:cNvPr id="6" name="TextBox 5"/>
           <p:cNvSpPr txBox="1"/>
           <p:nvPr/>
         </p:nvSpPr>
@@ -7444,7 +6351,7 @@
                 </a:solidFill>
                 <a:latin typeface="Calibri"/>
               </a:rPr>
-              <a:t>Criterios de exito / entregable</a:t>
+              <a:t>Taller PI — punto de partida</a:t>
             </a:r>
           </a:p>
         </p:txBody>
@@ -7483,25 +6390,7 @@
                 </a:solidFill>
                 <a:latin typeface="Calibri"/>
               </a:rPr>
-              <a:t>–   </a:t>
-            </a:r>
-            <a:r>
-              <a:rPr sz="2000" b="1" i="0">
-                <a:solidFill>
-                  <a:srgbClr val="333333"/>
-                </a:solidFill>
-                <a:latin typeface="Calibri"/>
-              </a:rPr>
-              <a:t>Entregable:</a:t>
-            </a:r>
-            <a:r>
-              <a:rPr sz="2000" b="0" i="0">
-                <a:solidFill>
-                  <a:srgbClr val="333333"/>
-                </a:solidFill>
-                <a:latin typeface="Calibri"/>
-              </a:rPr>
-              <a:t> Documento de requisitos de VetCare en PDF, con minimo 8 RF, 4 RNF cuantificados, priorizacion MoSCoW y matriz de trazabilidad, subido a la plataforma del curso.</a:t>
+              <a:t>–   Hoy solo existe la transcripcion de la entrevista al Dr. Ramirez: cinco frases sueltas, dichas en lenguaje de veterinario y no de analista.</a:t>
             </a:r>
           </a:p>
           <a:p>
@@ -7517,25 +6406,7 @@
                 </a:solidFill>
                 <a:latin typeface="Calibri"/>
               </a:rPr>
-              <a:t>–   </a:t>
-            </a:r>
-            <a:r>
-              <a:rPr sz="2000" b="1" i="0">
-                <a:solidFill>
-                  <a:srgbClr val="333333"/>
-                </a:solidFill>
-                <a:latin typeface="Calibri"/>
-              </a:rPr>
-              <a:t>Exito:</a:t>
-            </a:r>
-            <a:r>
-              <a:rPr sz="2000" b="0" i="0">
-                <a:solidFill>
-                  <a:srgbClr val="333333"/>
-                </a:solidFill>
-                <a:latin typeface="Calibri"/>
-              </a:rPr>
-              <a:t> El documento tiene minimo 8 RF y 4 RNF, todos con ID unico, actor explicito y redaccion en plantilla.</a:t>
+              <a:t>–   La clinica Huellitas sigue en papel: fichas que se extravian, busquedas de historial que toman varios minutos con el paciente esperando y cero metricas mensuales.</a:t>
             </a:r>
           </a:p>
           <a:p>
@@ -7551,127 +6422,7 @@
                 </a:solidFill>
                 <a:latin typeface="Calibri"/>
               </a:rPr>
-              <a:t>–   </a:t>
-            </a:r>
-            <a:r>
-              <a:rPr sz="2000" b="1" i="0">
-                <a:solidFill>
-                  <a:srgbClr val="333333"/>
-                </a:solidFill>
-                <a:latin typeface="Calibri"/>
-              </a:rPr>
-              <a:t>Exito:</a:t>
-            </a:r>
-            <a:r>
-              <a:rPr sz="2000" b="0" i="0">
-                <a:solidFill>
-                  <a:srgbClr val="333333"/>
-                </a:solidFill>
-                <a:latin typeface="Calibri"/>
-              </a:rPr>
-              <a:t> Cada RNF trae al menos un valor medible (segundos, cantidad, frecuencia o porcentaje) y su forma de verificacion.</a:t>
-            </a:r>
-          </a:p>
-          <a:p>
-            <a:pPr>
-              <a:spcAft>
-                <a:spcPts val="800"/>
-              </a:spcAft>
-            </a:pPr>
-            <a:r>
-              <a:rPr sz="2000" b="0" i="0">
-                <a:solidFill>
-                  <a:srgbClr val="333333"/>
-                </a:solidFill>
-                <a:latin typeface="Calibri"/>
-              </a:rPr>
-              <a:t>–   </a:t>
-            </a:r>
-            <a:r>
-              <a:rPr sz="2000" b="1" i="0">
-                <a:solidFill>
-                  <a:srgbClr val="333333"/>
-                </a:solidFill>
-                <a:latin typeface="Calibri"/>
-              </a:rPr>
-              <a:t>Exito:</a:t>
-            </a:r>
-            <a:r>
-              <a:rPr sz="2000" b="0" i="0">
-                <a:solidFill>
-                  <a:srgbClr val="333333"/>
-                </a:solidFill>
-                <a:latin typeface="Calibri"/>
-              </a:rPr>
-              <a:t> Ningun requisito usa las palabras rapido, amigable, facil, intuitivo, robusto u optimo sin cuantificarlas.</a:t>
-            </a:r>
-          </a:p>
-          <a:p>
-            <a:pPr>
-              <a:spcAft>
-                <a:spcPts val="800"/>
-              </a:spcAft>
-            </a:pPr>
-            <a:r>
-              <a:rPr sz="2000" b="0" i="0">
-                <a:solidFill>
-                  <a:srgbClr val="333333"/>
-                </a:solidFill>
-                <a:latin typeface="Calibri"/>
-              </a:rPr>
-              <a:t>–   </a:t>
-            </a:r>
-            <a:r>
-              <a:rPr sz="2000" b="1" i="0">
-                <a:solidFill>
-                  <a:srgbClr val="333333"/>
-                </a:solidFill>
-                <a:latin typeface="Calibri"/>
-              </a:rPr>
-              <a:t>Exito:</a:t>
-            </a:r>
-            <a:r>
-              <a:rPr sz="2000" b="0" i="0">
-                <a:solidFill>
-                  <a:srgbClr val="333333"/>
-                </a:solidFill>
-                <a:latin typeface="Calibri"/>
-              </a:rPr>
-              <a:t> La matriz de trazabilidad conecta las cinco frases de la entrevista con al menos un requisito cada una, y ningun requisito queda huerfano de origen.</a:t>
-            </a:r>
-          </a:p>
-          <a:p>
-            <a:pPr>
-              <a:spcAft>
-                <a:spcPts val="800"/>
-              </a:spcAft>
-            </a:pPr>
-            <a:r>
-              <a:rPr sz="2000" b="0" i="0">
-                <a:solidFill>
-                  <a:srgbClr val="333333"/>
-                </a:solidFill>
-                <a:latin typeface="Calibri"/>
-              </a:rPr>
-              <a:t>–   </a:t>
-            </a:r>
-            <a:r>
-              <a:rPr sz="2000" b="1" i="0">
-                <a:solidFill>
-                  <a:srgbClr val="333333"/>
-                </a:solidFill>
-                <a:latin typeface="Calibri"/>
-              </a:rPr>
-              <a:t>Entrega en la plataforma del curso</a:t>
-            </a:r>
-            <a:r>
-              <a:rPr sz="2000" b="0" i="0">
-                <a:solidFill>
-                  <a:srgbClr val="333333"/>
-                </a:solidFill>
-                <a:latin typeface="Calibri"/>
-              </a:rPr>
-              <a:t> — en la fecha que indique el docente.</a:t>
+              <a:t>–   No hay documento de requisitos, no hay prioridades acordadas y nadie sabe todavia que queda dentro y que queda fuera de la primera version de VetCare.</a:t>
             </a:r>
           </a:p>
         </p:txBody>
@@ -7852,7 +6603,7 @@
                 </a:solidFill>
                 <a:latin typeface="Calibri"/>
               </a:rPr>
-              <a:t>Para el PI esta semana</a:t>
+              <a:t>Taller PI — pasos guiados</a:t>
             </a:r>
           </a:p>
         </p:txBody>
@@ -7865,8 +6616,163 @@
         </p:nvSpPr>
         <p:spPr>
           <a:xfrm>
-            <a:off x="457200" y="1261872"/>
-            <a:ext cx="11277295" cy="1051560"/>
+            <a:off x="457200" y="1234440"/>
+            <a:ext cx="11277295" cy="950976"/>
+          </a:xfrm>
+          <a:prstGeom prst="roundRect">
+            <a:avLst>
+              <a:gd name="adj" fmla="val 12000"/>
+            </a:avLst>
+          </a:prstGeom>
+          <a:solidFill>
+            <a:srgbClr val="F2F2F2"/>
+          </a:solidFill>
+          <a:ln>
+            <a:noFill/>
+          </a:ln>
+        </p:spPr>
+        <p:style>
+          <a:lnRef idx="1">
+            <a:schemeClr val="accent1"/>
+          </a:lnRef>
+          <a:fillRef idx="3">
+            <a:schemeClr val="accent1"/>
+          </a:fillRef>
+          <a:effectRef idx="2">
+            <a:schemeClr val="accent1"/>
+          </a:effectRef>
+          <a:fontRef idx="minor">
+            <a:schemeClr val="lt1"/>
+          </a:fontRef>
+        </p:style>
+        <p:txBody>
+          <a:bodyPr rtlCol="0" anchor="ctr"/>
+          <a:lstStyle/>
+          <a:p>
+            <a:pPr algn="ctr"/>
+          </a:p>
+        </p:txBody>
+      </p:sp>
+      <p:sp>
+        <p:nvSpPr>
+          <p:cNvPr id="6" name="Rounded Rectangle 5"/>
+          <p:cNvSpPr/>
+          <p:nvPr/>
+        </p:nvSpPr>
+        <p:spPr>
+          <a:xfrm>
+            <a:off x="594360" y="1490472"/>
+            <a:ext cx="438912" cy="438912"/>
+          </a:xfrm>
+          <a:prstGeom prst="roundRect">
+            <a:avLst>
+              <a:gd name="adj" fmla="val 12000"/>
+            </a:avLst>
+          </a:prstGeom>
+          <a:solidFill>
+            <a:srgbClr val="095292"/>
+          </a:solidFill>
+          <a:ln>
+            <a:noFill/>
+          </a:ln>
+        </p:spPr>
+        <p:style>
+          <a:lnRef idx="1">
+            <a:schemeClr val="accent1"/>
+          </a:lnRef>
+          <a:fillRef idx="3">
+            <a:schemeClr val="accent1"/>
+          </a:fillRef>
+          <a:effectRef idx="2">
+            <a:schemeClr val="accent1"/>
+          </a:effectRef>
+          <a:fontRef idx="minor">
+            <a:schemeClr val="lt1"/>
+          </a:fontRef>
+        </p:style>
+        <p:txBody>
+          <a:bodyPr rtlCol="0" anchor="ctr"/>
+          <a:lstStyle/>
+          <a:p>
+            <a:pPr algn="ctr"/>
+          </a:p>
+        </p:txBody>
+      </p:sp>
+      <p:sp>
+        <p:nvSpPr>
+          <p:cNvPr id="7" name="TextBox 6"/>
+          <p:cNvSpPr txBox="1"/>
+          <p:nvPr/>
+        </p:nvSpPr>
+        <p:spPr>
+          <a:xfrm>
+            <a:off x="594360" y="1490472"/>
+            <a:ext cx="438912" cy="438912"/>
+          </a:xfrm>
+          <a:prstGeom prst="rect">
+            <a:avLst/>
+          </a:prstGeom>
+          <a:noFill/>
+        </p:spPr>
+        <p:txBody>
+          <a:bodyPr wrap="square" anchor="ctr"/>
+          <a:lstStyle/>
+          <a:p>
+            <a:pPr algn="ctr"/>
+            <a:r>
+              <a:rPr sz="1600" b="1" i="0">
+                <a:solidFill>
+                  <a:srgbClr val="FFFFFF"/>
+                </a:solidFill>
+                <a:latin typeface="Calibri"/>
+              </a:rPr>
+              <a:t>1</a:t>
+            </a:r>
+          </a:p>
+        </p:txBody>
+      </p:sp>
+      <p:sp>
+        <p:nvSpPr>
+          <p:cNvPr id="8" name="TextBox 7"/>
+          <p:cNvSpPr txBox="1"/>
+          <p:nvPr/>
+        </p:nvSpPr>
+        <p:spPr>
+          <a:xfrm>
+            <a:off x="1188720" y="1325880"/>
+            <a:ext cx="10271455" cy="786384"/>
+          </a:xfrm>
+          <a:prstGeom prst="rect">
+            <a:avLst/>
+          </a:prstGeom>
+          <a:noFill/>
+        </p:spPr>
+        <p:txBody>
+          <a:bodyPr wrap="square" anchor="ctr"/>
+          <a:lstStyle/>
+          <a:p>
+            <a:r>
+              <a:rPr sz="1500" b="1" i="0">
+                <a:solidFill>
+                  <a:srgbClr val="095292"/>
+                </a:solidFill>
+                <a:latin typeface="Calibri"/>
+              </a:rPr>
+              <a:t>Paso 1: copie en la plantilla las cinco frases crudas de la entrevista al Dr. Ramirez y marque cada una como NECESIDAD, anotando al lado quien la dijo y en que contexto; esa columna es el origen y no se puede dejar vacia.</a:t>
+            </a:r>
+          </a:p>
+        </p:txBody>
+      </p:sp>
+      <p:sp>
+        <p:nvSpPr>
+          <p:cNvPr id="9" name="Rounded Rectangle 8"/>
+          <p:cNvSpPr/>
+          <p:nvPr/>
+        </p:nvSpPr>
+        <p:spPr>
+          <a:xfrm>
+            <a:off x="457200" y="2276856"/>
+            <a:ext cx="11277295" cy="950976"/>
           </a:xfrm>
           <a:prstGeom prst="roundRect">
             <a:avLst>
@@ -7904,20 +6810,22 @@
       </p:sp>
       <p:sp>
         <p:nvSpPr>
-          <p:cNvPr id="6" name="Rectangle 5"/>
+          <p:cNvPr id="10" name="Rounded Rectangle 9"/>
           <p:cNvSpPr/>
           <p:nvPr/>
         </p:nvSpPr>
         <p:spPr>
           <a:xfrm>
-            <a:off x="457200" y="1261872"/>
-            <a:ext cx="128016" cy="1051560"/>
-          </a:xfrm>
-          <a:prstGeom prst="rect">
-            <a:avLst/>
+            <a:off x="594360" y="2532888"/>
+            <a:ext cx="438912" cy="438912"/>
+          </a:xfrm>
+          <a:prstGeom prst="roundRect">
+            <a:avLst>
+              <a:gd name="adj" fmla="val 12000"/>
+            </a:avLst>
           </a:prstGeom>
           <a:solidFill>
-            <a:srgbClr val="269CCB"/>
+            <a:srgbClr val="095292"/>
           </a:solidFill>
           <a:ln>
             <a:noFill/>
@@ -7947,14 +6855,14 @@
       </p:sp>
       <p:sp>
         <p:nvSpPr>
-          <p:cNvPr id="7" name="TextBox 6"/>
+          <p:cNvPr id="11" name="TextBox 10"/>
           <p:cNvSpPr txBox="1"/>
           <p:nvPr/>
         </p:nvSpPr>
         <p:spPr>
           <a:xfrm>
-            <a:off x="777240" y="1399031"/>
-            <a:ext cx="10774375" cy="822959"/>
+            <a:off x="594360" y="2532888"/>
+            <a:ext cx="438912" cy="438912"/>
           </a:xfrm>
           <a:prstGeom prst="rect">
             <a:avLst/>
@@ -7962,49 +6870,64 @@
           <a:noFill/>
         </p:spPr>
         <p:txBody>
-          <a:bodyPr wrap="square">
-            <a:spAutoFit/>
-          </a:bodyPr>
-          <a:lstStyle/>
-          <a:p>
-            <a:r>
-              <a:rPr sz="1200" b="1" i="0">
-                <a:solidFill>
-                  <a:srgbClr val="269CCB"/>
-                </a:solidFill>
-                <a:latin typeface="Calibri"/>
-              </a:rPr>
-              <a:t>Info</a:t>
-            </a:r>
-          </a:p>
-          <a:p>
-            <a:pPr>
-              <a:spcBef>
-                <a:spcPts val="400"/>
-              </a:spcBef>
-            </a:pPr>
-            <a:r>
-              <a:rPr sz="1400" b="0" i="0">
-                <a:solidFill>
-                  <a:srgbClr val="333333"/>
-                </a:solidFill>
-                <a:latin typeface="Calibri"/>
-              </a:rPr>
-              <a:t>Hito: Queda listo el catalogo de requisitos de VetCare: 8 RF y 4 RNF con criterio de verificacion y prioridad MoSCoW.</a:t>
-            </a:r>
-          </a:p>
-        </p:txBody>
-      </p:sp>
-      <p:sp>
-        <p:nvSpPr>
-          <p:cNvPr id="8" name="Rounded Rectangle 7"/>
+          <a:bodyPr wrap="square" anchor="ctr"/>
+          <a:lstStyle/>
+          <a:p>
+            <a:pPr algn="ctr"/>
+            <a:r>
+              <a:rPr sz="1600" b="1" i="0">
+                <a:solidFill>
+                  <a:srgbClr val="FFFFFF"/>
+                </a:solidFill>
+                <a:latin typeface="Calibri"/>
+              </a:rPr>
+              <a:t>2</a:t>
+            </a:r>
+          </a:p>
+        </p:txBody>
+      </p:sp>
+      <p:sp>
+        <p:nvSpPr>
+          <p:cNvPr id="12" name="TextBox 11"/>
+          <p:cNvSpPr txBox="1"/>
+          <p:nvPr/>
+        </p:nvSpPr>
+        <p:spPr>
+          <a:xfrm>
+            <a:off x="1188720" y="2368296"/>
+            <a:ext cx="10271455" cy="786384"/>
+          </a:xfrm>
+          <a:prstGeom prst="rect">
+            <a:avLst/>
+          </a:prstGeom>
+          <a:noFill/>
+        </p:spPr>
+        <p:txBody>
+          <a:bodyPr wrap="square" anchor="ctr"/>
+          <a:lstStyle/>
+          <a:p>
+            <a:r>
+              <a:rPr sz="1400" b="1" i="0">
+                <a:solidFill>
+                  <a:srgbClr val="095292"/>
+                </a:solidFill>
+                <a:latin typeface="Calibri"/>
+              </a:rPr>
+              <a:t>Paso 2: traduzca las necesidades a requisitos funcionales usando la plantilla el sistema debe permitir a &lt;actor&gt; &lt;accion&gt; &lt;objeto&gt;, hasta llegar a minimo 8 RF numerados de RF-01 a RF-08; ningun RF puede contener la palabra y uniendo dos capacidades distintas.</a:t>
+            </a:r>
+          </a:p>
+        </p:txBody>
+      </p:sp>
+      <p:sp>
+        <p:nvSpPr>
+          <p:cNvPr id="13" name="Rounded Rectangle 12"/>
           <p:cNvSpPr/>
           <p:nvPr/>
         </p:nvSpPr>
         <p:spPr>
           <a:xfrm>
-            <a:off x="457200" y="2478024"/>
-            <a:ext cx="11277295" cy="1051560"/>
+            <a:off x="457200" y="3319272"/>
+            <a:ext cx="11277295" cy="950976"/>
           </a:xfrm>
           <a:prstGeom prst="roundRect">
             <a:avLst>
@@ -8012,7 +6935,7 @@
             </a:avLst>
           </a:prstGeom>
           <a:solidFill>
-            <a:srgbClr val="FFF8E1"/>
+            <a:srgbClr val="F2F2F2"/>
           </a:solidFill>
           <a:ln>
             <a:noFill/>
@@ -8042,20 +6965,22 @@
       </p:sp>
       <p:sp>
         <p:nvSpPr>
-          <p:cNvPr id="9" name="Rectangle 8"/>
+          <p:cNvPr id="14" name="Rounded Rectangle 13"/>
           <p:cNvSpPr/>
           <p:nvPr/>
         </p:nvSpPr>
         <p:spPr>
           <a:xfrm>
-            <a:off x="457200" y="2478024"/>
-            <a:ext cx="128016" cy="1051560"/>
-          </a:xfrm>
-          <a:prstGeom prst="rect">
-            <a:avLst/>
+            <a:off x="594360" y="3575304"/>
+            <a:ext cx="438912" cy="438912"/>
+          </a:xfrm>
+          <a:prstGeom prst="roundRect">
+            <a:avLst>
+              <a:gd name="adj" fmla="val 12000"/>
+            </a:avLst>
           </a:prstGeom>
           <a:solidFill>
-            <a:srgbClr val="FFD000"/>
+            <a:srgbClr val="095292"/>
           </a:solidFill>
           <a:ln>
             <a:noFill/>
@@ -8085,14 +7010,14 @@
       </p:sp>
       <p:sp>
         <p:nvSpPr>
-          <p:cNvPr id="10" name="TextBox 9"/>
+          <p:cNvPr id="15" name="TextBox 14"/>
           <p:cNvSpPr txBox="1"/>
           <p:nvPr/>
         </p:nvSpPr>
         <p:spPr>
           <a:xfrm>
-            <a:off x="777240" y="2615184"/>
-            <a:ext cx="10774375" cy="822959"/>
+            <a:off x="594360" y="3575304"/>
+            <a:ext cx="438912" cy="438912"/>
           </a:xfrm>
           <a:prstGeom prst="rect">
             <a:avLst/>
@@ -8100,49 +7025,64 @@
           <a:noFill/>
         </p:spPr>
         <p:txBody>
-          <a:bodyPr wrap="square">
-            <a:spAutoFit/>
-          </a:bodyPr>
-          <a:lstStyle/>
-          <a:p>
-            <a:r>
-              <a:rPr sz="1200" b="1" i="0">
-                <a:solidFill>
-                  <a:srgbClr val="FFD000"/>
-                </a:solidFill>
-                <a:latin typeface="Calibri"/>
-              </a:rPr>
-              <a:t>Aclaración</a:t>
-            </a:r>
-          </a:p>
-          <a:p>
-            <a:pPr>
-              <a:spcBef>
-                <a:spcPts val="400"/>
-              </a:spcBef>
-            </a:pPr>
-            <a:r>
-              <a:rPr sz="1400" b="0" i="0">
-                <a:solidFill>
-                  <a:srgbClr val="333333"/>
-                </a:solidFill>
-                <a:latin typeface="Calibri"/>
-              </a:rPr>
-              <a:t>Enunciado completo: Clases/Proyecto Integrador/ (VetCare).</a:t>
-            </a:r>
-          </a:p>
-        </p:txBody>
-      </p:sp>
-      <p:sp>
-        <p:nvSpPr>
-          <p:cNvPr id="11" name="Rounded Rectangle 10"/>
+          <a:bodyPr wrap="square" anchor="ctr"/>
+          <a:lstStyle/>
+          <a:p>
+            <a:pPr algn="ctr"/>
+            <a:r>
+              <a:rPr sz="1600" b="1" i="0">
+                <a:solidFill>
+                  <a:srgbClr val="FFFFFF"/>
+                </a:solidFill>
+                <a:latin typeface="Calibri"/>
+              </a:rPr>
+              <a:t>3</a:t>
+            </a:r>
+          </a:p>
+        </p:txBody>
+      </p:sp>
+      <p:sp>
+        <p:nvSpPr>
+          <p:cNvPr id="16" name="TextBox 15"/>
+          <p:cNvSpPr txBox="1"/>
+          <p:nvPr/>
+        </p:nvSpPr>
+        <p:spPr>
+          <a:xfrm>
+            <a:off x="1188720" y="3410712"/>
+            <a:ext cx="10271455" cy="786384"/>
+          </a:xfrm>
+          <a:prstGeom prst="rect">
+            <a:avLst/>
+          </a:prstGeom>
+          <a:noFill/>
+        </p:spPr>
+        <p:txBody>
+          <a:bodyPr wrap="square" anchor="ctr"/>
+          <a:lstStyle/>
+          <a:p>
+            <a:r>
+              <a:rPr sz="1500" b="1" i="0">
+                <a:solidFill>
+                  <a:srgbClr val="095292"/>
+                </a:solidFill>
+                <a:latin typeface="Calibri"/>
+              </a:rPr>
+              <a:t>Paso 3: derive 4 RNF, uno por categoria (desempeno, control de acceso, usabilidad y respaldo), y escriba en cada uno al menos un numero: segundos, cantidad de registros, frecuencia o porcentaje.</a:t>
+            </a:r>
+          </a:p>
+        </p:txBody>
+      </p:sp>
+      <p:sp>
+        <p:nvSpPr>
+          <p:cNvPr id="17" name="Rounded Rectangle 16"/>
           <p:cNvSpPr/>
           <p:nvPr/>
         </p:nvSpPr>
         <p:spPr>
           <a:xfrm>
-            <a:off x="457200" y="3694176"/>
-            <a:ext cx="11277295" cy="1051560"/>
+            <a:off x="457200" y="4361688"/>
+            <a:ext cx="11277295" cy="950976"/>
           </a:xfrm>
           <a:prstGeom prst="roundRect">
             <a:avLst>
@@ -8150,7 +7090,7 @@
             </a:avLst>
           </a:prstGeom>
           <a:solidFill>
-            <a:srgbClr val="FBE4E4"/>
+            <a:srgbClr val="E8F4FA"/>
           </a:solidFill>
           <a:ln>
             <a:noFill/>
@@ -8180,20 +7120,22 @@
       </p:sp>
       <p:sp>
         <p:nvSpPr>
-          <p:cNvPr id="12" name="Rectangle 11"/>
+          <p:cNvPr id="18" name="Rounded Rectangle 17"/>
           <p:cNvSpPr/>
           <p:nvPr/>
         </p:nvSpPr>
         <p:spPr>
           <a:xfrm>
-            <a:off x="457200" y="3694176"/>
-            <a:ext cx="128016" cy="1051560"/>
-          </a:xfrm>
-          <a:prstGeom prst="rect">
-            <a:avLst/>
+            <a:off x="594360" y="4617720"/>
+            <a:ext cx="438912" cy="438912"/>
+          </a:xfrm>
+          <a:prstGeom prst="roundRect">
+            <a:avLst>
+              <a:gd name="adj" fmla="val 12000"/>
+            </a:avLst>
           </a:prstGeom>
           <a:solidFill>
-            <a:srgbClr val="A02030"/>
+            <a:srgbClr val="095292"/>
           </a:solidFill>
           <a:ln>
             <a:noFill/>
@@ -8223,14 +7165,14 @@
       </p:sp>
       <p:sp>
         <p:nvSpPr>
-          <p:cNvPr id="13" name="TextBox 12"/>
+          <p:cNvPr id="19" name="TextBox 18"/>
           <p:cNvSpPr txBox="1"/>
           <p:nvPr/>
         </p:nvSpPr>
         <p:spPr>
           <a:xfrm>
-            <a:off x="777240" y="3831336"/>
-            <a:ext cx="10774375" cy="822959"/>
+            <a:off x="594360" y="4617720"/>
+            <a:ext cx="438912" cy="438912"/>
           </a:xfrm>
           <a:prstGeom prst="rect">
             <a:avLst/>
@@ -8238,42 +7180,212 @@
           <a:noFill/>
         </p:spPr>
         <p:txBody>
-          <a:bodyPr wrap="square">
-            <a:spAutoFit/>
-          </a:bodyPr>
-          <a:lstStyle/>
-          <a:p>
-            <a:r>
-              <a:rPr sz="1200" b="1" i="0">
-                <a:solidFill>
-                  <a:srgbClr val="A02030"/>
-                </a:solidFill>
-                <a:latin typeface="Calibri"/>
-              </a:rPr>
-              <a:t>Atención</a:t>
-            </a:r>
-          </a:p>
-          <a:p>
-            <a:pPr>
-              <a:spcBef>
-                <a:spcPts val="400"/>
-              </a:spcBef>
-            </a:pPr>
-            <a:r>
-              <a:rPr sz="1400" b="0" i="0">
-                <a:solidFill>
-                  <a:srgbClr val="333333"/>
-                </a:solidFill>
-                <a:latin typeface="Calibri"/>
-              </a:rPr>
-              <a:t>Entrega del taller, si el docente lo asigna · en la fecha que indique el docente.</a:t>
-            </a:r>
-          </a:p>
-        </p:txBody>
-      </p:sp>
-      <p:sp>
-        <p:nvSpPr>
-          <p:cNvPr id="14" name="TextBox 13"/>
+          <a:bodyPr wrap="square" anchor="ctr"/>
+          <a:lstStyle/>
+          <a:p>
+            <a:pPr algn="ctr"/>
+            <a:r>
+              <a:rPr sz="1600" b="1" i="0">
+                <a:solidFill>
+                  <a:srgbClr val="FFFFFF"/>
+                </a:solidFill>
+                <a:latin typeface="Calibri"/>
+              </a:rPr>
+              <a:t>4</a:t>
+            </a:r>
+          </a:p>
+        </p:txBody>
+      </p:sp>
+      <p:sp>
+        <p:nvSpPr>
+          <p:cNvPr id="20" name="TextBox 19"/>
+          <p:cNvSpPr txBox="1"/>
+          <p:nvPr/>
+        </p:nvSpPr>
+        <p:spPr>
+          <a:xfrm>
+            <a:off x="1188720" y="4453128"/>
+            <a:ext cx="10271455" cy="786384"/>
+          </a:xfrm>
+          <a:prstGeom prst="rect">
+            <a:avLst/>
+          </a:prstGeom>
+          <a:noFill/>
+        </p:spPr>
+        <p:txBody>
+          <a:bodyPr wrap="square" anchor="ctr"/>
+          <a:lstStyle/>
+          <a:p>
+            <a:r>
+              <a:rPr sz="1500" b="1" i="0">
+                <a:solidFill>
+                  <a:srgbClr val="095292"/>
+                </a:solidFill>
+                <a:latin typeface="Calibri"/>
+              </a:rPr>
+              <a:t>Paso 4: asigne prioridad MoSCoW a los 12 requisitos, verifique que los Must no pasen de seis y justifique en una linea por que los dos Won't quedan fuera de esta version de VetCare.</a:t>
+            </a:r>
+          </a:p>
+        </p:txBody>
+      </p:sp>
+      <p:sp>
+        <p:nvSpPr>
+          <p:cNvPr id="21" name="Rounded Rectangle 20"/>
+          <p:cNvSpPr/>
+          <p:nvPr/>
+        </p:nvSpPr>
+        <p:spPr>
+          <a:xfrm>
+            <a:off x="457200" y="5404104"/>
+            <a:ext cx="11277295" cy="950976"/>
+          </a:xfrm>
+          <a:prstGeom prst="roundRect">
+            <a:avLst>
+              <a:gd name="adj" fmla="val 12000"/>
+            </a:avLst>
+          </a:prstGeom>
+          <a:solidFill>
+            <a:srgbClr val="F2F2F2"/>
+          </a:solidFill>
+          <a:ln>
+            <a:noFill/>
+          </a:ln>
+        </p:spPr>
+        <p:style>
+          <a:lnRef idx="1">
+            <a:schemeClr val="accent1"/>
+          </a:lnRef>
+          <a:fillRef idx="3">
+            <a:schemeClr val="accent1"/>
+          </a:fillRef>
+          <a:effectRef idx="2">
+            <a:schemeClr val="accent1"/>
+          </a:effectRef>
+          <a:fontRef idx="minor">
+            <a:schemeClr val="lt1"/>
+          </a:fontRef>
+        </p:style>
+        <p:txBody>
+          <a:bodyPr rtlCol="0" anchor="ctr"/>
+          <a:lstStyle/>
+          <a:p>
+            <a:pPr algn="ctr"/>
+          </a:p>
+        </p:txBody>
+      </p:sp>
+      <p:sp>
+        <p:nvSpPr>
+          <p:cNvPr id="22" name="Rounded Rectangle 21"/>
+          <p:cNvSpPr/>
+          <p:nvPr/>
+        </p:nvSpPr>
+        <p:spPr>
+          <a:xfrm>
+            <a:off x="594360" y="5660136"/>
+            <a:ext cx="438912" cy="438912"/>
+          </a:xfrm>
+          <a:prstGeom prst="roundRect">
+            <a:avLst>
+              <a:gd name="adj" fmla="val 12000"/>
+            </a:avLst>
+          </a:prstGeom>
+          <a:solidFill>
+            <a:srgbClr val="095292"/>
+          </a:solidFill>
+          <a:ln>
+            <a:noFill/>
+          </a:ln>
+        </p:spPr>
+        <p:style>
+          <a:lnRef idx="1">
+            <a:schemeClr val="accent1"/>
+          </a:lnRef>
+          <a:fillRef idx="3">
+            <a:schemeClr val="accent1"/>
+          </a:fillRef>
+          <a:effectRef idx="2">
+            <a:schemeClr val="accent1"/>
+          </a:effectRef>
+          <a:fontRef idx="minor">
+            <a:schemeClr val="lt1"/>
+          </a:fontRef>
+        </p:style>
+        <p:txBody>
+          <a:bodyPr rtlCol="0" anchor="ctr"/>
+          <a:lstStyle/>
+          <a:p>
+            <a:pPr algn="ctr"/>
+          </a:p>
+        </p:txBody>
+      </p:sp>
+      <p:sp>
+        <p:nvSpPr>
+          <p:cNvPr id="23" name="TextBox 22"/>
+          <p:cNvSpPr txBox="1"/>
+          <p:nvPr/>
+        </p:nvSpPr>
+        <p:spPr>
+          <a:xfrm>
+            <a:off x="594360" y="5660136"/>
+            <a:ext cx="438912" cy="438912"/>
+          </a:xfrm>
+          <a:prstGeom prst="rect">
+            <a:avLst/>
+          </a:prstGeom>
+          <a:noFill/>
+        </p:spPr>
+        <p:txBody>
+          <a:bodyPr wrap="square" anchor="ctr"/>
+          <a:lstStyle/>
+          <a:p>
+            <a:pPr algn="ctr"/>
+            <a:r>
+              <a:rPr sz="1600" b="1" i="0">
+                <a:solidFill>
+                  <a:srgbClr val="FFFFFF"/>
+                </a:solidFill>
+                <a:latin typeface="Calibri"/>
+              </a:rPr>
+              <a:t>5</a:t>
+            </a:r>
+          </a:p>
+        </p:txBody>
+      </p:sp>
+      <p:sp>
+        <p:nvSpPr>
+          <p:cNvPr id="24" name="TextBox 23"/>
+          <p:cNvSpPr txBox="1"/>
+          <p:nvPr/>
+        </p:nvSpPr>
+        <p:spPr>
+          <a:xfrm>
+            <a:off x="1188720" y="5495544"/>
+            <a:ext cx="10271455" cy="786384"/>
+          </a:xfrm>
+          <a:prstGeom prst="rect">
+            <a:avLst/>
+          </a:prstGeom>
+          <a:noFill/>
+        </p:spPr>
+        <p:txBody>
+          <a:bodyPr wrap="square" anchor="ctr"/>
+          <a:lstStyle/>
+          <a:p>
+            <a:r>
+              <a:rPr sz="1500" b="1" i="0">
+                <a:solidFill>
+                  <a:srgbClr val="095292"/>
+                </a:solidFill>
+                <a:latin typeface="Calibri"/>
+              </a:rPr>
+              <a:t>Paso 5: complete la matriz de trazabilidad con las columnas Necesidad, RF/RNF, Pantalla prevista y Prueba de aceptacion, exporte el documento a PDF y subalo a la plataforma del curso con el nombre RF-RNF-VetCare-&lt;sus apellidos&gt;.pdf.</a:t>
+            </a:r>
+          </a:p>
+        </p:txBody>
+      </p:sp>
+      <p:sp>
+        <p:nvSpPr>
+          <p:cNvPr id="25" name="TextBox 24"/>
           <p:cNvSpPr txBox="1"/>
           <p:nvPr/>
         </p:nvSpPr>
@@ -8341,7 +7453,217 @@
         <p:spPr>
           <a:xfrm>
             <a:off x="0" y="0"/>
-            <a:ext cx="12191695" cy="164592"/>
+            <a:ext cx="12191695" cy="960120"/>
+          </a:xfrm>
+          <a:prstGeom prst="rect">
+            <a:avLst/>
+          </a:prstGeom>
+          <a:solidFill>
+            <a:srgbClr val="095292"/>
+          </a:solidFill>
+          <a:ln>
+            <a:noFill/>
+          </a:ln>
+        </p:spPr>
+        <p:style>
+          <a:lnRef idx="1">
+            <a:schemeClr val="accent1"/>
+          </a:lnRef>
+          <a:fillRef idx="3">
+            <a:schemeClr val="accent1"/>
+          </a:fillRef>
+          <a:effectRef idx="2">
+            <a:schemeClr val="accent1"/>
+          </a:effectRef>
+          <a:fontRef idx="minor">
+            <a:schemeClr val="lt1"/>
+          </a:fontRef>
+        </p:style>
+        <p:txBody>
+          <a:bodyPr rtlCol="0" anchor="ctr"/>
+          <a:lstStyle/>
+          <a:p>
+            <a:pPr algn="ctr"/>
+          </a:p>
+        </p:txBody>
+      </p:sp>
+      <p:sp>
+        <p:nvSpPr>
+          <p:cNvPr id="3" name="Rectangle 2"/>
+          <p:cNvSpPr/>
+          <p:nvPr/>
+        </p:nvSpPr>
+        <p:spPr>
+          <a:xfrm>
+            <a:off x="0" y="960120"/>
+            <a:ext cx="12191695" cy="41148"/>
+          </a:xfrm>
+          <a:prstGeom prst="rect">
+            <a:avLst/>
+          </a:prstGeom>
+          <a:solidFill>
+            <a:srgbClr val="FFD000"/>
+          </a:solidFill>
+          <a:ln>
+            <a:noFill/>
+          </a:ln>
+        </p:spPr>
+        <p:style>
+          <a:lnRef idx="1">
+            <a:schemeClr val="accent1"/>
+          </a:lnRef>
+          <a:fillRef idx="3">
+            <a:schemeClr val="accent1"/>
+          </a:fillRef>
+          <a:effectRef idx="2">
+            <a:schemeClr val="accent1"/>
+          </a:effectRef>
+          <a:fontRef idx="minor">
+            <a:schemeClr val="lt1"/>
+          </a:fontRef>
+        </p:style>
+        <p:txBody>
+          <a:bodyPr rtlCol="0" anchor="ctr"/>
+          <a:lstStyle/>
+          <a:p>
+            <a:pPr algn="ctr"/>
+          </a:p>
+        </p:txBody>
+      </p:sp>
+      <p:sp>
+        <p:nvSpPr>
+          <p:cNvPr id="4" name="TextBox 3"/>
+          <p:cNvSpPr txBox="1"/>
+          <p:nvPr/>
+        </p:nvSpPr>
+        <p:spPr>
+          <a:xfrm>
+            <a:off x="457200" y="164592"/>
+            <a:ext cx="11277295" cy="502920"/>
+          </a:xfrm>
+          <a:prstGeom prst="rect">
+            <a:avLst/>
+          </a:prstGeom>
+          <a:noFill/>
+        </p:spPr>
+        <p:txBody>
+          <a:bodyPr wrap="square">
+            <a:spAutoFit/>
+          </a:bodyPr>
+          <a:lstStyle/>
+          <a:p>
+            <a:r>
+              <a:rPr sz="2600" b="1" i="0">
+                <a:solidFill>
+                  <a:srgbClr val="FFFFFF"/>
+                </a:solidFill>
+                <a:latin typeface="Calibri"/>
+              </a:rPr>
+              <a:t>Antes de entregar — autochequeo</a:t>
+            </a:r>
+          </a:p>
+        </p:txBody>
+      </p:sp>
+      <p:sp>
+        <p:nvSpPr>
+          <p:cNvPr id="5" name="Rounded Rectangle 4"/>
+          <p:cNvSpPr/>
+          <p:nvPr/>
+        </p:nvSpPr>
+        <p:spPr>
+          <a:xfrm>
+            <a:off x="457200" y="1261872"/>
+            <a:ext cx="11277295" cy="566928"/>
+          </a:xfrm>
+          <a:prstGeom prst="roundRect">
+            <a:avLst>
+              <a:gd name="adj" fmla="val 12000"/>
+            </a:avLst>
+          </a:prstGeom>
+          <a:solidFill>
+            <a:srgbClr val="F2F2F2"/>
+          </a:solidFill>
+          <a:ln>
+            <a:noFill/>
+          </a:ln>
+        </p:spPr>
+        <p:style>
+          <a:lnRef idx="1">
+            <a:schemeClr val="accent1"/>
+          </a:lnRef>
+          <a:fillRef idx="3">
+            <a:schemeClr val="accent1"/>
+          </a:fillRef>
+          <a:effectRef idx="2">
+            <a:schemeClr val="accent1"/>
+          </a:effectRef>
+          <a:fontRef idx="minor">
+            <a:schemeClr val="lt1"/>
+          </a:fontRef>
+        </p:style>
+        <p:txBody>
+          <a:bodyPr rtlCol="0" anchor="ctr"/>
+          <a:lstStyle/>
+          <a:p>
+            <a:pPr algn="ctr"/>
+          </a:p>
+        </p:txBody>
+      </p:sp>
+      <p:sp>
+        <p:nvSpPr>
+          <p:cNvPr id="6" name="Rectangle 5"/>
+          <p:cNvSpPr/>
+          <p:nvPr/>
+        </p:nvSpPr>
+        <p:spPr>
+          <a:xfrm>
+            <a:off x="640080" y="1408175"/>
+            <a:ext cx="274320" cy="274320"/>
+          </a:xfrm>
+          <a:prstGeom prst="rect">
+            <a:avLst/>
+          </a:prstGeom>
+          <a:solidFill>
+            <a:srgbClr val="FFFFFF"/>
+          </a:solidFill>
+          <a:ln>
+            <a:solidFill>
+              <a:srgbClr val="333333"/>
+            </a:solidFill>
+          </a:ln>
+        </p:spPr>
+        <p:style>
+          <a:lnRef idx="1">
+            <a:schemeClr val="accent1"/>
+          </a:lnRef>
+          <a:fillRef idx="3">
+            <a:schemeClr val="accent1"/>
+          </a:fillRef>
+          <a:effectRef idx="2">
+            <a:schemeClr val="accent1"/>
+          </a:effectRef>
+          <a:fontRef idx="minor">
+            <a:schemeClr val="lt1"/>
+          </a:fontRef>
+        </p:style>
+        <p:txBody>
+          <a:bodyPr rtlCol="0" anchor="ctr"/>
+          <a:lstStyle/>
+          <a:p>
+            <a:pPr algn="ctr"/>
+          </a:p>
+        </p:txBody>
+      </p:sp>
+      <p:sp>
+        <p:nvSpPr>
+          <p:cNvPr id="7" name="Rectangle 6"/>
+          <p:cNvSpPr/>
+          <p:nvPr/>
+        </p:nvSpPr>
+        <p:spPr>
+          <a:xfrm>
+            <a:off x="640080" y="1408175"/>
+            <a:ext cx="73152" cy="274320"/>
           </a:xfrm>
           <a:prstGeom prst="rect">
             <a:avLst/>
@@ -8375,40 +7697,16 @@
           </a:p>
         </p:txBody>
       </p:sp>
-      <p:pic>
-        <p:nvPicPr>
-          <p:cNvPr id="3" name="Picture 2" descr="logo_uniajc_color.png"/>
-          <p:cNvPicPr>
-            <a:picLocks noChangeAspect="1"/>
-          </p:cNvPicPr>
-          <p:nvPr/>
-        </p:nvPicPr>
-        <p:blipFill>
-          <a:blip r:embed="rId2"/>
-          <a:stretch>
-            <a:fillRect/>
-          </a:stretch>
-        </p:blipFill>
-        <p:spPr>
-          <a:xfrm>
-            <a:off x="10271455" y="5998464"/>
-            <a:ext cx="1463040" cy="643233"/>
-          </a:xfrm>
-          <a:prstGeom prst="rect">
-            <a:avLst/>
-          </a:prstGeom>
-        </p:spPr>
-      </p:pic>
-      <p:sp>
-        <p:nvSpPr>
-          <p:cNvPr id="4" name="TextBox 3"/>
+      <p:sp>
+        <p:nvSpPr>
+          <p:cNvPr id="8" name="TextBox 7"/>
           <p:cNvSpPr txBox="1"/>
           <p:nvPr/>
         </p:nvSpPr>
         <p:spPr>
           <a:xfrm>
-            <a:off x="457200" y="1737360"/>
-            <a:ext cx="11277295" cy="1097280"/>
+            <a:off x="1097280" y="1353312"/>
+            <a:ext cx="10362895" cy="402336"/>
           </a:xfrm>
           <a:prstGeom prst="rect">
             <a:avLst/>
@@ -8419,29 +7717,358 @@
           <a:bodyPr wrap="square" anchor="ctr"/>
           <a:lstStyle/>
           <a:p>
+            <a:r>
+              <a:rPr sz="1500" b="0" i="0">
+                <a:solidFill>
+                  <a:srgbClr val="333333"/>
+                </a:solidFill>
+                <a:latin typeface="Calibri"/>
+              </a:rPr>
+              <a:t>Con que prueba concreta, hecha en menos de dos minutos delante del Dr. Ramirez, demostraria que este requisito quedo cumplido?</a:t>
+            </a:r>
+          </a:p>
+        </p:txBody>
+      </p:sp>
+      <p:sp>
+        <p:nvSpPr>
+          <p:cNvPr id="9" name="Rounded Rectangle 8"/>
+          <p:cNvSpPr/>
+          <p:nvPr/>
+        </p:nvSpPr>
+        <p:spPr>
+          <a:xfrm>
+            <a:off x="457200" y="1938528"/>
+            <a:ext cx="11277295" cy="566928"/>
+          </a:xfrm>
+          <a:prstGeom prst="roundRect">
+            <a:avLst>
+              <a:gd name="adj" fmla="val 12000"/>
+            </a:avLst>
+          </a:prstGeom>
+          <a:solidFill>
+            <a:srgbClr val="F2F2F2"/>
+          </a:solidFill>
+          <a:ln>
+            <a:noFill/>
+          </a:ln>
+        </p:spPr>
+        <p:style>
+          <a:lnRef idx="1">
+            <a:schemeClr val="accent1"/>
+          </a:lnRef>
+          <a:fillRef idx="3">
+            <a:schemeClr val="accent1"/>
+          </a:fillRef>
+          <a:effectRef idx="2">
+            <a:schemeClr val="accent1"/>
+          </a:effectRef>
+          <a:fontRef idx="minor">
+            <a:schemeClr val="lt1"/>
+          </a:fontRef>
+        </p:style>
+        <p:txBody>
+          <a:bodyPr rtlCol="0" anchor="ctr"/>
+          <a:lstStyle/>
+          <a:p>
             <a:pPr algn="ctr"/>
-            <a:r>
-              <a:rPr sz="3400" b="1" i="0">
-                <a:solidFill>
-                  <a:srgbClr val="095292"/>
-                </a:solidFill>
-                <a:latin typeface="Calibri"/>
-              </a:rPr>
-              <a:t>Clase 6 · VetCare avanza</a:t>
-            </a:r>
-          </a:p>
-        </p:txBody>
-      </p:sp>
-      <p:sp>
-        <p:nvSpPr>
-          <p:cNvPr id="5" name="TextBox 4"/>
+          </a:p>
+        </p:txBody>
+      </p:sp>
+      <p:sp>
+        <p:nvSpPr>
+          <p:cNvPr id="10" name="Rectangle 9"/>
+          <p:cNvSpPr/>
+          <p:nvPr/>
+        </p:nvSpPr>
+        <p:spPr>
+          <a:xfrm>
+            <a:off x="640080" y="2084832"/>
+            <a:ext cx="274320" cy="274320"/>
+          </a:xfrm>
+          <a:prstGeom prst="rect">
+            <a:avLst/>
+          </a:prstGeom>
+          <a:solidFill>
+            <a:srgbClr val="FFFFFF"/>
+          </a:solidFill>
+          <a:ln>
+            <a:solidFill>
+              <a:srgbClr val="333333"/>
+            </a:solidFill>
+          </a:ln>
+        </p:spPr>
+        <p:style>
+          <a:lnRef idx="1">
+            <a:schemeClr val="accent1"/>
+          </a:lnRef>
+          <a:fillRef idx="3">
+            <a:schemeClr val="accent1"/>
+          </a:fillRef>
+          <a:effectRef idx="2">
+            <a:schemeClr val="accent1"/>
+          </a:effectRef>
+          <a:fontRef idx="minor">
+            <a:schemeClr val="lt1"/>
+          </a:fontRef>
+        </p:style>
+        <p:txBody>
+          <a:bodyPr rtlCol="0" anchor="ctr"/>
+          <a:lstStyle/>
+          <a:p>
+            <a:pPr algn="ctr"/>
+          </a:p>
+        </p:txBody>
+      </p:sp>
+      <p:sp>
+        <p:nvSpPr>
+          <p:cNvPr id="11" name="Rectangle 10"/>
+          <p:cNvSpPr/>
+          <p:nvPr/>
+        </p:nvSpPr>
+        <p:spPr>
+          <a:xfrm>
+            <a:off x="640080" y="2084832"/>
+            <a:ext cx="73152" cy="274320"/>
+          </a:xfrm>
+          <a:prstGeom prst="rect">
+            <a:avLst/>
+          </a:prstGeom>
+          <a:solidFill>
+            <a:srgbClr val="269CCB"/>
+          </a:solidFill>
+          <a:ln>
+            <a:noFill/>
+          </a:ln>
+        </p:spPr>
+        <p:style>
+          <a:lnRef idx="1">
+            <a:schemeClr val="accent1"/>
+          </a:lnRef>
+          <a:fillRef idx="3">
+            <a:schemeClr val="accent1"/>
+          </a:fillRef>
+          <a:effectRef idx="2">
+            <a:schemeClr val="accent1"/>
+          </a:effectRef>
+          <a:fontRef idx="minor">
+            <a:schemeClr val="lt1"/>
+          </a:fontRef>
+        </p:style>
+        <p:txBody>
+          <a:bodyPr rtlCol="0" anchor="ctr"/>
+          <a:lstStyle/>
+          <a:p>
+            <a:pPr algn="ctr"/>
+          </a:p>
+        </p:txBody>
+      </p:sp>
+      <p:sp>
+        <p:nvSpPr>
+          <p:cNvPr id="12" name="TextBox 11"/>
           <p:cNvSpPr txBox="1"/>
           <p:nvPr/>
         </p:nvSpPr>
         <p:spPr>
           <a:xfrm>
-            <a:off x="457200" y="3017520"/>
-            <a:ext cx="11277295" cy="1645920"/>
+            <a:off x="1097280" y="2029968"/>
+            <a:ext cx="10362895" cy="402336"/>
+          </a:xfrm>
+          <a:prstGeom prst="rect">
+            <a:avLst/>
+          </a:prstGeom>
+          <a:noFill/>
+        </p:spPr>
+        <p:txBody>
+          <a:bodyPr wrap="square" anchor="ctr"/>
+          <a:lstStyle/>
+          <a:p>
+            <a:r>
+              <a:rPr sz="1500" b="0" i="0">
+                <a:solidFill>
+                  <a:srgbClr val="333333"/>
+                </a:solidFill>
+                <a:latin typeface="Calibri"/>
+              </a:rPr>
+              <a:t>Si borro este requisito de la lista, VetCare deja de resolver alguno de los tres dolores de Huellitas o solamente queda menos vistoso?</a:t>
+            </a:r>
+          </a:p>
+        </p:txBody>
+      </p:sp>
+      <p:sp>
+        <p:nvSpPr>
+          <p:cNvPr id="13" name="Rounded Rectangle 12"/>
+          <p:cNvSpPr/>
+          <p:nvPr/>
+        </p:nvSpPr>
+        <p:spPr>
+          <a:xfrm>
+            <a:off x="457200" y="2615184"/>
+            <a:ext cx="11277295" cy="566928"/>
+          </a:xfrm>
+          <a:prstGeom prst="roundRect">
+            <a:avLst>
+              <a:gd name="adj" fmla="val 12000"/>
+            </a:avLst>
+          </a:prstGeom>
+          <a:solidFill>
+            <a:srgbClr val="F2F2F2"/>
+          </a:solidFill>
+          <a:ln>
+            <a:noFill/>
+          </a:ln>
+        </p:spPr>
+        <p:style>
+          <a:lnRef idx="1">
+            <a:schemeClr val="accent1"/>
+          </a:lnRef>
+          <a:fillRef idx="3">
+            <a:schemeClr val="accent1"/>
+          </a:fillRef>
+          <a:effectRef idx="2">
+            <a:schemeClr val="accent1"/>
+          </a:effectRef>
+          <a:fontRef idx="minor">
+            <a:schemeClr val="lt1"/>
+          </a:fontRef>
+        </p:style>
+        <p:txBody>
+          <a:bodyPr rtlCol="0" anchor="ctr"/>
+          <a:lstStyle/>
+          <a:p>
+            <a:pPr algn="ctr"/>
+          </a:p>
+        </p:txBody>
+      </p:sp>
+      <p:sp>
+        <p:nvSpPr>
+          <p:cNvPr id="14" name="Rectangle 13"/>
+          <p:cNvSpPr/>
+          <p:nvPr/>
+        </p:nvSpPr>
+        <p:spPr>
+          <a:xfrm>
+            <a:off x="640080" y="2761488"/>
+            <a:ext cx="274320" cy="274320"/>
+          </a:xfrm>
+          <a:prstGeom prst="rect">
+            <a:avLst/>
+          </a:prstGeom>
+          <a:solidFill>
+            <a:srgbClr val="FFFFFF"/>
+          </a:solidFill>
+          <a:ln>
+            <a:solidFill>
+              <a:srgbClr val="333333"/>
+            </a:solidFill>
+          </a:ln>
+        </p:spPr>
+        <p:style>
+          <a:lnRef idx="1">
+            <a:schemeClr val="accent1"/>
+          </a:lnRef>
+          <a:fillRef idx="3">
+            <a:schemeClr val="accent1"/>
+          </a:fillRef>
+          <a:effectRef idx="2">
+            <a:schemeClr val="accent1"/>
+          </a:effectRef>
+          <a:fontRef idx="minor">
+            <a:schemeClr val="lt1"/>
+          </a:fontRef>
+        </p:style>
+        <p:txBody>
+          <a:bodyPr rtlCol="0" anchor="ctr"/>
+          <a:lstStyle/>
+          <a:p>
+            <a:pPr algn="ctr"/>
+          </a:p>
+        </p:txBody>
+      </p:sp>
+      <p:sp>
+        <p:nvSpPr>
+          <p:cNvPr id="15" name="Rectangle 14"/>
+          <p:cNvSpPr/>
+          <p:nvPr/>
+        </p:nvSpPr>
+        <p:spPr>
+          <a:xfrm>
+            <a:off x="640080" y="2761488"/>
+            <a:ext cx="73152" cy="274320"/>
+          </a:xfrm>
+          <a:prstGeom prst="rect">
+            <a:avLst/>
+          </a:prstGeom>
+          <a:solidFill>
+            <a:srgbClr val="269CCB"/>
+          </a:solidFill>
+          <a:ln>
+            <a:noFill/>
+          </a:ln>
+        </p:spPr>
+        <p:style>
+          <a:lnRef idx="1">
+            <a:schemeClr val="accent1"/>
+          </a:lnRef>
+          <a:fillRef idx="3">
+            <a:schemeClr val="accent1"/>
+          </a:fillRef>
+          <a:effectRef idx="2">
+            <a:schemeClr val="accent1"/>
+          </a:effectRef>
+          <a:fontRef idx="minor">
+            <a:schemeClr val="lt1"/>
+          </a:fontRef>
+        </p:style>
+        <p:txBody>
+          <a:bodyPr rtlCol="0" anchor="ctr"/>
+          <a:lstStyle/>
+          <a:p>
+            <a:pPr algn="ctr"/>
+          </a:p>
+        </p:txBody>
+      </p:sp>
+      <p:sp>
+        <p:nvSpPr>
+          <p:cNvPr id="16" name="TextBox 15"/>
+          <p:cNvSpPr txBox="1"/>
+          <p:nvPr/>
+        </p:nvSpPr>
+        <p:spPr>
+          <a:xfrm>
+            <a:off x="1097280" y="2706624"/>
+            <a:ext cx="10362895" cy="402336"/>
+          </a:xfrm>
+          <a:prstGeom prst="rect">
+            <a:avLst/>
+          </a:prstGeom>
+          <a:noFill/>
+        </p:spPr>
+        <p:txBody>
+          <a:bodyPr wrap="square" anchor="ctr"/>
+          <a:lstStyle/>
+          <a:p>
+            <a:r>
+              <a:rPr sz="1500" b="0" i="0">
+                <a:solidFill>
+                  <a:srgbClr val="333333"/>
+                </a:solidFill>
+                <a:latin typeface="Calibri"/>
+              </a:rPr>
+              <a:t>Esta frase describe una sola accion de un solo actor, o estoy escondiendo dos o tres requisitos detras de una y?</a:t>
+            </a:r>
+          </a:p>
+        </p:txBody>
+      </p:sp>
+      <p:sp>
+        <p:nvSpPr>
+          <p:cNvPr id="17" name="TextBox 16"/>
+          <p:cNvSpPr txBox="1"/>
+          <p:nvPr/>
+        </p:nvSpPr>
+        <p:spPr>
+          <a:xfrm>
+            <a:off x="11185855" y="6473952"/>
+            <a:ext cx="640080" cy="274320"/>
           </a:xfrm>
           <a:prstGeom prst="rect">
             <a:avLst/>
@@ -8454,86 +8081,15 @@
           </a:bodyPr>
           <a:lstStyle/>
           <a:p>
-            <a:pPr algn="ctr">
-              <a:spcAft>
-                <a:spcPts val="600"/>
-              </a:spcAft>
-            </a:pPr>
-            <a:r>
-              <a:rPr sz="1600" b="0" i="0">
-                <a:solidFill>
-                  <a:srgbClr val="333333"/>
-                </a:solidFill>
-                <a:latin typeface="Calibri"/>
-              </a:rPr>
-              <a:t>Queda listo el catalogo de requisitos de VetCare: 8 RF y 4 RNF con criterio de verificacion y prioridad MoSCoW.</a:t>
-            </a:r>
-          </a:p>
-          <a:p>
-            <a:pPr algn="ctr">
-              <a:spcAft>
-                <a:spcPts val="600"/>
-              </a:spcAft>
-            </a:pPr>
-            <a:r>
-              <a:rPr sz="1600" b="0" i="0">
-                <a:solidFill>
-                  <a:srgbClr val="333333"/>
-                </a:solidFill>
-                <a:latin typeface="Calibri"/>
-              </a:rPr>
-              <a:t>Entregable: Documento de requisitos de VetCare en PDF, con minimo 8 RF, 4 RNF cuantificados, priorizacion MoSCoW y matriz de trazabilidad, subido a la plataforma del curso.</a:t>
-            </a:r>
-          </a:p>
-          <a:p>
-            <a:pPr algn="ctr">
-              <a:spcAft>
-                <a:spcPts val="600"/>
-              </a:spcAft>
-            </a:pPr>
-            <a:r>
-              <a:rPr sz="1600" b="0" i="0">
-                <a:solidFill>
-                  <a:srgbClr val="333333"/>
-                </a:solidFill>
-                <a:latin typeface="Calibri"/>
-              </a:rPr>
-              <a:t>Siguiente clase: continuamos el hilo del PI</a:t>
-            </a:r>
-          </a:p>
-        </p:txBody>
-      </p:sp>
-      <p:sp>
-        <p:nvSpPr>
-          <p:cNvPr id="6" name="TextBox 5"/>
-          <p:cNvSpPr txBox="1"/>
-          <p:nvPr/>
-        </p:nvSpPr>
-        <p:spPr>
-          <a:xfrm>
-            <a:off x="457200" y="4754880"/>
-            <a:ext cx="11277295" cy="640080"/>
-          </a:xfrm>
-          <a:prstGeom prst="rect">
-            <a:avLst/>
-          </a:prstGeom>
-          <a:noFill/>
-        </p:spPr>
-        <p:txBody>
-          <a:bodyPr wrap="square">
-            <a:spAutoFit/>
-          </a:bodyPr>
-          <a:lstStyle/>
-          <a:p>
-            <a:pPr algn="ctr"/>
-            <a:r>
-              <a:rPr sz="2000" b="1" i="0">
-                <a:solidFill>
-                  <a:srgbClr val="269CCB"/>
-                </a:solidFill>
-                <a:latin typeface="Calibri"/>
-              </a:rPr>
-              <a:t>Teoria al servicio del proyecto</a:t>
+            <a:pPr algn="r"/>
+            <a:r>
+              <a:rPr sz="1100" b="0" i="0">
+                <a:solidFill>
+                  <a:srgbClr val="666666"/>
+                </a:solidFill>
+                <a:latin typeface="Calibri"/>
+              </a:rPr>
+              <a:t>19</a:t>
             </a:r>
           </a:p>
         </p:txBody>
@@ -8877,6 +8433,1241 @@
 </p:sld>
 </file>
 
+<file path=ppt/slides/slide20.xml><?xml version="1.0" encoding="utf-8"?>
+<p:sld xmlns:a="http://schemas.openxmlformats.org/drawingml/2006/main" xmlns:p="http://schemas.openxmlformats.org/presentationml/2006/main" xmlns:r="http://schemas.openxmlformats.org/officeDocument/2006/relationships">
+  <p:cSld>
+    <p:bg>
+      <p:bgPr>
+        <a:solidFill>
+          <a:srgbClr val="FFFFFF"/>
+        </a:solidFill>
+        <a:effectLst/>
+      </p:bgPr>
+    </p:bg>
+    <p:spTree>
+      <p:nvGrpSpPr>
+        <p:cNvPr id="1" name=""/>
+        <p:cNvGrpSpPr/>
+        <p:nvPr/>
+      </p:nvGrpSpPr>
+      <p:grpSpPr/>
+      <p:sp>
+        <p:nvSpPr>
+          <p:cNvPr id="2" name="Rectangle 1"/>
+          <p:cNvSpPr/>
+          <p:nvPr/>
+        </p:nvSpPr>
+        <p:spPr>
+          <a:xfrm>
+            <a:off x="0" y="0"/>
+            <a:ext cx="12191695" cy="960120"/>
+          </a:xfrm>
+          <a:prstGeom prst="rect">
+            <a:avLst/>
+          </a:prstGeom>
+          <a:solidFill>
+            <a:srgbClr val="095292"/>
+          </a:solidFill>
+          <a:ln>
+            <a:noFill/>
+          </a:ln>
+        </p:spPr>
+        <p:style>
+          <a:lnRef idx="1">
+            <a:schemeClr val="accent1"/>
+          </a:lnRef>
+          <a:fillRef idx="3">
+            <a:schemeClr val="accent1"/>
+          </a:fillRef>
+          <a:effectRef idx="2">
+            <a:schemeClr val="accent1"/>
+          </a:effectRef>
+          <a:fontRef idx="minor">
+            <a:schemeClr val="lt1"/>
+          </a:fontRef>
+        </p:style>
+        <p:txBody>
+          <a:bodyPr rtlCol="0" anchor="ctr"/>
+          <a:lstStyle/>
+          <a:p>
+            <a:pPr algn="ctr"/>
+          </a:p>
+        </p:txBody>
+      </p:sp>
+      <p:sp>
+        <p:nvSpPr>
+          <p:cNvPr id="3" name="Rectangle 2"/>
+          <p:cNvSpPr/>
+          <p:nvPr/>
+        </p:nvSpPr>
+        <p:spPr>
+          <a:xfrm>
+            <a:off x="0" y="960120"/>
+            <a:ext cx="12191695" cy="41148"/>
+          </a:xfrm>
+          <a:prstGeom prst="rect">
+            <a:avLst/>
+          </a:prstGeom>
+          <a:solidFill>
+            <a:srgbClr val="FFD000"/>
+          </a:solidFill>
+          <a:ln>
+            <a:noFill/>
+          </a:ln>
+        </p:spPr>
+        <p:style>
+          <a:lnRef idx="1">
+            <a:schemeClr val="accent1"/>
+          </a:lnRef>
+          <a:fillRef idx="3">
+            <a:schemeClr val="accent1"/>
+          </a:fillRef>
+          <a:effectRef idx="2">
+            <a:schemeClr val="accent1"/>
+          </a:effectRef>
+          <a:fontRef idx="minor">
+            <a:schemeClr val="lt1"/>
+          </a:fontRef>
+        </p:style>
+        <p:txBody>
+          <a:bodyPr rtlCol="0" anchor="ctr"/>
+          <a:lstStyle/>
+          <a:p>
+            <a:pPr algn="ctr"/>
+          </a:p>
+        </p:txBody>
+      </p:sp>
+      <p:sp>
+        <p:nvSpPr>
+          <p:cNvPr id="4" name="TextBox 3"/>
+          <p:cNvSpPr txBox="1"/>
+          <p:nvPr/>
+        </p:nvSpPr>
+        <p:spPr>
+          <a:xfrm>
+            <a:off x="457200" y="164592"/>
+            <a:ext cx="11277295" cy="502920"/>
+          </a:xfrm>
+          <a:prstGeom prst="rect">
+            <a:avLst/>
+          </a:prstGeom>
+          <a:noFill/>
+        </p:spPr>
+        <p:txBody>
+          <a:bodyPr wrap="square">
+            <a:spAutoFit/>
+          </a:bodyPr>
+          <a:lstStyle/>
+          <a:p>
+            <a:r>
+              <a:rPr sz="2600" b="1" i="0">
+                <a:solidFill>
+                  <a:srgbClr val="FFFFFF"/>
+                </a:solidFill>
+                <a:latin typeface="Calibri"/>
+              </a:rPr>
+              <a:t>Criterios de exito / entregable</a:t>
+            </a:r>
+          </a:p>
+        </p:txBody>
+      </p:sp>
+      <p:sp>
+        <p:nvSpPr>
+          <p:cNvPr id="5" name="TextBox 4"/>
+          <p:cNvSpPr txBox="1"/>
+          <p:nvPr/>
+        </p:nvSpPr>
+        <p:spPr>
+          <a:xfrm>
+            <a:off x="457200" y="1170432"/>
+            <a:ext cx="11277295" cy="5230368"/>
+          </a:xfrm>
+          <a:prstGeom prst="rect">
+            <a:avLst/>
+          </a:prstGeom>
+          <a:noFill/>
+        </p:spPr>
+        <p:txBody>
+          <a:bodyPr wrap="square">
+            <a:spAutoFit/>
+          </a:bodyPr>
+          <a:lstStyle/>
+          <a:p>
+            <a:pPr>
+              <a:spcAft>
+                <a:spcPts val="800"/>
+              </a:spcAft>
+            </a:pPr>
+            <a:r>
+              <a:rPr sz="2000" b="0" i="0">
+                <a:solidFill>
+                  <a:srgbClr val="333333"/>
+                </a:solidFill>
+                <a:latin typeface="Calibri"/>
+              </a:rPr>
+              <a:t>–   </a:t>
+            </a:r>
+            <a:r>
+              <a:rPr sz="2000" b="1" i="0">
+                <a:solidFill>
+                  <a:srgbClr val="333333"/>
+                </a:solidFill>
+                <a:latin typeface="Calibri"/>
+              </a:rPr>
+              <a:t>Entregable:</a:t>
+            </a:r>
+            <a:r>
+              <a:rPr sz="2000" b="0" i="0">
+                <a:solidFill>
+                  <a:srgbClr val="333333"/>
+                </a:solidFill>
+                <a:latin typeface="Calibri"/>
+              </a:rPr>
+              <a:t> Documento de requisitos de VetCare en PDF, con minimo 8 RF, 4 RNF cuantificados, priorizacion MoSCoW y matriz de trazabilidad, subido a la plataforma del curso.</a:t>
+            </a:r>
+          </a:p>
+          <a:p>
+            <a:pPr>
+              <a:spcAft>
+                <a:spcPts val="800"/>
+              </a:spcAft>
+            </a:pPr>
+            <a:r>
+              <a:rPr sz="2000" b="0" i="0">
+                <a:solidFill>
+                  <a:srgbClr val="333333"/>
+                </a:solidFill>
+                <a:latin typeface="Calibri"/>
+              </a:rPr>
+              <a:t>–   </a:t>
+            </a:r>
+            <a:r>
+              <a:rPr sz="2000" b="1" i="0">
+                <a:solidFill>
+                  <a:srgbClr val="333333"/>
+                </a:solidFill>
+                <a:latin typeface="Calibri"/>
+              </a:rPr>
+              <a:t>Exito:</a:t>
+            </a:r>
+            <a:r>
+              <a:rPr sz="2000" b="0" i="0">
+                <a:solidFill>
+                  <a:srgbClr val="333333"/>
+                </a:solidFill>
+                <a:latin typeface="Calibri"/>
+              </a:rPr>
+              <a:t> El documento tiene minimo 8 RF y 4 RNF, todos con ID unico, actor explicito y redaccion en plantilla.</a:t>
+            </a:r>
+          </a:p>
+          <a:p>
+            <a:pPr>
+              <a:spcAft>
+                <a:spcPts val="800"/>
+              </a:spcAft>
+            </a:pPr>
+            <a:r>
+              <a:rPr sz="2000" b="0" i="0">
+                <a:solidFill>
+                  <a:srgbClr val="333333"/>
+                </a:solidFill>
+                <a:latin typeface="Calibri"/>
+              </a:rPr>
+              <a:t>–   </a:t>
+            </a:r>
+            <a:r>
+              <a:rPr sz="2000" b="1" i="0">
+                <a:solidFill>
+                  <a:srgbClr val="333333"/>
+                </a:solidFill>
+                <a:latin typeface="Calibri"/>
+              </a:rPr>
+              <a:t>Exito:</a:t>
+            </a:r>
+            <a:r>
+              <a:rPr sz="2000" b="0" i="0">
+                <a:solidFill>
+                  <a:srgbClr val="333333"/>
+                </a:solidFill>
+                <a:latin typeface="Calibri"/>
+              </a:rPr>
+              <a:t> Cada RNF trae al menos un valor medible (segundos, cantidad, frecuencia o porcentaje) y su forma de verificacion.</a:t>
+            </a:r>
+          </a:p>
+          <a:p>
+            <a:pPr>
+              <a:spcAft>
+                <a:spcPts val="800"/>
+              </a:spcAft>
+            </a:pPr>
+            <a:r>
+              <a:rPr sz="2000" b="0" i="0">
+                <a:solidFill>
+                  <a:srgbClr val="333333"/>
+                </a:solidFill>
+                <a:latin typeface="Calibri"/>
+              </a:rPr>
+              <a:t>–   </a:t>
+            </a:r>
+            <a:r>
+              <a:rPr sz="2000" b="1" i="0">
+                <a:solidFill>
+                  <a:srgbClr val="333333"/>
+                </a:solidFill>
+                <a:latin typeface="Calibri"/>
+              </a:rPr>
+              <a:t>Exito:</a:t>
+            </a:r>
+            <a:r>
+              <a:rPr sz="2000" b="0" i="0">
+                <a:solidFill>
+                  <a:srgbClr val="333333"/>
+                </a:solidFill>
+                <a:latin typeface="Calibri"/>
+              </a:rPr>
+              <a:t> Ningun requisito usa las palabras rapido, amigable, facil, intuitivo, robusto u optimo sin cuantificarlas.</a:t>
+            </a:r>
+          </a:p>
+          <a:p>
+            <a:pPr>
+              <a:spcAft>
+                <a:spcPts val="800"/>
+              </a:spcAft>
+            </a:pPr>
+            <a:r>
+              <a:rPr sz="2000" b="0" i="0">
+                <a:solidFill>
+                  <a:srgbClr val="333333"/>
+                </a:solidFill>
+                <a:latin typeface="Calibri"/>
+              </a:rPr>
+              <a:t>–   </a:t>
+            </a:r>
+            <a:r>
+              <a:rPr sz="2000" b="1" i="0">
+                <a:solidFill>
+                  <a:srgbClr val="333333"/>
+                </a:solidFill>
+                <a:latin typeface="Calibri"/>
+              </a:rPr>
+              <a:t>Exito:</a:t>
+            </a:r>
+            <a:r>
+              <a:rPr sz="2000" b="0" i="0">
+                <a:solidFill>
+                  <a:srgbClr val="333333"/>
+                </a:solidFill>
+                <a:latin typeface="Calibri"/>
+              </a:rPr>
+              <a:t> La matriz de trazabilidad conecta las cinco frases de la entrevista con al menos un requisito cada una, y ningun requisito queda huerfano de origen.</a:t>
+            </a:r>
+          </a:p>
+          <a:p>
+            <a:pPr>
+              <a:spcAft>
+                <a:spcPts val="800"/>
+              </a:spcAft>
+            </a:pPr>
+            <a:r>
+              <a:rPr sz="2000" b="0" i="0">
+                <a:solidFill>
+                  <a:srgbClr val="333333"/>
+                </a:solidFill>
+                <a:latin typeface="Calibri"/>
+              </a:rPr>
+              <a:t>–   </a:t>
+            </a:r>
+            <a:r>
+              <a:rPr sz="2000" b="1" i="0">
+                <a:solidFill>
+                  <a:srgbClr val="333333"/>
+                </a:solidFill>
+                <a:latin typeface="Calibri"/>
+              </a:rPr>
+              <a:t>Entrega en la plataforma del curso</a:t>
+            </a:r>
+            <a:r>
+              <a:rPr sz="2000" b="0" i="0">
+                <a:solidFill>
+                  <a:srgbClr val="333333"/>
+                </a:solidFill>
+                <a:latin typeface="Calibri"/>
+              </a:rPr>
+              <a:t> — en la fecha que indique el docente.</a:t>
+            </a:r>
+          </a:p>
+        </p:txBody>
+      </p:sp>
+      <p:sp>
+        <p:nvSpPr>
+          <p:cNvPr id="6" name="TextBox 5"/>
+          <p:cNvSpPr txBox="1"/>
+          <p:nvPr/>
+        </p:nvSpPr>
+        <p:spPr>
+          <a:xfrm>
+            <a:off x="11185855" y="6473952"/>
+            <a:ext cx="640080" cy="274320"/>
+          </a:xfrm>
+          <a:prstGeom prst="rect">
+            <a:avLst/>
+          </a:prstGeom>
+          <a:noFill/>
+        </p:spPr>
+        <p:txBody>
+          <a:bodyPr wrap="square">
+            <a:spAutoFit/>
+          </a:bodyPr>
+          <a:lstStyle/>
+          <a:p>
+            <a:pPr algn="r"/>
+            <a:r>
+              <a:rPr sz="1100" b="0" i="0">
+                <a:solidFill>
+                  <a:srgbClr val="666666"/>
+                </a:solidFill>
+                <a:latin typeface="Calibri"/>
+              </a:rPr>
+              <a:t>20</a:t>
+            </a:r>
+          </a:p>
+        </p:txBody>
+      </p:sp>
+    </p:spTree>
+  </p:cSld>
+  <p:clrMapOvr>
+    <a:masterClrMapping/>
+  </p:clrMapOvr>
+</p:sld>
+</file>
+
+<file path=ppt/slides/slide21.xml><?xml version="1.0" encoding="utf-8"?>
+<p:sld xmlns:a="http://schemas.openxmlformats.org/drawingml/2006/main" xmlns:p="http://schemas.openxmlformats.org/presentationml/2006/main" xmlns:r="http://schemas.openxmlformats.org/officeDocument/2006/relationships">
+  <p:cSld>
+    <p:bg>
+      <p:bgPr>
+        <a:solidFill>
+          <a:srgbClr val="FFFFFF"/>
+        </a:solidFill>
+        <a:effectLst/>
+      </p:bgPr>
+    </p:bg>
+    <p:spTree>
+      <p:nvGrpSpPr>
+        <p:cNvPr id="1" name=""/>
+        <p:cNvGrpSpPr/>
+        <p:nvPr/>
+      </p:nvGrpSpPr>
+      <p:grpSpPr/>
+      <p:sp>
+        <p:nvSpPr>
+          <p:cNvPr id="2" name="Rectangle 1"/>
+          <p:cNvSpPr/>
+          <p:nvPr/>
+        </p:nvSpPr>
+        <p:spPr>
+          <a:xfrm>
+            <a:off x="0" y="0"/>
+            <a:ext cx="12191695" cy="960120"/>
+          </a:xfrm>
+          <a:prstGeom prst="rect">
+            <a:avLst/>
+          </a:prstGeom>
+          <a:solidFill>
+            <a:srgbClr val="095292"/>
+          </a:solidFill>
+          <a:ln>
+            <a:noFill/>
+          </a:ln>
+        </p:spPr>
+        <p:style>
+          <a:lnRef idx="1">
+            <a:schemeClr val="accent1"/>
+          </a:lnRef>
+          <a:fillRef idx="3">
+            <a:schemeClr val="accent1"/>
+          </a:fillRef>
+          <a:effectRef idx="2">
+            <a:schemeClr val="accent1"/>
+          </a:effectRef>
+          <a:fontRef idx="minor">
+            <a:schemeClr val="lt1"/>
+          </a:fontRef>
+        </p:style>
+        <p:txBody>
+          <a:bodyPr rtlCol="0" anchor="ctr"/>
+          <a:lstStyle/>
+          <a:p>
+            <a:pPr algn="ctr"/>
+          </a:p>
+        </p:txBody>
+      </p:sp>
+      <p:sp>
+        <p:nvSpPr>
+          <p:cNvPr id="3" name="Rectangle 2"/>
+          <p:cNvSpPr/>
+          <p:nvPr/>
+        </p:nvSpPr>
+        <p:spPr>
+          <a:xfrm>
+            <a:off x="0" y="960120"/>
+            <a:ext cx="12191695" cy="41148"/>
+          </a:xfrm>
+          <a:prstGeom prst="rect">
+            <a:avLst/>
+          </a:prstGeom>
+          <a:solidFill>
+            <a:srgbClr val="FFD000"/>
+          </a:solidFill>
+          <a:ln>
+            <a:noFill/>
+          </a:ln>
+        </p:spPr>
+        <p:style>
+          <a:lnRef idx="1">
+            <a:schemeClr val="accent1"/>
+          </a:lnRef>
+          <a:fillRef idx="3">
+            <a:schemeClr val="accent1"/>
+          </a:fillRef>
+          <a:effectRef idx="2">
+            <a:schemeClr val="accent1"/>
+          </a:effectRef>
+          <a:fontRef idx="minor">
+            <a:schemeClr val="lt1"/>
+          </a:fontRef>
+        </p:style>
+        <p:txBody>
+          <a:bodyPr rtlCol="0" anchor="ctr"/>
+          <a:lstStyle/>
+          <a:p>
+            <a:pPr algn="ctr"/>
+          </a:p>
+        </p:txBody>
+      </p:sp>
+      <p:sp>
+        <p:nvSpPr>
+          <p:cNvPr id="4" name="TextBox 3"/>
+          <p:cNvSpPr txBox="1"/>
+          <p:nvPr/>
+        </p:nvSpPr>
+        <p:spPr>
+          <a:xfrm>
+            <a:off x="457200" y="164592"/>
+            <a:ext cx="11277295" cy="502920"/>
+          </a:xfrm>
+          <a:prstGeom prst="rect">
+            <a:avLst/>
+          </a:prstGeom>
+          <a:noFill/>
+        </p:spPr>
+        <p:txBody>
+          <a:bodyPr wrap="square">
+            <a:spAutoFit/>
+          </a:bodyPr>
+          <a:lstStyle/>
+          <a:p>
+            <a:r>
+              <a:rPr sz="2600" b="1" i="0">
+                <a:solidFill>
+                  <a:srgbClr val="FFFFFF"/>
+                </a:solidFill>
+                <a:latin typeface="Calibri"/>
+              </a:rPr>
+              <a:t>Para el PI esta semana</a:t>
+            </a:r>
+          </a:p>
+        </p:txBody>
+      </p:sp>
+      <p:sp>
+        <p:nvSpPr>
+          <p:cNvPr id="5" name="Rounded Rectangle 4"/>
+          <p:cNvSpPr/>
+          <p:nvPr/>
+        </p:nvSpPr>
+        <p:spPr>
+          <a:xfrm>
+            <a:off x="457200" y="1261872"/>
+            <a:ext cx="11277295" cy="1051560"/>
+          </a:xfrm>
+          <a:prstGeom prst="roundRect">
+            <a:avLst>
+              <a:gd name="adj" fmla="val 12000"/>
+            </a:avLst>
+          </a:prstGeom>
+          <a:solidFill>
+            <a:srgbClr val="E8F4FA"/>
+          </a:solidFill>
+          <a:ln>
+            <a:noFill/>
+          </a:ln>
+        </p:spPr>
+        <p:style>
+          <a:lnRef idx="1">
+            <a:schemeClr val="accent1"/>
+          </a:lnRef>
+          <a:fillRef idx="3">
+            <a:schemeClr val="accent1"/>
+          </a:fillRef>
+          <a:effectRef idx="2">
+            <a:schemeClr val="accent1"/>
+          </a:effectRef>
+          <a:fontRef idx="minor">
+            <a:schemeClr val="lt1"/>
+          </a:fontRef>
+        </p:style>
+        <p:txBody>
+          <a:bodyPr rtlCol="0" anchor="ctr"/>
+          <a:lstStyle/>
+          <a:p>
+            <a:pPr algn="ctr"/>
+          </a:p>
+        </p:txBody>
+      </p:sp>
+      <p:sp>
+        <p:nvSpPr>
+          <p:cNvPr id="6" name="Rectangle 5"/>
+          <p:cNvSpPr/>
+          <p:nvPr/>
+        </p:nvSpPr>
+        <p:spPr>
+          <a:xfrm>
+            <a:off x="457200" y="1261872"/>
+            <a:ext cx="128016" cy="1051560"/>
+          </a:xfrm>
+          <a:prstGeom prst="rect">
+            <a:avLst/>
+          </a:prstGeom>
+          <a:solidFill>
+            <a:srgbClr val="269CCB"/>
+          </a:solidFill>
+          <a:ln>
+            <a:noFill/>
+          </a:ln>
+        </p:spPr>
+        <p:style>
+          <a:lnRef idx="1">
+            <a:schemeClr val="accent1"/>
+          </a:lnRef>
+          <a:fillRef idx="3">
+            <a:schemeClr val="accent1"/>
+          </a:fillRef>
+          <a:effectRef idx="2">
+            <a:schemeClr val="accent1"/>
+          </a:effectRef>
+          <a:fontRef idx="minor">
+            <a:schemeClr val="lt1"/>
+          </a:fontRef>
+        </p:style>
+        <p:txBody>
+          <a:bodyPr rtlCol="0" anchor="ctr"/>
+          <a:lstStyle/>
+          <a:p>
+            <a:pPr algn="ctr"/>
+          </a:p>
+        </p:txBody>
+      </p:sp>
+      <p:sp>
+        <p:nvSpPr>
+          <p:cNvPr id="7" name="TextBox 6"/>
+          <p:cNvSpPr txBox="1"/>
+          <p:nvPr/>
+        </p:nvSpPr>
+        <p:spPr>
+          <a:xfrm>
+            <a:off x="777240" y="1399031"/>
+            <a:ext cx="10774375" cy="822959"/>
+          </a:xfrm>
+          <a:prstGeom prst="rect">
+            <a:avLst/>
+          </a:prstGeom>
+          <a:noFill/>
+        </p:spPr>
+        <p:txBody>
+          <a:bodyPr wrap="square">
+            <a:spAutoFit/>
+          </a:bodyPr>
+          <a:lstStyle/>
+          <a:p>
+            <a:r>
+              <a:rPr sz="1200" b="1" i="0">
+                <a:solidFill>
+                  <a:srgbClr val="269CCB"/>
+                </a:solidFill>
+                <a:latin typeface="Calibri"/>
+              </a:rPr>
+              <a:t>Info</a:t>
+            </a:r>
+          </a:p>
+          <a:p>
+            <a:pPr>
+              <a:spcBef>
+                <a:spcPts val="400"/>
+              </a:spcBef>
+            </a:pPr>
+            <a:r>
+              <a:rPr sz="1400" b="0" i="0">
+                <a:solidFill>
+                  <a:srgbClr val="333333"/>
+                </a:solidFill>
+                <a:latin typeface="Calibri"/>
+              </a:rPr>
+              <a:t>Hito: Queda listo el catalogo de requisitos de VetCare: 8 RF y 4 RNF con criterio de verificacion y prioridad MoSCoW.</a:t>
+            </a:r>
+          </a:p>
+        </p:txBody>
+      </p:sp>
+      <p:sp>
+        <p:nvSpPr>
+          <p:cNvPr id="8" name="Rounded Rectangle 7"/>
+          <p:cNvSpPr/>
+          <p:nvPr/>
+        </p:nvSpPr>
+        <p:spPr>
+          <a:xfrm>
+            <a:off x="457200" y="2478024"/>
+            <a:ext cx="11277295" cy="1051560"/>
+          </a:xfrm>
+          <a:prstGeom prst="roundRect">
+            <a:avLst>
+              <a:gd name="adj" fmla="val 12000"/>
+            </a:avLst>
+          </a:prstGeom>
+          <a:solidFill>
+            <a:srgbClr val="FFF8E1"/>
+          </a:solidFill>
+          <a:ln>
+            <a:noFill/>
+          </a:ln>
+        </p:spPr>
+        <p:style>
+          <a:lnRef idx="1">
+            <a:schemeClr val="accent1"/>
+          </a:lnRef>
+          <a:fillRef idx="3">
+            <a:schemeClr val="accent1"/>
+          </a:fillRef>
+          <a:effectRef idx="2">
+            <a:schemeClr val="accent1"/>
+          </a:effectRef>
+          <a:fontRef idx="minor">
+            <a:schemeClr val="lt1"/>
+          </a:fontRef>
+        </p:style>
+        <p:txBody>
+          <a:bodyPr rtlCol="0" anchor="ctr"/>
+          <a:lstStyle/>
+          <a:p>
+            <a:pPr algn="ctr"/>
+          </a:p>
+        </p:txBody>
+      </p:sp>
+      <p:sp>
+        <p:nvSpPr>
+          <p:cNvPr id="9" name="Rectangle 8"/>
+          <p:cNvSpPr/>
+          <p:nvPr/>
+        </p:nvSpPr>
+        <p:spPr>
+          <a:xfrm>
+            <a:off x="457200" y="2478024"/>
+            <a:ext cx="128016" cy="1051560"/>
+          </a:xfrm>
+          <a:prstGeom prst="rect">
+            <a:avLst/>
+          </a:prstGeom>
+          <a:solidFill>
+            <a:srgbClr val="FFD000"/>
+          </a:solidFill>
+          <a:ln>
+            <a:noFill/>
+          </a:ln>
+        </p:spPr>
+        <p:style>
+          <a:lnRef idx="1">
+            <a:schemeClr val="accent1"/>
+          </a:lnRef>
+          <a:fillRef idx="3">
+            <a:schemeClr val="accent1"/>
+          </a:fillRef>
+          <a:effectRef idx="2">
+            <a:schemeClr val="accent1"/>
+          </a:effectRef>
+          <a:fontRef idx="minor">
+            <a:schemeClr val="lt1"/>
+          </a:fontRef>
+        </p:style>
+        <p:txBody>
+          <a:bodyPr rtlCol="0" anchor="ctr"/>
+          <a:lstStyle/>
+          <a:p>
+            <a:pPr algn="ctr"/>
+          </a:p>
+        </p:txBody>
+      </p:sp>
+      <p:sp>
+        <p:nvSpPr>
+          <p:cNvPr id="10" name="TextBox 9"/>
+          <p:cNvSpPr txBox="1"/>
+          <p:nvPr/>
+        </p:nvSpPr>
+        <p:spPr>
+          <a:xfrm>
+            <a:off x="777240" y="2615184"/>
+            <a:ext cx="10774375" cy="822959"/>
+          </a:xfrm>
+          <a:prstGeom prst="rect">
+            <a:avLst/>
+          </a:prstGeom>
+          <a:noFill/>
+        </p:spPr>
+        <p:txBody>
+          <a:bodyPr wrap="square">
+            <a:spAutoFit/>
+          </a:bodyPr>
+          <a:lstStyle/>
+          <a:p>
+            <a:r>
+              <a:rPr sz="1200" b="1" i="0">
+                <a:solidFill>
+                  <a:srgbClr val="FFD000"/>
+                </a:solidFill>
+                <a:latin typeface="Calibri"/>
+              </a:rPr>
+              <a:t>Aclaración</a:t>
+            </a:r>
+          </a:p>
+          <a:p>
+            <a:pPr>
+              <a:spcBef>
+                <a:spcPts val="400"/>
+              </a:spcBef>
+            </a:pPr>
+            <a:r>
+              <a:rPr sz="1400" b="0" i="0">
+                <a:solidFill>
+                  <a:srgbClr val="333333"/>
+                </a:solidFill>
+                <a:latin typeface="Calibri"/>
+              </a:rPr>
+              <a:t>Enunciado completo: Clases/Proyecto Integrador/ (VetCare).</a:t>
+            </a:r>
+          </a:p>
+        </p:txBody>
+      </p:sp>
+      <p:sp>
+        <p:nvSpPr>
+          <p:cNvPr id="11" name="Rounded Rectangle 10"/>
+          <p:cNvSpPr/>
+          <p:nvPr/>
+        </p:nvSpPr>
+        <p:spPr>
+          <a:xfrm>
+            <a:off x="457200" y="3694176"/>
+            <a:ext cx="11277295" cy="1051560"/>
+          </a:xfrm>
+          <a:prstGeom prst="roundRect">
+            <a:avLst>
+              <a:gd name="adj" fmla="val 12000"/>
+            </a:avLst>
+          </a:prstGeom>
+          <a:solidFill>
+            <a:srgbClr val="FBE4E4"/>
+          </a:solidFill>
+          <a:ln>
+            <a:noFill/>
+          </a:ln>
+        </p:spPr>
+        <p:style>
+          <a:lnRef idx="1">
+            <a:schemeClr val="accent1"/>
+          </a:lnRef>
+          <a:fillRef idx="3">
+            <a:schemeClr val="accent1"/>
+          </a:fillRef>
+          <a:effectRef idx="2">
+            <a:schemeClr val="accent1"/>
+          </a:effectRef>
+          <a:fontRef idx="minor">
+            <a:schemeClr val="lt1"/>
+          </a:fontRef>
+        </p:style>
+        <p:txBody>
+          <a:bodyPr rtlCol="0" anchor="ctr"/>
+          <a:lstStyle/>
+          <a:p>
+            <a:pPr algn="ctr"/>
+          </a:p>
+        </p:txBody>
+      </p:sp>
+      <p:sp>
+        <p:nvSpPr>
+          <p:cNvPr id="12" name="Rectangle 11"/>
+          <p:cNvSpPr/>
+          <p:nvPr/>
+        </p:nvSpPr>
+        <p:spPr>
+          <a:xfrm>
+            <a:off x="457200" y="3694176"/>
+            <a:ext cx="128016" cy="1051560"/>
+          </a:xfrm>
+          <a:prstGeom prst="rect">
+            <a:avLst/>
+          </a:prstGeom>
+          <a:solidFill>
+            <a:srgbClr val="A02030"/>
+          </a:solidFill>
+          <a:ln>
+            <a:noFill/>
+          </a:ln>
+        </p:spPr>
+        <p:style>
+          <a:lnRef idx="1">
+            <a:schemeClr val="accent1"/>
+          </a:lnRef>
+          <a:fillRef idx="3">
+            <a:schemeClr val="accent1"/>
+          </a:fillRef>
+          <a:effectRef idx="2">
+            <a:schemeClr val="accent1"/>
+          </a:effectRef>
+          <a:fontRef idx="minor">
+            <a:schemeClr val="lt1"/>
+          </a:fontRef>
+        </p:style>
+        <p:txBody>
+          <a:bodyPr rtlCol="0" anchor="ctr"/>
+          <a:lstStyle/>
+          <a:p>
+            <a:pPr algn="ctr"/>
+          </a:p>
+        </p:txBody>
+      </p:sp>
+      <p:sp>
+        <p:nvSpPr>
+          <p:cNvPr id="13" name="TextBox 12"/>
+          <p:cNvSpPr txBox="1"/>
+          <p:nvPr/>
+        </p:nvSpPr>
+        <p:spPr>
+          <a:xfrm>
+            <a:off x="777240" y="3831336"/>
+            <a:ext cx="10774375" cy="822959"/>
+          </a:xfrm>
+          <a:prstGeom prst="rect">
+            <a:avLst/>
+          </a:prstGeom>
+          <a:noFill/>
+        </p:spPr>
+        <p:txBody>
+          <a:bodyPr wrap="square">
+            <a:spAutoFit/>
+          </a:bodyPr>
+          <a:lstStyle/>
+          <a:p>
+            <a:r>
+              <a:rPr sz="1200" b="1" i="0">
+                <a:solidFill>
+                  <a:srgbClr val="A02030"/>
+                </a:solidFill>
+                <a:latin typeface="Calibri"/>
+              </a:rPr>
+              <a:t>Atención</a:t>
+            </a:r>
+          </a:p>
+          <a:p>
+            <a:pPr>
+              <a:spcBef>
+                <a:spcPts val="400"/>
+              </a:spcBef>
+            </a:pPr>
+            <a:r>
+              <a:rPr sz="1400" b="0" i="0">
+                <a:solidFill>
+                  <a:srgbClr val="333333"/>
+                </a:solidFill>
+                <a:latin typeface="Calibri"/>
+              </a:rPr>
+              <a:t>Entrega del taller, si el docente lo asigna · en la fecha que indique el docente.</a:t>
+            </a:r>
+          </a:p>
+        </p:txBody>
+      </p:sp>
+      <p:sp>
+        <p:nvSpPr>
+          <p:cNvPr id="14" name="TextBox 13"/>
+          <p:cNvSpPr txBox="1"/>
+          <p:nvPr/>
+        </p:nvSpPr>
+        <p:spPr>
+          <a:xfrm>
+            <a:off x="11185855" y="6473952"/>
+            <a:ext cx="640080" cy="274320"/>
+          </a:xfrm>
+          <a:prstGeom prst="rect">
+            <a:avLst/>
+          </a:prstGeom>
+          <a:noFill/>
+        </p:spPr>
+        <p:txBody>
+          <a:bodyPr wrap="square">
+            <a:spAutoFit/>
+          </a:bodyPr>
+          <a:lstStyle/>
+          <a:p>
+            <a:pPr algn="r"/>
+            <a:r>
+              <a:rPr sz="1100" b="0" i="0">
+                <a:solidFill>
+                  <a:srgbClr val="666666"/>
+                </a:solidFill>
+                <a:latin typeface="Calibri"/>
+              </a:rPr>
+              <a:t>21</a:t>
+            </a:r>
+          </a:p>
+        </p:txBody>
+      </p:sp>
+    </p:spTree>
+  </p:cSld>
+  <p:clrMapOvr>
+    <a:masterClrMapping/>
+  </p:clrMapOvr>
+</p:sld>
+</file>
+
+<file path=ppt/slides/slide22.xml><?xml version="1.0" encoding="utf-8"?>
+<p:sld xmlns:a="http://schemas.openxmlformats.org/drawingml/2006/main" xmlns:p="http://schemas.openxmlformats.org/presentationml/2006/main" xmlns:r="http://schemas.openxmlformats.org/officeDocument/2006/relationships">
+  <p:cSld>
+    <p:bg>
+      <p:bgPr>
+        <a:solidFill>
+          <a:srgbClr val="FFFFFF"/>
+        </a:solidFill>
+        <a:effectLst/>
+      </p:bgPr>
+    </p:bg>
+    <p:spTree>
+      <p:nvGrpSpPr>
+        <p:cNvPr id="1" name=""/>
+        <p:cNvGrpSpPr/>
+        <p:nvPr/>
+      </p:nvGrpSpPr>
+      <p:grpSpPr/>
+      <p:sp>
+        <p:nvSpPr>
+          <p:cNvPr id="2" name="Rectangle 1"/>
+          <p:cNvSpPr/>
+          <p:nvPr/>
+        </p:nvSpPr>
+        <p:spPr>
+          <a:xfrm>
+            <a:off x="0" y="0"/>
+            <a:ext cx="12191695" cy="164592"/>
+          </a:xfrm>
+          <a:prstGeom prst="rect">
+            <a:avLst/>
+          </a:prstGeom>
+          <a:solidFill>
+            <a:srgbClr val="269CCB"/>
+          </a:solidFill>
+          <a:ln>
+            <a:noFill/>
+          </a:ln>
+        </p:spPr>
+        <p:style>
+          <a:lnRef idx="1">
+            <a:schemeClr val="accent1"/>
+          </a:lnRef>
+          <a:fillRef idx="3">
+            <a:schemeClr val="accent1"/>
+          </a:fillRef>
+          <a:effectRef idx="2">
+            <a:schemeClr val="accent1"/>
+          </a:effectRef>
+          <a:fontRef idx="minor">
+            <a:schemeClr val="lt1"/>
+          </a:fontRef>
+        </p:style>
+        <p:txBody>
+          <a:bodyPr rtlCol="0" anchor="ctr"/>
+          <a:lstStyle/>
+          <a:p>
+            <a:pPr algn="ctr"/>
+          </a:p>
+        </p:txBody>
+      </p:sp>
+      <p:pic>
+        <p:nvPicPr>
+          <p:cNvPr id="3" name="Picture 2" descr="logo_uniajc_color.png"/>
+          <p:cNvPicPr>
+            <a:picLocks noChangeAspect="1"/>
+          </p:cNvPicPr>
+          <p:nvPr/>
+        </p:nvPicPr>
+        <p:blipFill>
+          <a:blip r:embed="rId2"/>
+          <a:stretch>
+            <a:fillRect/>
+          </a:stretch>
+        </p:blipFill>
+        <p:spPr>
+          <a:xfrm>
+            <a:off x="10271455" y="5998464"/>
+            <a:ext cx="1463040" cy="643233"/>
+          </a:xfrm>
+          <a:prstGeom prst="rect">
+            <a:avLst/>
+          </a:prstGeom>
+        </p:spPr>
+      </p:pic>
+      <p:sp>
+        <p:nvSpPr>
+          <p:cNvPr id="4" name="TextBox 3"/>
+          <p:cNvSpPr txBox="1"/>
+          <p:nvPr/>
+        </p:nvSpPr>
+        <p:spPr>
+          <a:xfrm>
+            <a:off x="457200" y="1737360"/>
+            <a:ext cx="11277295" cy="1097280"/>
+          </a:xfrm>
+          <a:prstGeom prst="rect">
+            <a:avLst/>
+          </a:prstGeom>
+          <a:noFill/>
+        </p:spPr>
+        <p:txBody>
+          <a:bodyPr wrap="square" anchor="ctr"/>
+          <a:lstStyle/>
+          <a:p>
+            <a:pPr algn="ctr"/>
+            <a:r>
+              <a:rPr sz="3400" b="1" i="0">
+                <a:solidFill>
+                  <a:srgbClr val="095292"/>
+                </a:solidFill>
+                <a:latin typeface="Calibri"/>
+              </a:rPr>
+              <a:t>Clase 6 · VetCare avanza</a:t>
+            </a:r>
+          </a:p>
+        </p:txBody>
+      </p:sp>
+      <p:sp>
+        <p:nvSpPr>
+          <p:cNvPr id="5" name="TextBox 4"/>
+          <p:cNvSpPr txBox="1"/>
+          <p:nvPr/>
+        </p:nvSpPr>
+        <p:spPr>
+          <a:xfrm>
+            <a:off x="457200" y="3017520"/>
+            <a:ext cx="11277295" cy="1645920"/>
+          </a:xfrm>
+          <a:prstGeom prst="rect">
+            <a:avLst/>
+          </a:prstGeom>
+          <a:noFill/>
+        </p:spPr>
+        <p:txBody>
+          <a:bodyPr wrap="square">
+            <a:spAutoFit/>
+          </a:bodyPr>
+          <a:lstStyle/>
+          <a:p>
+            <a:pPr algn="ctr">
+              <a:spcAft>
+                <a:spcPts val="600"/>
+              </a:spcAft>
+            </a:pPr>
+            <a:r>
+              <a:rPr sz="1600" b="0" i="0">
+                <a:solidFill>
+                  <a:srgbClr val="333333"/>
+                </a:solidFill>
+                <a:latin typeface="Calibri"/>
+              </a:rPr>
+              <a:t>Queda listo el catalogo de requisitos de VetCare: 8 RF y 4 RNF con criterio de verificacion y prioridad MoSCoW.</a:t>
+            </a:r>
+          </a:p>
+          <a:p>
+            <a:pPr algn="ctr">
+              <a:spcAft>
+                <a:spcPts val="600"/>
+              </a:spcAft>
+            </a:pPr>
+            <a:r>
+              <a:rPr sz="1600" b="0" i="0">
+                <a:solidFill>
+                  <a:srgbClr val="333333"/>
+                </a:solidFill>
+                <a:latin typeface="Calibri"/>
+              </a:rPr>
+              <a:t>Entregable: Documento de requisitos de VetCare en PDF, con minimo 8 RF, 4 RNF cuantificados, priorizacion MoSCoW y matriz de trazabilidad, subido a la plataforma del curso.</a:t>
+            </a:r>
+          </a:p>
+          <a:p>
+            <a:pPr algn="ctr">
+              <a:spcAft>
+                <a:spcPts val="600"/>
+              </a:spcAft>
+            </a:pPr>
+            <a:r>
+              <a:rPr sz="1600" b="0" i="0">
+                <a:solidFill>
+                  <a:srgbClr val="333333"/>
+                </a:solidFill>
+                <a:latin typeface="Calibri"/>
+              </a:rPr>
+              <a:t>Siguiente clase: continuamos el hilo del PI</a:t>
+            </a:r>
+          </a:p>
+        </p:txBody>
+      </p:sp>
+      <p:sp>
+        <p:nvSpPr>
+          <p:cNvPr id="6" name="TextBox 5"/>
+          <p:cNvSpPr txBox="1"/>
+          <p:nvPr/>
+        </p:nvSpPr>
+        <p:spPr>
+          <a:xfrm>
+            <a:off x="457200" y="4754880"/>
+            <a:ext cx="11277295" cy="640080"/>
+          </a:xfrm>
+          <a:prstGeom prst="rect">
+            <a:avLst/>
+          </a:prstGeom>
+          <a:noFill/>
+        </p:spPr>
+        <p:txBody>
+          <a:bodyPr wrap="square">
+            <a:spAutoFit/>
+          </a:bodyPr>
+          <a:lstStyle/>
+          <a:p>
+            <a:pPr algn="ctr"/>
+            <a:r>
+              <a:rPr sz="2000" b="1" i="0">
+                <a:solidFill>
+                  <a:srgbClr val="269CCB"/>
+                </a:solidFill>
+                <a:latin typeface="Calibri"/>
+              </a:rPr>
+              <a:t>Teoria al servicio del proyecto</a:t>
+            </a:r>
+          </a:p>
+        </p:txBody>
+      </p:sp>
+    </p:spTree>
+  </p:cSld>
+  <p:clrMapOvr>
+    <a:masterClrMapping/>
+  </p:clrMapOvr>
+</p:sld>
+</file>
+
 <file path=ppt/slides/slide3.xml><?xml version="1.0" encoding="utf-8"?>
 <p:sld xmlns:a="http://schemas.openxmlformats.org/drawingml/2006/main" xmlns:p="http://schemas.openxmlformats.org/presentationml/2006/main" xmlns:r="http://schemas.openxmlformats.org/officeDocument/2006/relationships">
   <p:cSld>
@@ -10382,7 +11173,7 @@
                 </a:solidFill>
                 <a:latin typeface="Calibri"/>
               </a:rPr>
-              <a:t>Con las necesidades en la mano se separan dos familias</a:t>
+              <a:t>Con las necesidades en la mano se separan dos familias (1/2)</a:t>
             </a:r>
           </a:p>
         </p:txBody>
@@ -10415,13 +11206,13 @@
               </a:spcAft>
             </a:pPr>
             <a:r>
-              <a:rPr sz="1900" b="0" i="0">
+              <a:rPr sz="2000" b="0" i="0">
                 <a:solidFill>
                   <a:srgbClr val="333333"/>
                 </a:solidFill>
                 <a:latin typeface="Calibri"/>
               </a:rPr>
-              <a:t>–   Con las necesidades en la mano se separan dos familias.</a:t>
+              <a:t>–   Un requisito funcional (RF) describe una capacidad observable del sistema, algo que alguien puede hacer con el</a:t>
             </a:r>
           </a:p>
           <a:p>
@@ -10431,13 +11222,13 @@
               </a:spcAft>
             </a:pPr>
             <a:r>
-              <a:rPr sz="1900" b="0" i="0">
+              <a:rPr sz="2000" b="0" i="0">
                 <a:solidFill>
                   <a:srgbClr val="333333"/>
                 </a:solidFill>
                 <a:latin typeface="Calibri"/>
               </a:rPr>
-              <a:t>–   Un requisito funcional (RF) describe una capacidad observable del sistema, algo que alguien puede hacer con el</a:t>
+              <a:t>–   Y se escribe con la plantilla el sistema debe permitir a &lt;actor&gt; &lt;accion&gt; &lt;objeto&gt; [bajo &lt;condicion&gt;]; el truco practico es que si al leerlo usted puede imaginar un boton, un formulario o una pantalla, es funcional.</a:t>
             </a:r>
           </a:p>
           <a:p>
@@ -10447,77 +11238,13 @@
               </a:spcAft>
             </a:pPr>
             <a:r>
-              <a:rPr sz="1900" b="0" i="0">
+              <a:rPr sz="2000" b="0" i="0">
                 <a:solidFill>
                   <a:srgbClr val="333333"/>
                 </a:solidFill>
                 <a:latin typeface="Calibri"/>
               </a:rPr>
-              <a:t>–   Y se escribe con la plantilla el sistema debe permitir a &lt;actor&gt; &lt;accion&gt; &lt;objeto&gt; [bajo &lt;condicion&gt;]; el truco practico es que si al leerlo usted puede imaginar un boton, un formulario o una pantalla, es funcional.</a:t>
-            </a:r>
-          </a:p>
-          <a:p>
-            <a:pPr>
-              <a:spcAft>
-                <a:spcPts val="800"/>
-              </a:spcAft>
-            </a:pPr>
-            <a:r>
-              <a:rPr sz="1900" b="0" i="0">
-                <a:solidFill>
-                  <a:srgbClr val="333333"/>
-                </a:solidFill>
-                <a:latin typeface="Calibri"/>
-              </a:rPr>
               <a:t>–   Un requisito no funcional (RNF) no describe QUE hace el sistema sino QUE TAN BIEN lo hace, y se agrupa en categorias conocidas: desempeno, seguridad y control de acceso, usabilidad, disponibilidad, respaldo, mantenibilidad y portabilidad.</a:t>
-            </a:r>
-          </a:p>
-          <a:p>
-            <a:pPr>
-              <a:spcAft>
-                <a:spcPts val="800"/>
-              </a:spcAft>
-            </a:pPr>
-            <a:r>
-              <a:rPr sz="1900" b="0" i="0">
-                <a:solidFill>
-                  <a:srgbClr val="333333"/>
-                </a:solidFill>
-                <a:latin typeface="Calibri"/>
-              </a:rPr>
-              <a:t>–   En VetCare, la frase que la auxiliar pueda agendar sin llamarme se convierte en dos cosas distintas al mismo tiempo: RF-05 el sistema debe permitir a la auxiliar registrar una cita seleccionando mascota, veterinario, fecha y hora</a:t>
-            </a:r>
-          </a:p>
-          <a:p>
-            <a:pPr>
-              <a:spcAft>
-                <a:spcPts val="800"/>
-              </a:spcAft>
-            </a:pPr>
-            <a:r>
-              <a:rPr sz="1900" b="0" i="0">
-                <a:solidFill>
-                  <a:srgbClr val="333333"/>
-                </a:solidFill>
-                <a:latin typeface="Calibri"/>
-              </a:rPr>
-              <a:t>–   Y RNF-02 el sistema debe manejar dos perfiles de acceso, auxiliar y veterinario, donde la auxiliar puede crear citas pero no puede editar ni ver el diagnostico clinico.</a:t>
-            </a:r>
-          </a:p>
-          <a:p>
-            <a:pPr>
-              <a:spcAft>
-                <a:spcPts val="800"/>
-              </a:spcAft>
-            </a:pPr>
-            <a:r>
-              <a:rPr sz="1900" b="0" i="0">
-                <a:solidFill>
-                  <a:srgbClr val="333333"/>
-                </a:solidFill>
-                <a:latin typeface="Calibri"/>
-              </a:rPr>
-              <a:t>–   Esa separacion importa porque el RF se prueba haciendo clic y el RNF se prueba midiendo o intentando lo prohibido.</a:t>
             </a:r>
           </a:p>
         </p:txBody>
@@ -10698,7 +11425,7 @@
                 </a:solidFill>
                 <a:latin typeface="Calibri"/>
               </a:rPr>
-              <a:t>La regla de oro del oficio es dura y se enuncia asi: si no se puede...</a:t>
+              <a:t>Con las necesidades en la mano se separan dos familias (2/2)</a:t>
             </a:r>
           </a:p>
         </p:txBody>
@@ -10737,7 +11464,7 @@
                 </a:solidFill>
                 <a:latin typeface="Calibri"/>
               </a:rPr>
-              <a:t>–   La regla de oro del oficio es dura y se enuncia asi: si no se puede verificar, no es un requisito, es un deseo.</a:t>
+              <a:t>–   En VetCare, la frase que la auxiliar pueda agendar sin llamarme se convierte en dos cosas distintas al mismo tiempo: RF-05 el sistema debe permitir a la auxiliar registrar una cita seleccionando mascota, veterinario, fecha y hora</a:t>
             </a:r>
           </a:p>
           <a:p>
@@ -10753,87 +11480,7 @@
                 </a:solidFill>
                 <a:latin typeface="Calibri"/>
               </a:rPr>
-              <a:t>–   Hay una lista negra de palabras que suenan a compromiso pero no comprometen a nada: rapido, amigable, facil, intuitivo, robusto, moderno, optimo, eficiente, seguro.</a:t>
-            </a:r>
-          </a:p>
-          <a:p>
-            <a:pPr>
-              <a:spcAft>
-                <a:spcPts val="800"/>
-              </a:spcAft>
-            </a:pPr>
-            <a:r>
-              <a:rPr sz="2000" b="0" i="0">
-                <a:solidFill>
-                  <a:srgbClr val="333333"/>
-                </a:solidFill>
-                <a:latin typeface="Calibri"/>
-              </a:rPr>
-              <a:t>–   Cada vez que aparece una de esas palabras hay que preguntar cuanto, en que condiciones y como lo mediriamos delante del cliente.</a:t>
-            </a:r>
-          </a:p>
-          <a:p>
-            <a:pPr>
-              <a:spcAft>
-                <a:spcPts val="800"/>
-              </a:spcAft>
-            </a:pPr>
-            <a:r>
-              <a:rPr sz="2000" b="0" i="0">
-                <a:solidFill>
-                  <a:srgbClr val="333333"/>
-                </a:solidFill>
-                <a:latin typeface="Calibri"/>
-              </a:rPr>
-              <a:t>–   La frase 4 del Dr. Ramirez, el sistema tiene que ser rapido, no se puede calificar ni aprobar ni rechazar</a:t>
-            </a:r>
-          </a:p>
-          <a:p>
-            <a:pPr>
-              <a:spcAft>
-                <a:spcPts val="800"/>
-              </a:spcAft>
-            </a:pPr>
-            <a:r>
-              <a:rPr sz="2000" b="0" i="0">
-                <a:solidFill>
-                  <a:srgbClr val="333333"/>
-                </a:solidFill>
-                <a:latin typeface="Calibri"/>
-              </a:rPr>
-              <a:t>–   Convertida queda RNF-01: la busqueda de historial por documento del dueno debe devolver resultados en maximo 3 segundos, con 5.000 fichas cargadas y 10 usuarios trabajando al mismo tiempo.</a:t>
-            </a:r>
-          </a:p>
-          <a:p>
-            <a:pPr>
-              <a:spcAft>
-                <a:spcPts val="800"/>
-              </a:spcAft>
-            </a:pPr>
-            <a:r>
-              <a:rPr sz="2000" b="0" i="0">
-                <a:solidFill>
-                  <a:srgbClr val="333333"/>
-                </a:solidFill>
-                <a:latin typeface="Calibri"/>
-              </a:rPr>
-              <a:t>–   Ahora si existe una prueba: se carga la base de ejemplo, se cronometra y el requisito pasa o no pasa.</a:t>
-            </a:r>
-          </a:p>
-          <a:p>
-            <a:pPr>
-              <a:spcAft>
-                <a:spcPts val="800"/>
-              </a:spcAft>
-            </a:pPr>
-            <a:r>
-              <a:rPr sz="2000" b="0" i="0">
-                <a:solidFill>
-                  <a:srgbClr val="333333"/>
-                </a:solidFill>
-                <a:latin typeface="Calibri"/>
-              </a:rPr>
-              <a:t>–   Lo mismo con la frase 1: que las fichas no se pierdan no es requisito, pero RF-01 registrar una ficha con codigo unico e irrepetible mas RNF-04 respaldo automatico diario con restauracion probada una vez al mes, si lo son.</a:t>
+              <a:t>–   Y RNF-02 el sistema debe manejar dos perfiles de acceso, auxiliar y veterinario, donde la auxiliar puede crear citas pero no puede editar ni ver el diagnostico clinico.</a:t>
             </a:r>
           </a:p>
         </p:txBody>
@@ -11014,7 +11661,7 @@
                 </a:solidFill>
                 <a:latin typeface="Calibri"/>
               </a:rPr>
-              <a:t>Priorizar no es ordenar por gusto sino decidir con el cliente que pasa...</a:t>
+              <a:t>La regla de oro del oficio es dura y se enuncia asi: si no se puede... (1/2)</a:t>
             </a:r>
           </a:p>
         </p:txBody>
@@ -11053,7 +11700,7 @@
                 </a:solidFill>
                 <a:latin typeface="Calibri"/>
               </a:rPr>
-              <a:t>–   Priorizar no es ordenar por gusto sino decidir con el cliente que pasa si algo no esta el dia de la entrega, y para eso se usa MoSCoW: Must es lo que sin ello el sistema no sirve y no se sale a produccion</a:t>
+              <a:t>–   La regla de oro del oficio es dura y se enuncia asi: si no se puede verificar, no es un requisito, es un deseo.</a:t>
             </a:r>
           </a:p>
           <a:p>
@@ -11069,7 +11716,7 @@
                 </a:solidFill>
                 <a:latin typeface="Calibri"/>
               </a:rPr>
-              <a:t>–   Should es importante pero existe un plan B manual mientras tanto</a:t>
+              <a:t>–   Hay una lista negra de palabras que suenan a compromiso pero no comprometen a nada: rapido, amigable, facil, intuitivo, robusto, moderno, optimo, eficiente, seguro.</a:t>
             </a:r>
           </a:p>
           <a:p>
@@ -11085,7 +11732,7 @@
                 </a:solidFill>
                 <a:latin typeface="Calibri"/>
               </a:rPr>
-              <a:t>–   Could es lo que se hace si sobra tiempo; y Won't es lo que se declara explicitamente fuera de ESTA version, que es la categoria mas valiosa de las cuatro porque es la unica que le pone freno al alcance infinito.</a:t>
+              <a:t>–   Cada vez que aparece una de esas palabras hay que preguntar cuanto, en que condiciones y como lo mediriamos delante del cliente.</a:t>
             </a:r>
           </a:p>
           <a:p>
@@ -11101,7 +11748,7 @@
                 </a:solidFill>
                 <a:latin typeface="Calibri"/>
               </a:rPr>
-              <a:t>–   La regla practica es que los Must no deberian superar el 60% del esfuerzo estimado, porque si todo es Must nada es Must.</a:t>
+              <a:t>–   La frase 4 del Dr. Ramirez, el sistema tiene que ser rapido, no se puede calificar ni aprobar ni rechazar</a:t>
             </a:r>
           </a:p>
           <a:p>
@@ -11117,39 +11764,7 @@
                 </a:solidFill>
                 <a:latin typeface="Calibri"/>
               </a:rPr>
-              <a:t>–   En VetCare: registrar dueno y mascota, consultar historial y agendar cita son Must, porque atacan los tres dolores de Huellitas; el reporte mensual de consultas es Should</a:t>
-            </a:r>
-          </a:p>
-          <a:p>
-            <a:pPr>
-              <a:spcAft>
-                <a:spcPts val="800"/>
-              </a:spcAft>
-            </a:pPr>
-            <a:r>
-              <a:rPr sz="2000" b="0" i="0">
-                <a:solidFill>
-                  <a:srgbClr val="333333"/>
-                </a:solidFill>
-                <a:latin typeface="Calibri"/>
-              </a:rPr>
-              <a:t>–   Porque hoy el Dr. Ramirez lo hace contando a mano y puede sobrevivir un mes mas; el envio de recordatorios por WhatsApp y la facturacion electronica son Won't de esta version</a:t>
-            </a:r>
-          </a:p>
-          <a:p>
-            <a:pPr>
-              <a:spcAft>
-                <a:spcPts val="800"/>
-              </a:spcAft>
-            </a:pPr>
-            <a:r>
-              <a:rPr sz="2000" b="0" i="0">
-                <a:solidFill>
-                  <a:srgbClr val="333333"/>
-                </a:solidFill>
-                <a:latin typeface="Calibri"/>
-              </a:rPr>
-              <a:t>–   Y se escriben en el documento con esa etiqueta para que nadie los reclame despues como si hubieran sido prometidos.</a:t>
+              <a:t>–   Convertida queda RNF-01: la busqueda de historial por documento del dueno debe devolver resultados en maximo 3 segundos, con 5.000 fichas cargadas y 10 usuarios trabajando al mismo tiempo.</a:t>
             </a:r>
           </a:p>
         </p:txBody>
@@ -11330,7 +11945,7 @@
                 </a:solidFill>
                 <a:latin typeface="Calibri"/>
               </a:rPr>
-              <a:t>El ultimo pedazo es la trazabilidad, que es poder seguir cada requisito...</a:t>
+              <a:t>La regla de oro del oficio es dura y se enuncia asi: si no se puede... (2/2)</a:t>
             </a:r>
           </a:p>
         </p:txBody>
@@ -11369,7 +11984,7 @@
                 </a:solidFill>
                 <a:latin typeface="Calibri"/>
               </a:rPr>
-              <a:t>–   El ultimo pedazo es la trazabilidad, que es poder seguir cada requisito hacia atras y hacia adelante.</a:t>
+              <a:t>–   Ahora si existe una prueba: se carga la base de ejemplo, se cronometra y el requisito pasa o no pasa.</a:t>
             </a:r>
           </a:p>
           <a:p>
@@ -11385,87 +12000,7 @@
                 </a:solidFill>
                 <a:latin typeface="Calibri"/>
               </a:rPr>
-              <a:t>–   Hacia atras: de donde salio este RF, quien lo pidio, en que frase de la entrevista, en que fecha; asi cuando alguien pregunte y esto por que esta aqui hay respuesta y no cara de sorpresa.</a:t>
-            </a:r>
-          </a:p>
-          <a:p>
-            <a:pPr>
-              <a:spcAft>
-                <a:spcPts val="800"/>
-              </a:spcAft>
-            </a:pPr>
-            <a:r>
-              <a:rPr sz="2000" b="0" i="0">
-                <a:solidFill>
-                  <a:srgbClr val="333333"/>
-                </a:solidFill>
-                <a:latin typeface="Calibri"/>
-              </a:rPr>
-              <a:t>–   Hacia adelante: en que caso de uso se desarrolla, en que pantalla del mockup se ve, en que clase del diagrama UML aparece y con que prueba se acepta.</a:t>
-            </a:r>
-          </a:p>
-          <a:p>
-            <a:pPr>
-              <a:spcAft>
-                <a:spcPts val="800"/>
-              </a:spcAft>
-            </a:pPr>
-            <a:r>
-              <a:rPr sz="2000" b="0" i="0">
-                <a:solidFill>
-                  <a:srgbClr val="333333"/>
-                </a:solidFill>
-                <a:latin typeface="Calibri"/>
-              </a:rPr>
-              <a:t>–   Se lleva en una matriz simple de cuatro columnas y se actualiza cada clase.</a:t>
-            </a:r>
-          </a:p>
-          <a:p>
-            <a:pPr>
-              <a:spcAft>
-                <a:spcPts val="800"/>
-              </a:spcAft>
-            </a:pPr>
-            <a:r>
-              <a:rPr sz="2000" b="0" i="0">
-                <a:solidFill>
-                  <a:srgbClr val="333333"/>
-                </a:solidFill>
-                <a:latin typeface="Calibri"/>
-              </a:rPr>
-              <a:t>–   Esto no es burocracia: es lo que permite que cuando el cliente cambie de opinion, usted sepa en dos minutos que se rompe y cuanto cuesta</a:t>
-            </a:r>
-          </a:p>
-          <a:p>
-            <a:pPr>
-              <a:spcAft>
-                <a:spcPts val="800"/>
-              </a:spcAft>
-            </a:pPr>
-            <a:r>
-              <a:rPr sz="2000" b="0" i="0">
-                <a:solidFill>
-                  <a:srgbClr val="333333"/>
-                </a:solidFill>
-                <a:latin typeface="Calibri"/>
-              </a:rPr>
-              <a:t>–   Y en el Proyecto Integrador es lo que hace posible que el companero que solo cursa Programacion II reciba estos planos y sepa exactamente que implementar y por que, sin tener que volver a entrevistar al veterinario.</a:t>
-            </a:r>
-          </a:p>
-          <a:p>
-            <a:pPr>
-              <a:spcAft>
-                <a:spcPts val="800"/>
-              </a:spcAft>
-            </a:pPr>
-            <a:r>
-              <a:rPr sz="2000" b="0" i="0">
-                <a:solidFill>
-                  <a:srgbClr val="333333"/>
-                </a:solidFill>
-                <a:latin typeface="Calibri"/>
-              </a:rPr>
-              <a:t>–   Quien solo cursa Seminario cierra el ciclo distinto pero completo: su matriz termina en el prototipo navegable y en el documento de diseno, y eso es una entrega profesional valida, no una version reducida.</a:t>
+              <a:t>–   Lo mismo con la frase 1: que las fichas no se pierdan no es requisito, pero RF-01 registrar una ficha con codigo unico e irrepetible mas RNF-04 respaldo automatico diario con restauracion probada una vez al mes, si lo son.</a:t>
             </a:r>
           </a:p>
         </p:txBody>

--- a/Seminario de Sistemas/Clases/Clase 6 - Requerimientos de software/Presentacion.pptx
+++ b/Seminario de Sistemas/Clases/Clase 6 - Requerimientos de software/Presentacion.pptx
@@ -27,6 +27,8 @@
     <p:sldId id="275" r:id="rId26"/>
     <p:sldId id="276" r:id="rId27"/>
     <p:sldId id="277" r:id="rId28"/>
+    <p:sldId id="278" r:id="rId29"/>
+    <p:sldId id="279" r:id="rId30"/>
   </p:sldIdLst>
   <p:sldSz cx="12191695" cy="6858000" type="screen4x3"/>
   <p:notesSz cx="6858000" cy="9144000"/>
@@ -4415,7 +4417,7 @@
                 </a:solidFill>
                 <a:latin typeface="Calibri"/>
               </a:rPr>
-              <a:t>Ficha de requisito RF-03 (plantilla proyectable)</a:t>
+              <a:t>La priorizacion MoSCoW en Mermaid</a:t>
             </a:r>
           </a:p>
         </p:txBody>
@@ -4429,7 +4431,7 @@
         <p:spPr>
           <a:xfrm>
             <a:off x="457200" y="1261872"/>
-            <a:ext cx="11277295" cy="4773168"/>
+            <a:ext cx="11277295" cy="5093208"/>
           </a:xfrm>
           <a:prstGeom prst="roundRect">
             <a:avLst>
@@ -4549,7 +4551,7 @@
         <p:spPr>
           <a:xfrm>
             <a:off x="777240" y="1719072"/>
-            <a:ext cx="10637215" cy="4133087"/>
+            <a:ext cx="10637215" cy="4453128"/>
           </a:xfrm>
           <a:prstGeom prst="rect">
             <a:avLst/>
@@ -4564,193 +4566,273 @@
           <a:p>
             <a:pPr>
               <a:spcAft>
-                <a:spcPts val="400"/>
+                <a:spcPts val="371"/>
               </a:spcAft>
             </a:pPr>
             <a:r>
-              <a:rPr sz="1400" b="0" i="0">
+              <a:rPr sz="1300" b="0" i="0">
                 <a:solidFill>
                   <a:srgbClr val="FFFFFF"/>
                 </a:solidFill>
                 <a:latin typeface="Calibri"/>
               </a:rPr>
-              <a:t>ID: RF-03</a:t>
+              <a:t>flowchart TB</a:t>
             </a:r>
           </a:p>
           <a:p>
             <a:pPr>
               <a:spcAft>
-                <a:spcPts val="400"/>
+                <a:spcPts val="371"/>
               </a:spcAft>
             </a:pPr>
             <a:r>
-              <a:rPr sz="1400" b="0" i="0">
+              <a:rPr sz="1300" b="0" i="0">
                 <a:solidFill>
                   <a:srgbClr val="FFFFFF"/>
                 </a:solidFill>
                 <a:latin typeface="Calibri"/>
               </a:rPr>
-              <a:t>Nombre: Consultar historial clinico de una mascota</a:t>
+              <a:t>  subgraph must[Must - sin esto no hay producto]</a:t>
             </a:r>
           </a:p>
           <a:p>
             <a:pPr>
               <a:spcAft>
-                <a:spcPts val="400"/>
+                <a:spcPts val="371"/>
               </a:spcAft>
             </a:pPr>
             <a:r>
-              <a:rPr sz="1400" b="0" i="0">
+              <a:rPr sz="1300" b="0" i="0">
                 <a:solidFill>
                   <a:srgbClr val="FFFFFF"/>
                 </a:solidFill>
                 <a:latin typeface="Calibri"/>
               </a:rPr>
-              <a:t>Actor: Veterinario (consulta completa) / Auxiliar (consulta sin diagnostico)</a:t>
+              <a:t>    m1[RF-01 Registrar mascota]</a:t>
             </a:r>
           </a:p>
           <a:p>
             <a:pPr>
               <a:spcAft>
-                <a:spcPts val="400"/>
+                <a:spcPts val="371"/>
               </a:spcAft>
             </a:pPr>
             <a:r>
-              <a:rPr sz="1400" b="0" i="0">
+              <a:rPr sz="1300" b="0" i="0">
                 <a:solidFill>
                   <a:srgbClr val="FFFFFF"/>
                 </a:solidFill>
                 <a:latin typeface="Calibri"/>
               </a:rPr>
-              <a:t>Descripcion: El sistema debe permitir consultar el historial de atenciones de una mascota a partir del documento del dueno.</a:t>
+              <a:t>    m2[RF-03 Agendar cita]</a:t>
             </a:r>
           </a:p>
           <a:p>
             <a:pPr>
               <a:spcAft>
-                <a:spcPts val="400"/>
+                <a:spcPts val="371"/>
               </a:spcAft>
             </a:pPr>
             <a:r>
-              <a:rPr sz="1400" b="0" i="0">
+              <a:rPr sz="1300" b="0" i="0">
                 <a:solidFill>
                   <a:srgbClr val="FFFFFF"/>
                 </a:solidFill>
                 <a:latin typeface="Calibri"/>
               </a:rPr>
-              <a:t>Entrada: documento del dueno o codigo de la mascota</a:t>
+              <a:t>  end</a:t>
             </a:r>
           </a:p>
           <a:p>
             <a:pPr>
               <a:spcAft>
-                <a:spcPts val="400"/>
+                <a:spcPts val="371"/>
               </a:spcAft>
             </a:pPr>
             <a:r>
-              <a:rPr sz="1400" b="0" i="0">
+              <a:rPr sz="1300" b="0" i="0">
                 <a:solidFill>
                   <a:srgbClr val="FFFFFF"/>
                 </a:solidFill>
                 <a:latin typeface="Calibri"/>
               </a:rPr>
-              <a:t>Salida: lista de atenciones con fecha, motivo, diagnostico y veterinario, ordenada de la mas reciente a la mas antigua</a:t>
+              <a:t>  subgraph should[Should - importante, hay alternativa manual]</a:t>
             </a:r>
           </a:p>
           <a:p>
             <a:pPr>
               <a:spcAft>
-                <a:spcPts val="400"/>
+                <a:spcPts val="371"/>
               </a:spcAft>
             </a:pPr>
             <a:r>
-              <a:rPr sz="1400" b="0" i="0">
+              <a:rPr sz="1300" b="0" i="0">
                 <a:solidFill>
                   <a:srgbClr val="FFFFFF"/>
                 </a:solidFill>
                 <a:latin typeface="Calibri"/>
               </a:rPr>
-              <a:t>Regla de negocio: RN-02 una mascota siempre pertenece a un unico dueno registrado</a:t>
+              <a:t>    s1[RF-07 Reporte mensual]</a:t>
             </a:r>
           </a:p>
           <a:p>
             <a:pPr>
               <a:spcAft>
-                <a:spcPts val="400"/>
+                <a:spcPts val="371"/>
               </a:spcAft>
             </a:pPr>
             <a:r>
-              <a:rPr sz="1400" b="0" i="0">
+              <a:rPr sz="1300" b="0" i="0">
                 <a:solidFill>
                   <a:srgbClr val="FFFFFF"/>
                 </a:solidFill>
                 <a:latin typeface="Calibri"/>
               </a:rPr>
-              <a:t>Criterio de verificacion: dado un dueno con 12 atenciones, la busqueda por documento devuelve las 12 en 3 segundos o menos</a:t>
+              <a:t>  end</a:t>
             </a:r>
           </a:p>
           <a:p>
             <a:pPr>
               <a:spcAft>
-                <a:spcPts val="400"/>
+                <a:spcPts val="371"/>
               </a:spcAft>
             </a:pPr>
             <a:r>
-              <a:rPr sz="1400" b="0" i="0">
+              <a:rPr sz="1300" b="0" i="0">
                 <a:solidFill>
                   <a:srgbClr val="FFFFFF"/>
                 </a:solidFill>
                 <a:latin typeface="Calibri"/>
               </a:rPr>
-              <a:t>Prioridad MoSCoW: Must</a:t>
+              <a:t>  subgraph could[Could - si sobra tiempo]</a:t>
             </a:r>
           </a:p>
           <a:p>
             <a:pPr>
               <a:spcAft>
-                <a:spcPts val="400"/>
+                <a:spcPts val="371"/>
               </a:spcAft>
             </a:pPr>
             <a:r>
-              <a:rPr sz="1400" b="0" i="0">
+              <a:rPr sz="1300" b="0" i="0">
                 <a:solidFill>
                   <a:srgbClr val="FFFFFF"/>
                 </a:solidFill>
                 <a:latin typeface="Calibri"/>
               </a:rPr>
-              <a:t>Origen: entrevista Dr. Ramirez, frase 2 (necesidad NEC-02)</a:t>
+              <a:t>    c1[RF-11 Exportar a Excel]</a:t>
             </a:r>
           </a:p>
           <a:p>
             <a:pPr>
               <a:spcAft>
-                <a:spcPts val="400"/>
+                <a:spcPts val="371"/>
               </a:spcAft>
             </a:pPr>
             <a:r>
-              <a:rPr sz="1400" b="0" i="0">
+              <a:rPr sz="1300" b="0" i="0">
                 <a:solidFill>
                   <a:srgbClr val="FFFFFF"/>
                 </a:solidFill>
                 <a:latin typeface="Calibri"/>
               </a:rPr>
-              <a:t>Trazabilidad: NEC-02 -&gt; RF-03 -&gt; CU-04 -&gt; Pantalla P-02 -&gt; Prueba PR-07</a:t>
+              <a:t>  end</a:t>
             </a:r>
           </a:p>
           <a:p>
             <a:pPr>
               <a:spcAft>
-                <a:spcPts val="400"/>
+                <a:spcPts val="371"/>
               </a:spcAft>
             </a:pPr>
             <a:r>
-              <a:rPr sz="1400" b="0" i="0">
+              <a:rPr sz="1300" b="0" i="0">
                 <a:solidFill>
                   <a:srgbClr val="FFFFFF"/>
                 </a:solidFill>
                 <a:latin typeface="Calibri"/>
               </a:rPr>
-              <a:t>Estado: aprobado por el cliente</a:t>
+              <a:t>  subgraph wont[Wont - fuera de este alcance]</a:t>
+            </a:r>
+          </a:p>
+          <a:p>
+            <a:pPr>
+              <a:spcAft>
+                <a:spcPts val="371"/>
+              </a:spcAft>
+            </a:pPr>
+            <a:r>
+              <a:rPr sz="1300" b="0" i="0">
+                <a:solidFill>
+                  <a:srgbClr val="FFFFFF"/>
+                </a:solidFill>
+                <a:latin typeface="Calibri"/>
+              </a:rPr>
+              <a:t>    w1[RF-15 App movil]</a:t>
+            </a:r>
+          </a:p>
+          <a:p>
+            <a:pPr>
+              <a:spcAft>
+                <a:spcPts val="371"/>
+              </a:spcAft>
+            </a:pPr>
+            <a:r>
+              <a:rPr sz="1300" b="0" i="0">
+                <a:solidFill>
+                  <a:srgbClr val="FFFFFF"/>
+                </a:solidFill>
+                <a:latin typeface="Calibri"/>
+              </a:rPr>
+              <a:t>  end</a:t>
+            </a:r>
+          </a:p>
+          <a:p>
+            <a:pPr>
+              <a:spcAft>
+                <a:spcPts val="371"/>
+              </a:spcAft>
+            </a:pPr>
+            <a:r>
+              <a:rPr sz="1300" b="0" i="0">
+                <a:solidFill>
+                  <a:srgbClr val="FFFFFF"/>
+                </a:solidFill>
+                <a:latin typeface="Calibri"/>
+              </a:rPr>
+              <a:t/>
+            </a:r>
+          </a:p>
+          <a:p>
+            <a:pPr>
+              <a:spcAft>
+                <a:spcPts val="371"/>
+              </a:spcAft>
+            </a:pPr>
+            <a:r>
+              <a:rPr sz="1300" b="0" i="0">
+                <a:solidFill>
+                  <a:srgbClr val="FFFFFF"/>
+                </a:solidFill>
+                <a:latin typeface="Calibri"/>
+              </a:rPr>
+              <a:t>%% Wont NO es «nunca»: es «no en esta version», y va escrito para que</a:t>
+            </a:r>
+          </a:p>
+          <a:p>
+            <a:pPr>
+              <a:spcAft>
+                <a:spcPts val="371"/>
+              </a:spcAft>
+            </a:pPr>
+            <a:r>
+              <a:rPr sz="1300" b="0" i="0">
+                <a:solidFill>
+                  <a:srgbClr val="FFFFFF"/>
+                </a:solidFill>
+                <a:latin typeface="Calibri"/>
+              </a:rPr>
+              <a:t>%% nadie lo de por incluido. Es la mitad del valor de MoSCoW.</a:t>
             </a:r>
           </a:p>
         </p:txBody>
@@ -4758,41 +4840,6 @@
       <p:sp>
         <p:nvSpPr>
           <p:cNvPr id="9" name="TextBox 8"/>
-          <p:cNvSpPr txBox="1"/>
-          <p:nvPr/>
-        </p:nvSpPr>
-        <p:spPr>
-          <a:xfrm>
-            <a:off x="457200" y="6080760"/>
-            <a:ext cx="11277295" cy="320040"/>
-          </a:xfrm>
-          <a:prstGeom prst="rect">
-            <a:avLst/>
-          </a:prstGeom>
-          <a:noFill/>
-        </p:spPr>
-        <p:txBody>
-          <a:bodyPr wrap="square">
-            <a:spAutoFit/>
-          </a:bodyPr>
-          <a:lstStyle/>
-          <a:p>
-            <a:pPr algn="ctr"/>
-            <a:r>
-              <a:rPr sz="1200" b="0" i="1">
-                <a:solidFill>
-                  <a:srgbClr val="666666"/>
-                </a:solidFill>
-                <a:latin typeface="Calibri"/>
-              </a:rPr>
-              <a:t>Un requisito sin criterio de verificacion y sin origen es una opinion con numero de identificacion.</a:t>
-            </a:r>
-          </a:p>
-        </p:txBody>
-      </p:sp>
-      <p:sp>
-        <p:nvSpPr>
-          <p:cNvPr id="10" name="TextBox 9"/>
           <p:cNvSpPr txBox="1"/>
           <p:nvPr/>
         </p:nvSpPr>
@@ -4966,21 +5013,141 @@
                 </a:solidFill>
                 <a:latin typeface="Calibri"/>
               </a:rPr>
-              <a:t>Demo del dia</a:t>
-            </a:r>
-          </a:p>
-        </p:txBody>
-      </p:sp>
-      <p:sp>
-        <p:nvSpPr>
-          <p:cNvPr id="5" name="TextBox 4"/>
+              <a:t>El RNF cuantificado: la diferencia esta en el numero</a:t>
+            </a:r>
+          </a:p>
+        </p:txBody>
+      </p:sp>
+      <p:sp>
+        <p:nvSpPr>
+          <p:cNvPr id="5" name="Rounded Rectangle 4"/>
+          <p:cNvSpPr/>
+          <p:nvPr/>
+        </p:nvSpPr>
+        <p:spPr>
+          <a:xfrm>
+            <a:off x="457200" y="1261872"/>
+            <a:ext cx="11277295" cy="5093208"/>
+          </a:xfrm>
+          <a:prstGeom prst="roundRect">
+            <a:avLst>
+              <a:gd name="adj" fmla="val 12000"/>
+            </a:avLst>
+          </a:prstGeom>
+          <a:solidFill>
+            <a:srgbClr val="1E2A38"/>
+          </a:solidFill>
+          <a:ln>
+            <a:noFill/>
+          </a:ln>
+        </p:spPr>
+        <p:style>
+          <a:lnRef idx="1">
+            <a:schemeClr val="accent1"/>
+          </a:lnRef>
+          <a:fillRef idx="3">
+            <a:schemeClr val="accent1"/>
+          </a:fillRef>
+          <a:effectRef idx="2">
+            <a:schemeClr val="accent1"/>
+          </a:effectRef>
+          <a:fontRef idx="minor">
+            <a:schemeClr val="lt1"/>
+          </a:fontRef>
+        </p:style>
+        <p:txBody>
+          <a:bodyPr rtlCol="0" anchor="ctr"/>
+          <a:lstStyle/>
+          <a:p>
+            <a:pPr algn="ctr"/>
+          </a:p>
+        </p:txBody>
+      </p:sp>
+      <p:sp>
+        <p:nvSpPr>
+          <p:cNvPr id="6" name="Rectangle 5"/>
+          <p:cNvSpPr/>
+          <p:nvPr/>
+        </p:nvSpPr>
+        <p:spPr>
+          <a:xfrm>
+            <a:off x="457200" y="1261872"/>
+            <a:ext cx="11277295" cy="320040"/>
+          </a:xfrm>
+          <a:prstGeom prst="rect">
+            <a:avLst/>
+          </a:prstGeom>
+          <a:solidFill>
+            <a:srgbClr val="095292"/>
+          </a:solidFill>
+          <a:ln>
+            <a:noFill/>
+          </a:ln>
+        </p:spPr>
+        <p:style>
+          <a:lnRef idx="1">
+            <a:schemeClr val="accent1"/>
+          </a:lnRef>
+          <a:fillRef idx="3">
+            <a:schemeClr val="accent1"/>
+          </a:fillRef>
+          <a:effectRef idx="2">
+            <a:schemeClr val="accent1"/>
+          </a:effectRef>
+          <a:fontRef idx="minor">
+            <a:schemeClr val="lt1"/>
+          </a:fontRef>
+        </p:style>
+        <p:txBody>
+          <a:bodyPr rtlCol="0" anchor="ctr"/>
+          <a:lstStyle/>
+          <a:p>
+            <a:pPr algn="ctr"/>
+          </a:p>
+        </p:txBody>
+      </p:sp>
+      <p:sp>
+        <p:nvSpPr>
+          <p:cNvPr id="7" name="TextBox 6"/>
           <p:cNvSpPr txBox="1"/>
           <p:nvPr/>
         </p:nvSpPr>
         <p:spPr>
           <a:xfrm>
-            <a:off x="457200" y="1170432"/>
-            <a:ext cx="11277295" cy="5230368"/>
+            <a:off x="685800" y="1307592"/>
+            <a:ext cx="10820095" cy="256032"/>
+          </a:xfrm>
+          <a:prstGeom prst="rect">
+            <a:avLst/>
+          </a:prstGeom>
+          <a:noFill/>
+        </p:spPr>
+        <p:txBody>
+          <a:bodyPr wrap="square" anchor="ctr"/>
+          <a:lstStyle/>
+          <a:p>
+            <a:r>
+              <a:rPr sz="1000" b="1" i="0">
+                <a:solidFill>
+                  <a:srgbClr val="269CCB"/>
+                </a:solidFill>
+                <a:latin typeface="Calibri"/>
+              </a:rPr>
+              <a:t>● ● ●</a:t>
+            </a:r>
+          </a:p>
+        </p:txBody>
+      </p:sp>
+      <p:sp>
+        <p:nvSpPr>
+          <p:cNvPr id="8" name="TextBox 7"/>
+          <p:cNvSpPr txBox="1"/>
+          <p:nvPr/>
+        </p:nvSpPr>
+        <p:spPr>
+          <a:xfrm>
+            <a:off x="777240" y="1719072"/>
+            <a:ext cx="10637215" cy="4453128"/>
           </a:xfrm>
           <a:prstGeom prst="rect">
             <a:avLst/>
@@ -4995,92 +5162,216 @@
           <a:p>
             <a:pPr>
               <a:spcAft>
-                <a:spcPts val="800"/>
+                <a:spcPts val="400"/>
               </a:spcAft>
             </a:pPr>
             <a:r>
-              <a:rPr sz="2000" b="0" i="0">
-                <a:solidFill>
-                  <a:srgbClr val="333333"/>
-                </a:solidFill>
-                <a:latin typeface="Calibri"/>
-              </a:rPr>
-              <a:t>–   </a:t>
-            </a:r>
-            <a:r>
-              <a:rPr sz="2000" b="1" i="0">
-                <a:solidFill>
-                  <a:srgbClr val="333333"/>
-                </a:solidFill>
-                <a:latin typeface="Calibri"/>
-              </a:rPr>
-              <a:t>Herramienta:</a:t>
-            </a:r>
-            <a:r>
-              <a:rPr sz="2000" b="0" i="0">
-                <a:solidFill>
-                  <a:srgbClr val="333333"/>
-                </a:solidFill>
-                <a:latin typeface="Calibri"/>
-              </a:rPr>
-              <a:t> Google Docs · draw.io</a:t>
+              <a:rPr sz="1400" b="0" i="0">
+                <a:solidFill>
+                  <a:srgbClr val="FFFFFF"/>
+                </a:solidFill>
+                <a:latin typeface="Calibri"/>
+              </a:rPr>
+              <a:t>RNF-02  Disponibilidad del agendamiento</a:t>
             </a:r>
           </a:p>
           <a:p>
             <a:pPr>
               <a:spcAft>
-                <a:spcPts val="800"/>
+                <a:spcPts val="400"/>
               </a:spcAft>
             </a:pPr>
             <a:r>
-              <a:rPr sz="2000" b="0" i="0">
-                <a:solidFill>
-                  <a:srgbClr val="333333"/>
-                </a:solidFill>
-                <a:latin typeface="Calibri"/>
-              </a:rPr>
-              <a:t>–   </a:t>
-            </a:r>
-            <a:r>
-              <a:rPr sz="2000" b="1" i="0">
-                <a:solidFill>
-                  <a:srgbClr val="333333"/>
-                </a:solidFill>
-                <a:latin typeface="Calibri"/>
-              </a:rPr>
-              <a:t>Demo:</a:t>
-            </a:r>
-            <a:r>
-              <a:rPr sz="2000" b="0" i="0">
-                <a:solidFill>
-                  <a:srgbClr val="333333"/>
-                </a:solidFill>
-                <a:latin typeface="Calibri"/>
-              </a:rPr>
-              <a:t> El docente toma en vivo dos frases crudas de la entrevista al Dr. Ramirez y las convierte, frente al grupo, en un RF y un RNF usando la plantilla.</a:t>
+              <a:rPr sz="1400" b="0" i="0">
+                <a:solidFill>
+                  <a:srgbClr val="FFFFFF"/>
+                </a:solidFill>
+                <a:latin typeface="Calibri"/>
+              </a:rPr>
+              <a:t/>
             </a:r>
           </a:p>
           <a:p>
             <a:pPr>
               <a:spcAft>
-                <a:spcPts val="800"/>
+                <a:spcPts val="400"/>
               </a:spcAft>
             </a:pPr>
             <a:r>
-              <a:rPr sz="2000" b="0" i="0">
-                <a:solidFill>
-                  <a:srgbClr val="333333"/>
-                </a:solidFill>
-                <a:latin typeface="Calibri"/>
-              </a:rPr>
-              <a:t>–   Mismo dominio VetCare — no otro ejemplo. Aqui se diseña, no se programa.</a:t>
-            </a:r>
-          </a:p>
-        </p:txBody>
-      </p:sp>
-      <p:sp>
-        <p:nvSpPr>
-          <p:cNvPr id="6" name="TextBox 5"/>
+              <a:rPr sz="1400" b="0" i="0">
+                <a:solidFill>
+                  <a:srgbClr val="FFFFFF"/>
+                </a:solidFill>
+                <a:latin typeface="Calibri"/>
+              </a:rPr>
+              <a:t>MAL:  «el sistema debe estar disponible»</a:t>
+            </a:r>
+          </a:p>
+          <a:p>
+            <a:pPr>
+              <a:spcAft>
+                <a:spcPts val="400"/>
+              </a:spcAft>
+            </a:pPr>
+            <a:r>
+              <a:rPr sz="1400" b="0" i="0">
+                <a:solidFill>
+                  <a:srgbClr val="FFFFFF"/>
+                </a:solidFill>
+                <a:latin typeface="Calibri"/>
+              </a:rPr>
+              <a:t>BIEN: «el modulo de agendamiento DEBE estar disponible el 99% del</a:t>
+            </a:r>
+          </a:p>
+          <a:p>
+            <a:pPr>
+              <a:spcAft>
+                <a:spcPts val="400"/>
+              </a:spcAft>
+            </a:pPr>
+            <a:r>
+              <a:rPr sz="1400" b="0" i="0">
+                <a:solidFill>
+                  <a:srgbClr val="FFFFFF"/>
+                </a:solidFill>
+                <a:latin typeface="Calibri"/>
+              </a:rPr>
+              <a:t>       horario de atencion (lunes a sabado, 07:00-19:00), medido</a:t>
+            </a:r>
+          </a:p>
+          <a:p>
+            <a:pPr>
+              <a:spcAft>
+                <a:spcPts val="400"/>
+              </a:spcAft>
+            </a:pPr>
+            <a:r>
+              <a:rPr sz="1400" b="0" i="0">
+                <a:solidFill>
+                  <a:srgbClr val="FFFFFF"/>
+                </a:solidFill>
+                <a:latin typeface="Calibri"/>
+              </a:rPr>
+              <a:t>       mensualmente sobre el registro de caidas»</a:t>
+            </a:r>
+          </a:p>
+          <a:p>
+            <a:pPr>
+              <a:spcAft>
+                <a:spcPts val="400"/>
+              </a:spcAft>
+            </a:pPr>
+            <a:r>
+              <a:rPr sz="1400" b="0" i="0">
+                <a:solidFill>
+                  <a:srgbClr val="FFFFFF"/>
+                </a:solidFill>
+                <a:latin typeface="Calibri"/>
+              </a:rPr>
+              <a:t/>
+            </a:r>
+          </a:p>
+          <a:p>
+            <a:pPr>
+              <a:spcAft>
+                <a:spcPts val="400"/>
+              </a:spcAft>
+            </a:pPr>
+            <a:r>
+              <a:rPr sz="1400" b="0" i="0">
+                <a:solidFill>
+                  <a:srgbClr val="FFFFFF"/>
+                </a:solidFill>
+                <a:latin typeface="Calibri"/>
+              </a:rPr>
+              <a:t>-- Los cuatro pedazos que lo hacen verificable:</a:t>
+            </a:r>
+          </a:p>
+          <a:p>
+            <a:pPr>
+              <a:spcAft>
+                <a:spcPts val="400"/>
+              </a:spcAft>
+            </a:pPr>
+            <a:r>
+              <a:rPr sz="1400" b="0" i="0">
+                <a:solidFill>
+                  <a:srgbClr val="FFFFFF"/>
+                </a:solidFill>
+                <a:latin typeface="Calibri"/>
+              </a:rPr>
+              <a:t>--   1. la magnitud       99%</a:t>
+            </a:r>
+          </a:p>
+          <a:p>
+            <a:pPr>
+              <a:spcAft>
+                <a:spcPts val="400"/>
+              </a:spcAft>
+            </a:pPr>
+            <a:r>
+              <a:rPr sz="1400" b="0" i="0">
+                <a:solidFill>
+                  <a:srgbClr val="FFFFFF"/>
+                </a:solidFill>
+                <a:latin typeface="Calibri"/>
+              </a:rPr>
+              <a:t>--   2. la ventana        lun-sab 07:00-19:00</a:t>
+            </a:r>
+          </a:p>
+          <a:p>
+            <a:pPr>
+              <a:spcAft>
+                <a:spcPts val="400"/>
+              </a:spcAft>
+            </a:pPr>
+            <a:r>
+              <a:rPr sz="1400" b="0" i="0">
+                <a:solidFill>
+                  <a:srgbClr val="FFFFFF"/>
+                </a:solidFill>
+                <a:latin typeface="Calibri"/>
+              </a:rPr>
+              <a:t>--   3. el periodo        mensual</a:t>
+            </a:r>
+          </a:p>
+          <a:p>
+            <a:pPr>
+              <a:spcAft>
+                <a:spcPts val="400"/>
+              </a:spcAft>
+            </a:pPr>
+            <a:r>
+              <a:rPr sz="1400" b="0" i="0">
+                <a:solidFill>
+                  <a:srgbClr val="FFFFFF"/>
+                </a:solidFill>
+                <a:latin typeface="Calibri"/>
+              </a:rPr>
+              <a:t>--   4. la fuente del dato  el registro de caidas</a:t>
+            </a:r>
+          </a:p>
+          <a:p>
+            <a:pPr>
+              <a:spcAft>
+                <a:spcPts val="400"/>
+              </a:spcAft>
+            </a:pPr>
+            <a:r>
+              <a:rPr sz="1400" b="0" i="0">
+                <a:solidFill>
+                  <a:srgbClr val="FFFFFF"/>
+                </a:solidFill>
+                <a:latin typeface="Calibri"/>
+              </a:rPr>
+              <a:t>-- Si falta uno, nadie puede decir si se cumplio.</a:t>
+            </a:r>
+          </a:p>
+        </p:txBody>
+      </p:sp>
+      <p:sp>
+        <p:nvSpPr>
+          <p:cNvPr id="9" name="TextBox 8"/>
           <p:cNvSpPr txBox="1"/>
           <p:nvPr/>
         </p:nvSpPr>
@@ -5148,7 +5439,7 @@
         <p:spPr>
           <a:xfrm>
             <a:off x="0" y="0"/>
-            <a:ext cx="12191695" cy="1170432"/>
+            <a:ext cx="12191695" cy="960120"/>
           </a:xfrm>
           <a:prstGeom prst="rect">
             <a:avLst/>
@@ -5190,7 +5481,7 @@
         </p:nvSpPr>
         <p:spPr>
           <a:xfrm>
-            <a:off x="0" y="1170432"/>
+            <a:off x="0" y="960120"/>
             <a:ext cx="12191695" cy="41148"/>
           </a:xfrm>
           <a:prstGeom prst="rect">
@@ -5234,7 +5525,7 @@
         <p:spPr>
           <a:xfrm>
             <a:off x="457200" y="164592"/>
-            <a:ext cx="11277295" cy="384048"/>
+            <a:ext cx="11277295" cy="502920"/>
           </a:xfrm>
           <a:prstGeom prst="rect">
             <a:avLst/>
@@ -5254,55 +5545,21 @@
                 </a:solidFill>
                 <a:latin typeface="Calibri"/>
               </a:rPr>
-              <a:t>Herramientas de hoy</a:t>
-            </a:r>
-          </a:p>
-        </p:txBody>
-      </p:sp>
-      <p:sp>
-        <p:nvSpPr>
-          <p:cNvPr id="5" name="TextBox 4"/>
-          <p:cNvSpPr txBox="1"/>
-          <p:nvPr/>
-        </p:nvSpPr>
-        <p:spPr>
-          <a:xfrm>
-            <a:off x="457200" y="566928"/>
-            <a:ext cx="11277295" cy="411480"/>
-          </a:xfrm>
-          <a:prstGeom prst="rect">
-            <a:avLst/>
-          </a:prstGeom>
-          <a:noFill/>
-        </p:spPr>
-        <p:txBody>
-          <a:bodyPr wrap="square">
-            <a:spAutoFit/>
-          </a:bodyPr>
-          <a:lstStyle/>
-          <a:p>
-            <a:r>
-              <a:rPr sz="1400" b="0" i="0">
-                <a:solidFill>
-                  <a:srgbClr val="B8D8EE"/>
-                </a:solidFill>
-                <a:latin typeface="Calibri"/>
-              </a:rPr>
-              <a:t>Gratis · funcionan en el navegador</a:t>
-            </a:r>
-          </a:p>
-        </p:txBody>
-      </p:sp>
-      <p:sp>
-        <p:nvSpPr>
-          <p:cNvPr id="6" name="Rounded Rectangle 5"/>
+              <a:t>Ficha de requisito RF-03 (plantilla proyectable)</a:t>
+            </a:r>
+          </a:p>
+        </p:txBody>
+      </p:sp>
+      <p:sp>
+        <p:nvSpPr>
+          <p:cNvPr id="5" name="Rounded Rectangle 4"/>
           <p:cNvSpPr/>
           <p:nvPr/>
         </p:nvSpPr>
         <p:spPr>
           <a:xfrm>
-            <a:off x="457200" y="1591056"/>
-            <a:ext cx="3624986" cy="2331720"/>
+            <a:off x="457200" y="1261872"/>
+            <a:ext cx="11277295" cy="4773168"/>
           </a:xfrm>
           <a:prstGeom prst="roundRect">
             <a:avLst>
@@ -5310,7 +5567,7 @@
             </a:avLst>
           </a:prstGeom>
           <a:solidFill>
-            <a:srgbClr val="F2F2F2"/>
+            <a:srgbClr val="1E2A38"/>
           </a:solidFill>
           <a:ln>
             <a:noFill/>
@@ -5340,14 +5597,14 @@
       </p:sp>
       <p:sp>
         <p:nvSpPr>
-          <p:cNvPr id="7" name="Rectangle 6"/>
+          <p:cNvPr id="6" name="Rectangle 5"/>
           <p:cNvSpPr/>
           <p:nvPr/>
         </p:nvSpPr>
         <p:spPr>
           <a:xfrm>
-            <a:off x="457200" y="1591056"/>
-            <a:ext cx="3624986" cy="64008"/>
+            <a:off x="457200" y="1261872"/>
+            <a:ext cx="11277295" cy="320040"/>
           </a:xfrm>
           <a:prstGeom prst="rect">
             <a:avLst/>
@@ -5383,531 +5640,289 @@
       </p:sp>
       <p:sp>
         <p:nvSpPr>
-          <p:cNvPr id="8" name="Rectangle 7"/>
-          <p:cNvSpPr/>
-          <p:nvPr/>
-        </p:nvSpPr>
-        <p:spPr>
-          <a:xfrm>
-            <a:off x="457200" y="1655064"/>
-            <a:ext cx="3624986" cy="27432"/>
-          </a:xfrm>
-          <a:prstGeom prst="rect">
-            <a:avLst/>
-          </a:prstGeom>
-          <a:solidFill>
-            <a:srgbClr val="FFD000"/>
-          </a:solidFill>
-          <a:ln>
-            <a:noFill/>
-          </a:ln>
-        </p:spPr>
-        <p:style>
-          <a:lnRef idx="1">
-            <a:schemeClr val="accent1"/>
-          </a:lnRef>
-          <a:fillRef idx="3">
-            <a:schemeClr val="accent1"/>
-          </a:fillRef>
-          <a:effectRef idx="2">
-            <a:schemeClr val="accent1"/>
-          </a:effectRef>
-          <a:fontRef idx="minor">
-            <a:schemeClr val="lt1"/>
-          </a:fontRef>
-        </p:style>
-        <p:txBody>
-          <a:bodyPr rtlCol="0" anchor="ctr"/>
+          <p:cNvPr id="7" name="TextBox 6"/>
+          <p:cNvSpPr txBox="1"/>
+          <p:nvPr/>
+        </p:nvSpPr>
+        <p:spPr>
+          <a:xfrm>
+            <a:off x="685800" y="1307592"/>
+            <a:ext cx="10820095" cy="256032"/>
+          </a:xfrm>
+          <a:prstGeom prst="rect">
+            <a:avLst/>
+          </a:prstGeom>
+          <a:noFill/>
+        </p:spPr>
+        <p:txBody>
+          <a:bodyPr wrap="square" anchor="ctr"/>
+          <a:lstStyle/>
+          <a:p>
+            <a:r>
+              <a:rPr sz="1000" b="1" i="0">
+                <a:solidFill>
+                  <a:srgbClr val="269CCB"/>
+                </a:solidFill>
+                <a:latin typeface="Calibri"/>
+              </a:rPr>
+              <a:t>● ● ●</a:t>
+            </a:r>
+          </a:p>
+        </p:txBody>
+      </p:sp>
+      <p:sp>
+        <p:nvSpPr>
+          <p:cNvPr id="8" name="TextBox 7"/>
+          <p:cNvSpPr txBox="1"/>
+          <p:nvPr/>
+        </p:nvSpPr>
+        <p:spPr>
+          <a:xfrm>
+            <a:off x="777240" y="1719072"/>
+            <a:ext cx="10637215" cy="4133087"/>
+          </a:xfrm>
+          <a:prstGeom prst="rect">
+            <a:avLst/>
+          </a:prstGeom>
+          <a:noFill/>
+        </p:spPr>
+        <p:txBody>
+          <a:bodyPr wrap="square">
+            <a:spAutoFit/>
+          </a:bodyPr>
+          <a:lstStyle/>
+          <a:p>
+            <a:pPr>
+              <a:spcAft>
+                <a:spcPts val="400"/>
+              </a:spcAft>
+            </a:pPr>
+            <a:r>
+              <a:rPr sz="1400" b="0" i="0">
+                <a:solidFill>
+                  <a:srgbClr val="FFFFFF"/>
+                </a:solidFill>
+                <a:latin typeface="Calibri"/>
+              </a:rPr>
+              <a:t>ID: RF-03</a:t>
+            </a:r>
+          </a:p>
+          <a:p>
+            <a:pPr>
+              <a:spcAft>
+                <a:spcPts val="400"/>
+              </a:spcAft>
+            </a:pPr>
+            <a:r>
+              <a:rPr sz="1400" b="0" i="0">
+                <a:solidFill>
+                  <a:srgbClr val="FFFFFF"/>
+                </a:solidFill>
+                <a:latin typeface="Calibri"/>
+              </a:rPr>
+              <a:t>Nombre: Consultar historial clinico de una mascota</a:t>
+            </a:r>
+          </a:p>
+          <a:p>
+            <a:pPr>
+              <a:spcAft>
+                <a:spcPts val="400"/>
+              </a:spcAft>
+            </a:pPr>
+            <a:r>
+              <a:rPr sz="1400" b="0" i="0">
+                <a:solidFill>
+                  <a:srgbClr val="FFFFFF"/>
+                </a:solidFill>
+                <a:latin typeface="Calibri"/>
+              </a:rPr>
+              <a:t>Actor: Veterinario (consulta completa) / Auxiliar (consulta sin diagnostico)</a:t>
+            </a:r>
+          </a:p>
+          <a:p>
+            <a:pPr>
+              <a:spcAft>
+                <a:spcPts val="400"/>
+              </a:spcAft>
+            </a:pPr>
+            <a:r>
+              <a:rPr sz="1400" b="0" i="0">
+                <a:solidFill>
+                  <a:srgbClr val="FFFFFF"/>
+                </a:solidFill>
+                <a:latin typeface="Calibri"/>
+              </a:rPr>
+              <a:t>Descripcion: El sistema debe permitir consultar el historial de atenciones de una mascota a partir del documento del dueno.</a:t>
+            </a:r>
+          </a:p>
+          <a:p>
+            <a:pPr>
+              <a:spcAft>
+                <a:spcPts val="400"/>
+              </a:spcAft>
+            </a:pPr>
+            <a:r>
+              <a:rPr sz="1400" b="0" i="0">
+                <a:solidFill>
+                  <a:srgbClr val="FFFFFF"/>
+                </a:solidFill>
+                <a:latin typeface="Calibri"/>
+              </a:rPr>
+              <a:t>Entrada: documento del dueno o codigo de la mascota</a:t>
+            </a:r>
+          </a:p>
+          <a:p>
+            <a:pPr>
+              <a:spcAft>
+                <a:spcPts val="400"/>
+              </a:spcAft>
+            </a:pPr>
+            <a:r>
+              <a:rPr sz="1400" b="0" i="0">
+                <a:solidFill>
+                  <a:srgbClr val="FFFFFF"/>
+                </a:solidFill>
+                <a:latin typeface="Calibri"/>
+              </a:rPr>
+              <a:t>Salida: lista de atenciones con fecha, motivo, diagnostico y veterinario, ordenada de la mas reciente a la mas antigua</a:t>
+            </a:r>
+          </a:p>
+          <a:p>
+            <a:pPr>
+              <a:spcAft>
+                <a:spcPts val="400"/>
+              </a:spcAft>
+            </a:pPr>
+            <a:r>
+              <a:rPr sz="1400" b="0" i="0">
+                <a:solidFill>
+                  <a:srgbClr val="FFFFFF"/>
+                </a:solidFill>
+                <a:latin typeface="Calibri"/>
+              </a:rPr>
+              <a:t>Regla de negocio: RN-02 una mascota siempre pertenece a un unico dueno registrado</a:t>
+            </a:r>
+          </a:p>
+          <a:p>
+            <a:pPr>
+              <a:spcAft>
+                <a:spcPts val="400"/>
+              </a:spcAft>
+            </a:pPr>
+            <a:r>
+              <a:rPr sz="1400" b="0" i="0">
+                <a:solidFill>
+                  <a:srgbClr val="FFFFFF"/>
+                </a:solidFill>
+                <a:latin typeface="Calibri"/>
+              </a:rPr>
+              <a:t>Criterio de verificacion: dado un dueno con 12 atenciones, la busqueda por documento devuelve las 12 en 3 segundos o menos</a:t>
+            </a:r>
+          </a:p>
+          <a:p>
+            <a:pPr>
+              <a:spcAft>
+                <a:spcPts val="400"/>
+              </a:spcAft>
+            </a:pPr>
+            <a:r>
+              <a:rPr sz="1400" b="0" i="0">
+                <a:solidFill>
+                  <a:srgbClr val="FFFFFF"/>
+                </a:solidFill>
+                <a:latin typeface="Calibri"/>
+              </a:rPr>
+              <a:t>Prioridad MoSCoW: Must</a:t>
+            </a:r>
+          </a:p>
+          <a:p>
+            <a:pPr>
+              <a:spcAft>
+                <a:spcPts val="400"/>
+              </a:spcAft>
+            </a:pPr>
+            <a:r>
+              <a:rPr sz="1400" b="0" i="0">
+                <a:solidFill>
+                  <a:srgbClr val="FFFFFF"/>
+                </a:solidFill>
+                <a:latin typeface="Calibri"/>
+              </a:rPr>
+              <a:t>Origen: entrevista Dr. Ramirez, frase 2 (necesidad NEC-02)</a:t>
+            </a:r>
+          </a:p>
+          <a:p>
+            <a:pPr>
+              <a:spcAft>
+                <a:spcPts val="400"/>
+              </a:spcAft>
+            </a:pPr>
+            <a:r>
+              <a:rPr sz="1400" b="0" i="0">
+                <a:solidFill>
+                  <a:srgbClr val="FFFFFF"/>
+                </a:solidFill>
+                <a:latin typeface="Calibri"/>
+              </a:rPr>
+              <a:t>Trazabilidad: NEC-02 -&gt; RF-03 -&gt; CU-04 -&gt; Pantalla P-02 -&gt; Prueba PR-07</a:t>
+            </a:r>
+          </a:p>
+          <a:p>
+            <a:pPr>
+              <a:spcAft>
+                <a:spcPts val="400"/>
+              </a:spcAft>
+            </a:pPr>
+            <a:r>
+              <a:rPr sz="1400" b="0" i="0">
+                <a:solidFill>
+                  <a:srgbClr val="FFFFFF"/>
+                </a:solidFill>
+                <a:latin typeface="Calibri"/>
+              </a:rPr>
+              <a:t>Estado: aprobado por el cliente</a:t>
+            </a:r>
+          </a:p>
+        </p:txBody>
+      </p:sp>
+      <p:sp>
+        <p:nvSpPr>
+          <p:cNvPr id="9" name="TextBox 8"/>
+          <p:cNvSpPr txBox="1"/>
+          <p:nvPr/>
+        </p:nvSpPr>
+        <p:spPr>
+          <a:xfrm>
+            <a:off x="457200" y="6080760"/>
+            <a:ext cx="11277295" cy="320040"/>
+          </a:xfrm>
+          <a:prstGeom prst="rect">
+            <a:avLst/>
+          </a:prstGeom>
+          <a:noFill/>
+        </p:spPr>
+        <p:txBody>
+          <a:bodyPr wrap="square">
+            <a:spAutoFit/>
+          </a:bodyPr>
           <a:lstStyle/>
           <a:p>
             <a:pPr algn="ctr"/>
-          </a:p>
-        </p:txBody>
-      </p:sp>
-      <p:pic>
-        <p:nvPicPr>
-          <p:cNvPr id="9" name="Picture 8" descr="drawio.png"/>
-          <p:cNvPicPr>
-            <a:picLocks noChangeAspect="1"/>
-          </p:cNvPicPr>
-          <p:nvPr/>
-        </p:nvPicPr>
-        <p:blipFill>
-          <a:blip r:embed="rId2"/>
-          <a:stretch>
-            <a:fillRect/>
-          </a:stretch>
-        </p:blipFill>
-        <p:spPr>
-          <a:xfrm>
-            <a:off x="1643329" y="1847087"/>
-            <a:ext cx="1252728" cy="1252728"/>
-          </a:xfrm>
-          <a:prstGeom prst="rect">
-            <a:avLst/>
-          </a:prstGeom>
-        </p:spPr>
-      </p:pic>
+            <a:r>
+              <a:rPr sz="1200" b="0" i="1">
+                <a:solidFill>
+                  <a:srgbClr val="666666"/>
+                </a:solidFill>
+                <a:latin typeface="Calibri"/>
+              </a:rPr>
+              <a:t>Un requisito sin criterio de verificacion y sin origen es una opinion con numero de identificacion.</a:t>
+            </a:r>
+          </a:p>
+        </p:txBody>
+      </p:sp>
       <p:sp>
         <p:nvSpPr>
           <p:cNvPr id="10" name="TextBox 9"/>
-          <p:cNvSpPr txBox="1"/>
-          <p:nvPr/>
-        </p:nvSpPr>
-        <p:spPr>
-          <a:xfrm>
-            <a:off x="530352" y="3191256"/>
-            <a:ext cx="3478682" cy="621792"/>
-          </a:xfrm>
-          <a:prstGeom prst="rect">
-            <a:avLst/>
-          </a:prstGeom>
-          <a:noFill/>
-        </p:spPr>
-        <p:txBody>
-          <a:bodyPr wrap="square" anchor="t"/>
-          <a:lstStyle/>
-          <a:p>
-            <a:pPr algn="ctr"/>
-            <a:r>
-              <a:rPr sz="1300" b="1" i="0">
-                <a:solidFill>
-                  <a:srgbClr val="095292"/>
-                </a:solidFill>
-                <a:latin typeface="Calibri"/>
-              </a:rPr>
-              <a:t>Draw.Io</a:t>
-            </a:r>
-          </a:p>
-          <a:p>
-            <a:pPr algn="ctr">
-              <a:spcBef>
-                <a:spcPts val="200"/>
-              </a:spcBef>
-            </a:pPr>
-            <a:r>
-              <a:rPr sz="1000" b="0" i="0">
-                <a:solidFill>
-                  <a:srgbClr val="666666"/>
-                </a:solidFill>
-                <a:latin typeface="Calibri"/>
-              </a:rPr>
-              <a:t>Diagramas UML y de contexto</a:t>
-            </a:r>
-          </a:p>
-        </p:txBody>
-      </p:sp>
-      <p:sp>
-        <p:nvSpPr>
-          <p:cNvPr id="11" name="Rounded Rectangle 10"/>
-          <p:cNvSpPr/>
-          <p:nvPr/>
-        </p:nvSpPr>
-        <p:spPr>
-          <a:xfrm>
-            <a:off x="4283354" y="1591056"/>
-            <a:ext cx="3624986" cy="2331720"/>
-          </a:xfrm>
-          <a:prstGeom prst="roundRect">
-            <a:avLst>
-              <a:gd name="adj" fmla="val 12000"/>
-            </a:avLst>
-          </a:prstGeom>
-          <a:solidFill>
-            <a:srgbClr val="F2F2F2"/>
-          </a:solidFill>
-          <a:ln>
-            <a:noFill/>
-          </a:ln>
-        </p:spPr>
-        <p:style>
-          <a:lnRef idx="1">
-            <a:schemeClr val="accent1"/>
-          </a:lnRef>
-          <a:fillRef idx="3">
-            <a:schemeClr val="accent1"/>
-          </a:fillRef>
-          <a:effectRef idx="2">
-            <a:schemeClr val="accent1"/>
-          </a:effectRef>
-          <a:fontRef idx="minor">
-            <a:schemeClr val="lt1"/>
-          </a:fontRef>
-        </p:style>
-        <p:txBody>
-          <a:bodyPr rtlCol="0" anchor="ctr"/>
-          <a:lstStyle/>
-          <a:p>
-            <a:pPr algn="ctr"/>
-          </a:p>
-        </p:txBody>
-      </p:sp>
-      <p:sp>
-        <p:nvSpPr>
-          <p:cNvPr id="12" name="Rectangle 11"/>
-          <p:cNvSpPr/>
-          <p:nvPr/>
-        </p:nvSpPr>
-        <p:spPr>
-          <a:xfrm>
-            <a:off x="4283354" y="1591056"/>
-            <a:ext cx="3624986" cy="64008"/>
-          </a:xfrm>
-          <a:prstGeom prst="rect">
-            <a:avLst/>
-          </a:prstGeom>
-          <a:solidFill>
-            <a:srgbClr val="095292"/>
-          </a:solidFill>
-          <a:ln>
-            <a:noFill/>
-          </a:ln>
-        </p:spPr>
-        <p:style>
-          <a:lnRef idx="1">
-            <a:schemeClr val="accent1"/>
-          </a:lnRef>
-          <a:fillRef idx="3">
-            <a:schemeClr val="accent1"/>
-          </a:fillRef>
-          <a:effectRef idx="2">
-            <a:schemeClr val="accent1"/>
-          </a:effectRef>
-          <a:fontRef idx="minor">
-            <a:schemeClr val="lt1"/>
-          </a:fontRef>
-        </p:style>
-        <p:txBody>
-          <a:bodyPr rtlCol="0" anchor="ctr"/>
-          <a:lstStyle/>
-          <a:p>
-            <a:pPr algn="ctr"/>
-          </a:p>
-        </p:txBody>
-      </p:sp>
-      <p:sp>
-        <p:nvSpPr>
-          <p:cNvPr id="13" name="Rectangle 12"/>
-          <p:cNvSpPr/>
-          <p:nvPr/>
-        </p:nvSpPr>
-        <p:spPr>
-          <a:xfrm>
-            <a:off x="4283354" y="1655064"/>
-            <a:ext cx="3624986" cy="27432"/>
-          </a:xfrm>
-          <a:prstGeom prst="rect">
-            <a:avLst/>
-          </a:prstGeom>
-          <a:solidFill>
-            <a:srgbClr val="FFD000"/>
-          </a:solidFill>
-          <a:ln>
-            <a:noFill/>
-          </a:ln>
-        </p:spPr>
-        <p:style>
-          <a:lnRef idx="1">
-            <a:schemeClr val="accent1"/>
-          </a:lnRef>
-          <a:fillRef idx="3">
-            <a:schemeClr val="accent1"/>
-          </a:fillRef>
-          <a:effectRef idx="2">
-            <a:schemeClr val="accent1"/>
-          </a:effectRef>
-          <a:fontRef idx="minor">
-            <a:schemeClr val="lt1"/>
-          </a:fontRef>
-        </p:style>
-        <p:txBody>
-          <a:bodyPr rtlCol="0" anchor="ctr"/>
-          <a:lstStyle/>
-          <a:p>
-            <a:pPr algn="ctr"/>
-          </a:p>
-        </p:txBody>
-      </p:sp>
-      <p:pic>
-        <p:nvPicPr>
-          <p:cNvPr id="14" name="Picture 13" descr="google_docs.png"/>
-          <p:cNvPicPr>
-            <a:picLocks noChangeAspect="1"/>
-          </p:cNvPicPr>
-          <p:nvPr/>
-        </p:nvPicPr>
-        <p:blipFill>
-          <a:blip r:embed="rId3"/>
-          <a:stretch>
-            <a:fillRect/>
-          </a:stretch>
-        </p:blipFill>
-        <p:spPr>
-          <a:xfrm>
-            <a:off x="5469483" y="1847087"/>
-            <a:ext cx="1252728" cy="1252728"/>
-          </a:xfrm>
-          <a:prstGeom prst="rect">
-            <a:avLst/>
-          </a:prstGeom>
-        </p:spPr>
-      </p:pic>
-      <p:sp>
-        <p:nvSpPr>
-          <p:cNvPr id="15" name="TextBox 14"/>
-          <p:cNvSpPr txBox="1"/>
-          <p:nvPr/>
-        </p:nvSpPr>
-        <p:spPr>
-          <a:xfrm>
-            <a:off x="4356506" y="3191256"/>
-            <a:ext cx="3478682" cy="621792"/>
-          </a:xfrm>
-          <a:prstGeom prst="rect">
-            <a:avLst/>
-          </a:prstGeom>
-          <a:noFill/>
-        </p:spPr>
-        <p:txBody>
-          <a:bodyPr wrap="square" anchor="t"/>
-          <a:lstStyle/>
-          <a:p>
-            <a:pPr algn="ctr"/>
-            <a:r>
-              <a:rPr sz="1300" b="1" i="0">
-                <a:solidFill>
-                  <a:srgbClr val="095292"/>
-                </a:solidFill>
-                <a:latin typeface="Calibri"/>
-              </a:rPr>
-              <a:t>google docs</a:t>
-            </a:r>
-          </a:p>
-          <a:p>
-            <a:pPr algn="ctr">
-              <a:spcBef>
-                <a:spcPts val="200"/>
-              </a:spcBef>
-            </a:pPr>
-            <a:r>
-              <a:rPr sz="1000" b="0" i="0">
-                <a:solidFill>
-                  <a:srgbClr val="666666"/>
-                </a:solidFill>
-                <a:latin typeface="Calibri"/>
-              </a:rPr>
-              <a:t>Documentos del paquete de diseño</a:t>
-            </a:r>
-          </a:p>
-        </p:txBody>
-      </p:sp>
-      <p:sp>
-        <p:nvSpPr>
-          <p:cNvPr id="16" name="Rounded Rectangle 15"/>
-          <p:cNvSpPr/>
-          <p:nvPr/>
-        </p:nvSpPr>
-        <p:spPr>
-          <a:xfrm>
-            <a:off x="8109508" y="1591056"/>
-            <a:ext cx="3624986" cy="2331720"/>
-          </a:xfrm>
-          <a:prstGeom prst="roundRect">
-            <a:avLst>
-              <a:gd name="adj" fmla="val 12000"/>
-            </a:avLst>
-          </a:prstGeom>
-          <a:solidFill>
-            <a:srgbClr val="F2F2F2"/>
-          </a:solidFill>
-          <a:ln>
-            <a:noFill/>
-          </a:ln>
-        </p:spPr>
-        <p:style>
-          <a:lnRef idx="1">
-            <a:schemeClr val="accent1"/>
-          </a:lnRef>
-          <a:fillRef idx="3">
-            <a:schemeClr val="accent1"/>
-          </a:fillRef>
-          <a:effectRef idx="2">
-            <a:schemeClr val="accent1"/>
-          </a:effectRef>
-          <a:fontRef idx="minor">
-            <a:schemeClr val="lt1"/>
-          </a:fontRef>
-        </p:style>
-        <p:txBody>
-          <a:bodyPr rtlCol="0" anchor="ctr"/>
-          <a:lstStyle/>
-          <a:p>
-            <a:pPr algn="ctr"/>
-          </a:p>
-        </p:txBody>
-      </p:sp>
-      <p:sp>
-        <p:nvSpPr>
-          <p:cNvPr id="17" name="Rectangle 16"/>
-          <p:cNvSpPr/>
-          <p:nvPr/>
-        </p:nvSpPr>
-        <p:spPr>
-          <a:xfrm>
-            <a:off x="8109508" y="1591056"/>
-            <a:ext cx="3624986" cy="64008"/>
-          </a:xfrm>
-          <a:prstGeom prst="rect">
-            <a:avLst/>
-          </a:prstGeom>
-          <a:solidFill>
-            <a:srgbClr val="095292"/>
-          </a:solidFill>
-          <a:ln>
-            <a:noFill/>
-          </a:ln>
-        </p:spPr>
-        <p:style>
-          <a:lnRef idx="1">
-            <a:schemeClr val="accent1"/>
-          </a:lnRef>
-          <a:fillRef idx="3">
-            <a:schemeClr val="accent1"/>
-          </a:fillRef>
-          <a:effectRef idx="2">
-            <a:schemeClr val="accent1"/>
-          </a:effectRef>
-          <a:fontRef idx="minor">
-            <a:schemeClr val="lt1"/>
-          </a:fontRef>
-        </p:style>
-        <p:txBody>
-          <a:bodyPr rtlCol="0" anchor="ctr"/>
-          <a:lstStyle/>
-          <a:p>
-            <a:pPr algn="ctr"/>
-          </a:p>
-        </p:txBody>
-      </p:sp>
-      <p:sp>
-        <p:nvSpPr>
-          <p:cNvPr id="18" name="Rectangle 17"/>
-          <p:cNvSpPr/>
-          <p:nvPr/>
-        </p:nvSpPr>
-        <p:spPr>
-          <a:xfrm>
-            <a:off x="8109508" y="1655064"/>
-            <a:ext cx="3624986" cy="27432"/>
-          </a:xfrm>
-          <a:prstGeom prst="rect">
-            <a:avLst/>
-          </a:prstGeom>
-          <a:solidFill>
-            <a:srgbClr val="FFD000"/>
-          </a:solidFill>
-          <a:ln>
-            <a:noFill/>
-          </a:ln>
-        </p:spPr>
-        <p:style>
-          <a:lnRef idx="1">
-            <a:schemeClr val="accent1"/>
-          </a:lnRef>
-          <a:fillRef idx="3">
-            <a:schemeClr val="accent1"/>
-          </a:fillRef>
-          <a:effectRef idx="2">
-            <a:schemeClr val="accent1"/>
-          </a:effectRef>
-          <a:fontRef idx="minor">
-            <a:schemeClr val="lt1"/>
-          </a:fontRef>
-        </p:style>
-        <p:txBody>
-          <a:bodyPr rtlCol="0" anchor="ctr"/>
-          <a:lstStyle/>
-          <a:p>
-            <a:pPr algn="ctr"/>
-          </a:p>
-        </p:txBody>
-      </p:sp>
-      <p:pic>
-        <p:nvPicPr>
-          <p:cNvPr id="19" name="Picture 18" descr="examlab.png"/>
-          <p:cNvPicPr>
-            <a:picLocks noChangeAspect="1"/>
-          </p:cNvPicPr>
-          <p:nvPr/>
-        </p:nvPicPr>
-        <p:blipFill>
-          <a:blip r:embed="rId4"/>
-          <a:stretch>
-            <a:fillRect/>
-          </a:stretch>
-        </p:blipFill>
-        <p:spPr>
-          <a:xfrm>
-            <a:off x="9295638" y="1847087"/>
-            <a:ext cx="1252728" cy="1252728"/>
-          </a:xfrm>
-          <a:prstGeom prst="rect">
-            <a:avLst/>
-          </a:prstGeom>
-        </p:spPr>
-      </p:pic>
-      <p:sp>
-        <p:nvSpPr>
-          <p:cNvPr id="20" name="TextBox 19"/>
-          <p:cNvSpPr txBox="1"/>
-          <p:nvPr/>
-        </p:nvSpPr>
-        <p:spPr>
-          <a:xfrm>
-            <a:off x="8182660" y="3191256"/>
-            <a:ext cx="3478682" cy="621792"/>
-          </a:xfrm>
-          <a:prstGeom prst="rect">
-            <a:avLst/>
-          </a:prstGeom>
-          <a:noFill/>
-        </p:spPr>
-        <p:txBody>
-          <a:bodyPr wrap="square" anchor="t"/>
-          <a:lstStyle/>
-          <a:p>
-            <a:pPr algn="ctr"/>
-            <a:r>
-              <a:rPr sz="1300" b="1" i="0">
-                <a:solidFill>
-                  <a:srgbClr val="095292"/>
-                </a:solidFill>
-                <a:latin typeface="Calibri"/>
-              </a:rPr>
-              <a:t>la plataforma del curso</a:t>
-            </a:r>
-          </a:p>
-          <a:p>
-            <a:pPr algn="ctr">
-              <a:spcBef>
-                <a:spcPts val="200"/>
-              </a:spcBef>
-            </a:pPr>
-            <a:r>
-              <a:rPr sz="1000" b="0" i="0">
-                <a:solidFill>
-                  <a:srgbClr val="666666"/>
-                </a:solidFill>
-                <a:latin typeface="Calibri"/>
-              </a:rPr>
-              <a:t>Entrega del taller · en la fecha que indique el docente</a:t>
-            </a:r>
-          </a:p>
-        </p:txBody>
-      </p:sp>
-      <p:sp>
-        <p:nvSpPr>
-          <p:cNvPr id="21" name="TextBox 20"/>
           <p:cNvSpPr txBox="1"/>
           <p:nvPr/>
         </p:nvSpPr>
@@ -6081,7 +6096,7 @@
                 </a:solidFill>
                 <a:latin typeface="Calibri"/>
               </a:rPr>
-              <a:t>Taller PI — por que importa</a:t>
+              <a:t>Demo del dia</a:t>
             </a:r>
           </a:p>
         </p:txBody>
@@ -6129,7 +6144,7 @@
                 </a:solidFill>
                 <a:latin typeface="Calibri"/>
               </a:rPr>
-              <a:t>Por que importa al PI:</a:t>
+              <a:t>Herramienta:</a:t>
             </a:r>
             <a:r>
               <a:rPr sz="2000" b="0" i="0">
@@ -6138,7 +6153,7 @@
                 </a:solidFill>
                 <a:latin typeface="Calibri"/>
               </a:rPr>
-              <a:t> este catalogo es el contrato del Proyecto Integrador; todo lo que se dibuje en las clases siguientes (casos de uso, clases, mockups, diccionario de datos) debe poder rastrearse hasta un requisito de esta lista.</a:t>
+              <a:t> Google Docs · draw.io</a:t>
             </a:r>
           </a:p>
           <a:p>
@@ -6154,7 +6169,25 @@
                 </a:solidFill>
                 <a:latin typeface="Calibri"/>
               </a:rPr>
-              <a:t>–   Si un requisito no queda hoy en el documento, sencillamente no existe para VetCare: no se disena, no se dibuja y no se programa en Programacion II.</a:t>
+              <a:t>–   </a:t>
+            </a:r>
+            <a:r>
+              <a:rPr sz="2000" b="1" i="0">
+                <a:solidFill>
+                  <a:srgbClr val="333333"/>
+                </a:solidFill>
+                <a:latin typeface="Calibri"/>
+              </a:rPr>
+              <a:t>Demo:</a:t>
+            </a:r>
+            <a:r>
+              <a:rPr sz="2000" b="0" i="0">
+                <a:solidFill>
+                  <a:srgbClr val="333333"/>
+                </a:solidFill>
+                <a:latin typeface="Calibri"/>
+              </a:rPr>
+              <a:t> El docente toma en vivo dos frases crudas de la entrevista al Dr. Ramirez y las convierte, frente al grupo, en un RF y un RNF usando la plantilla.</a:t>
             </a:r>
           </a:p>
           <a:p>
@@ -6170,7 +6203,7 @@
                 </a:solidFill>
                 <a:latin typeface="Calibri"/>
               </a:rPr>
-              <a:t>–   Es tambien la primera entrega que se defiende hablando: usted debe poder explicarle al Dr. Ramirez, en dos minutos, que se le va a construir y que no.</a:t>
+              <a:t>–   Mismo dominio VetCare — no otro ejemplo. Aqui se diseña, no se programa.</a:t>
             </a:r>
           </a:p>
         </p:txBody>
@@ -6245,7 +6278,7 @@
         <p:spPr>
           <a:xfrm>
             <a:off x="0" y="0"/>
-            <a:ext cx="12191695" cy="960120"/>
+            <a:ext cx="12191695" cy="1170432"/>
           </a:xfrm>
           <a:prstGeom prst="rect">
             <a:avLst/>
@@ -6287,7 +6320,7 @@
         </p:nvSpPr>
         <p:spPr>
           <a:xfrm>
-            <a:off x="0" y="960120"/>
+            <a:off x="0" y="1170432"/>
             <a:ext cx="12191695" cy="41148"/>
           </a:xfrm>
           <a:prstGeom prst="rect">
@@ -6331,7 +6364,7 @@
         <p:spPr>
           <a:xfrm>
             <a:off x="457200" y="164592"/>
-            <a:ext cx="11277295" cy="502920"/>
+            <a:ext cx="11277295" cy="384048"/>
           </a:xfrm>
           <a:prstGeom prst="rect">
             <a:avLst/>
@@ -6351,7 +6384,7 @@
                 </a:solidFill>
                 <a:latin typeface="Calibri"/>
               </a:rPr>
-              <a:t>Taller PI — punto de partida</a:t>
+              <a:t>Herramientas de hoy</a:t>
             </a:r>
           </a:p>
         </p:txBody>
@@ -6364,8 +6397,8 @@
         </p:nvSpPr>
         <p:spPr>
           <a:xfrm>
-            <a:off x="457200" y="1170432"/>
-            <a:ext cx="11277295" cy="5230368"/>
+            <a:off x="457200" y="566928"/>
+            <a:ext cx="11277295" cy="411480"/>
           </a:xfrm>
           <a:prstGeom prst="rect">
             <a:avLst/>
@@ -6378,58 +6411,633 @@
           </a:bodyPr>
           <a:lstStyle/>
           <a:p>
-            <a:pPr>
-              <a:spcAft>
-                <a:spcPts val="800"/>
-              </a:spcAft>
+            <a:r>
+              <a:rPr sz="1400" b="0" i="0">
+                <a:solidFill>
+                  <a:srgbClr val="B8D8EE"/>
+                </a:solidFill>
+                <a:latin typeface="Calibri"/>
+              </a:rPr>
+              <a:t>Gratis · funcionan en el navegador</a:t>
+            </a:r>
+          </a:p>
+        </p:txBody>
+      </p:sp>
+      <p:sp>
+        <p:nvSpPr>
+          <p:cNvPr id="6" name="Rounded Rectangle 5"/>
+          <p:cNvSpPr/>
+          <p:nvPr/>
+        </p:nvSpPr>
+        <p:spPr>
+          <a:xfrm>
+            <a:off x="457200" y="1591056"/>
+            <a:ext cx="3624986" cy="2331720"/>
+          </a:xfrm>
+          <a:prstGeom prst="roundRect">
+            <a:avLst>
+              <a:gd name="adj" fmla="val 12000"/>
+            </a:avLst>
+          </a:prstGeom>
+          <a:solidFill>
+            <a:srgbClr val="F2F2F2"/>
+          </a:solidFill>
+          <a:ln>
+            <a:noFill/>
+          </a:ln>
+        </p:spPr>
+        <p:style>
+          <a:lnRef idx="1">
+            <a:schemeClr val="accent1"/>
+          </a:lnRef>
+          <a:fillRef idx="3">
+            <a:schemeClr val="accent1"/>
+          </a:fillRef>
+          <a:effectRef idx="2">
+            <a:schemeClr val="accent1"/>
+          </a:effectRef>
+          <a:fontRef idx="minor">
+            <a:schemeClr val="lt1"/>
+          </a:fontRef>
+        </p:style>
+        <p:txBody>
+          <a:bodyPr rtlCol="0" anchor="ctr"/>
+          <a:lstStyle/>
+          <a:p>
+            <a:pPr algn="ctr"/>
+          </a:p>
+        </p:txBody>
+      </p:sp>
+      <p:sp>
+        <p:nvSpPr>
+          <p:cNvPr id="7" name="Rectangle 6"/>
+          <p:cNvSpPr/>
+          <p:nvPr/>
+        </p:nvSpPr>
+        <p:spPr>
+          <a:xfrm>
+            <a:off x="457200" y="1591056"/>
+            <a:ext cx="3624986" cy="64008"/>
+          </a:xfrm>
+          <a:prstGeom prst="rect">
+            <a:avLst/>
+          </a:prstGeom>
+          <a:solidFill>
+            <a:srgbClr val="095292"/>
+          </a:solidFill>
+          <a:ln>
+            <a:noFill/>
+          </a:ln>
+        </p:spPr>
+        <p:style>
+          <a:lnRef idx="1">
+            <a:schemeClr val="accent1"/>
+          </a:lnRef>
+          <a:fillRef idx="3">
+            <a:schemeClr val="accent1"/>
+          </a:fillRef>
+          <a:effectRef idx="2">
+            <a:schemeClr val="accent1"/>
+          </a:effectRef>
+          <a:fontRef idx="minor">
+            <a:schemeClr val="lt1"/>
+          </a:fontRef>
+        </p:style>
+        <p:txBody>
+          <a:bodyPr rtlCol="0" anchor="ctr"/>
+          <a:lstStyle/>
+          <a:p>
+            <a:pPr algn="ctr"/>
+          </a:p>
+        </p:txBody>
+      </p:sp>
+      <p:sp>
+        <p:nvSpPr>
+          <p:cNvPr id="8" name="Rectangle 7"/>
+          <p:cNvSpPr/>
+          <p:nvPr/>
+        </p:nvSpPr>
+        <p:spPr>
+          <a:xfrm>
+            <a:off x="457200" y="1655064"/>
+            <a:ext cx="3624986" cy="27432"/>
+          </a:xfrm>
+          <a:prstGeom prst="rect">
+            <a:avLst/>
+          </a:prstGeom>
+          <a:solidFill>
+            <a:srgbClr val="FFD000"/>
+          </a:solidFill>
+          <a:ln>
+            <a:noFill/>
+          </a:ln>
+        </p:spPr>
+        <p:style>
+          <a:lnRef idx="1">
+            <a:schemeClr val="accent1"/>
+          </a:lnRef>
+          <a:fillRef idx="3">
+            <a:schemeClr val="accent1"/>
+          </a:fillRef>
+          <a:effectRef idx="2">
+            <a:schemeClr val="accent1"/>
+          </a:effectRef>
+          <a:fontRef idx="minor">
+            <a:schemeClr val="lt1"/>
+          </a:fontRef>
+        </p:style>
+        <p:txBody>
+          <a:bodyPr rtlCol="0" anchor="ctr"/>
+          <a:lstStyle/>
+          <a:p>
+            <a:pPr algn="ctr"/>
+          </a:p>
+        </p:txBody>
+      </p:sp>
+      <p:pic>
+        <p:nvPicPr>
+          <p:cNvPr id="9" name="Picture 8" descr="drawio.png"/>
+          <p:cNvPicPr>
+            <a:picLocks noChangeAspect="1"/>
+          </p:cNvPicPr>
+          <p:nvPr/>
+        </p:nvPicPr>
+        <p:blipFill>
+          <a:blip r:embed="rId2"/>
+          <a:stretch>
+            <a:fillRect/>
+          </a:stretch>
+        </p:blipFill>
+        <p:spPr>
+          <a:xfrm>
+            <a:off x="1643329" y="1847087"/>
+            <a:ext cx="1252728" cy="1252728"/>
+          </a:xfrm>
+          <a:prstGeom prst="rect">
+            <a:avLst/>
+          </a:prstGeom>
+        </p:spPr>
+      </p:pic>
+      <p:sp>
+        <p:nvSpPr>
+          <p:cNvPr id="10" name="TextBox 9"/>
+          <p:cNvSpPr txBox="1"/>
+          <p:nvPr/>
+        </p:nvSpPr>
+        <p:spPr>
+          <a:xfrm>
+            <a:off x="530352" y="3191256"/>
+            <a:ext cx="3478682" cy="621792"/>
+          </a:xfrm>
+          <a:prstGeom prst="rect">
+            <a:avLst/>
+          </a:prstGeom>
+          <a:noFill/>
+        </p:spPr>
+        <p:txBody>
+          <a:bodyPr wrap="square" anchor="t"/>
+          <a:lstStyle/>
+          <a:p>
+            <a:pPr algn="ctr"/>
+            <a:r>
+              <a:rPr sz="1300" b="1" i="0">
+                <a:solidFill>
+                  <a:srgbClr val="095292"/>
+                </a:solidFill>
+                <a:latin typeface="Calibri"/>
+              </a:rPr>
+              <a:t>Draw.Io</a:t>
+            </a:r>
+          </a:p>
+          <a:p>
+            <a:pPr algn="ctr">
+              <a:spcBef>
+                <a:spcPts val="200"/>
+              </a:spcBef>
             </a:pPr>
             <a:r>
-              <a:rPr sz="2000" b="0" i="0">
-                <a:solidFill>
-                  <a:srgbClr val="333333"/>
-                </a:solidFill>
-                <a:latin typeface="Calibri"/>
-              </a:rPr>
-              <a:t>–   Hoy solo existe la transcripcion de la entrevista al Dr. Ramirez: cinco frases sueltas, dichas en lenguaje de veterinario y no de analista.</a:t>
-            </a:r>
-          </a:p>
-          <a:p>
-            <a:pPr>
-              <a:spcAft>
-                <a:spcPts val="800"/>
-              </a:spcAft>
+              <a:rPr sz="1000" b="0" i="0">
+                <a:solidFill>
+                  <a:srgbClr val="666666"/>
+                </a:solidFill>
+                <a:latin typeface="Calibri"/>
+              </a:rPr>
+              <a:t>Diagramas UML y de contexto</a:t>
+            </a:r>
+          </a:p>
+        </p:txBody>
+      </p:sp>
+      <p:sp>
+        <p:nvSpPr>
+          <p:cNvPr id="11" name="Rounded Rectangle 10"/>
+          <p:cNvSpPr/>
+          <p:nvPr/>
+        </p:nvSpPr>
+        <p:spPr>
+          <a:xfrm>
+            <a:off x="4283354" y="1591056"/>
+            <a:ext cx="3624986" cy="2331720"/>
+          </a:xfrm>
+          <a:prstGeom prst="roundRect">
+            <a:avLst>
+              <a:gd name="adj" fmla="val 12000"/>
+            </a:avLst>
+          </a:prstGeom>
+          <a:solidFill>
+            <a:srgbClr val="F2F2F2"/>
+          </a:solidFill>
+          <a:ln>
+            <a:noFill/>
+          </a:ln>
+        </p:spPr>
+        <p:style>
+          <a:lnRef idx="1">
+            <a:schemeClr val="accent1"/>
+          </a:lnRef>
+          <a:fillRef idx="3">
+            <a:schemeClr val="accent1"/>
+          </a:fillRef>
+          <a:effectRef idx="2">
+            <a:schemeClr val="accent1"/>
+          </a:effectRef>
+          <a:fontRef idx="minor">
+            <a:schemeClr val="lt1"/>
+          </a:fontRef>
+        </p:style>
+        <p:txBody>
+          <a:bodyPr rtlCol="0" anchor="ctr"/>
+          <a:lstStyle/>
+          <a:p>
+            <a:pPr algn="ctr"/>
+          </a:p>
+        </p:txBody>
+      </p:sp>
+      <p:sp>
+        <p:nvSpPr>
+          <p:cNvPr id="12" name="Rectangle 11"/>
+          <p:cNvSpPr/>
+          <p:nvPr/>
+        </p:nvSpPr>
+        <p:spPr>
+          <a:xfrm>
+            <a:off x="4283354" y="1591056"/>
+            <a:ext cx="3624986" cy="64008"/>
+          </a:xfrm>
+          <a:prstGeom prst="rect">
+            <a:avLst/>
+          </a:prstGeom>
+          <a:solidFill>
+            <a:srgbClr val="095292"/>
+          </a:solidFill>
+          <a:ln>
+            <a:noFill/>
+          </a:ln>
+        </p:spPr>
+        <p:style>
+          <a:lnRef idx="1">
+            <a:schemeClr val="accent1"/>
+          </a:lnRef>
+          <a:fillRef idx="3">
+            <a:schemeClr val="accent1"/>
+          </a:fillRef>
+          <a:effectRef idx="2">
+            <a:schemeClr val="accent1"/>
+          </a:effectRef>
+          <a:fontRef idx="minor">
+            <a:schemeClr val="lt1"/>
+          </a:fontRef>
+        </p:style>
+        <p:txBody>
+          <a:bodyPr rtlCol="0" anchor="ctr"/>
+          <a:lstStyle/>
+          <a:p>
+            <a:pPr algn="ctr"/>
+          </a:p>
+        </p:txBody>
+      </p:sp>
+      <p:sp>
+        <p:nvSpPr>
+          <p:cNvPr id="13" name="Rectangle 12"/>
+          <p:cNvSpPr/>
+          <p:nvPr/>
+        </p:nvSpPr>
+        <p:spPr>
+          <a:xfrm>
+            <a:off x="4283354" y="1655064"/>
+            <a:ext cx="3624986" cy="27432"/>
+          </a:xfrm>
+          <a:prstGeom prst="rect">
+            <a:avLst/>
+          </a:prstGeom>
+          <a:solidFill>
+            <a:srgbClr val="FFD000"/>
+          </a:solidFill>
+          <a:ln>
+            <a:noFill/>
+          </a:ln>
+        </p:spPr>
+        <p:style>
+          <a:lnRef idx="1">
+            <a:schemeClr val="accent1"/>
+          </a:lnRef>
+          <a:fillRef idx="3">
+            <a:schemeClr val="accent1"/>
+          </a:fillRef>
+          <a:effectRef idx="2">
+            <a:schemeClr val="accent1"/>
+          </a:effectRef>
+          <a:fontRef idx="minor">
+            <a:schemeClr val="lt1"/>
+          </a:fontRef>
+        </p:style>
+        <p:txBody>
+          <a:bodyPr rtlCol="0" anchor="ctr"/>
+          <a:lstStyle/>
+          <a:p>
+            <a:pPr algn="ctr"/>
+          </a:p>
+        </p:txBody>
+      </p:sp>
+      <p:pic>
+        <p:nvPicPr>
+          <p:cNvPr id="14" name="Picture 13" descr="google_docs.png"/>
+          <p:cNvPicPr>
+            <a:picLocks noChangeAspect="1"/>
+          </p:cNvPicPr>
+          <p:nvPr/>
+        </p:nvPicPr>
+        <p:blipFill>
+          <a:blip r:embed="rId3"/>
+          <a:stretch>
+            <a:fillRect/>
+          </a:stretch>
+        </p:blipFill>
+        <p:spPr>
+          <a:xfrm>
+            <a:off x="5469483" y="1847087"/>
+            <a:ext cx="1252728" cy="1252728"/>
+          </a:xfrm>
+          <a:prstGeom prst="rect">
+            <a:avLst/>
+          </a:prstGeom>
+        </p:spPr>
+      </p:pic>
+      <p:sp>
+        <p:nvSpPr>
+          <p:cNvPr id="15" name="TextBox 14"/>
+          <p:cNvSpPr txBox="1"/>
+          <p:nvPr/>
+        </p:nvSpPr>
+        <p:spPr>
+          <a:xfrm>
+            <a:off x="4356506" y="3191256"/>
+            <a:ext cx="3478682" cy="621792"/>
+          </a:xfrm>
+          <a:prstGeom prst="rect">
+            <a:avLst/>
+          </a:prstGeom>
+          <a:noFill/>
+        </p:spPr>
+        <p:txBody>
+          <a:bodyPr wrap="square" anchor="t"/>
+          <a:lstStyle/>
+          <a:p>
+            <a:pPr algn="ctr"/>
+            <a:r>
+              <a:rPr sz="1300" b="1" i="0">
+                <a:solidFill>
+                  <a:srgbClr val="095292"/>
+                </a:solidFill>
+                <a:latin typeface="Calibri"/>
+              </a:rPr>
+              <a:t>google docs</a:t>
+            </a:r>
+          </a:p>
+          <a:p>
+            <a:pPr algn="ctr">
+              <a:spcBef>
+                <a:spcPts val="200"/>
+              </a:spcBef>
             </a:pPr>
             <a:r>
-              <a:rPr sz="2000" b="0" i="0">
-                <a:solidFill>
-                  <a:srgbClr val="333333"/>
-                </a:solidFill>
-                <a:latin typeface="Calibri"/>
-              </a:rPr>
-              <a:t>–   La clinica Huellitas sigue en papel: fichas que se extravian, busquedas de historial que toman varios minutos con el paciente esperando y cero metricas mensuales.</a:t>
-            </a:r>
-          </a:p>
-          <a:p>
-            <a:pPr>
-              <a:spcAft>
-                <a:spcPts val="800"/>
-              </a:spcAft>
+              <a:rPr sz="1000" b="0" i="0">
+                <a:solidFill>
+                  <a:srgbClr val="666666"/>
+                </a:solidFill>
+                <a:latin typeface="Calibri"/>
+              </a:rPr>
+              <a:t>Documentos del paquete de diseño</a:t>
+            </a:r>
+          </a:p>
+        </p:txBody>
+      </p:sp>
+      <p:sp>
+        <p:nvSpPr>
+          <p:cNvPr id="16" name="Rounded Rectangle 15"/>
+          <p:cNvSpPr/>
+          <p:nvPr/>
+        </p:nvSpPr>
+        <p:spPr>
+          <a:xfrm>
+            <a:off x="8109508" y="1591056"/>
+            <a:ext cx="3624986" cy="2331720"/>
+          </a:xfrm>
+          <a:prstGeom prst="roundRect">
+            <a:avLst>
+              <a:gd name="adj" fmla="val 12000"/>
+            </a:avLst>
+          </a:prstGeom>
+          <a:solidFill>
+            <a:srgbClr val="F2F2F2"/>
+          </a:solidFill>
+          <a:ln>
+            <a:noFill/>
+          </a:ln>
+        </p:spPr>
+        <p:style>
+          <a:lnRef idx="1">
+            <a:schemeClr val="accent1"/>
+          </a:lnRef>
+          <a:fillRef idx="3">
+            <a:schemeClr val="accent1"/>
+          </a:fillRef>
+          <a:effectRef idx="2">
+            <a:schemeClr val="accent1"/>
+          </a:effectRef>
+          <a:fontRef idx="minor">
+            <a:schemeClr val="lt1"/>
+          </a:fontRef>
+        </p:style>
+        <p:txBody>
+          <a:bodyPr rtlCol="0" anchor="ctr"/>
+          <a:lstStyle/>
+          <a:p>
+            <a:pPr algn="ctr"/>
+          </a:p>
+        </p:txBody>
+      </p:sp>
+      <p:sp>
+        <p:nvSpPr>
+          <p:cNvPr id="17" name="Rectangle 16"/>
+          <p:cNvSpPr/>
+          <p:nvPr/>
+        </p:nvSpPr>
+        <p:spPr>
+          <a:xfrm>
+            <a:off x="8109508" y="1591056"/>
+            <a:ext cx="3624986" cy="64008"/>
+          </a:xfrm>
+          <a:prstGeom prst="rect">
+            <a:avLst/>
+          </a:prstGeom>
+          <a:solidFill>
+            <a:srgbClr val="095292"/>
+          </a:solidFill>
+          <a:ln>
+            <a:noFill/>
+          </a:ln>
+        </p:spPr>
+        <p:style>
+          <a:lnRef idx="1">
+            <a:schemeClr val="accent1"/>
+          </a:lnRef>
+          <a:fillRef idx="3">
+            <a:schemeClr val="accent1"/>
+          </a:fillRef>
+          <a:effectRef idx="2">
+            <a:schemeClr val="accent1"/>
+          </a:effectRef>
+          <a:fontRef idx="minor">
+            <a:schemeClr val="lt1"/>
+          </a:fontRef>
+        </p:style>
+        <p:txBody>
+          <a:bodyPr rtlCol="0" anchor="ctr"/>
+          <a:lstStyle/>
+          <a:p>
+            <a:pPr algn="ctr"/>
+          </a:p>
+        </p:txBody>
+      </p:sp>
+      <p:sp>
+        <p:nvSpPr>
+          <p:cNvPr id="18" name="Rectangle 17"/>
+          <p:cNvSpPr/>
+          <p:nvPr/>
+        </p:nvSpPr>
+        <p:spPr>
+          <a:xfrm>
+            <a:off x="8109508" y="1655064"/>
+            <a:ext cx="3624986" cy="27432"/>
+          </a:xfrm>
+          <a:prstGeom prst="rect">
+            <a:avLst/>
+          </a:prstGeom>
+          <a:solidFill>
+            <a:srgbClr val="FFD000"/>
+          </a:solidFill>
+          <a:ln>
+            <a:noFill/>
+          </a:ln>
+        </p:spPr>
+        <p:style>
+          <a:lnRef idx="1">
+            <a:schemeClr val="accent1"/>
+          </a:lnRef>
+          <a:fillRef idx="3">
+            <a:schemeClr val="accent1"/>
+          </a:fillRef>
+          <a:effectRef idx="2">
+            <a:schemeClr val="accent1"/>
+          </a:effectRef>
+          <a:fontRef idx="minor">
+            <a:schemeClr val="lt1"/>
+          </a:fontRef>
+        </p:style>
+        <p:txBody>
+          <a:bodyPr rtlCol="0" anchor="ctr"/>
+          <a:lstStyle/>
+          <a:p>
+            <a:pPr algn="ctr"/>
+          </a:p>
+        </p:txBody>
+      </p:sp>
+      <p:pic>
+        <p:nvPicPr>
+          <p:cNvPr id="19" name="Picture 18" descr="examlab.png"/>
+          <p:cNvPicPr>
+            <a:picLocks noChangeAspect="1"/>
+          </p:cNvPicPr>
+          <p:nvPr/>
+        </p:nvPicPr>
+        <p:blipFill>
+          <a:blip r:embed="rId4"/>
+          <a:stretch>
+            <a:fillRect/>
+          </a:stretch>
+        </p:blipFill>
+        <p:spPr>
+          <a:xfrm>
+            <a:off x="9295638" y="1847087"/>
+            <a:ext cx="1252728" cy="1252728"/>
+          </a:xfrm>
+          <a:prstGeom prst="rect">
+            <a:avLst/>
+          </a:prstGeom>
+        </p:spPr>
+      </p:pic>
+      <p:sp>
+        <p:nvSpPr>
+          <p:cNvPr id="20" name="TextBox 19"/>
+          <p:cNvSpPr txBox="1"/>
+          <p:nvPr/>
+        </p:nvSpPr>
+        <p:spPr>
+          <a:xfrm>
+            <a:off x="8182660" y="3191256"/>
+            <a:ext cx="3478682" cy="621792"/>
+          </a:xfrm>
+          <a:prstGeom prst="rect">
+            <a:avLst/>
+          </a:prstGeom>
+          <a:noFill/>
+        </p:spPr>
+        <p:txBody>
+          <a:bodyPr wrap="square" anchor="t"/>
+          <a:lstStyle/>
+          <a:p>
+            <a:pPr algn="ctr"/>
+            <a:r>
+              <a:rPr sz="1300" b="1" i="0">
+                <a:solidFill>
+                  <a:srgbClr val="095292"/>
+                </a:solidFill>
+                <a:latin typeface="Calibri"/>
+              </a:rPr>
+              <a:t>la plataforma del curso</a:t>
+            </a:r>
+          </a:p>
+          <a:p>
+            <a:pPr algn="ctr">
+              <a:spcBef>
+                <a:spcPts val="200"/>
+              </a:spcBef>
             </a:pPr>
             <a:r>
-              <a:rPr sz="2000" b="0" i="0">
-                <a:solidFill>
-                  <a:srgbClr val="333333"/>
-                </a:solidFill>
-                <a:latin typeface="Calibri"/>
-              </a:rPr>
-              <a:t>–   No hay documento de requisitos, no hay prioridades acordadas y nadie sabe todavia que queda dentro y que queda fuera de la primera version de VetCare.</a:t>
-            </a:r>
-          </a:p>
-        </p:txBody>
-      </p:sp>
-      <p:sp>
-        <p:nvSpPr>
-          <p:cNvPr id="6" name="TextBox 5"/>
+              <a:rPr sz="1000" b="0" i="0">
+                <a:solidFill>
+                  <a:srgbClr val="666666"/>
+                </a:solidFill>
+                <a:latin typeface="Calibri"/>
+              </a:rPr>
+              <a:t>Entrega del taller · en la fecha que indique el docente</a:t>
+            </a:r>
+          </a:p>
+        </p:txBody>
+      </p:sp>
+      <p:sp>
+        <p:nvSpPr>
+          <p:cNvPr id="21" name="TextBox 20"/>
           <p:cNvSpPr txBox="1"/>
           <p:nvPr/>
         </p:nvSpPr>
@@ -6603,111 +7211,21 @@
                 </a:solidFill>
                 <a:latin typeface="Calibri"/>
               </a:rPr>
-              <a:t>Taller PI — pasos guiados</a:t>
-            </a:r>
-          </a:p>
-        </p:txBody>
-      </p:sp>
-      <p:sp>
-        <p:nvSpPr>
-          <p:cNvPr id="5" name="Rounded Rectangle 4"/>
-          <p:cNvSpPr/>
-          <p:nvPr/>
-        </p:nvSpPr>
-        <p:spPr>
-          <a:xfrm>
-            <a:off x="457200" y="1234440"/>
-            <a:ext cx="11277295" cy="950976"/>
-          </a:xfrm>
-          <a:prstGeom prst="roundRect">
-            <a:avLst>
-              <a:gd name="adj" fmla="val 12000"/>
-            </a:avLst>
-          </a:prstGeom>
-          <a:solidFill>
-            <a:srgbClr val="F2F2F2"/>
-          </a:solidFill>
-          <a:ln>
-            <a:noFill/>
-          </a:ln>
-        </p:spPr>
-        <p:style>
-          <a:lnRef idx="1">
-            <a:schemeClr val="accent1"/>
-          </a:lnRef>
-          <a:fillRef idx="3">
-            <a:schemeClr val="accent1"/>
-          </a:fillRef>
-          <a:effectRef idx="2">
-            <a:schemeClr val="accent1"/>
-          </a:effectRef>
-          <a:fontRef idx="minor">
-            <a:schemeClr val="lt1"/>
-          </a:fontRef>
-        </p:style>
-        <p:txBody>
-          <a:bodyPr rtlCol="0" anchor="ctr"/>
-          <a:lstStyle/>
-          <a:p>
-            <a:pPr algn="ctr"/>
-          </a:p>
-        </p:txBody>
-      </p:sp>
-      <p:sp>
-        <p:nvSpPr>
-          <p:cNvPr id="6" name="Rounded Rectangle 5"/>
-          <p:cNvSpPr/>
-          <p:nvPr/>
-        </p:nvSpPr>
-        <p:spPr>
-          <a:xfrm>
-            <a:off x="594360" y="1490472"/>
-            <a:ext cx="438912" cy="438912"/>
-          </a:xfrm>
-          <a:prstGeom prst="roundRect">
-            <a:avLst>
-              <a:gd name="adj" fmla="val 12000"/>
-            </a:avLst>
-          </a:prstGeom>
-          <a:solidFill>
-            <a:srgbClr val="095292"/>
-          </a:solidFill>
-          <a:ln>
-            <a:noFill/>
-          </a:ln>
-        </p:spPr>
-        <p:style>
-          <a:lnRef idx="1">
-            <a:schemeClr val="accent1"/>
-          </a:lnRef>
-          <a:fillRef idx="3">
-            <a:schemeClr val="accent1"/>
-          </a:fillRef>
-          <a:effectRef idx="2">
-            <a:schemeClr val="accent1"/>
-          </a:effectRef>
-          <a:fontRef idx="minor">
-            <a:schemeClr val="lt1"/>
-          </a:fontRef>
-        </p:style>
-        <p:txBody>
-          <a:bodyPr rtlCol="0" anchor="ctr"/>
-          <a:lstStyle/>
-          <a:p>
-            <a:pPr algn="ctr"/>
-          </a:p>
-        </p:txBody>
-      </p:sp>
-      <p:sp>
-        <p:nvSpPr>
-          <p:cNvPr id="7" name="TextBox 6"/>
+              <a:t>Taller PI — por que importa</a:t>
+            </a:r>
+          </a:p>
+        </p:txBody>
+      </p:sp>
+      <p:sp>
+        <p:nvSpPr>
+          <p:cNvPr id="5" name="TextBox 4"/>
           <p:cNvSpPr txBox="1"/>
           <p:nvPr/>
         </p:nvSpPr>
         <p:spPr>
           <a:xfrm>
-            <a:off x="594360" y="1490472"/>
-            <a:ext cx="438912" cy="438912"/>
+            <a:off x="457200" y="1170432"/>
+            <a:ext cx="11277295" cy="5230368"/>
           </a:xfrm>
           <a:prstGeom prst="rect">
             <a:avLst/>
@@ -6715,677 +7233,81 @@
           <a:noFill/>
         </p:spPr>
         <p:txBody>
-          <a:bodyPr wrap="square" anchor="ctr"/>
-          <a:lstStyle/>
-          <a:p>
-            <a:pPr algn="ctr"/>
-            <a:r>
-              <a:rPr sz="1600" b="1" i="0">
-                <a:solidFill>
-                  <a:srgbClr val="FFFFFF"/>
-                </a:solidFill>
-                <a:latin typeface="Calibri"/>
-              </a:rPr>
-              <a:t>1</a:t>
-            </a:r>
-          </a:p>
-        </p:txBody>
-      </p:sp>
-      <p:sp>
-        <p:nvSpPr>
-          <p:cNvPr id="8" name="TextBox 7"/>
-          <p:cNvSpPr txBox="1"/>
-          <p:nvPr/>
-        </p:nvSpPr>
-        <p:spPr>
-          <a:xfrm>
-            <a:off x="1188720" y="1325880"/>
-            <a:ext cx="10271455" cy="786384"/>
-          </a:xfrm>
-          <a:prstGeom prst="rect">
-            <a:avLst/>
-          </a:prstGeom>
-          <a:noFill/>
-        </p:spPr>
-        <p:txBody>
-          <a:bodyPr wrap="square" anchor="ctr"/>
-          <a:lstStyle/>
-          <a:p>
-            <a:r>
-              <a:rPr sz="1500" b="1" i="0">
-                <a:solidFill>
-                  <a:srgbClr val="095292"/>
-                </a:solidFill>
-                <a:latin typeface="Calibri"/>
-              </a:rPr>
-              <a:t>Paso 1: copie en la plantilla las cinco frases crudas de la entrevista al Dr. Ramirez y marque cada una como NECESIDAD, anotando al lado quien la dijo y en que contexto; esa columna es el origen y no se puede dejar vacia.</a:t>
-            </a:r>
-          </a:p>
-        </p:txBody>
-      </p:sp>
-      <p:sp>
-        <p:nvSpPr>
-          <p:cNvPr id="9" name="Rounded Rectangle 8"/>
-          <p:cNvSpPr/>
-          <p:nvPr/>
-        </p:nvSpPr>
-        <p:spPr>
-          <a:xfrm>
-            <a:off x="457200" y="2276856"/>
-            <a:ext cx="11277295" cy="950976"/>
-          </a:xfrm>
-          <a:prstGeom prst="roundRect">
-            <a:avLst>
-              <a:gd name="adj" fmla="val 12000"/>
-            </a:avLst>
-          </a:prstGeom>
-          <a:solidFill>
-            <a:srgbClr val="E8F4FA"/>
-          </a:solidFill>
-          <a:ln>
-            <a:noFill/>
-          </a:ln>
-        </p:spPr>
-        <p:style>
-          <a:lnRef idx="1">
-            <a:schemeClr val="accent1"/>
-          </a:lnRef>
-          <a:fillRef idx="3">
-            <a:schemeClr val="accent1"/>
-          </a:fillRef>
-          <a:effectRef idx="2">
-            <a:schemeClr val="accent1"/>
-          </a:effectRef>
-          <a:fontRef idx="minor">
-            <a:schemeClr val="lt1"/>
-          </a:fontRef>
-        </p:style>
-        <p:txBody>
-          <a:bodyPr rtlCol="0" anchor="ctr"/>
-          <a:lstStyle/>
-          <a:p>
-            <a:pPr algn="ctr"/>
-          </a:p>
-        </p:txBody>
-      </p:sp>
-      <p:sp>
-        <p:nvSpPr>
-          <p:cNvPr id="10" name="Rounded Rectangle 9"/>
-          <p:cNvSpPr/>
-          <p:nvPr/>
-        </p:nvSpPr>
-        <p:spPr>
-          <a:xfrm>
-            <a:off x="594360" y="2532888"/>
-            <a:ext cx="438912" cy="438912"/>
-          </a:xfrm>
-          <a:prstGeom prst="roundRect">
-            <a:avLst>
-              <a:gd name="adj" fmla="val 12000"/>
-            </a:avLst>
-          </a:prstGeom>
-          <a:solidFill>
-            <a:srgbClr val="095292"/>
-          </a:solidFill>
-          <a:ln>
-            <a:noFill/>
-          </a:ln>
-        </p:spPr>
-        <p:style>
-          <a:lnRef idx="1">
-            <a:schemeClr val="accent1"/>
-          </a:lnRef>
-          <a:fillRef idx="3">
-            <a:schemeClr val="accent1"/>
-          </a:fillRef>
-          <a:effectRef idx="2">
-            <a:schemeClr val="accent1"/>
-          </a:effectRef>
-          <a:fontRef idx="minor">
-            <a:schemeClr val="lt1"/>
-          </a:fontRef>
-        </p:style>
-        <p:txBody>
-          <a:bodyPr rtlCol="0" anchor="ctr"/>
-          <a:lstStyle/>
-          <a:p>
-            <a:pPr algn="ctr"/>
-          </a:p>
-        </p:txBody>
-      </p:sp>
-      <p:sp>
-        <p:nvSpPr>
-          <p:cNvPr id="11" name="TextBox 10"/>
-          <p:cNvSpPr txBox="1"/>
-          <p:nvPr/>
-        </p:nvSpPr>
-        <p:spPr>
-          <a:xfrm>
-            <a:off x="594360" y="2532888"/>
-            <a:ext cx="438912" cy="438912"/>
-          </a:xfrm>
-          <a:prstGeom prst="rect">
-            <a:avLst/>
-          </a:prstGeom>
-          <a:noFill/>
-        </p:spPr>
-        <p:txBody>
-          <a:bodyPr wrap="square" anchor="ctr"/>
-          <a:lstStyle/>
-          <a:p>
-            <a:pPr algn="ctr"/>
-            <a:r>
-              <a:rPr sz="1600" b="1" i="0">
-                <a:solidFill>
-                  <a:srgbClr val="FFFFFF"/>
-                </a:solidFill>
-                <a:latin typeface="Calibri"/>
-              </a:rPr>
-              <a:t>2</a:t>
-            </a:r>
-          </a:p>
-        </p:txBody>
-      </p:sp>
-      <p:sp>
-        <p:nvSpPr>
-          <p:cNvPr id="12" name="TextBox 11"/>
-          <p:cNvSpPr txBox="1"/>
-          <p:nvPr/>
-        </p:nvSpPr>
-        <p:spPr>
-          <a:xfrm>
-            <a:off x="1188720" y="2368296"/>
-            <a:ext cx="10271455" cy="786384"/>
-          </a:xfrm>
-          <a:prstGeom prst="rect">
-            <a:avLst/>
-          </a:prstGeom>
-          <a:noFill/>
-        </p:spPr>
-        <p:txBody>
-          <a:bodyPr wrap="square" anchor="ctr"/>
-          <a:lstStyle/>
-          <a:p>
-            <a:r>
-              <a:rPr sz="1400" b="1" i="0">
-                <a:solidFill>
-                  <a:srgbClr val="095292"/>
-                </a:solidFill>
-                <a:latin typeface="Calibri"/>
-              </a:rPr>
-              <a:t>Paso 2: traduzca las necesidades a requisitos funcionales usando la plantilla el sistema debe permitir a &lt;actor&gt; &lt;accion&gt; &lt;objeto&gt;, hasta llegar a minimo 8 RF numerados de RF-01 a RF-08; ningun RF puede contener la palabra y uniendo dos capacidades distintas.</a:t>
-            </a:r>
-          </a:p>
-        </p:txBody>
-      </p:sp>
-      <p:sp>
-        <p:nvSpPr>
-          <p:cNvPr id="13" name="Rounded Rectangle 12"/>
-          <p:cNvSpPr/>
-          <p:nvPr/>
-        </p:nvSpPr>
-        <p:spPr>
-          <a:xfrm>
-            <a:off x="457200" y="3319272"/>
-            <a:ext cx="11277295" cy="950976"/>
-          </a:xfrm>
-          <a:prstGeom prst="roundRect">
-            <a:avLst>
-              <a:gd name="adj" fmla="val 12000"/>
-            </a:avLst>
-          </a:prstGeom>
-          <a:solidFill>
-            <a:srgbClr val="F2F2F2"/>
-          </a:solidFill>
-          <a:ln>
-            <a:noFill/>
-          </a:ln>
-        </p:spPr>
-        <p:style>
-          <a:lnRef idx="1">
-            <a:schemeClr val="accent1"/>
-          </a:lnRef>
-          <a:fillRef idx="3">
-            <a:schemeClr val="accent1"/>
-          </a:fillRef>
-          <a:effectRef idx="2">
-            <a:schemeClr val="accent1"/>
-          </a:effectRef>
-          <a:fontRef idx="minor">
-            <a:schemeClr val="lt1"/>
-          </a:fontRef>
-        </p:style>
-        <p:txBody>
-          <a:bodyPr rtlCol="0" anchor="ctr"/>
-          <a:lstStyle/>
-          <a:p>
-            <a:pPr algn="ctr"/>
-          </a:p>
-        </p:txBody>
-      </p:sp>
-      <p:sp>
-        <p:nvSpPr>
-          <p:cNvPr id="14" name="Rounded Rectangle 13"/>
-          <p:cNvSpPr/>
-          <p:nvPr/>
-        </p:nvSpPr>
-        <p:spPr>
-          <a:xfrm>
-            <a:off x="594360" y="3575304"/>
-            <a:ext cx="438912" cy="438912"/>
-          </a:xfrm>
-          <a:prstGeom prst="roundRect">
-            <a:avLst>
-              <a:gd name="adj" fmla="val 12000"/>
-            </a:avLst>
-          </a:prstGeom>
-          <a:solidFill>
-            <a:srgbClr val="095292"/>
-          </a:solidFill>
-          <a:ln>
-            <a:noFill/>
-          </a:ln>
-        </p:spPr>
-        <p:style>
-          <a:lnRef idx="1">
-            <a:schemeClr val="accent1"/>
-          </a:lnRef>
-          <a:fillRef idx="3">
-            <a:schemeClr val="accent1"/>
-          </a:fillRef>
-          <a:effectRef idx="2">
-            <a:schemeClr val="accent1"/>
-          </a:effectRef>
-          <a:fontRef idx="minor">
-            <a:schemeClr val="lt1"/>
-          </a:fontRef>
-        </p:style>
-        <p:txBody>
-          <a:bodyPr rtlCol="0" anchor="ctr"/>
-          <a:lstStyle/>
-          <a:p>
-            <a:pPr algn="ctr"/>
-          </a:p>
-        </p:txBody>
-      </p:sp>
-      <p:sp>
-        <p:nvSpPr>
-          <p:cNvPr id="15" name="TextBox 14"/>
-          <p:cNvSpPr txBox="1"/>
-          <p:nvPr/>
-        </p:nvSpPr>
-        <p:spPr>
-          <a:xfrm>
-            <a:off x="594360" y="3575304"/>
-            <a:ext cx="438912" cy="438912"/>
-          </a:xfrm>
-          <a:prstGeom prst="rect">
-            <a:avLst/>
-          </a:prstGeom>
-          <a:noFill/>
-        </p:spPr>
-        <p:txBody>
-          <a:bodyPr wrap="square" anchor="ctr"/>
-          <a:lstStyle/>
-          <a:p>
-            <a:pPr algn="ctr"/>
-            <a:r>
-              <a:rPr sz="1600" b="1" i="0">
-                <a:solidFill>
-                  <a:srgbClr val="FFFFFF"/>
-                </a:solidFill>
-                <a:latin typeface="Calibri"/>
-              </a:rPr>
-              <a:t>3</a:t>
-            </a:r>
-          </a:p>
-        </p:txBody>
-      </p:sp>
-      <p:sp>
-        <p:nvSpPr>
-          <p:cNvPr id="16" name="TextBox 15"/>
-          <p:cNvSpPr txBox="1"/>
-          <p:nvPr/>
-        </p:nvSpPr>
-        <p:spPr>
-          <a:xfrm>
-            <a:off x="1188720" y="3410712"/>
-            <a:ext cx="10271455" cy="786384"/>
-          </a:xfrm>
-          <a:prstGeom prst="rect">
-            <a:avLst/>
-          </a:prstGeom>
-          <a:noFill/>
-        </p:spPr>
-        <p:txBody>
-          <a:bodyPr wrap="square" anchor="ctr"/>
-          <a:lstStyle/>
-          <a:p>
-            <a:r>
-              <a:rPr sz="1500" b="1" i="0">
-                <a:solidFill>
-                  <a:srgbClr val="095292"/>
-                </a:solidFill>
-                <a:latin typeface="Calibri"/>
-              </a:rPr>
-              <a:t>Paso 3: derive 4 RNF, uno por categoria (desempeno, control de acceso, usabilidad y respaldo), y escriba en cada uno al menos un numero: segundos, cantidad de registros, frecuencia o porcentaje.</a:t>
-            </a:r>
-          </a:p>
-        </p:txBody>
-      </p:sp>
-      <p:sp>
-        <p:nvSpPr>
-          <p:cNvPr id="17" name="Rounded Rectangle 16"/>
-          <p:cNvSpPr/>
-          <p:nvPr/>
-        </p:nvSpPr>
-        <p:spPr>
-          <a:xfrm>
-            <a:off x="457200" y="4361688"/>
-            <a:ext cx="11277295" cy="950976"/>
-          </a:xfrm>
-          <a:prstGeom prst="roundRect">
-            <a:avLst>
-              <a:gd name="adj" fmla="val 12000"/>
-            </a:avLst>
-          </a:prstGeom>
-          <a:solidFill>
-            <a:srgbClr val="E8F4FA"/>
-          </a:solidFill>
-          <a:ln>
-            <a:noFill/>
-          </a:ln>
-        </p:spPr>
-        <p:style>
-          <a:lnRef idx="1">
-            <a:schemeClr val="accent1"/>
-          </a:lnRef>
-          <a:fillRef idx="3">
-            <a:schemeClr val="accent1"/>
-          </a:fillRef>
-          <a:effectRef idx="2">
-            <a:schemeClr val="accent1"/>
-          </a:effectRef>
-          <a:fontRef idx="minor">
-            <a:schemeClr val="lt1"/>
-          </a:fontRef>
-        </p:style>
-        <p:txBody>
-          <a:bodyPr rtlCol="0" anchor="ctr"/>
-          <a:lstStyle/>
-          <a:p>
-            <a:pPr algn="ctr"/>
-          </a:p>
-        </p:txBody>
-      </p:sp>
-      <p:sp>
-        <p:nvSpPr>
-          <p:cNvPr id="18" name="Rounded Rectangle 17"/>
-          <p:cNvSpPr/>
-          <p:nvPr/>
-        </p:nvSpPr>
-        <p:spPr>
-          <a:xfrm>
-            <a:off x="594360" y="4617720"/>
-            <a:ext cx="438912" cy="438912"/>
-          </a:xfrm>
-          <a:prstGeom prst="roundRect">
-            <a:avLst>
-              <a:gd name="adj" fmla="val 12000"/>
-            </a:avLst>
-          </a:prstGeom>
-          <a:solidFill>
-            <a:srgbClr val="095292"/>
-          </a:solidFill>
-          <a:ln>
-            <a:noFill/>
-          </a:ln>
-        </p:spPr>
-        <p:style>
-          <a:lnRef idx="1">
-            <a:schemeClr val="accent1"/>
-          </a:lnRef>
-          <a:fillRef idx="3">
-            <a:schemeClr val="accent1"/>
-          </a:fillRef>
-          <a:effectRef idx="2">
-            <a:schemeClr val="accent1"/>
-          </a:effectRef>
-          <a:fontRef idx="minor">
-            <a:schemeClr val="lt1"/>
-          </a:fontRef>
-        </p:style>
-        <p:txBody>
-          <a:bodyPr rtlCol="0" anchor="ctr"/>
-          <a:lstStyle/>
-          <a:p>
-            <a:pPr algn="ctr"/>
-          </a:p>
-        </p:txBody>
-      </p:sp>
-      <p:sp>
-        <p:nvSpPr>
-          <p:cNvPr id="19" name="TextBox 18"/>
-          <p:cNvSpPr txBox="1"/>
-          <p:nvPr/>
-        </p:nvSpPr>
-        <p:spPr>
-          <a:xfrm>
-            <a:off x="594360" y="4617720"/>
-            <a:ext cx="438912" cy="438912"/>
-          </a:xfrm>
-          <a:prstGeom prst="rect">
-            <a:avLst/>
-          </a:prstGeom>
-          <a:noFill/>
-        </p:spPr>
-        <p:txBody>
-          <a:bodyPr wrap="square" anchor="ctr"/>
-          <a:lstStyle/>
-          <a:p>
-            <a:pPr algn="ctr"/>
-            <a:r>
-              <a:rPr sz="1600" b="1" i="0">
-                <a:solidFill>
-                  <a:srgbClr val="FFFFFF"/>
-                </a:solidFill>
-                <a:latin typeface="Calibri"/>
-              </a:rPr>
-              <a:t>4</a:t>
-            </a:r>
-          </a:p>
-        </p:txBody>
-      </p:sp>
-      <p:sp>
-        <p:nvSpPr>
-          <p:cNvPr id="20" name="TextBox 19"/>
-          <p:cNvSpPr txBox="1"/>
-          <p:nvPr/>
-        </p:nvSpPr>
-        <p:spPr>
-          <a:xfrm>
-            <a:off x="1188720" y="4453128"/>
-            <a:ext cx="10271455" cy="786384"/>
-          </a:xfrm>
-          <a:prstGeom prst="rect">
-            <a:avLst/>
-          </a:prstGeom>
-          <a:noFill/>
-        </p:spPr>
-        <p:txBody>
-          <a:bodyPr wrap="square" anchor="ctr"/>
-          <a:lstStyle/>
-          <a:p>
-            <a:r>
-              <a:rPr sz="1500" b="1" i="0">
-                <a:solidFill>
-                  <a:srgbClr val="095292"/>
-                </a:solidFill>
-                <a:latin typeface="Calibri"/>
-              </a:rPr>
-              <a:t>Paso 4: asigne prioridad MoSCoW a los 12 requisitos, verifique que los Must no pasen de seis y justifique en una linea por que los dos Won't quedan fuera de esta version de VetCare.</a:t>
-            </a:r>
-          </a:p>
-        </p:txBody>
-      </p:sp>
-      <p:sp>
-        <p:nvSpPr>
-          <p:cNvPr id="21" name="Rounded Rectangle 20"/>
-          <p:cNvSpPr/>
-          <p:nvPr/>
-        </p:nvSpPr>
-        <p:spPr>
-          <a:xfrm>
-            <a:off x="457200" y="5404104"/>
-            <a:ext cx="11277295" cy="950976"/>
-          </a:xfrm>
-          <a:prstGeom prst="roundRect">
-            <a:avLst>
-              <a:gd name="adj" fmla="val 12000"/>
-            </a:avLst>
-          </a:prstGeom>
-          <a:solidFill>
-            <a:srgbClr val="F2F2F2"/>
-          </a:solidFill>
-          <a:ln>
-            <a:noFill/>
-          </a:ln>
-        </p:spPr>
-        <p:style>
-          <a:lnRef idx="1">
-            <a:schemeClr val="accent1"/>
-          </a:lnRef>
-          <a:fillRef idx="3">
-            <a:schemeClr val="accent1"/>
-          </a:fillRef>
-          <a:effectRef idx="2">
-            <a:schemeClr val="accent1"/>
-          </a:effectRef>
-          <a:fontRef idx="minor">
-            <a:schemeClr val="lt1"/>
-          </a:fontRef>
-        </p:style>
-        <p:txBody>
-          <a:bodyPr rtlCol="0" anchor="ctr"/>
-          <a:lstStyle/>
-          <a:p>
-            <a:pPr algn="ctr"/>
-          </a:p>
-        </p:txBody>
-      </p:sp>
-      <p:sp>
-        <p:nvSpPr>
-          <p:cNvPr id="22" name="Rounded Rectangle 21"/>
-          <p:cNvSpPr/>
-          <p:nvPr/>
-        </p:nvSpPr>
-        <p:spPr>
-          <a:xfrm>
-            <a:off x="594360" y="5660136"/>
-            <a:ext cx="438912" cy="438912"/>
-          </a:xfrm>
-          <a:prstGeom prst="roundRect">
-            <a:avLst>
-              <a:gd name="adj" fmla="val 12000"/>
-            </a:avLst>
-          </a:prstGeom>
-          <a:solidFill>
-            <a:srgbClr val="095292"/>
-          </a:solidFill>
-          <a:ln>
-            <a:noFill/>
-          </a:ln>
-        </p:spPr>
-        <p:style>
-          <a:lnRef idx="1">
-            <a:schemeClr val="accent1"/>
-          </a:lnRef>
-          <a:fillRef idx="3">
-            <a:schemeClr val="accent1"/>
-          </a:fillRef>
-          <a:effectRef idx="2">
-            <a:schemeClr val="accent1"/>
-          </a:effectRef>
-          <a:fontRef idx="minor">
-            <a:schemeClr val="lt1"/>
-          </a:fontRef>
-        </p:style>
-        <p:txBody>
-          <a:bodyPr rtlCol="0" anchor="ctr"/>
-          <a:lstStyle/>
-          <a:p>
-            <a:pPr algn="ctr"/>
-          </a:p>
-        </p:txBody>
-      </p:sp>
-      <p:sp>
-        <p:nvSpPr>
-          <p:cNvPr id="23" name="TextBox 22"/>
-          <p:cNvSpPr txBox="1"/>
-          <p:nvPr/>
-        </p:nvSpPr>
-        <p:spPr>
-          <a:xfrm>
-            <a:off x="594360" y="5660136"/>
-            <a:ext cx="438912" cy="438912"/>
-          </a:xfrm>
-          <a:prstGeom prst="rect">
-            <a:avLst/>
-          </a:prstGeom>
-          <a:noFill/>
-        </p:spPr>
-        <p:txBody>
-          <a:bodyPr wrap="square" anchor="ctr"/>
-          <a:lstStyle/>
-          <a:p>
-            <a:pPr algn="ctr"/>
-            <a:r>
-              <a:rPr sz="1600" b="1" i="0">
-                <a:solidFill>
-                  <a:srgbClr val="FFFFFF"/>
-                </a:solidFill>
-                <a:latin typeface="Calibri"/>
-              </a:rPr>
-              <a:t>5</a:t>
-            </a:r>
-          </a:p>
-        </p:txBody>
-      </p:sp>
-      <p:sp>
-        <p:nvSpPr>
-          <p:cNvPr id="24" name="TextBox 23"/>
-          <p:cNvSpPr txBox="1"/>
-          <p:nvPr/>
-        </p:nvSpPr>
-        <p:spPr>
-          <a:xfrm>
-            <a:off x="1188720" y="5495544"/>
-            <a:ext cx="10271455" cy="786384"/>
-          </a:xfrm>
-          <a:prstGeom prst="rect">
-            <a:avLst/>
-          </a:prstGeom>
-          <a:noFill/>
-        </p:spPr>
-        <p:txBody>
-          <a:bodyPr wrap="square" anchor="ctr"/>
-          <a:lstStyle/>
-          <a:p>
-            <a:r>
-              <a:rPr sz="1500" b="1" i="0">
-                <a:solidFill>
-                  <a:srgbClr val="095292"/>
-                </a:solidFill>
-                <a:latin typeface="Calibri"/>
-              </a:rPr>
-              <a:t>Paso 5: complete la matriz de trazabilidad con las columnas Necesidad, RF/RNF, Pantalla prevista y Prueba de aceptacion, exporte el documento a PDF y subalo a la plataforma del curso con el nombre RF-RNF-VetCare-&lt;sus apellidos&gt;.pdf.</a:t>
-            </a:r>
-          </a:p>
-        </p:txBody>
-      </p:sp>
-      <p:sp>
-        <p:nvSpPr>
-          <p:cNvPr id="25" name="TextBox 24"/>
+          <a:bodyPr wrap="square">
+            <a:spAutoFit/>
+          </a:bodyPr>
+          <a:lstStyle/>
+          <a:p>
+            <a:pPr>
+              <a:spcAft>
+                <a:spcPts val="800"/>
+              </a:spcAft>
+            </a:pPr>
+            <a:r>
+              <a:rPr sz="2000" b="0" i="0">
+                <a:solidFill>
+                  <a:srgbClr val="333333"/>
+                </a:solidFill>
+                <a:latin typeface="Calibri"/>
+              </a:rPr>
+              <a:t>–   </a:t>
+            </a:r>
+            <a:r>
+              <a:rPr sz="2000" b="1" i="0">
+                <a:solidFill>
+                  <a:srgbClr val="333333"/>
+                </a:solidFill>
+                <a:latin typeface="Calibri"/>
+              </a:rPr>
+              <a:t>Por que importa al PI:</a:t>
+            </a:r>
+            <a:r>
+              <a:rPr sz="2000" b="0" i="0">
+                <a:solidFill>
+                  <a:srgbClr val="333333"/>
+                </a:solidFill>
+                <a:latin typeface="Calibri"/>
+              </a:rPr>
+              <a:t> este catalogo es el contrato del Proyecto Integrador; todo lo que se dibuje en las clases siguientes (casos de uso, clases, mockups, diccionario de datos) debe poder rastrearse hasta un requisito de esta lista.</a:t>
+            </a:r>
+          </a:p>
+          <a:p>
+            <a:pPr>
+              <a:spcAft>
+                <a:spcPts val="800"/>
+              </a:spcAft>
+            </a:pPr>
+            <a:r>
+              <a:rPr sz="2000" b="0" i="0">
+                <a:solidFill>
+                  <a:srgbClr val="333333"/>
+                </a:solidFill>
+                <a:latin typeface="Calibri"/>
+              </a:rPr>
+              <a:t>–   Si un requisito no queda hoy en el documento, sencillamente no existe para VetCare: no se disena, no se dibuja y no se programa en Programacion II.</a:t>
+            </a:r>
+          </a:p>
+          <a:p>
+            <a:pPr>
+              <a:spcAft>
+                <a:spcPts val="800"/>
+              </a:spcAft>
+            </a:pPr>
+            <a:r>
+              <a:rPr sz="2000" b="0" i="0">
+                <a:solidFill>
+                  <a:srgbClr val="333333"/>
+                </a:solidFill>
+                <a:latin typeface="Calibri"/>
+              </a:rPr>
+              <a:t>–   Es tambien la primera entrega que se defiende hablando: usted debe poder explicarle al Dr. Ramirez, en dos minutos, que se le va a construir y que no.</a:t>
+            </a:r>
+          </a:p>
+        </p:txBody>
+      </p:sp>
+      <p:sp>
+        <p:nvSpPr>
+          <p:cNvPr id="6" name="TextBox 5"/>
           <p:cNvSpPr txBox="1"/>
           <p:nvPr/>
         </p:nvSpPr>
@@ -7559,154 +7481,21 @@
                 </a:solidFill>
                 <a:latin typeface="Calibri"/>
               </a:rPr>
-              <a:t>Antes de entregar — autochequeo</a:t>
-            </a:r>
-          </a:p>
-        </p:txBody>
-      </p:sp>
-      <p:sp>
-        <p:nvSpPr>
-          <p:cNvPr id="5" name="Rounded Rectangle 4"/>
-          <p:cNvSpPr/>
-          <p:nvPr/>
-        </p:nvSpPr>
-        <p:spPr>
-          <a:xfrm>
-            <a:off x="457200" y="1261872"/>
-            <a:ext cx="11277295" cy="566928"/>
-          </a:xfrm>
-          <a:prstGeom prst="roundRect">
-            <a:avLst>
-              <a:gd name="adj" fmla="val 12000"/>
-            </a:avLst>
-          </a:prstGeom>
-          <a:solidFill>
-            <a:srgbClr val="F2F2F2"/>
-          </a:solidFill>
-          <a:ln>
-            <a:noFill/>
-          </a:ln>
-        </p:spPr>
-        <p:style>
-          <a:lnRef idx="1">
-            <a:schemeClr val="accent1"/>
-          </a:lnRef>
-          <a:fillRef idx="3">
-            <a:schemeClr val="accent1"/>
-          </a:fillRef>
-          <a:effectRef idx="2">
-            <a:schemeClr val="accent1"/>
-          </a:effectRef>
-          <a:fontRef idx="minor">
-            <a:schemeClr val="lt1"/>
-          </a:fontRef>
-        </p:style>
-        <p:txBody>
-          <a:bodyPr rtlCol="0" anchor="ctr"/>
-          <a:lstStyle/>
-          <a:p>
-            <a:pPr algn="ctr"/>
-          </a:p>
-        </p:txBody>
-      </p:sp>
-      <p:sp>
-        <p:nvSpPr>
-          <p:cNvPr id="6" name="Rectangle 5"/>
-          <p:cNvSpPr/>
-          <p:nvPr/>
-        </p:nvSpPr>
-        <p:spPr>
-          <a:xfrm>
-            <a:off x="640080" y="1408175"/>
-            <a:ext cx="274320" cy="274320"/>
-          </a:xfrm>
-          <a:prstGeom prst="rect">
-            <a:avLst/>
-          </a:prstGeom>
-          <a:solidFill>
-            <a:srgbClr val="FFFFFF"/>
-          </a:solidFill>
-          <a:ln>
-            <a:solidFill>
-              <a:srgbClr val="333333"/>
-            </a:solidFill>
-          </a:ln>
-        </p:spPr>
-        <p:style>
-          <a:lnRef idx="1">
-            <a:schemeClr val="accent1"/>
-          </a:lnRef>
-          <a:fillRef idx="3">
-            <a:schemeClr val="accent1"/>
-          </a:fillRef>
-          <a:effectRef idx="2">
-            <a:schemeClr val="accent1"/>
-          </a:effectRef>
-          <a:fontRef idx="minor">
-            <a:schemeClr val="lt1"/>
-          </a:fontRef>
-        </p:style>
-        <p:txBody>
-          <a:bodyPr rtlCol="0" anchor="ctr"/>
-          <a:lstStyle/>
-          <a:p>
-            <a:pPr algn="ctr"/>
-          </a:p>
-        </p:txBody>
-      </p:sp>
-      <p:sp>
-        <p:nvSpPr>
-          <p:cNvPr id="7" name="Rectangle 6"/>
-          <p:cNvSpPr/>
-          <p:nvPr/>
-        </p:nvSpPr>
-        <p:spPr>
-          <a:xfrm>
-            <a:off x="640080" y="1408175"/>
-            <a:ext cx="73152" cy="274320"/>
-          </a:xfrm>
-          <a:prstGeom prst="rect">
-            <a:avLst/>
-          </a:prstGeom>
-          <a:solidFill>
-            <a:srgbClr val="269CCB"/>
-          </a:solidFill>
-          <a:ln>
-            <a:noFill/>
-          </a:ln>
-        </p:spPr>
-        <p:style>
-          <a:lnRef idx="1">
-            <a:schemeClr val="accent1"/>
-          </a:lnRef>
-          <a:fillRef idx="3">
-            <a:schemeClr val="accent1"/>
-          </a:fillRef>
-          <a:effectRef idx="2">
-            <a:schemeClr val="accent1"/>
-          </a:effectRef>
-          <a:fontRef idx="minor">
-            <a:schemeClr val="lt1"/>
-          </a:fontRef>
-        </p:style>
-        <p:txBody>
-          <a:bodyPr rtlCol="0" anchor="ctr"/>
-          <a:lstStyle/>
-          <a:p>
-            <a:pPr algn="ctr"/>
-          </a:p>
-        </p:txBody>
-      </p:sp>
-      <p:sp>
-        <p:nvSpPr>
-          <p:cNvPr id="8" name="TextBox 7"/>
+              <a:t>Taller PI — punto de partida</a:t>
+            </a:r>
+          </a:p>
+        </p:txBody>
+      </p:sp>
+      <p:sp>
+        <p:nvSpPr>
+          <p:cNvPr id="5" name="TextBox 4"/>
           <p:cNvSpPr txBox="1"/>
           <p:nvPr/>
         </p:nvSpPr>
         <p:spPr>
           <a:xfrm>
-            <a:off x="1097280" y="1353312"/>
-            <a:ext cx="10362895" cy="402336"/>
+            <a:off x="457200" y="1170432"/>
+            <a:ext cx="11277295" cy="5230368"/>
           </a:xfrm>
           <a:prstGeom prst="rect">
             <a:avLst/>
@@ -7714,354 +7503,63 @@
           <a:noFill/>
         </p:spPr>
         <p:txBody>
-          <a:bodyPr wrap="square" anchor="ctr"/>
-          <a:lstStyle/>
-          <a:p>
-            <a:r>
-              <a:rPr sz="1500" b="0" i="0">
+          <a:bodyPr wrap="square">
+            <a:spAutoFit/>
+          </a:bodyPr>
+          <a:lstStyle/>
+          <a:p>
+            <a:pPr>
+              <a:spcAft>
+                <a:spcPts val="800"/>
+              </a:spcAft>
+            </a:pPr>
+            <a:r>
+              <a:rPr sz="2000" b="0" i="0">
                 <a:solidFill>
                   <a:srgbClr val="333333"/>
                 </a:solidFill>
                 <a:latin typeface="Calibri"/>
               </a:rPr>
-              <a:t>Con que prueba concreta, hecha en menos de dos minutos delante del Dr. Ramirez, demostraria que este requisito quedo cumplido?</a:t>
-            </a:r>
-          </a:p>
-        </p:txBody>
-      </p:sp>
-      <p:sp>
-        <p:nvSpPr>
-          <p:cNvPr id="9" name="Rounded Rectangle 8"/>
-          <p:cNvSpPr/>
-          <p:nvPr/>
-        </p:nvSpPr>
-        <p:spPr>
-          <a:xfrm>
-            <a:off x="457200" y="1938528"/>
-            <a:ext cx="11277295" cy="566928"/>
-          </a:xfrm>
-          <a:prstGeom prst="roundRect">
-            <a:avLst>
-              <a:gd name="adj" fmla="val 12000"/>
-            </a:avLst>
-          </a:prstGeom>
-          <a:solidFill>
-            <a:srgbClr val="F2F2F2"/>
-          </a:solidFill>
-          <a:ln>
-            <a:noFill/>
-          </a:ln>
-        </p:spPr>
-        <p:style>
-          <a:lnRef idx="1">
-            <a:schemeClr val="accent1"/>
-          </a:lnRef>
-          <a:fillRef idx="3">
-            <a:schemeClr val="accent1"/>
-          </a:fillRef>
-          <a:effectRef idx="2">
-            <a:schemeClr val="accent1"/>
-          </a:effectRef>
-          <a:fontRef idx="minor">
-            <a:schemeClr val="lt1"/>
-          </a:fontRef>
-        </p:style>
-        <p:txBody>
-          <a:bodyPr rtlCol="0" anchor="ctr"/>
-          <a:lstStyle/>
-          <a:p>
-            <a:pPr algn="ctr"/>
-          </a:p>
-        </p:txBody>
-      </p:sp>
-      <p:sp>
-        <p:nvSpPr>
-          <p:cNvPr id="10" name="Rectangle 9"/>
-          <p:cNvSpPr/>
-          <p:nvPr/>
-        </p:nvSpPr>
-        <p:spPr>
-          <a:xfrm>
-            <a:off x="640080" y="2084832"/>
-            <a:ext cx="274320" cy="274320"/>
-          </a:xfrm>
-          <a:prstGeom prst="rect">
-            <a:avLst/>
-          </a:prstGeom>
-          <a:solidFill>
-            <a:srgbClr val="FFFFFF"/>
-          </a:solidFill>
-          <a:ln>
-            <a:solidFill>
-              <a:srgbClr val="333333"/>
-            </a:solidFill>
-          </a:ln>
-        </p:spPr>
-        <p:style>
-          <a:lnRef idx="1">
-            <a:schemeClr val="accent1"/>
-          </a:lnRef>
-          <a:fillRef idx="3">
-            <a:schemeClr val="accent1"/>
-          </a:fillRef>
-          <a:effectRef idx="2">
-            <a:schemeClr val="accent1"/>
-          </a:effectRef>
-          <a:fontRef idx="minor">
-            <a:schemeClr val="lt1"/>
-          </a:fontRef>
-        </p:style>
-        <p:txBody>
-          <a:bodyPr rtlCol="0" anchor="ctr"/>
-          <a:lstStyle/>
-          <a:p>
-            <a:pPr algn="ctr"/>
-          </a:p>
-        </p:txBody>
-      </p:sp>
-      <p:sp>
-        <p:nvSpPr>
-          <p:cNvPr id="11" name="Rectangle 10"/>
-          <p:cNvSpPr/>
-          <p:nvPr/>
-        </p:nvSpPr>
-        <p:spPr>
-          <a:xfrm>
-            <a:off x="640080" y="2084832"/>
-            <a:ext cx="73152" cy="274320"/>
-          </a:xfrm>
-          <a:prstGeom prst="rect">
-            <a:avLst/>
-          </a:prstGeom>
-          <a:solidFill>
-            <a:srgbClr val="269CCB"/>
-          </a:solidFill>
-          <a:ln>
-            <a:noFill/>
-          </a:ln>
-        </p:spPr>
-        <p:style>
-          <a:lnRef idx="1">
-            <a:schemeClr val="accent1"/>
-          </a:lnRef>
-          <a:fillRef idx="3">
-            <a:schemeClr val="accent1"/>
-          </a:fillRef>
-          <a:effectRef idx="2">
-            <a:schemeClr val="accent1"/>
-          </a:effectRef>
-          <a:fontRef idx="minor">
-            <a:schemeClr val="lt1"/>
-          </a:fontRef>
-        </p:style>
-        <p:txBody>
-          <a:bodyPr rtlCol="0" anchor="ctr"/>
-          <a:lstStyle/>
-          <a:p>
-            <a:pPr algn="ctr"/>
-          </a:p>
-        </p:txBody>
-      </p:sp>
-      <p:sp>
-        <p:nvSpPr>
-          <p:cNvPr id="12" name="TextBox 11"/>
-          <p:cNvSpPr txBox="1"/>
-          <p:nvPr/>
-        </p:nvSpPr>
-        <p:spPr>
-          <a:xfrm>
-            <a:off x="1097280" y="2029968"/>
-            <a:ext cx="10362895" cy="402336"/>
-          </a:xfrm>
-          <a:prstGeom prst="rect">
-            <a:avLst/>
-          </a:prstGeom>
-          <a:noFill/>
-        </p:spPr>
-        <p:txBody>
-          <a:bodyPr wrap="square" anchor="ctr"/>
-          <a:lstStyle/>
-          <a:p>
-            <a:r>
-              <a:rPr sz="1500" b="0" i="0">
+              <a:t>–   Hoy solo existe la transcripcion de la entrevista al Dr. Ramirez: cinco frases sueltas, dichas en lenguaje de veterinario y no de analista.</a:t>
+            </a:r>
+          </a:p>
+          <a:p>
+            <a:pPr>
+              <a:spcAft>
+                <a:spcPts val="800"/>
+              </a:spcAft>
+            </a:pPr>
+            <a:r>
+              <a:rPr sz="2000" b="0" i="0">
                 <a:solidFill>
                   <a:srgbClr val="333333"/>
                 </a:solidFill>
                 <a:latin typeface="Calibri"/>
               </a:rPr>
-              <a:t>Si borro este requisito de la lista, VetCare deja de resolver alguno de los tres dolores de Huellitas o solamente queda menos vistoso?</a:t>
-            </a:r>
-          </a:p>
-        </p:txBody>
-      </p:sp>
-      <p:sp>
-        <p:nvSpPr>
-          <p:cNvPr id="13" name="Rounded Rectangle 12"/>
-          <p:cNvSpPr/>
-          <p:nvPr/>
-        </p:nvSpPr>
-        <p:spPr>
-          <a:xfrm>
-            <a:off x="457200" y="2615184"/>
-            <a:ext cx="11277295" cy="566928"/>
-          </a:xfrm>
-          <a:prstGeom prst="roundRect">
-            <a:avLst>
-              <a:gd name="adj" fmla="val 12000"/>
-            </a:avLst>
-          </a:prstGeom>
-          <a:solidFill>
-            <a:srgbClr val="F2F2F2"/>
-          </a:solidFill>
-          <a:ln>
-            <a:noFill/>
-          </a:ln>
-        </p:spPr>
-        <p:style>
-          <a:lnRef idx="1">
-            <a:schemeClr val="accent1"/>
-          </a:lnRef>
-          <a:fillRef idx="3">
-            <a:schemeClr val="accent1"/>
-          </a:fillRef>
-          <a:effectRef idx="2">
-            <a:schemeClr val="accent1"/>
-          </a:effectRef>
-          <a:fontRef idx="minor">
-            <a:schemeClr val="lt1"/>
-          </a:fontRef>
-        </p:style>
-        <p:txBody>
-          <a:bodyPr rtlCol="0" anchor="ctr"/>
-          <a:lstStyle/>
-          <a:p>
-            <a:pPr algn="ctr"/>
-          </a:p>
-        </p:txBody>
-      </p:sp>
-      <p:sp>
-        <p:nvSpPr>
-          <p:cNvPr id="14" name="Rectangle 13"/>
-          <p:cNvSpPr/>
-          <p:nvPr/>
-        </p:nvSpPr>
-        <p:spPr>
-          <a:xfrm>
-            <a:off x="640080" y="2761488"/>
-            <a:ext cx="274320" cy="274320"/>
-          </a:xfrm>
-          <a:prstGeom prst="rect">
-            <a:avLst/>
-          </a:prstGeom>
-          <a:solidFill>
-            <a:srgbClr val="FFFFFF"/>
-          </a:solidFill>
-          <a:ln>
-            <a:solidFill>
-              <a:srgbClr val="333333"/>
-            </a:solidFill>
-          </a:ln>
-        </p:spPr>
-        <p:style>
-          <a:lnRef idx="1">
-            <a:schemeClr val="accent1"/>
-          </a:lnRef>
-          <a:fillRef idx="3">
-            <a:schemeClr val="accent1"/>
-          </a:fillRef>
-          <a:effectRef idx="2">
-            <a:schemeClr val="accent1"/>
-          </a:effectRef>
-          <a:fontRef idx="minor">
-            <a:schemeClr val="lt1"/>
-          </a:fontRef>
-        </p:style>
-        <p:txBody>
-          <a:bodyPr rtlCol="0" anchor="ctr"/>
-          <a:lstStyle/>
-          <a:p>
-            <a:pPr algn="ctr"/>
-          </a:p>
-        </p:txBody>
-      </p:sp>
-      <p:sp>
-        <p:nvSpPr>
-          <p:cNvPr id="15" name="Rectangle 14"/>
-          <p:cNvSpPr/>
-          <p:nvPr/>
-        </p:nvSpPr>
-        <p:spPr>
-          <a:xfrm>
-            <a:off x="640080" y="2761488"/>
-            <a:ext cx="73152" cy="274320"/>
-          </a:xfrm>
-          <a:prstGeom prst="rect">
-            <a:avLst/>
-          </a:prstGeom>
-          <a:solidFill>
-            <a:srgbClr val="269CCB"/>
-          </a:solidFill>
-          <a:ln>
-            <a:noFill/>
-          </a:ln>
-        </p:spPr>
-        <p:style>
-          <a:lnRef idx="1">
-            <a:schemeClr val="accent1"/>
-          </a:lnRef>
-          <a:fillRef idx="3">
-            <a:schemeClr val="accent1"/>
-          </a:fillRef>
-          <a:effectRef idx="2">
-            <a:schemeClr val="accent1"/>
-          </a:effectRef>
-          <a:fontRef idx="minor">
-            <a:schemeClr val="lt1"/>
-          </a:fontRef>
-        </p:style>
-        <p:txBody>
-          <a:bodyPr rtlCol="0" anchor="ctr"/>
-          <a:lstStyle/>
-          <a:p>
-            <a:pPr algn="ctr"/>
-          </a:p>
-        </p:txBody>
-      </p:sp>
-      <p:sp>
-        <p:nvSpPr>
-          <p:cNvPr id="16" name="TextBox 15"/>
-          <p:cNvSpPr txBox="1"/>
-          <p:nvPr/>
-        </p:nvSpPr>
-        <p:spPr>
-          <a:xfrm>
-            <a:off x="1097280" y="2706624"/>
-            <a:ext cx="10362895" cy="402336"/>
-          </a:xfrm>
-          <a:prstGeom prst="rect">
-            <a:avLst/>
-          </a:prstGeom>
-          <a:noFill/>
-        </p:spPr>
-        <p:txBody>
-          <a:bodyPr wrap="square" anchor="ctr"/>
-          <a:lstStyle/>
-          <a:p>
-            <a:r>
-              <a:rPr sz="1500" b="0" i="0">
+              <a:t>–   La clinica Huellitas sigue en papel: fichas que se extravian, busquedas de historial que toman varios minutos con el paciente esperando y cero metricas mensuales.</a:t>
+            </a:r>
+          </a:p>
+          <a:p>
+            <a:pPr>
+              <a:spcAft>
+                <a:spcPts val="800"/>
+              </a:spcAft>
+            </a:pPr>
+            <a:r>
+              <a:rPr sz="2000" b="0" i="0">
                 <a:solidFill>
                   <a:srgbClr val="333333"/>
                 </a:solidFill>
                 <a:latin typeface="Calibri"/>
               </a:rPr>
-              <a:t>Esta frase describe una sola accion de un solo actor, o estoy escondiendo dos o tres requisitos detras de una y?</a:t>
-            </a:r>
-          </a:p>
-        </p:txBody>
-      </p:sp>
-      <p:sp>
-        <p:nvSpPr>
-          <p:cNvPr id="17" name="TextBox 16"/>
+              <a:t>–   No hay documento de requisitos, no hay prioridades acordadas y nadie sabe todavia que queda dentro y que queda fuera de la primera version de VetCare.</a:t>
+            </a:r>
+          </a:p>
+        </p:txBody>
+      </p:sp>
+      <p:sp>
+        <p:nvSpPr>
+          <p:cNvPr id="6" name="TextBox 5"/>
           <p:cNvSpPr txBox="1"/>
           <p:nvPr/>
         </p:nvSpPr>
@@ -8566,21 +8064,111 @@
                 </a:solidFill>
                 <a:latin typeface="Calibri"/>
               </a:rPr>
-              <a:t>Criterios de exito / entregable</a:t>
-            </a:r>
-          </a:p>
-        </p:txBody>
-      </p:sp>
-      <p:sp>
-        <p:nvSpPr>
-          <p:cNvPr id="5" name="TextBox 4"/>
+              <a:t>Taller PI — pasos guiados</a:t>
+            </a:r>
+          </a:p>
+        </p:txBody>
+      </p:sp>
+      <p:sp>
+        <p:nvSpPr>
+          <p:cNvPr id="5" name="Rounded Rectangle 4"/>
+          <p:cNvSpPr/>
+          <p:nvPr/>
+        </p:nvSpPr>
+        <p:spPr>
+          <a:xfrm>
+            <a:off x="457200" y="1234440"/>
+            <a:ext cx="11277295" cy="950976"/>
+          </a:xfrm>
+          <a:prstGeom prst="roundRect">
+            <a:avLst>
+              <a:gd name="adj" fmla="val 12000"/>
+            </a:avLst>
+          </a:prstGeom>
+          <a:solidFill>
+            <a:srgbClr val="F2F2F2"/>
+          </a:solidFill>
+          <a:ln>
+            <a:noFill/>
+          </a:ln>
+        </p:spPr>
+        <p:style>
+          <a:lnRef idx="1">
+            <a:schemeClr val="accent1"/>
+          </a:lnRef>
+          <a:fillRef idx="3">
+            <a:schemeClr val="accent1"/>
+          </a:fillRef>
+          <a:effectRef idx="2">
+            <a:schemeClr val="accent1"/>
+          </a:effectRef>
+          <a:fontRef idx="minor">
+            <a:schemeClr val="lt1"/>
+          </a:fontRef>
+        </p:style>
+        <p:txBody>
+          <a:bodyPr rtlCol="0" anchor="ctr"/>
+          <a:lstStyle/>
+          <a:p>
+            <a:pPr algn="ctr"/>
+          </a:p>
+        </p:txBody>
+      </p:sp>
+      <p:sp>
+        <p:nvSpPr>
+          <p:cNvPr id="6" name="Rounded Rectangle 5"/>
+          <p:cNvSpPr/>
+          <p:nvPr/>
+        </p:nvSpPr>
+        <p:spPr>
+          <a:xfrm>
+            <a:off x="594360" y="1490472"/>
+            <a:ext cx="438912" cy="438912"/>
+          </a:xfrm>
+          <a:prstGeom prst="roundRect">
+            <a:avLst>
+              <a:gd name="adj" fmla="val 12000"/>
+            </a:avLst>
+          </a:prstGeom>
+          <a:solidFill>
+            <a:srgbClr val="095292"/>
+          </a:solidFill>
+          <a:ln>
+            <a:noFill/>
+          </a:ln>
+        </p:spPr>
+        <p:style>
+          <a:lnRef idx="1">
+            <a:schemeClr val="accent1"/>
+          </a:lnRef>
+          <a:fillRef idx="3">
+            <a:schemeClr val="accent1"/>
+          </a:fillRef>
+          <a:effectRef idx="2">
+            <a:schemeClr val="accent1"/>
+          </a:effectRef>
+          <a:fontRef idx="minor">
+            <a:schemeClr val="lt1"/>
+          </a:fontRef>
+        </p:style>
+        <p:txBody>
+          <a:bodyPr rtlCol="0" anchor="ctr"/>
+          <a:lstStyle/>
+          <a:p>
+            <a:pPr algn="ctr"/>
+          </a:p>
+        </p:txBody>
+      </p:sp>
+      <p:sp>
+        <p:nvSpPr>
+          <p:cNvPr id="7" name="TextBox 6"/>
           <p:cNvSpPr txBox="1"/>
           <p:nvPr/>
         </p:nvSpPr>
         <p:spPr>
           <a:xfrm>
-            <a:off x="457200" y="1170432"/>
-            <a:ext cx="11277295" cy="5230368"/>
+            <a:off x="594360" y="1490472"/>
+            <a:ext cx="438912" cy="438912"/>
           </a:xfrm>
           <a:prstGeom prst="rect">
             <a:avLst/>
@@ -8588,219 +8176,677 @@
           <a:noFill/>
         </p:spPr>
         <p:txBody>
-          <a:bodyPr wrap="square">
-            <a:spAutoFit/>
-          </a:bodyPr>
-          <a:lstStyle/>
-          <a:p>
-            <a:pPr>
-              <a:spcAft>
-                <a:spcPts val="800"/>
-              </a:spcAft>
-            </a:pPr>
-            <a:r>
-              <a:rPr sz="2000" b="0" i="0">
-                <a:solidFill>
-                  <a:srgbClr val="333333"/>
-                </a:solidFill>
-                <a:latin typeface="Calibri"/>
-              </a:rPr>
-              <a:t>–   </a:t>
-            </a:r>
-            <a:r>
-              <a:rPr sz="2000" b="1" i="0">
-                <a:solidFill>
-                  <a:srgbClr val="333333"/>
-                </a:solidFill>
-                <a:latin typeface="Calibri"/>
-              </a:rPr>
-              <a:t>Entregable:</a:t>
-            </a:r>
-            <a:r>
-              <a:rPr sz="2000" b="0" i="0">
-                <a:solidFill>
-                  <a:srgbClr val="333333"/>
-                </a:solidFill>
-                <a:latin typeface="Calibri"/>
-              </a:rPr>
-              <a:t> Documento de requisitos de VetCare en PDF, con minimo 8 RF, 4 RNF cuantificados, priorizacion MoSCoW y matriz de trazabilidad, subido a la plataforma del curso.</a:t>
-            </a:r>
-          </a:p>
-          <a:p>
-            <a:pPr>
-              <a:spcAft>
-                <a:spcPts val="800"/>
-              </a:spcAft>
-            </a:pPr>
-            <a:r>
-              <a:rPr sz="2000" b="0" i="0">
-                <a:solidFill>
-                  <a:srgbClr val="333333"/>
-                </a:solidFill>
-                <a:latin typeface="Calibri"/>
-              </a:rPr>
-              <a:t>–   </a:t>
-            </a:r>
-            <a:r>
-              <a:rPr sz="2000" b="1" i="0">
-                <a:solidFill>
-                  <a:srgbClr val="333333"/>
-                </a:solidFill>
-                <a:latin typeface="Calibri"/>
-              </a:rPr>
-              <a:t>Exito:</a:t>
-            </a:r>
-            <a:r>
-              <a:rPr sz="2000" b="0" i="0">
-                <a:solidFill>
-                  <a:srgbClr val="333333"/>
-                </a:solidFill>
-                <a:latin typeface="Calibri"/>
-              </a:rPr>
-              <a:t> El documento tiene minimo 8 RF y 4 RNF, todos con ID unico, actor explicito y redaccion en plantilla.</a:t>
-            </a:r>
-          </a:p>
-          <a:p>
-            <a:pPr>
-              <a:spcAft>
-                <a:spcPts val="800"/>
-              </a:spcAft>
-            </a:pPr>
-            <a:r>
-              <a:rPr sz="2000" b="0" i="0">
-                <a:solidFill>
-                  <a:srgbClr val="333333"/>
-                </a:solidFill>
-                <a:latin typeface="Calibri"/>
-              </a:rPr>
-              <a:t>–   </a:t>
-            </a:r>
-            <a:r>
-              <a:rPr sz="2000" b="1" i="0">
-                <a:solidFill>
-                  <a:srgbClr val="333333"/>
-                </a:solidFill>
-                <a:latin typeface="Calibri"/>
-              </a:rPr>
-              <a:t>Exito:</a:t>
-            </a:r>
-            <a:r>
-              <a:rPr sz="2000" b="0" i="0">
-                <a:solidFill>
-                  <a:srgbClr val="333333"/>
-                </a:solidFill>
-                <a:latin typeface="Calibri"/>
-              </a:rPr>
-              <a:t> Cada RNF trae al menos un valor medible (segundos, cantidad, frecuencia o porcentaje) y su forma de verificacion.</a:t>
-            </a:r>
-          </a:p>
-          <a:p>
-            <a:pPr>
-              <a:spcAft>
-                <a:spcPts val="800"/>
-              </a:spcAft>
-            </a:pPr>
-            <a:r>
-              <a:rPr sz="2000" b="0" i="0">
-                <a:solidFill>
-                  <a:srgbClr val="333333"/>
-                </a:solidFill>
-                <a:latin typeface="Calibri"/>
-              </a:rPr>
-              <a:t>–   </a:t>
-            </a:r>
-            <a:r>
-              <a:rPr sz="2000" b="1" i="0">
-                <a:solidFill>
-                  <a:srgbClr val="333333"/>
-                </a:solidFill>
-                <a:latin typeface="Calibri"/>
-              </a:rPr>
-              <a:t>Exito:</a:t>
-            </a:r>
-            <a:r>
-              <a:rPr sz="2000" b="0" i="0">
-                <a:solidFill>
-                  <a:srgbClr val="333333"/>
-                </a:solidFill>
-                <a:latin typeface="Calibri"/>
-              </a:rPr>
-              <a:t> Ningun requisito usa las palabras rapido, amigable, facil, intuitivo, robusto u optimo sin cuantificarlas.</a:t>
-            </a:r>
-          </a:p>
-          <a:p>
-            <a:pPr>
-              <a:spcAft>
-                <a:spcPts val="800"/>
-              </a:spcAft>
-            </a:pPr>
-            <a:r>
-              <a:rPr sz="2000" b="0" i="0">
-                <a:solidFill>
-                  <a:srgbClr val="333333"/>
-                </a:solidFill>
-                <a:latin typeface="Calibri"/>
-              </a:rPr>
-              <a:t>–   </a:t>
-            </a:r>
-            <a:r>
-              <a:rPr sz="2000" b="1" i="0">
-                <a:solidFill>
-                  <a:srgbClr val="333333"/>
-                </a:solidFill>
-                <a:latin typeface="Calibri"/>
-              </a:rPr>
-              <a:t>Exito:</a:t>
-            </a:r>
-            <a:r>
-              <a:rPr sz="2000" b="0" i="0">
-                <a:solidFill>
-                  <a:srgbClr val="333333"/>
-                </a:solidFill>
-                <a:latin typeface="Calibri"/>
-              </a:rPr>
-              <a:t> La matriz de trazabilidad conecta las cinco frases de la entrevista con al menos un requisito cada una, y ningun requisito queda huerfano de origen.</a:t>
-            </a:r>
-          </a:p>
-          <a:p>
-            <a:pPr>
-              <a:spcAft>
-                <a:spcPts val="800"/>
-              </a:spcAft>
-            </a:pPr>
-            <a:r>
-              <a:rPr sz="2000" b="0" i="0">
-                <a:solidFill>
-                  <a:srgbClr val="333333"/>
-                </a:solidFill>
-                <a:latin typeface="Calibri"/>
-              </a:rPr>
-              <a:t>–   </a:t>
-            </a:r>
-            <a:r>
-              <a:rPr sz="2000" b="1" i="0">
-                <a:solidFill>
-                  <a:srgbClr val="333333"/>
-                </a:solidFill>
-                <a:latin typeface="Calibri"/>
-              </a:rPr>
-              <a:t>Entrega en la plataforma del curso</a:t>
-            </a:r>
-            <a:r>
-              <a:rPr sz="2000" b="0" i="0">
-                <a:solidFill>
-                  <a:srgbClr val="333333"/>
-                </a:solidFill>
-                <a:latin typeface="Calibri"/>
-              </a:rPr>
-              <a:t> — en la fecha que indique el docente.</a:t>
-            </a:r>
-          </a:p>
-        </p:txBody>
-      </p:sp>
-      <p:sp>
-        <p:nvSpPr>
-          <p:cNvPr id="6" name="TextBox 5"/>
+          <a:bodyPr wrap="square" anchor="ctr"/>
+          <a:lstStyle/>
+          <a:p>
+            <a:pPr algn="ctr"/>
+            <a:r>
+              <a:rPr sz="1600" b="1" i="0">
+                <a:solidFill>
+                  <a:srgbClr val="FFFFFF"/>
+                </a:solidFill>
+                <a:latin typeface="Calibri"/>
+              </a:rPr>
+              <a:t>1</a:t>
+            </a:r>
+          </a:p>
+        </p:txBody>
+      </p:sp>
+      <p:sp>
+        <p:nvSpPr>
+          <p:cNvPr id="8" name="TextBox 7"/>
+          <p:cNvSpPr txBox="1"/>
+          <p:nvPr/>
+        </p:nvSpPr>
+        <p:spPr>
+          <a:xfrm>
+            <a:off x="1188720" y="1325880"/>
+            <a:ext cx="10271455" cy="786384"/>
+          </a:xfrm>
+          <a:prstGeom prst="rect">
+            <a:avLst/>
+          </a:prstGeom>
+          <a:noFill/>
+        </p:spPr>
+        <p:txBody>
+          <a:bodyPr wrap="square" anchor="ctr"/>
+          <a:lstStyle/>
+          <a:p>
+            <a:r>
+              <a:rPr sz="1500" b="1" i="0">
+                <a:solidFill>
+                  <a:srgbClr val="095292"/>
+                </a:solidFill>
+                <a:latin typeface="Calibri"/>
+              </a:rPr>
+              <a:t>Paso 1: copie en la plantilla las cinco frases crudas de la entrevista al Dr. Ramirez y marque cada una como NECESIDAD, anotando al lado quien la dijo y en que contexto; esa columna es el origen y no se puede dejar vacia.</a:t>
+            </a:r>
+          </a:p>
+        </p:txBody>
+      </p:sp>
+      <p:sp>
+        <p:nvSpPr>
+          <p:cNvPr id="9" name="Rounded Rectangle 8"/>
+          <p:cNvSpPr/>
+          <p:nvPr/>
+        </p:nvSpPr>
+        <p:spPr>
+          <a:xfrm>
+            <a:off x="457200" y="2276856"/>
+            <a:ext cx="11277295" cy="950976"/>
+          </a:xfrm>
+          <a:prstGeom prst="roundRect">
+            <a:avLst>
+              <a:gd name="adj" fmla="val 12000"/>
+            </a:avLst>
+          </a:prstGeom>
+          <a:solidFill>
+            <a:srgbClr val="E8F4FA"/>
+          </a:solidFill>
+          <a:ln>
+            <a:noFill/>
+          </a:ln>
+        </p:spPr>
+        <p:style>
+          <a:lnRef idx="1">
+            <a:schemeClr val="accent1"/>
+          </a:lnRef>
+          <a:fillRef idx="3">
+            <a:schemeClr val="accent1"/>
+          </a:fillRef>
+          <a:effectRef idx="2">
+            <a:schemeClr val="accent1"/>
+          </a:effectRef>
+          <a:fontRef idx="minor">
+            <a:schemeClr val="lt1"/>
+          </a:fontRef>
+        </p:style>
+        <p:txBody>
+          <a:bodyPr rtlCol="0" anchor="ctr"/>
+          <a:lstStyle/>
+          <a:p>
+            <a:pPr algn="ctr"/>
+          </a:p>
+        </p:txBody>
+      </p:sp>
+      <p:sp>
+        <p:nvSpPr>
+          <p:cNvPr id="10" name="Rounded Rectangle 9"/>
+          <p:cNvSpPr/>
+          <p:nvPr/>
+        </p:nvSpPr>
+        <p:spPr>
+          <a:xfrm>
+            <a:off x="594360" y="2532888"/>
+            <a:ext cx="438912" cy="438912"/>
+          </a:xfrm>
+          <a:prstGeom prst="roundRect">
+            <a:avLst>
+              <a:gd name="adj" fmla="val 12000"/>
+            </a:avLst>
+          </a:prstGeom>
+          <a:solidFill>
+            <a:srgbClr val="095292"/>
+          </a:solidFill>
+          <a:ln>
+            <a:noFill/>
+          </a:ln>
+        </p:spPr>
+        <p:style>
+          <a:lnRef idx="1">
+            <a:schemeClr val="accent1"/>
+          </a:lnRef>
+          <a:fillRef idx="3">
+            <a:schemeClr val="accent1"/>
+          </a:fillRef>
+          <a:effectRef idx="2">
+            <a:schemeClr val="accent1"/>
+          </a:effectRef>
+          <a:fontRef idx="minor">
+            <a:schemeClr val="lt1"/>
+          </a:fontRef>
+        </p:style>
+        <p:txBody>
+          <a:bodyPr rtlCol="0" anchor="ctr"/>
+          <a:lstStyle/>
+          <a:p>
+            <a:pPr algn="ctr"/>
+          </a:p>
+        </p:txBody>
+      </p:sp>
+      <p:sp>
+        <p:nvSpPr>
+          <p:cNvPr id="11" name="TextBox 10"/>
+          <p:cNvSpPr txBox="1"/>
+          <p:nvPr/>
+        </p:nvSpPr>
+        <p:spPr>
+          <a:xfrm>
+            <a:off x="594360" y="2532888"/>
+            <a:ext cx="438912" cy="438912"/>
+          </a:xfrm>
+          <a:prstGeom prst="rect">
+            <a:avLst/>
+          </a:prstGeom>
+          <a:noFill/>
+        </p:spPr>
+        <p:txBody>
+          <a:bodyPr wrap="square" anchor="ctr"/>
+          <a:lstStyle/>
+          <a:p>
+            <a:pPr algn="ctr"/>
+            <a:r>
+              <a:rPr sz="1600" b="1" i="0">
+                <a:solidFill>
+                  <a:srgbClr val="FFFFFF"/>
+                </a:solidFill>
+                <a:latin typeface="Calibri"/>
+              </a:rPr>
+              <a:t>2</a:t>
+            </a:r>
+          </a:p>
+        </p:txBody>
+      </p:sp>
+      <p:sp>
+        <p:nvSpPr>
+          <p:cNvPr id="12" name="TextBox 11"/>
+          <p:cNvSpPr txBox="1"/>
+          <p:nvPr/>
+        </p:nvSpPr>
+        <p:spPr>
+          <a:xfrm>
+            <a:off x="1188720" y="2368296"/>
+            <a:ext cx="10271455" cy="786384"/>
+          </a:xfrm>
+          <a:prstGeom prst="rect">
+            <a:avLst/>
+          </a:prstGeom>
+          <a:noFill/>
+        </p:spPr>
+        <p:txBody>
+          <a:bodyPr wrap="square" anchor="ctr"/>
+          <a:lstStyle/>
+          <a:p>
+            <a:r>
+              <a:rPr sz="1400" b="1" i="0">
+                <a:solidFill>
+                  <a:srgbClr val="095292"/>
+                </a:solidFill>
+                <a:latin typeface="Calibri"/>
+              </a:rPr>
+              <a:t>Paso 2: traduzca las necesidades a requisitos funcionales usando la plantilla el sistema debe permitir a &lt;actor&gt; &lt;accion&gt; &lt;objeto&gt;, hasta llegar a minimo 8 RF numerados de RF-01 a RF-08; ningun RF puede contener la palabra y uniendo dos capacidades distintas.</a:t>
+            </a:r>
+          </a:p>
+        </p:txBody>
+      </p:sp>
+      <p:sp>
+        <p:nvSpPr>
+          <p:cNvPr id="13" name="Rounded Rectangle 12"/>
+          <p:cNvSpPr/>
+          <p:nvPr/>
+        </p:nvSpPr>
+        <p:spPr>
+          <a:xfrm>
+            <a:off x="457200" y="3319272"/>
+            <a:ext cx="11277295" cy="950976"/>
+          </a:xfrm>
+          <a:prstGeom prst="roundRect">
+            <a:avLst>
+              <a:gd name="adj" fmla="val 12000"/>
+            </a:avLst>
+          </a:prstGeom>
+          <a:solidFill>
+            <a:srgbClr val="F2F2F2"/>
+          </a:solidFill>
+          <a:ln>
+            <a:noFill/>
+          </a:ln>
+        </p:spPr>
+        <p:style>
+          <a:lnRef idx="1">
+            <a:schemeClr val="accent1"/>
+          </a:lnRef>
+          <a:fillRef idx="3">
+            <a:schemeClr val="accent1"/>
+          </a:fillRef>
+          <a:effectRef idx="2">
+            <a:schemeClr val="accent1"/>
+          </a:effectRef>
+          <a:fontRef idx="minor">
+            <a:schemeClr val="lt1"/>
+          </a:fontRef>
+        </p:style>
+        <p:txBody>
+          <a:bodyPr rtlCol="0" anchor="ctr"/>
+          <a:lstStyle/>
+          <a:p>
+            <a:pPr algn="ctr"/>
+          </a:p>
+        </p:txBody>
+      </p:sp>
+      <p:sp>
+        <p:nvSpPr>
+          <p:cNvPr id="14" name="Rounded Rectangle 13"/>
+          <p:cNvSpPr/>
+          <p:nvPr/>
+        </p:nvSpPr>
+        <p:spPr>
+          <a:xfrm>
+            <a:off x="594360" y="3575304"/>
+            <a:ext cx="438912" cy="438912"/>
+          </a:xfrm>
+          <a:prstGeom prst="roundRect">
+            <a:avLst>
+              <a:gd name="adj" fmla="val 12000"/>
+            </a:avLst>
+          </a:prstGeom>
+          <a:solidFill>
+            <a:srgbClr val="095292"/>
+          </a:solidFill>
+          <a:ln>
+            <a:noFill/>
+          </a:ln>
+        </p:spPr>
+        <p:style>
+          <a:lnRef idx="1">
+            <a:schemeClr val="accent1"/>
+          </a:lnRef>
+          <a:fillRef idx="3">
+            <a:schemeClr val="accent1"/>
+          </a:fillRef>
+          <a:effectRef idx="2">
+            <a:schemeClr val="accent1"/>
+          </a:effectRef>
+          <a:fontRef idx="minor">
+            <a:schemeClr val="lt1"/>
+          </a:fontRef>
+        </p:style>
+        <p:txBody>
+          <a:bodyPr rtlCol="0" anchor="ctr"/>
+          <a:lstStyle/>
+          <a:p>
+            <a:pPr algn="ctr"/>
+          </a:p>
+        </p:txBody>
+      </p:sp>
+      <p:sp>
+        <p:nvSpPr>
+          <p:cNvPr id="15" name="TextBox 14"/>
+          <p:cNvSpPr txBox="1"/>
+          <p:nvPr/>
+        </p:nvSpPr>
+        <p:spPr>
+          <a:xfrm>
+            <a:off x="594360" y="3575304"/>
+            <a:ext cx="438912" cy="438912"/>
+          </a:xfrm>
+          <a:prstGeom prst="rect">
+            <a:avLst/>
+          </a:prstGeom>
+          <a:noFill/>
+        </p:spPr>
+        <p:txBody>
+          <a:bodyPr wrap="square" anchor="ctr"/>
+          <a:lstStyle/>
+          <a:p>
+            <a:pPr algn="ctr"/>
+            <a:r>
+              <a:rPr sz="1600" b="1" i="0">
+                <a:solidFill>
+                  <a:srgbClr val="FFFFFF"/>
+                </a:solidFill>
+                <a:latin typeface="Calibri"/>
+              </a:rPr>
+              <a:t>3</a:t>
+            </a:r>
+          </a:p>
+        </p:txBody>
+      </p:sp>
+      <p:sp>
+        <p:nvSpPr>
+          <p:cNvPr id="16" name="TextBox 15"/>
+          <p:cNvSpPr txBox="1"/>
+          <p:nvPr/>
+        </p:nvSpPr>
+        <p:spPr>
+          <a:xfrm>
+            <a:off x="1188720" y="3410712"/>
+            <a:ext cx="10271455" cy="786384"/>
+          </a:xfrm>
+          <a:prstGeom prst="rect">
+            <a:avLst/>
+          </a:prstGeom>
+          <a:noFill/>
+        </p:spPr>
+        <p:txBody>
+          <a:bodyPr wrap="square" anchor="ctr"/>
+          <a:lstStyle/>
+          <a:p>
+            <a:r>
+              <a:rPr sz="1500" b="1" i="0">
+                <a:solidFill>
+                  <a:srgbClr val="095292"/>
+                </a:solidFill>
+                <a:latin typeface="Calibri"/>
+              </a:rPr>
+              <a:t>Paso 3: derive 4 RNF, uno por categoria (desempeno, control de acceso, usabilidad y respaldo), y escriba en cada uno al menos un numero: segundos, cantidad de registros, frecuencia o porcentaje.</a:t>
+            </a:r>
+          </a:p>
+        </p:txBody>
+      </p:sp>
+      <p:sp>
+        <p:nvSpPr>
+          <p:cNvPr id="17" name="Rounded Rectangle 16"/>
+          <p:cNvSpPr/>
+          <p:nvPr/>
+        </p:nvSpPr>
+        <p:spPr>
+          <a:xfrm>
+            <a:off x="457200" y="4361688"/>
+            <a:ext cx="11277295" cy="950976"/>
+          </a:xfrm>
+          <a:prstGeom prst="roundRect">
+            <a:avLst>
+              <a:gd name="adj" fmla="val 12000"/>
+            </a:avLst>
+          </a:prstGeom>
+          <a:solidFill>
+            <a:srgbClr val="E8F4FA"/>
+          </a:solidFill>
+          <a:ln>
+            <a:noFill/>
+          </a:ln>
+        </p:spPr>
+        <p:style>
+          <a:lnRef idx="1">
+            <a:schemeClr val="accent1"/>
+          </a:lnRef>
+          <a:fillRef idx="3">
+            <a:schemeClr val="accent1"/>
+          </a:fillRef>
+          <a:effectRef idx="2">
+            <a:schemeClr val="accent1"/>
+          </a:effectRef>
+          <a:fontRef idx="minor">
+            <a:schemeClr val="lt1"/>
+          </a:fontRef>
+        </p:style>
+        <p:txBody>
+          <a:bodyPr rtlCol="0" anchor="ctr"/>
+          <a:lstStyle/>
+          <a:p>
+            <a:pPr algn="ctr"/>
+          </a:p>
+        </p:txBody>
+      </p:sp>
+      <p:sp>
+        <p:nvSpPr>
+          <p:cNvPr id="18" name="Rounded Rectangle 17"/>
+          <p:cNvSpPr/>
+          <p:nvPr/>
+        </p:nvSpPr>
+        <p:spPr>
+          <a:xfrm>
+            <a:off x="594360" y="4617720"/>
+            <a:ext cx="438912" cy="438912"/>
+          </a:xfrm>
+          <a:prstGeom prst="roundRect">
+            <a:avLst>
+              <a:gd name="adj" fmla="val 12000"/>
+            </a:avLst>
+          </a:prstGeom>
+          <a:solidFill>
+            <a:srgbClr val="095292"/>
+          </a:solidFill>
+          <a:ln>
+            <a:noFill/>
+          </a:ln>
+        </p:spPr>
+        <p:style>
+          <a:lnRef idx="1">
+            <a:schemeClr val="accent1"/>
+          </a:lnRef>
+          <a:fillRef idx="3">
+            <a:schemeClr val="accent1"/>
+          </a:fillRef>
+          <a:effectRef idx="2">
+            <a:schemeClr val="accent1"/>
+          </a:effectRef>
+          <a:fontRef idx="minor">
+            <a:schemeClr val="lt1"/>
+          </a:fontRef>
+        </p:style>
+        <p:txBody>
+          <a:bodyPr rtlCol="0" anchor="ctr"/>
+          <a:lstStyle/>
+          <a:p>
+            <a:pPr algn="ctr"/>
+          </a:p>
+        </p:txBody>
+      </p:sp>
+      <p:sp>
+        <p:nvSpPr>
+          <p:cNvPr id="19" name="TextBox 18"/>
+          <p:cNvSpPr txBox="1"/>
+          <p:nvPr/>
+        </p:nvSpPr>
+        <p:spPr>
+          <a:xfrm>
+            <a:off x="594360" y="4617720"/>
+            <a:ext cx="438912" cy="438912"/>
+          </a:xfrm>
+          <a:prstGeom prst="rect">
+            <a:avLst/>
+          </a:prstGeom>
+          <a:noFill/>
+        </p:spPr>
+        <p:txBody>
+          <a:bodyPr wrap="square" anchor="ctr"/>
+          <a:lstStyle/>
+          <a:p>
+            <a:pPr algn="ctr"/>
+            <a:r>
+              <a:rPr sz="1600" b="1" i="0">
+                <a:solidFill>
+                  <a:srgbClr val="FFFFFF"/>
+                </a:solidFill>
+                <a:latin typeface="Calibri"/>
+              </a:rPr>
+              <a:t>4</a:t>
+            </a:r>
+          </a:p>
+        </p:txBody>
+      </p:sp>
+      <p:sp>
+        <p:nvSpPr>
+          <p:cNvPr id="20" name="TextBox 19"/>
+          <p:cNvSpPr txBox="1"/>
+          <p:nvPr/>
+        </p:nvSpPr>
+        <p:spPr>
+          <a:xfrm>
+            <a:off x="1188720" y="4453128"/>
+            <a:ext cx="10271455" cy="786384"/>
+          </a:xfrm>
+          <a:prstGeom prst="rect">
+            <a:avLst/>
+          </a:prstGeom>
+          <a:noFill/>
+        </p:spPr>
+        <p:txBody>
+          <a:bodyPr wrap="square" anchor="ctr"/>
+          <a:lstStyle/>
+          <a:p>
+            <a:r>
+              <a:rPr sz="1500" b="1" i="0">
+                <a:solidFill>
+                  <a:srgbClr val="095292"/>
+                </a:solidFill>
+                <a:latin typeface="Calibri"/>
+              </a:rPr>
+              <a:t>Paso 4: asigne prioridad MoSCoW a los 12 requisitos, verifique que los Must no pasen de seis y justifique en una linea por que los dos Won't quedan fuera de esta version de VetCare.</a:t>
+            </a:r>
+          </a:p>
+        </p:txBody>
+      </p:sp>
+      <p:sp>
+        <p:nvSpPr>
+          <p:cNvPr id="21" name="Rounded Rectangle 20"/>
+          <p:cNvSpPr/>
+          <p:nvPr/>
+        </p:nvSpPr>
+        <p:spPr>
+          <a:xfrm>
+            <a:off x="457200" y="5404104"/>
+            <a:ext cx="11277295" cy="950976"/>
+          </a:xfrm>
+          <a:prstGeom prst="roundRect">
+            <a:avLst>
+              <a:gd name="adj" fmla="val 12000"/>
+            </a:avLst>
+          </a:prstGeom>
+          <a:solidFill>
+            <a:srgbClr val="F2F2F2"/>
+          </a:solidFill>
+          <a:ln>
+            <a:noFill/>
+          </a:ln>
+        </p:spPr>
+        <p:style>
+          <a:lnRef idx="1">
+            <a:schemeClr val="accent1"/>
+          </a:lnRef>
+          <a:fillRef idx="3">
+            <a:schemeClr val="accent1"/>
+          </a:fillRef>
+          <a:effectRef idx="2">
+            <a:schemeClr val="accent1"/>
+          </a:effectRef>
+          <a:fontRef idx="minor">
+            <a:schemeClr val="lt1"/>
+          </a:fontRef>
+        </p:style>
+        <p:txBody>
+          <a:bodyPr rtlCol="0" anchor="ctr"/>
+          <a:lstStyle/>
+          <a:p>
+            <a:pPr algn="ctr"/>
+          </a:p>
+        </p:txBody>
+      </p:sp>
+      <p:sp>
+        <p:nvSpPr>
+          <p:cNvPr id="22" name="Rounded Rectangle 21"/>
+          <p:cNvSpPr/>
+          <p:nvPr/>
+        </p:nvSpPr>
+        <p:spPr>
+          <a:xfrm>
+            <a:off x="594360" y="5660136"/>
+            <a:ext cx="438912" cy="438912"/>
+          </a:xfrm>
+          <a:prstGeom prst="roundRect">
+            <a:avLst>
+              <a:gd name="adj" fmla="val 12000"/>
+            </a:avLst>
+          </a:prstGeom>
+          <a:solidFill>
+            <a:srgbClr val="095292"/>
+          </a:solidFill>
+          <a:ln>
+            <a:noFill/>
+          </a:ln>
+        </p:spPr>
+        <p:style>
+          <a:lnRef idx="1">
+            <a:schemeClr val="accent1"/>
+          </a:lnRef>
+          <a:fillRef idx="3">
+            <a:schemeClr val="accent1"/>
+          </a:fillRef>
+          <a:effectRef idx="2">
+            <a:schemeClr val="accent1"/>
+          </a:effectRef>
+          <a:fontRef idx="minor">
+            <a:schemeClr val="lt1"/>
+          </a:fontRef>
+        </p:style>
+        <p:txBody>
+          <a:bodyPr rtlCol="0" anchor="ctr"/>
+          <a:lstStyle/>
+          <a:p>
+            <a:pPr algn="ctr"/>
+          </a:p>
+        </p:txBody>
+      </p:sp>
+      <p:sp>
+        <p:nvSpPr>
+          <p:cNvPr id="23" name="TextBox 22"/>
+          <p:cNvSpPr txBox="1"/>
+          <p:nvPr/>
+        </p:nvSpPr>
+        <p:spPr>
+          <a:xfrm>
+            <a:off x="594360" y="5660136"/>
+            <a:ext cx="438912" cy="438912"/>
+          </a:xfrm>
+          <a:prstGeom prst="rect">
+            <a:avLst/>
+          </a:prstGeom>
+          <a:noFill/>
+        </p:spPr>
+        <p:txBody>
+          <a:bodyPr wrap="square" anchor="ctr"/>
+          <a:lstStyle/>
+          <a:p>
+            <a:pPr algn="ctr"/>
+            <a:r>
+              <a:rPr sz="1600" b="1" i="0">
+                <a:solidFill>
+                  <a:srgbClr val="FFFFFF"/>
+                </a:solidFill>
+                <a:latin typeface="Calibri"/>
+              </a:rPr>
+              <a:t>5</a:t>
+            </a:r>
+          </a:p>
+        </p:txBody>
+      </p:sp>
+      <p:sp>
+        <p:nvSpPr>
+          <p:cNvPr id="24" name="TextBox 23"/>
+          <p:cNvSpPr txBox="1"/>
+          <p:nvPr/>
+        </p:nvSpPr>
+        <p:spPr>
+          <a:xfrm>
+            <a:off x="1188720" y="5495544"/>
+            <a:ext cx="10271455" cy="786384"/>
+          </a:xfrm>
+          <a:prstGeom prst="rect">
+            <a:avLst/>
+          </a:prstGeom>
+          <a:noFill/>
+        </p:spPr>
+        <p:txBody>
+          <a:bodyPr wrap="square" anchor="ctr"/>
+          <a:lstStyle/>
+          <a:p>
+            <a:r>
+              <a:rPr sz="1500" b="1" i="0">
+                <a:solidFill>
+                  <a:srgbClr val="095292"/>
+                </a:solidFill>
+                <a:latin typeface="Calibri"/>
+              </a:rPr>
+              <a:t>Paso 5: complete la matriz de trazabilidad con las columnas Necesidad, RF/RNF, Pantalla prevista y Prueba de aceptacion, exporte el documento a PDF y subalo a la plataforma del curso con el nombre RF-RNF-VetCare-&lt;sus apellidos&gt;.pdf.</a:t>
+            </a:r>
+          </a:p>
+        </p:txBody>
+      </p:sp>
+      <p:sp>
+        <p:nvSpPr>
+          <p:cNvPr id="25" name="TextBox 24"/>
           <p:cNvSpPr txBox="1"/>
           <p:nvPr/>
         </p:nvSpPr>
@@ -8974,7 +9020,7 @@
                 </a:solidFill>
                 <a:latin typeface="Calibri"/>
               </a:rPr>
-              <a:t>Para el PI esta semana</a:t>
+              <a:t>Antes de entregar — autochequeo</a:t>
             </a:r>
           </a:p>
         </p:txBody>
@@ -8988,7 +9034,7 @@
         <p:spPr>
           <a:xfrm>
             <a:off x="457200" y="1261872"/>
-            <a:ext cx="11277295" cy="1051560"/>
+            <a:ext cx="11277295" cy="566928"/>
           </a:xfrm>
           <a:prstGeom prst="roundRect">
             <a:avLst>
@@ -8996,7 +9042,7 @@
             </a:avLst>
           </a:prstGeom>
           <a:solidFill>
-            <a:srgbClr val="E8F4FA"/>
+            <a:srgbClr val="F2F2F2"/>
           </a:solidFill>
           <a:ln>
             <a:noFill/>
@@ -9032,8 +9078,53 @@
         </p:nvSpPr>
         <p:spPr>
           <a:xfrm>
-            <a:off x="457200" y="1261872"/>
-            <a:ext cx="128016" cy="1051560"/>
+            <a:off x="640080" y="1408175"/>
+            <a:ext cx="274320" cy="274320"/>
+          </a:xfrm>
+          <a:prstGeom prst="rect">
+            <a:avLst/>
+          </a:prstGeom>
+          <a:solidFill>
+            <a:srgbClr val="FFFFFF"/>
+          </a:solidFill>
+          <a:ln>
+            <a:solidFill>
+              <a:srgbClr val="333333"/>
+            </a:solidFill>
+          </a:ln>
+        </p:spPr>
+        <p:style>
+          <a:lnRef idx="1">
+            <a:schemeClr val="accent1"/>
+          </a:lnRef>
+          <a:fillRef idx="3">
+            <a:schemeClr val="accent1"/>
+          </a:fillRef>
+          <a:effectRef idx="2">
+            <a:schemeClr val="accent1"/>
+          </a:effectRef>
+          <a:fontRef idx="minor">
+            <a:schemeClr val="lt1"/>
+          </a:fontRef>
+        </p:style>
+        <p:txBody>
+          <a:bodyPr rtlCol="0" anchor="ctr"/>
+          <a:lstStyle/>
+          <a:p>
+            <a:pPr algn="ctr"/>
+          </a:p>
+        </p:txBody>
+      </p:sp>
+      <p:sp>
+        <p:nvSpPr>
+          <p:cNvPr id="7" name="Rectangle 6"/>
+          <p:cNvSpPr/>
+          <p:nvPr/>
+        </p:nvSpPr>
+        <p:spPr>
+          <a:xfrm>
+            <a:off x="640080" y="1408175"/>
+            <a:ext cx="73152" cy="274320"/>
           </a:xfrm>
           <a:prstGeom prst="rect">
             <a:avLst/>
@@ -9069,14 +9160,14 @@
       </p:sp>
       <p:sp>
         <p:nvSpPr>
-          <p:cNvPr id="7" name="TextBox 6"/>
+          <p:cNvPr id="8" name="TextBox 7"/>
           <p:cNvSpPr txBox="1"/>
           <p:nvPr/>
         </p:nvSpPr>
         <p:spPr>
           <a:xfrm>
-            <a:off x="777240" y="1399031"/>
-            <a:ext cx="10774375" cy="822959"/>
+            <a:off x="1097280" y="1353312"/>
+            <a:ext cx="10362895" cy="402336"/>
           </a:xfrm>
           <a:prstGeom prst="rect">
             <a:avLst/>
@@ -9084,49 +9175,31 @@
           <a:noFill/>
         </p:spPr>
         <p:txBody>
-          <a:bodyPr wrap="square">
-            <a:spAutoFit/>
-          </a:bodyPr>
-          <a:lstStyle/>
-          <a:p>
-            <a:r>
-              <a:rPr sz="1200" b="1" i="0">
-                <a:solidFill>
-                  <a:srgbClr val="269CCB"/>
-                </a:solidFill>
-                <a:latin typeface="Calibri"/>
-              </a:rPr>
-              <a:t>Info</a:t>
-            </a:r>
-          </a:p>
-          <a:p>
-            <a:pPr>
-              <a:spcBef>
-                <a:spcPts val="400"/>
-              </a:spcBef>
-            </a:pPr>
-            <a:r>
-              <a:rPr sz="1400" b="0" i="0">
+          <a:bodyPr wrap="square" anchor="ctr"/>
+          <a:lstStyle/>
+          <a:p>
+            <a:r>
+              <a:rPr sz="1500" b="0" i="0">
                 <a:solidFill>
                   <a:srgbClr val="333333"/>
                 </a:solidFill>
                 <a:latin typeface="Calibri"/>
               </a:rPr>
-              <a:t>Hito: Queda listo el catalogo de requisitos de VetCare: 8 RF y 4 RNF con criterio de verificacion y prioridad MoSCoW.</a:t>
-            </a:r>
-          </a:p>
-        </p:txBody>
-      </p:sp>
-      <p:sp>
-        <p:nvSpPr>
-          <p:cNvPr id="8" name="Rounded Rectangle 7"/>
+              <a:t>Con que prueba concreta, hecha en menos de dos minutos delante del Dr. Ramirez, demostraria que este requisito quedo cumplido?</a:t>
+            </a:r>
+          </a:p>
+        </p:txBody>
+      </p:sp>
+      <p:sp>
+        <p:nvSpPr>
+          <p:cNvPr id="9" name="Rounded Rectangle 8"/>
           <p:cNvSpPr/>
           <p:nvPr/>
         </p:nvSpPr>
         <p:spPr>
           <a:xfrm>
-            <a:off x="457200" y="2478024"/>
-            <a:ext cx="11277295" cy="1051560"/>
+            <a:off x="457200" y="1938528"/>
+            <a:ext cx="11277295" cy="566928"/>
           </a:xfrm>
           <a:prstGeom prst="roundRect">
             <a:avLst>
@@ -9134,7 +9207,7 @@
             </a:avLst>
           </a:prstGeom>
           <a:solidFill>
-            <a:srgbClr val="FFF8E1"/>
+            <a:srgbClr val="F2F2F2"/>
           </a:solidFill>
           <a:ln>
             <a:noFill/>
@@ -9164,23 +9237,25 @@
       </p:sp>
       <p:sp>
         <p:nvSpPr>
-          <p:cNvPr id="9" name="Rectangle 8"/>
+          <p:cNvPr id="10" name="Rectangle 9"/>
           <p:cNvSpPr/>
           <p:nvPr/>
         </p:nvSpPr>
         <p:spPr>
           <a:xfrm>
-            <a:off x="457200" y="2478024"/>
-            <a:ext cx="128016" cy="1051560"/>
+            <a:off x="640080" y="2084832"/>
+            <a:ext cx="274320" cy="274320"/>
           </a:xfrm>
           <a:prstGeom prst="rect">
             <a:avLst/>
           </a:prstGeom>
           <a:solidFill>
-            <a:srgbClr val="FFD000"/>
+            <a:srgbClr val="FFFFFF"/>
           </a:solidFill>
           <a:ln>
-            <a:noFill/>
+            <a:solidFill>
+              <a:srgbClr val="333333"/>
+            </a:solidFill>
           </a:ln>
         </p:spPr>
         <p:style>
@@ -9207,72 +9282,20 @@
       </p:sp>
       <p:sp>
         <p:nvSpPr>
-          <p:cNvPr id="10" name="TextBox 9"/>
-          <p:cNvSpPr txBox="1"/>
-          <p:nvPr/>
-        </p:nvSpPr>
-        <p:spPr>
-          <a:xfrm>
-            <a:off x="777240" y="2615184"/>
-            <a:ext cx="10774375" cy="822959"/>
-          </a:xfrm>
-          <a:prstGeom prst="rect">
-            <a:avLst/>
-          </a:prstGeom>
-          <a:noFill/>
-        </p:spPr>
-        <p:txBody>
-          <a:bodyPr wrap="square">
-            <a:spAutoFit/>
-          </a:bodyPr>
-          <a:lstStyle/>
-          <a:p>
-            <a:r>
-              <a:rPr sz="1200" b="1" i="0">
-                <a:solidFill>
-                  <a:srgbClr val="FFD000"/>
-                </a:solidFill>
-                <a:latin typeface="Calibri"/>
-              </a:rPr>
-              <a:t>Aclaración</a:t>
-            </a:r>
-          </a:p>
-          <a:p>
-            <a:pPr>
-              <a:spcBef>
-                <a:spcPts val="400"/>
-              </a:spcBef>
-            </a:pPr>
-            <a:r>
-              <a:rPr sz="1400" b="0" i="0">
-                <a:solidFill>
-                  <a:srgbClr val="333333"/>
-                </a:solidFill>
-                <a:latin typeface="Calibri"/>
-              </a:rPr>
-              <a:t>Enunciado completo: Clases/Proyecto Integrador/ (VetCare).</a:t>
-            </a:r>
-          </a:p>
-        </p:txBody>
-      </p:sp>
-      <p:sp>
-        <p:nvSpPr>
-          <p:cNvPr id="11" name="Rounded Rectangle 10"/>
+          <p:cNvPr id="11" name="Rectangle 10"/>
           <p:cNvSpPr/>
           <p:nvPr/>
         </p:nvSpPr>
         <p:spPr>
           <a:xfrm>
-            <a:off x="457200" y="3694176"/>
-            <a:ext cx="11277295" cy="1051560"/>
-          </a:xfrm>
-          <a:prstGeom prst="roundRect">
-            <a:avLst>
-              <a:gd name="adj" fmla="val 12000"/>
-            </a:avLst>
+            <a:off x="640080" y="2084832"/>
+            <a:ext cx="73152" cy="274320"/>
+          </a:xfrm>
+          <a:prstGeom prst="rect">
+            <a:avLst/>
           </a:prstGeom>
           <a:solidFill>
-            <a:srgbClr val="FBE4E4"/>
+            <a:srgbClr val="269CCB"/>
           </a:solidFill>
           <a:ln>
             <a:noFill/>
@@ -9302,20 +9325,54 @@
       </p:sp>
       <p:sp>
         <p:nvSpPr>
-          <p:cNvPr id="12" name="Rectangle 11"/>
+          <p:cNvPr id="12" name="TextBox 11"/>
+          <p:cNvSpPr txBox="1"/>
+          <p:nvPr/>
+        </p:nvSpPr>
+        <p:spPr>
+          <a:xfrm>
+            <a:off x="1097280" y="2029968"/>
+            <a:ext cx="10362895" cy="402336"/>
+          </a:xfrm>
+          <a:prstGeom prst="rect">
+            <a:avLst/>
+          </a:prstGeom>
+          <a:noFill/>
+        </p:spPr>
+        <p:txBody>
+          <a:bodyPr wrap="square" anchor="ctr"/>
+          <a:lstStyle/>
+          <a:p>
+            <a:r>
+              <a:rPr sz="1500" b="0" i="0">
+                <a:solidFill>
+                  <a:srgbClr val="333333"/>
+                </a:solidFill>
+                <a:latin typeface="Calibri"/>
+              </a:rPr>
+              <a:t>Si borro este requisito de la lista, VetCare deja de resolver alguno de los tres dolores de Huellitas o solamente queda menos vistoso?</a:t>
+            </a:r>
+          </a:p>
+        </p:txBody>
+      </p:sp>
+      <p:sp>
+        <p:nvSpPr>
+          <p:cNvPr id="13" name="Rounded Rectangle 12"/>
           <p:cNvSpPr/>
           <p:nvPr/>
         </p:nvSpPr>
         <p:spPr>
           <a:xfrm>
-            <a:off x="457200" y="3694176"/>
-            <a:ext cx="128016" cy="1051560"/>
-          </a:xfrm>
-          <a:prstGeom prst="rect">
-            <a:avLst/>
+            <a:off x="457200" y="2615184"/>
+            <a:ext cx="11277295" cy="566928"/>
+          </a:xfrm>
+          <a:prstGeom prst="roundRect">
+            <a:avLst>
+              <a:gd name="adj" fmla="val 12000"/>
+            </a:avLst>
           </a:prstGeom>
           <a:solidFill>
-            <a:srgbClr val="A02030"/>
+            <a:srgbClr val="F2F2F2"/>
           </a:solidFill>
           <a:ln>
             <a:noFill/>
@@ -9345,14 +9402,102 @@
       </p:sp>
       <p:sp>
         <p:nvSpPr>
-          <p:cNvPr id="13" name="TextBox 12"/>
+          <p:cNvPr id="14" name="Rectangle 13"/>
+          <p:cNvSpPr/>
+          <p:nvPr/>
+        </p:nvSpPr>
+        <p:spPr>
+          <a:xfrm>
+            <a:off x="640080" y="2761488"/>
+            <a:ext cx="274320" cy="274320"/>
+          </a:xfrm>
+          <a:prstGeom prst="rect">
+            <a:avLst/>
+          </a:prstGeom>
+          <a:solidFill>
+            <a:srgbClr val="FFFFFF"/>
+          </a:solidFill>
+          <a:ln>
+            <a:solidFill>
+              <a:srgbClr val="333333"/>
+            </a:solidFill>
+          </a:ln>
+        </p:spPr>
+        <p:style>
+          <a:lnRef idx="1">
+            <a:schemeClr val="accent1"/>
+          </a:lnRef>
+          <a:fillRef idx="3">
+            <a:schemeClr val="accent1"/>
+          </a:fillRef>
+          <a:effectRef idx="2">
+            <a:schemeClr val="accent1"/>
+          </a:effectRef>
+          <a:fontRef idx="minor">
+            <a:schemeClr val="lt1"/>
+          </a:fontRef>
+        </p:style>
+        <p:txBody>
+          <a:bodyPr rtlCol="0" anchor="ctr"/>
+          <a:lstStyle/>
+          <a:p>
+            <a:pPr algn="ctr"/>
+          </a:p>
+        </p:txBody>
+      </p:sp>
+      <p:sp>
+        <p:nvSpPr>
+          <p:cNvPr id="15" name="Rectangle 14"/>
+          <p:cNvSpPr/>
+          <p:nvPr/>
+        </p:nvSpPr>
+        <p:spPr>
+          <a:xfrm>
+            <a:off x="640080" y="2761488"/>
+            <a:ext cx="73152" cy="274320"/>
+          </a:xfrm>
+          <a:prstGeom prst="rect">
+            <a:avLst/>
+          </a:prstGeom>
+          <a:solidFill>
+            <a:srgbClr val="269CCB"/>
+          </a:solidFill>
+          <a:ln>
+            <a:noFill/>
+          </a:ln>
+        </p:spPr>
+        <p:style>
+          <a:lnRef idx="1">
+            <a:schemeClr val="accent1"/>
+          </a:lnRef>
+          <a:fillRef idx="3">
+            <a:schemeClr val="accent1"/>
+          </a:fillRef>
+          <a:effectRef idx="2">
+            <a:schemeClr val="accent1"/>
+          </a:effectRef>
+          <a:fontRef idx="minor">
+            <a:schemeClr val="lt1"/>
+          </a:fontRef>
+        </p:style>
+        <p:txBody>
+          <a:bodyPr rtlCol="0" anchor="ctr"/>
+          <a:lstStyle/>
+          <a:p>
+            <a:pPr algn="ctr"/>
+          </a:p>
+        </p:txBody>
+      </p:sp>
+      <p:sp>
+        <p:nvSpPr>
+          <p:cNvPr id="16" name="TextBox 15"/>
           <p:cNvSpPr txBox="1"/>
           <p:nvPr/>
         </p:nvSpPr>
         <p:spPr>
           <a:xfrm>
-            <a:off x="777240" y="3831336"/>
-            <a:ext cx="10774375" cy="822959"/>
+            <a:off x="1097280" y="2706624"/>
+            <a:ext cx="10362895" cy="402336"/>
           </a:xfrm>
           <a:prstGeom prst="rect">
             <a:avLst/>
@@ -9360,42 +9505,24 @@
           <a:noFill/>
         </p:spPr>
         <p:txBody>
-          <a:bodyPr wrap="square">
-            <a:spAutoFit/>
-          </a:bodyPr>
-          <a:lstStyle/>
-          <a:p>
-            <a:r>
-              <a:rPr sz="1200" b="1" i="0">
-                <a:solidFill>
-                  <a:srgbClr val="A02030"/>
-                </a:solidFill>
-                <a:latin typeface="Calibri"/>
-              </a:rPr>
-              <a:t>Atención</a:t>
-            </a:r>
-          </a:p>
-          <a:p>
-            <a:pPr>
-              <a:spcBef>
-                <a:spcPts val="400"/>
-              </a:spcBef>
-            </a:pPr>
-            <a:r>
-              <a:rPr sz="1400" b="0" i="0">
+          <a:bodyPr wrap="square" anchor="ctr"/>
+          <a:lstStyle/>
+          <a:p>
+            <a:r>
+              <a:rPr sz="1500" b="0" i="0">
                 <a:solidFill>
                   <a:srgbClr val="333333"/>
                 </a:solidFill>
                 <a:latin typeface="Calibri"/>
               </a:rPr>
-              <a:t>Entrega del taller, si el docente lo asigna · en la fecha que indique el docente.</a:t>
-            </a:r>
-          </a:p>
-        </p:txBody>
-      </p:sp>
-      <p:sp>
-        <p:nvSpPr>
-          <p:cNvPr id="14" name="TextBox 13"/>
+              <a:t>Esta frase describe una sola accion de un solo actor, o estoy escondiendo dos o tres requisitos detras de una y?</a:t>
+            </a:r>
+          </a:p>
+        </p:txBody>
+      </p:sp>
+      <p:sp>
+        <p:nvSpPr>
+          <p:cNvPr id="17" name="TextBox 16"/>
           <p:cNvSpPr txBox="1"/>
           <p:nvPr/>
         </p:nvSpPr>
@@ -9437,6 +9564,1009 @@
 </file>
 
 <file path=ppt/slides/slide22.xml><?xml version="1.0" encoding="utf-8"?>
+<p:sld xmlns:a="http://schemas.openxmlformats.org/drawingml/2006/main" xmlns:p="http://schemas.openxmlformats.org/presentationml/2006/main" xmlns:r="http://schemas.openxmlformats.org/officeDocument/2006/relationships">
+  <p:cSld>
+    <p:bg>
+      <p:bgPr>
+        <a:solidFill>
+          <a:srgbClr val="FFFFFF"/>
+        </a:solidFill>
+        <a:effectLst/>
+      </p:bgPr>
+    </p:bg>
+    <p:spTree>
+      <p:nvGrpSpPr>
+        <p:cNvPr id="1" name=""/>
+        <p:cNvGrpSpPr/>
+        <p:nvPr/>
+      </p:nvGrpSpPr>
+      <p:grpSpPr/>
+      <p:sp>
+        <p:nvSpPr>
+          <p:cNvPr id="2" name="Rectangle 1"/>
+          <p:cNvSpPr/>
+          <p:nvPr/>
+        </p:nvSpPr>
+        <p:spPr>
+          <a:xfrm>
+            <a:off x="0" y="0"/>
+            <a:ext cx="12191695" cy="960120"/>
+          </a:xfrm>
+          <a:prstGeom prst="rect">
+            <a:avLst/>
+          </a:prstGeom>
+          <a:solidFill>
+            <a:srgbClr val="095292"/>
+          </a:solidFill>
+          <a:ln>
+            <a:noFill/>
+          </a:ln>
+        </p:spPr>
+        <p:style>
+          <a:lnRef idx="1">
+            <a:schemeClr val="accent1"/>
+          </a:lnRef>
+          <a:fillRef idx="3">
+            <a:schemeClr val="accent1"/>
+          </a:fillRef>
+          <a:effectRef idx="2">
+            <a:schemeClr val="accent1"/>
+          </a:effectRef>
+          <a:fontRef idx="minor">
+            <a:schemeClr val="lt1"/>
+          </a:fontRef>
+        </p:style>
+        <p:txBody>
+          <a:bodyPr rtlCol="0" anchor="ctr"/>
+          <a:lstStyle/>
+          <a:p>
+            <a:pPr algn="ctr"/>
+          </a:p>
+        </p:txBody>
+      </p:sp>
+      <p:sp>
+        <p:nvSpPr>
+          <p:cNvPr id="3" name="Rectangle 2"/>
+          <p:cNvSpPr/>
+          <p:nvPr/>
+        </p:nvSpPr>
+        <p:spPr>
+          <a:xfrm>
+            <a:off x="0" y="960120"/>
+            <a:ext cx="12191695" cy="41148"/>
+          </a:xfrm>
+          <a:prstGeom prst="rect">
+            <a:avLst/>
+          </a:prstGeom>
+          <a:solidFill>
+            <a:srgbClr val="FFD000"/>
+          </a:solidFill>
+          <a:ln>
+            <a:noFill/>
+          </a:ln>
+        </p:spPr>
+        <p:style>
+          <a:lnRef idx="1">
+            <a:schemeClr val="accent1"/>
+          </a:lnRef>
+          <a:fillRef idx="3">
+            <a:schemeClr val="accent1"/>
+          </a:fillRef>
+          <a:effectRef idx="2">
+            <a:schemeClr val="accent1"/>
+          </a:effectRef>
+          <a:fontRef idx="minor">
+            <a:schemeClr val="lt1"/>
+          </a:fontRef>
+        </p:style>
+        <p:txBody>
+          <a:bodyPr rtlCol="0" anchor="ctr"/>
+          <a:lstStyle/>
+          <a:p>
+            <a:pPr algn="ctr"/>
+          </a:p>
+        </p:txBody>
+      </p:sp>
+      <p:sp>
+        <p:nvSpPr>
+          <p:cNvPr id="4" name="TextBox 3"/>
+          <p:cNvSpPr txBox="1"/>
+          <p:nvPr/>
+        </p:nvSpPr>
+        <p:spPr>
+          <a:xfrm>
+            <a:off x="457200" y="164592"/>
+            <a:ext cx="11277295" cy="502920"/>
+          </a:xfrm>
+          <a:prstGeom prst="rect">
+            <a:avLst/>
+          </a:prstGeom>
+          <a:noFill/>
+        </p:spPr>
+        <p:txBody>
+          <a:bodyPr wrap="square">
+            <a:spAutoFit/>
+          </a:bodyPr>
+          <a:lstStyle/>
+          <a:p>
+            <a:r>
+              <a:rPr sz="2600" b="1" i="0">
+                <a:solidFill>
+                  <a:srgbClr val="FFFFFF"/>
+                </a:solidFill>
+                <a:latin typeface="Calibri"/>
+              </a:rPr>
+              <a:t>Criterios de exito / entregable</a:t>
+            </a:r>
+          </a:p>
+        </p:txBody>
+      </p:sp>
+      <p:sp>
+        <p:nvSpPr>
+          <p:cNvPr id="5" name="TextBox 4"/>
+          <p:cNvSpPr txBox="1"/>
+          <p:nvPr/>
+        </p:nvSpPr>
+        <p:spPr>
+          <a:xfrm>
+            <a:off x="457200" y="1170432"/>
+            <a:ext cx="11277295" cy="5230368"/>
+          </a:xfrm>
+          <a:prstGeom prst="rect">
+            <a:avLst/>
+          </a:prstGeom>
+          <a:noFill/>
+        </p:spPr>
+        <p:txBody>
+          <a:bodyPr wrap="square">
+            <a:spAutoFit/>
+          </a:bodyPr>
+          <a:lstStyle/>
+          <a:p>
+            <a:pPr>
+              <a:spcAft>
+                <a:spcPts val="800"/>
+              </a:spcAft>
+            </a:pPr>
+            <a:r>
+              <a:rPr sz="2000" b="0" i="0">
+                <a:solidFill>
+                  <a:srgbClr val="333333"/>
+                </a:solidFill>
+                <a:latin typeface="Calibri"/>
+              </a:rPr>
+              <a:t>–   </a:t>
+            </a:r>
+            <a:r>
+              <a:rPr sz="2000" b="1" i="0">
+                <a:solidFill>
+                  <a:srgbClr val="333333"/>
+                </a:solidFill>
+                <a:latin typeface="Calibri"/>
+              </a:rPr>
+              <a:t>Entregable:</a:t>
+            </a:r>
+            <a:r>
+              <a:rPr sz="2000" b="0" i="0">
+                <a:solidFill>
+                  <a:srgbClr val="333333"/>
+                </a:solidFill>
+                <a:latin typeface="Calibri"/>
+              </a:rPr>
+              <a:t> Documento de requisitos de VetCare en PDF, con minimo 8 RF, 4 RNF cuantificados, priorizacion MoSCoW y matriz de trazabilidad, subido a la plataforma del curso.</a:t>
+            </a:r>
+          </a:p>
+          <a:p>
+            <a:pPr>
+              <a:spcAft>
+                <a:spcPts val="800"/>
+              </a:spcAft>
+            </a:pPr>
+            <a:r>
+              <a:rPr sz="2000" b="0" i="0">
+                <a:solidFill>
+                  <a:srgbClr val="333333"/>
+                </a:solidFill>
+                <a:latin typeface="Calibri"/>
+              </a:rPr>
+              <a:t>–   </a:t>
+            </a:r>
+            <a:r>
+              <a:rPr sz="2000" b="1" i="0">
+                <a:solidFill>
+                  <a:srgbClr val="333333"/>
+                </a:solidFill>
+                <a:latin typeface="Calibri"/>
+              </a:rPr>
+              <a:t>Exito:</a:t>
+            </a:r>
+            <a:r>
+              <a:rPr sz="2000" b="0" i="0">
+                <a:solidFill>
+                  <a:srgbClr val="333333"/>
+                </a:solidFill>
+                <a:latin typeface="Calibri"/>
+              </a:rPr>
+              <a:t> El documento tiene minimo 8 RF y 4 RNF, todos con ID unico, actor explicito y redaccion en plantilla.</a:t>
+            </a:r>
+          </a:p>
+          <a:p>
+            <a:pPr>
+              <a:spcAft>
+                <a:spcPts val="800"/>
+              </a:spcAft>
+            </a:pPr>
+            <a:r>
+              <a:rPr sz="2000" b="0" i="0">
+                <a:solidFill>
+                  <a:srgbClr val="333333"/>
+                </a:solidFill>
+                <a:latin typeface="Calibri"/>
+              </a:rPr>
+              <a:t>–   </a:t>
+            </a:r>
+            <a:r>
+              <a:rPr sz="2000" b="1" i="0">
+                <a:solidFill>
+                  <a:srgbClr val="333333"/>
+                </a:solidFill>
+                <a:latin typeface="Calibri"/>
+              </a:rPr>
+              <a:t>Exito:</a:t>
+            </a:r>
+            <a:r>
+              <a:rPr sz="2000" b="0" i="0">
+                <a:solidFill>
+                  <a:srgbClr val="333333"/>
+                </a:solidFill>
+                <a:latin typeface="Calibri"/>
+              </a:rPr>
+              <a:t> Cada RNF trae al menos un valor medible (segundos, cantidad, frecuencia o porcentaje) y su forma de verificacion.</a:t>
+            </a:r>
+          </a:p>
+          <a:p>
+            <a:pPr>
+              <a:spcAft>
+                <a:spcPts val="800"/>
+              </a:spcAft>
+            </a:pPr>
+            <a:r>
+              <a:rPr sz="2000" b="0" i="0">
+                <a:solidFill>
+                  <a:srgbClr val="333333"/>
+                </a:solidFill>
+                <a:latin typeface="Calibri"/>
+              </a:rPr>
+              <a:t>–   </a:t>
+            </a:r>
+            <a:r>
+              <a:rPr sz="2000" b="1" i="0">
+                <a:solidFill>
+                  <a:srgbClr val="333333"/>
+                </a:solidFill>
+                <a:latin typeface="Calibri"/>
+              </a:rPr>
+              <a:t>Exito:</a:t>
+            </a:r>
+            <a:r>
+              <a:rPr sz="2000" b="0" i="0">
+                <a:solidFill>
+                  <a:srgbClr val="333333"/>
+                </a:solidFill>
+                <a:latin typeface="Calibri"/>
+              </a:rPr>
+              <a:t> Ningun requisito usa las palabras rapido, amigable, facil, intuitivo, robusto u optimo sin cuantificarlas.</a:t>
+            </a:r>
+          </a:p>
+          <a:p>
+            <a:pPr>
+              <a:spcAft>
+                <a:spcPts val="800"/>
+              </a:spcAft>
+            </a:pPr>
+            <a:r>
+              <a:rPr sz="2000" b="0" i="0">
+                <a:solidFill>
+                  <a:srgbClr val="333333"/>
+                </a:solidFill>
+                <a:latin typeface="Calibri"/>
+              </a:rPr>
+              <a:t>–   </a:t>
+            </a:r>
+            <a:r>
+              <a:rPr sz="2000" b="1" i="0">
+                <a:solidFill>
+                  <a:srgbClr val="333333"/>
+                </a:solidFill>
+                <a:latin typeface="Calibri"/>
+              </a:rPr>
+              <a:t>Exito:</a:t>
+            </a:r>
+            <a:r>
+              <a:rPr sz="2000" b="0" i="0">
+                <a:solidFill>
+                  <a:srgbClr val="333333"/>
+                </a:solidFill>
+                <a:latin typeface="Calibri"/>
+              </a:rPr>
+              <a:t> La matriz de trazabilidad conecta las cinco frases de la entrevista con al menos un requisito cada una, y ningun requisito queda huerfano de origen.</a:t>
+            </a:r>
+          </a:p>
+          <a:p>
+            <a:pPr>
+              <a:spcAft>
+                <a:spcPts val="800"/>
+              </a:spcAft>
+            </a:pPr>
+            <a:r>
+              <a:rPr sz="2000" b="0" i="0">
+                <a:solidFill>
+                  <a:srgbClr val="333333"/>
+                </a:solidFill>
+                <a:latin typeface="Calibri"/>
+              </a:rPr>
+              <a:t>–   </a:t>
+            </a:r>
+            <a:r>
+              <a:rPr sz="2000" b="1" i="0">
+                <a:solidFill>
+                  <a:srgbClr val="333333"/>
+                </a:solidFill>
+                <a:latin typeface="Calibri"/>
+              </a:rPr>
+              <a:t>Entrega en la plataforma del curso</a:t>
+            </a:r>
+            <a:r>
+              <a:rPr sz="2000" b="0" i="0">
+                <a:solidFill>
+                  <a:srgbClr val="333333"/>
+                </a:solidFill>
+                <a:latin typeface="Calibri"/>
+              </a:rPr>
+              <a:t> — en la fecha que indique el docente.</a:t>
+            </a:r>
+          </a:p>
+        </p:txBody>
+      </p:sp>
+      <p:sp>
+        <p:nvSpPr>
+          <p:cNvPr id="6" name="TextBox 5"/>
+          <p:cNvSpPr txBox="1"/>
+          <p:nvPr/>
+        </p:nvSpPr>
+        <p:spPr>
+          <a:xfrm>
+            <a:off x="11185855" y="6473952"/>
+            <a:ext cx="640080" cy="274320"/>
+          </a:xfrm>
+          <a:prstGeom prst="rect">
+            <a:avLst/>
+          </a:prstGeom>
+          <a:noFill/>
+        </p:spPr>
+        <p:txBody>
+          <a:bodyPr wrap="square">
+            <a:spAutoFit/>
+          </a:bodyPr>
+          <a:lstStyle/>
+          <a:p>
+            <a:pPr algn="r"/>
+            <a:r>
+              <a:rPr sz="1100" b="0" i="0">
+                <a:solidFill>
+                  <a:srgbClr val="666666"/>
+                </a:solidFill>
+                <a:latin typeface="Calibri"/>
+              </a:rPr>
+              <a:t>22</a:t>
+            </a:r>
+          </a:p>
+        </p:txBody>
+      </p:sp>
+    </p:spTree>
+  </p:cSld>
+  <p:clrMapOvr>
+    <a:masterClrMapping/>
+  </p:clrMapOvr>
+</p:sld>
+</file>
+
+<file path=ppt/slides/slide23.xml><?xml version="1.0" encoding="utf-8"?>
+<p:sld xmlns:a="http://schemas.openxmlformats.org/drawingml/2006/main" xmlns:p="http://schemas.openxmlformats.org/presentationml/2006/main" xmlns:r="http://schemas.openxmlformats.org/officeDocument/2006/relationships">
+  <p:cSld>
+    <p:bg>
+      <p:bgPr>
+        <a:solidFill>
+          <a:srgbClr val="FFFFFF"/>
+        </a:solidFill>
+        <a:effectLst/>
+      </p:bgPr>
+    </p:bg>
+    <p:spTree>
+      <p:nvGrpSpPr>
+        <p:cNvPr id="1" name=""/>
+        <p:cNvGrpSpPr/>
+        <p:nvPr/>
+      </p:nvGrpSpPr>
+      <p:grpSpPr/>
+      <p:sp>
+        <p:nvSpPr>
+          <p:cNvPr id="2" name="Rectangle 1"/>
+          <p:cNvSpPr/>
+          <p:nvPr/>
+        </p:nvSpPr>
+        <p:spPr>
+          <a:xfrm>
+            <a:off x="0" y="0"/>
+            <a:ext cx="12191695" cy="960120"/>
+          </a:xfrm>
+          <a:prstGeom prst="rect">
+            <a:avLst/>
+          </a:prstGeom>
+          <a:solidFill>
+            <a:srgbClr val="095292"/>
+          </a:solidFill>
+          <a:ln>
+            <a:noFill/>
+          </a:ln>
+        </p:spPr>
+        <p:style>
+          <a:lnRef idx="1">
+            <a:schemeClr val="accent1"/>
+          </a:lnRef>
+          <a:fillRef idx="3">
+            <a:schemeClr val="accent1"/>
+          </a:fillRef>
+          <a:effectRef idx="2">
+            <a:schemeClr val="accent1"/>
+          </a:effectRef>
+          <a:fontRef idx="minor">
+            <a:schemeClr val="lt1"/>
+          </a:fontRef>
+        </p:style>
+        <p:txBody>
+          <a:bodyPr rtlCol="0" anchor="ctr"/>
+          <a:lstStyle/>
+          <a:p>
+            <a:pPr algn="ctr"/>
+          </a:p>
+        </p:txBody>
+      </p:sp>
+      <p:sp>
+        <p:nvSpPr>
+          <p:cNvPr id="3" name="Rectangle 2"/>
+          <p:cNvSpPr/>
+          <p:nvPr/>
+        </p:nvSpPr>
+        <p:spPr>
+          <a:xfrm>
+            <a:off x="0" y="960120"/>
+            <a:ext cx="12191695" cy="41148"/>
+          </a:xfrm>
+          <a:prstGeom prst="rect">
+            <a:avLst/>
+          </a:prstGeom>
+          <a:solidFill>
+            <a:srgbClr val="FFD000"/>
+          </a:solidFill>
+          <a:ln>
+            <a:noFill/>
+          </a:ln>
+        </p:spPr>
+        <p:style>
+          <a:lnRef idx="1">
+            <a:schemeClr val="accent1"/>
+          </a:lnRef>
+          <a:fillRef idx="3">
+            <a:schemeClr val="accent1"/>
+          </a:fillRef>
+          <a:effectRef idx="2">
+            <a:schemeClr val="accent1"/>
+          </a:effectRef>
+          <a:fontRef idx="minor">
+            <a:schemeClr val="lt1"/>
+          </a:fontRef>
+        </p:style>
+        <p:txBody>
+          <a:bodyPr rtlCol="0" anchor="ctr"/>
+          <a:lstStyle/>
+          <a:p>
+            <a:pPr algn="ctr"/>
+          </a:p>
+        </p:txBody>
+      </p:sp>
+      <p:sp>
+        <p:nvSpPr>
+          <p:cNvPr id="4" name="TextBox 3"/>
+          <p:cNvSpPr txBox="1"/>
+          <p:nvPr/>
+        </p:nvSpPr>
+        <p:spPr>
+          <a:xfrm>
+            <a:off x="457200" y="164592"/>
+            <a:ext cx="11277295" cy="502920"/>
+          </a:xfrm>
+          <a:prstGeom prst="rect">
+            <a:avLst/>
+          </a:prstGeom>
+          <a:noFill/>
+        </p:spPr>
+        <p:txBody>
+          <a:bodyPr wrap="square">
+            <a:spAutoFit/>
+          </a:bodyPr>
+          <a:lstStyle/>
+          <a:p>
+            <a:r>
+              <a:rPr sz="2600" b="1" i="0">
+                <a:solidFill>
+                  <a:srgbClr val="FFFFFF"/>
+                </a:solidFill>
+                <a:latin typeface="Calibri"/>
+              </a:rPr>
+              <a:t>Para el PI esta semana</a:t>
+            </a:r>
+          </a:p>
+        </p:txBody>
+      </p:sp>
+      <p:sp>
+        <p:nvSpPr>
+          <p:cNvPr id="5" name="Rounded Rectangle 4"/>
+          <p:cNvSpPr/>
+          <p:nvPr/>
+        </p:nvSpPr>
+        <p:spPr>
+          <a:xfrm>
+            <a:off x="457200" y="1261872"/>
+            <a:ext cx="11277295" cy="1051560"/>
+          </a:xfrm>
+          <a:prstGeom prst="roundRect">
+            <a:avLst>
+              <a:gd name="adj" fmla="val 12000"/>
+            </a:avLst>
+          </a:prstGeom>
+          <a:solidFill>
+            <a:srgbClr val="E8F4FA"/>
+          </a:solidFill>
+          <a:ln>
+            <a:noFill/>
+          </a:ln>
+        </p:spPr>
+        <p:style>
+          <a:lnRef idx="1">
+            <a:schemeClr val="accent1"/>
+          </a:lnRef>
+          <a:fillRef idx="3">
+            <a:schemeClr val="accent1"/>
+          </a:fillRef>
+          <a:effectRef idx="2">
+            <a:schemeClr val="accent1"/>
+          </a:effectRef>
+          <a:fontRef idx="minor">
+            <a:schemeClr val="lt1"/>
+          </a:fontRef>
+        </p:style>
+        <p:txBody>
+          <a:bodyPr rtlCol="0" anchor="ctr"/>
+          <a:lstStyle/>
+          <a:p>
+            <a:pPr algn="ctr"/>
+          </a:p>
+        </p:txBody>
+      </p:sp>
+      <p:sp>
+        <p:nvSpPr>
+          <p:cNvPr id="6" name="Rectangle 5"/>
+          <p:cNvSpPr/>
+          <p:nvPr/>
+        </p:nvSpPr>
+        <p:spPr>
+          <a:xfrm>
+            <a:off x="457200" y="1261872"/>
+            <a:ext cx="128016" cy="1051560"/>
+          </a:xfrm>
+          <a:prstGeom prst="rect">
+            <a:avLst/>
+          </a:prstGeom>
+          <a:solidFill>
+            <a:srgbClr val="269CCB"/>
+          </a:solidFill>
+          <a:ln>
+            <a:noFill/>
+          </a:ln>
+        </p:spPr>
+        <p:style>
+          <a:lnRef idx="1">
+            <a:schemeClr val="accent1"/>
+          </a:lnRef>
+          <a:fillRef idx="3">
+            <a:schemeClr val="accent1"/>
+          </a:fillRef>
+          <a:effectRef idx="2">
+            <a:schemeClr val="accent1"/>
+          </a:effectRef>
+          <a:fontRef idx="minor">
+            <a:schemeClr val="lt1"/>
+          </a:fontRef>
+        </p:style>
+        <p:txBody>
+          <a:bodyPr rtlCol="0" anchor="ctr"/>
+          <a:lstStyle/>
+          <a:p>
+            <a:pPr algn="ctr"/>
+          </a:p>
+        </p:txBody>
+      </p:sp>
+      <p:sp>
+        <p:nvSpPr>
+          <p:cNvPr id="7" name="TextBox 6"/>
+          <p:cNvSpPr txBox="1"/>
+          <p:nvPr/>
+        </p:nvSpPr>
+        <p:spPr>
+          <a:xfrm>
+            <a:off x="777240" y="1399031"/>
+            <a:ext cx="10774375" cy="822959"/>
+          </a:xfrm>
+          <a:prstGeom prst="rect">
+            <a:avLst/>
+          </a:prstGeom>
+          <a:noFill/>
+        </p:spPr>
+        <p:txBody>
+          <a:bodyPr wrap="square">
+            <a:spAutoFit/>
+          </a:bodyPr>
+          <a:lstStyle/>
+          <a:p>
+            <a:r>
+              <a:rPr sz="1200" b="1" i="0">
+                <a:solidFill>
+                  <a:srgbClr val="269CCB"/>
+                </a:solidFill>
+                <a:latin typeface="Calibri"/>
+              </a:rPr>
+              <a:t>Info</a:t>
+            </a:r>
+          </a:p>
+          <a:p>
+            <a:pPr>
+              <a:spcBef>
+                <a:spcPts val="400"/>
+              </a:spcBef>
+            </a:pPr>
+            <a:r>
+              <a:rPr sz="1400" b="0" i="0">
+                <a:solidFill>
+                  <a:srgbClr val="333333"/>
+                </a:solidFill>
+                <a:latin typeface="Calibri"/>
+              </a:rPr>
+              <a:t>Hito: Queda listo el catalogo de requisitos de VetCare: 8 RF y 4 RNF con criterio de verificacion y prioridad MoSCoW.</a:t>
+            </a:r>
+          </a:p>
+        </p:txBody>
+      </p:sp>
+      <p:sp>
+        <p:nvSpPr>
+          <p:cNvPr id="8" name="Rounded Rectangle 7"/>
+          <p:cNvSpPr/>
+          <p:nvPr/>
+        </p:nvSpPr>
+        <p:spPr>
+          <a:xfrm>
+            <a:off x="457200" y="2478024"/>
+            <a:ext cx="11277295" cy="1051560"/>
+          </a:xfrm>
+          <a:prstGeom prst="roundRect">
+            <a:avLst>
+              <a:gd name="adj" fmla="val 12000"/>
+            </a:avLst>
+          </a:prstGeom>
+          <a:solidFill>
+            <a:srgbClr val="FFF8E1"/>
+          </a:solidFill>
+          <a:ln>
+            <a:noFill/>
+          </a:ln>
+        </p:spPr>
+        <p:style>
+          <a:lnRef idx="1">
+            <a:schemeClr val="accent1"/>
+          </a:lnRef>
+          <a:fillRef idx="3">
+            <a:schemeClr val="accent1"/>
+          </a:fillRef>
+          <a:effectRef idx="2">
+            <a:schemeClr val="accent1"/>
+          </a:effectRef>
+          <a:fontRef idx="minor">
+            <a:schemeClr val="lt1"/>
+          </a:fontRef>
+        </p:style>
+        <p:txBody>
+          <a:bodyPr rtlCol="0" anchor="ctr"/>
+          <a:lstStyle/>
+          <a:p>
+            <a:pPr algn="ctr"/>
+          </a:p>
+        </p:txBody>
+      </p:sp>
+      <p:sp>
+        <p:nvSpPr>
+          <p:cNvPr id="9" name="Rectangle 8"/>
+          <p:cNvSpPr/>
+          <p:nvPr/>
+        </p:nvSpPr>
+        <p:spPr>
+          <a:xfrm>
+            <a:off x="457200" y="2478024"/>
+            <a:ext cx="128016" cy="1051560"/>
+          </a:xfrm>
+          <a:prstGeom prst="rect">
+            <a:avLst/>
+          </a:prstGeom>
+          <a:solidFill>
+            <a:srgbClr val="FFD000"/>
+          </a:solidFill>
+          <a:ln>
+            <a:noFill/>
+          </a:ln>
+        </p:spPr>
+        <p:style>
+          <a:lnRef idx="1">
+            <a:schemeClr val="accent1"/>
+          </a:lnRef>
+          <a:fillRef idx="3">
+            <a:schemeClr val="accent1"/>
+          </a:fillRef>
+          <a:effectRef idx="2">
+            <a:schemeClr val="accent1"/>
+          </a:effectRef>
+          <a:fontRef idx="minor">
+            <a:schemeClr val="lt1"/>
+          </a:fontRef>
+        </p:style>
+        <p:txBody>
+          <a:bodyPr rtlCol="0" anchor="ctr"/>
+          <a:lstStyle/>
+          <a:p>
+            <a:pPr algn="ctr"/>
+          </a:p>
+        </p:txBody>
+      </p:sp>
+      <p:sp>
+        <p:nvSpPr>
+          <p:cNvPr id="10" name="TextBox 9"/>
+          <p:cNvSpPr txBox="1"/>
+          <p:nvPr/>
+        </p:nvSpPr>
+        <p:spPr>
+          <a:xfrm>
+            <a:off x="777240" y="2615184"/>
+            <a:ext cx="10774375" cy="822959"/>
+          </a:xfrm>
+          <a:prstGeom prst="rect">
+            <a:avLst/>
+          </a:prstGeom>
+          <a:noFill/>
+        </p:spPr>
+        <p:txBody>
+          <a:bodyPr wrap="square">
+            <a:spAutoFit/>
+          </a:bodyPr>
+          <a:lstStyle/>
+          <a:p>
+            <a:r>
+              <a:rPr sz="1200" b="1" i="0">
+                <a:solidFill>
+                  <a:srgbClr val="FFD000"/>
+                </a:solidFill>
+                <a:latin typeface="Calibri"/>
+              </a:rPr>
+              <a:t>Aclaración</a:t>
+            </a:r>
+          </a:p>
+          <a:p>
+            <a:pPr>
+              <a:spcBef>
+                <a:spcPts val="400"/>
+              </a:spcBef>
+            </a:pPr>
+            <a:r>
+              <a:rPr sz="1400" b="0" i="0">
+                <a:solidFill>
+                  <a:srgbClr val="333333"/>
+                </a:solidFill>
+                <a:latin typeface="Calibri"/>
+              </a:rPr>
+              <a:t>Enunciado completo: Clases/Proyecto Integrador/ (VetCare).</a:t>
+            </a:r>
+          </a:p>
+        </p:txBody>
+      </p:sp>
+      <p:sp>
+        <p:nvSpPr>
+          <p:cNvPr id="11" name="Rounded Rectangle 10"/>
+          <p:cNvSpPr/>
+          <p:nvPr/>
+        </p:nvSpPr>
+        <p:spPr>
+          <a:xfrm>
+            <a:off x="457200" y="3694176"/>
+            <a:ext cx="11277295" cy="1051560"/>
+          </a:xfrm>
+          <a:prstGeom prst="roundRect">
+            <a:avLst>
+              <a:gd name="adj" fmla="val 12000"/>
+            </a:avLst>
+          </a:prstGeom>
+          <a:solidFill>
+            <a:srgbClr val="FBE4E4"/>
+          </a:solidFill>
+          <a:ln>
+            <a:noFill/>
+          </a:ln>
+        </p:spPr>
+        <p:style>
+          <a:lnRef idx="1">
+            <a:schemeClr val="accent1"/>
+          </a:lnRef>
+          <a:fillRef idx="3">
+            <a:schemeClr val="accent1"/>
+          </a:fillRef>
+          <a:effectRef idx="2">
+            <a:schemeClr val="accent1"/>
+          </a:effectRef>
+          <a:fontRef idx="minor">
+            <a:schemeClr val="lt1"/>
+          </a:fontRef>
+        </p:style>
+        <p:txBody>
+          <a:bodyPr rtlCol="0" anchor="ctr"/>
+          <a:lstStyle/>
+          <a:p>
+            <a:pPr algn="ctr"/>
+          </a:p>
+        </p:txBody>
+      </p:sp>
+      <p:sp>
+        <p:nvSpPr>
+          <p:cNvPr id="12" name="Rectangle 11"/>
+          <p:cNvSpPr/>
+          <p:nvPr/>
+        </p:nvSpPr>
+        <p:spPr>
+          <a:xfrm>
+            <a:off x="457200" y="3694176"/>
+            <a:ext cx="128016" cy="1051560"/>
+          </a:xfrm>
+          <a:prstGeom prst="rect">
+            <a:avLst/>
+          </a:prstGeom>
+          <a:solidFill>
+            <a:srgbClr val="A02030"/>
+          </a:solidFill>
+          <a:ln>
+            <a:noFill/>
+          </a:ln>
+        </p:spPr>
+        <p:style>
+          <a:lnRef idx="1">
+            <a:schemeClr val="accent1"/>
+          </a:lnRef>
+          <a:fillRef idx="3">
+            <a:schemeClr val="accent1"/>
+          </a:fillRef>
+          <a:effectRef idx="2">
+            <a:schemeClr val="accent1"/>
+          </a:effectRef>
+          <a:fontRef idx="minor">
+            <a:schemeClr val="lt1"/>
+          </a:fontRef>
+        </p:style>
+        <p:txBody>
+          <a:bodyPr rtlCol="0" anchor="ctr"/>
+          <a:lstStyle/>
+          <a:p>
+            <a:pPr algn="ctr"/>
+          </a:p>
+        </p:txBody>
+      </p:sp>
+      <p:sp>
+        <p:nvSpPr>
+          <p:cNvPr id="13" name="TextBox 12"/>
+          <p:cNvSpPr txBox="1"/>
+          <p:nvPr/>
+        </p:nvSpPr>
+        <p:spPr>
+          <a:xfrm>
+            <a:off x="777240" y="3831336"/>
+            <a:ext cx="10774375" cy="822959"/>
+          </a:xfrm>
+          <a:prstGeom prst="rect">
+            <a:avLst/>
+          </a:prstGeom>
+          <a:noFill/>
+        </p:spPr>
+        <p:txBody>
+          <a:bodyPr wrap="square">
+            <a:spAutoFit/>
+          </a:bodyPr>
+          <a:lstStyle/>
+          <a:p>
+            <a:r>
+              <a:rPr sz="1200" b="1" i="0">
+                <a:solidFill>
+                  <a:srgbClr val="A02030"/>
+                </a:solidFill>
+                <a:latin typeface="Calibri"/>
+              </a:rPr>
+              <a:t>Atención</a:t>
+            </a:r>
+          </a:p>
+          <a:p>
+            <a:pPr>
+              <a:spcBef>
+                <a:spcPts val="400"/>
+              </a:spcBef>
+            </a:pPr>
+            <a:r>
+              <a:rPr sz="1400" b="0" i="0">
+                <a:solidFill>
+                  <a:srgbClr val="333333"/>
+                </a:solidFill>
+                <a:latin typeface="Calibri"/>
+              </a:rPr>
+              <a:t>Entrega del taller, si el docente lo asigna · en la fecha que indique el docente.</a:t>
+            </a:r>
+          </a:p>
+        </p:txBody>
+      </p:sp>
+      <p:sp>
+        <p:nvSpPr>
+          <p:cNvPr id="14" name="TextBox 13"/>
+          <p:cNvSpPr txBox="1"/>
+          <p:nvPr/>
+        </p:nvSpPr>
+        <p:spPr>
+          <a:xfrm>
+            <a:off x="11185855" y="6473952"/>
+            <a:ext cx="640080" cy="274320"/>
+          </a:xfrm>
+          <a:prstGeom prst="rect">
+            <a:avLst/>
+          </a:prstGeom>
+          <a:noFill/>
+        </p:spPr>
+        <p:txBody>
+          <a:bodyPr wrap="square">
+            <a:spAutoFit/>
+          </a:bodyPr>
+          <a:lstStyle/>
+          <a:p>
+            <a:pPr algn="r"/>
+            <a:r>
+              <a:rPr sz="1100" b="0" i="0">
+                <a:solidFill>
+                  <a:srgbClr val="666666"/>
+                </a:solidFill>
+                <a:latin typeface="Calibri"/>
+              </a:rPr>
+              <a:t>23</a:t>
+            </a:r>
+          </a:p>
+        </p:txBody>
+      </p:sp>
+    </p:spTree>
+  </p:cSld>
+  <p:clrMapOvr>
+    <a:masterClrMapping/>
+  </p:clrMapOvr>
+</p:sld>
+</file>
+
+<file path=ppt/slides/slide24.xml><?xml version="1.0" encoding="utf-8"?>
 <p:sld xmlns:a="http://schemas.openxmlformats.org/drawingml/2006/main" xmlns:p="http://schemas.openxmlformats.org/presentationml/2006/main" xmlns:r="http://schemas.openxmlformats.org/officeDocument/2006/relationships">
   <p:cSld>
     <p:bg>

--- a/Seminario de Sistemas/Clases/Clase 6 - Requerimientos de software/Presentacion.pptx
+++ b/Seminario de Sistemas/Clases/Clase 6 - Requerimientos de software/Presentacion.pptx
@@ -11,24 +11,17 @@
     <p:sldId id="259" r:id="rId10"/>
     <p:sldId id="260" r:id="rId11"/>
     <p:sldId id="261" r:id="rId12"/>
-    <p:sldId id="262" r:id="rId13"/>
-    <p:sldId id="263" r:id="rId14"/>
-    <p:sldId id="264" r:id="rId15"/>
-    <p:sldId id="265" r:id="rId16"/>
-    <p:sldId id="266" r:id="rId17"/>
-    <p:sldId id="267" r:id="rId18"/>
-    <p:sldId id="268" r:id="rId19"/>
-    <p:sldId id="269" r:id="rId20"/>
-    <p:sldId id="270" r:id="rId21"/>
-    <p:sldId id="271" r:id="rId22"/>
-    <p:sldId id="272" r:id="rId23"/>
-    <p:sldId id="273" r:id="rId24"/>
-    <p:sldId id="274" r:id="rId25"/>
-    <p:sldId id="275" r:id="rId26"/>
-    <p:sldId id="276" r:id="rId27"/>
-    <p:sldId id="277" r:id="rId28"/>
-    <p:sldId id="278" r:id="rId29"/>
-    <p:sldId id="279" r:id="rId30"/>
+    <p:sldId id="262" r:id="rId14"/>
+    <p:sldId id="263" r:id="rId15"/>
+    <p:sldId id="264" r:id="rId16"/>
+    <p:sldId id="265" r:id="rId17"/>
+    <p:sldId id="266" r:id="rId18"/>
+    <p:sldId id="267" r:id="rId19"/>
+    <p:sldId id="268" r:id="rId20"/>
+    <p:sldId id="269" r:id="rId21"/>
+    <p:sldId id="270" r:id="rId22"/>
+    <p:sldId id="271" r:id="rId23"/>
+    <p:sldId id="272" r:id="rId24"/>
   </p:sldIdLst>
   <p:sldSz cx="12191695" cy="6858000" type="screen4x3"/>
   <p:notesSz cx="6858000" cy="9144000"/>
@@ -128,6 +121,508 @@
     </a:lvl9pPr>
   </p:defaultTextStyle>
 </p:presentation>
+</file>
+
+<file path=ppt/notesMasters/notesMaster1.xml><?xml version="1.0" encoding="utf-8"?>
+<p:notesMaster xmlns:a="http://schemas.openxmlformats.org/drawingml/2006/main" xmlns:p="http://schemas.openxmlformats.org/presentationml/2006/main" xmlns:r="http://schemas.openxmlformats.org/officeDocument/2006/relationships">
+  <p:cSld>
+    <p:bg>
+      <p:bgRef idx="1001">
+        <a:schemeClr val="bg1"/>
+      </p:bgRef>
+    </p:bg>
+    <p:spTree>
+      <p:nvGrpSpPr>
+        <p:cNvPr id="1" name=""/>
+        <p:cNvGrpSpPr/>
+        <p:nvPr/>
+      </p:nvGrpSpPr>
+      <p:grpSpPr>
+        <a:xfrm>
+          <a:off x="0" y="0"/>
+          <a:ext cx="0" cy="0"/>
+          <a:chOff x="0" y="0"/>
+          <a:chExt cx="0" cy="0"/>
+        </a:xfrm>
+      </p:grpSpPr>
+      <p:sp>
+        <p:nvSpPr>
+          <p:cNvPr id="2" name="Header Placeholder 1"/>
+          <p:cNvSpPr>
+            <a:spLocks noGrp="1"/>
+          </p:cNvSpPr>
+          <p:nvPr>
+            <p:ph type="hdr" sz="quarter"/>
+          </p:nvPr>
+        </p:nvSpPr>
+        <p:spPr>
+          <a:xfrm>
+            <a:off x="0" y="0"/>
+            <a:ext cx="2971800" cy="457200"/>
+          </a:xfrm>
+          <a:prstGeom prst="rect">
+            <a:avLst/>
+          </a:prstGeom>
+        </p:spPr>
+        <p:txBody>
+          <a:bodyPr vert="horz" lIns="91440" tIns="45720" rIns="91440" bIns="45720" rtlCol="0"/>
+          <a:lstStyle>
+            <a:lvl1pPr algn="l">
+              <a:defRPr sz="1200"/>
+            </a:lvl1pPr>
+          </a:lstStyle>
+          <a:p>
+            <a:endParaRPr lang="en-US"/>
+          </a:p>
+        </p:txBody>
+      </p:sp>
+      <p:sp>
+        <p:nvSpPr>
+          <p:cNvPr id="3" name="Date Placeholder 2"/>
+          <p:cNvSpPr>
+            <a:spLocks noGrp="1"/>
+          </p:cNvSpPr>
+          <p:nvPr>
+            <p:ph type="dt" idx="1"/>
+          </p:nvPr>
+        </p:nvSpPr>
+        <p:spPr>
+          <a:xfrm>
+            <a:off x="3884613" y="0"/>
+            <a:ext cx="2971800" cy="457200"/>
+          </a:xfrm>
+          <a:prstGeom prst="rect">
+            <a:avLst/>
+          </a:prstGeom>
+        </p:spPr>
+        <p:txBody>
+          <a:bodyPr vert="horz" lIns="91440" tIns="45720" rIns="91440" bIns="45720" rtlCol="0"/>
+          <a:lstStyle>
+            <a:lvl1pPr algn="r">
+              <a:defRPr sz="1200"/>
+            </a:lvl1pPr>
+          </a:lstStyle>
+          <a:p>
+            <a:fld id="{0F89C1C7-3DCD-1040-A9CF-14679D8B5DDD}" type="datetimeFigureOut">
+              <a:rPr lang="en-US" smtClean="0"/>
+              <a:t>10/17/16</a:t>
+            </a:fld>
+            <a:endParaRPr lang="en-US"/>
+          </a:p>
+        </p:txBody>
+      </p:sp>
+      <p:sp>
+        <p:nvSpPr>
+          <p:cNvPr id="4" name="Slide Image Placeholder 3"/>
+          <p:cNvSpPr>
+            <a:spLocks noGrp="1" noRot="1" noChangeAspect="1"/>
+          </p:cNvSpPr>
+          <p:nvPr>
+            <p:ph type="sldImg" idx="2"/>
+          </p:nvPr>
+        </p:nvSpPr>
+        <p:spPr>
+          <a:xfrm>
+            <a:off x="1143000" y="685800"/>
+            <a:ext cx="4572000" cy="3429000"/>
+          </a:xfrm>
+          <a:prstGeom prst="rect">
+            <a:avLst/>
+          </a:prstGeom>
+          <a:noFill/>
+          <a:ln w="12700">
+            <a:solidFill>
+              <a:prstClr val="black"/>
+            </a:solidFill>
+          </a:ln>
+        </p:spPr>
+        <p:txBody>
+          <a:bodyPr vert="horz" lIns="91440" tIns="45720" rIns="91440" bIns="45720" rtlCol="0" anchor="ctr"/>
+          <a:lstStyle/>
+          <a:p>
+            <a:endParaRPr lang="en-US"/>
+          </a:p>
+        </p:txBody>
+      </p:sp>
+      <p:sp>
+        <p:nvSpPr>
+          <p:cNvPr id="5" name="Notes Placeholder 4"/>
+          <p:cNvSpPr>
+            <a:spLocks noGrp="1"/>
+          </p:cNvSpPr>
+          <p:nvPr>
+            <p:ph type="body" sz="quarter" idx="3"/>
+          </p:nvPr>
+        </p:nvSpPr>
+        <p:spPr>
+          <a:xfrm>
+            <a:off x="685800" y="4343400"/>
+            <a:ext cx="5486400" cy="4114800"/>
+          </a:xfrm>
+          <a:prstGeom prst="rect">
+            <a:avLst/>
+          </a:prstGeom>
+        </p:spPr>
+        <p:txBody>
+          <a:bodyPr vert="horz" lIns="91440" tIns="45720" rIns="91440" bIns="45720" rtlCol="0"/>
+          <a:lstStyle/>
+          <a:p>
+            <a:pPr lvl="0"/>
+            <a:r>
+              <a:rPr lang="en-US" smtClean="0"/>
+              <a:t>Click to edit Master text styles</a:t>
+            </a:r>
+          </a:p>
+          <a:p>
+            <a:pPr lvl="1"/>
+            <a:r>
+              <a:rPr lang="en-US" smtClean="0"/>
+              <a:t>Second level</a:t>
+            </a:r>
+          </a:p>
+          <a:p>
+            <a:pPr lvl="2"/>
+            <a:r>
+              <a:rPr lang="en-US" smtClean="0"/>
+              <a:t>Third level</a:t>
+            </a:r>
+          </a:p>
+          <a:p>
+            <a:pPr lvl="3"/>
+            <a:r>
+              <a:rPr lang="en-US" smtClean="0"/>
+              <a:t>Fourth level</a:t>
+            </a:r>
+          </a:p>
+          <a:p>
+            <a:pPr lvl="4"/>
+            <a:r>
+              <a:rPr lang="en-US" smtClean="0"/>
+              <a:t>Fifth level</a:t>
+            </a:r>
+            <a:endParaRPr lang="en-US"/>
+          </a:p>
+        </p:txBody>
+      </p:sp>
+      <p:sp>
+        <p:nvSpPr>
+          <p:cNvPr id="6" name="Footer Placeholder 5"/>
+          <p:cNvSpPr>
+            <a:spLocks noGrp="1"/>
+          </p:cNvSpPr>
+          <p:nvPr>
+            <p:ph type="ftr" sz="quarter" idx="4"/>
+          </p:nvPr>
+        </p:nvSpPr>
+        <p:spPr>
+          <a:xfrm>
+            <a:off x="0" y="8685213"/>
+            <a:ext cx="2971800" cy="457200"/>
+          </a:xfrm>
+          <a:prstGeom prst="rect">
+            <a:avLst/>
+          </a:prstGeom>
+        </p:spPr>
+        <p:txBody>
+          <a:bodyPr vert="horz" lIns="91440" tIns="45720" rIns="91440" bIns="45720" rtlCol="0" anchor="b"/>
+          <a:lstStyle>
+            <a:lvl1pPr algn="l">
+              <a:defRPr sz="1200"/>
+            </a:lvl1pPr>
+          </a:lstStyle>
+          <a:p>
+            <a:endParaRPr lang="en-US"/>
+          </a:p>
+        </p:txBody>
+      </p:sp>
+      <p:sp>
+        <p:nvSpPr>
+          <p:cNvPr id="7" name="Slide Number Placeholder 6"/>
+          <p:cNvSpPr>
+            <a:spLocks noGrp="1"/>
+          </p:cNvSpPr>
+          <p:nvPr>
+            <p:ph type="sldNum" sz="quarter" idx="5"/>
+          </p:nvPr>
+        </p:nvSpPr>
+        <p:spPr>
+          <a:xfrm>
+            <a:off x="3884613" y="8685213"/>
+            <a:ext cx="2971800" cy="457200"/>
+          </a:xfrm>
+          <a:prstGeom prst="rect">
+            <a:avLst/>
+          </a:prstGeom>
+        </p:spPr>
+        <p:txBody>
+          <a:bodyPr vert="horz" lIns="91440" tIns="45720" rIns="91440" bIns="45720" rtlCol="0" anchor="b"/>
+          <a:lstStyle>
+            <a:lvl1pPr algn="r">
+              <a:defRPr sz="1200"/>
+            </a:lvl1pPr>
+          </a:lstStyle>
+          <a:p>
+            <a:fld id="{BB5E49A5-4136-284D-997B-48E1D791AD67}" type="slidenum">
+              <a:rPr lang="en-US" smtClean="0"/>
+              <a:t>‹#›</a:t>
+            </a:fld>
+            <a:endParaRPr lang="en-US"/>
+          </a:p>
+        </p:txBody>
+      </p:sp>
+    </p:spTree>
+    <p:extLst>
+      <p:ext uri="{BB962C8B-B14F-4D97-AF65-F5344CB8AC3E}">
+        <p14:creationId xmlns:p14="http://schemas.microsoft.com/office/powerpoint/2010/main" val="2623252185"/>
+      </p:ext>
+    </p:extLst>
+  </p:cSld>
+  <p:clrMap bg1="lt1" tx1="dk1" bg2="lt2" tx2="dk2" accent1="accent1" accent2="accent2" accent3="accent3" accent4="accent4" accent5="accent5" accent6="accent6" hlink="hlink" folHlink="folHlink"/>
+  <p:notesStyle>
+    <a:lvl1pPr marL="0" algn="l" defTabSz="457200" rtl="0" eaLnBrk="1" latinLnBrk="0" hangingPunct="1">
+      <a:defRPr sz="1200" kern="1200">
+        <a:solidFill>
+          <a:schemeClr val="tx1"/>
+        </a:solidFill>
+        <a:latin typeface="+mn-lt"/>
+        <a:ea typeface="+mn-ea"/>
+        <a:cs typeface="+mn-cs"/>
+      </a:defRPr>
+    </a:lvl1pPr>
+    <a:lvl2pPr marL="457200" algn="l" defTabSz="457200" rtl="0" eaLnBrk="1" latinLnBrk="0" hangingPunct="1">
+      <a:defRPr sz="1200" kern="1200">
+        <a:solidFill>
+          <a:schemeClr val="tx1"/>
+        </a:solidFill>
+        <a:latin typeface="+mn-lt"/>
+        <a:ea typeface="+mn-ea"/>
+        <a:cs typeface="+mn-cs"/>
+      </a:defRPr>
+    </a:lvl2pPr>
+    <a:lvl3pPr marL="914400" algn="l" defTabSz="457200" rtl="0" eaLnBrk="1" latinLnBrk="0" hangingPunct="1">
+      <a:defRPr sz="1200" kern="1200">
+        <a:solidFill>
+          <a:schemeClr val="tx1"/>
+        </a:solidFill>
+        <a:latin typeface="+mn-lt"/>
+        <a:ea typeface="+mn-ea"/>
+        <a:cs typeface="+mn-cs"/>
+      </a:defRPr>
+    </a:lvl3pPr>
+    <a:lvl4pPr marL="1371600" algn="l" defTabSz="457200" rtl="0" eaLnBrk="1" latinLnBrk="0" hangingPunct="1">
+      <a:defRPr sz="1200" kern="1200">
+        <a:solidFill>
+          <a:schemeClr val="tx1"/>
+        </a:solidFill>
+        <a:latin typeface="+mn-lt"/>
+        <a:ea typeface="+mn-ea"/>
+        <a:cs typeface="+mn-cs"/>
+      </a:defRPr>
+    </a:lvl4pPr>
+    <a:lvl5pPr marL="1828800" algn="l" defTabSz="457200" rtl="0" eaLnBrk="1" latinLnBrk="0" hangingPunct="1">
+      <a:defRPr sz="1200" kern="1200">
+        <a:solidFill>
+          <a:schemeClr val="tx1"/>
+        </a:solidFill>
+        <a:latin typeface="+mn-lt"/>
+        <a:ea typeface="+mn-ea"/>
+        <a:cs typeface="+mn-cs"/>
+      </a:defRPr>
+    </a:lvl5pPr>
+    <a:lvl6pPr marL="2286000" algn="l" defTabSz="457200" rtl="0" eaLnBrk="1" latinLnBrk="0" hangingPunct="1">
+      <a:defRPr sz="1200" kern="1200">
+        <a:solidFill>
+          <a:schemeClr val="tx1"/>
+        </a:solidFill>
+        <a:latin typeface="+mn-lt"/>
+        <a:ea typeface="+mn-ea"/>
+        <a:cs typeface="+mn-cs"/>
+      </a:defRPr>
+    </a:lvl6pPr>
+    <a:lvl7pPr marL="2743200" algn="l" defTabSz="457200" rtl="0" eaLnBrk="1" latinLnBrk="0" hangingPunct="1">
+      <a:defRPr sz="1200" kern="1200">
+        <a:solidFill>
+          <a:schemeClr val="tx1"/>
+        </a:solidFill>
+        <a:latin typeface="+mn-lt"/>
+        <a:ea typeface="+mn-ea"/>
+        <a:cs typeface="+mn-cs"/>
+      </a:defRPr>
+    </a:lvl7pPr>
+    <a:lvl8pPr marL="3200400" algn="l" defTabSz="457200" rtl="0" eaLnBrk="1" latinLnBrk="0" hangingPunct="1">
+      <a:defRPr sz="1200" kern="1200">
+        <a:solidFill>
+          <a:schemeClr val="tx1"/>
+        </a:solidFill>
+        <a:latin typeface="+mn-lt"/>
+        <a:ea typeface="+mn-ea"/>
+        <a:cs typeface="+mn-cs"/>
+      </a:defRPr>
+    </a:lvl8pPr>
+    <a:lvl9pPr marL="3657600" algn="l" defTabSz="457200" rtl="0" eaLnBrk="1" latinLnBrk="0" hangingPunct="1">
+      <a:defRPr sz="1200" kern="1200">
+        <a:solidFill>
+          <a:schemeClr val="tx1"/>
+        </a:solidFill>
+        <a:latin typeface="+mn-lt"/>
+        <a:ea typeface="+mn-ea"/>
+        <a:cs typeface="+mn-cs"/>
+      </a:defRPr>
+    </a:lvl9pPr>
+  </p:notesStyle>
+</p:notesMaster>
+</file>
+
+<file path=ppt/notesSlides/notesSlide1.xml><?xml version="1.0" encoding="utf-8"?>
+<p:notes xmlns:a="http://schemas.openxmlformats.org/drawingml/2006/main" xmlns:p="http://schemas.openxmlformats.org/presentationml/2006/main" xmlns:r="http://schemas.openxmlformats.org/officeDocument/2006/relationships">
+  <p:cSld>
+    <p:spTree>
+      <p:nvGrpSpPr>
+        <p:cNvPr id="1" name=""/>
+        <p:cNvGrpSpPr/>
+        <p:nvPr/>
+      </p:nvGrpSpPr>
+      <p:grpSpPr>
+        <a:xfrm>
+          <a:off x="0" y="0"/>
+          <a:ext cx="0" cy="0"/>
+          <a:chOff x="0" y="0"/>
+          <a:chExt cx="0" cy="0"/>
+        </a:xfrm>
+      </p:grpSpPr>
+      <p:sp>
+        <p:nvSpPr>
+          <p:cNvPr id="2" name="Slide Image Placeholder 1"/>
+          <p:cNvSpPr>
+            <a:spLocks noGrp="1"/>
+          </p:cNvSpPr>
+          <p:nvPr>
+            <p:ph type="sldImg" idx="2"/>
+          </p:nvPr>
+        </p:nvSpPr>
+        <p:spPr/>
+      </p:sp>
+      <p:sp>
+        <p:nvSpPr>
+          <p:cNvPr id="3" name="Notes Placeholder 2"/>
+          <p:cNvSpPr>
+            <a:spLocks noGrp="1"/>
+          </p:cNvSpPr>
+          <p:nvPr>
+            <p:ph type="body" idx="3" sz="quarter"/>
+          </p:nvPr>
+        </p:nvSpPr>
+        <p:spPr/>
+        <p:txBody>
+          <a:bodyPr/>
+          <a:lstStyle/>
+          <a:p>
+            <a:r>
+              <a:t>Con las necesidades en la mano se separan dos familias.</a:t>
+            </a:r>
+          </a:p>
+          <a:p/>
+          <a:p>
+            <a:r>
+              <a:t>Esa separacion importa porque el RF se prueba haciendo clic y el RNF se prueba midiendo o intentando lo prohibido.</a:t>
+            </a:r>
+          </a:p>
+        </p:txBody>
+      </p:sp>
+      <p:sp>
+        <p:nvSpPr>
+          <p:cNvPr id="4" name="Slide Number Placeholder 3"/>
+          <p:cNvSpPr>
+            <a:spLocks noGrp="1"/>
+          </p:cNvSpPr>
+          <p:nvPr>
+            <p:ph type="sldNum" idx="5" sz="quarter"/>
+          </p:nvPr>
+        </p:nvSpPr>
+        <p:spPr/>
+      </p:sp>
+    </p:spTree>
+  </p:cSld>
+  <p:clrMapOvr>
+    <a:masterClrMapping/>
+  </p:clrMapOvr>
+</p:notes>
+</file>
+
+<file path=ppt/notesSlides/notesSlide2.xml><?xml version="1.0" encoding="utf-8"?>
+<p:notes xmlns:a="http://schemas.openxmlformats.org/drawingml/2006/main" xmlns:p="http://schemas.openxmlformats.org/presentationml/2006/main" xmlns:r="http://schemas.openxmlformats.org/officeDocument/2006/relationships">
+  <p:cSld>
+    <p:spTree>
+      <p:nvGrpSpPr>
+        <p:cNvPr id="1" name=""/>
+        <p:cNvGrpSpPr/>
+        <p:nvPr/>
+      </p:nvGrpSpPr>
+      <p:grpSpPr>
+        <a:xfrm>
+          <a:off x="0" y="0"/>
+          <a:ext cx="0" cy="0"/>
+          <a:chOff x="0" y="0"/>
+          <a:chExt cx="0" cy="0"/>
+        </a:xfrm>
+      </p:grpSpPr>
+      <p:sp>
+        <p:nvSpPr>
+          <p:cNvPr id="2" name="Slide Image Placeholder 1"/>
+          <p:cNvSpPr>
+            <a:spLocks noGrp="1"/>
+          </p:cNvSpPr>
+          <p:nvPr>
+            <p:ph type="sldImg" idx="2"/>
+          </p:nvPr>
+        </p:nvSpPr>
+        <p:spPr/>
+      </p:sp>
+      <p:sp>
+        <p:nvSpPr>
+          <p:cNvPr id="3" name="Notes Placeholder 2"/>
+          <p:cNvSpPr>
+            <a:spLocks noGrp="1"/>
+          </p:cNvSpPr>
+          <p:nvPr>
+            <p:ph type="body" idx="3" sz="quarter"/>
+          </p:nvPr>
+        </p:nvSpPr>
+        <p:spPr/>
+        <p:txBody>
+          <a:bodyPr/>
+          <a:lstStyle/>
+          <a:p>
+            <a:r>
+              <a:t>Se lleva en una matriz simple de cuatro columnas y se actualiza cada clase.</a:t>
+            </a:r>
+          </a:p>
+          <a:p/>
+          <a:p>
+            <a:r>
+              <a:t>Esto no es burocracia: es lo que permite que cuando el cliente cambie de opinion, usted sepa en dos minutos que se rompe y cuanto cuesta; y en el Proyecto Integrador es lo que hace posible que el companero que solo cursa Programacion II reciba estos planos y sepa exactamente que implementar y por que, sin tener que volver a entrevistar al veterinario.</a:t>
+            </a:r>
+          </a:p>
+        </p:txBody>
+      </p:sp>
+      <p:sp>
+        <p:nvSpPr>
+          <p:cNvPr id="4" name="Slide Number Placeholder 3"/>
+          <p:cNvSpPr>
+            <a:spLocks noGrp="1"/>
+          </p:cNvSpPr>
+          <p:nvPr>
+            <p:ph type="sldNum" idx="5" sz="quarter"/>
+          </p:nvPr>
+        </p:nvSpPr>
+        <p:spPr/>
+      </p:sp>
+    </p:spTree>
+  </p:cSld>
+  <p:clrMapOvr>
+    <a:masterClrMapping/>
+  </p:clrMapOvr>
+</p:notes>
 </file>
 
 <file path=ppt/slideLayouts/slideLayout1.xml><?xml version="1.0" encoding="utf-8"?>
@@ -6278,13 +6773,13 @@
         <p:spPr>
           <a:xfrm>
             <a:off x="0" y="0"/>
-            <a:ext cx="12191695" cy="1170432"/>
+            <a:ext cx="12191695" cy="164592"/>
           </a:xfrm>
           <a:prstGeom prst="rect">
             <a:avLst/>
           </a:prstGeom>
           <a:solidFill>
-            <a:srgbClr val="095292"/>
+            <a:srgbClr val="269CCB"/>
           </a:solidFill>
           <a:ln>
             <a:noFill/>
@@ -6312,251 +6807,9 @@
           </a:p>
         </p:txBody>
       </p:sp>
-      <p:sp>
-        <p:nvSpPr>
-          <p:cNvPr id="3" name="Rectangle 2"/>
-          <p:cNvSpPr/>
-          <p:nvPr/>
-        </p:nvSpPr>
-        <p:spPr>
-          <a:xfrm>
-            <a:off x="0" y="1170432"/>
-            <a:ext cx="12191695" cy="41148"/>
-          </a:xfrm>
-          <a:prstGeom prst="rect">
-            <a:avLst/>
-          </a:prstGeom>
-          <a:solidFill>
-            <a:srgbClr val="FFD000"/>
-          </a:solidFill>
-          <a:ln>
-            <a:noFill/>
-          </a:ln>
-        </p:spPr>
-        <p:style>
-          <a:lnRef idx="1">
-            <a:schemeClr val="accent1"/>
-          </a:lnRef>
-          <a:fillRef idx="3">
-            <a:schemeClr val="accent1"/>
-          </a:fillRef>
-          <a:effectRef idx="2">
-            <a:schemeClr val="accent1"/>
-          </a:effectRef>
-          <a:fontRef idx="minor">
-            <a:schemeClr val="lt1"/>
-          </a:fontRef>
-        </p:style>
-        <p:txBody>
-          <a:bodyPr rtlCol="0" anchor="ctr"/>
-          <a:lstStyle/>
-          <a:p>
-            <a:pPr algn="ctr"/>
-          </a:p>
-        </p:txBody>
-      </p:sp>
-      <p:sp>
-        <p:nvSpPr>
-          <p:cNvPr id="4" name="TextBox 3"/>
-          <p:cNvSpPr txBox="1"/>
-          <p:nvPr/>
-        </p:nvSpPr>
-        <p:spPr>
-          <a:xfrm>
-            <a:off x="457200" y="164592"/>
-            <a:ext cx="11277295" cy="384048"/>
-          </a:xfrm>
-          <a:prstGeom prst="rect">
-            <a:avLst/>
-          </a:prstGeom>
-          <a:noFill/>
-        </p:spPr>
-        <p:txBody>
-          <a:bodyPr wrap="square">
-            <a:spAutoFit/>
-          </a:bodyPr>
-          <a:lstStyle/>
-          <a:p>
-            <a:r>
-              <a:rPr sz="2600" b="1" i="0">
-                <a:solidFill>
-                  <a:srgbClr val="FFFFFF"/>
-                </a:solidFill>
-                <a:latin typeface="Calibri"/>
-              </a:rPr>
-              <a:t>Herramientas de hoy</a:t>
-            </a:r>
-          </a:p>
-        </p:txBody>
-      </p:sp>
-      <p:sp>
-        <p:nvSpPr>
-          <p:cNvPr id="5" name="TextBox 4"/>
-          <p:cNvSpPr txBox="1"/>
-          <p:nvPr/>
-        </p:nvSpPr>
-        <p:spPr>
-          <a:xfrm>
-            <a:off x="457200" y="566928"/>
-            <a:ext cx="11277295" cy="411480"/>
-          </a:xfrm>
-          <a:prstGeom prst="rect">
-            <a:avLst/>
-          </a:prstGeom>
-          <a:noFill/>
-        </p:spPr>
-        <p:txBody>
-          <a:bodyPr wrap="square">
-            <a:spAutoFit/>
-          </a:bodyPr>
-          <a:lstStyle/>
-          <a:p>
-            <a:r>
-              <a:rPr sz="1400" b="0" i="0">
-                <a:solidFill>
-                  <a:srgbClr val="B8D8EE"/>
-                </a:solidFill>
-                <a:latin typeface="Calibri"/>
-              </a:rPr>
-              <a:t>Gratis · funcionan en el navegador</a:t>
-            </a:r>
-          </a:p>
-        </p:txBody>
-      </p:sp>
-      <p:sp>
-        <p:nvSpPr>
-          <p:cNvPr id="6" name="Rounded Rectangle 5"/>
-          <p:cNvSpPr/>
-          <p:nvPr/>
-        </p:nvSpPr>
-        <p:spPr>
-          <a:xfrm>
-            <a:off x="457200" y="1591056"/>
-            <a:ext cx="3624986" cy="2331720"/>
-          </a:xfrm>
-          <a:prstGeom prst="roundRect">
-            <a:avLst>
-              <a:gd name="adj" fmla="val 12000"/>
-            </a:avLst>
-          </a:prstGeom>
-          <a:solidFill>
-            <a:srgbClr val="F2F2F2"/>
-          </a:solidFill>
-          <a:ln>
-            <a:noFill/>
-          </a:ln>
-        </p:spPr>
-        <p:style>
-          <a:lnRef idx="1">
-            <a:schemeClr val="accent1"/>
-          </a:lnRef>
-          <a:fillRef idx="3">
-            <a:schemeClr val="accent1"/>
-          </a:fillRef>
-          <a:effectRef idx="2">
-            <a:schemeClr val="accent1"/>
-          </a:effectRef>
-          <a:fontRef idx="minor">
-            <a:schemeClr val="lt1"/>
-          </a:fontRef>
-        </p:style>
-        <p:txBody>
-          <a:bodyPr rtlCol="0" anchor="ctr"/>
-          <a:lstStyle/>
-          <a:p>
-            <a:pPr algn="ctr"/>
-          </a:p>
-        </p:txBody>
-      </p:sp>
-      <p:sp>
-        <p:nvSpPr>
-          <p:cNvPr id="7" name="Rectangle 6"/>
-          <p:cNvSpPr/>
-          <p:nvPr/>
-        </p:nvSpPr>
-        <p:spPr>
-          <a:xfrm>
-            <a:off x="457200" y="1591056"/>
-            <a:ext cx="3624986" cy="64008"/>
-          </a:xfrm>
-          <a:prstGeom prst="rect">
-            <a:avLst/>
-          </a:prstGeom>
-          <a:solidFill>
-            <a:srgbClr val="095292"/>
-          </a:solidFill>
-          <a:ln>
-            <a:noFill/>
-          </a:ln>
-        </p:spPr>
-        <p:style>
-          <a:lnRef idx="1">
-            <a:schemeClr val="accent1"/>
-          </a:lnRef>
-          <a:fillRef idx="3">
-            <a:schemeClr val="accent1"/>
-          </a:fillRef>
-          <a:effectRef idx="2">
-            <a:schemeClr val="accent1"/>
-          </a:effectRef>
-          <a:fontRef idx="minor">
-            <a:schemeClr val="lt1"/>
-          </a:fontRef>
-        </p:style>
-        <p:txBody>
-          <a:bodyPr rtlCol="0" anchor="ctr"/>
-          <a:lstStyle/>
-          <a:p>
-            <a:pPr algn="ctr"/>
-          </a:p>
-        </p:txBody>
-      </p:sp>
-      <p:sp>
-        <p:nvSpPr>
-          <p:cNvPr id="8" name="Rectangle 7"/>
-          <p:cNvSpPr/>
-          <p:nvPr/>
-        </p:nvSpPr>
-        <p:spPr>
-          <a:xfrm>
-            <a:off x="457200" y="1655064"/>
-            <a:ext cx="3624986" cy="27432"/>
-          </a:xfrm>
-          <a:prstGeom prst="rect">
-            <a:avLst/>
-          </a:prstGeom>
-          <a:solidFill>
-            <a:srgbClr val="FFD000"/>
-          </a:solidFill>
-          <a:ln>
-            <a:noFill/>
-          </a:ln>
-        </p:spPr>
-        <p:style>
-          <a:lnRef idx="1">
-            <a:schemeClr val="accent1"/>
-          </a:lnRef>
-          <a:fillRef idx="3">
-            <a:schemeClr val="accent1"/>
-          </a:fillRef>
-          <a:effectRef idx="2">
-            <a:schemeClr val="accent1"/>
-          </a:effectRef>
-          <a:fontRef idx="minor">
-            <a:schemeClr val="lt1"/>
-          </a:fontRef>
-        </p:style>
-        <p:txBody>
-          <a:bodyPr rtlCol="0" anchor="ctr"/>
-          <a:lstStyle/>
-          <a:p>
-            <a:pPr algn="ctr"/>
-          </a:p>
-        </p:txBody>
-      </p:sp>
       <p:pic>
         <p:nvPicPr>
-          <p:cNvPr id="9" name="Picture 8" descr="drawio.png"/>
+          <p:cNvPr id="3" name="Picture 2" descr="logo_uniajc_color.png"/>
           <p:cNvPicPr>
             <a:picLocks noChangeAspect="1"/>
           </p:cNvPicPr>
@@ -6570,8 +6823,8 @@
         </p:blipFill>
         <p:spPr>
           <a:xfrm>
-            <a:off x="1643329" y="1847087"/>
-            <a:ext cx="1252728" cy="1252728"/>
+            <a:off x="10271455" y="5998464"/>
+            <a:ext cx="1463040" cy="643233"/>
           </a:xfrm>
           <a:prstGeom prst="rect">
             <a:avLst/>
@@ -6580,14 +6833,14 @@
       </p:pic>
       <p:sp>
         <p:nvSpPr>
-          <p:cNvPr id="10" name="TextBox 9"/>
+          <p:cNvPr id="4" name="TextBox 3"/>
           <p:cNvSpPr txBox="1"/>
           <p:nvPr/>
         </p:nvSpPr>
         <p:spPr>
           <a:xfrm>
-            <a:off x="530352" y="3191256"/>
-            <a:ext cx="3478682" cy="621792"/>
+            <a:off x="457200" y="1737360"/>
+            <a:ext cx="11277295" cy="1097280"/>
           </a:xfrm>
           <a:prstGeom prst="rect">
             <a:avLst/>
@@ -6595,456 +6848,32 @@
           <a:noFill/>
         </p:spPr>
         <p:txBody>
-          <a:bodyPr wrap="square" anchor="t"/>
+          <a:bodyPr wrap="square" anchor="ctr"/>
           <a:lstStyle/>
           <a:p>
             <a:pPr algn="ctr"/>
             <a:r>
-              <a:rPr sz="1300" b="1" i="0">
+              <a:rPr sz="3400" b="1" i="0">
                 <a:solidFill>
                   <a:srgbClr val="095292"/>
                 </a:solidFill>
                 <a:latin typeface="Calibri"/>
               </a:rPr>
-              <a:t>Draw.Io</a:t>
-            </a:r>
-          </a:p>
-          <a:p>
-            <a:pPr algn="ctr">
-              <a:spcBef>
-                <a:spcPts val="200"/>
-              </a:spcBef>
-            </a:pPr>
-            <a:r>
-              <a:rPr sz="1000" b="0" i="0">
-                <a:solidFill>
-                  <a:srgbClr val="666666"/>
-                </a:solidFill>
-                <a:latin typeface="Calibri"/>
-              </a:rPr>
-              <a:t>Diagramas UML y de contexto</a:t>
-            </a:r>
-          </a:p>
-        </p:txBody>
-      </p:sp>
-      <p:sp>
-        <p:nvSpPr>
-          <p:cNvPr id="11" name="Rounded Rectangle 10"/>
-          <p:cNvSpPr/>
-          <p:nvPr/>
-        </p:nvSpPr>
-        <p:spPr>
-          <a:xfrm>
-            <a:off x="4283354" y="1591056"/>
-            <a:ext cx="3624986" cy="2331720"/>
-          </a:xfrm>
-          <a:prstGeom prst="roundRect">
-            <a:avLst>
-              <a:gd name="adj" fmla="val 12000"/>
-            </a:avLst>
-          </a:prstGeom>
-          <a:solidFill>
-            <a:srgbClr val="F2F2F2"/>
-          </a:solidFill>
-          <a:ln>
-            <a:noFill/>
-          </a:ln>
-        </p:spPr>
-        <p:style>
-          <a:lnRef idx="1">
-            <a:schemeClr val="accent1"/>
-          </a:lnRef>
-          <a:fillRef idx="3">
-            <a:schemeClr val="accent1"/>
-          </a:fillRef>
-          <a:effectRef idx="2">
-            <a:schemeClr val="accent1"/>
-          </a:effectRef>
-          <a:fontRef idx="minor">
-            <a:schemeClr val="lt1"/>
-          </a:fontRef>
-        </p:style>
-        <p:txBody>
-          <a:bodyPr rtlCol="0" anchor="ctr"/>
-          <a:lstStyle/>
-          <a:p>
-            <a:pPr algn="ctr"/>
-          </a:p>
-        </p:txBody>
-      </p:sp>
-      <p:sp>
-        <p:nvSpPr>
-          <p:cNvPr id="12" name="Rectangle 11"/>
-          <p:cNvSpPr/>
-          <p:nvPr/>
-        </p:nvSpPr>
-        <p:spPr>
-          <a:xfrm>
-            <a:off x="4283354" y="1591056"/>
-            <a:ext cx="3624986" cy="64008"/>
-          </a:xfrm>
-          <a:prstGeom prst="rect">
-            <a:avLst/>
-          </a:prstGeom>
-          <a:solidFill>
-            <a:srgbClr val="095292"/>
-          </a:solidFill>
-          <a:ln>
-            <a:noFill/>
-          </a:ln>
-        </p:spPr>
-        <p:style>
-          <a:lnRef idx="1">
-            <a:schemeClr val="accent1"/>
-          </a:lnRef>
-          <a:fillRef idx="3">
-            <a:schemeClr val="accent1"/>
-          </a:fillRef>
-          <a:effectRef idx="2">
-            <a:schemeClr val="accent1"/>
-          </a:effectRef>
-          <a:fontRef idx="minor">
-            <a:schemeClr val="lt1"/>
-          </a:fontRef>
-        </p:style>
-        <p:txBody>
-          <a:bodyPr rtlCol="0" anchor="ctr"/>
-          <a:lstStyle/>
-          <a:p>
-            <a:pPr algn="ctr"/>
-          </a:p>
-        </p:txBody>
-      </p:sp>
-      <p:sp>
-        <p:nvSpPr>
-          <p:cNvPr id="13" name="Rectangle 12"/>
-          <p:cNvSpPr/>
-          <p:nvPr/>
-        </p:nvSpPr>
-        <p:spPr>
-          <a:xfrm>
-            <a:off x="4283354" y="1655064"/>
-            <a:ext cx="3624986" cy="27432"/>
-          </a:xfrm>
-          <a:prstGeom prst="rect">
-            <a:avLst/>
-          </a:prstGeom>
-          <a:solidFill>
-            <a:srgbClr val="FFD000"/>
-          </a:solidFill>
-          <a:ln>
-            <a:noFill/>
-          </a:ln>
-        </p:spPr>
-        <p:style>
-          <a:lnRef idx="1">
-            <a:schemeClr val="accent1"/>
-          </a:lnRef>
-          <a:fillRef idx="3">
-            <a:schemeClr val="accent1"/>
-          </a:fillRef>
-          <a:effectRef idx="2">
-            <a:schemeClr val="accent1"/>
-          </a:effectRef>
-          <a:fontRef idx="minor">
-            <a:schemeClr val="lt1"/>
-          </a:fontRef>
-        </p:style>
-        <p:txBody>
-          <a:bodyPr rtlCol="0" anchor="ctr"/>
-          <a:lstStyle/>
-          <a:p>
-            <a:pPr algn="ctr"/>
-          </a:p>
-        </p:txBody>
-      </p:sp>
-      <p:pic>
-        <p:nvPicPr>
-          <p:cNvPr id="14" name="Picture 13" descr="google_docs.png"/>
-          <p:cNvPicPr>
-            <a:picLocks noChangeAspect="1"/>
-          </p:cNvPicPr>
-          <p:nvPr/>
-        </p:nvPicPr>
-        <p:blipFill>
-          <a:blip r:embed="rId3"/>
-          <a:stretch>
-            <a:fillRect/>
-          </a:stretch>
-        </p:blipFill>
-        <p:spPr>
-          <a:xfrm>
-            <a:off x="5469483" y="1847087"/>
-            <a:ext cx="1252728" cy="1252728"/>
-          </a:xfrm>
-          <a:prstGeom prst="rect">
-            <a:avLst/>
-          </a:prstGeom>
-        </p:spPr>
-      </p:pic>
-      <p:sp>
-        <p:nvSpPr>
-          <p:cNvPr id="15" name="TextBox 14"/>
+              <a:t>Clase 6 · Requerimientos de software</a:t>
+            </a:r>
+          </a:p>
+        </p:txBody>
+      </p:sp>
+      <p:sp>
+        <p:nvSpPr>
+          <p:cNvPr id="5" name="TextBox 4"/>
           <p:cNvSpPr txBox="1"/>
           <p:nvPr/>
         </p:nvSpPr>
         <p:spPr>
           <a:xfrm>
-            <a:off x="4356506" y="3191256"/>
-            <a:ext cx="3478682" cy="621792"/>
-          </a:xfrm>
-          <a:prstGeom prst="rect">
-            <a:avLst/>
-          </a:prstGeom>
-          <a:noFill/>
-        </p:spPr>
-        <p:txBody>
-          <a:bodyPr wrap="square" anchor="t"/>
-          <a:lstStyle/>
-          <a:p>
-            <a:pPr algn="ctr"/>
-            <a:r>
-              <a:rPr sz="1300" b="1" i="0">
-                <a:solidFill>
-                  <a:srgbClr val="095292"/>
-                </a:solidFill>
-                <a:latin typeface="Calibri"/>
-              </a:rPr>
-              <a:t>google docs</a:t>
-            </a:r>
-          </a:p>
-          <a:p>
-            <a:pPr algn="ctr">
-              <a:spcBef>
-                <a:spcPts val="200"/>
-              </a:spcBef>
-            </a:pPr>
-            <a:r>
-              <a:rPr sz="1000" b="0" i="0">
-                <a:solidFill>
-                  <a:srgbClr val="666666"/>
-                </a:solidFill>
-                <a:latin typeface="Calibri"/>
-              </a:rPr>
-              <a:t>Documentos del paquete de diseño</a:t>
-            </a:r>
-          </a:p>
-        </p:txBody>
-      </p:sp>
-      <p:sp>
-        <p:nvSpPr>
-          <p:cNvPr id="16" name="Rounded Rectangle 15"/>
-          <p:cNvSpPr/>
-          <p:nvPr/>
-        </p:nvSpPr>
-        <p:spPr>
-          <a:xfrm>
-            <a:off x="8109508" y="1591056"/>
-            <a:ext cx="3624986" cy="2331720"/>
-          </a:xfrm>
-          <a:prstGeom prst="roundRect">
-            <a:avLst>
-              <a:gd name="adj" fmla="val 12000"/>
-            </a:avLst>
-          </a:prstGeom>
-          <a:solidFill>
-            <a:srgbClr val="F2F2F2"/>
-          </a:solidFill>
-          <a:ln>
-            <a:noFill/>
-          </a:ln>
-        </p:spPr>
-        <p:style>
-          <a:lnRef idx="1">
-            <a:schemeClr val="accent1"/>
-          </a:lnRef>
-          <a:fillRef idx="3">
-            <a:schemeClr val="accent1"/>
-          </a:fillRef>
-          <a:effectRef idx="2">
-            <a:schemeClr val="accent1"/>
-          </a:effectRef>
-          <a:fontRef idx="minor">
-            <a:schemeClr val="lt1"/>
-          </a:fontRef>
-        </p:style>
-        <p:txBody>
-          <a:bodyPr rtlCol="0" anchor="ctr"/>
-          <a:lstStyle/>
-          <a:p>
-            <a:pPr algn="ctr"/>
-          </a:p>
-        </p:txBody>
-      </p:sp>
-      <p:sp>
-        <p:nvSpPr>
-          <p:cNvPr id="17" name="Rectangle 16"/>
-          <p:cNvSpPr/>
-          <p:nvPr/>
-        </p:nvSpPr>
-        <p:spPr>
-          <a:xfrm>
-            <a:off x="8109508" y="1591056"/>
-            <a:ext cx="3624986" cy="64008"/>
-          </a:xfrm>
-          <a:prstGeom prst="rect">
-            <a:avLst/>
-          </a:prstGeom>
-          <a:solidFill>
-            <a:srgbClr val="095292"/>
-          </a:solidFill>
-          <a:ln>
-            <a:noFill/>
-          </a:ln>
-        </p:spPr>
-        <p:style>
-          <a:lnRef idx="1">
-            <a:schemeClr val="accent1"/>
-          </a:lnRef>
-          <a:fillRef idx="3">
-            <a:schemeClr val="accent1"/>
-          </a:fillRef>
-          <a:effectRef idx="2">
-            <a:schemeClr val="accent1"/>
-          </a:effectRef>
-          <a:fontRef idx="minor">
-            <a:schemeClr val="lt1"/>
-          </a:fontRef>
-        </p:style>
-        <p:txBody>
-          <a:bodyPr rtlCol="0" anchor="ctr"/>
-          <a:lstStyle/>
-          <a:p>
-            <a:pPr algn="ctr"/>
-          </a:p>
-        </p:txBody>
-      </p:sp>
-      <p:sp>
-        <p:nvSpPr>
-          <p:cNvPr id="18" name="Rectangle 17"/>
-          <p:cNvSpPr/>
-          <p:nvPr/>
-        </p:nvSpPr>
-        <p:spPr>
-          <a:xfrm>
-            <a:off x="8109508" y="1655064"/>
-            <a:ext cx="3624986" cy="27432"/>
-          </a:xfrm>
-          <a:prstGeom prst="rect">
-            <a:avLst/>
-          </a:prstGeom>
-          <a:solidFill>
-            <a:srgbClr val="FFD000"/>
-          </a:solidFill>
-          <a:ln>
-            <a:noFill/>
-          </a:ln>
-        </p:spPr>
-        <p:style>
-          <a:lnRef idx="1">
-            <a:schemeClr val="accent1"/>
-          </a:lnRef>
-          <a:fillRef idx="3">
-            <a:schemeClr val="accent1"/>
-          </a:fillRef>
-          <a:effectRef idx="2">
-            <a:schemeClr val="accent1"/>
-          </a:effectRef>
-          <a:fontRef idx="minor">
-            <a:schemeClr val="lt1"/>
-          </a:fontRef>
-        </p:style>
-        <p:txBody>
-          <a:bodyPr rtlCol="0" anchor="ctr"/>
-          <a:lstStyle/>
-          <a:p>
-            <a:pPr algn="ctr"/>
-          </a:p>
-        </p:txBody>
-      </p:sp>
-      <p:pic>
-        <p:nvPicPr>
-          <p:cNvPr id="19" name="Picture 18" descr="examlab.png"/>
-          <p:cNvPicPr>
-            <a:picLocks noChangeAspect="1"/>
-          </p:cNvPicPr>
-          <p:nvPr/>
-        </p:nvPicPr>
-        <p:blipFill>
-          <a:blip r:embed="rId4"/>
-          <a:stretch>
-            <a:fillRect/>
-          </a:stretch>
-        </p:blipFill>
-        <p:spPr>
-          <a:xfrm>
-            <a:off x="9295638" y="1847087"/>
-            <a:ext cx="1252728" cy="1252728"/>
-          </a:xfrm>
-          <a:prstGeom prst="rect">
-            <a:avLst/>
-          </a:prstGeom>
-        </p:spPr>
-      </p:pic>
-      <p:sp>
-        <p:nvSpPr>
-          <p:cNvPr id="20" name="TextBox 19"/>
-          <p:cNvSpPr txBox="1"/>
-          <p:nvPr/>
-        </p:nvSpPr>
-        <p:spPr>
-          <a:xfrm>
-            <a:off x="8182660" y="3191256"/>
-            <a:ext cx="3478682" cy="621792"/>
-          </a:xfrm>
-          <a:prstGeom prst="rect">
-            <a:avLst/>
-          </a:prstGeom>
-          <a:noFill/>
-        </p:spPr>
-        <p:txBody>
-          <a:bodyPr wrap="square" anchor="t"/>
-          <a:lstStyle/>
-          <a:p>
-            <a:pPr algn="ctr"/>
-            <a:r>
-              <a:rPr sz="1300" b="1" i="0">
-                <a:solidFill>
-                  <a:srgbClr val="095292"/>
-                </a:solidFill>
-                <a:latin typeface="Calibri"/>
-              </a:rPr>
-              <a:t>la plataforma del curso</a:t>
-            </a:r>
-          </a:p>
-          <a:p>
-            <a:pPr algn="ctr">
-              <a:spcBef>
-                <a:spcPts val="200"/>
-              </a:spcBef>
-            </a:pPr>
-            <a:r>
-              <a:rPr sz="1000" b="0" i="0">
-                <a:solidFill>
-                  <a:srgbClr val="666666"/>
-                </a:solidFill>
-                <a:latin typeface="Calibri"/>
-              </a:rPr>
-              <a:t>Entrega del taller · en la fecha que indique el docente</a:t>
-            </a:r>
-          </a:p>
-        </p:txBody>
-      </p:sp>
-      <p:sp>
-        <p:nvSpPr>
-          <p:cNvPr id="21" name="TextBox 20"/>
-          <p:cNvSpPr txBox="1"/>
-          <p:nvPr/>
-        </p:nvSpPr>
-        <p:spPr>
-          <a:xfrm>
-            <a:off x="11185855" y="6473952"/>
-            <a:ext cx="640080" cy="274320"/>
+            <a:off x="457200" y="3017520"/>
+            <a:ext cx="11277295" cy="1645920"/>
           </a:xfrm>
           <a:prstGeom prst="rect">
             <a:avLst/>
@@ -7057,141 +6886,65 @@
           </a:bodyPr>
           <a:lstStyle/>
           <a:p>
-            <a:pPr algn="r"/>
-            <a:r>
-              <a:rPr sz="1100" b="0" i="0">
-                <a:solidFill>
-                  <a:srgbClr val="666666"/>
-                </a:solidFill>
-                <a:latin typeface="Calibri"/>
-              </a:rPr>
-              <a:t>17</a:t>
-            </a:r>
-          </a:p>
-        </p:txBody>
-      </p:sp>
-    </p:spTree>
-  </p:cSld>
-  <p:clrMapOvr>
-    <a:masterClrMapping/>
-  </p:clrMapOvr>
-</p:sld>
-</file>
-
-<file path=ppt/slides/slide18.xml><?xml version="1.0" encoding="utf-8"?>
-<p:sld xmlns:a="http://schemas.openxmlformats.org/drawingml/2006/main" xmlns:p="http://schemas.openxmlformats.org/presentationml/2006/main" xmlns:r="http://schemas.openxmlformats.org/officeDocument/2006/relationships">
-  <p:cSld>
-    <p:bg>
-      <p:bgPr>
-        <a:solidFill>
-          <a:srgbClr val="FFFFFF"/>
-        </a:solidFill>
-        <a:effectLst/>
-      </p:bgPr>
-    </p:bg>
-    <p:spTree>
-      <p:nvGrpSpPr>
-        <p:cNvPr id="1" name=""/>
-        <p:cNvGrpSpPr/>
-        <p:nvPr/>
-      </p:nvGrpSpPr>
-      <p:grpSpPr/>
-      <p:sp>
-        <p:nvSpPr>
-          <p:cNvPr id="2" name="Rectangle 1"/>
-          <p:cNvSpPr/>
-          <p:nvPr/>
-        </p:nvSpPr>
-        <p:spPr>
-          <a:xfrm>
-            <a:off x="0" y="0"/>
-            <a:ext cx="12191695" cy="960120"/>
-          </a:xfrm>
-          <a:prstGeom prst="rect">
-            <a:avLst/>
-          </a:prstGeom>
-          <a:solidFill>
-            <a:srgbClr val="095292"/>
-          </a:solidFill>
-          <a:ln>
-            <a:noFill/>
-          </a:ln>
-        </p:spPr>
-        <p:style>
-          <a:lnRef idx="1">
-            <a:schemeClr val="accent1"/>
-          </a:lnRef>
-          <a:fillRef idx="3">
-            <a:schemeClr val="accent1"/>
-          </a:fillRef>
-          <a:effectRef idx="2">
-            <a:schemeClr val="accent1"/>
-          </a:effectRef>
-          <a:fontRef idx="minor">
-            <a:schemeClr val="lt1"/>
-          </a:fontRef>
-        </p:style>
-        <p:txBody>
-          <a:bodyPr rtlCol="0" anchor="ctr"/>
-          <a:lstStyle/>
-          <a:p>
-            <a:pPr algn="ctr"/>
-          </a:p>
-        </p:txBody>
-      </p:sp>
-      <p:sp>
-        <p:nvSpPr>
-          <p:cNvPr id="3" name="Rectangle 2"/>
-          <p:cNvSpPr/>
-          <p:nvPr/>
-        </p:nvSpPr>
-        <p:spPr>
-          <a:xfrm>
-            <a:off x="0" y="960120"/>
-            <a:ext cx="12191695" cy="41148"/>
-          </a:xfrm>
-          <a:prstGeom prst="rect">
-            <a:avLst/>
-          </a:prstGeom>
-          <a:solidFill>
-            <a:srgbClr val="FFD000"/>
-          </a:solidFill>
-          <a:ln>
-            <a:noFill/>
-          </a:ln>
-        </p:spPr>
-        <p:style>
-          <a:lnRef idx="1">
-            <a:schemeClr val="accent1"/>
-          </a:lnRef>
-          <a:fillRef idx="3">
-            <a:schemeClr val="accent1"/>
-          </a:fillRef>
-          <a:effectRef idx="2">
-            <a:schemeClr val="accent1"/>
-          </a:effectRef>
-          <a:fontRef idx="minor">
-            <a:schemeClr val="lt1"/>
-          </a:fontRef>
-        </p:style>
-        <p:txBody>
-          <a:bodyPr rtlCol="0" anchor="ctr"/>
-          <a:lstStyle/>
-          <a:p>
-            <a:pPr algn="ctr"/>
-          </a:p>
-        </p:txBody>
-      </p:sp>
-      <p:sp>
-        <p:nvSpPr>
-          <p:cNvPr id="4" name="TextBox 3"/>
+            <a:pPr algn="ctr">
+              <a:spcAft>
+                <a:spcPts val="600"/>
+              </a:spcAft>
+            </a:pPr>
+            <a:r>
+              <a:rPr sz="1600" b="0" i="0">
+                <a:solidFill>
+                  <a:srgbClr val="333333"/>
+                </a:solidFill>
+                <a:latin typeface="Calibri"/>
+              </a:rPr>
+              <a:t>De la frase del veterinario al requisito verificable</a:t>
+            </a:r>
+          </a:p>
+          <a:p>
+            <a:pPr algn="ctr">
+              <a:spcAft>
+                <a:spcPts val="600"/>
+              </a:spcAft>
+            </a:pPr>
+            <a:r>
+              <a:rPr sz="1600" b="0" i="0">
+                <a:solidFill>
+                  <a:srgbClr val="333333"/>
+                </a:solidFill>
+                <a:latin typeface="Calibri"/>
+              </a:rPr>
+              <a:t>Repasen las laminas de teoria: cada concepto esta completo</a:t>
+            </a:r>
+          </a:p>
+          <a:p>
+            <a:pPr algn="ctr">
+              <a:spcAft>
+                <a:spcPts val="600"/>
+              </a:spcAft>
+            </a:pPr>
+            <a:r>
+              <a:rPr sz="1600" b="0" i="0">
+                <a:solidFill>
+                  <a:srgbClr val="333333"/>
+                </a:solidFill>
+                <a:latin typeface="Calibri"/>
+              </a:rPr>
+              <a:t>Siguiente clase: continuamos con el siguiente tema</a:t>
+            </a:r>
+          </a:p>
+        </p:txBody>
+      </p:sp>
+      <p:sp>
+        <p:nvSpPr>
+          <p:cNvPr id="6" name="TextBox 5"/>
           <p:cNvSpPr txBox="1"/>
           <p:nvPr/>
         </p:nvSpPr>
         <p:spPr>
           <a:xfrm>
-            <a:off x="457200" y="164592"/>
-            <a:ext cx="11277295" cy="502920"/>
+            <a:off x="457200" y="4754880"/>
+            <a:ext cx="11277295" cy="640080"/>
           </a:xfrm>
           <a:prstGeom prst="rect">
             <a:avLst/>
@@ -7204,390 +6957,15 @@
           </a:bodyPr>
           <a:lstStyle/>
           <a:p>
-            <a:r>
-              <a:rPr sz="2600" b="1" i="0">
-                <a:solidFill>
-                  <a:srgbClr val="FFFFFF"/>
-                </a:solidFill>
-                <a:latin typeface="Calibri"/>
-              </a:rPr>
-              <a:t>Taller PI — por que importa</a:t>
-            </a:r>
-          </a:p>
-        </p:txBody>
-      </p:sp>
-      <p:sp>
-        <p:nvSpPr>
-          <p:cNvPr id="5" name="TextBox 4"/>
-          <p:cNvSpPr txBox="1"/>
-          <p:nvPr/>
-        </p:nvSpPr>
-        <p:spPr>
-          <a:xfrm>
-            <a:off x="457200" y="1170432"/>
-            <a:ext cx="11277295" cy="5230368"/>
-          </a:xfrm>
-          <a:prstGeom prst="rect">
-            <a:avLst/>
-          </a:prstGeom>
-          <a:noFill/>
-        </p:spPr>
-        <p:txBody>
-          <a:bodyPr wrap="square">
-            <a:spAutoFit/>
-          </a:bodyPr>
-          <a:lstStyle/>
-          <a:p>
-            <a:pPr>
-              <a:spcAft>
-                <a:spcPts val="800"/>
-              </a:spcAft>
-            </a:pPr>
-            <a:r>
-              <a:rPr sz="2000" b="0" i="0">
-                <a:solidFill>
-                  <a:srgbClr val="333333"/>
-                </a:solidFill>
-                <a:latin typeface="Calibri"/>
-              </a:rPr>
-              <a:t>–   </a:t>
-            </a:r>
+            <a:pPr algn="ctr"/>
             <a:r>
               <a:rPr sz="2000" b="1" i="0">
                 <a:solidFill>
-                  <a:srgbClr val="333333"/>
-                </a:solidFill>
-                <a:latin typeface="Calibri"/>
-              </a:rPr>
-              <a:t>Por que importa al PI:</a:t>
-            </a:r>
-            <a:r>
-              <a:rPr sz="2000" b="0" i="0">
-                <a:solidFill>
-                  <a:srgbClr val="333333"/>
-                </a:solidFill>
-                <a:latin typeface="Calibri"/>
-              </a:rPr>
-              <a:t> este catalogo es el contrato del Proyecto Integrador; todo lo que se dibuje en las clases siguientes (casos de uso, clases, mockups, diccionario de datos) debe poder rastrearse hasta un requisito de esta lista.</a:t>
-            </a:r>
-          </a:p>
-          <a:p>
-            <a:pPr>
-              <a:spcAft>
-                <a:spcPts val="800"/>
-              </a:spcAft>
-            </a:pPr>
-            <a:r>
-              <a:rPr sz="2000" b="0" i="0">
-                <a:solidFill>
-                  <a:srgbClr val="333333"/>
-                </a:solidFill>
-                <a:latin typeface="Calibri"/>
-              </a:rPr>
-              <a:t>–   Si un requisito no queda hoy en el documento, sencillamente no existe para VetCare: no se disena, no se dibuja y no se programa en Programacion II.</a:t>
-            </a:r>
-          </a:p>
-          <a:p>
-            <a:pPr>
-              <a:spcAft>
-                <a:spcPts val="800"/>
-              </a:spcAft>
-            </a:pPr>
-            <a:r>
-              <a:rPr sz="2000" b="0" i="0">
-                <a:solidFill>
-                  <a:srgbClr val="333333"/>
-                </a:solidFill>
-                <a:latin typeface="Calibri"/>
-              </a:rPr>
-              <a:t>–   Es tambien la primera entrega que se defiende hablando: usted debe poder explicarle al Dr. Ramirez, en dos minutos, que se le va a construir y que no.</a:t>
-            </a:r>
-          </a:p>
-        </p:txBody>
-      </p:sp>
-      <p:sp>
-        <p:nvSpPr>
-          <p:cNvPr id="6" name="TextBox 5"/>
-          <p:cNvSpPr txBox="1"/>
-          <p:nvPr/>
-        </p:nvSpPr>
-        <p:spPr>
-          <a:xfrm>
-            <a:off x="11185855" y="6473952"/>
-            <a:ext cx="640080" cy="274320"/>
-          </a:xfrm>
-          <a:prstGeom prst="rect">
-            <a:avLst/>
-          </a:prstGeom>
-          <a:noFill/>
-        </p:spPr>
-        <p:txBody>
-          <a:bodyPr wrap="square">
-            <a:spAutoFit/>
-          </a:bodyPr>
-          <a:lstStyle/>
-          <a:p>
-            <a:pPr algn="r"/>
-            <a:r>
-              <a:rPr sz="1100" b="0" i="0">
-                <a:solidFill>
-                  <a:srgbClr val="666666"/>
-                </a:solidFill>
-                <a:latin typeface="Calibri"/>
-              </a:rPr>
-              <a:t>18</a:t>
-            </a:r>
-          </a:p>
-        </p:txBody>
-      </p:sp>
-    </p:spTree>
-  </p:cSld>
-  <p:clrMapOvr>
-    <a:masterClrMapping/>
-  </p:clrMapOvr>
-</p:sld>
-</file>
-
-<file path=ppt/slides/slide19.xml><?xml version="1.0" encoding="utf-8"?>
-<p:sld xmlns:a="http://schemas.openxmlformats.org/drawingml/2006/main" xmlns:p="http://schemas.openxmlformats.org/presentationml/2006/main" xmlns:r="http://schemas.openxmlformats.org/officeDocument/2006/relationships">
-  <p:cSld>
-    <p:bg>
-      <p:bgPr>
-        <a:solidFill>
-          <a:srgbClr val="FFFFFF"/>
-        </a:solidFill>
-        <a:effectLst/>
-      </p:bgPr>
-    </p:bg>
-    <p:spTree>
-      <p:nvGrpSpPr>
-        <p:cNvPr id="1" name=""/>
-        <p:cNvGrpSpPr/>
-        <p:nvPr/>
-      </p:nvGrpSpPr>
-      <p:grpSpPr/>
-      <p:sp>
-        <p:nvSpPr>
-          <p:cNvPr id="2" name="Rectangle 1"/>
-          <p:cNvSpPr/>
-          <p:nvPr/>
-        </p:nvSpPr>
-        <p:spPr>
-          <a:xfrm>
-            <a:off x="0" y="0"/>
-            <a:ext cx="12191695" cy="960120"/>
-          </a:xfrm>
-          <a:prstGeom prst="rect">
-            <a:avLst/>
-          </a:prstGeom>
-          <a:solidFill>
-            <a:srgbClr val="095292"/>
-          </a:solidFill>
-          <a:ln>
-            <a:noFill/>
-          </a:ln>
-        </p:spPr>
-        <p:style>
-          <a:lnRef idx="1">
-            <a:schemeClr val="accent1"/>
-          </a:lnRef>
-          <a:fillRef idx="3">
-            <a:schemeClr val="accent1"/>
-          </a:fillRef>
-          <a:effectRef idx="2">
-            <a:schemeClr val="accent1"/>
-          </a:effectRef>
-          <a:fontRef idx="minor">
-            <a:schemeClr val="lt1"/>
-          </a:fontRef>
-        </p:style>
-        <p:txBody>
-          <a:bodyPr rtlCol="0" anchor="ctr"/>
-          <a:lstStyle/>
-          <a:p>
-            <a:pPr algn="ctr"/>
-          </a:p>
-        </p:txBody>
-      </p:sp>
-      <p:sp>
-        <p:nvSpPr>
-          <p:cNvPr id="3" name="Rectangle 2"/>
-          <p:cNvSpPr/>
-          <p:nvPr/>
-        </p:nvSpPr>
-        <p:spPr>
-          <a:xfrm>
-            <a:off x="0" y="960120"/>
-            <a:ext cx="12191695" cy="41148"/>
-          </a:xfrm>
-          <a:prstGeom prst="rect">
-            <a:avLst/>
-          </a:prstGeom>
-          <a:solidFill>
-            <a:srgbClr val="FFD000"/>
-          </a:solidFill>
-          <a:ln>
-            <a:noFill/>
-          </a:ln>
-        </p:spPr>
-        <p:style>
-          <a:lnRef idx="1">
-            <a:schemeClr val="accent1"/>
-          </a:lnRef>
-          <a:fillRef idx="3">
-            <a:schemeClr val="accent1"/>
-          </a:fillRef>
-          <a:effectRef idx="2">
-            <a:schemeClr val="accent1"/>
-          </a:effectRef>
-          <a:fontRef idx="minor">
-            <a:schemeClr val="lt1"/>
-          </a:fontRef>
-        </p:style>
-        <p:txBody>
-          <a:bodyPr rtlCol="0" anchor="ctr"/>
-          <a:lstStyle/>
-          <a:p>
-            <a:pPr algn="ctr"/>
-          </a:p>
-        </p:txBody>
-      </p:sp>
-      <p:sp>
-        <p:nvSpPr>
-          <p:cNvPr id="4" name="TextBox 3"/>
-          <p:cNvSpPr txBox="1"/>
-          <p:nvPr/>
-        </p:nvSpPr>
-        <p:spPr>
-          <a:xfrm>
-            <a:off x="457200" y="164592"/>
-            <a:ext cx="11277295" cy="502920"/>
-          </a:xfrm>
-          <a:prstGeom prst="rect">
-            <a:avLst/>
-          </a:prstGeom>
-          <a:noFill/>
-        </p:spPr>
-        <p:txBody>
-          <a:bodyPr wrap="square">
-            <a:spAutoFit/>
-          </a:bodyPr>
-          <a:lstStyle/>
-          <a:p>
-            <a:r>
-              <a:rPr sz="2600" b="1" i="0">
-                <a:solidFill>
-                  <a:srgbClr val="FFFFFF"/>
-                </a:solidFill>
-                <a:latin typeface="Calibri"/>
-              </a:rPr>
-              <a:t>Taller PI — punto de partida</a:t>
-            </a:r>
-          </a:p>
-        </p:txBody>
-      </p:sp>
-      <p:sp>
-        <p:nvSpPr>
-          <p:cNvPr id="5" name="TextBox 4"/>
-          <p:cNvSpPr txBox="1"/>
-          <p:nvPr/>
-        </p:nvSpPr>
-        <p:spPr>
-          <a:xfrm>
-            <a:off x="457200" y="1170432"/>
-            <a:ext cx="11277295" cy="5230368"/>
-          </a:xfrm>
-          <a:prstGeom prst="rect">
-            <a:avLst/>
-          </a:prstGeom>
-          <a:noFill/>
-        </p:spPr>
-        <p:txBody>
-          <a:bodyPr wrap="square">
-            <a:spAutoFit/>
-          </a:bodyPr>
-          <a:lstStyle/>
-          <a:p>
-            <a:pPr>
-              <a:spcAft>
-                <a:spcPts val="800"/>
-              </a:spcAft>
-            </a:pPr>
-            <a:r>
-              <a:rPr sz="2000" b="0" i="0">
-                <a:solidFill>
-                  <a:srgbClr val="333333"/>
-                </a:solidFill>
-                <a:latin typeface="Calibri"/>
-              </a:rPr>
-              <a:t>–   Hoy solo existe la transcripcion de la entrevista al Dr. Ramirez: cinco frases sueltas, dichas en lenguaje de veterinario y no de analista.</a:t>
-            </a:r>
-          </a:p>
-          <a:p>
-            <a:pPr>
-              <a:spcAft>
-                <a:spcPts val="800"/>
-              </a:spcAft>
-            </a:pPr>
-            <a:r>
-              <a:rPr sz="2000" b="0" i="0">
-                <a:solidFill>
-                  <a:srgbClr val="333333"/>
-                </a:solidFill>
-                <a:latin typeface="Calibri"/>
-              </a:rPr>
-              <a:t>–   La clinica Huellitas sigue en papel: fichas que se extravian, busquedas de historial que toman varios minutos con el paciente esperando y cero metricas mensuales.</a:t>
-            </a:r>
-          </a:p>
-          <a:p>
-            <a:pPr>
-              <a:spcAft>
-                <a:spcPts val="800"/>
-              </a:spcAft>
-            </a:pPr>
-            <a:r>
-              <a:rPr sz="2000" b="0" i="0">
-                <a:solidFill>
-                  <a:srgbClr val="333333"/>
-                </a:solidFill>
-                <a:latin typeface="Calibri"/>
-              </a:rPr>
-              <a:t>–   No hay documento de requisitos, no hay prioridades acordadas y nadie sabe todavia que queda dentro y que queda fuera de la primera version de VetCare.</a:t>
-            </a:r>
-          </a:p>
-        </p:txBody>
-      </p:sp>
-      <p:sp>
-        <p:nvSpPr>
-          <p:cNvPr id="6" name="TextBox 5"/>
-          <p:cNvSpPr txBox="1"/>
-          <p:nvPr/>
-        </p:nvSpPr>
-        <p:spPr>
-          <a:xfrm>
-            <a:off x="11185855" y="6473952"/>
-            <a:ext cx="640080" cy="274320"/>
-          </a:xfrm>
-          <a:prstGeom prst="rect">
-            <a:avLst/>
-          </a:prstGeom>
-          <a:noFill/>
-        </p:spPr>
-        <p:txBody>
-          <a:bodyPr wrap="square">
-            <a:spAutoFit/>
-          </a:bodyPr>
-          <a:lstStyle/>
-          <a:p>
-            <a:pPr algn="r"/>
-            <a:r>
-              <a:rPr sz="1100" b="0" i="0">
-                <a:solidFill>
-                  <a:srgbClr val="666666"/>
-                </a:solidFill>
-                <a:latin typeface="Calibri"/>
-              </a:rPr>
-              <a:t>19</a:t>
+                  <a:srgbClr val="269CCB"/>
+                </a:solidFill>
+                <a:latin typeface="Calibri"/>
+              </a:rPr>
+              <a:t>Teoria al servicio del diseño</a:t>
             </a:r>
           </a:p>
         </p:txBody>
@@ -7733,7 +7111,7 @@
                 </a:solidFill>
                 <a:latin typeface="Calibri"/>
               </a:rPr>
-              <a:t>Encuadre de hoy · Objetivo del PI</a:t>
+              <a:t>Encuadre de hoy</a:t>
             </a:r>
           </a:p>
         </p:txBody>
@@ -7781,7 +7159,7 @@
                 </a:solidFill>
                 <a:latin typeface="Calibri"/>
               </a:rPr>
-              <a:t>Hoy avanzamos VetCare en:</a:t>
+              <a:t>Tema:</a:t>
             </a:r>
             <a:r>
               <a:rPr sz="2000" b="0" i="0">
@@ -7790,7 +7168,7 @@
                 </a:solidFill>
                 <a:latin typeface="Calibri"/>
               </a:rPr>
-              <a:t> Queda listo el catalogo de requisitos de VetCare: 8 RF y 4 RNF con criterio de verificacion y prioridad MoSCoW.</a:t>
+              <a:t> Requerimientos de software</a:t>
             </a:r>
           </a:p>
           <a:p>
@@ -7806,34 +7184,7 @@
                 </a:solidFill>
                 <a:latin typeface="Calibri"/>
               </a:rPr>
-              <a:t>–   Herramienta: </a:t>
-            </a:r>
-            <a:r>
-              <a:rPr sz="2000" b="1" i="0">
-                <a:solidFill>
-                  <a:srgbClr val="333333"/>
-                </a:solidFill>
-                <a:latin typeface="Calibri"/>
-              </a:rPr>
-              <a:t>Google Docs · draw.io</a:t>
-            </a:r>
-            <a:r>
-              <a:rPr sz="2000" b="0" i="0">
-                <a:solidFill>
-                  <a:srgbClr val="333333"/>
-                </a:solidFill>
-                <a:latin typeface="Calibri"/>
-              </a:rPr>
-              <a:t> · Bloque </a:t>
-            </a:r>
-            <a:r>
-              <a:rPr sz="2000" b="1" i="0">
-                <a:solidFill>
-                  <a:srgbClr val="333333"/>
-                </a:solidFill>
-                <a:latin typeface="Calibri"/>
-              </a:rPr>
-              <a:t>120 min</a:t>
+              <a:t>–   De la frase del veterinario al requisito verificable</a:t>
             </a:r>
           </a:p>
           <a:p>
@@ -7849,7 +7200,7 @@
                 </a:solidFill>
                 <a:latin typeface="Calibri"/>
               </a:rPr>
-              <a:t>–   </a:t>
+              <a:t>–   Herramienta del tema: </a:t>
             </a:r>
             <a:r>
               <a:rPr sz="2000" b="1" i="0">
@@ -7858,7 +7209,7 @@
                 </a:solidFill>
                 <a:latin typeface="Calibri"/>
               </a:rPr>
-              <a:t>Entregable de hoy:</a:t>
+              <a:t>Google Docs · draw.io</a:t>
             </a:r>
             <a:r>
               <a:rPr sz="2000" b="0" i="0">
@@ -7867,7 +7218,16 @@
                 </a:solidFill>
                 <a:latin typeface="Calibri"/>
               </a:rPr>
-              <a:t> Documento de requisitos de VetCare en PDF, con minimo 8 RF, 4 RNF cuantificados, priorizacion MoSCoW y matriz de trazabilidad, subido a la plataforma del curso.</a:t>
+              <a:t> · Bloque </a:t>
+            </a:r>
+            <a:r>
+              <a:rPr sz="2000" b="1" i="0">
+                <a:solidFill>
+                  <a:srgbClr val="333333"/>
+                </a:solidFill>
+                <a:latin typeface="Calibri"/>
+              </a:rPr>
+              <a:t>120 min</a:t>
             </a:r>
           </a:p>
           <a:p>
@@ -7883,7 +7243,7 @@
                 </a:solidFill>
                 <a:latin typeface="Calibri"/>
               </a:rPr>
-              <a:t>–   La teoria esta al servicio del producto: al salir, VetCare avanzo.</a:t>
+              <a:t>–   Ejemplo de toda la clase: VetCare, el sistema de la clinica «Huellitas».</a:t>
             </a:r>
           </a:p>
         </p:txBody>
@@ -7919,2873 +7279,6 @@
                 <a:latin typeface="Calibri"/>
               </a:rPr>
               <a:t>2</a:t>
-            </a:r>
-          </a:p>
-        </p:txBody>
-      </p:sp>
-    </p:spTree>
-  </p:cSld>
-  <p:clrMapOvr>
-    <a:masterClrMapping/>
-  </p:clrMapOvr>
-</p:sld>
-</file>
-
-<file path=ppt/slides/slide20.xml><?xml version="1.0" encoding="utf-8"?>
-<p:sld xmlns:a="http://schemas.openxmlformats.org/drawingml/2006/main" xmlns:p="http://schemas.openxmlformats.org/presentationml/2006/main" xmlns:r="http://schemas.openxmlformats.org/officeDocument/2006/relationships">
-  <p:cSld>
-    <p:bg>
-      <p:bgPr>
-        <a:solidFill>
-          <a:srgbClr val="FFFFFF"/>
-        </a:solidFill>
-        <a:effectLst/>
-      </p:bgPr>
-    </p:bg>
-    <p:spTree>
-      <p:nvGrpSpPr>
-        <p:cNvPr id="1" name=""/>
-        <p:cNvGrpSpPr/>
-        <p:nvPr/>
-      </p:nvGrpSpPr>
-      <p:grpSpPr/>
-      <p:sp>
-        <p:nvSpPr>
-          <p:cNvPr id="2" name="Rectangle 1"/>
-          <p:cNvSpPr/>
-          <p:nvPr/>
-        </p:nvSpPr>
-        <p:spPr>
-          <a:xfrm>
-            <a:off x="0" y="0"/>
-            <a:ext cx="12191695" cy="960120"/>
-          </a:xfrm>
-          <a:prstGeom prst="rect">
-            <a:avLst/>
-          </a:prstGeom>
-          <a:solidFill>
-            <a:srgbClr val="095292"/>
-          </a:solidFill>
-          <a:ln>
-            <a:noFill/>
-          </a:ln>
-        </p:spPr>
-        <p:style>
-          <a:lnRef idx="1">
-            <a:schemeClr val="accent1"/>
-          </a:lnRef>
-          <a:fillRef idx="3">
-            <a:schemeClr val="accent1"/>
-          </a:fillRef>
-          <a:effectRef idx="2">
-            <a:schemeClr val="accent1"/>
-          </a:effectRef>
-          <a:fontRef idx="minor">
-            <a:schemeClr val="lt1"/>
-          </a:fontRef>
-        </p:style>
-        <p:txBody>
-          <a:bodyPr rtlCol="0" anchor="ctr"/>
-          <a:lstStyle/>
-          <a:p>
-            <a:pPr algn="ctr"/>
-          </a:p>
-        </p:txBody>
-      </p:sp>
-      <p:sp>
-        <p:nvSpPr>
-          <p:cNvPr id="3" name="Rectangle 2"/>
-          <p:cNvSpPr/>
-          <p:nvPr/>
-        </p:nvSpPr>
-        <p:spPr>
-          <a:xfrm>
-            <a:off x="0" y="960120"/>
-            <a:ext cx="12191695" cy="41148"/>
-          </a:xfrm>
-          <a:prstGeom prst="rect">
-            <a:avLst/>
-          </a:prstGeom>
-          <a:solidFill>
-            <a:srgbClr val="FFD000"/>
-          </a:solidFill>
-          <a:ln>
-            <a:noFill/>
-          </a:ln>
-        </p:spPr>
-        <p:style>
-          <a:lnRef idx="1">
-            <a:schemeClr val="accent1"/>
-          </a:lnRef>
-          <a:fillRef idx="3">
-            <a:schemeClr val="accent1"/>
-          </a:fillRef>
-          <a:effectRef idx="2">
-            <a:schemeClr val="accent1"/>
-          </a:effectRef>
-          <a:fontRef idx="minor">
-            <a:schemeClr val="lt1"/>
-          </a:fontRef>
-        </p:style>
-        <p:txBody>
-          <a:bodyPr rtlCol="0" anchor="ctr"/>
-          <a:lstStyle/>
-          <a:p>
-            <a:pPr algn="ctr"/>
-          </a:p>
-        </p:txBody>
-      </p:sp>
-      <p:sp>
-        <p:nvSpPr>
-          <p:cNvPr id="4" name="TextBox 3"/>
-          <p:cNvSpPr txBox="1"/>
-          <p:nvPr/>
-        </p:nvSpPr>
-        <p:spPr>
-          <a:xfrm>
-            <a:off x="457200" y="164592"/>
-            <a:ext cx="11277295" cy="502920"/>
-          </a:xfrm>
-          <a:prstGeom prst="rect">
-            <a:avLst/>
-          </a:prstGeom>
-          <a:noFill/>
-        </p:spPr>
-        <p:txBody>
-          <a:bodyPr wrap="square">
-            <a:spAutoFit/>
-          </a:bodyPr>
-          <a:lstStyle/>
-          <a:p>
-            <a:r>
-              <a:rPr sz="2600" b="1" i="0">
-                <a:solidFill>
-                  <a:srgbClr val="FFFFFF"/>
-                </a:solidFill>
-                <a:latin typeface="Calibri"/>
-              </a:rPr>
-              <a:t>Taller PI — pasos guiados</a:t>
-            </a:r>
-          </a:p>
-        </p:txBody>
-      </p:sp>
-      <p:sp>
-        <p:nvSpPr>
-          <p:cNvPr id="5" name="Rounded Rectangle 4"/>
-          <p:cNvSpPr/>
-          <p:nvPr/>
-        </p:nvSpPr>
-        <p:spPr>
-          <a:xfrm>
-            <a:off x="457200" y="1234440"/>
-            <a:ext cx="11277295" cy="950976"/>
-          </a:xfrm>
-          <a:prstGeom prst="roundRect">
-            <a:avLst>
-              <a:gd name="adj" fmla="val 12000"/>
-            </a:avLst>
-          </a:prstGeom>
-          <a:solidFill>
-            <a:srgbClr val="F2F2F2"/>
-          </a:solidFill>
-          <a:ln>
-            <a:noFill/>
-          </a:ln>
-        </p:spPr>
-        <p:style>
-          <a:lnRef idx="1">
-            <a:schemeClr val="accent1"/>
-          </a:lnRef>
-          <a:fillRef idx="3">
-            <a:schemeClr val="accent1"/>
-          </a:fillRef>
-          <a:effectRef idx="2">
-            <a:schemeClr val="accent1"/>
-          </a:effectRef>
-          <a:fontRef idx="minor">
-            <a:schemeClr val="lt1"/>
-          </a:fontRef>
-        </p:style>
-        <p:txBody>
-          <a:bodyPr rtlCol="0" anchor="ctr"/>
-          <a:lstStyle/>
-          <a:p>
-            <a:pPr algn="ctr"/>
-          </a:p>
-        </p:txBody>
-      </p:sp>
-      <p:sp>
-        <p:nvSpPr>
-          <p:cNvPr id="6" name="Rounded Rectangle 5"/>
-          <p:cNvSpPr/>
-          <p:nvPr/>
-        </p:nvSpPr>
-        <p:spPr>
-          <a:xfrm>
-            <a:off x="594360" y="1490472"/>
-            <a:ext cx="438912" cy="438912"/>
-          </a:xfrm>
-          <a:prstGeom prst="roundRect">
-            <a:avLst>
-              <a:gd name="adj" fmla="val 12000"/>
-            </a:avLst>
-          </a:prstGeom>
-          <a:solidFill>
-            <a:srgbClr val="095292"/>
-          </a:solidFill>
-          <a:ln>
-            <a:noFill/>
-          </a:ln>
-        </p:spPr>
-        <p:style>
-          <a:lnRef idx="1">
-            <a:schemeClr val="accent1"/>
-          </a:lnRef>
-          <a:fillRef idx="3">
-            <a:schemeClr val="accent1"/>
-          </a:fillRef>
-          <a:effectRef idx="2">
-            <a:schemeClr val="accent1"/>
-          </a:effectRef>
-          <a:fontRef idx="minor">
-            <a:schemeClr val="lt1"/>
-          </a:fontRef>
-        </p:style>
-        <p:txBody>
-          <a:bodyPr rtlCol="0" anchor="ctr"/>
-          <a:lstStyle/>
-          <a:p>
-            <a:pPr algn="ctr"/>
-          </a:p>
-        </p:txBody>
-      </p:sp>
-      <p:sp>
-        <p:nvSpPr>
-          <p:cNvPr id="7" name="TextBox 6"/>
-          <p:cNvSpPr txBox="1"/>
-          <p:nvPr/>
-        </p:nvSpPr>
-        <p:spPr>
-          <a:xfrm>
-            <a:off x="594360" y="1490472"/>
-            <a:ext cx="438912" cy="438912"/>
-          </a:xfrm>
-          <a:prstGeom prst="rect">
-            <a:avLst/>
-          </a:prstGeom>
-          <a:noFill/>
-        </p:spPr>
-        <p:txBody>
-          <a:bodyPr wrap="square" anchor="ctr"/>
-          <a:lstStyle/>
-          <a:p>
-            <a:pPr algn="ctr"/>
-            <a:r>
-              <a:rPr sz="1600" b="1" i="0">
-                <a:solidFill>
-                  <a:srgbClr val="FFFFFF"/>
-                </a:solidFill>
-                <a:latin typeface="Calibri"/>
-              </a:rPr>
-              <a:t>1</a:t>
-            </a:r>
-          </a:p>
-        </p:txBody>
-      </p:sp>
-      <p:sp>
-        <p:nvSpPr>
-          <p:cNvPr id="8" name="TextBox 7"/>
-          <p:cNvSpPr txBox="1"/>
-          <p:nvPr/>
-        </p:nvSpPr>
-        <p:spPr>
-          <a:xfrm>
-            <a:off x="1188720" y="1325880"/>
-            <a:ext cx="10271455" cy="786384"/>
-          </a:xfrm>
-          <a:prstGeom prst="rect">
-            <a:avLst/>
-          </a:prstGeom>
-          <a:noFill/>
-        </p:spPr>
-        <p:txBody>
-          <a:bodyPr wrap="square" anchor="ctr"/>
-          <a:lstStyle/>
-          <a:p>
-            <a:r>
-              <a:rPr sz="1500" b="1" i="0">
-                <a:solidFill>
-                  <a:srgbClr val="095292"/>
-                </a:solidFill>
-                <a:latin typeface="Calibri"/>
-              </a:rPr>
-              <a:t>Paso 1: copie en la plantilla las cinco frases crudas de la entrevista al Dr. Ramirez y marque cada una como NECESIDAD, anotando al lado quien la dijo y en que contexto; esa columna es el origen y no se puede dejar vacia.</a:t>
-            </a:r>
-          </a:p>
-        </p:txBody>
-      </p:sp>
-      <p:sp>
-        <p:nvSpPr>
-          <p:cNvPr id="9" name="Rounded Rectangle 8"/>
-          <p:cNvSpPr/>
-          <p:nvPr/>
-        </p:nvSpPr>
-        <p:spPr>
-          <a:xfrm>
-            <a:off x="457200" y="2276856"/>
-            <a:ext cx="11277295" cy="950976"/>
-          </a:xfrm>
-          <a:prstGeom prst="roundRect">
-            <a:avLst>
-              <a:gd name="adj" fmla="val 12000"/>
-            </a:avLst>
-          </a:prstGeom>
-          <a:solidFill>
-            <a:srgbClr val="E8F4FA"/>
-          </a:solidFill>
-          <a:ln>
-            <a:noFill/>
-          </a:ln>
-        </p:spPr>
-        <p:style>
-          <a:lnRef idx="1">
-            <a:schemeClr val="accent1"/>
-          </a:lnRef>
-          <a:fillRef idx="3">
-            <a:schemeClr val="accent1"/>
-          </a:fillRef>
-          <a:effectRef idx="2">
-            <a:schemeClr val="accent1"/>
-          </a:effectRef>
-          <a:fontRef idx="minor">
-            <a:schemeClr val="lt1"/>
-          </a:fontRef>
-        </p:style>
-        <p:txBody>
-          <a:bodyPr rtlCol="0" anchor="ctr"/>
-          <a:lstStyle/>
-          <a:p>
-            <a:pPr algn="ctr"/>
-          </a:p>
-        </p:txBody>
-      </p:sp>
-      <p:sp>
-        <p:nvSpPr>
-          <p:cNvPr id="10" name="Rounded Rectangle 9"/>
-          <p:cNvSpPr/>
-          <p:nvPr/>
-        </p:nvSpPr>
-        <p:spPr>
-          <a:xfrm>
-            <a:off x="594360" y="2532888"/>
-            <a:ext cx="438912" cy="438912"/>
-          </a:xfrm>
-          <a:prstGeom prst="roundRect">
-            <a:avLst>
-              <a:gd name="adj" fmla="val 12000"/>
-            </a:avLst>
-          </a:prstGeom>
-          <a:solidFill>
-            <a:srgbClr val="095292"/>
-          </a:solidFill>
-          <a:ln>
-            <a:noFill/>
-          </a:ln>
-        </p:spPr>
-        <p:style>
-          <a:lnRef idx="1">
-            <a:schemeClr val="accent1"/>
-          </a:lnRef>
-          <a:fillRef idx="3">
-            <a:schemeClr val="accent1"/>
-          </a:fillRef>
-          <a:effectRef idx="2">
-            <a:schemeClr val="accent1"/>
-          </a:effectRef>
-          <a:fontRef idx="minor">
-            <a:schemeClr val="lt1"/>
-          </a:fontRef>
-        </p:style>
-        <p:txBody>
-          <a:bodyPr rtlCol="0" anchor="ctr"/>
-          <a:lstStyle/>
-          <a:p>
-            <a:pPr algn="ctr"/>
-          </a:p>
-        </p:txBody>
-      </p:sp>
-      <p:sp>
-        <p:nvSpPr>
-          <p:cNvPr id="11" name="TextBox 10"/>
-          <p:cNvSpPr txBox="1"/>
-          <p:nvPr/>
-        </p:nvSpPr>
-        <p:spPr>
-          <a:xfrm>
-            <a:off x="594360" y="2532888"/>
-            <a:ext cx="438912" cy="438912"/>
-          </a:xfrm>
-          <a:prstGeom prst="rect">
-            <a:avLst/>
-          </a:prstGeom>
-          <a:noFill/>
-        </p:spPr>
-        <p:txBody>
-          <a:bodyPr wrap="square" anchor="ctr"/>
-          <a:lstStyle/>
-          <a:p>
-            <a:pPr algn="ctr"/>
-            <a:r>
-              <a:rPr sz="1600" b="1" i="0">
-                <a:solidFill>
-                  <a:srgbClr val="FFFFFF"/>
-                </a:solidFill>
-                <a:latin typeface="Calibri"/>
-              </a:rPr>
-              <a:t>2</a:t>
-            </a:r>
-          </a:p>
-        </p:txBody>
-      </p:sp>
-      <p:sp>
-        <p:nvSpPr>
-          <p:cNvPr id="12" name="TextBox 11"/>
-          <p:cNvSpPr txBox="1"/>
-          <p:nvPr/>
-        </p:nvSpPr>
-        <p:spPr>
-          <a:xfrm>
-            <a:off x="1188720" y="2368296"/>
-            <a:ext cx="10271455" cy="786384"/>
-          </a:xfrm>
-          <a:prstGeom prst="rect">
-            <a:avLst/>
-          </a:prstGeom>
-          <a:noFill/>
-        </p:spPr>
-        <p:txBody>
-          <a:bodyPr wrap="square" anchor="ctr"/>
-          <a:lstStyle/>
-          <a:p>
-            <a:r>
-              <a:rPr sz="1400" b="1" i="0">
-                <a:solidFill>
-                  <a:srgbClr val="095292"/>
-                </a:solidFill>
-                <a:latin typeface="Calibri"/>
-              </a:rPr>
-              <a:t>Paso 2: traduzca las necesidades a requisitos funcionales usando la plantilla el sistema debe permitir a &lt;actor&gt; &lt;accion&gt; &lt;objeto&gt;, hasta llegar a minimo 8 RF numerados de RF-01 a RF-08; ningun RF puede contener la palabra y uniendo dos capacidades distintas.</a:t>
-            </a:r>
-          </a:p>
-        </p:txBody>
-      </p:sp>
-      <p:sp>
-        <p:nvSpPr>
-          <p:cNvPr id="13" name="Rounded Rectangle 12"/>
-          <p:cNvSpPr/>
-          <p:nvPr/>
-        </p:nvSpPr>
-        <p:spPr>
-          <a:xfrm>
-            <a:off x="457200" y="3319272"/>
-            <a:ext cx="11277295" cy="950976"/>
-          </a:xfrm>
-          <a:prstGeom prst="roundRect">
-            <a:avLst>
-              <a:gd name="adj" fmla="val 12000"/>
-            </a:avLst>
-          </a:prstGeom>
-          <a:solidFill>
-            <a:srgbClr val="F2F2F2"/>
-          </a:solidFill>
-          <a:ln>
-            <a:noFill/>
-          </a:ln>
-        </p:spPr>
-        <p:style>
-          <a:lnRef idx="1">
-            <a:schemeClr val="accent1"/>
-          </a:lnRef>
-          <a:fillRef idx="3">
-            <a:schemeClr val="accent1"/>
-          </a:fillRef>
-          <a:effectRef idx="2">
-            <a:schemeClr val="accent1"/>
-          </a:effectRef>
-          <a:fontRef idx="minor">
-            <a:schemeClr val="lt1"/>
-          </a:fontRef>
-        </p:style>
-        <p:txBody>
-          <a:bodyPr rtlCol="0" anchor="ctr"/>
-          <a:lstStyle/>
-          <a:p>
-            <a:pPr algn="ctr"/>
-          </a:p>
-        </p:txBody>
-      </p:sp>
-      <p:sp>
-        <p:nvSpPr>
-          <p:cNvPr id="14" name="Rounded Rectangle 13"/>
-          <p:cNvSpPr/>
-          <p:nvPr/>
-        </p:nvSpPr>
-        <p:spPr>
-          <a:xfrm>
-            <a:off x="594360" y="3575304"/>
-            <a:ext cx="438912" cy="438912"/>
-          </a:xfrm>
-          <a:prstGeom prst="roundRect">
-            <a:avLst>
-              <a:gd name="adj" fmla="val 12000"/>
-            </a:avLst>
-          </a:prstGeom>
-          <a:solidFill>
-            <a:srgbClr val="095292"/>
-          </a:solidFill>
-          <a:ln>
-            <a:noFill/>
-          </a:ln>
-        </p:spPr>
-        <p:style>
-          <a:lnRef idx="1">
-            <a:schemeClr val="accent1"/>
-          </a:lnRef>
-          <a:fillRef idx="3">
-            <a:schemeClr val="accent1"/>
-          </a:fillRef>
-          <a:effectRef idx="2">
-            <a:schemeClr val="accent1"/>
-          </a:effectRef>
-          <a:fontRef idx="minor">
-            <a:schemeClr val="lt1"/>
-          </a:fontRef>
-        </p:style>
-        <p:txBody>
-          <a:bodyPr rtlCol="0" anchor="ctr"/>
-          <a:lstStyle/>
-          <a:p>
-            <a:pPr algn="ctr"/>
-          </a:p>
-        </p:txBody>
-      </p:sp>
-      <p:sp>
-        <p:nvSpPr>
-          <p:cNvPr id="15" name="TextBox 14"/>
-          <p:cNvSpPr txBox="1"/>
-          <p:nvPr/>
-        </p:nvSpPr>
-        <p:spPr>
-          <a:xfrm>
-            <a:off x="594360" y="3575304"/>
-            <a:ext cx="438912" cy="438912"/>
-          </a:xfrm>
-          <a:prstGeom prst="rect">
-            <a:avLst/>
-          </a:prstGeom>
-          <a:noFill/>
-        </p:spPr>
-        <p:txBody>
-          <a:bodyPr wrap="square" anchor="ctr"/>
-          <a:lstStyle/>
-          <a:p>
-            <a:pPr algn="ctr"/>
-            <a:r>
-              <a:rPr sz="1600" b="1" i="0">
-                <a:solidFill>
-                  <a:srgbClr val="FFFFFF"/>
-                </a:solidFill>
-                <a:latin typeface="Calibri"/>
-              </a:rPr>
-              <a:t>3</a:t>
-            </a:r>
-          </a:p>
-        </p:txBody>
-      </p:sp>
-      <p:sp>
-        <p:nvSpPr>
-          <p:cNvPr id="16" name="TextBox 15"/>
-          <p:cNvSpPr txBox="1"/>
-          <p:nvPr/>
-        </p:nvSpPr>
-        <p:spPr>
-          <a:xfrm>
-            <a:off x="1188720" y="3410712"/>
-            <a:ext cx="10271455" cy="786384"/>
-          </a:xfrm>
-          <a:prstGeom prst="rect">
-            <a:avLst/>
-          </a:prstGeom>
-          <a:noFill/>
-        </p:spPr>
-        <p:txBody>
-          <a:bodyPr wrap="square" anchor="ctr"/>
-          <a:lstStyle/>
-          <a:p>
-            <a:r>
-              <a:rPr sz="1500" b="1" i="0">
-                <a:solidFill>
-                  <a:srgbClr val="095292"/>
-                </a:solidFill>
-                <a:latin typeface="Calibri"/>
-              </a:rPr>
-              <a:t>Paso 3: derive 4 RNF, uno por categoria (desempeno, control de acceso, usabilidad y respaldo), y escriba en cada uno al menos un numero: segundos, cantidad de registros, frecuencia o porcentaje.</a:t>
-            </a:r>
-          </a:p>
-        </p:txBody>
-      </p:sp>
-      <p:sp>
-        <p:nvSpPr>
-          <p:cNvPr id="17" name="Rounded Rectangle 16"/>
-          <p:cNvSpPr/>
-          <p:nvPr/>
-        </p:nvSpPr>
-        <p:spPr>
-          <a:xfrm>
-            <a:off x="457200" y="4361688"/>
-            <a:ext cx="11277295" cy="950976"/>
-          </a:xfrm>
-          <a:prstGeom prst="roundRect">
-            <a:avLst>
-              <a:gd name="adj" fmla="val 12000"/>
-            </a:avLst>
-          </a:prstGeom>
-          <a:solidFill>
-            <a:srgbClr val="E8F4FA"/>
-          </a:solidFill>
-          <a:ln>
-            <a:noFill/>
-          </a:ln>
-        </p:spPr>
-        <p:style>
-          <a:lnRef idx="1">
-            <a:schemeClr val="accent1"/>
-          </a:lnRef>
-          <a:fillRef idx="3">
-            <a:schemeClr val="accent1"/>
-          </a:fillRef>
-          <a:effectRef idx="2">
-            <a:schemeClr val="accent1"/>
-          </a:effectRef>
-          <a:fontRef idx="minor">
-            <a:schemeClr val="lt1"/>
-          </a:fontRef>
-        </p:style>
-        <p:txBody>
-          <a:bodyPr rtlCol="0" anchor="ctr"/>
-          <a:lstStyle/>
-          <a:p>
-            <a:pPr algn="ctr"/>
-          </a:p>
-        </p:txBody>
-      </p:sp>
-      <p:sp>
-        <p:nvSpPr>
-          <p:cNvPr id="18" name="Rounded Rectangle 17"/>
-          <p:cNvSpPr/>
-          <p:nvPr/>
-        </p:nvSpPr>
-        <p:spPr>
-          <a:xfrm>
-            <a:off x="594360" y="4617720"/>
-            <a:ext cx="438912" cy="438912"/>
-          </a:xfrm>
-          <a:prstGeom prst="roundRect">
-            <a:avLst>
-              <a:gd name="adj" fmla="val 12000"/>
-            </a:avLst>
-          </a:prstGeom>
-          <a:solidFill>
-            <a:srgbClr val="095292"/>
-          </a:solidFill>
-          <a:ln>
-            <a:noFill/>
-          </a:ln>
-        </p:spPr>
-        <p:style>
-          <a:lnRef idx="1">
-            <a:schemeClr val="accent1"/>
-          </a:lnRef>
-          <a:fillRef idx="3">
-            <a:schemeClr val="accent1"/>
-          </a:fillRef>
-          <a:effectRef idx="2">
-            <a:schemeClr val="accent1"/>
-          </a:effectRef>
-          <a:fontRef idx="minor">
-            <a:schemeClr val="lt1"/>
-          </a:fontRef>
-        </p:style>
-        <p:txBody>
-          <a:bodyPr rtlCol="0" anchor="ctr"/>
-          <a:lstStyle/>
-          <a:p>
-            <a:pPr algn="ctr"/>
-          </a:p>
-        </p:txBody>
-      </p:sp>
-      <p:sp>
-        <p:nvSpPr>
-          <p:cNvPr id="19" name="TextBox 18"/>
-          <p:cNvSpPr txBox="1"/>
-          <p:nvPr/>
-        </p:nvSpPr>
-        <p:spPr>
-          <a:xfrm>
-            <a:off x="594360" y="4617720"/>
-            <a:ext cx="438912" cy="438912"/>
-          </a:xfrm>
-          <a:prstGeom prst="rect">
-            <a:avLst/>
-          </a:prstGeom>
-          <a:noFill/>
-        </p:spPr>
-        <p:txBody>
-          <a:bodyPr wrap="square" anchor="ctr"/>
-          <a:lstStyle/>
-          <a:p>
-            <a:pPr algn="ctr"/>
-            <a:r>
-              <a:rPr sz="1600" b="1" i="0">
-                <a:solidFill>
-                  <a:srgbClr val="FFFFFF"/>
-                </a:solidFill>
-                <a:latin typeface="Calibri"/>
-              </a:rPr>
-              <a:t>4</a:t>
-            </a:r>
-          </a:p>
-        </p:txBody>
-      </p:sp>
-      <p:sp>
-        <p:nvSpPr>
-          <p:cNvPr id="20" name="TextBox 19"/>
-          <p:cNvSpPr txBox="1"/>
-          <p:nvPr/>
-        </p:nvSpPr>
-        <p:spPr>
-          <a:xfrm>
-            <a:off x="1188720" y="4453128"/>
-            <a:ext cx="10271455" cy="786384"/>
-          </a:xfrm>
-          <a:prstGeom prst="rect">
-            <a:avLst/>
-          </a:prstGeom>
-          <a:noFill/>
-        </p:spPr>
-        <p:txBody>
-          <a:bodyPr wrap="square" anchor="ctr"/>
-          <a:lstStyle/>
-          <a:p>
-            <a:r>
-              <a:rPr sz="1500" b="1" i="0">
-                <a:solidFill>
-                  <a:srgbClr val="095292"/>
-                </a:solidFill>
-                <a:latin typeface="Calibri"/>
-              </a:rPr>
-              <a:t>Paso 4: asigne prioridad MoSCoW a los 12 requisitos, verifique que los Must no pasen de seis y justifique en una linea por que los dos Won't quedan fuera de esta version de VetCare.</a:t>
-            </a:r>
-          </a:p>
-        </p:txBody>
-      </p:sp>
-      <p:sp>
-        <p:nvSpPr>
-          <p:cNvPr id="21" name="Rounded Rectangle 20"/>
-          <p:cNvSpPr/>
-          <p:nvPr/>
-        </p:nvSpPr>
-        <p:spPr>
-          <a:xfrm>
-            <a:off x="457200" y="5404104"/>
-            <a:ext cx="11277295" cy="950976"/>
-          </a:xfrm>
-          <a:prstGeom prst="roundRect">
-            <a:avLst>
-              <a:gd name="adj" fmla="val 12000"/>
-            </a:avLst>
-          </a:prstGeom>
-          <a:solidFill>
-            <a:srgbClr val="F2F2F2"/>
-          </a:solidFill>
-          <a:ln>
-            <a:noFill/>
-          </a:ln>
-        </p:spPr>
-        <p:style>
-          <a:lnRef idx="1">
-            <a:schemeClr val="accent1"/>
-          </a:lnRef>
-          <a:fillRef idx="3">
-            <a:schemeClr val="accent1"/>
-          </a:fillRef>
-          <a:effectRef idx="2">
-            <a:schemeClr val="accent1"/>
-          </a:effectRef>
-          <a:fontRef idx="minor">
-            <a:schemeClr val="lt1"/>
-          </a:fontRef>
-        </p:style>
-        <p:txBody>
-          <a:bodyPr rtlCol="0" anchor="ctr"/>
-          <a:lstStyle/>
-          <a:p>
-            <a:pPr algn="ctr"/>
-          </a:p>
-        </p:txBody>
-      </p:sp>
-      <p:sp>
-        <p:nvSpPr>
-          <p:cNvPr id="22" name="Rounded Rectangle 21"/>
-          <p:cNvSpPr/>
-          <p:nvPr/>
-        </p:nvSpPr>
-        <p:spPr>
-          <a:xfrm>
-            <a:off x="594360" y="5660136"/>
-            <a:ext cx="438912" cy="438912"/>
-          </a:xfrm>
-          <a:prstGeom prst="roundRect">
-            <a:avLst>
-              <a:gd name="adj" fmla="val 12000"/>
-            </a:avLst>
-          </a:prstGeom>
-          <a:solidFill>
-            <a:srgbClr val="095292"/>
-          </a:solidFill>
-          <a:ln>
-            <a:noFill/>
-          </a:ln>
-        </p:spPr>
-        <p:style>
-          <a:lnRef idx="1">
-            <a:schemeClr val="accent1"/>
-          </a:lnRef>
-          <a:fillRef idx="3">
-            <a:schemeClr val="accent1"/>
-          </a:fillRef>
-          <a:effectRef idx="2">
-            <a:schemeClr val="accent1"/>
-          </a:effectRef>
-          <a:fontRef idx="minor">
-            <a:schemeClr val="lt1"/>
-          </a:fontRef>
-        </p:style>
-        <p:txBody>
-          <a:bodyPr rtlCol="0" anchor="ctr"/>
-          <a:lstStyle/>
-          <a:p>
-            <a:pPr algn="ctr"/>
-          </a:p>
-        </p:txBody>
-      </p:sp>
-      <p:sp>
-        <p:nvSpPr>
-          <p:cNvPr id="23" name="TextBox 22"/>
-          <p:cNvSpPr txBox="1"/>
-          <p:nvPr/>
-        </p:nvSpPr>
-        <p:spPr>
-          <a:xfrm>
-            <a:off x="594360" y="5660136"/>
-            <a:ext cx="438912" cy="438912"/>
-          </a:xfrm>
-          <a:prstGeom prst="rect">
-            <a:avLst/>
-          </a:prstGeom>
-          <a:noFill/>
-        </p:spPr>
-        <p:txBody>
-          <a:bodyPr wrap="square" anchor="ctr"/>
-          <a:lstStyle/>
-          <a:p>
-            <a:pPr algn="ctr"/>
-            <a:r>
-              <a:rPr sz="1600" b="1" i="0">
-                <a:solidFill>
-                  <a:srgbClr val="FFFFFF"/>
-                </a:solidFill>
-                <a:latin typeface="Calibri"/>
-              </a:rPr>
-              <a:t>5</a:t>
-            </a:r>
-          </a:p>
-        </p:txBody>
-      </p:sp>
-      <p:sp>
-        <p:nvSpPr>
-          <p:cNvPr id="24" name="TextBox 23"/>
-          <p:cNvSpPr txBox="1"/>
-          <p:nvPr/>
-        </p:nvSpPr>
-        <p:spPr>
-          <a:xfrm>
-            <a:off x="1188720" y="5495544"/>
-            <a:ext cx="10271455" cy="786384"/>
-          </a:xfrm>
-          <a:prstGeom prst="rect">
-            <a:avLst/>
-          </a:prstGeom>
-          <a:noFill/>
-        </p:spPr>
-        <p:txBody>
-          <a:bodyPr wrap="square" anchor="ctr"/>
-          <a:lstStyle/>
-          <a:p>
-            <a:r>
-              <a:rPr sz="1500" b="1" i="0">
-                <a:solidFill>
-                  <a:srgbClr val="095292"/>
-                </a:solidFill>
-                <a:latin typeface="Calibri"/>
-              </a:rPr>
-              <a:t>Paso 5: complete la matriz de trazabilidad con las columnas Necesidad, RF/RNF, Pantalla prevista y Prueba de aceptacion, exporte el documento a PDF y subalo a la plataforma del curso con el nombre RF-RNF-VetCare-&lt;sus apellidos&gt;.pdf.</a:t>
-            </a:r>
-          </a:p>
-        </p:txBody>
-      </p:sp>
-      <p:sp>
-        <p:nvSpPr>
-          <p:cNvPr id="25" name="TextBox 24"/>
-          <p:cNvSpPr txBox="1"/>
-          <p:nvPr/>
-        </p:nvSpPr>
-        <p:spPr>
-          <a:xfrm>
-            <a:off x="11185855" y="6473952"/>
-            <a:ext cx="640080" cy="274320"/>
-          </a:xfrm>
-          <a:prstGeom prst="rect">
-            <a:avLst/>
-          </a:prstGeom>
-          <a:noFill/>
-        </p:spPr>
-        <p:txBody>
-          <a:bodyPr wrap="square">
-            <a:spAutoFit/>
-          </a:bodyPr>
-          <a:lstStyle/>
-          <a:p>
-            <a:pPr algn="r"/>
-            <a:r>
-              <a:rPr sz="1100" b="0" i="0">
-                <a:solidFill>
-                  <a:srgbClr val="666666"/>
-                </a:solidFill>
-                <a:latin typeface="Calibri"/>
-              </a:rPr>
-              <a:t>20</a:t>
-            </a:r>
-          </a:p>
-        </p:txBody>
-      </p:sp>
-    </p:spTree>
-  </p:cSld>
-  <p:clrMapOvr>
-    <a:masterClrMapping/>
-  </p:clrMapOvr>
-</p:sld>
-</file>
-
-<file path=ppt/slides/slide21.xml><?xml version="1.0" encoding="utf-8"?>
-<p:sld xmlns:a="http://schemas.openxmlformats.org/drawingml/2006/main" xmlns:p="http://schemas.openxmlformats.org/presentationml/2006/main" xmlns:r="http://schemas.openxmlformats.org/officeDocument/2006/relationships">
-  <p:cSld>
-    <p:bg>
-      <p:bgPr>
-        <a:solidFill>
-          <a:srgbClr val="FFFFFF"/>
-        </a:solidFill>
-        <a:effectLst/>
-      </p:bgPr>
-    </p:bg>
-    <p:spTree>
-      <p:nvGrpSpPr>
-        <p:cNvPr id="1" name=""/>
-        <p:cNvGrpSpPr/>
-        <p:nvPr/>
-      </p:nvGrpSpPr>
-      <p:grpSpPr/>
-      <p:sp>
-        <p:nvSpPr>
-          <p:cNvPr id="2" name="Rectangle 1"/>
-          <p:cNvSpPr/>
-          <p:nvPr/>
-        </p:nvSpPr>
-        <p:spPr>
-          <a:xfrm>
-            <a:off x="0" y="0"/>
-            <a:ext cx="12191695" cy="960120"/>
-          </a:xfrm>
-          <a:prstGeom prst="rect">
-            <a:avLst/>
-          </a:prstGeom>
-          <a:solidFill>
-            <a:srgbClr val="095292"/>
-          </a:solidFill>
-          <a:ln>
-            <a:noFill/>
-          </a:ln>
-        </p:spPr>
-        <p:style>
-          <a:lnRef idx="1">
-            <a:schemeClr val="accent1"/>
-          </a:lnRef>
-          <a:fillRef idx="3">
-            <a:schemeClr val="accent1"/>
-          </a:fillRef>
-          <a:effectRef idx="2">
-            <a:schemeClr val="accent1"/>
-          </a:effectRef>
-          <a:fontRef idx="minor">
-            <a:schemeClr val="lt1"/>
-          </a:fontRef>
-        </p:style>
-        <p:txBody>
-          <a:bodyPr rtlCol="0" anchor="ctr"/>
-          <a:lstStyle/>
-          <a:p>
-            <a:pPr algn="ctr"/>
-          </a:p>
-        </p:txBody>
-      </p:sp>
-      <p:sp>
-        <p:nvSpPr>
-          <p:cNvPr id="3" name="Rectangle 2"/>
-          <p:cNvSpPr/>
-          <p:nvPr/>
-        </p:nvSpPr>
-        <p:spPr>
-          <a:xfrm>
-            <a:off x="0" y="960120"/>
-            <a:ext cx="12191695" cy="41148"/>
-          </a:xfrm>
-          <a:prstGeom prst="rect">
-            <a:avLst/>
-          </a:prstGeom>
-          <a:solidFill>
-            <a:srgbClr val="FFD000"/>
-          </a:solidFill>
-          <a:ln>
-            <a:noFill/>
-          </a:ln>
-        </p:spPr>
-        <p:style>
-          <a:lnRef idx="1">
-            <a:schemeClr val="accent1"/>
-          </a:lnRef>
-          <a:fillRef idx="3">
-            <a:schemeClr val="accent1"/>
-          </a:fillRef>
-          <a:effectRef idx="2">
-            <a:schemeClr val="accent1"/>
-          </a:effectRef>
-          <a:fontRef idx="minor">
-            <a:schemeClr val="lt1"/>
-          </a:fontRef>
-        </p:style>
-        <p:txBody>
-          <a:bodyPr rtlCol="0" anchor="ctr"/>
-          <a:lstStyle/>
-          <a:p>
-            <a:pPr algn="ctr"/>
-          </a:p>
-        </p:txBody>
-      </p:sp>
-      <p:sp>
-        <p:nvSpPr>
-          <p:cNvPr id="4" name="TextBox 3"/>
-          <p:cNvSpPr txBox="1"/>
-          <p:nvPr/>
-        </p:nvSpPr>
-        <p:spPr>
-          <a:xfrm>
-            <a:off x="457200" y="164592"/>
-            <a:ext cx="11277295" cy="502920"/>
-          </a:xfrm>
-          <a:prstGeom prst="rect">
-            <a:avLst/>
-          </a:prstGeom>
-          <a:noFill/>
-        </p:spPr>
-        <p:txBody>
-          <a:bodyPr wrap="square">
-            <a:spAutoFit/>
-          </a:bodyPr>
-          <a:lstStyle/>
-          <a:p>
-            <a:r>
-              <a:rPr sz="2600" b="1" i="0">
-                <a:solidFill>
-                  <a:srgbClr val="FFFFFF"/>
-                </a:solidFill>
-                <a:latin typeface="Calibri"/>
-              </a:rPr>
-              <a:t>Antes de entregar — autochequeo</a:t>
-            </a:r>
-          </a:p>
-        </p:txBody>
-      </p:sp>
-      <p:sp>
-        <p:nvSpPr>
-          <p:cNvPr id="5" name="Rounded Rectangle 4"/>
-          <p:cNvSpPr/>
-          <p:nvPr/>
-        </p:nvSpPr>
-        <p:spPr>
-          <a:xfrm>
-            <a:off x="457200" y="1261872"/>
-            <a:ext cx="11277295" cy="566928"/>
-          </a:xfrm>
-          <a:prstGeom prst="roundRect">
-            <a:avLst>
-              <a:gd name="adj" fmla="val 12000"/>
-            </a:avLst>
-          </a:prstGeom>
-          <a:solidFill>
-            <a:srgbClr val="F2F2F2"/>
-          </a:solidFill>
-          <a:ln>
-            <a:noFill/>
-          </a:ln>
-        </p:spPr>
-        <p:style>
-          <a:lnRef idx="1">
-            <a:schemeClr val="accent1"/>
-          </a:lnRef>
-          <a:fillRef idx="3">
-            <a:schemeClr val="accent1"/>
-          </a:fillRef>
-          <a:effectRef idx="2">
-            <a:schemeClr val="accent1"/>
-          </a:effectRef>
-          <a:fontRef idx="minor">
-            <a:schemeClr val="lt1"/>
-          </a:fontRef>
-        </p:style>
-        <p:txBody>
-          <a:bodyPr rtlCol="0" anchor="ctr"/>
-          <a:lstStyle/>
-          <a:p>
-            <a:pPr algn="ctr"/>
-          </a:p>
-        </p:txBody>
-      </p:sp>
-      <p:sp>
-        <p:nvSpPr>
-          <p:cNvPr id="6" name="Rectangle 5"/>
-          <p:cNvSpPr/>
-          <p:nvPr/>
-        </p:nvSpPr>
-        <p:spPr>
-          <a:xfrm>
-            <a:off x="640080" y="1408175"/>
-            <a:ext cx="274320" cy="274320"/>
-          </a:xfrm>
-          <a:prstGeom prst="rect">
-            <a:avLst/>
-          </a:prstGeom>
-          <a:solidFill>
-            <a:srgbClr val="FFFFFF"/>
-          </a:solidFill>
-          <a:ln>
-            <a:solidFill>
-              <a:srgbClr val="333333"/>
-            </a:solidFill>
-          </a:ln>
-        </p:spPr>
-        <p:style>
-          <a:lnRef idx="1">
-            <a:schemeClr val="accent1"/>
-          </a:lnRef>
-          <a:fillRef idx="3">
-            <a:schemeClr val="accent1"/>
-          </a:fillRef>
-          <a:effectRef idx="2">
-            <a:schemeClr val="accent1"/>
-          </a:effectRef>
-          <a:fontRef idx="minor">
-            <a:schemeClr val="lt1"/>
-          </a:fontRef>
-        </p:style>
-        <p:txBody>
-          <a:bodyPr rtlCol="0" anchor="ctr"/>
-          <a:lstStyle/>
-          <a:p>
-            <a:pPr algn="ctr"/>
-          </a:p>
-        </p:txBody>
-      </p:sp>
-      <p:sp>
-        <p:nvSpPr>
-          <p:cNvPr id="7" name="Rectangle 6"/>
-          <p:cNvSpPr/>
-          <p:nvPr/>
-        </p:nvSpPr>
-        <p:spPr>
-          <a:xfrm>
-            <a:off x="640080" y="1408175"/>
-            <a:ext cx="73152" cy="274320"/>
-          </a:xfrm>
-          <a:prstGeom prst="rect">
-            <a:avLst/>
-          </a:prstGeom>
-          <a:solidFill>
-            <a:srgbClr val="269CCB"/>
-          </a:solidFill>
-          <a:ln>
-            <a:noFill/>
-          </a:ln>
-        </p:spPr>
-        <p:style>
-          <a:lnRef idx="1">
-            <a:schemeClr val="accent1"/>
-          </a:lnRef>
-          <a:fillRef idx="3">
-            <a:schemeClr val="accent1"/>
-          </a:fillRef>
-          <a:effectRef idx="2">
-            <a:schemeClr val="accent1"/>
-          </a:effectRef>
-          <a:fontRef idx="minor">
-            <a:schemeClr val="lt1"/>
-          </a:fontRef>
-        </p:style>
-        <p:txBody>
-          <a:bodyPr rtlCol="0" anchor="ctr"/>
-          <a:lstStyle/>
-          <a:p>
-            <a:pPr algn="ctr"/>
-          </a:p>
-        </p:txBody>
-      </p:sp>
-      <p:sp>
-        <p:nvSpPr>
-          <p:cNvPr id="8" name="TextBox 7"/>
-          <p:cNvSpPr txBox="1"/>
-          <p:nvPr/>
-        </p:nvSpPr>
-        <p:spPr>
-          <a:xfrm>
-            <a:off x="1097280" y="1353312"/>
-            <a:ext cx="10362895" cy="402336"/>
-          </a:xfrm>
-          <a:prstGeom prst="rect">
-            <a:avLst/>
-          </a:prstGeom>
-          <a:noFill/>
-        </p:spPr>
-        <p:txBody>
-          <a:bodyPr wrap="square" anchor="ctr"/>
-          <a:lstStyle/>
-          <a:p>
-            <a:r>
-              <a:rPr sz="1500" b="0" i="0">
-                <a:solidFill>
-                  <a:srgbClr val="333333"/>
-                </a:solidFill>
-                <a:latin typeface="Calibri"/>
-              </a:rPr>
-              <a:t>Con que prueba concreta, hecha en menos de dos minutos delante del Dr. Ramirez, demostraria que este requisito quedo cumplido?</a:t>
-            </a:r>
-          </a:p>
-        </p:txBody>
-      </p:sp>
-      <p:sp>
-        <p:nvSpPr>
-          <p:cNvPr id="9" name="Rounded Rectangle 8"/>
-          <p:cNvSpPr/>
-          <p:nvPr/>
-        </p:nvSpPr>
-        <p:spPr>
-          <a:xfrm>
-            <a:off x="457200" y="1938528"/>
-            <a:ext cx="11277295" cy="566928"/>
-          </a:xfrm>
-          <a:prstGeom prst="roundRect">
-            <a:avLst>
-              <a:gd name="adj" fmla="val 12000"/>
-            </a:avLst>
-          </a:prstGeom>
-          <a:solidFill>
-            <a:srgbClr val="F2F2F2"/>
-          </a:solidFill>
-          <a:ln>
-            <a:noFill/>
-          </a:ln>
-        </p:spPr>
-        <p:style>
-          <a:lnRef idx="1">
-            <a:schemeClr val="accent1"/>
-          </a:lnRef>
-          <a:fillRef idx="3">
-            <a:schemeClr val="accent1"/>
-          </a:fillRef>
-          <a:effectRef idx="2">
-            <a:schemeClr val="accent1"/>
-          </a:effectRef>
-          <a:fontRef idx="minor">
-            <a:schemeClr val="lt1"/>
-          </a:fontRef>
-        </p:style>
-        <p:txBody>
-          <a:bodyPr rtlCol="0" anchor="ctr"/>
-          <a:lstStyle/>
-          <a:p>
-            <a:pPr algn="ctr"/>
-          </a:p>
-        </p:txBody>
-      </p:sp>
-      <p:sp>
-        <p:nvSpPr>
-          <p:cNvPr id="10" name="Rectangle 9"/>
-          <p:cNvSpPr/>
-          <p:nvPr/>
-        </p:nvSpPr>
-        <p:spPr>
-          <a:xfrm>
-            <a:off x="640080" y="2084832"/>
-            <a:ext cx="274320" cy="274320"/>
-          </a:xfrm>
-          <a:prstGeom prst="rect">
-            <a:avLst/>
-          </a:prstGeom>
-          <a:solidFill>
-            <a:srgbClr val="FFFFFF"/>
-          </a:solidFill>
-          <a:ln>
-            <a:solidFill>
-              <a:srgbClr val="333333"/>
-            </a:solidFill>
-          </a:ln>
-        </p:spPr>
-        <p:style>
-          <a:lnRef idx="1">
-            <a:schemeClr val="accent1"/>
-          </a:lnRef>
-          <a:fillRef idx="3">
-            <a:schemeClr val="accent1"/>
-          </a:fillRef>
-          <a:effectRef idx="2">
-            <a:schemeClr val="accent1"/>
-          </a:effectRef>
-          <a:fontRef idx="minor">
-            <a:schemeClr val="lt1"/>
-          </a:fontRef>
-        </p:style>
-        <p:txBody>
-          <a:bodyPr rtlCol="0" anchor="ctr"/>
-          <a:lstStyle/>
-          <a:p>
-            <a:pPr algn="ctr"/>
-          </a:p>
-        </p:txBody>
-      </p:sp>
-      <p:sp>
-        <p:nvSpPr>
-          <p:cNvPr id="11" name="Rectangle 10"/>
-          <p:cNvSpPr/>
-          <p:nvPr/>
-        </p:nvSpPr>
-        <p:spPr>
-          <a:xfrm>
-            <a:off x="640080" y="2084832"/>
-            <a:ext cx="73152" cy="274320"/>
-          </a:xfrm>
-          <a:prstGeom prst="rect">
-            <a:avLst/>
-          </a:prstGeom>
-          <a:solidFill>
-            <a:srgbClr val="269CCB"/>
-          </a:solidFill>
-          <a:ln>
-            <a:noFill/>
-          </a:ln>
-        </p:spPr>
-        <p:style>
-          <a:lnRef idx="1">
-            <a:schemeClr val="accent1"/>
-          </a:lnRef>
-          <a:fillRef idx="3">
-            <a:schemeClr val="accent1"/>
-          </a:fillRef>
-          <a:effectRef idx="2">
-            <a:schemeClr val="accent1"/>
-          </a:effectRef>
-          <a:fontRef idx="minor">
-            <a:schemeClr val="lt1"/>
-          </a:fontRef>
-        </p:style>
-        <p:txBody>
-          <a:bodyPr rtlCol="0" anchor="ctr"/>
-          <a:lstStyle/>
-          <a:p>
-            <a:pPr algn="ctr"/>
-          </a:p>
-        </p:txBody>
-      </p:sp>
-      <p:sp>
-        <p:nvSpPr>
-          <p:cNvPr id="12" name="TextBox 11"/>
-          <p:cNvSpPr txBox="1"/>
-          <p:nvPr/>
-        </p:nvSpPr>
-        <p:spPr>
-          <a:xfrm>
-            <a:off x="1097280" y="2029968"/>
-            <a:ext cx="10362895" cy="402336"/>
-          </a:xfrm>
-          <a:prstGeom prst="rect">
-            <a:avLst/>
-          </a:prstGeom>
-          <a:noFill/>
-        </p:spPr>
-        <p:txBody>
-          <a:bodyPr wrap="square" anchor="ctr"/>
-          <a:lstStyle/>
-          <a:p>
-            <a:r>
-              <a:rPr sz="1500" b="0" i="0">
-                <a:solidFill>
-                  <a:srgbClr val="333333"/>
-                </a:solidFill>
-                <a:latin typeface="Calibri"/>
-              </a:rPr>
-              <a:t>Si borro este requisito de la lista, VetCare deja de resolver alguno de los tres dolores de Huellitas o solamente queda menos vistoso?</a:t>
-            </a:r>
-          </a:p>
-        </p:txBody>
-      </p:sp>
-      <p:sp>
-        <p:nvSpPr>
-          <p:cNvPr id="13" name="Rounded Rectangle 12"/>
-          <p:cNvSpPr/>
-          <p:nvPr/>
-        </p:nvSpPr>
-        <p:spPr>
-          <a:xfrm>
-            <a:off x="457200" y="2615184"/>
-            <a:ext cx="11277295" cy="566928"/>
-          </a:xfrm>
-          <a:prstGeom prst="roundRect">
-            <a:avLst>
-              <a:gd name="adj" fmla="val 12000"/>
-            </a:avLst>
-          </a:prstGeom>
-          <a:solidFill>
-            <a:srgbClr val="F2F2F2"/>
-          </a:solidFill>
-          <a:ln>
-            <a:noFill/>
-          </a:ln>
-        </p:spPr>
-        <p:style>
-          <a:lnRef idx="1">
-            <a:schemeClr val="accent1"/>
-          </a:lnRef>
-          <a:fillRef idx="3">
-            <a:schemeClr val="accent1"/>
-          </a:fillRef>
-          <a:effectRef idx="2">
-            <a:schemeClr val="accent1"/>
-          </a:effectRef>
-          <a:fontRef idx="minor">
-            <a:schemeClr val="lt1"/>
-          </a:fontRef>
-        </p:style>
-        <p:txBody>
-          <a:bodyPr rtlCol="0" anchor="ctr"/>
-          <a:lstStyle/>
-          <a:p>
-            <a:pPr algn="ctr"/>
-          </a:p>
-        </p:txBody>
-      </p:sp>
-      <p:sp>
-        <p:nvSpPr>
-          <p:cNvPr id="14" name="Rectangle 13"/>
-          <p:cNvSpPr/>
-          <p:nvPr/>
-        </p:nvSpPr>
-        <p:spPr>
-          <a:xfrm>
-            <a:off x="640080" y="2761488"/>
-            <a:ext cx="274320" cy="274320"/>
-          </a:xfrm>
-          <a:prstGeom prst="rect">
-            <a:avLst/>
-          </a:prstGeom>
-          <a:solidFill>
-            <a:srgbClr val="FFFFFF"/>
-          </a:solidFill>
-          <a:ln>
-            <a:solidFill>
-              <a:srgbClr val="333333"/>
-            </a:solidFill>
-          </a:ln>
-        </p:spPr>
-        <p:style>
-          <a:lnRef idx="1">
-            <a:schemeClr val="accent1"/>
-          </a:lnRef>
-          <a:fillRef idx="3">
-            <a:schemeClr val="accent1"/>
-          </a:fillRef>
-          <a:effectRef idx="2">
-            <a:schemeClr val="accent1"/>
-          </a:effectRef>
-          <a:fontRef idx="minor">
-            <a:schemeClr val="lt1"/>
-          </a:fontRef>
-        </p:style>
-        <p:txBody>
-          <a:bodyPr rtlCol="0" anchor="ctr"/>
-          <a:lstStyle/>
-          <a:p>
-            <a:pPr algn="ctr"/>
-          </a:p>
-        </p:txBody>
-      </p:sp>
-      <p:sp>
-        <p:nvSpPr>
-          <p:cNvPr id="15" name="Rectangle 14"/>
-          <p:cNvSpPr/>
-          <p:nvPr/>
-        </p:nvSpPr>
-        <p:spPr>
-          <a:xfrm>
-            <a:off x="640080" y="2761488"/>
-            <a:ext cx="73152" cy="274320"/>
-          </a:xfrm>
-          <a:prstGeom prst="rect">
-            <a:avLst/>
-          </a:prstGeom>
-          <a:solidFill>
-            <a:srgbClr val="269CCB"/>
-          </a:solidFill>
-          <a:ln>
-            <a:noFill/>
-          </a:ln>
-        </p:spPr>
-        <p:style>
-          <a:lnRef idx="1">
-            <a:schemeClr val="accent1"/>
-          </a:lnRef>
-          <a:fillRef idx="3">
-            <a:schemeClr val="accent1"/>
-          </a:fillRef>
-          <a:effectRef idx="2">
-            <a:schemeClr val="accent1"/>
-          </a:effectRef>
-          <a:fontRef idx="minor">
-            <a:schemeClr val="lt1"/>
-          </a:fontRef>
-        </p:style>
-        <p:txBody>
-          <a:bodyPr rtlCol="0" anchor="ctr"/>
-          <a:lstStyle/>
-          <a:p>
-            <a:pPr algn="ctr"/>
-          </a:p>
-        </p:txBody>
-      </p:sp>
-      <p:sp>
-        <p:nvSpPr>
-          <p:cNvPr id="16" name="TextBox 15"/>
-          <p:cNvSpPr txBox="1"/>
-          <p:nvPr/>
-        </p:nvSpPr>
-        <p:spPr>
-          <a:xfrm>
-            <a:off x="1097280" y="2706624"/>
-            <a:ext cx="10362895" cy="402336"/>
-          </a:xfrm>
-          <a:prstGeom prst="rect">
-            <a:avLst/>
-          </a:prstGeom>
-          <a:noFill/>
-        </p:spPr>
-        <p:txBody>
-          <a:bodyPr wrap="square" anchor="ctr"/>
-          <a:lstStyle/>
-          <a:p>
-            <a:r>
-              <a:rPr sz="1500" b="0" i="0">
-                <a:solidFill>
-                  <a:srgbClr val="333333"/>
-                </a:solidFill>
-                <a:latin typeface="Calibri"/>
-              </a:rPr>
-              <a:t>Esta frase describe una sola accion de un solo actor, o estoy escondiendo dos o tres requisitos detras de una y?</a:t>
-            </a:r>
-          </a:p>
-        </p:txBody>
-      </p:sp>
-      <p:sp>
-        <p:nvSpPr>
-          <p:cNvPr id="17" name="TextBox 16"/>
-          <p:cNvSpPr txBox="1"/>
-          <p:nvPr/>
-        </p:nvSpPr>
-        <p:spPr>
-          <a:xfrm>
-            <a:off x="11185855" y="6473952"/>
-            <a:ext cx="640080" cy="274320"/>
-          </a:xfrm>
-          <a:prstGeom prst="rect">
-            <a:avLst/>
-          </a:prstGeom>
-          <a:noFill/>
-        </p:spPr>
-        <p:txBody>
-          <a:bodyPr wrap="square">
-            <a:spAutoFit/>
-          </a:bodyPr>
-          <a:lstStyle/>
-          <a:p>
-            <a:pPr algn="r"/>
-            <a:r>
-              <a:rPr sz="1100" b="0" i="0">
-                <a:solidFill>
-                  <a:srgbClr val="666666"/>
-                </a:solidFill>
-                <a:latin typeface="Calibri"/>
-              </a:rPr>
-              <a:t>21</a:t>
-            </a:r>
-          </a:p>
-        </p:txBody>
-      </p:sp>
-    </p:spTree>
-  </p:cSld>
-  <p:clrMapOvr>
-    <a:masterClrMapping/>
-  </p:clrMapOvr>
-</p:sld>
-</file>
-
-<file path=ppt/slides/slide22.xml><?xml version="1.0" encoding="utf-8"?>
-<p:sld xmlns:a="http://schemas.openxmlformats.org/drawingml/2006/main" xmlns:p="http://schemas.openxmlformats.org/presentationml/2006/main" xmlns:r="http://schemas.openxmlformats.org/officeDocument/2006/relationships">
-  <p:cSld>
-    <p:bg>
-      <p:bgPr>
-        <a:solidFill>
-          <a:srgbClr val="FFFFFF"/>
-        </a:solidFill>
-        <a:effectLst/>
-      </p:bgPr>
-    </p:bg>
-    <p:spTree>
-      <p:nvGrpSpPr>
-        <p:cNvPr id="1" name=""/>
-        <p:cNvGrpSpPr/>
-        <p:nvPr/>
-      </p:nvGrpSpPr>
-      <p:grpSpPr/>
-      <p:sp>
-        <p:nvSpPr>
-          <p:cNvPr id="2" name="Rectangle 1"/>
-          <p:cNvSpPr/>
-          <p:nvPr/>
-        </p:nvSpPr>
-        <p:spPr>
-          <a:xfrm>
-            <a:off x="0" y="0"/>
-            <a:ext cx="12191695" cy="960120"/>
-          </a:xfrm>
-          <a:prstGeom prst="rect">
-            <a:avLst/>
-          </a:prstGeom>
-          <a:solidFill>
-            <a:srgbClr val="095292"/>
-          </a:solidFill>
-          <a:ln>
-            <a:noFill/>
-          </a:ln>
-        </p:spPr>
-        <p:style>
-          <a:lnRef idx="1">
-            <a:schemeClr val="accent1"/>
-          </a:lnRef>
-          <a:fillRef idx="3">
-            <a:schemeClr val="accent1"/>
-          </a:fillRef>
-          <a:effectRef idx="2">
-            <a:schemeClr val="accent1"/>
-          </a:effectRef>
-          <a:fontRef idx="minor">
-            <a:schemeClr val="lt1"/>
-          </a:fontRef>
-        </p:style>
-        <p:txBody>
-          <a:bodyPr rtlCol="0" anchor="ctr"/>
-          <a:lstStyle/>
-          <a:p>
-            <a:pPr algn="ctr"/>
-          </a:p>
-        </p:txBody>
-      </p:sp>
-      <p:sp>
-        <p:nvSpPr>
-          <p:cNvPr id="3" name="Rectangle 2"/>
-          <p:cNvSpPr/>
-          <p:nvPr/>
-        </p:nvSpPr>
-        <p:spPr>
-          <a:xfrm>
-            <a:off x="0" y="960120"/>
-            <a:ext cx="12191695" cy="41148"/>
-          </a:xfrm>
-          <a:prstGeom prst="rect">
-            <a:avLst/>
-          </a:prstGeom>
-          <a:solidFill>
-            <a:srgbClr val="FFD000"/>
-          </a:solidFill>
-          <a:ln>
-            <a:noFill/>
-          </a:ln>
-        </p:spPr>
-        <p:style>
-          <a:lnRef idx="1">
-            <a:schemeClr val="accent1"/>
-          </a:lnRef>
-          <a:fillRef idx="3">
-            <a:schemeClr val="accent1"/>
-          </a:fillRef>
-          <a:effectRef idx="2">
-            <a:schemeClr val="accent1"/>
-          </a:effectRef>
-          <a:fontRef idx="minor">
-            <a:schemeClr val="lt1"/>
-          </a:fontRef>
-        </p:style>
-        <p:txBody>
-          <a:bodyPr rtlCol="0" anchor="ctr"/>
-          <a:lstStyle/>
-          <a:p>
-            <a:pPr algn="ctr"/>
-          </a:p>
-        </p:txBody>
-      </p:sp>
-      <p:sp>
-        <p:nvSpPr>
-          <p:cNvPr id="4" name="TextBox 3"/>
-          <p:cNvSpPr txBox="1"/>
-          <p:nvPr/>
-        </p:nvSpPr>
-        <p:spPr>
-          <a:xfrm>
-            <a:off x="457200" y="164592"/>
-            <a:ext cx="11277295" cy="502920"/>
-          </a:xfrm>
-          <a:prstGeom prst="rect">
-            <a:avLst/>
-          </a:prstGeom>
-          <a:noFill/>
-        </p:spPr>
-        <p:txBody>
-          <a:bodyPr wrap="square">
-            <a:spAutoFit/>
-          </a:bodyPr>
-          <a:lstStyle/>
-          <a:p>
-            <a:r>
-              <a:rPr sz="2600" b="1" i="0">
-                <a:solidFill>
-                  <a:srgbClr val="FFFFFF"/>
-                </a:solidFill>
-                <a:latin typeface="Calibri"/>
-              </a:rPr>
-              <a:t>Criterios de exito / entregable</a:t>
-            </a:r>
-          </a:p>
-        </p:txBody>
-      </p:sp>
-      <p:sp>
-        <p:nvSpPr>
-          <p:cNvPr id="5" name="TextBox 4"/>
-          <p:cNvSpPr txBox="1"/>
-          <p:nvPr/>
-        </p:nvSpPr>
-        <p:spPr>
-          <a:xfrm>
-            <a:off x="457200" y="1170432"/>
-            <a:ext cx="11277295" cy="5230368"/>
-          </a:xfrm>
-          <a:prstGeom prst="rect">
-            <a:avLst/>
-          </a:prstGeom>
-          <a:noFill/>
-        </p:spPr>
-        <p:txBody>
-          <a:bodyPr wrap="square">
-            <a:spAutoFit/>
-          </a:bodyPr>
-          <a:lstStyle/>
-          <a:p>
-            <a:pPr>
-              <a:spcAft>
-                <a:spcPts val="800"/>
-              </a:spcAft>
-            </a:pPr>
-            <a:r>
-              <a:rPr sz="2000" b="0" i="0">
-                <a:solidFill>
-                  <a:srgbClr val="333333"/>
-                </a:solidFill>
-                <a:latin typeface="Calibri"/>
-              </a:rPr>
-              <a:t>–   </a:t>
-            </a:r>
-            <a:r>
-              <a:rPr sz="2000" b="1" i="0">
-                <a:solidFill>
-                  <a:srgbClr val="333333"/>
-                </a:solidFill>
-                <a:latin typeface="Calibri"/>
-              </a:rPr>
-              <a:t>Entregable:</a:t>
-            </a:r>
-            <a:r>
-              <a:rPr sz="2000" b="0" i="0">
-                <a:solidFill>
-                  <a:srgbClr val="333333"/>
-                </a:solidFill>
-                <a:latin typeface="Calibri"/>
-              </a:rPr>
-              <a:t> Documento de requisitos de VetCare en PDF, con minimo 8 RF, 4 RNF cuantificados, priorizacion MoSCoW y matriz de trazabilidad, subido a la plataforma del curso.</a:t>
-            </a:r>
-          </a:p>
-          <a:p>
-            <a:pPr>
-              <a:spcAft>
-                <a:spcPts val="800"/>
-              </a:spcAft>
-            </a:pPr>
-            <a:r>
-              <a:rPr sz="2000" b="0" i="0">
-                <a:solidFill>
-                  <a:srgbClr val="333333"/>
-                </a:solidFill>
-                <a:latin typeface="Calibri"/>
-              </a:rPr>
-              <a:t>–   </a:t>
-            </a:r>
-            <a:r>
-              <a:rPr sz="2000" b="1" i="0">
-                <a:solidFill>
-                  <a:srgbClr val="333333"/>
-                </a:solidFill>
-                <a:latin typeface="Calibri"/>
-              </a:rPr>
-              <a:t>Exito:</a:t>
-            </a:r>
-            <a:r>
-              <a:rPr sz="2000" b="0" i="0">
-                <a:solidFill>
-                  <a:srgbClr val="333333"/>
-                </a:solidFill>
-                <a:latin typeface="Calibri"/>
-              </a:rPr>
-              <a:t> El documento tiene minimo 8 RF y 4 RNF, todos con ID unico, actor explicito y redaccion en plantilla.</a:t>
-            </a:r>
-          </a:p>
-          <a:p>
-            <a:pPr>
-              <a:spcAft>
-                <a:spcPts val="800"/>
-              </a:spcAft>
-            </a:pPr>
-            <a:r>
-              <a:rPr sz="2000" b="0" i="0">
-                <a:solidFill>
-                  <a:srgbClr val="333333"/>
-                </a:solidFill>
-                <a:latin typeface="Calibri"/>
-              </a:rPr>
-              <a:t>–   </a:t>
-            </a:r>
-            <a:r>
-              <a:rPr sz="2000" b="1" i="0">
-                <a:solidFill>
-                  <a:srgbClr val="333333"/>
-                </a:solidFill>
-                <a:latin typeface="Calibri"/>
-              </a:rPr>
-              <a:t>Exito:</a:t>
-            </a:r>
-            <a:r>
-              <a:rPr sz="2000" b="0" i="0">
-                <a:solidFill>
-                  <a:srgbClr val="333333"/>
-                </a:solidFill>
-                <a:latin typeface="Calibri"/>
-              </a:rPr>
-              <a:t> Cada RNF trae al menos un valor medible (segundos, cantidad, frecuencia o porcentaje) y su forma de verificacion.</a:t>
-            </a:r>
-          </a:p>
-          <a:p>
-            <a:pPr>
-              <a:spcAft>
-                <a:spcPts val="800"/>
-              </a:spcAft>
-            </a:pPr>
-            <a:r>
-              <a:rPr sz="2000" b="0" i="0">
-                <a:solidFill>
-                  <a:srgbClr val="333333"/>
-                </a:solidFill>
-                <a:latin typeface="Calibri"/>
-              </a:rPr>
-              <a:t>–   </a:t>
-            </a:r>
-            <a:r>
-              <a:rPr sz="2000" b="1" i="0">
-                <a:solidFill>
-                  <a:srgbClr val="333333"/>
-                </a:solidFill>
-                <a:latin typeface="Calibri"/>
-              </a:rPr>
-              <a:t>Exito:</a:t>
-            </a:r>
-            <a:r>
-              <a:rPr sz="2000" b="0" i="0">
-                <a:solidFill>
-                  <a:srgbClr val="333333"/>
-                </a:solidFill>
-                <a:latin typeface="Calibri"/>
-              </a:rPr>
-              <a:t> Ningun requisito usa las palabras rapido, amigable, facil, intuitivo, robusto u optimo sin cuantificarlas.</a:t>
-            </a:r>
-          </a:p>
-          <a:p>
-            <a:pPr>
-              <a:spcAft>
-                <a:spcPts val="800"/>
-              </a:spcAft>
-            </a:pPr>
-            <a:r>
-              <a:rPr sz="2000" b="0" i="0">
-                <a:solidFill>
-                  <a:srgbClr val="333333"/>
-                </a:solidFill>
-                <a:latin typeface="Calibri"/>
-              </a:rPr>
-              <a:t>–   </a:t>
-            </a:r>
-            <a:r>
-              <a:rPr sz="2000" b="1" i="0">
-                <a:solidFill>
-                  <a:srgbClr val="333333"/>
-                </a:solidFill>
-                <a:latin typeface="Calibri"/>
-              </a:rPr>
-              <a:t>Exito:</a:t>
-            </a:r>
-            <a:r>
-              <a:rPr sz="2000" b="0" i="0">
-                <a:solidFill>
-                  <a:srgbClr val="333333"/>
-                </a:solidFill>
-                <a:latin typeface="Calibri"/>
-              </a:rPr>
-              <a:t> La matriz de trazabilidad conecta las cinco frases de la entrevista con al menos un requisito cada una, y ningun requisito queda huerfano de origen.</a:t>
-            </a:r>
-          </a:p>
-          <a:p>
-            <a:pPr>
-              <a:spcAft>
-                <a:spcPts val="800"/>
-              </a:spcAft>
-            </a:pPr>
-            <a:r>
-              <a:rPr sz="2000" b="0" i="0">
-                <a:solidFill>
-                  <a:srgbClr val="333333"/>
-                </a:solidFill>
-                <a:latin typeface="Calibri"/>
-              </a:rPr>
-              <a:t>–   </a:t>
-            </a:r>
-            <a:r>
-              <a:rPr sz="2000" b="1" i="0">
-                <a:solidFill>
-                  <a:srgbClr val="333333"/>
-                </a:solidFill>
-                <a:latin typeface="Calibri"/>
-              </a:rPr>
-              <a:t>Entrega en la plataforma del curso</a:t>
-            </a:r>
-            <a:r>
-              <a:rPr sz="2000" b="0" i="0">
-                <a:solidFill>
-                  <a:srgbClr val="333333"/>
-                </a:solidFill>
-                <a:latin typeface="Calibri"/>
-              </a:rPr>
-              <a:t> — en la fecha que indique el docente.</a:t>
-            </a:r>
-          </a:p>
-        </p:txBody>
-      </p:sp>
-      <p:sp>
-        <p:nvSpPr>
-          <p:cNvPr id="6" name="TextBox 5"/>
-          <p:cNvSpPr txBox="1"/>
-          <p:nvPr/>
-        </p:nvSpPr>
-        <p:spPr>
-          <a:xfrm>
-            <a:off x="11185855" y="6473952"/>
-            <a:ext cx="640080" cy="274320"/>
-          </a:xfrm>
-          <a:prstGeom prst="rect">
-            <a:avLst/>
-          </a:prstGeom>
-          <a:noFill/>
-        </p:spPr>
-        <p:txBody>
-          <a:bodyPr wrap="square">
-            <a:spAutoFit/>
-          </a:bodyPr>
-          <a:lstStyle/>
-          <a:p>
-            <a:pPr algn="r"/>
-            <a:r>
-              <a:rPr sz="1100" b="0" i="0">
-                <a:solidFill>
-                  <a:srgbClr val="666666"/>
-                </a:solidFill>
-                <a:latin typeface="Calibri"/>
-              </a:rPr>
-              <a:t>22</a:t>
-            </a:r>
-          </a:p>
-        </p:txBody>
-      </p:sp>
-    </p:spTree>
-  </p:cSld>
-  <p:clrMapOvr>
-    <a:masterClrMapping/>
-  </p:clrMapOvr>
-</p:sld>
-</file>
-
-<file path=ppt/slides/slide23.xml><?xml version="1.0" encoding="utf-8"?>
-<p:sld xmlns:a="http://schemas.openxmlformats.org/drawingml/2006/main" xmlns:p="http://schemas.openxmlformats.org/presentationml/2006/main" xmlns:r="http://schemas.openxmlformats.org/officeDocument/2006/relationships">
-  <p:cSld>
-    <p:bg>
-      <p:bgPr>
-        <a:solidFill>
-          <a:srgbClr val="FFFFFF"/>
-        </a:solidFill>
-        <a:effectLst/>
-      </p:bgPr>
-    </p:bg>
-    <p:spTree>
-      <p:nvGrpSpPr>
-        <p:cNvPr id="1" name=""/>
-        <p:cNvGrpSpPr/>
-        <p:nvPr/>
-      </p:nvGrpSpPr>
-      <p:grpSpPr/>
-      <p:sp>
-        <p:nvSpPr>
-          <p:cNvPr id="2" name="Rectangle 1"/>
-          <p:cNvSpPr/>
-          <p:nvPr/>
-        </p:nvSpPr>
-        <p:spPr>
-          <a:xfrm>
-            <a:off x="0" y="0"/>
-            <a:ext cx="12191695" cy="960120"/>
-          </a:xfrm>
-          <a:prstGeom prst="rect">
-            <a:avLst/>
-          </a:prstGeom>
-          <a:solidFill>
-            <a:srgbClr val="095292"/>
-          </a:solidFill>
-          <a:ln>
-            <a:noFill/>
-          </a:ln>
-        </p:spPr>
-        <p:style>
-          <a:lnRef idx="1">
-            <a:schemeClr val="accent1"/>
-          </a:lnRef>
-          <a:fillRef idx="3">
-            <a:schemeClr val="accent1"/>
-          </a:fillRef>
-          <a:effectRef idx="2">
-            <a:schemeClr val="accent1"/>
-          </a:effectRef>
-          <a:fontRef idx="minor">
-            <a:schemeClr val="lt1"/>
-          </a:fontRef>
-        </p:style>
-        <p:txBody>
-          <a:bodyPr rtlCol="0" anchor="ctr"/>
-          <a:lstStyle/>
-          <a:p>
-            <a:pPr algn="ctr"/>
-          </a:p>
-        </p:txBody>
-      </p:sp>
-      <p:sp>
-        <p:nvSpPr>
-          <p:cNvPr id="3" name="Rectangle 2"/>
-          <p:cNvSpPr/>
-          <p:nvPr/>
-        </p:nvSpPr>
-        <p:spPr>
-          <a:xfrm>
-            <a:off x="0" y="960120"/>
-            <a:ext cx="12191695" cy="41148"/>
-          </a:xfrm>
-          <a:prstGeom prst="rect">
-            <a:avLst/>
-          </a:prstGeom>
-          <a:solidFill>
-            <a:srgbClr val="FFD000"/>
-          </a:solidFill>
-          <a:ln>
-            <a:noFill/>
-          </a:ln>
-        </p:spPr>
-        <p:style>
-          <a:lnRef idx="1">
-            <a:schemeClr val="accent1"/>
-          </a:lnRef>
-          <a:fillRef idx="3">
-            <a:schemeClr val="accent1"/>
-          </a:fillRef>
-          <a:effectRef idx="2">
-            <a:schemeClr val="accent1"/>
-          </a:effectRef>
-          <a:fontRef idx="minor">
-            <a:schemeClr val="lt1"/>
-          </a:fontRef>
-        </p:style>
-        <p:txBody>
-          <a:bodyPr rtlCol="0" anchor="ctr"/>
-          <a:lstStyle/>
-          <a:p>
-            <a:pPr algn="ctr"/>
-          </a:p>
-        </p:txBody>
-      </p:sp>
-      <p:sp>
-        <p:nvSpPr>
-          <p:cNvPr id="4" name="TextBox 3"/>
-          <p:cNvSpPr txBox="1"/>
-          <p:nvPr/>
-        </p:nvSpPr>
-        <p:spPr>
-          <a:xfrm>
-            <a:off x="457200" y="164592"/>
-            <a:ext cx="11277295" cy="502920"/>
-          </a:xfrm>
-          <a:prstGeom prst="rect">
-            <a:avLst/>
-          </a:prstGeom>
-          <a:noFill/>
-        </p:spPr>
-        <p:txBody>
-          <a:bodyPr wrap="square">
-            <a:spAutoFit/>
-          </a:bodyPr>
-          <a:lstStyle/>
-          <a:p>
-            <a:r>
-              <a:rPr sz="2600" b="1" i="0">
-                <a:solidFill>
-                  <a:srgbClr val="FFFFFF"/>
-                </a:solidFill>
-                <a:latin typeface="Calibri"/>
-              </a:rPr>
-              <a:t>Para el PI esta semana</a:t>
-            </a:r>
-          </a:p>
-        </p:txBody>
-      </p:sp>
-      <p:sp>
-        <p:nvSpPr>
-          <p:cNvPr id="5" name="Rounded Rectangle 4"/>
-          <p:cNvSpPr/>
-          <p:nvPr/>
-        </p:nvSpPr>
-        <p:spPr>
-          <a:xfrm>
-            <a:off x="457200" y="1261872"/>
-            <a:ext cx="11277295" cy="1051560"/>
-          </a:xfrm>
-          <a:prstGeom prst="roundRect">
-            <a:avLst>
-              <a:gd name="adj" fmla="val 12000"/>
-            </a:avLst>
-          </a:prstGeom>
-          <a:solidFill>
-            <a:srgbClr val="E8F4FA"/>
-          </a:solidFill>
-          <a:ln>
-            <a:noFill/>
-          </a:ln>
-        </p:spPr>
-        <p:style>
-          <a:lnRef idx="1">
-            <a:schemeClr val="accent1"/>
-          </a:lnRef>
-          <a:fillRef idx="3">
-            <a:schemeClr val="accent1"/>
-          </a:fillRef>
-          <a:effectRef idx="2">
-            <a:schemeClr val="accent1"/>
-          </a:effectRef>
-          <a:fontRef idx="minor">
-            <a:schemeClr val="lt1"/>
-          </a:fontRef>
-        </p:style>
-        <p:txBody>
-          <a:bodyPr rtlCol="0" anchor="ctr"/>
-          <a:lstStyle/>
-          <a:p>
-            <a:pPr algn="ctr"/>
-          </a:p>
-        </p:txBody>
-      </p:sp>
-      <p:sp>
-        <p:nvSpPr>
-          <p:cNvPr id="6" name="Rectangle 5"/>
-          <p:cNvSpPr/>
-          <p:nvPr/>
-        </p:nvSpPr>
-        <p:spPr>
-          <a:xfrm>
-            <a:off x="457200" y="1261872"/>
-            <a:ext cx="128016" cy="1051560"/>
-          </a:xfrm>
-          <a:prstGeom prst="rect">
-            <a:avLst/>
-          </a:prstGeom>
-          <a:solidFill>
-            <a:srgbClr val="269CCB"/>
-          </a:solidFill>
-          <a:ln>
-            <a:noFill/>
-          </a:ln>
-        </p:spPr>
-        <p:style>
-          <a:lnRef idx="1">
-            <a:schemeClr val="accent1"/>
-          </a:lnRef>
-          <a:fillRef idx="3">
-            <a:schemeClr val="accent1"/>
-          </a:fillRef>
-          <a:effectRef idx="2">
-            <a:schemeClr val="accent1"/>
-          </a:effectRef>
-          <a:fontRef idx="minor">
-            <a:schemeClr val="lt1"/>
-          </a:fontRef>
-        </p:style>
-        <p:txBody>
-          <a:bodyPr rtlCol="0" anchor="ctr"/>
-          <a:lstStyle/>
-          <a:p>
-            <a:pPr algn="ctr"/>
-          </a:p>
-        </p:txBody>
-      </p:sp>
-      <p:sp>
-        <p:nvSpPr>
-          <p:cNvPr id="7" name="TextBox 6"/>
-          <p:cNvSpPr txBox="1"/>
-          <p:nvPr/>
-        </p:nvSpPr>
-        <p:spPr>
-          <a:xfrm>
-            <a:off x="777240" y="1399031"/>
-            <a:ext cx="10774375" cy="822959"/>
-          </a:xfrm>
-          <a:prstGeom prst="rect">
-            <a:avLst/>
-          </a:prstGeom>
-          <a:noFill/>
-        </p:spPr>
-        <p:txBody>
-          <a:bodyPr wrap="square">
-            <a:spAutoFit/>
-          </a:bodyPr>
-          <a:lstStyle/>
-          <a:p>
-            <a:r>
-              <a:rPr sz="1200" b="1" i="0">
-                <a:solidFill>
-                  <a:srgbClr val="269CCB"/>
-                </a:solidFill>
-                <a:latin typeface="Calibri"/>
-              </a:rPr>
-              <a:t>Info</a:t>
-            </a:r>
-          </a:p>
-          <a:p>
-            <a:pPr>
-              <a:spcBef>
-                <a:spcPts val="400"/>
-              </a:spcBef>
-            </a:pPr>
-            <a:r>
-              <a:rPr sz="1400" b="0" i="0">
-                <a:solidFill>
-                  <a:srgbClr val="333333"/>
-                </a:solidFill>
-                <a:latin typeface="Calibri"/>
-              </a:rPr>
-              <a:t>Hito: Queda listo el catalogo de requisitos de VetCare: 8 RF y 4 RNF con criterio de verificacion y prioridad MoSCoW.</a:t>
-            </a:r>
-          </a:p>
-        </p:txBody>
-      </p:sp>
-      <p:sp>
-        <p:nvSpPr>
-          <p:cNvPr id="8" name="Rounded Rectangle 7"/>
-          <p:cNvSpPr/>
-          <p:nvPr/>
-        </p:nvSpPr>
-        <p:spPr>
-          <a:xfrm>
-            <a:off x="457200" y="2478024"/>
-            <a:ext cx="11277295" cy="1051560"/>
-          </a:xfrm>
-          <a:prstGeom prst="roundRect">
-            <a:avLst>
-              <a:gd name="adj" fmla="val 12000"/>
-            </a:avLst>
-          </a:prstGeom>
-          <a:solidFill>
-            <a:srgbClr val="FFF8E1"/>
-          </a:solidFill>
-          <a:ln>
-            <a:noFill/>
-          </a:ln>
-        </p:spPr>
-        <p:style>
-          <a:lnRef idx="1">
-            <a:schemeClr val="accent1"/>
-          </a:lnRef>
-          <a:fillRef idx="3">
-            <a:schemeClr val="accent1"/>
-          </a:fillRef>
-          <a:effectRef idx="2">
-            <a:schemeClr val="accent1"/>
-          </a:effectRef>
-          <a:fontRef idx="minor">
-            <a:schemeClr val="lt1"/>
-          </a:fontRef>
-        </p:style>
-        <p:txBody>
-          <a:bodyPr rtlCol="0" anchor="ctr"/>
-          <a:lstStyle/>
-          <a:p>
-            <a:pPr algn="ctr"/>
-          </a:p>
-        </p:txBody>
-      </p:sp>
-      <p:sp>
-        <p:nvSpPr>
-          <p:cNvPr id="9" name="Rectangle 8"/>
-          <p:cNvSpPr/>
-          <p:nvPr/>
-        </p:nvSpPr>
-        <p:spPr>
-          <a:xfrm>
-            <a:off x="457200" y="2478024"/>
-            <a:ext cx="128016" cy="1051560"/>
-          </a:xfrm>
-          <a:prstGeom prst="rect">
-            <a:avLst/>
-          </a:prstGeom>
-          <a:solidFill>
-            <a:srgbClr val="FFD000"/>
-          </a:solidFill>
-          <a:ln>
-            <a:noFill/>
-          </a:ln>
-        </p:spPr>
-        <p:style>
-          <a:lnRef idx="1">
-            <a:schemeClr val="accent1"/>
-          </a:lnRef>
-          <a:fillRef idx="3">
-            <a:schemeClr val="accent1"/>
-          </a:fillRef>
-          <a:effectRef idx="2">
-            <a:schemeClr val="accent1"/>
-          </a:effectRef>
-          <a:fontRef idx="minor">
-            <a:schemeClr val="lt1"/>
-          </a:fontRef>
-        </p:style>
-        <p:txBody>
-          <a:bodyPr rtlCol="0" anchor="ctr"/>
-          <a:lstStyle/>
-          <a:p>
-            <a:pPr algn="ctr"/>
-          </a:p>
-        </p:txBody>
-      </p:sp>
-      <p:sp>
-        <p:nvSpPr>
-          <p:cNvPr id="10" name="TextBox 9"/>
-          <p:cNvSpPr txBox="1"/>
-          <p:nvPr/>
-        </p:nvSpPr>
-        <p:spPr>
-          <a:xfrm>
-            <a:off x="777240" y="2615184"/>
-            <a:ext cx="10774375" cy="822959"/>
-          </a:xfrm>
-          <a:prstGeom prst="rect">
-            <a:avLst/>
-          </a:prstGeom>
-          <a:noFill/>
-        </p:spPr>
-        <p:txBody>
-          <a:bodyPr wrap="square">
-            <a:spAutoFit/>
-          </a:bodyPr>
-          <a:lstStyle/>
-          <a:p>
-            <a:r>
-              <a:rPr sz="1200" b="1" i="0">
-                <a:solidFill>
-                  <a:srgbClr val="FFD000"/>
-                </a:solidFill>
-                <a:latin typeface="Calibri"/>
-              </a:rPr>
-              <a:t>Aclaración</a:t>
-            </a:r>
-          </a:p>
-          <a:p>
-            <a:pPr>
-              <a:spcBef>
-                <a:spcPts val="400"/>
-              </a:spcBef>
-            </a:pPr>
-            <a:r>
-              <a:rPr sz="1400" b="0" i="0">
-                <a:solidFill>
-                  <a:srgbClr val="333333"/>
-                </a:solidFill>
-                <a:latin typeface="Calibri"/>
-              </a:rPr>
-              <a:t>Enunciado completo: Clases/Proyecto Integrador/ (VetCare).</a:t>
-            </a:r>
-          </a:p>
-        </p:txBody>
-      </p:sp>
-      <p:sp>
-        <p:nvSpPr>
-          <p:cNvPr id="11" name="Rounded Rectangle 10"/>
-          <p:cNvSpPr/>
-          <p:nvPr/>
-        </p:nvSpPr>
-        <p:spPr>
-          <a:xfrm>
-            <a:off x="457200" y="3694176"/>
-            <a:ext cx="11277295" cy="1051560"/>
-          </a:xfrm>
-          <a:prstGeom prst="roundRect">
-            <a:avLst>
-              <a:gd name="adj" fmla="val 12000"/>
-            </a:avLst>
-          </a:prstGeom>
-          <a:solidFill>
-            <a:srgbClr val="FBE4E4"/>
-          </a:solidFill>
-          <a:ln>
-            <a:noFill/>
-          </a:ln>
-        </p:spPr>
-        <p:style>
-          <a:lnRef idx="1">
-            <a:schemeClr val="accent1"/>
-          </a:lnRef>
-          <a:fillRef idx="3">
-            <a:schemeClr val="accent1"/>
-          </a:fillRef>
-          <a:effectRef idx="2">
-            <a:schemeClr val="accent1"/>
-          </a:effectRef>
-          <a:fontRef idx="minor">
-            <a:schemeClr val="lt1"/>
-          </a:fontRef>
-        </p:style>
-        <p:txBody>
-          <a:bodyPr rtlCol="0" anchor="ctr"/>
-          <a:lstStyle/>
-          <a:p>
-            <a:pPr algn="ctr"/>
-          </a:p>
-        </p:txBody>
-      </p:sp>
-      <p:sp>
-        <p:nvSpPr>
-          <p:cNvPr id="12" name="Rectangle 11"/>
-          <p:cNvSpPr/>
-          <p:nvPr/>
-        </p:nvSpPr>
-        <p:spPr>
-          <a:xfrm>
-            <a:off x="457200" y="3694176"/>
-            <a:ext cx="128016" cy="1051560"/>
-          </a:xfrm>
-          <a:prstGeom prst="rect">
-            <a:avLst/>
-          </a:prstGeom>
-          <a:solidFill>
-            <a:srgbClr val="A02030"/>
-          </a:solidFill>
-          <a:ln>
-            <a:noFill/>
-          </a:ln>
-        </p:spPr>
-        <p:style>
-          <a:lnRef idx="1">
-            <a:schemeClr val="accent1"/>
-          </a:lnRef>
-          <a:fillRef idx="3">
-            <a:schemeClr val="accent1"/>
-          </a:fillRef>
-          <a:effectRef idx="2">
-            <a:schemeClr val="accent1"/>
-          </a:effectRef>
-          <a:fontRef idx="minor">
-            <a:schemeClr val="lt1"/>
-          </a:fontRef>
-        </p:style>
-        <p:txBody>
-          <a:bodyPr rtlCol="0" anchor="ctr"/>
-          <a:lstStyle/>
-          <a:p>
-            <a:pPr algn="ctr"/>
-          </a:p>
-        </p:txBody>
-      </p:sp>
-      <p:sp>
-        <p:nvSpPr>
-          <p:cNvPr id="13" name="TextBox 12"/>
-          <p:cNvSpPr txBox="1"/>
-          <p:nvPr/>
-        </p:nvSpPr>
-        <p:spPr>
-          <a:xfrm>
-            <a:off x="777240" y="3831336"/>
-            <a:ext cx="10774375" cy="822959"/>
-          </a:xfrm>
-          <a:prstGeom prst="rect">
-            <a:avLst/>
-          </a:prstGeom>
-          <a:noFill/>
-        </p:spPr>
-        <p:txBody>
-          <a:bodyPr wrap="square">
-            <a:spAutoFit/>
-          </a:bodyPr>
-          <a:lstStyle/>
-          <a:p>
-            <a:r>
-              <a:rPr sz="1200" b="1" i="0">
-                <a:solidFill>
-                  <a:srgbClr val="A02030"/>
-                </a:solidFill>
-                <a:latin typeface="Calibri"/>
-              </a:rPr>
-              <a:t>Atención</a:t>
-            </a:r>
-          </a:p>
-          <a:p>
-            <a:pPr>
-              <a:spcBef>
-                <a:spcPts val="400"/>
-              </a:spcBef>
-            </a:pPr>
-            <a:r>
-              <a:rPr sz="1400" b="0" i="0">
-                <a:solidFill>
-                  <a:srgbClr val="333333"/>
-                </a:solidFill>
-                <a:latin typeface="Calibri"/>
-              </a:rPr>
-              <a:t>Entrega del taller, si el docente lo asigna · en la fecha que indique el docente.</a:t>
-            </a:r>
-          </a:p>
-        </p:txBody>
-      </p:sp>
-      <p:sp>
-        <p:nvSpPr>
-          <p:cNvPr id="14" name="TextBox 13"/>
-          <p:cNvSpPr txBox="1"/>
-          <p:nvPr/>
-        </p:nvSpPr>
-        <p:spPr>
-          <a:xfrm>
-            <a:off x="11185855" y="6473952"/>
-            <a:ext cx="640080" cy="274320"/>
-          </a:xfrm>
-          <a:prstGeom prst="rect">
-            <a:avLst/>
-          </a:prstGeom>
-          <a:noFill/>
-        </p:spPr>
-        <p:txBody>
-          <a:bodyPr wrap="square">
-            <a:spAutoFit/>
-          </a:bodyPr>
-          <a:lstStyle/>
-          <a:p>
-            <a:pPr algn="r"/>
-            <a:r>
-              <a:rPr sz="1100" b="0" i="0">
-                <a:solidFill>
-                  <a:srgbClr val="666666"/>
-                </a:solidFill>
-                <a:latin typeface="Calibri"/>
-              </a:rPr>
-              <a:t>23</a:t>
-            </a:r>
-          </a:p>
-        </p:txBody>
-      </p:sp>
-    </p:spTree>
-  </p:cSld>
-  <p:clrMapOvr>
-    <a:masterClrMapping/>
-  </p:clrMapOvr>
-</p:sld>
-</file>
-
-<file path=ppt/slides/slide24.xml><?xml version="1.0" encoding="utf-8"?>
-<p:sld xmlns:a="http://schemas.openxmlformats.org/drawingml/2006/main" xmlns:p="http://schemas.openxmlformats.org/presentationml/2006/main" xmlns:r="http://schemas.openxmlformats.org/officeDocument/2006/relationships">
-  <p:cSld>
-    <p:bg>
-      <p:bgPr>
-        <a:solidFill>
-          <a:srgbClr val="FFFFFF"/>
-        </a:solidFill>
-        <a:effectLst/>
-      </p:bgPr>
-    </p:bg>
-    <p:spTree>
-      <p:nvGrpSpPr>
-        <p:cNvPr id="1" name=""/>
-        <p:cNvGrpSpPr/>
-        <p:nvPr/>
-      </p:nvGrpSpPr>
-      <p:grpSpPr/>
-      <p:sp>
-        <p:nvSpPr>
-          <p:cNvPr id="2" name="Rectangle 1"/>
-          <p:cNvSpPr/>
-          <p:nvPr/>
-        </p:nvSpPr>
-        <p:spPr>
-          <a:xfrm>
-            <a:off x="0" y="0"/>
-            <a:ext cx="12191695" cy="164592"/>
-          </a:xfrm>
-          <a:prstGeom prst="rect">
-            <a:avLst/>
-          </a:prstGeom>
-          <a:solidFill>
-            <a:srgbClr val="269CCB"/>
-          </a:solidFill>
-          <a:ln>
-            <a:noFill/>
-          </a:ln>
-        </p:spPr>
-        <p:style>
-          <a:lnRef idx="1">
-            <a:schemeClr val="accent1"/>
-          </a:lnRef>
-          <a:fillRef idx="3">
-            <a:schemeClr val="accent1"/>
-          </a:fillRef>
-          <a:effectRef idx="2">
-            <a:schemeClr val="accent1"/>
-          </a:effectRef>
-          <a:fontRef idx="minor">
-            <a:schemeClr val="lt1"/>
-          </a:fontRef>
-        </p:style>
-        <p:txBody>
-          <a:bodyPr rtlCol="0" anchor="ctr"/>
-          <a:lstStyle/>
-          <a:p>
-            <a:pPr algn="ctr"/>
-          </a:p>
-        </p:txBody>
-      </p:sp>
-      <p:pic>
-        <p:nvPicPr>
-          <p:cNvPr id="3" name="Picture 2" descr="logo_uniajc_color.png"/>
-          <p:cNvPicPr>
-            <a:picLocks noChangeAspect="1"/>
-          </p:cNvPicPr>
-          <p:nvPr/>
-        </p:nvPicPr>
-        <p:blipFill>
-          <a:blip r:embed="rId2"/>
-          <a:stretch>
-            <a:fillRect/>
-          </a:stretch>
-        </p:blipFill>
-        <p:spPr>
-          <a:xfrm>
-            <a:off x="10271455" y="5998464"/>
-            <a:ext cx="1463040" cy="643233"/>
-          </a:xfrm>
-          <a:prstGeom prst="rect">
-            <a:avLst/>
-          </a:prstGeom>
-        </p:spPr>
-      </p:pic>
-      <p:sp>
-        <p:nvSpPr>
-          <p:cNvPr id="4" name="TextBox 3"/>
-          <p:cNvSpPr txBox="1"/>
-          <p:nvPr/>
-        </p:nvSpPr>
-        <p:spPr>
-          <a:xfrm>
-            <a:off x="457200" y="1737360"/>
-            <a:ext cx="11277295" cy="1097280"/>
-          </a:xfrm>
-          <a:prstGeom prst="rect">
-            <a:avLst/>
-          </a:prstGeom>
-          <a:noFill/>
-        </p:spPr>
-        <p:txBody>
-          <a:bodyPr wrap="square" anchor="ctr"/>
-          <a:lstStyle/>
-          <a:p>
-            <a:pPr algn="ctr"/>
-            <a:r>
-              <a:rPr sz="3400" b="1" i="0">
-                <a:solidFill>
-                  <a:srgbClr val="095292"/>
-                </a:solidFill>
-                <a:latin typeface="Calibri"/>
-              </a:rPr>
-              <a:t>Clase 6 · VetCare avanza</a:t>
-            </a:r>
-          </a:p>
-        </p:txBody>
-      </p:sp>
-      <p:sp>
-        <p:nvSpPr>
-          <p:cNvPr id="5" name="TextBox 4"/>
-          <p:cNvSpPr txBox="1"/>
-          <p:nvPr/>
-        </p:nvSpPr>
-        <p:spPr>
-          <a:xfrm>
-            <a:off x="457200" y="3017520"/>
-            <a:ext cx="11277295" cy="1645920"/>
-          </a:xfrm>
-          <a:prstGeom prst="rect">
-            <a:avLst/>
-          </a:prstGeom>
-          <a:noFill/>
-        </p:spPr>
-        <p:txBody>
-          <a:bodyPr wrap="square">
-            <a:spAutoFit/>
-          </a:bodyPr>
-          <a:lstStyle/>
-          <a:p>
-            <a:pPr algn="ctr">
-              <a:spcAft>
-                <a:spcPts val="600"/>
-              </a:spcAft>
-            </a:pPr>
-            <a:r>
-              <a:rPr sz="1600" b="0" i="0">
-                <a:solidFill>
-                  <a:srgbClr val="333333"/>
-                </a:solidFill>
-                <a:latin typeface="Calibri"/>
-              </a:rPr>
-              <a:t>Queda listo el catalogo de requisitos de VetCare: 8 RF y 4 RNF con criterio de verificacion y prioridad MoSCoW.</a:t>
-            </a:r>
-          </a:p>
-          <a:p>
-            <a:pPr algn="ctr">
-              <a:spcAft>
-                <a:spcPts val="600"/>
-              </a:spcAft>
-            </a:pPr>
-            <a:r>
-              <a:rPr sz="1600" b="0" i="0">
-                <a:solidFill>
-                  <a:srgbClr val="333333"/>
-                </a:solidFill>
-                <a:latin typeface="Calibri"/>
-              </a:rPr>
-              <a:t>Entregable: Documento de requisitos de VetCare en PDF, con minimo 8 RF, 4 RNF cuantificados, priorizacion MoSCoW y matriz de trazabilidad, subido a la plataforma del curso.</a:t>
-            </a:r>
-          </a:p>
-          <a:p>
-            <a:pPr algn="ctr">
-              <a:spcAft>
-                <a:spcPts val="600"/>
-              </a:spcAft>
-            </a:pPr>
-            <a:r>
-              <a:rPr sz="1600" b="0" i="0">
-                <a:solidFill>
-                  <a:srgbClr val="333333"/>
-                </a:solidFill>
-                <a:latin typeface="Calibri"/>
-              </a:rPr>
-              <a:t>Siguiente clase: continuamos el hilo del PI</a:t>
-            </a:r>
-          </a:p>
-        </p:txBody>
-      </p:sp>
-      <p:sp>
-        <p:nvSpPr>
-          <p:cNvPr id="6" name="TextBox 5"/>
-          <p:cNvSpPr txBox="1"/>
-          <p:nvPr/>
-        </p:nvSpPr>
-        <p:spPr>
-          <a:xfrm>
-            <a:off x="457200" y="4754880"/>
-            <a:ext cx="11277295" cy="640080"/>
-          </a:xfrm>
-          <a:prstGeom prst="rect">
-            <a:avLst/>
-          </a:prstGeom>
-          <a:noFill/>
-        </p:spPr>
-        <p:txBody>
-          <a:bodyPr wrap="square">
-            <a:spAutoFit/>
-          </a:bodyPr>
-          <a:lstStyle/>
-          <a:p>
-            <a:pPr algn="ctr"/>
-            <a:r>
-              <a:rPr sz="2000" b="1" i="0">
-                <a:solidFill>
-                  <a:srgbClr val="269CCB"/>
-                </a:solidFill>
-                <a:latin typeface="Calibri"/>
-              </a:rPr>
-              <a:t>Teoria al servicio del proyecto</a:t>
             </a:r>
           </a:p>
         </p:txBody>
@@ -11089,7 +7582,7 @@
                 </a:solidFill>
                 <a:latin typeface="Calibri"/>
               </a:rPr>
-              <a:t>Encuadre y repaso del avance</a:t>
+              <a:t>Encuadre y repaso</a:t>
             </a:r>
           </a:p>
         </p:txBody>
@@ -11434,7 +7927,7 @@
                 </a:solidFill>
                 <a:latin typeface="Calibri"/>
               </a:rPr>
-              <a:t>Taller guiado = avance del PI</a:t>
+              <a:t>Practica (opcional, guia en la carpeta)</a:t>
             </a:r>
           </a:p>
         </p:txBody>
@@ -11549,7 +8042,7 @@
                 </a:solidFill>
                 <a:latin typeface="Calibri"/>
               </a:rPr>
-              <a:t>Criterios de exito y cierre</a:t>
+              <a:t>Sintesis y cierre</a:t>
             </a:r>
           </a:p>
         </p:txBody>
@@ -13496,4 +9989,324 @@
   </a:objectDefaults>
   <a:extraClrSchemeLst/>
 </a:theme>
+</file>
+
+<file path=ppt/theme/theme2.xml><?xml version="1.0" encoding="utf-8"?>
+<a:theme xmlns:a="http://schemas.openxmlformats.org/drawingml/2006/main" name="Office Theme">
+  <a:themeElements>
+    <a:clrScheme name="Office">
+      <a:dk1>
+        <a:sysClr val="windowText" lastClr="000000"/>
+      </a:dk1>
+      <a:lt1>
+        <a:sysClr val="window" lastClr="FFFFFF"/>
+      </a:lt1>
+      <a:dk2>
+        <a:srgbClr val="1F497D"/>
+      </a:dk2>
+      <a:lt2>
+        <a:srgbClr val="EEECE1"/>
+      </a:lt2>
+      <a:accent1>
+        <a:srgbClr val="4F81BD"/>
+      </a:accent1>
+      <a:accent2>
+        <a:srgbClr val="C0504D"/>
+      </a:accent2>
+      <a:accent3>
+        <a:srgbClr val="9BBB59"/>
+      </a:accent3>
+      <a:accent4>
+        <a:srgbClr val="8064A2"/>
+      </a:accent4>
+      <a:accent5>
+        <a:srgbClr val="4BACC6"/>
+      </a:accent5>
+      <a:accent6>
+        <a:srgbClr val="F79646"/>
+      </a:accent6>
+      <a:hlink>
+        <a:srgbClr val="0000FF"/>
+      </a:hlink>
+      <a:folHlink>
+        <a:srgbClr val="800080"/>
+      </a:folHlink>
+    </a:clrScheme>
+    <a:fontScheme name="Office">
+      <a:majorFont>
+        <a:latin typeface="Calibri"/>
+        <a:ea typeface=""/>
+        <a:cs typeface=""/>
+        <a:font script="Jpan" typeface="ＭＳ Ｐゴシック"/>
+        <a:font script="Hang" typeface="맑은 고딕"/>
+        <a:font script="Hans" typeface="宋体"/>
+        <a:font script="Hant" typeface="新細明體"/>
+        <a:font script="Arab" typeface="Times New Roman"/>
+        <a:font script="Hebr" typeface="Times New Roman"/>
+        <a:font script="Thai" typeface="Angsana New"/>
+        <a:font script="Ethi" typeface="Nyala"/>
+        <a:font script="Beng" typeface="Vrinda"/>
+        <a:font script="Gujr" typeface="Shruti"/>
+        <a:font script="Khmr" typeface="MoolBoran"/>
+        <a:font script="Knda" typeface="Tunga"/>
+        <a:font script="Guru" typeface="Raavi"/>
+        <a:font script="Cans" typeface="Euphemia"/>
+        <a:font script="Cher" typeface="Plantagenet Cherokee"/>
+        <a:font script="Yiii" typeface="Microsoft Yi Baiti"/>
+        <a:font script="Tibt" typeface="Microsoft Himalaya"/>
+        <a:font script="Thaa" typeface="MV Boli"/>
+        <a:font script="Deva" typeface="Mangal"/>
+        <a:font script="Telu" typeface="Gautami"/>
+        <a:font script="Taml" typeface="Latha"/>
+        <a:font script="Syrc" typeface="Estrangelo Edessa"/>
+        <a:font script="Orya" typeface="Kalinga"/>
+        <a:font script="Mlym" typeface="Kartika"/>
+        <a:font script="Laoo" typeface="DokChampa"/>
+        <a:font script="Sinh" typeface="Iskoola Pota"/>
+        <a:font script="Mong" typeface="Mongolian Baiti"/>
+        <a:font script="Viet" typeface="Times New Roman"/>
+        <a:font script="Uigh" typeface="Microsoft Uighur"/>
+        <a:font script="Geor" typeface="Sylfaen"/>
+      </a:majorFont>
+      <a:minorFont>
+        <a:latin typeface="Calibri"/>
+        <a:ea typeface=""/>
+        <a:cs typeface=""/>
+        <a:font script="Jpan" typeface="ＭＳ Ｐゴシック"/>
+        <a:font script="Hang" typeface="맑은 고딕"/>
+        <a:font script="Hans" typeface="宋体"/>
+        <a:font script="Hant" typeface="新細明體"/>
+        <a:font script="Arab" typeface="Arial"/>
+        <a:font script="Hebr" typeface="Arial"/>
+        <a:font script="Thai" typeface="Cordia New"/>
+        <a:font script="Ethi" typeface="Nyala"/>
+        <a:font script="Beng" typeface="Vrinda"/>
+        <a:font script="Gujr" typeface="Shruti"/>
+        <a:font script="Khmr" typeface="DaunPenh"/>
+        <a:font script="Knda" typeface="Tunga"/>
+        <a:font script="Guru" typeface="Raavi"/>
+        <a:font script="Cans" typeface="Euphemia"/>
+        <a:font script="Cher" typeface="Plantagenet Cherokee"/>
+        <a:font script="Yiii" typeface="Microsoft Yi Baiti"/>
+        <a:font script="Tibt" typeface="Microsoft Himalaya"/>
+        <a:font script="Thaa" typeface="MV Boli"/>
+        <a:font script="Deva" typeface="Mangal"/>
+        <a:font script="Telu" typeface="Gautami"/>
+        <a:font script="Taml" typeface="Latha"/>
+        <a:font script="Syrc" typeface="Estrangelo Edessa"/>
+        <a:font script="Orya" typeface="Kalinga"/>
+        <a:font script="Mlym" typeface="Kartika"/>
+        <a:font script="Laoo" typeface="DokChampa"/>
+        <a:font script="Sinh" typeface="Iskoola Pota"/>
+        <a:font script="Mong" typeface="Mongolian Baiti"/>
+        <a:font script="Viet" typeface="Arial"/>
+        <a:font script="Uigh" typeface="Microsoft Uighur"/>
+        <a:font script="Geor" typeface="Sylfaen"/>
+      </a:minorFont>
+    </a:fontScheme>
+    <a:fmtScheme name="Office">
+      <a:fillStyleLst>
+        <a:solidFill>
+          <a:schemeClr val="phClr"/>
+        </a:solidFill>
+        <a:gradFill rotWithShape="1">
+          <a:gsLst>
+            <a:gs pos="0">
+              <a:schemeClr val="phClr">
+                <a:tint val="50000"/>
+                <a:satMod val="300000"/>
+              </a:schemeClr>
+            </a:gs>
+            <a:gs pos="35000">
+              <a:schemeClr val="phClr">
+                <a:tint val="37000"/>
+                <a:satMod val="300000"/>
+              </a:schemeClr>
+            </a:gs>
+            <a:gs pos="100000">
+              <a:schemeClr val="phClr">
+                <a:tint val="15000"/>
+                <a:satMod val="350000"/>
+              </a:schemeClr>
+            </a:gs>
+          </a:gsLst>
+          <a:lin ang="16200000" scaled="1"/>
+        </a:gradFill>
+        <a:gradFill rotWithShape="1">
+          <a:gsLst>
+            <a:gs pos="0">
+              <a:schemeClr val="phClr">
+                <a:tint val="100000"/>
+                <a:shade val="100000"/>
+                <a:satMod val="130000"/>
+              </a:schemeClr>
+            </a:gs>
+            <a:gs pos="100000">
+              <a:schemeClr val="phClr">
+                <a:tint val="50000"/>
+                <a:shade val="100000"/>
+                <a:satMod val="350000"/>
+              </a:schemeClr>
+            </a:gs>
+          </a:gsLst>
+          <a:lin ang="16200000" scaled="0"/>
+        </a:gradFill>
+      </a:fillStyleLst>
+      <a:lnStyleLst>
+        <a:ln w="9525" cap="flat" cmpd="sng" algn="ctr">
+          <a:solidFill>
+            <a:schemeClr val="phClr">
+              <a:shade val="95000"/>
+              <a:satMod val="105000"/>
+            </a:schemeClr>
+          </a:solidFill>
+          <a:prstDash val="solid"/>
+        </a:ln>
+        <a:ln w="25400" cap="flat" cmpd="sng" algn="ctr">
+          <a:solidFill>
+            <a:schemeClr val="phClr"/>
+          </a:solidFill>
+          <a:prstDash val="solid"/>
+        </a:ln>
+        <a:ln w="38100" cap="flat" cmpd="sng" algn="ctr">
+          <a:solidFill>
+            <a:schemeClr val="phClr"/>
+          </a:solidFill>
+          <a:prstDash val="solid"/>
+        </a:ln>
+      </a:lnStyleLst>
+      <a:effectStyleLst>
+        <a:effectStyle>
+          <a:effectLst>
+            <a:outerShdw blurRad="40000" dist="20000" dir="5400000" rotWithShape="0">
+              <a:srgbClr val="000000">
+                <a:alpha val="38000"/>
+              </a:srgbClr>
+            </a:outerShdw>
+          </a:effectLst>
+        </a:effectStyle>
+        <a:effectStyle>
+          <a:effectLst>
+            <a:outerShdw blurRad="40000" dist="23000" dir="5400000" rotWithShape="0">
+              <a:srgbClr val="000000">
+                <a:alpha val="35000"/>
+              </a:srgbClr>
+            </a:outerShdw>
+          </a:effectLst>
+        </a:effectStyle>
+        <a:effectStyle>
+          <a:effectLst>
+            <a:outerShdw blurRad="40000" dist="23000" dir="5400000" rotWithShape="0">
+              <a:srgbClr val="000000">
+                <a:alpha val="35000"/>
+              </a:srgbClr>
+            </a:outerShdw>
+          </a:effectLst>
+          <a:scene3d>
+            <a:camera prst="orthographicFront">
+              <a:rot lat="0" lon="0" rev="0"/>
+            </a:camera>
+            <a:lightRig rig="threePt" dir="t">
+              <a:rot lat="0" lon="0" rev="1200000"/>
+            </a:lightRig>
+          </a:scene3d>
+          <a:sp3d>
+            <a:bevelT w="63500" h="25400"/>
+          </a:sp3d>
+        </a:effectStyle>
+      </a:effectStyleLst>
+      <a:bgFillStyleLst>
+        <a:solidFill>
+          <a:schemeClr val="phClr"/>
+        </a:solidFill>
+        <a:gradFill rotWithShape="1">
+          <a:gsLst>
+            <a:gs pos="0">
+              <a:schemeClr val="phClr">
+                <a:tint val="40000"/>
+                <a:satMod val="350000"/>
+              </a:schemeClr>
+            </a:gs>
+            <a:gs pos="40000">
+              <a:schemeClr val="phClr">
+                <a:tint val="45000"/>
+                <a:shade val="99000"/>
+                <a:satMod val="350000"/>
+              </a:schemeClr>
+            </a:gs>
+            <a:gs pos="100000">
+              <a:schemeClr val="phClr">
+                <a:shade val="20000"/>
+                <a:satMod val="255000"/>
+              </a:schemeClr>
+            </a:gs>
+          </a:gsLst>
+          <a:path path="circle">
+            <a:fillToRect l="50000" t="-80000" r="50000" b="180000"/>
+          </a:path>
+        </a:gradFill>
+        <a:gradFill rotWithShape="1">
+          <a:gsLst>
+            <a:gs pos="0">
+              <a:schemeClr val="phClr">
+                <a:tint val="80000"/>
+                <a:satMod val="300000"/>
+              </a:schemeClr>
+            </a:gs>
+            <a:gs pos="100000">
+              <a:schemeClr val="phClr">
+                <a:shade val="30000"/>
+                <a:satMod val="200000"/>
+              </a:schemeClr>
+            </a:gs>
+          </a:gsLst>
+          <a:path path="circle">
+            <a:fillToRect l="50000" t="50000" r="50000" b="50000"/>
+          </a:path>
+        </a:gradFill>
+      </a:bgFillStyleLst>
+    </a:fmtScheme>
+  </a:themeElements>
+  <a:objectDefaults>
+    <a:spDef>
+      <a:spPr/>
+      <a:bodyPr/>
+      <a:lstStyle/>
+      <a:style>
+        <a:lnRef idx="1">
+          <a:schemeClr val="accent1"/>
+        </a:lnRef>
+        <a:fillRef idx="3">
+          <a:schemeClr val="accent1"/>
+        </a:fillRef>
+        <a:effectRef idx="2">
+          <a:schemeClr val="accent1"/>
+        </a:effectRef>
+        <a:fontRef idx="minor">
+          <a:schemeClr val="lt1"/>
+        </a:fontRef>
+      </a:style>
+    </a:spDef>
+    <a:lnDef>
+      <a:spPr/>
+      <a:bodyPr/>
+      <a:lstStyle/>
+      <a:style>
+        <a:lnRef idx="2">
+          <a:schemeClr val="accent1"/>
+        </a:lnRef>
+        <a:fillRef idx="0">
+          <a:schemeClr val="accent1"/>
+        </a:fillRef>
+        <a:effectRef idx="1">
+          <a:schemeClr val="accent1"/>
+        </a:effectRef>
+        <a:fontRef idx="minor">
+          <a:schemeClr val="tx1"/>
+        </a:fontRef>
+      </a:style>
+    </a:lnDef>
+  </a:objectDefaults>
+  <a:extraClrSchemeLst/>
+</a:theme>
 </file>
--- a/Seminario de Sistemas/Clases/Clase 6 - Requerimientos de software/Presentacion.pptx
+++ b/Seminario de Sistemas/Clases/Clase 6 - Requerimientos de software/Presentacion.pptx
@@ -600,7 +600,7 @@
           <a:p/>
           <a:p>
             <a:r>
-              <a:t>Esto no es burocracia: es lo que permite que cuando el cliente cambie de opinion, usted sepa en dos minutos que se rompe y cuanto cuesta; y en el Proyecto Integrador es lo que hace posible que el companero que solo cursa Programacion II reciba estos planos y sepa exactamente que implementar y por que, sin tener que volver a entrevistar al veterinario.</a:t>
+              <a:t>Esto no es burocracia: es lo que permite que cuando el cliente cambie de opinion, usted sepa en dos minutos que se rompe y cuanto cuesta; y en el proyecto de diseño es lo que hace posible que el companero que solo cursa Programacion II reciba estos planos y sepa exactamente que implementar y por que, sin tener que volver a entrevistar al veterinario.</a:t>
             </a:r>
           </a:p>
         </p:txBody>
@@ -4431,7 +4431,7 @@
                 </a:solidFill>
                 <a:latin typeface="Calibri"/>
               </a:rPr>
-              <a:t>–   En VetCare: registrar dueno y mascota, consultar historial y agendar cita son Must, porque atacan los tres dolores de Huellitas; el reporte mensual de consultas es Should</a:t>
+              <a:t>–   En el sistema de la clinica: registrar dueno y mascota, consultar historial y agendar cita son Must, porque atacan los tres dolores de la clinica; el reporte mensual de consultas es Should</a:t>
             </a:r>
           </a:p>
           <a:p>
@@ -6698,7 +6698,7 @@
                 </a:solidFill>
                 <a:latin typeface="Calibri"/>
               </a:rPr>
-              <a:t>–   Mismo dominio VetCare — no otro ejemplo. Aqui se diseña, no se programa.</a:t>
+              <a:t>–   Mismo dominio: la clinica veterinaria — no otro ejemplo. Aqui se diseña, no se programa.</a:t>
             </a:r>
           </a:p>
         </p:txBody>
@@ -7243,7 +7243,7 @@
                 </a:solidFill>
                 <a:latin typeface="Calibri"/>
               </a:rPr>
-              <a:t>–   Ejemplo de toda la clase: VetCare, el sistema de la clinica «Huellitas».</a:t>
+              <a:t>–   Ejemplo de toda la clase: el sistema de una clinica veterinaria.</a:t>
             </a:r>
           </a:p>
         </p:txBody>
@@ -7812,7 +7812,7 @@
                 </a:solidFill>
                 <a:latin typeface="Calibri"/>
               </a:rPr>
-              <a:t>Demo en vivo sobre VetCare</a:t>
+              <a:t>Demo en vivo sobre la clinica</a:t>
             </a:r>
           </a:p>
         </p:txBody>
@@ -8599,7 +8599,23 @@
                 </a:solidFill>
                 <a:latin typeface="Calibri"/>
               </a:rPr>
-              <a:t>–   En VetCare la entrevista al Dr. Ramirez dejo cinco frases crudas: que las fichas no se pierdan, ver de una lo que le han hecho antes al paciente, que la auxiliar agende sin llamarlo, que el sistema sea rapido, y saber cuantas consultas se hicieron en el mes.</a:t>
+              <a:t>–   En el sistema de la clinica la entrevista al Dr. Ramirez dejo cinco frases crudas: que las fichas no se pierdan, ver de una lo que le han hecho antes al paciente</a:t>
+            </a:r>
+          </a:p>
+          <a:p>
+            <a:pPr>
+              <a:spcAft>
+                <a:spcPts val="800"/>
+              </a:spcAft>
+            </a:pPr>
+            <a:r>
+              <a:rPr sz="2000" b="0" i="0">
+                <a:solidFill>
+                  <a:srgbClr val="333333"/>
+                </a:solidFill>
+                <a:latin typeface="Calibri"/>
+              </a:rPr>
+              <a:t>–   Que la auxiliar agende sin llamarlo, que el sistema sea rapido, y saber cuantas consultas se hicieron en el mes.</a:t>
             </a:r>
           </a:p>
           <a:p>
@@ -9087,7 +9103,7 @@
                 </a:solidFill>
                 <a:latin typeface="Calibri"/>
               </a:rPr>
-              <a:t>–   En VetCare, la frase que la auxiliar pueda agendar sin llamarme se convierte en dos cosas distintas al mismo tiempo: RF-05 el sistema debe permitir a la auxiliar registrar una cita seleccionando mascota, veterinario, fecha y hora</a:t>
+              <a:t>–   En el sistema de la clinica, la frase que la auxiliar pueda agendar sin llamarme se convierte en dos cosas distintas al mismo tiempo: RF-05 el sistema debe permitir a la auxiliar registrar una cita seleccionando mascota, veterinario, fecha y hora</a:t>
             </a:r>
           </a:p>
           <a:p>

--- a/Seminario de Sistemas/Clases/Clase 6 - Requerimientos de software/Presentacion.pptx
+++ b/Seminario de Sistemas/Clases/Clase 6 - Requerimientos de software/Presentacion.pptx
@@ -4431,7 +4431,7 @@
                 </a:solidFill>
                 <a:latin typeface="Calibri"/>
               </a:rPr>
-              <a:t>–   En el sistema de la clinica: registrar dueno y mascota, consultar historial y agendar cita son Must, porque atacan los tres dolores de la clinica; el reporte mensual de consultas es Should</a:t>
+              <a:t>–   En la clinica: registrar dueno y mascota, consultar historial y agendar cita son Must, porque atacan los tres dolores de la clinica; el reporte mensual de consultas es Should</a:t>
             </a:r>
           </a:p>
           <a:p>
@@ -6682,7 +6682,7 @@
                 </a:solidFill>
                 <a:latin typeface="Calibri"/>
               </a:rPr>
-              <a:t> El docente toma en vivo dos frases crudas de la entrevista al Dr. Ramirez y las convierte, frente al grupo, en un RF y un RNF usando la plantilla.</a:t>
+              <a:t> Se toma en vivo dos frases crudas de la entrevista al Dr. Ramirez y las convierte, frente al grupo, en un RF y un RNF usando la plantilla.</a:t>
             </a:r>
           </a:p>
           <a:p>
@@ -8599,7 +8599,7 @@
                 </a:solidFill>
                 <a:latin typeface="Calibri"/>
               </a:rPr>
-              <a:t>–   En el sistema de la clinica la entrevista al Dr. Ramirez dejo cinco frases crudas: que las fichas no se pierdan, ver de una lo que le han hecho antes al paciente</a:t>
+              <a:t>–   En la clinica la entrevista al Dr. Ramirez dejo cinco frases crudas: que las fichas no se pierdan, ver de una lo que le han hecho antes al paciente</a:t>
             </a:r>
           </a:p>
           <a:p>
@@ -9103,7 +9103,7 @@
                 </a:solidFill>
                 <a:latin typeface="Calibri"/>
               </a:rPr>
-              <a:t>–   En el sistema de la clinica, la frase que la auxiliar pueda agendar sin llamarme se convierte en dos cosas distintas al mismo tiempo: RF-05 el sistema debe permitir a la auxiliar registrar una cita seleccionando mascota, veterinario, fecha y hora</a:t>
+              <a:t>–   En la clinica, la frase que la auxiliar pueda agendar sin llamarme se convierte en dos cosas distintas al mismo tiempo: RF-05 el sistema debe permitir a la auxiliar registrar una cita seleccionando mascota, veterinario, fecha y hora</a:t>
             </a:r>
           </a:p>
           <a:p>

--- a/Seminario de Sistemas/Clases/Clase 6 - Requerimientos de software/Presentacion.pptx
+++ b/Seminario de Sistemas/Clases/Clase 6 - Requerimientos de software/Presentacion.pptx
@@ -1017,94 +1017,6 @@
           <a:p>
             <a:r>
               <a:t>Esto no es burocracia: es lo que permite que cuando el cliente cambie de opinion, usted sepa en dos minutos que se rompe y cuanto cuesta; y en el proyecto de diseño es lo que hace posible que el companero que solo cursa Programacion II reciba estos planos y sepa exactamente que implementar y por que, sin tener que volver a entrevistar al veterinario.</a:t>
-            </a:r>
-          </a:p>
-        </p:txBody>
-      </p:sp>
-      <p:sp>
-        <p:nvSpPr>
-          <p:cNvPr id="4" name="Slide Number Placeholder 3"/>
-          <p:cNvSpPr>
-            <a:spLocks noGrp="1"/>
-          </p:cNvSpPr>
-          <p:nvPr>
-            <p:ph type="sldNum" idx="5" sz="quarter"/>
-          </p:nvPr>
-        </p:nvSpPr>
-        <p:spPr/>
-      </p:sp>
-    </p:spTree>
-  </p:cSld>
-  <p:clrMapOvr>
-    <a:masterClrMapping/>
-  </p:clrMapOvr>
-</p:notes>
-</file>
-
-<file path=ppt/notesSlides/notesSlide6.xml><?xml version="1.0" encoding="utf-8"?>
-<p:notes xmlns:a="http://schemas.openxmlformats.org/drawingml/2006/main" xmlns:p="http://schemas.openxmlformats.org/presentationml/2006/main" xmlns:r="http://schemas.openxmlformats.org/officeDocument/2006/relationships">
-  <p:cSld>
-    <p:spTree>
-      <p:nvGrpSpPr>
-        <p:cNvPr id="1" name=""/>
-        <p:cNvGrpSpPr/>
-        <p:nvPr/>
-      </p:nvGrpSpPr>
-      <p:grpSpPr>
-        <a:xfrm>
-          <a:off x="0" y="0"/>
-          <a:ext cx="0" cy="0"/>
-          <a:chOff x="0" y="0"/>
-          <a:chExt cx="0" cy="0"/>
-        </a:xfrm>
-      </p:grpSpPr>
-      <p:sp>
-        <p:nvSpPr>
-          <p:cNvPr id="2" name="Slide Image Placeholder 1"/>
-          <p:cNvSpPr>
-            <a:spLocks noGrp="1"/>
-          </p:cNvSpPr>
-          <p:nvPr>
-            <p:ph type="sldImg" idx="2"/>
-          </p:nvPr>
-        </p:nvSpPr>
-        <p:spPr/>
-      </p:sp>
-      <p:sp>
-        <p:nvSpPr>
-          <p:cNvPr id="3" name="Notes Placeholder 2"/>
-          <p:cNvSpPr>
-            <a:spLocks noGrp="1"/>
-          </p:cNvSpPr>
-          <p:nvPr>
-            <p:ph type="body" idx="3" sz="quarter"/>
-          </p:nvPr>
-        </p:nvSpPr>
-        <p:spPr/>
-        <p:txBody>
-          <a:bodyPr/>
-          <a:lstStyle/>
-          <a:p>
-            <a:r>
-              <a:t>TEXTO COMPLETO DE LA LÁMINA (se proyecta resumido):</a:t>
-            </a:r>
-          </a:p>
-          <a:p/>
-          <a:p>
-            <a:r>
-              <a:t>Herramienta: Google Docs · draw.io</a:t>
-            </a:r>
-          </a:p>
-          <a:p/>
-          <a:p>
-            <a:r>
-              <a:t>Demo: Se toma en vivo dos frases crudas de la entrevista al Dr. Ramirez y las convierte, frente al grupo, en un RF y un RNF usando la plantilla.</a:t>
-            </a:r>
-          </a:p>
-          <a:p/>
-          <a:p>
-            <a:r>
-              <a:t>Mismo dominio: la clinica veterinaria — no otro ejemplo. Aqui se diseña, no se programa.</a:t>
             </a:r>
           </a:p>
         </p:txBody>
@@ -8023,118 +7935,14 @@
       </p:sp>
       <p:sp>
         <p:nvSpPr>
-          <p:cNvPr id="5" name="Rounded Rectangle 4"/>
-          <p:cNvSpPr/>
-          <p:nvPr/>
-        </p:nvSpPr>
-        <p:spPr>
-          <a:xfrm>
-            <a:off x="5797149" y="1573813"/>
-            <a:ext cx="6010497" cy="4057845"/>
-          </a:xfrm>
-          <a:prstGeom prst="roundRect">
-            <a:avLst>
-              <a:gd name="adj" fmla="val 4000"/>
-            </a:avLst>
-          </a:prstGeom>
-          <a:solidFill>
-            <a:srgbClr val="E8EEF4"/>
-          </a:solidFill>
-          <a:ln>
-            <a:noFill/>
-          </a:ln>
-        </p:spPr>
-        <p:style>
-          <a:lnRef idx="1">
-            <a:schemeClr val="accent1"/>
-          </a:lnRef>
-          <a:fillRef idx="3">
-            <a:schemeClr val="accent1"/>
-          </a:fillRef>
-          <a:effectRef idx="2">
-            <a:schemeClr val="accent1"/>
-          </a:effectRef>
-          <a:fontRef idx="minor">
-            <a:schemeClr val="lt1"/>
-          </a:fontRef>
-        </p:style>
-        <p:txBody>
-          <a:bodyPr rtlCol="0" anchor="ctr"/>
-          <a:lstStyle/>
-          <a:p>
-            <a:pPr algn="ctr"/>
-          </a:p>
-        </p:txBody>
-      </p:sp>
-      <p:pic>
-        <p:nvPicPr>
-          <p:cNvPr id="6" name="Picture 5" descr="laptop-code-live-demo.jpg"/>
-          <p:cNvPicPr>
-            <a:picLocks noChangeAspect="1"/>
-          </p:cNvPicPr>
-          <p:nvPr/>
-        </p:nvPicPr>
-        <p:blipFill>
-          <a:blip r:embed="rId2"/>
-          <a:stretch>
-            <a:fillRect/>
-          </a:stretch>
-        </p:blipFill>
-        <p:spPr>
-          <a:xfrm>
-            <a:off x="5870301" y="1646965"/>
-            <a:ext cx="5864193" cy="3911541"/>
-          </a:xfrm>
-          <a:prstGeom prst="rect">
-            <a:avLst/>
-          </a:prstGeom>
-        </p:spPr>
-      </p:pic>
-      <p:sp>
-        <p:nvSpPr>
-          <p:cNvPr id="7" name="TextBox 6"/>
+          <p:cNvPr id="5" name="TextBox 4"/>
           <p:cNvSpPr txBox="1"/>
           <p:nvPr/>
         </p:nvSpPr>
         <p:spPr>
           <a:xfrm>
-            <a:off x="5870301" y="5961888"/>
-            <a:ext cx="5864193" cy="320040"/>
-          </a:xfrm>
-          <a:prstGeom prst="rect">
-            <a:avLst/>
-          </a:prstGeom>
-          <a:noFill/>
-        </p:spPr>
-        <p:txBody>
-          <a:bodyPr wrap="square">
-            <a:spAutoFit/>
-          </a:bodyPr>
-          <a:lstStyle/>
-          <a:p>
-            <a:pPr algn="ctr"/>
-            <a:r>
-              <a:rPr sz="1100" b="0" i="1">
-                <a:solidFill>
-                  <a:srgbClr val="666666"/>
-                </a:solidFill>
-                <a:latin typeface="Calibri"/>
-              </a:rPr>
-              <a:t>Foto: olia danilevich · Pexels</a:t>
-            </a:r>
-          </a:p>
-        </p:txBody>
-      </p:sp>
-      <p:sp>
-        <p:nvSpPr>
-          <p:cNvPr id="8" name="TextBox 7"/>
-          <p:cNvSpPr txBox="1"/>
-          <p:nvPr/>
-        </p:nvSpPr>
-        <p:spPr>
-          <a:xfrm>
-            <a:off x="457200" y="1353312"/>
-            <a:ext cx="5093061" cy="5047488"/>
+            <a:off x="457200" y="1170432"/>
+            <a:ext cx="11277295" cy="5230368"/>
           </a:xfrm>
           <a:prstGeom prst="rect">
             <a:avLst/>
@@ -8211,7 +8019,7 @@
                 </a:solidFill>
                 <a:latin typeface="Calibri"/>
               </a:rPr>
-              <a:t> Se toma en vivo dos frases crudas de la entrevista al Dr.</a:t>
+              <a:t> Se toma en vivo dos frases crudas de la entrevista al Dr. Ramirez y las convierte, frente al grupo, en un RF y un RNF usando la plantilla.</a:t>
             </a:r>
           </a:p>
           <a:p>
@@ -8234,7 +8042,7 @@
       </p:sp>
       <p:sp>
         <p:nvSpPr>
-          <p:cNvPr id="9" name="TextBox 8"/>
+          <p:cNvPr id="6" name="TextBox 5"/>
           <p:cNvSpPr txBox="1"/>
           <p:nvPr/>
         </p:nvSpPr>
@@ -8647,118 +8455,14 @@
       </p:sp>
       <p:sp>
         <p:nvSpPr>
-          <p:cNvPr id="5" name="Rounded Rectangle 4"/>
-          <p:cNvSpPr/>
-          <p:nvPr/>
-        </p:nvSpPr>
-        <p:spPr>
-          <a:xfrm>
-            <a:off x="5797149" y="1573813"/>
-            <a:ext cx="6010497" cy="4057845"/>
-          </a:xfrm>
-          <a:prstGeom prst="roundRect">
-            <a:avLst>
-              <a:gd name="adj" fmla="val 4000"/>
-            </a:avLst>
-          </a:prstGeom>
-          <a:solidFill>
-            <a:srgbClr val="E8EEF4"/>
-          </a:solidFill>
-          <a:ln>
-            <a:noFill/>
-          </a:ln>
-        </p:spPr>
-        <p:style>
-          <a:lnRef idx="1">
-            <a:schemeClr val="accent1"/>
-          </a:lnRef>
-          <a:fillRef idx="3">
-            <a:schemeClr val="accent1"/>
-          </a:fillRef>
-          <a:effectRef idx="2">
-            <a:schemeClr val="accent1"/>
-          </a:effectRef>
-          <a:fontRef idx="minor">
-            <a:schemeClr val="lt1"/>
-          </a:fontRef>
-        </p:style>
-        <p:txBody>
-          <a:bodyPr rtlCol="0" anchor="ctr"/>
-          <a:lstStyle/>
-          <a:p>
-            <a:pPr algn="ctr"/>
-          </a:p>
-        </p:txBody>
-      </p:sp>
-      <p:pic>
-        <p:nvPicPr>
-          <p:cNvPr id="6" name="Picture 5" descr="notebook-planning-desk-coffee.jpg"/>
-          <p:cNvPicPr>
-            <a:picLocks noChangeAspect="1"/>
-          </p:cNvPicPr>
-          <p:nvPr/>
-        </p:nvPicPr>
-        <p:blipFill>
-          <a:blip r:embed="rId2"/>
-          <a:stretch>
-            <a:fillRect/>
-          </a:stretch>
-        </p:blipFill>
-        <p:spPr>
-          <a:xfrm>
-            <a:off x="5870301" y="1646965"/>
-            <a:ext cx="5864193" cy="3911541"/>
-          </a:xfrm>
-          <a:prstGeom prst="rect">
-            <a:avLst/>
-          </a:prstGeom>
-        </p:spPr>
-      </p:pic>
-      <p:sp>
-        <p:nvSpPr>
-          <p:cNvPr id="7" name="TextBox 6"/>
+          <p:cNvPr id="5" name="TextBox 4"/>
           <p:cNvSpPr txBox="1"/>
           <p:nvPr/>
         </p:nvSpPr>
         <p:spPr>
           <a:xfrm>
-            <a:off x="5870301" y="5961888"/>
-            <a:ext cx="5864193" cy="320040"/>
-          </a:xfrm>
-          <a:prstGeom prst="rect">
-            <a:avLst/>
-          </a:prstGeom>
-          <a:noFill/>
-        </p:spPr>
-        <p:txBody>
-          <a:bodyPr wrap="square">
-            <a:spAutoFit/>
-          </a:bodyPr>
-          <a:lstStyle/>
-          <a:p>
-            <a:pPr algn="ctr"/>
-            <a:r>
-              <a:rPr sz="1100" b="0" i="1">
-                <a:solidFill>
-                  <a:srgbClr val="666666"/>
-                </a:solidFill>
-                <a:latin typeface="Calibri"/>
-              </a:rPr>
-              <a:t>Foto: Cup of  Couple · Pexels</a:t>
-            </a:r>
-          </a:p>
-        </p:txBody>
-      </p:sp>
-      <p:sp>
-        <p:nvSpPr>
-          <p:cNvPr id="8" name="TextBox 7"/>
-          <p:cNvSpPr txBox="1"/>
-          <p:nvPr/>
-        </p:nvSpPr>
-        <p:spPr>
-          <a:xfrm>
-            <a:off x="457200" y="1353312"/>
-            <a:ext cx="5093061" cy="5047488"/>
+            <a:off x="457200" y="1170432"/>
+            <a:ext cx="11277295" cy="5230368"/>
           </a:xfrm>
           <a:prstGeom prst="rect">
             <a:avLst/>
@@ -8883,7 +8587,7 @@
       </p:sp>
       <p:sp>
         <p:nvSpPr>
-          <p:cNvPr id="9" name="TextBox 8"/>
+          <p:cNvPr id="6" name="TextBox 5"/>
           <p:cNvSpPr txBox="1"/>
           <p:nvPr/>
         </p:nvSpPr>

--- a/Seminario de Sistemas/Clases/Clase 6 - Requerimientos de software/Presentacion.pptx
+++ b/Seminario de Sistemas/Clases/Clase 6 - Requerimientos de software/Presentacion.pptx
@@ -5110,7 +5110,7 @@
         <p:spPr>
           <a:xfrm>
             <a:off x="457200" y="1261872"/>
-            <a:ext cx="11277295" cy="4684499"/>
+            <a:ext cx="11277295" cy="3242726"/>
           </a:xfrm>
           <a:prstGeom prst="roundRect">
             <a:avLst>
@@ -5360,7 +5360,7 @@
         <p:spPr>
           <a:xfrm>
             <a:off x="1188720" y="1719072"/>
-            <a:ext cx="10271455" cy="4090139"/>
+            <a:ext cx="10271455" cy="2648366"/>
           </a:xfrm>
           <a:prstGeom prst="rect">
             <a:avLst/>
@@ -5375,11 +5375,11 @@
           <a:p>
             <a:pPr>
               <a:spcAft>
-                <a:spcPts val="321"/>
+                <a:spcPts val="235"/>
               </a:spcAft>
             </a:pPr>
             <a:r>
-              <a:rPr sz="1500" i="0" b="0">
+              <a:rPr sz="1100" i="0" b="0">
                 <a:solidFill>
                   <a:srgbClr val="D4D4D4"/>
                 </a:solidFill>
@@ -5388,7 +5388,7 @@
               <a:t>ID</a:t>
             </a:r>
             <a:r>
-              <a:rPr sz="1500" i="0" b="0">
+              <a:rPr sz="1100" i="0" b="0">
                 <a:solidFill>
                   <a:srgbClr val="D4D4D4"/>
                 </a:solidFill>
@@ -5397,7 +5397,7 @@
               <a:t>: </a:t>
             </a:r>
             <a:r>
-              <a:rPr sz="1500" i="0" b="0">
+              <a:rPr sz="1100" i="0" b="0">
                 <a:solidFill>
                   <a:srgbClr val="D4D4D4"/>
                 </a:solidFill>
@@ -5406,7 +5406,7 @@
               <a:t>RF</a:t>
             </a:r>
             <a:r>
-              <a:rPr sz="1500" i="0" b="0">
+              <a:rPr sz="1100" i="0" b="0">
                 <a:solidFill>
                   <a:srgbClr val="D4D4D4"/>
                 </a:solidFill>
@@ -5415,7 +5415,7 @@
               <a:t>-</a:t>
             </a:r>
             <a:r>
-              <a:rPr sz="1500" i="0" b="0">
+              <a:rPr sz="1100" i="0" b="0">
                 <a:solidFill>
                   <a:srgbClr val="B5CEA8"/>
                 </a:solidFill>
@@ -5427,11 +5427,11 @@
           <a:p>
             <a:pPr>
               <a:spcAft>
-                <a:spcPts val="321"/>
+                <a:spcPts val="235"/>
               </a:spcAft>
             </a:pPr>
             <a:r>
-              <a:rPr sz="1500" i="0" b="0">
+              <a:rPr sz="1100" i="0" b="0">
                 <a:solidFill>
                   <a:srgbClr val="D4D4D4"/>
                 </a:solidFill>
@@ -5440,7 +5440,7 @@
               <a:t>Nombre</a:t>
             </a:r>
             <a:r>
-              <a:rPr sz="1500" i="0" b="0">
+              <a:rPr sz="1100" i="0" b="0">
                 <a:solidFill>
                   <a:srgbClr val="D4D4D4"/>
                 </a:solidFill>
@@ -5449,7 +5449,7 @@
               <a:t>: </a:t>
             </a:r>
             <a:r>
-              <a:rPr sz="1500" i="0" b="0">
+              <a:rPr sz="1100" i="0" b="0">
                 <a:solidFill>
                   <a:srgbClr val="D4D4D4"/>
                 </a:solidFill>
@@ -5458,7 +5458,7 @@
               <a:t>Consultar</a:t>
             </a:r>
             <a:r>
-              <a:rPr sz="1500" i="0" b="0">
+              <a:rPr sz="1100" i="0" b="0">
                 <a:solidFill>
                   <a:srgbClr val="D4D4D4"/>
                 </a:solidFill>
@@ -5467,7 +5467,7 @@
               <a:t> </a:t>
             </a:r>
             <a:r>
-              <a:rPr sz="1500" i="0" b="0">
+              <a:rPr sz="1100" i="0" b="0">
                 <a:solidFill>
                   <a:srgbClr val="D4D4D4"/>
                 </a:solidFill>
@@ -5476,7 +5476,7 @@
               <a:t>historial</a:t>
             </a:r>
             <a:r>
-              <a:rPr sz="1500" i="0" b="0">
+              <a:rPr sz="1100" i="0" b="0">
                 <a:solidFill>
                   <a:srgbClr val="D4D4D4"/>
                 </a:solidFill>
@@ -5485,7 +5485,7 @@
               <a:t> </a:t>
             </a:r>
             <a:r>
-              <a:rPr sz="1500" i="0" b="0">
+              <a:rPr sz="1100" i="0" b="0">
                 <a:solidFill>
                   <a:srgbClr val="D4D4D4"/>
                 </a:solidFill>
@@ -5494,7 +5494,7 @@
               <a:t>clinico</a:t>
             </a:r>
             <a:r>
-              <a:rPr sz="1500" i="0" b="0">
+              <a:rPr sz="1100" i="0" b="0">
                 <a:solidFill>
                   <a:srgbClr val="D4D4D4"/>
                 </a:solidFill>
@@ -5503,7 +5503,7 @@
               <a:t> </a:t>
             </a:r>
             <a:r>
-              <a:rPr sz="1500" i="0" b="0">
+              <a:rPr sz="1100" i="0" b="0">
                 <a:solidFill>
                   <a:srgbClr val="D4D4D4"/>
                 </a:solidFill>
@@ -5512,7 +5512,7 @@
               <a:t>de</a:t>
             </a:r>
             <a:r>
-              <a:rPr sz="1500" i="0" b="0">
+              <a:rPr sz="1100" i="0" b="0">
                 <a:solidFill>
                   <a:srgbClr val="D4D4D4"/>
                 </a:solidFill>
@@ -5521,7 +5521,7 @@
               <a:t> </a:t>
             </a:r>
             <a:r>
-              <a:rPr sz="1500" i="0" b="0">
+              <a:rPr sz="1100" i="0" b="0">
                 <a:solidFill>
                   <a:srgbClr val="D4D4D4"/>
                 </a:solidFill>
@@ -5530,7 +5530,7 @@
               <a:t>una</a:t>
             </a:r>
             <a:r>
-              <a:rPr sz="1500" i="0" b="0">
+              <a:rPr sz="1100" i="0" b="0">
                 <a:solidFill>
                   <a:srgbClr val="D4D4D4"/>
                 </a:solidFill>
@@ -5539,7 +5539,7 @@
               <a:t> </a:t>
             </a:r>
             <a:r>
-              <a:rPr sz="1500" i="0" b="0">
+              <a:rPr sz="1100" i="0" b="0">
                 <a:solidFill>
                   <a:srgbClr val="D4D4D4"/>
                 </a:solidFill>
@@ -5551,11 +5551,11 @@
           <a:p>
             <a:pPr>
               <a:spcAft>
-                <a:spcPts val="321"/>
+                <a:spcPts val="235"/>
               </a:spcAft>
             </a:pPr>
             <a:r>
-              <a:rPr sz="1500" i="0" b="0">
+              <a:rPr sz="1100" i="0" b="0">
                 <a:solidFill>
                   <a:srgbClr val="D4D4D4"/>
                 </a:solidFill>
@@ -5564,7 +5564,7 @@
               <a:t>Actor</a:t>
             </a:r>
             <a:r>
-              <a:rPr sz="1500" i="0" b="0">
+              <a:rPr sz="1100" i="0" b="0">
                 <a:solidFill>
                   <a:srgbClr val="D4D4D4"/>
                 </a:solidFill>
@@ -5573,7 +5573,7 @@
               <a:t>: </a:t>
             </a:r>
             <a:r>
-              <a:rPr sz="1500" i="0" b="0">
+              <a:rPr sz="1100" i="0" b="0">
                 <a:solidFill>
                   <a:srgbClr val="DCDCAA"/>
                 </a:solidFill>
@@ -5582,7 +5582,7 @@
               <a:t>Veterinario</a:t>
             </a:r>
             <a:r>
-              <a:rPr sz="1500" i="0" b="0">
+              <a:rPr sz="1100" i="0" b="0">
                 <a:solidFill>
                   <a:srgbClr val="D4D4D4"/>
                 </a:solidFill>
@@ -5591,7 +5591,7 @@
               <a:t> (</a:t>
             </a:r>
             <a:r>
-              <a:rPr sz="1500" i="0" b="0">
+              <a:rPr sz="1100" i="0" b="0">
                 <a:solidFill>
                   <a:srgbClr val="D4D4D4"/>
                 </a:solidFill>
@@ -5600,7 +5600,7 @@
               <a:t>consulta</a:t>
             </a:r>
             <a:r>
-              <a:rPr sz="1500" i="0" b="0">
+              <a:rPr sz="1100" i="0" b="0">
                 <a:solidFill>
                   <a:srgbClr val="D4D4D4"/>
                 </a:solidFill>
@@ -5609,7 +5609,7 @@
               <a:t> </a:t>
             </a:r>
             <a:r>
-              <a:rPr sz="1500" i="0" b="0">
+              <a:rPr sz="1100" i="0" b="0">
                 <a:solidFill>
                   <a:srgbClr val="D4D4D4"/>
                 </a:solidFill>
@@ -5618,7 +5618,7 @@
               <a:t>completa</a:t>
             </a:r>
             <a:r>
-              <a:rPr sz="1500" i="0" b="0">
+              <a:rPr sz="1100" i="0" b="0">
                 <a:solidFill>
                   <a:srgbClr val="D4D4D4"/>
                 </a:solidFill>
@@ -5627,7 +5627,7 @@
               <a:t>) / </a:t>
             </a:r>
             <a:r>
-              <a:rPr sz="1500" i="0" b="0">
+              <a:rPr sz="1100" i="0" b="0">
                 <a:solidFill>
                   <a:srgbClr val="DCDCAA"/>
                 </a:solidFill>
@@ -5636,7 +5636,7 @@
               <a:t>Auxiliar</a:t>
             </a:r>
             <a:r>
-              <a:rPr sz="1500" i="0" b="0">
+              <a:rPr sz="1100" i="0" b="0">
                 <a:solidFill>
                   <a:srgbClr val="D4D4D4"/>
                 </a:solidFill>
@@ -5645,7 +5645,7 @@
               <a:t> (</a:t>
             </a:r>
             <a:r>
-              <a:rPr sz="1500" i="0" b="0">
+              <a:rPr sz="1100" i="0" b="0">
                 <a:solidFill>
                   <a:srgbClr val="D4D4D4"/>
                 </a:solidFill>
@@ -5654,7 +5654,7 @@
               <a:t>consulta</a:t>
             </a:r>
             <a:r>
-              <a:rPr sz="1500" i="0" b="0">
+              <a:rPr sz="1100" i="0" b="0">
                 <a:solidFill>
                   <a:srgbClr val="D4D4D4"/>
                 </a:solidFill>
@@ -5663,7 +5663,7 @@
               <a:t> </a:t>
             </a:r>
             <a:r>
-              <a:rPr sz="1500" i="0" b="0">
+              <a:rPr sz="1100" i="0" b="0">
                 <a:solidFill>
                   <a:srgbClr val="D4D4D4"/>
                 </a:solidFill>
@@ -5672,7 +5672,7 @@
               <a:t>sin</a:t>
             </a:r>
             <a:r>
-              <a:rPr sz="1500" i="0" b="0">
+              <a:rPr sz="1100" i="0" b="0">
                 <a:solidFill>
                   <a:srgbClr val="D4D4D4"/>
                 </a:solidFill>
@@ -5681,7 +5681,7 @@
               <a:t> </a:t>
             </a:r>
             <a:r>
-              <a:rPr sz="1500" i="0" b="0">
+              <a:rPr sz="1100" i="0" b="0">
                 <a:solidFill>
                   <a:srgbClr val="D4D4D4"/>
                 </a:solidFill>
@@ -5690,7 +5690,7 @@
               <a:t>diagnostico</a:t>
             </a:r>
             <a:r>
-              <a:rPr sz="1500" i="0" b="0">
+              <a:rPr sz="1100" i="0" b="0">
                 <a:solidFill>
                   <a:srgbClr val="D4D4D4"/>
                 </a:solidFill>
@@ -5702,11 +5702,11 @@
           <a:p>
             <a:pPr>
               <a:spcAft>
-                <a:spcPts val="321"/>
+                <a:spcPts val="235"/>
               </a:spcAft>
             </a:pPr>
             <a:r>
-              <a:rPr sz="1500" i="0" b="0">
+              <a:rPr sz="1100" i="0" b="0">
                 <a:solidFill>
                   <a:srgbClr val="D4D4D4"/>
                 </a:solidFill>
@@ -5715,7 +5715,7 @@
               <a:t>Descripcion</a:t>
             </a:r>
             <a:r>
-              <a:rPr sz="1500" i="0" b="0">
+              <a:rPr sz="1100" i="0" b="0">
                 <a:solidFill>
                   <a:srgbClr val="D4D4D4"/>
                 </a:solidFill>
@@ -5724,7 +5724,7 @@
               <a:t>: </a:t>
             </a:r>
             <a:r>
-              <a:rPr sz="1500" i="0" b="0">
+              <a:rPr sz="1100" i="0" b="0">
                 <a:solidFill>
                   <a:srgbClr val="D4D4D4"/>
                 </a:solidFill>
@@ -5733,7 +5733,7 @@
               <a:t>El</a:t>
             </a:r>
             <a:r>
-              <a:rPr sz="1500" i="0" b="0">
+              <a:rPr sz="1100" i="0" b="0">
                 <a:solidFill>
                   <a:srgbClr val="D4D4D4"/>
                 </a:solidFill>
@@ -5742,7 +5742,7 @@
               <a:t> </a:t>
             </a:r>
             <a:r>
-              <a:rPr sz="1500" i="0" b="0">
+              <a:rPr sz="1100" i="0" b="0">
                 <a:solidFill>
                   <a:srgbClr val="D4D4D4"/>
                 </a:solidFill>
@@ -5751,7 +5751,7 @@
               <a:t>sistema</a:t>
             </a:r>
             <a:r>
-              <a:rPr sz="1500" i="0" b="0">
+              <a:rPr sz="1100" i="0" b="0">
                 <a:solidFill>
                   <a:srgbClr val="D4D4D4"/>
                 </a:solidFill>
@@ -5760,7 +5760,7 @@
               <a:t> </a:t>
             </a:r>
             <a:r>
-              <a:rPr sz="1500" i="0" b="0">
+              <a:rPr sz="1100" i="0" b="0">
                 <a:solidFill>
                   <a:srgbClr val="D4D4D4"/>
                 </a:solidFill>
@@ -5769,7 +5769,7 @@
               <a:t>debe</a:t>
             </a:r>
             <a:r>
-              <a:rPr sz="1500" i="0" b="0">
+              <a:rPr sz="1100" i="0" b="0">
                 <a:solidFill>
                   <a:srgbClr val="D4D4D4"/>
                 </a:solidFill>
@@ -5778,7 +5778,7 @@
               <a:t> </a:t>
             </a:r>
             <a:r>
-              <a:rPr sz="1500" i="0" b="0">
+              <a:rPr sz="1100" i="0" b="0">
                 <a:solidFill>
                   <a:srgbClr val="D4D4D4"/>
                 </a:solidFill>
@@ -5787,7 +5787,7 @@
               <a:t>permitir</a:t>
             </a:r>
             <a:r>
-              <a:rPr sz="1500" i="0" b="0">
+              <a:rPr sz="1100" i="0" b="0">
                 <a:solidFill>
                   <a:srgbClr val="D4D4D4"/>
                 </a:solidFill>
@@ -5796,7 +5796,7 @@
               <a:t> </a:t>
             </a:r>
             <a:r>
-              <a:rPr sz="1500" i="0" b="0">
+              <a:rPr sz="1100" i="0" b="0">
                 <a:solidFill>
                   <a:srgbClr val="D4D4D4"/>
                 </a:solidFill>
@@ -5805,7 +5805,7 @@
               <a:t>consultar</a:t>
             </a:r>
             <a:r>
-              <a:rPr sz="1500" i="0" b="0">
+              <a:rPr sz="1100" i="0" b="0">
                 <a:solidFill>
                   <a:srgbClr val="D4D4D4"/>
                 </a:solidFill>
@@ -5814,7 +5814,7 @@
               <a:t> </a:t>
             </a:r>
             <a:r>
-              <a:rPr sz="1500" i="0" b="0">
+              <a:rPr sz="1100" i="0" b="0">
                 <a:solidFill>
                   <a:srgbClr val="D4D4D4"/>
                 </a:solidFill>
@@ -5823,7 +5823,7 @@
               <a:t>el</a:t>
             </a:r>
             <a:r>
-              <a:rPr sz="1500" i="0" b="0">
+              <a:rPr sz="1100" i="0" b="0">
                 <a:solidFill>
                   <a:srgbClr val="D4D4D4"/>
                 </a:solidFill>
@@ -5832,7 +5832,7 @@
               <a:t> </a:t>
             </a:r>
             <a:r>
-              <a:rPr sz="1500" i="0" b="0">
+              <a:rPr sz="1100" i="0" b="0">
                 <a:solidFill>
                   <a:srgbClr val="D4D4D4"/>
                 </a:solidFill>
@@ -5841,7 +5841,7 @@
               <a:t>historial</a:t>
             </a:r>
             <a:r>
-              <a:rPr sz="1500" i="0" b="0">
+              <a:rPr sz="1100" i="0" b="0">
                 <a:solidFill>
                   <a:srgbClr val="D4D4D4"/>
                 </a:solidFill>
@@ -5850,7 +5850,7 @@
               <a:t> </a:t>
             </a:r>
             <a:r>
-              <a:rPr sz="1500" i="0" b="0">
+              <a:rPr sz="1100" i="0" b="0">
                 <a:solidFill>
                   <a:srgbClr val="D4D4D4"/>
                 </a:solidFill>
@@ -5859,7 +5859,7 @@
               <a:t>de</a:t>
             </a:r>
             <a:r>
-              <a:rPr sz="1500" i="0" b="0">
+              <a:rPr sz="1100" i="0" b="0">
                 <a:solidFill>
                   <a:srgbClr val="D4D4D4"/>
                 </a:solidFill>
@@ -5868,7 +5868,7 @@
               <a:t> </a:t>
             </a:r>
             <a:r>
-              <a:rPr sz="1500" i="0" b="0">
+              <a:rPr sz="1100" i="0" b="0">
                 <a:solidFill>
                   <a:srgbClr val="D4D4D4"/>
                 </a:solidFill>
@@ -5877,7 +5877,7 @@
               <a:t>atenciones</a:t>
             </a:r>
             <a:r>
-              <a:rPr sz="1500" i="0" b="0">
+              <a:rPr sz="1100" i="0" b="0">
                 <a:solidFill>
                   <a:srgbClr val="D4D4D4"/>
                 </a:solidFill>
@@ -5886,7 +5886,7 @@
               <a:t> </a:t>
             </a:r>
             <a:r>
-              <a:rPr sz="1500" i="0" b="0">
+              <a:rPr sz="1100" i="0" b="0">
                 <a:solidFill>
                   <a:srgbClr val="D4D4D4"/>
                 </a:solidFill>
@@ -5895,7 +5895,7 @@
               <a:t>de</a:t>
             </a:r>
             <a:r>
-              <a:rPr sz="1500" i="0" b="0">
+              <a:rPr sz="1100" i="0" b="0">
                 <a:solidFill>
                   <a:srgbClr val="D4D4D4"/>
                 </a:solidFill>
@@ -5904,7 +5904,7 @@
               <a:t> </a:t>
             </a:r>
             <a:r>
-              <a:rPr sz="1500" i="0" b="0">
+              <a:rPr sz="1100" i="0" b="0">
                 <a:solidFill>
                   <a:srgbClr val="D4D4D4"/>
                 </a:solidFill>
@@ -5913,7 +5913,7 @@
               <a:t>una</a:t>
             </a:r>
             <a:r>
-              <a:rPr sz="1500" i="0" b="0">
+              <a:rPr sz="1100" i="0" b="0">
                 <a:solidFill>
                   <a:srgbClr val="D4D4D4"/>
                 </a:solidFill>
@@ -5922,7 +5922,7 @@
               <a:t> </a:t>
             </a:r>
             <a:r>
-              <a:rPr sz="1500" i="0" b="0">
+              <a:rPr sz="1100" i="0" b="0">
                 <a:solidFill>
                   <a:srgbClr val="D4D4D4"/>
                 </a:solidFill>
@@ -5931,7 +5931,7 @@
               <a:t>mascota</a:t>
             </a:r>
             <a:r>
-              <a:rPr sz="1500" i="0" b="0">
+              <a:rPr sz="1100" i="0" b="0">
                 <a:solidFill>
                   <a:srgbClr val="D4D4D4"/>
                 </a:solidFill>
@@ -5940,7 +5940,7 @@
               <a:t> </a:t>
             </a:r>
             <a:r>
-              <a:rPr sz="1500" i="0" b="0">
+              <a:rPr sz="1100" i="0" b="0">
                 <a:solidFill>
                   <a:srgbClr val="D4D4D4"/>
                 </a:solidFill>
@@ -5949,7 +5949,7 @@
               <a:t>a</a:t>
             </a:r>
             <a:r>
-              <a:rPr sz="1500" i="0" b="0">
+              <a:rPr sz="1100" i="0" b="0">
                 <a:solidFill>
                   <a:srgbClr val="D4D4D4"/>
                 </a:solidFill>
@@ -5958,7 +5958,7 @@
               <a:t> </a:t>
             </a:r>
             <a:r>
-              <a:rPr sz="1500" i="0" b="0">
+              <a:rPr sz="1100" i="0" b="0">
                 <a:solidFill>
                   <a:srgbClr val="D4D4D4"/>
                 </a:solidFill>
@@ -5967,7 +5967,7 @@
               <a:t>partir</a:t>
             </a:r>
             <a:r>
-              <a:rPr sz="1500" i="0" b="0">
+              <a:rPr sz="1100" i="0" b="0">
                 <a:solidFill>
                   <a:srgbClr val="D4D4D4"/>
                 </a:solidFill>
@@ -5976,7 +5976,7 @@
               <a:t> </a:t>
             </a:r>
             <a:r>
-              <a:rPr sz="1500" i="0" b="0">
+              <a:rPr sz="1100" i="0" b="0">
                 <a:solidFill>
                   <a:srgbClr val="D4D4D4"/>
                 </a:solidFill>
@@ -5985,7 +5985,7 @@
               <a:t>del</a:t>
             </a:r>
             <a:r>
-              <a:rPr sz="1500" i="0" b="0">
+              <a:rPr sz="1100" i="0" b="0">
                 <a:solidFill>
                   <a:srgbClr val="D4D4D4"/>
                 </a:solidFill>
@@ -5994,7 +5994,7 @@
               <a:t> </a:t>
             </a:r>
             <a:r>
-              <a:rPr sz="1500" i="0" b="0">
+              <a:rPr sz="1100" i="0" b="0">
                 <a:solidFill>
                   <a:srgbClr val="D4D4D4"/>
                 </a:solidFill>
@@ -6003,7 +6003,7 @@
               <a:t>documento</a:t>
             </a:r>
             <a:r>
-              <a:rPr sz="1500" i="0" b="0">
+              <a:rPr sz="1100" i="0" b="0">
                 <a:solidFill>
                   <a:srgbClr val="D4D4D4"/>
                 </a:solidFill>
@@ -6012,7 +6012,7 @@
               <a:t> </a:t>
             </a:r>
             <a:r>
-              <a:rPr sz="1500" i="0" b="0">
+              <a:rPr sz="1100" i="0" b="0">
                 <a:solidFill>
                   <a:srgbClr val="D4D4D4"/>
                 </a:solidFill>
@@ -6021,7 +6021,7 @@
               <a:t>del</a:t>
             </a:r>
             <a:r>
-              <a:rPr sz="1500" i="0" b="0">
+              <a:rPr sz="1100" i="0" b="0">
                 <a:solidFill>
                   <a:srgbClr val="D4D4D4"/>
                 </a:solidFill>
@@ -6030,7 +6030,7 @@
               <a:t> </a:t>
             </a:r>
             <a:r>
-              <a:rPr sz="1500" i="0" b="0">
+              <a:rPr sz="1100" i="0" b="0">
                 <a:solidFill>
                   <a:srgbClr val="D4D4D4"/>
                 </a:solidFill>
@@ -6039,7 +6039,7 @@
               <a:t>dueno</a:t>
             </a:r>
             <a:r>
-              <a:rPr sz="1500" i="0" b="0">
+              <a:rPr sz="1100" i="0" b="0">
                 <a:solidFill>
                   <a:srgbClr val="D4D4D4"/>
                 </a:solidFill>
@@ -6051,11 +6051,11 @@
           <a:p>
             <a:pPr>
               <a:spcAft>
-                <a:spcPts val="321"/>
+                <a:spcPts val="235"/>
               </a:spcAft>
             </a:pPr>
             <a:r>
-              <a:rPr sz="1500" i="0" b="0">
+              <a:rPr sz="1100" i="0" b="0">
                 <a:solidFill>
                   <a:srgbClr val="D4D4D4"/>
                 </a:solidFill>
@@ -6064,7 +6064,7 @@
               <a:t>Entrada</a:t>
             </a:r>
             <a:r>
-              <a:rPr sz="1500" i="0" b="0">
+              <a:rPr sz="1100" i="0" b="0">
                 <a:solidFill>
                   <a:srgbClr val="D4D4D4"/>
                 </a:solidFill>
@@ -6073,7 +6073,7 @@
               <a:t>: </a:t>
             </a:r>
             <a:r>
-              <a:rPr sz="1500" i="0" b="0">
+              <a:rPr sz="1100" i="0" b="0">
                 <a:solidFill>
                   <a:srgbClr val="D4D4D4"/>
                 </a:solidFill>
@@ -6082,7 +6082,7 @@
               <a:t>documento</a:t>
             </a:r>
             <a:r>
-              <a:rPr sz="1500" i="0" b="0">
+              <a:rPr sz="1100" i="0" b="0">
                 <a:solidFill>
                   <a:srgbClr val="D4D4D4"/>
                 </a:solidFill>
@@ -6091,7 +6091,7 @@
               <a:t> </a:t>
             </a:r>
             <a:r>
-              <a:rPr sz="1500" i="0" b="0">
+              <a:rPr sz="1100" i="0" b="0">
                 <a:solidFill>
                   <a:srgbClr val="D4D4D4"/>
                 </a:solidFill>
@@ -6100,7 +6100,7 @@
               <a:t>del</a:t>
             </a:r>
             <a:r>
-              <a:rPr sz="1500" i="0" b="0">
+              <a:rPr sz="1100" i="0" b="0">
                 <a:solidFill>
                   <a:srgbClr val="D4D4D4"/>
                 </a:solidFill>
@@ -6109,7 +6109,7 @@
               <a:t> </a:t>
             </a:r>
             <a:r>
-              <a:rPr sz="1500" i="0" b="0">
+              <a:rPr sz="1100" i="0" b="0">
                 <a:solidFill>
                   <a:srgbClr val="D4D4D4"/>
                 </a:solidFill>
@@ -6118,7 +6118,7 @@
               <a:t>dueno</a:t>
             </a:r>
             <a:r>
-              <a:rPr sz="1500" i="0" b="0">
+              <a:rPr sz="1100" i="0" b="0">
                 <a:solidFill>
                   <a:srgbClr val="D4D4D4"/>
                 </a:solidFill>
@@ -6127,7 +6127,7 @@
               <a:t> </a:t>
             </a:r>
             <a:r>
-              <a:rPr sz="1500" i="0" b="0">
+              <a:rPr sz="1100" i="0" b="0">
                 <a:solidFill>
                   <a:srgbClr val="D4D4D4"/>
                 </a:solidFill>
@@ -6136,7 +6136,7 @@
               <a:t>o</a:t>
             </a:r>
             <a:r>
-              <a:rPr sz="1500" i="0" b="0">
+              <a:rPr sz="1100" i="0" b="0">
                 <a:solidFill>
                   <a:srgbClr val="D4D4D4"/>
                 </a:solidFill>
@@ -6145,7 +6145,7 @@
               <a:t> </a:t>
             </a:r>
             <a:r>
-              <a:rPr sz="1500" i="0" b="0">
+              <a:rPr sz="1100" i="0" b="0">
                 <a:solidFill>
                   <a:srgbClr val="D4D4D4"/>
                 </a:solidFill>
@@ -6154,7 +6154,7 @@
               <a:t>codigo</a:t>
             </a:r>
             <a:r>
-              <a:rPr sz="1500" i="0" b="0">
+              <a:rPr sz="1100" i="0" b="0">
                 <a:solidFill>
                   <a:srgbClr val="D4D4D4"/>
                 </a:solidFill>
@@ -6163,7 +6163,7 @@
               <a:t> </a:t>
             </a:r>
             <a:r>
-              <a:rPr sz="1500" i="0" b="0">
+              <a:rPr sz="1100" i="0" b="0">
                 <a:solidFill>
                   <a:srgbClr val="D4D4D4"/>
                 </a:solidFill>
@@ -6172,7 +6172,7 @@
               <a:t>de</a:t>
             </a:r>
             <a:r>
-              <a:rPr sz="1500" i="0" b="0">
+              <a:rPr sz="1100" i="0" b="0">
                 <a:solidFill>
                   <a:srgbClr val="D4D4D4"/>
                 </a:solidFill>
@@ -6181,7 +6181,7 @@
               <a:t> </a:t>
             </a:r>
             <a:r>
-              <a:rPr sz="1500" i="0" b="0">
+              <a:rPr sz="1100" i="0" b="0">
                 <a:solidFill>
                   <a:srgbClr val="D4D4D4"/>
                 </a:solidFill>
@@ -6190,7 +6190,7 @@
               <a:t>la</a:t>
             </a:r>
             <a:r>
-              <a:rPr sz="1500" i="0" b="0">
+              <a:rPr sz="1100" i="0" b="0">
                 <a:solidFill>
                   <a:srgbClr val="D4D4D4"/>
                 </a:solidFill>
@@ -6199,7 +6199,7 @@
               <a:t> </a:t>
             </a:r>
             <a:r>
-              <a:rPr sz="1500" i="0" b="0">
+              <a:rPr sz="1100" i="0" b="0">
                 <a:solidFill>
                   <a:srgbClr val="D4D4D4"/>
                 </a:solidFill>
@@ -6211,11 +6211,11 @@
           <a:p>
             <a:pPr>
               <a:spcAft>
-                <a:spcPts val="321"/>
+                <a:spcPts val="235"/>
               </a:spcAft>
             </a:pPr>
             <a:r>
-              <a:rPr sz="1500" i="0" b="0">
+              <a:rPr sz="1100" i="0" b="0">
                 <a:solidFill>
                   <a:srgbClr val="D4D4D4"/>
                 </a:solidFill>
@@ -6224,7 +6224,7 @@
               <a:t>Salida</a:t>
             </a:r>
             <a:r>
-              <a:rPr sz="1500" i="0" b="0">
+              <a:rPr sz="1100" i="0" b="0">
                 <a:solidFill>
                   <a:srgbClr val="D4D4D4"/>
                 </a:solidFill>
@@ -6233,7 +6233,7 @@
               <a:t>: </a:t>
             </a:r>
             <a:r>
-              <a:rPr sz="1500" i="0" b="0">
+              <a:rPr sz="1100" i="0" b="0">
                 <a:solidFill>
                   <a:srgbClr val="D4D4D4"/>
                 </a:solidFill>
@@ -6242,7 +6242,7 @@
               <a:t>lista</a:t>
             </a:r>
             <a:r>
-              <a:rPr sz="1500" i="0" b="0">
+              <a:rPr sz="1100" i="0" b="0">
                 <a:solidFill>
                   <a:srgbClr val="D4D4D4"/>
                 </a:solidFill>
@@ -6251,7 +6251,7 @@
               <a:t> </a:t>
             </a:r>
             <a:r>
-              <a:rPr sz="1500" i="0" b="0">
+              <a:rPr sz="1100" i="0" b="0">
                 <a:solidFill>
                   <a:srgbClr val="D4D4D4"/>
                 </a:solidFill>
@@ -6260,7 +6260,7 @@
               <a:t>de</a:t>
             </a:r>
             <a:r>
-              <a:rPr sz="1500" i="0" b="0">
+              <a:rPr sz="1100" i="0" b="0">
                 <a:solidFill>
                   <a:srgbClr val="D4D4D4"/>
                 </a:solidFill>
@@ -6269,7 +6269,7 @@
               <a:t> </a:t>
             </a:r>
             <a:r>
-              <a:rPr sz="1500" i="0" b="0">
+              <a:rPr sz="1100" i="0" b="0">
                 <a:solidFill>
                   <a:srgbClr val="D4D4D4"/>
                 </a:solidFill>
@@ -6278,7 +6278,7 @@
               <a:t>atenciones</a:t>
             </a:r>
             <a:r>
-              <a:rPr sz="1500" i="0" b="0">
+              <a:rPr sz="1100" i="0" b="0">
                 <a:solidFill>
                   <a:srgbClr val="D4D4D4"/>
                 </a:solidFill>
@@ -6287,7 +6287,7 @@
               <a:t> </a:t>
             </a:r>
             <a:r>
-              <a:rPr sz="1500" i="0" b="0">
+              <a:rPr sz="1100" i="0" b="0">
                 <a:solidFill>
                   <a:srgbClr val="D4D4D4"/>
                 </a:solidFill>
@@ -6296,7 +6296,7 @@
               <a:t>con</a:t>
             </a:r>
             <a:r>
-              <a:rPr sz="1500" i="0" b="0">
+              <a:rPr sz="1100" i="0" b="0">
                 <a:solidFill>
                   <a:srgbClr val="D4D4D4"/>
                 </a:solidFill>
@@ -6305,7 +6305,7 @@
               <a:t> </a:t>
             </a:r>
             <a:r>
-              <a:rPr sz="1500" i="0" b="0">
+              <a:rPr sz="1100" i="0" b="0">
                 <a:solidFill>
                   <a:srgbClr val="D4D4D4"/>
                 </a:solidFill>
@@ -6314,7 +6314,7 @@
               <a:t>fecha</a:t>
             </a:r>
             <a:r>
-              <a:rPr sz="1500" i="0" b="0">
+              <a:rPr sz="1100" i="0" b="0">
                 <a:solidFill>
                   <a:srgbClr val="D4D4D4"/>
                 </a:solidFill>
@@ -6323,7 +6323,7 @@
               <a:t>, </a:t>
             </a:r>
             <a:r>
-              <a:rPr sz="1500" i="0" b="0">
+              <a:rPr sz="1100" i="0" b="0">
                 <a:solidFill>
                   <a:srgbClr val="D4D4D4"/>
                 </a:solidFill>
@@ -6332,7 +6332,7 @@
               <a:t>motivo</a:t>
             </a:r>
             <a:r>
-              <a:rPr sz="1500" i="0" b="0">
+              <a:rPr sz="1100" i="0" b="0">
                 <a:solidFill>
                   <a:srgbClr val="D4D4D4"/>
                 </a:solidFill>
@@ -6341,7 +6341,7 @@
               <a:t>, </a:t>
             </a:r>
             <a:r>
-              <a:rPr sz="1500" i="0" b="0">
+              <a:rPr sz="1100" i="0" b="0">
                 <a:solidFill>
                   <a:srgbClr val="D4D4D4"/>
                 </a:solidFill>
@@ -6350,7 +6350,7 @@
               <a:t>diagnostico</a:t>
             </a:r>
             <a:r>
-              <a:rPr sz="1500" i="0" b="0">
+              <a:rPr sz="1100" i="0" b="0">
                 <a:solidFill>
                   <a:srgbClr val="D4D4D4"/>
                 </a:solidFill>
@@ -6359,7 +6359,7 @@
               <a:t> </a:t>
             </a:r>
             <a:r>
-              <a:rPr sz="1500" i="0" b="0">
+              <a:rPr sz="1100" i="0" b="0">
                 <a:solidFill>
                   <a:srgbClr val="D4D4D4"/>
                 </a:solidFill>
@@ -6368,7 +6368,7 @@
               <a:t>y</a:t>
             </a:r>
             <a:r>
-              <a:rPr sz="1500" i="0" b="0">
+              <a:rPr sz="1100" i="0" b="0">
                 <a:solidFill>
                   <a:srgbClr val="D4D4D4"/>
                 </a:solidFill>
@@ -6377,7 +6377,7 @@
               <a:t> </a:t>
             </a:r>
             <a:r>
-              <a:rPr sz="1500" i="0" b="0">
+              <a:rPr sz="1100" i="0" b="0">
                 <a:solidFill>
                   <a:srgbClr val="D4D4D4"/>
                 </a:solidFill>
@@ -6386,7 +6386,7 @@
               <a:t>veterinario</a:t>
             </a:r>
             <a:r>
-              <a:rPr sz="1500" i="0" b="0">
+              <a:rPr sz="1100" i="0" b="0">
                 <a:solidFill>
                   <a:srgbClr val="D4D4D4"/>
                 </a:solidFill>
@@ -6395,7 +6395,7 @@
               <a:t>, </a:t>
             </a:r>
             <a:r>
-              <a:rPr sz="1500" i="0" b="0">
+              <a:rPr sz="1100" i="0" b="0">
                 <a:solidFill>
                   <a:srgbClr val="D4D4D4"/>
                 </a:solidFill>
@@ -6404,7 +6404,7 @@
               <a:t>ordenada</a:t>
             </a:r>
             <a:r>
-              <a:rPr sz="1500" i="0" b="0">
+              <a:rPr sz="1100" i="0" b="0">
                 <a:solidFill>
                   <a:srgbClr val="D4D4D4"/>
                 </a:solidFill>
@@ -6413,7 +6413,7 @@
               <a:t> </a:t>
             </a:r>
             <a:r>
-              <a:rPr sz="1500" i="0" b="0">
+              <a:rPr sz="1100" i="0" b="0">
                 <a:solidFill>
                   <a:srgbClr val="D4D4D4"/>
                 </a:solidFill>
@@ -6422,7 +6422,7 @@
               <a:t>de</a:t>
             </a:r>
             <a:r>
-              <a:rPr sz="1500" i="0" b="0">
+              <a:rPr sz="1100" i="0" b="0">
                 <a:solidFill>
                   <a:srgbClr val="D4D4D4"/>
                 </a:solidFill>
@@ -6431,7 +6431,7 @@
               <a:t> </a:t>
             </a:r>
             <a:r>
-              <a:rPr sz="1500" i="0" b="0">
+              <a:rPr sz="1100" i="0" b="0">
                 <a:solidFill>
                   <a:srgbClr val="D4D4D4"/>
                 </a:solidFill>
@@ -6440,7 +6440,7 @@
               <a:t>la</a:t>
             </a:r>
             <a:r>
-              <a:rPr sz="1500" i="0" b="0">
+              <a:rPr sz="1100" i="0" b="0">
                 <a:solidFill>
                   <a:srgbClr val="D4D4D4"/>
                 </a:solidFill>
@@ -6449,7 +6449,7 @@
               <a:t> </a:t>
             </a:r>
             <a:r>
-              <a:rPr sz="1500" i="0" b="0">
+              <a:rPr sz="1100" i="0" b="0">
                 <a:solidFill>
                   <a:srgbClr val="D4D4D4"/>
                 </a:solidFill>
@@ -6458,7 +6458,7 @@
               <a:t>mas</a:t>
             </a:r>
             <a:r>
-              <a:rPr sz="1500" i="0" b="0">
+              <a:rPr sz="1100" i="0" b="0">
                 <a:solidFill>
                   <a:srgbClr val="D4D4D4"/>
                 </a:solidFill>
@@ -6467,7 +6467,7 @@
               <a:t> </a:t>
             </a:r>
             <a:r>
-              <a:rPr sz="1500" i="0" b="0">
+              <a:rPr sz="1100" i="0" b="0">
                 <a:solidFill>
                   <a:srgbClr val="D4D4D4"/>
                 </a:solidFill>
@@ -6476,7 +6476,7 @@
               <a:t>reciente</a:t>
             </a:r>
             <a:r>
-              <a:rPr sz="1500" i="0" b="0">
+              <a:rPr sz="1100" i="0" b="0">
                 <a:solidFill>
                   <a:srgbClr val="D4D4D4"/>
                 </a:solidFill>
@@ -6485,7 +6485,7 @@
               <a:t> </a:t>
             </a:r>
             <a:r>
-              <a:rPr sz="1500" i="0" b="0">
+              <a:rPr sz="1100" i="0" b="0">
                 <a:solidFill>
                   <a:srgbClr val="D4D4D4"/>
                 </a:solidFill>
@@ -6494,7 +6494,7 @@
               <a:t>a</a:t>
             </a:r>
             <a:r>
-              <a:rPr sz="1500" i="0" b="0">
+              <a:rPr sz="1100" i="0" b="0">
                 <a:solidFill>
                   <a:srgbClr val="D4D4D4"/>
                 </a:solidFill>
@@ -6503,7 +6503,7 @@
               <a:t> </a:t>
             </a:r>
             <a:r>
-              <a:rPr sz="1500" i="0" b="0">
+              <a:rPr sz="1100" i="0" b="0">
                 <a:solidFill>
                   <a:srgbClr val="D4D4D4"/>
                 </a:solidFill>
@@ -6512,7 +6512,7 @@
               <a:t>la</a:t>
             </a:r>
             <a:r>
-              <a:rPr sz="1500" i="0" b="0">
+              <a:rPr sz="1100" i="0" b="0">
                 <a:solidFill>
                   <a:srgbClr val="D4D4D4"/>
                 </a:solidFill>
@@ -6521,7 +6521,7 @@
               <a:t> </a:t>
             </a:r>
             <a:r>
-              <a:rPr sz="1500" i="0" b="0">
+              <a:rPr sz="1100" i="0" b="0">
                 <a:solidFill>
                   <a:srgbClr val="D4D4D4"/>
                 </a:solidFill>
@@ -6530,7 +6530,7 @@
               <a:t>mas</a:t>
             </a:r>
             <a:r>
-              <a:rPr sz="1500" i="0" b="0">
+              <a:rPr sz="1100" i="0" b="0">
                 <a:solidFill>
                   <a:srgbClr val="D4D4D4"/>
                 </a:solidFill>
@@ -6539,7 +6539,7 @@
               <a:t> </a:t>
             </a:r>
             <a:r>
-              <a:rPr sz="1500" i="0" b="0">
+              <a:rPr sz="1100" i="0" b="0">
                 <a:solidFill>
                   <a:srgbClr val="D4D4D4"/>
                 </a:solidFill>
@@ -6551,11 +6551,11 @@
           <a:p>
             <a:pPr>
               <a:spcAft>
-                <a:spcPts val="321"/>
+                <a:spcPts val="235"/>
               </a:spcAft>
             </a:pPr>
             <a:r>
-              <a:rPr sz="1500" i="0" b="0">
+              <a:rPr sz="1100" i="0" b="0">
                 <a:solidFill>
                   <a:srgbClr val="D4D4D4"/>
                 </a:solidFill>
@@ -6564,7 +6564,7 @@
               <a:t>Regla</a:t>
             </a:r>
             <a:r>
-              <a:rPr sz="1500" i="0" b="0">
+              <a:rPr sz="1100" i="0" b="0">
                 <a:solidFill>
                   <a:srgbClr val="D4D4D4"/>
                 </a:solidFill>
@@ -6573,7 +6573,7 @@
               <a:t> </a:t>
             </a:r>
             <a:r>
-              <a:rPr sz="1500" i="0" b="0">
+              <a:rPr sz="1100" i="0" b="0">
                 <a:solidFill>
                   <a:srgbClr val="D4D4D4"/>
                 </a:solidFill>
@@ -6582,7 +6582,7 @@
               <a:t>de</a:t>
             </a:r>
             <a:r>
-              <a:rPr sz="1500" i="0" b="0">
+              <a:rPr sz="1100" i="0" b="0">
                 <a:solidFill>
                   <a:srgbClr val="D4D4D4"/>
                 </a:solidFill>
@@ -6591,7 +6591,7 @@
               <a:t> </a:t>
             </a:r>
             <a:r>
-              <a:rPr sz="1500" i="0" b="0">
+              <a:rPr sz="1100" i="0" b="0">
                 <a:solidFill>
                   <a:srgbClr val="D4D4D4"/>
                 </a:solidFill>
@@ -6600,7 +6600,7 @@
               <a:t>negocio</a:t>
             </a:r>
             <a:r>
-              <a:rPr sz="1500" i="0" b="0">
+              <a:rPr sz="1100" i="0" b="0">
                 <a:solidFill>
                   <a:srgbClr val="D4D4D4"/>
                 </a:solidFill>
@@ -6609,7 +6609,7 @@
               <a:t>: </a:t>
             </a:r>
             <a:r>
-              <a:rPr sz="1500" i="0" b="0">
+              <a:rPr sz="1100" i="0" b="0">
                 <a:solidFill>
                   <a:srgbClr val="D4D4D4"/>
                 </a:solidFill>
@@ -6618,7 +6618,7 @@
               <a:t>RN</a:t>
             </a:r>
             <a:r>
-              <a:rPr sz="1500" i="0" b="0">
+              <a:rPr sz="1100" i="0" b="0">
                 <a:solidFill>
                   <a:srgbClr val="D4D4D4"/>
                 </a:solidFill>
@@ -6627,7 +6627,7 @@
               <a:t>-</a:t>
             </a:r>
             <a:r>
-              <a:rPr sz="1500" i="0" b="0">
+              <a:rPr sz="1100" i="0" b="0">
                 <a:solidFill>
                   <a:srgbClr val="B5CEA8"/>
                 </a:solidFill>
@@ -6636,7 +6636,7 @@
               <a:t>02</a:t>
             </a:r>
             <a:r>
-              <a:rPr sz="1500" i="0" b="0">
+              <a:rPr sz="1100" i="0" b="0">
                 <a:solidFill>
                   <a:srgbClr val="D4D4D4"/>
                 </a:solidFill>
@@ -6645,7 +6645,7 @@
               <a:t> </a:t>
             </a:r>
             <a:r>
-              <a:rPr sz="1500" i="0" b="0">
+              <a:rPr sz="1100" i="0" b="0">
                 <a:solidFill>
                   <a:srgbClr val="D4D4D4"/>
                 </a:solidFill>
@@ -6654,7 +6654,7 @@
               <a:t>una</a:t>
             </a:r>
             <a:r>
-              <a:rPr sz="1500" i="0" b="0">
+              <a:rPr sz="1100" i="0" b="0">
                 <a:solidFill>
                   <a:srgbClr val="D4D4D4"/>
                 </a:solidFill>
@@ -6663,7 +6663,7 @@
               <a:t> </a:t>
             </a:r>
             <a:r>
-              <a:rPr sz="1500" i="0" b="0">
+              <a:rPr sz="1100" i="0" b="0">
                 <a:solidFill>
                   <a:srgbClr val="D4D4D4"/>
                 </a:solidFill>
@@ -6672,7 +6672,7 @@
               <a:t>mascota</a:t>
             </a:r>
             <a:r>
-              <a:rPr sz="1500" i="0" b="0">
+              <a:rPr sz="1100" i="0" b="0">
                 <a:solidFill>
                   <a:srgbClr val="D4D4D4"/>
                 </a:solidFill>
@@ -6681,7 +6681,7 @@
               <a:t> </a:t>
             </a:r>
             <a:r>
-              <a:rPr sz="1500" i="0" b="0">
+              <a:rPr sz="1100" i="0" b="0">
                 <a:solidFill>
                   <a:srgbClr val="D4D4D4"/>
                 </a:solidFill>
@@ -6690,7 +6690,7 @@
               <a:t>siempre</a:t>
             </a:r>
             <a:r>
-              <a:rPr sz="1500" i="0" b="0">
+              <a:rPr sz="1100" i="0" b="0">
                 <a:solidFill>
                   <a:srgbClr val="D4D4D4"/>
                 </a:solidFill>
@@ -6699,7 +6699,7 @@
               <a:t> </a:t>
             </a:r>
             <a:r>
-              <a:rPr sz="1500" i="0" b="0">
+              <a:rPr sz="1100" i="0" b="0">
                 <a:solidFill>
                   <a:srgbClr val="D4D4D4"/>
                 </a:solidFill>
@@ -6708,7 +6708,7 @@
               <a:t>pertenece</a:t>
             </a:r>
             <a:r>
-              <a:rPr sz="1500" i="0" b="0">
+              <a:rPr sz="1100" i="0" b="0">
                 <a:solidFill>
                   <a:srgbClr val="D4D4D4"/>
                 </a:solidFill>
@@ -6717,7 +6717,7 @@
               <a:t> </a:t>
             </a:r>
             <a:r>
-              <a:rPr sz="1500" i="0" b="0">
+              <a:rPr sz="1100" i="0" b="0">
                 <a:solidFill>
                   <a:srgbClr val="D4D4D4"/>
                 </a:solidFill>
@@ -6726,7 +6726,7 @@
               <a:t>a</a:t>
             </a:r>
             <a:r>
-              <a:rPr sz="1500" i="0" b="0">
+              <a:rPr sz="1100" i="0" b="0">
                 <a:solidFill>
                   <a:srgbClr val="D4D4D4"/>
                 </a:solidFill>
@@ -6735,7 +6735,7 @@
               <a:t> </a:t>
             </a:r>
             <a:r>
-              <a:rPr sz="1500" i="0" b="0">
+              <a:rPr sz="1100" i="0" b="0">
                 <a:solidFill>
                   <a:srgbClr val="D4D4D4"/>
                 </a:solidFill>
@@ -6744,7 +6744,7 @@
               <a:t>un</a:t>
             </a:r>
             <a:r>
-              <a:rPr sz="1500" i="0" b="0">
+              <a:rPr sz="1100" i="0" b="0">
                 <a:solidFill>
                   <a:srgbClr val="D4D4D4"/>
                 </a:solidFill>
@@ -6753,7 +6753,7 @@
               <a:t> </a:t>
             </a:r>
             <a:r>
-              <a:rPr sz="1500" i="0" b="0">
+              <a:rPr sz="1100" i="0" b="0">
                 <a:solidFill>
                   <a:srgbClr val="D4D4D4"/>
                 </a:solidFill>
@@ -6762,7 +6762,7 @@
               <a:t>unico</a:t>
             </a:r>
             <a:r>
-              <a:rPr sz="1500" i="0" b="0">
+              <a:rPr sz="1100" i="0" b="0">
                 <a:solidFill>
                   <a:srgbClr val="D4D4D4"/>
                 </a:solidFill>
@@ -6771,7 +6771,7 @@
               <a:t> </a:t>
             </a:r>
             <a:r>
-              <a:rPr sz="1500" i="0" b="0">
+              <a:rPr sz="1100" i="0" b="0">
                 <a:solidFill>
                   <a:srgbClr val="D4D4D4"/>
                 </a:solidFill>
@@ -6780,7 +6780,7 @@
               <a:t>dueno</a:t>
             </a:r>
             <a:r>
-              <a:rPr sz="1500" i="0" b="0">
+              <a:rPr sz="1100" i="0" b="0">
                 <a:solidFill>
                   <a:srgbClr val="D4D4D4"/>
                 </a:solidFill>
@@ -6789,7 +6789,7 @@
               <a:t> </a:t>
             </a:r>
             <a:r>
-              <a:rPr sz="1500" i="0" b="0">
+              <a:rPr sz="1100" i="0" b="0">
                 <a:solidFill>
                   <a:srgbClr val="D4D4D4"/>
                 </a:solidFill>
@@ -6801,11 +6801,11 @@
           <a:p>
             <a:pPr>
               <a:spcAft>
-                <a:spcPts val="321"/>
+                <a:spcPts val="235"/>
               </a:spcAft>
             </a:pPr>
             <a:r>
-              <a:rPr sz="1500" i="0" b="0">
+              <a:rPr sz="1100" i="0" b="0">
                 <a:solidFill>
                   <a:srgbClr val="D4D4D4"/>
                 </a:solidFill>
@@ -6814,7 +6814,7 @@
               <a:t>Criterio</a:t>
             </a:r>
             <a:r>
-              <a:rPr sz="1500" i="0" b="0">
+              <a:rPr sz="1100" i="0" b="0">
                 <a:solidFill>
                   <a:srgbClr val="D4D4D4"/>
                 </a:solidFill>
@@ -6823,7 +6823,7 @@
               <a:t> </a:t>
             </a:r>
             <a:r>
-              <a:rPr sz="1500" i="0" b="0">
+              <a:rPr sz="1100" i="0" b="0">
                 <a:solidFill>
                   <a:srgbClr val="D4D4D4"/>
                 </a:solidFill>
@@ -6832,7 +6832,7 @@
               <a:t>de</a:t>
             </a:r>
             <a:r>
-              <a:rPr sz="1500" i="0" b="0">
+              <a:rPr sz="1100" i="0" b="0">
                 <a:solidFill>
                   <a:srgbClr val="D4D4D4"/>
                 </a:solidFill>
@@ -6841,7 +6841,7 @@
               <a:t> </a:t>
             </a:r>
             <a:r>
-              <a:rPr sz="1500" i="0" b="0">
+              <a:rPr sz="1100" i="0" b="0">
                 <a:solidFill>
                   <a:srgbClr val="D4D4D4"/>
                 </a:solidFill>
@@ -6850,7 +6850,7 @@
               <a:t>verificacion</a:t>
             </a:r>
             <a:r>
-              <a:rPr sz="1500" i="0" b="0">
+              <a:rPr sz="1100" i="0" b="0">
                 <a:solidFill>
                   <a:srgbClr val="D4D4D4"/>
                 </a:solidFill>
@@ -6859,7 +6859,7 @@
               <a:t>: </a:t>
             </a:r>
             <a:r>
-              <a:rPr sz="1500" i="0" b="0">
+              <a:rPr sz="1100" i="0" b="0">
                 <a:solidFill>
                   <a:srgbClr val="D4D4D4"/>
                 </a:solidFill>
@@ -6868,7 +6868,7 @@
               <a:t>dado</a:t>
             </a:r>
             <a:r>
-              <a:rPr sz="1500" i="0" b="0">
+              <a:rPr sz="1100" i="0" b="0">
                 <a:solidFill>
                   <a:srgbClr val="D4D4D4"/>
                 </a:solidFill>
@@ -6877,7 +6877,7 @@
               <a:t> </a:t>
             </a:r>
             <a:r>
-              <a:rPr sz="1500" i="0" b="0">
+              <a:rPr sz="1100" i="0" b="0">
                 <a:solidFill>
                   <a:srgbClr val="D4D4D4"/>
                 </a:solidFill>
@@ -6886,7 +6886,7 @@
               <a:t>un</a:t>
             </a:r>
             <a:r>
-              <a:rPr sz="1500" i="0" b="0">
+              <a:rPr sz="1100" i="0" b="0">
                 <a:solidFill>
                   <a:srgbClr val="D4D4D4"/>
                 </a:solidFill>
@@ -6895,7 +6895,7 @@
               <a:t> </a:t>
             </a:r>
             <a:r>
-              <a:rPr sz="1500" i="0" b="0">
+              <a:rPr sz="1100" i="0" b="0">
                 <a:solidFill>
                   <a:srgbClr val="D4D4D4"/>
                 </a:solidFill>
@@ -6904,7 +6904,7 @@
               <a:t>dueno</a:t>
             </a:r>
             <a:r>
-              <a:rPr sz="1500" i="0" b="0">
+              <a:rPr sz="1100" i="0" b="0">
                 <a:solidFill>
                   <a:srgbClr val="D4D4D4"/>
                 </a:solidFill>
@@ -6913,7 +6913,7 @@
               <a:t> </a:t>
             </a:r>
             <a:r>
-              <a:rPr sz="1500" i="0" b="0">
+              <a:rPr sz="1100" i="0" b="0">
                 <a:solidFill>
                   <a:srgbClr val="D4D4D4"/>
                 </a:solidFill>
@@ -6922,7 +6922,7 @@
               <a:t>con</a:t>
             </a:r>
             <a:r>
-              <a:rPr sz="1500" i="0" b="0">
+              <a:rPr sz="1100" i="0" b="0">
                 <a:solidFill>
                   <a:srgbClr val="D4D4D4"/>
                 </a:solidFill>
@@ -6931,7 +6931,7 @@
               <a:t> </a:t>
             </a:r>
             <a:r>
-              <a:rPr sz="1500" i="0" b="0">
+              <a:rPr sz="1100" i="0" b="0">
                 <a:solidFill>
                   <a:srgbClr val="B5CEA8"/>
                 </a:solidFill>
@@ -6940,7 +6940,7 @@
               <a:t>12</a:t>
             </a:r>
             <a:r>
-              <a:rPr sz="1500" i="0" b="0">
+              <a:rPr sz="1100" i="0" b="0">
                 <a:solidFill>
                   <a:srgbClr val="D4D4D4"/>
                 </a:solidFill>
@@ -6949,7 +6949,7 @@
               <a:t> </a:t>
             </a:r>
             <a:r>
-              <a:rPr sz="1500" i="0" b="0">
+              <a:rPr sz="1100" i="0" b="0">
                 <a:solidFill>
                   <a:srgbClr val="D4D4D4"/>
                 </a:solidFill>
@@ -6958,7 +6958,7 @@
               <a:t>atenciones</a:t>
             </a:r>
             <a:r>
-              <a:rPr sz="1500" i="0" b="0">
+              <a:rPr sz="1100" i="0" b="0">
                 <a:solidFill>
                   <a:srgbClr val="D4D4D4"/>
                 </a:solidFill>
@@ -6967,7 +6967,7 @@
               <a:t>, </a:t>
             </a:r>
             <a:r>
-              <a:rPr sz="1500" i="0" b="0">
+              <a:rPr sz="1100" i="0" b="0">
                 <a:solidFill>
                   <a:srgbClr val="D4D4D4"/>
                 </a:solidFill>
@@ -6976,7 +6976,7 @@
               <a:t>la</a:t>
             </a:r>
             <a:r>
-              <a:rPr sz="1500" i="0" b="0">
+              <a:rPr sz="1100" i="0" b="0">
                 <a:solidFill>
                   <a:srgbClr val="D4D4D4"/>
                 </a:solidFill>
@@ -6985,7 +6985,7 @@
               <a:t> </a:t>
             </a:r>
             <a:r>
-              <a:rPr sz="1500" i="0" b="0">
+              <a:rPr sz="1100" i="0" b="0">
                 <a:solidFill>
                   <a:srgbClr val="D4D4D4"/>
                 </a:solidFill>
@@ -6994,7 +6994,7 @@
               <a:t>busqueda</a:t>
             </a:r>
             <a:r>
-              <a:rPr sz="1500" i="0" b="0">
+              <a:rPr sz="1100" i="0" b="0">
                 <a:solidFill>
                   <a:srgbClr val="D4D4D4"/>
                 </a:solidFill>
@@ -7003,7 +7003,7 @@
               <a:t> </a:t>
             </a:r>
             <a:r>
-              <a:rPr sz="1500" i="0" b="0">
+              <a:rPr sz="1100" i="0" b="0">
                 <a:solidFill>
                   <a:srgbClr val="D4D4D4"/>
                 </a:solidFill>
@@ -7012,7 +7012,7 @@
               <a:t>por</a:t>
             </a:r>
             <a:r>
-              <a:rPr sz="1500" i="0" b="0">
+              <a:rPr sz="1100" i="0" b="0">
                 <a:solidFill>
                   <a:srgbClr val="D4D4D4"/>
                 </a:solidFill>
@@ -7021,7 +7021,7 @@
               <a:t> </a:t>
             </a:r>
             <a:r>
-              <a:rPr sz="1500" i="0" b="0">
+              <a:rPr sz="1100" i="0" b="0">
                 <a:solidFill>
                   <a:srgbClr val="D4D4D4"/>
                 </a:solidFill>
@@ -7030,7 +7030,7 @@
               <a:t>documento</a:t>
             </a:r>
             <a:r>
-              <a:rPr sz="1500" i="0" b="0">
+              <a:rPr sz="1100" i="0" b="0">
                 <a:solidFill>
                   <a:srgbClr val="D4D4D4"/>
                 </a:solidFill>
@@ -7039,7 +7039,7 @@
               <a:t> </a:t>
             </a:r>
             <a:r>
-              <a:rPr sz="1500" i="0" b="0">
+              <a:rPr sz="1100" i="0" b="0">
                 <a:solidFill>
                   <a:srgbClr val="D4D4D4"/>
                 </a:solidFill>
@@ -7048,7 +7048,7 @@
               <a:t>devuelve</a:t>
             </a:r>
             <a:r>
-              <a:rPr sz="1500" i="0" b="0">
+              <a:rPr sz="1100" i="0" b="0">
                 <a:solidFill>
                   <a:srgbClr val="D4D4D4"/>
                 </a:solidFill>
@@ -7057,7 +7057,7 @@
               <a:t> </a:t>
             </a:r>
             <a:r>
-              <a:rPr sz="1500" i="0" b="0">
+              <a:rPr sz="1100" i="0" b="0">
                 <a:solidFill>
                   <a:srgbClr val="D4D4D4"/>
                 </a:solidFill>
@@ -7066,7 +7066,7 @@
               <a:t>las</a:t>
             </a:r>
             <a:r>
-              <a:rPr sz="1500" i="0" b="0">
+              <a:rPr sz="1100" i="0" b="0">
                 <a:solidFill>
                   <a:srgbClr val="D4D4D4"/>
                 </a:solidFill>
@@ -7075,7 +7075,7 @@
               <a:t> </a:t>
             </a:r>
             <a:r>
-              <a:rPr sz="1500" i="0" b="0">
+              <a:rPr sz="1100" i="0" b="0">
                 <a:solidFill>
                   <a:srgbClr val="B5CEA8"/>
                 </a:solidFill>
@@ -7084,7 +7084,7 @@
               <a:t>12</a:t>
             </a:r>
             <a:r>
-              <a:rPr sz="1500" i="0" b="0">
+              <a:rPr sz="1100" i="0" b="0">
                 <a:solidFill>
                   <a:srgbClr val="D4D4D4"/>
                 </a:solidFill>
@@ -7093,7 +7093,7 @@
               <a:t> </a:t>
             </a:r>
             <a:r>
-              <a:rPr sz="1500" i="0" b="0">
+              <a:rPr sz="1100" i="0" b="0">
                 <a:solidFill>
                   <a:srgbClr val="D4D4D4"/>
                 </a:solidFill>
@@ -7102,7 +7102,7 @@
               <a:t>en</a:t>
             </a:r>
             <a:r>
-              <a:rPr sz="1500" i="0" b="0">
+              <a:rPr sz="1100" i="0" b="0">
                 <a:solidFill>
                   <a:srgbClr val="D4D4D4"/>
                 </a:solidFill>
@@ -7111,7 +7111,7 @@
               <a:t> </a:t>
             </a:r>
             <a:r>
-              <a:rPr sz="1500" i="0" b="0">
+              <a:rPr sz="1100" i="0" b="0">
                 <a:solidFill>
                   <a:srgbClr val="B5CEA8"/>
                 </a:solidFill>
@@ -7120,7 +7120,7 @@
               <a:t>3</a:t>
             </a:r>
             <a:r>
-              <a:rPr sz="1500" i="0" b="0">
+              <a:rPr sz="1100" i="0" b="0">
                 <a:solidFill>
                   <a:srgbClr val="D4D4D4"/>
                 </a:solidFill>
@@ -7129,7 +7129,7 @@
               <a:t> </a:t>
             </a:r>
             <a:r>
-              <a:rPr sz="1500" i="0" b="0">
+              <a:rPr sz="1100" i="0" b="0">
                 <a:solidFill>
                   <a:srgbClr val="D4D4D4"/>
                 </a:solidFill>
@@ -7138,7 +7138,7 @@
               <a:t>segundos</a:t>
             </a:r>
             <a:r>
-              <a:rPr sz="1500" i="0" b="0">
+              <a:rPr sz="1100" i="0" b="0">
                 <a:solidFill>
                   <a:srgbClr val="D4D4D4"/>
                 </a:solidFill>
@@ -7147,7 +7147,7 @@
               <a:t> </a:t>
             </a:r>
             <a:r>
-              <a:rPr sz="1500" i="0" b="0">
+              <a:rPr sz="1100" i="0" b="0">
                 <a:solidFill>
                   <a:srgbClr val="D4D4D4"/>
                 </a:solidFill>
@@ -7156,7 +7156,7 @@
               <a:t>o</a:t>
             </a:r>
             <a:r>
-              <a:rPr sz="1500" i="0" b="0">
+              <a:rPr sz="1100" i="0" b="0">
                 <a:solidFill>
                   <a:srgbClr val="D4D4D4"/>
                 </a:solidFill>
@@ -7165,7 +7165,7 @@
               <a:t> </a:t>
             </a:r>
             <a:r>
-              <a:rPr sz="1500" i="0" b="0">
+              <a:rPr sz="1100" i="0" b="0">
                 <a:solidFill>
                   <a:srgbClr val="D4D4D4"/>
                 </a:solidFill>
@@ -7177,11 +7177,11 @@
           <a:p>
             <a:pPr>
               <a:spcAft>
-                <a:spcPts val="321"/>
+                <a:spcPts val="235"/>
               </a:spcAft>
             </a:pPr>
             <a:r>
-              <a:rPr sz="1500" i="0" b="0">
+              <a:rPr sz="1100" i="0" b="0">
                 <a:solidFill>
                   <a:srgbClr val="D4D4D4"/>
                 </a:solidFill>
@@ -7190,7 +7190,7 @@
               <a:t>Prioridad</a:t>
             </a:r>
             <a:r>
-              <a:rPr sz="1500" i="0" b="0">
+              <a:rPr sz="1100" i="0" b="0">
                 <a:solidFill>
                   <a:srgbClr val="D4D4D4"/>
                 </a:solidFill>
@@ -7199,7 +7199,7 @@
               <a:t> </a:t>
             </a:r>
             <a:r>
-              <a:rPr sz="1500" i="0" b="0">
+              <a:rPr sz="1100" i="0" b="0">
                 <a:solidFill>
                   <a:srgbClr val="D4D4D4"/>
                 </a:solidFill>
@@ -7208,7 +7208,7 @@
               <a:t>MoSCoW</a:t>
             </a:r>
             <a:r>
-              <a:rPr sz="1500" i="0" b="0">
+              <a:rPr sz="1100" i="0" b="0">
                 <a:solidFill>
                   <a:srgbClr val="D4D4D4"/>
                 </a:solidFill>
@@ -7217,7 +7217,7 @@
               <a:t>: </a:t>
             </a:r>
             <a:r>
-              <a:rPr sz="1500" i="0" b="0">
+              <a:rPr sz="1100" i="0" b="0">
                 <a:solidFill>
                   <a:srgbClr val="D4D4D4"/>
                 </a:solidFill>
@@ -7229,11 +7229,11 @@
           <a:p>
             <a:pPr>
               <a:spcAft>
-                <a:spcPts val="321"/>
+                <a:spcPts val="235"/>
               </a:spcAft>
             </a:pPr>
             <a:r>
-              <a:rPr sz="1500" i="0" b="0">
+              <a:rPr sz="1100" i="0" b="0">
                 <a:solidFill>
                   <a:srgbClr val="D4D4D4"/>
                 </a:solidFill>
@@ -7242,7 +7242,7 @@
               <a:t>Origen</a:t>
             </a:r>
             <a:r>
-              <a:rPr sz="1500" i="0" b="0">
+              <a:rPr sz="1100" i="0" b="0">
                 <a:solidFill>
                   <a:srgbClr val="D4D4D4"/>
                 </a:solidFill>
@@ -7251,7 +7251,7 @@
               <a:t>: </a:t>
             </a:r>
             <a:r>
-              <a:rPr sz="1500" i="0" b="0">
+              <a:rPr sz="1100" i="0" b="0">
                 <a:solidFill>
                   <a:srgbClr val="D4D4D4"/>
                 </a:solidFill>
@@ -7260,7 +7260,7 @@
               <a:t>entrevista</a:t>
             </a:r>
             <a:r>
-              <a:rPr sz="1500" i="0" b="0">
+              <a:rPr sz="1100" i="0" b="0">
                 <a:solidFill>
                   <a:srgbClr val="D4D4D4"/>
                 </a:solidFill>
@@ -7269,7 +7269,7 @@
               <a:t> </a:t>
             </a:r>
             <a:r>
-              <a:rPr sz="1500" i="0" b="0">
+              <a:rPr sz="1100" i="0" b="0">
                 <a:solidFill>
                   <a:srgbClr val="D4D4D4"/>
                 </a:solidFill>
@@ -7278,7 +7278,7 @@
               <a:t>Dr</a:t>
             </a:r>
             <a:r>
-              <a:rPr sz="1500" i="0" b="0">
+              <a:rPr sz="1100" i="0" b="0">
                 <a:solidFill>
                   <a:srgbClr val="D4D4D4"/>
                 </a:solidFill>
@@ -7287,7 +7287,7 @@
               <a:t>. </a:t>
             </a:r>
             <a:r>
-              <a:rPr sz="1500" i="0" b="0">
+              <a:rPr sz="1100" i="0" b="0">
                 <a:solidFill>
                   <a:srgbClr val="D4D4D4"/>
                 </a:solidFill>
@@ -7296,7 +7296,7 @@
               <a:t>Ramirez</a:t>
             </a:r>
             <a:r>
-              <a:rPr sz="1500" i="0" b="0">
+              <a:rPr sz="1100" i="0" b="0">
                 <a:solidFill>
                   <a:srgbClr val="D4D4D4"/>
                 </a:solidFill>
@@ -7305,7 +7305,7 @@
               <a:t>, </a:t>
             </a:r>
             <a:r>
-              <a:rPr sz="1500" i="0" b="0">
+              <a:rPr sz="1100" i="0" b="0">
                 <a:solidFill>
                   <a:srgbClr val="D4D4D4"/>
                 </a:solidFill>
@@ -7314,7 +7314,7 @@
               <a:t>frase</a:t>
             </a:r>
             <a:r>
-              <a:rPr sz="1500" i="0" b="0">
+              <a:rPr sz="1100" i="0" b="0">
                 <a:solidFill>
                   <a:srgbClr val="D4D4D4"/>
                 </a:solidFill>
@@ -7323,7 +7323,7 @@
               <a:t> </a:t>
             </a:r>
             <a:r>
-              <a:rPr sz="1500" i="0" b="0">
+              <a:rPr sz="1100" i="0" b="0">
                 <a:solidFill>
                   <a:srgbClr val="B5CEA8"/>
                 </a:solidFill>
@@ -7332,7 +7332,7 @@
               <a:t>2</a:t>
             </a:r>
             <a:r>
-              <a:rPr sz="1500" i="0" b="0">
+              <a:rPr sz="1100" i="0" b="0">
                 <a:solidFill>
                   <a:srgbClr val="D4D4D4"/>
                 </a:solidFill>
@@ -7341,7 +7341,7 @@
               <a:t> (</a:t>
             </a:r>
             <a:r>
-              <a:rPr sz="1500" i="0" b="0">
+              <a:rPr sz="1100" i="0" b="0">
                 <a:solidFill>
                   <a:srgbClr val="D4D4D4"/>
                 </a:solidFill>
@@ -7350,7 +7350,7 @@
               <a:t>necesidad</a:t>
             </a:r>
             <a:r>
-              <a:rPr sz="1500" i="0" b="0">
+              <a:rPr sz="1100" i="0" b="0">
                 <a:solidFill>
                   <a:srgbClr val="D4D4D4"/>
                 </a:solidFill>
@@ -7359,7 +7359,7 @@
               <a:t> </a:t>
             </a:r>
             <a:r>
-              <a:rPr sz="1500" i="0" b="0">
+              <a:rPr sz="1100" i="0" b="0">
                 <a:solidFill>
                   <a:srgbClr val="D4D4D4"/>
                 </a:solidFill>
@@ -7368,7 +7368,7 @@
               <a:t>NEC</a:t>
             </a:r>
             <a:r>
-              <a:rPr sz="1500" i="0" b="0">
+              <a:rPr sz="1100" i="0" b="0">
                 <a:solidFill>
                   <a:srgbClr val="D4D4D4"/>
                 </a:solidFill>
@@ -7377,7 +7377,7 @@
               <a:t>-</a:t>
             </a:r>
             <a:r>
-              <a:rPr sz="1500" i="0" b="0">
+              <a:rPr sz="1100" i="0" b="0">
                 <a:solidFill>
                   <a:srgbClr val="B5CEA8"/>
                 </a:solidFill>
@@ -7386,7 +7386,7 @@
               <a:t>02</a:t>
             </a:r>
             <a:r>
-              <a:rPr sz="1500" i="0" b="0">
+              <a:rPr sz="1100" i="0" b="0">
                 <a:solidFill>
                   <a:srgbClr val="D4D4D4"/>
                 </a:solidFill>
@@ -7398,11 +7398,11 @@
           <a:p>
             <a:pPr>
               <a:spcAft>
-                <a:spcPts val="321"/>
+                <a:spcPts val="235"/>
               </a:spcAft>
             </a:pPr>
             <a:r>
-              <a:rPr sz="1500" i="0" b="0">
+              <a:rPr sz="1100" i="0" b="0">
                 <a:solidFill>
                   <a:srgbClr val="D4D4D4"/>
                 </a:solidFill>
@@ -7411,7 +7411,7 @@
               <a:t>Trazabilidad</a:t>
             </a:r>
             <a:r>
-              <a:rPr sz="1500" i="0" b="0">
+              <a:rPr sz="1100" i="0" b="0">
                 <a:solidFill>
                   <a:srgbClr val="D4D4D4"/>
                 </a:solidFill>
@@ -7420,7 +7420,7 @@
               <a:t>: </a:t>
             </a:r>
             <a:r>
-              <a:rPr sz="1500" i="0" b="0">
+              <a:rPr sz="1100" i="0" b="0">
                 <a:solidFill>
                   <a:srgbClr val="D4D4D4"/>
                 </a:solidFill>
@@ -7429,7 +7429,7 @@
               <a:t>NEC</a:t>
             </a:r>
             <a:r>
-              <a:rPr sz="1500" i="0" b="0">
+              <a:rPr sz="1100" i="0" b="0">
                 <a:solidFill>
                   <a:srgbClr val="D4D4D4"/>
                 </a:solidFill>
@@ -7438,7 +7438,7 @@
               <a:t>-</a:t>
             </a:r>
             <a:r>
-              <a:rPr sz="1500" i="0" b="0">
+              <a:rPr sz="1100" i="0" b="0">
                 <a:solidFill>
                   <a:srgbClr val="B5CEA8"/>
                 </a:solidFill>
@@ -7447,7 +7447,7 @@
               <a:t>02</a:t>
             </a:r>
             <a:r>
-              <a:rPr sz="1500" i="0" b="0">
+              <a:rPr sz="1100" i="0" b="0">
                 <a:solidFill>
                   <a:srgbClr val="D4D4D4"/>
                 </a:solidFill>
@@ -7456,7 +7456,7 @@
               <a:t> -&gt; </a:t>
             </a:r>
             <a:r>
-              <a:rPr sz="1500" i="0" b="0">
+              <a:rPr sz="1100" i="0" b="0">
                 <a:solidFill>
                   <a:srgbClr val="D4D4D4"/>
                 </a:solidFill>
@@ -7465,7 +7465,7 @@
               <a:t>RF</a:t>
             </a:r>
             <a:r>
-              <a:rPr sz="1500" i="0" b="0">
+              <a:rPr sz="1100" i="0" b="0">
                 <a:solidFill>
                   <a:srgbClr val="D4D4D4"/>
                 </a:solidFill>
@@ -7474,7 +7474,7 @@
               <a:t>-</a:t>
             </a:r>
             <a:r>
-              <a:rPr sz="1500" i="0" b="0">
+              <a:rPr sz="1100" i="0" b="0">
                 <a:solidFill>
                   <a:srgbClr val="B5CEA8"/>
                 </a:solidFill>
@@ -7483,7 +7483,7 @@
               <a:t>03</a:t>
             </a:r>
             <a:r>
-              <a:rPr sz="1500" i="0" b="0">
+              <a:rPr sz="1100" i="0" b="0">
                 <a:solidFill>
                   <a:srgbClr val="D4D4D4"/>
                 </a:solidFill>
@@ -7492,7 +7492,7 @@
               <a:t> -&gt; </a:t>
             </a:r>
             <a:r>
-              <a:rPr sz="1500" i="0" b="0">
+              <a:rPr sz="1100" i="0" b="0">
                 <a:solidFill>
                   <a:srgbClr val="D4D4D4"/>
                 </a:solidFill>
@@ -7501,7 +7501,7 @@
               <a:t>CU</a:t>
             </a:r>
             <a:r>
-              <a:rPr sz="1500" i="0" b="0">
+              <a:rPr sz="1100" i="0" b="0">
                 <a:solidFill>
                   <a:srgbClr val="D4D4D4"/>
                 </a:solidFill>
@@ -7510,7 +7510,7 @@
               <a:t>-</a:t>
             </a:r>
             <a:r>
-              <a:rPr sz="1500" i="0" b="0">
+              <a:rPr sz="1100" i="0" b="0">
                 <a:solidFill>
                   <a:srgbClr val="B5CEA8"/>
                 </a:solidFill>
@@ -7519,7 +7519,7 @@
               <a:t>04</a:t>
             </a:r>
             <a:r>
-              <a:rPr sz="1500" i="0" b="0">
+              <a:rPr sz="1100" i="0" b="0">
                 <a:solidFill>
                   <a:srgbClr val="D4D4D4"/>
                 </a:solidFill>
@@ -7528,7 +7528,7 @@
               <a:t> -&gt; </a:t>
             </a:r>
             <a:r>
-              <a:rPr sz="1500" i="0" b="0">
+              <a:rPr sz="1100" i="0" b="0">
                 <a:solidFill>
                   <a:srgbClr val="D4D4D4"/>
                 </a:solidFill>
@@ -7537,7 +7537,7 @@
               <a:t>Pantalla</a:t>
             </a:r>
             <a:r>
-              <a:rPr sz="1500" i="0" b="0">
+              <a:rPr sz="1100" i="0" b="0">
                 <a:solidFill>
                   <a:srgbClr val="D4D4D4"/>
                 </a:solidFill>
@@ -7546,7 +7546,7 @@
               <a:t> </a:t>
             </a:r>
             <a:r>
-              <a:rPr sz="1500" i="0" b="0">
+              <a:rPr sz="1100" i="0" b="0">
                 <a:solidFill>
                   <a:srgbClr val="D4D4D4"/>
                 </a:solidFill>
@@ -7555,7 +7555,7 @@
               <a:t>P</a:t>
             </a:r>
             <a:r>
-              <a:rPr sz="1500" i="0" b="0">
+              <a:rPr sz="1100" i="0" b="0">
                 <a:solidFill>
                   <a:srgbClr val="D4D4D4"/>
                 </a:solidFill>
@@ -7564,7 +7564,7 @@
               <a:t>-</a:t>
             </a:r>
             <a:r>
-              <a:rPr sz="1500" i="0" b="0">
+              <a:rPr sz="1100" i="0" b="0">
                 <a:solidFill>
                   <a:srgbClr val="B5CEA8"/>
                 </a:solidFill>
@@ -7573,7 +7573,7 @@
               <a:t>02</a:t>
             </a:r>
             <a:r>
-              <a:rPr sz="1500" i="0" b="0">
+              <a:rPr sz="1100" i="0" b="0">
                 <a:solidFill>
                   <a:srgbClr val="D4D4D4"/>
                 </a:solidFill>
@@ -7582,7 +7582,7 @@
               <a:t> -&gt; </a:t>
             </a:r>
             <a:r>
-              <a:rPr sz="1500" i="0" b="0">
+              <a:rPr sz="1100" i="0" b="0">
                 <a:solidFill>
                   <a:srgbClr val="D4D4D4"/>
                 </a:solidFill>
@@ -7591,7 +7591,7 @@
               <a:t>Prueba</a:t>
             </a:r>
             <a:r>
-              <a:rPr sz="1500" i="0" b="0">
+              <a:rPr sz="1100" i="0" b="0">
                 <a:solidFill>
                   <a:srgbClr val="D4D4D4"/>
                 </a:solidFill>
@@ -7600,7 +7600,7 @@
               <a:t> </a:t>
             </a:r>
             <a:r>
-              <a:rPr sz="1500" i="0" b="0">
+              <a:rPr sz="1100" i="0" b="0">
                 <a:solidFill>
                   <a:srgbClr val="D4D4D4"/>
                 </a:solidFill>
@@ -7609,7 +7609,7 @@
               <a:t>PR</a:t>
             </a:r>
             <a:r>
-              <a:rPr sz="1500" i="0" b="0">
+              <a:rPr sz="1100" i="0" b="0">
                 <a:solidFill>
                   <a:srgbClr val="D4D4D4"/>
                 </a:solidFill>
@@ -7618,7 +7618,7 @@
               <a:t>-</a:t>
             </a:r>
             <a:r>
-              <a:rPr sz="1500" i="0" b="0">
+              <a:rPr sz="1100" i="0" b="0">
                 <a:solidFill>
                   <a:srgbClr val="B5CEA8"/>
                 </a:solidFill>
@@ -7630,11 +7630,11 @@
           <a:p>
             <a:pPr>
               <a:spcAft>
-                <a:spcPts val="321"/>
+                <a:spcPts val="235"/>
               </a:spcAft>
             </a:pPr>
             <a:r>
-              <a:rPr sz="1500" i="0" b="0">
+              <a:rPr sz="1100" i="0" b="0">
                 <a:solidFill>
                   <a:srgbClr val="D4D4D4"/>
                 </a:solidFill>
@@ -7643,7 +7643,7 @@
               <a:t>Estado</a:t>
             </a:r>
             <a:r>
-              <a:rPr sz="1500" i="0" b="0">
+              <a:rPr sz="1100" i="0" b="0">
                 <a:solidFill>
                   <a:srgbClr val="D4D4D4"/>
                 </a:solidFill>
@@ -7652,7 +7652,7 @@
               <a:t>: </a:t>
             </a:r>
             <a:r>
-              <a:rPr sz="1500" i="0" b="0">
+              <a:rPr sz="1100" i="0" b="0">
                 <a:solidFill>
                   <a:srgbClr val="D4D4D4"/>
                 </a:solidFill>
@@ -7661,7 +7661,7 @@
               <a:t>aprobado</a:t>
             </a:r>
             <a:r>
-              <a:rPr sz="1500" i="0" b="0">
+              <a:rPr sz="1100" i="0" b="0">
                 <a:solidFill>
                   <a:srgbClr val="D4D4D4"/>
                 </a:solidFill>
@@ -7670,7 +7670,7 @@
               <a:t> </a:t>
             </a:r>
             <a:r>
-              <a:rPr sz="1500" i="0" b="0">
+              <a:rPr sz="1100" i="0" b="0">
                 <a:solidFill>
                   <a:srgbClr val="D4D4D4"/>
                 </a:solidFill>
@@ -7679,7 +7679,7 @@
               <a:t>por</a:t>
             </a:r>
             <a:r>
-              <a:rPr sz="1500" i="0" b="0">
+              <a:rPr sz="1100" i="0" b="0">
                 <a:solidFill>
                   <a:srgbClr val="D4D4D4"/>
                 </a:solidFill>
@@ -7688,7 +7688,7 @@
               <a:t> </a:t>
             </a:r>
             <a:r>
-              <a:rPr sz="1500" i="0" b="0">
+              <a:rPr sz="1100" i="0" b="0">
                 <a:solidFill>
                   <a:srgbClr val="D4D4D4"/>
                 </a:solidFill>
@@ -7697,7 +7697,7 @@
               <a:t>el</a:t>
             </a:r>
             <a:r>
-              <a:rPr sz="1500" i="0" b="0">
+              <a:rPr sz="1100" i="0" b="0">
                 <a:solidFill>
                   <a:srgbClr val="D4D4D4"/>
                 </a:solidFill>
@@ -7706,7 +7706,7 @@
               <a:t> </a:t>
             </a:r>
             <a:r>
-              <a:rPr sz="1500" i="0" b="0">
+              <a:rPr sz="1100" i="0" b="0">
                 <a:solidFill>
                   <a:srgbClr val="D4D4D4"/>
                 </a:solidFill>
@@ -7935,14 +7935,83 @@
       </p:sp>
       <p:sp>
         <p:nvSpPr>
-          <p:cNvPr id="5" name="TextBox 4"/>
+          <p:cNvPr id="5" name="Rounded Rectangle 4"/>
+          <p:cNvSpPr/>
+          <p:nvPr/>
+        </p:nvSpPr>
+        <p:spPr>
+          <a:xfrm>
+            <a:off x="5797149" y="1343926"/>
+            <a:ext cx="6010497" cy="4837658"/>
+          </a:xfrm>
+          <a:prstGeom prst="roundRect">
+            <a:avLst>
+              <a:gd name="adj" fmla="val 4000"/>
+            </a:avLst>
+          </a:prstGeom>
+          <a:solidFill>
+            <a:srgbClr val="E8EEF4"/>
+          </a:solidFill>
+          <a:ln>
+            <a:noFill/>
+          </a:ln>
+        </p:spPr>
+        <p:style>
+          <a:lnRef idx="1">
+            <a:schemeClr val="accent1"/>
+          </a:lnRef>
+          <a:fillRef idx="3">
+            <a:schemeClr val="accent1"/>
+          </a:fillRef>
+          <a:effectRef idx="2">
+            <a:schemeClr val="accent1"/>
+          </a:effectRef>
+          <a:fontRef idx="minor">
+            <a:schemeClr val="lt1"/>
+          </a:fontRef>
+        </p:style>
+        <p:txBody>
+          <a:bodyPr rtlCol="0" anchor="ctr"/>
+          <a:lstStyle/>
+          <a:p>
+            <a:pPr algn="ctr"/>
+          </a:p>
+        </p:txBody>
+      </p:sp>
+      <p:pic>
+        <p:nvPicPr>
+          <p:cNvPr id="6" name="Picture 5" descr="ilus-demo-paso1.png"/>
+          <p:cNvPicPr>
+            <a:picLocks noChangeAspect="1"/>
+          </p:cNvPicPr>
+          <p:nvPr/>
+        </p:nvPicPr>
+        <p:blipFill>
+          <a:blip r:embed="rId2"/>
+          <a:stretch>
+            <a:fillRect/>
+          </a:stretch>
+        </p:blipFill>
+        <p:spPr>
+          <a:xfrm>
+            <a:off x="5870301" y="1417078"/>
+            <a:ext cx="5864193" cy="4691354"/>
+          </a:xfrm>
+          <a:prstGeom prst="rect">
+            <a:avLst/>
+          </a:prstGeom>
+        </p:spPr>
+      </p:pic>
+      <p:sp>
+        <p:nvSpPr>
+          <p:cNvPr id="7" name="TextBox 6"/>
           <p:cNvSpPr txBox="1"/>
           <p:nvPr/>
         </p:nvSpPr>
         <p:spPr>
           <a:xfrm>
-            <a:off x="457200" y="1170432"/>
-            <a:ext cx="11277295" cy="5230368"/>
+            <a:off x="457200" y="1353312"/>
+            <a:ext cx="5093061" cy="5047488"/>
           </a:xfrm>
           <a:prstGeom prst="rect">
             <a:avLst/>
@@ -8042,7 +8111,7 @@
       </p:sp>
       <p:sp>
         <p:nvSpPr>
-          <p:cNvPr id="6" name="TextBox 5"/>
+          <p:cNvPr id="8" name="TextBox 7"/>
           <p:cNvSpPr txBox="1"/>
           <p:nvPr/>
         </p:nvSpPr>
@@ -13546,7 +13615,7 @@
         <p:spPr>
           <a:xfrm>
             <a:off x="457200" y="1261872"/>
-            <a:ext cx="11277295" cy="5076537"/>
+            <a:ext cx="6991923" cy="3877032"/>
           </a:xfrm>
           <a:prstGeom prst="roundRect">
             <a:avLst>
@@ -13591,7 +13660,7 @@
         <p:spPr>
           <a:xfrm>
             <a:off x="457200" y="1261872"/>
-            <a:ext cx="11277295" cy="365760"/>
+            <a:ext cx="6991923" cy="365760"/>
           </a:xfrm>
           <a:prstGeom prst="rect">
             <a:avLst/>
@@ -13763,7 +13832,7 @@
         <p:spPr>
           <a:xfrm>
             <a:off x="1371600" y="1298448"/>
-            <a:ext cx="10180015" cy="292608"/>
+            <a:ext cx="5894643" cy="292608"/>
           </a:xfrm>
           <a:prstGeom prst="rect">
             <a:avLst/>
@@ -13796,7 +13865,7 @@
         <p:spPr>
           <a:xfrm>
             <a:off x="685800" y="1719072"/>
-            <a:ext cx="502920" cy="4482177"/>
+            <a:ext cx="502920" cy="3282672"/>
           </a:xfrm>
           <a:prstGeom prst="rect">
             <a:avLst/>
@@ -13811,11 +13880,11 @@
           <a:p>
             <a:pPr algn="r">
               <a:spcAft>
-                <a:spcPts val="300"/>
+                <a:spcPts val="257"/>
               </a:spcAft>
             </a:pPr>
             <a:r>
-              <a:rPr sz="1400" i="0" b="0">
+              <a:rPr sz="1200" i="0" b="0">
                 <a:solidFill>
                   <a:srgbClr val="858585"/>
                 </a:solidFill>
@@ -13827,11 +13896,11 @@
           <a:p>
             <a:pPr algn="r">
               <a:spcAft>
-                <a:spcPts val="300"/>
+                <a:spcPts val="257"/>
               </a:spcAft>
             </a:pPr>
             <a:r>
-              <a:rPr sz="1400" i="0" b="0">
+              <a:rPr sz="1200" i="0" b="0">
                 <a:solidFill>
                   <a:srgbClr val="858585"/>
                 </a:solidFill>
@@ -13843,11 +13912,11 @@
           <a:p>
             <a:pPr algn="r">
               <a:spcAft>
-                <a:spcPts val="300"/>
+                <a:spcPts val="257"/>
               </a:spcAft>
             </a:pPr>
             <a:r>
-              <a:rPr sz="1400" i="0" b="0">
+              <a:rPr sz="1200" i="0" b="0">
                 <a:solidFill>
                   <a:srgbClr val="858585"/>
                 </a:solidFill>
@@ -13859,11 +13928,11 @@
           <a:p>
             <a:pPr algn="r">
               <a:spcAft>
-                <a:spcPts val="300"/>
+                <a:spcPts val="257"/>
               </a:spcAft>
             </a:pPr>
             <a:r>
-              <a:rPr sz="1400" i="0" b="0">
+              <a:rPr sz="1200" i="0" b="0">
                 <a:solidFill>
                   <a:srgbClr val="858585"/>
                 </a:solidFill>
@@ -13875,11 +13944,11 @@
           <a:p>
             <a:pPr algn="r">
               <a:spcAft>
-                <a:spcPts val="300"/>
+                <a:spcPts val="257"/>
               </a:spcAft>
             </a:pPr>
             <a:r>
-              <a:rPr sz="1400" i="0" b="0">
+              <a:rPr sz="1200" i="0" b="0">
                 <a:solidFill>
                   <a:srgbClr val="858585"/>
                 </a:solidFill>
@@ -13891,11 +13960,11 @@
           <a:p>
             <a:pPr algn="r">
               <a:spcAft>
-                <a:spcPts val="300"/>
+                <a:spcPts val="257"/>
               </a:spcAft>
             </a:pPr>
             <a:r>
-              <a:rPr sz="1400" i="0" b="0">
+              <a:rPr sz="1200" i="0" b="0">
                 <a:solidFill>
                   <a:srgbClr val="858585"/>
                 </a:solidFill>
@@ -13907,11 +13976,11 @@
           <a:p>
             <a:pPr algn="r">
               <a:spcAft>
-                <a:spcPts val="300"/>
+                <a:spcPts val="257"/>
               </a:spcAft>
             </a:pPr>
             <a:r>
-              <a:rPr sz="1400" i="0" b="0">
+              <a:rPr sz="1200" i="0" b="0">
                 <a:solidFill>
                   <a:srgbClr val="858585"/>
                 </a:solidFill>
@@ -13923,11 +13992,11 @@
           <a:p>
             <a:pPr algn="r">
               <a:spcAft>
-                <a:spcPts val="300"/>
+                <a:spcPts val="257"/>
               </a:spcAft>
             </a:pPr>
             <a:r>
-              <a:rPr sz="1400" i="0" b="0">
+              <a:rPr sz="1200" i="0" b="0">
                 <a:solidFill>
                   <a:srgbClr val="858585"/>
                 </a:solidFill>
@@ -13939,11 +14008,11 @@
           <a:p>
             <a:pPr algn="r">
               <a:spcAft>
-                <a:spcPts val="300"/>
+                <a:spcPts val="257"/>
               </a:spcAft>
             </a:pPr>
             <a:r>
-              <a:rPr sz="1400" i="0" b="0">
+              <a:rPr sz="1200" i="0" b="0">
                 <a:solidFill>
                   <a:srgbClr val="858585"/>
                 </a:solidFill>
@@ -13955,11 +14024,11 @@
           <a:p>
             <a:pPr algn="r">
               <a:spcAft>
-                <a:spcPts val="300"/>
+                <a:spcPts val="257"/>
               </a:spcAft>
             </a:pPr>
             <a:r>
-              <a:rPr sz="1400" i="0" b="0">
+              <a:rPr sz="1200" i="0" b="0">
                 <a:solidFill>
                   <a:srgbClr val="858585"/>
                 </a:solidFill>
@@ -13971,11 +14040,11 @@
           <a:p>
             <a:pPr algn="r">
               <a:spcAft>
-                <a:spcPts val="300"/>
+                <a:spcPts val="257"/>
               </a:spcAft>
             </a:pPr>
             <a:r>
-              <a:rPr sz="1400" i="0" b="0">
+              <a:rPr sz="1200" i="0" b="0">
                 <a:solidFill>
                   <a:srgbClr val="858585"/>
                 </a:solidFill>
@@ -13987,11 +14056,11 @@
           <a:p>
             <a:pPr algn="r">
               <a:spcAft>
-                <a:spcPts val="300"/>
+                <a:spcPts val="257"/>
               </a:spcAft>
             </a:pPr>
             <a:r>
-              <a:rPr sz="1400" i="0" b="0">
+              <a:rPr sz="1200" i="0" b="0">
                 <a:solidFill>
                   <a:srgbClr val="858585"/>
                 </a:solidFill>
@@ -14003,11 +14072,11 @@
           <a:p>
             <a:pPr algn="r">
               <a:spcAft>
-                <a:spcPts val="300"/>
+                <a:spcPts val="257"/>
               </a:spcAft>
             </a:pPr>
             <a:r>
-              <a:rPr sz="1400" i="0" b="0">
+              <a:rPr sz="1200" i="0" b="0">
                 <a:solidFill>
                   <a:srgbClr val="858585"/>
                 </a:solidFill>
@@ -14019,65 +14088,17 @@
           <a:p>
             <a:pPr algn="r">
               <a:spcAft>
-                <a:spcPts val="300"/>
+                <a:spcPts val="257"/>
               </a:spcAft>
             </a:pPr>
             <a:r>
-              <a:rPr sz="1400" i="0" b="0">
+              <a:rPr sz="1200" i="0" b="0">
                 <a:solidFill>
                   <a:srgbClr val="858585"/>
                 </a:solidFill>
                 <a:latin typeface="Consolas"/>
               </a:rPr>
               <a:t>14</a:t>
-            </a:r>
-          </a:p>
-          <a:p>
-            <a:pPr algn="r">
-              <a:spcAft>
-                <a:spcPts val="300"/>
-              </a:spcAft>
-            </a:pPr>
-            <a:r>
-              <a:rPr sz="1400" i="0" b="0">
-                <a:solidFill>
-                  <a:srgbClr val="858585"/>
-                </a:solidFill>
-                <a:latin typeface="Consolas"/>
-              </a:rPr>
-              <a:t>15</a:t>
-            </a:r>
-          </a:p>
-          <a:p>
-            <a:pPr algn="r">
-              <a:spcAft>
-                <a:spcPts val="300"/>
-              </a:spcAft>
-            </a:pPr>
-            <a:r>
-              <a:rPr sz="1400" i="0" b="0">
-                <a:solidFill>
-                  <a:srgbClr val="858585"/>
-                </a:solidFill>
-                <a:latin typeface="Consolas"/>
-              </a:rPr>
-              <a:t>16</a:t>
-            </a:r>
-          </a:p>
-          <a:p>
-            <a:pPr algn="r">
-              <a:spcAft>
-                <a:spcPts val="300"/>
-              </a:spcAft>
-            </a:pPr>
-            <a:r>
-              <a:rPr sz="1400" i="0" b="0">
-                <a:solidFill>
-                  <a:srgbClr val="858585"/>
-                </a:solidFill>
-                <a:latin typeface="Consolas"/>
-              </a:rPr>
-              <a:t>17</a:t>
             </a:r>
           </a:p>
         </p:txBody>
@@ -14091,7 +14112,7 @@
         <p:spPr>
           <a:xfrm>
             <a:off x="1188720" y="1719072"/>
-            <a:ext cx="10271455" cy="4482177"/>
+            <a:ext cx="5986083" cy="3282672"/>
           </a:xfrm>
           <a:prstGeom prst="rect">
             <a:avLst/>
@@ -14106,11 +14127,11 @@
           <a:p>
             <a:pPr>
               <a:spcAft>
-                <a:spcPts val="300"/>
+                <a:spcPts val="257"/>
               </a:spcAft>
             </a:pPr>
             <a:r>
-              <a:rPr sz="1400" i="0" b="0">
+              <a:rPr sz="1200" i="0" b="0">
                 <a:solidFill>
                   <a:srgbClr val="D4D4D4"/>
                 </a:solidFill>
@@ -14119,7 +14140,7 @@
               <a:t>flowchart</a:t>
             </a:r>
             <a:r>
-              <a:rPr sz="1400" i="0" b="0">
+              <a:rPr sz="1200" i="0" b="0">
                 <a:solidFill>
                   <a:srgbClr val="D4D4D4"/>
                 </a:solidFill>
@@ -14128,7 +14149,7 @@
               <a:t> </a:t>
             </a:r>
             <a:r>
-              <a:rPr sz="1400" i="0" b="0">
+              <a:rPr sz="1200" i="0" b="0">
                 <a:solidFill>
                   <a:srgbClr val="D4D4D4"/>
                 </a:solidFill>
@@ -14140,11 +14161,11 @@
           <a:p>
             <a:pPr>
               <a:spcAft>
-                <a:spcPts val="300"/>
+                <a:spcPts val="257"/>
               </a:spcAft>
             </a:pPr>
             <a:r>
-              <a:rPr sz="1400" i="0" b="0">
+              <a:rPr sz="1200" i="0" b="0">
                 <a:solidFill>
                   <a:srgbClr val="D4D4D4"/>
                 </a:solidFill>
@@ -14153,7 +14174,7 @@
               <a:t>  </a:t>
             </a:r>
             <a:r>
-              <a:rPr sz="1400" i="0" b="0">
+              <a:rPr sz="1200" i="0" b="0">
                 <a:solidFill>
                   <a:srgbClr val="D4D4D4"/>
                 </a:solidFill>
@@ -14162,7 +14183,7 @@
               <a:t>subgraph</a:t>
             </a:r>
             <a:r>
-              <a:rPr sz="1400" i="0" b="0">
+              <a:rPr sz="1200" i="0" b="0">
                 <a:solidFill>
                   <a:srgbClr val="D4D4D4"/>
                 </a:solidFill>
@@ -14171,7 +14192,7 @@
               <a:t> </a:t>
             </a:r>
             <a:r>
-              <a:rPr sz="1400" i="0" b="0">
+              <a:rPr sz="1200" i="0" b="0">
                 <a:solidFill>
                   <a:srgbClr val="D4D4D4"/>
                 </a:solidFill>
@@ -14180,7 +14201,7 @@
               <a:t>must</a:t>
             </a:r>
             <a:r>
-              <a:rPr sz="1400" i="0" b="0">
+              <a:rPr sz="1200" i="0" b="0">
                 <a:solidFill>
                   <a:srgbClr val="D4D4D4"/>
                 </a:solidFill>
@@ -14189,7 +14210,7 @@
               <a:t>[</a:t>
             </a:r>
             <a:r>
-              <a:rPr sz="1400" i="0" b="0">
+              <a:rPr sz="1200" i="0" b="0">
                 <a:solidFill>
                   <a:srgbClr val="D4D4D4"/>
                 </a:solidFill>
@@ -14198,7 +14219,7 @@
               <a:t>Must</a:t>
             </a:r>
             <a:r>
-              <a:rPr sz="1400" i="0" b="0">
+              <a:rPr sz="1200" i="0" b="0">
                 <a:solidFill>
                   <a:srgbClr val="D4D4D4"/>
                 </a:solidFill>
@@ -14207,7 +14228,7 @@
               <a:t> - </a:t>
             </a:r>
             <a:r>
-              <a:rPr sz="1400" i="0" b="0">
+              <a:rPr sz="1200" i="0" b="0">
                 <a:solidFill>
                   <a:srgbClr val="D4D4D4"/>
                 </a:solidFill>
@@ -14216,7 +14237,7 @@
               <a:t>sin</a:t>
             </a:r>
             <a:r>
-              <a:rPr sz="1400" i="0" b="0">
+              <a:rPr sz="1200" i="0" b="0">
                 <a:solidFill>
                   <a:srgbClr val="D4D4D4"/>
                 </a:solidFill>
@@ -14225,7 +14246,7 @@
               <a:t> </a:t>
             </a:r>
             <a:r>
-              <a:rPr sz="1400" i="0" b="0">
+              <a:rPr sz="1200" i="0" b="0">
                 <a:solidFill>
                   <a:srgbClr val="D4D4D4"/>
                 </a:solidFill>
@@ -14234,7 +14255,7 @@
               <a:t>esto</a:t>
             </a:r>
             <a:r>
-              <a:rPr sz="1400" i="0" b="0">
+              <a:rPr sz="1200" i="0" b="0">
                 <a:solidFill>
                   <a:srgbClr val="D4D4D4"/>
                 </a:solidFill>
@@ -14243,7 +14264,7 @@
               <a:t> </a:t>
             </a:r>
             <a:r>
-              <a:rPr sz="1400" i="0" b="0">
+              <a:rPr sz="1200" i="0" b="0">
                 <a:solidFill>
                   <a:srgbClr val="D4D4D4"/>
                 </a:solidFill>
@@ -14252,7 +14273,7 @@
               <a:t>no</a:t>
             </a:r>
             <a:r>
-              <a:rPr sz="1400" i="0" b="0">
+              <a:rPr sz="1200" i="0" b="0">
                 <a:solidFill>
                   <a:srgbClr val="D4D4D4"/>
                 </a:solidFill>
@@ -14261,7 +14282,7 @@
               <a:t> </a:t>
             </a:r>
             <a:r>
-              <a:rPr sz="1400" i="0" b="0">
+              <a:rPr sz="1200" i="0" b="0">
                 <a:solidFill>
                   <a:srgbClr val="D4D4D4"/>
                 </a:solidFill>
@@ -14270,7 +14291,7 @@
               <a:t>hay</a:t>
             </a:r>
             <a:r>
-              <a:rPr sz="1400" i="0" b="0">
+              <a:rPr sz="1200" i="0" b="0">
                 <a:solidFill>
                   <a:srgbClr val="D4D4D4"/>
                 </a:solidFill>
@@ -14279,7 +14300,7 @@
               <a:t> </a:t>
             </a:r>
             <a:r>
-              <a:rPr sz="1400" i="0" b="0">
+              <a:rPr sz="1200" i="0" b="0">
                 <a:solidFill>
                   <a:srgbClr val="D4D4D4"/>
                 </a:solidFill>
@@ -14288,7 +14309,7 @@
               <a:t>producto</a:t>
             </a:r>
             <a:r>
-              <a:rPr sz="1400" i="0" b="0">
+              <a:rPr sz="1200" i="0" b="0">
                 <a:solidFill>
                   <a:srgbClr val="D4D4D4"/>
                 </a:solidFill>
@@ -14300,11 +14321,11 @@
           <a:p>
             <a:pPr>
               <a:spcAft>
-                <a:spcPts val="300"/>
+                <a:spcPts val="257"/>
               </a:spcAft>
             </a:pPr>
             <a:r>
-              <a:rPr sz="1400" i="0" b="0">
+              <a:rPr sz="1200" i="0" b="0">
                 <a:solidFill>
                   <a:srgbClr val="D4D4D4"/>
                 </a:solidFill>
@@ -14313,7 +14334,7 @@
               <a:t>    </a:t>
             </a:r>
             <a:r>
-              <a:rPr sz="1400" i="0" b="0">
+              <a:rPr sz="1200" i="0" b="0">
                 <a:solidFill>
                   <a:srgbClr val="D4D4D4"/>
                 </a:solidFill>
@@ -14322,7 +14343,7 @@
               <a:t>m1</a:t>
             </a:r>
             <a:r>
-              <a:rPr sz="1400" i="0" b="0">
+              <a:rPr sz="1200" i="0" b="0">
                 <a:solidFill>
                   <a:srgbClr val="D4D4D4"/>
                 </a:solidFill>
@@ -14331,7 +14352,7 @@
               <a:t>[</a:t>
             </a:r>
             <a:r>
-              <a:rPr sz="1400" i="0" b="0">
+              <a:rPr sz="1200" i="0" b="0">
                 <a:solidFill>
                   <a:srgbClr val="D4D4D4"/>
                 </a:solidFill>
@@ -14340,7 +14361,7 @@
               <a:t>RF</a:t>
             </a:r>
             <a:r>
-              <a:rPr sz="1400" i="0" b="0">
+              <a:rPr sz="1200" i="0" b="0">
                 <a:solidFill>
                   <a:srgbClr val="D4D4D4"/>
                 </a:solidFill>
@@ -14349,7 +14370,7 @@
               <a:t>-</a:t>
             </a:r>
             <a:r>
-              <a:rPr sz="1400" i="0" b="0">
+              <a:rPr sz="1200" i="0" b="0">
                 <a:solidFill>
                   <a:srgbClr val="B5CEA8"/>
                 </a:solidFill>
@@ -14358,7 +14379,7 @@
               <a:t>01</a:t>
             </a:r>
             <a:r>
-              <a:rPr sz="1400" i="0" b="0">
+              <a:rPr sz="1200" i="0" b="0">
                 <a:solidFill>
                   <a:srgbClr val="D4D4D4"/>
                 </a:solidFill>
@@ -14367,7 +14388,7 @@
               <a:t> </a:t>
             </a:r>
             <a:r>
-              <a:rPr sz="1400" i="0" b="0">
+              <a:rPr sz="1200" i="0" b="0">
                 <a:solidFill>
                   <a:srgbClr val="D4D4D4"/>
                 </a:solidFill>
@@ -14376,7 +14397,7 @@
               <a:t>Registrar</a:t>
             </a:r>
             <a:r>
-              <a:rPr sz="1400" i="0" b="0">
+              <a:rPr sz="1200" i="0" b="0">
                 <a:solidFill>
                   <a:srgbClr val="D4D4D4"/>
                 </a:solidFill>
@@ -14385,7 +14406,7 @@
               <a:t> </a:t>
             </a:r>
             <a:r>
-              <a:rPr sz="1400" i="0" b="0">
+              <a:rPr sz="1200" i="0" b="0">
                 <a:solidFill>
                   <a:srgbClr val="D4D4D4"/>
                 </a:solidFill>
@@ -14394,7 +14415,7 @@
               <a:t>mascota</a:t>
             </a:r>
             <a:r>
-              <a:rPr sz="1400" i="0" b="0">
+              <a:rPr sz="1200" i="0" b="0">
                 <a:solidFill>
                   <a:srgbClr val="D4D4D4"/>
                 </a:solidFill>
@@ -14406,11 +14427,11 @@
           <a:p>
             <a:pPr>
               <a:spcAft>
-                <a:spcPts val="300"/>
+                <a:spcPts val="257"/>
               </a:spcAft>
             </a:pPr>
             <a:r>
-              <a:rPr sz="1400" i="0" b="0">
+              <a:rPr sz="1200" i="0" b="0">
                 <a:solidFill>
                   <a:srgbClr val="D4D4D4"/>
                 </a:solidFill>
@@ -14419,7 +14440,7 @@
               <a:t>    </a:t>
             </a:r>
             <a:r>
-              <a:rPr sz="1400" i="0" b="0">
+              <a:rPr sz="1200" i="0" b="0">
                 <a:solidFill>
                   <a:srgbClr val="D4D4D4"/>
                 </a:solidFill>
@@ -14428,7 +14449,7 @@
               <a:t>m2</a:t>
             </a:r>
             <a:r>
-              <a:rPr sz="1400" i="0" b="0">
+              <a:rPr sz="1200" i="0" b="0">
                 <a:solidFill>
                   <a:srgbClr val="D4D4D4"/>
                 </a:solidFill>
@@ -14437,7 +14458,7 @@
               <a:t>[</a:t>
             </a:r>
             <a:r>
-              <a:rPr sz="1400" i="0" b="0">
+              <a:rPr sz="1200" i="0" b="0">
                 <a:solidFill>
                   <a:srgbClr val="D4D4D4"/>
                 </a:solidFill>
@@ -14446,7 +14467,7 @@
               <a:t>RF</a:t>
             </a:r>
             <a:r>
-              <a:rPr sz="1400" i="0" b="0">
+              <a:rPr sz="1200" i="0" b="0">
                 <a:solidFill>
                   <a:srgbClr val="D4D4D4"/>
                 </a:solidFill>
@@ -14455,7 +14476,7 @@
               <a:t>-</a:t>
             </a:r>
             <a:r>
-              <a:rPr sz="1400" i="0" b="0">
+              <a:rPr sz="1200" i="0" b="0">
                 <a:solidFill>
                   <a:srgbClr val="B5CEA8"/>
                 </a:solidFill>
@@ -14464,7 +14485,7 @@
               <a:t>03</a:t>
             </a:r>
             <a:r>
-              <a:rPr sz="1400" i="0" b="0">
+              <a:rPr sz="1200" i="0" b="0">
                 <a:solidFill>
                   <a:srgbClr val="D4D4D4"/>
                 </a:solidFill>
@@ -14473,7 +14494,7 @@
               <a:t> </a:t>
             </a:r>
             <a:r>
-              <a:rPr sz="1400" i="0" b="0">
+              <a:rPr sz="1200" i="0" b="0">
                 <a:solidFill>
                   <a:srgbClr val="D4D4D4"/>
                 </a:solidFill>
@@ -14482,7 +14503,7 @@
               <a:t>Agendar</a:t>
             </a:r>
             <a:r>
-              <a:rPr sz="1400" i="0" b="0">
+              <a:rPr sz="1200" i="0" b="0">
                 <a:solidFill>
                   <a:srgbClr val="D4D4D4"/>
                 </a:solidFill>
@@ -14491,7 +14512,7 @@
               <a:t> </a:t>
             </a:r>
             <a:r>
-              <a:rPr sz="1400" i="0" b="0">
+              <a:rPr sz="1200" i="0" b="0">
                 <a:solidFill>
                   <a:srgbClr val="D4D4D4"/>
                 </a:solidFill>
@@ -14500,7 +14521,7 @@
               <a:t>cita</a:t>
             </a:r>
             <a:r>
-              <a:rPr sz="1400" i="0" b="0">
+              <a:rPr sz="1200" i="0" b="0">
                 <a:solidFill>
                   <a:srgbClr val="D4D4D4"/>
                 </a:solidFill>
@@ -14512,11 +14533,11 @@
           <a:p>
             <a:pPr>
               <a:spcAft>
-                <a:spcPts val="300"/>
+                <a:spcPts val="257"/>
               </a:spcAft>
             </a:pPr>
             <a:r>
-              <a:rPr sz="1400" i="0" b="0">
+              <a:rPr sz="1200" i="0" b="0">
                 <a:solidFill>
                   <a:srgbClr val="D4D4D4"/>
                 </a:solidFill>
@@ -14525,7 +14546,7 @@
               <a:t>  </a:t>
             </a:r>
             <a:r>
-              <a:rPr sz="1400" i="0" b="0">
+              <a:rPr sz="1200" i="0" b="0">
                 <a:solidFill>
                   <a:srgbClr val="D4D4D4"/>
                 </a:solidFill>
@@ -14537,11 +14558,11 @@
           <a:p>
             <a:pPr>
               <a:spcAft>
-                <a:spcPts val="300"/>
+                <a:spcPts val="257"/>
               </a:spcAft>
             </a:pPr>
             <a:r>
-              <a:rPr sz="1400" i="0" b="0">
+              <a:rPr sz="1200" i="0" b="0">
                 <a:solidFill>
                   <a:srgbClr val="D4D4D4"/>
                 </a:solidFill>
@@ -14550,7 +14571,7 @@
               <a:t>  </a:t>
             </a:r>
             <a:r>
-              <a:rPr sz="1400" i="0" b="0">
+              <a:rPr sz="1200" i="0" b="0">
                 <a:solidFill>
                   <a:srgbClr val="D4D4D4"/>
                 </a:solidFill>
@@ -14559,7 +14580,7 @@
               <a:t>subgraph</a:t>
             </a:r>
             <a:r>
-              <a:rPr sz="1400" i="0" b="0">
+              <a:rPr sz="1200" i="0" b="0">
                 <a:solidFill>
                   <a:srgbClr val="D4D4D4"/>
                 </a:solidFill>
@@ -14568,7 +14589,7 @@
               <a:t> </a:t>
             </a:r>
             <a:r>
-              <a:rPr sz="1400" i="0" b="0">
+              <a:rPr sz="1200" i="0" b="0">
                 <a:solidFill>
                   <a:srgbClr val="D4D4D4"/>
                 </a:solidFill>
@@ -14577,7 +14598,7 @@
               <a:t>should</a:t>
             </a:r>
             <a:r>
-              <a:rPr sz="1400" i="0" b="0">
+              <a:rPr sz="1200" i="0" b="0">
                 <a:solidFill>
                   <a:srgbClr val="D4D4D4"/>
                 </a:solidFill>
@@ -14586,7 +14607,7 @@
               <a:t>[</a:t>
             </a:r>
             <a:r>
-              <a:rPr sz="1400" i="0" b="0">
+              <a:rPr sz="1200" i="0" b="0">
                 <a:solidFill>
                   <a:srgbClr val="D4D4D4"/>
                 </a:solidFill>
@@ -14595,7 +14616,7 @@
               <a:t>Should</a:t>
             </a:r>
             <a:r>
-              <a:rPr sz="1400" i="0" b="0">
+              <a:rPr sz="1200" i="0" b="0">
                 <a:solidFill>
                   <a:srgbClr val="D4D4D4"/>
                 </a:solidFill>
@@ -14604,7 +14625,7 @@
               <a:t> - </a:t>
             </a:r>
             <a:r>
-              <a:rPr sz="1400" i="0" b="0">
+              <a:rPr sz="1200" i="0" b="0">
                 <a:solidFill>
                   <a:srgbClr val="D4D4D4"/>
                 </a:solidFill>
@@ -14613,7 +14634,7 @@
               <a:t>importante</a:t>
             </a:r>
             <a:r>
-              <a:rPr sz="1400" i="0" b="0">
+              <a:rPr sz="1200" i="0" b="0">
                 <a:solidFill>
                   <a:srgbClr val="D4D4D4"/>
                 </a:solidFill>
@@ -14622,7 +14643,7 @@
               <a:t>, </a:t>
             </a:r>
             <a:r>
-              <a:rPr sz="1400" i="0" b="0">
+              <a:rPr sz="1200" i="0" b="0">
                 <a:solidFill>
                   <a:srgbClr val="D4D4D4"/>
                 </a:solidFill>
@@ -14631,7 +14652,7 @@
               <a:t>hay</a:t>
             </a:r>
             <a:r>
-              <a:rPr sz="1400" i="0" b="0">
+              <a:rPr sz="1200" i="0" b="0">
                 <a:solidFill>
                   <a:srgbClr val="D4D4D4"/>
                 </a:solidFill>
@@ -14640,7 +14661,7 @@
               <a:t> </a:t>
             </a:r>
             <a:r>
-              <a:rPr sz="1400" i="0" b="0">
+              <a:rPr sz="1200" i="0" b="0">
                 <a:solidFill>
                   <a:srgbClr val="D4D4D4"/>
                 </a:solidFill>
@@ -14649,7 +14670,7 @@
               <a:t>alternativa</a:t>
             </a:r>
             <a:r>
-              <a:rPr sz="1400" i="0" b="0">
+              <a:rPr sz="1200" i="0" b="0">
                 <a:solidFill>
                   <a:srgbClr val="D4D4D4"/>
                 </a:solidFill>
@@ -14658,7 +14679,7 @@
               <a:t> </a:t>
             </a:r>
             <a:r>
-              <a:rPr sz="1400" i="0" b="0">
+              <a:rPr sz="1200" i="0" b="0">
                 <a:solidFill>
                   <a:srgbClr val="D4D4D4"/>
                 </a:solidFill>
@@ -14667,7 +14688,7 @@
               <a:t>manual</a:t>
             </a:r>
             <a:r>
-              <a:rPr sz="1400" i="0" b="0">
+              <a:rPr sz="1200" i="0" b="0">
                 <a:solidFill>
                   <a:srgbClr val="D4D4D4"/>
                 </a:solidFill>
@@ -14679,11 +14700,11 @@
           <a:p>
             <a:pPr>
               <a:spcAft>
-                <a:spcPts val="300"/>
+                <a:spcPts val="257"/>
               </a:spcAft>
             </a:pPr>
             <a:r>
-              <a:rPr sz="1400" i="0" b="0">
+              <a:rPr sz="1200" i="0" b="0">
                 <a:solidFill>
                   <a:srgbClr val="D4D4D4"/>
                 </a:solidFill>
@@ -14692,7 +14713,7 @@
               <a:t>    </a:t>
             </a:r>
             <a:r>
-              <a:rPr sz="1400" i="0" b="0">
+              <a:rPr sz="1200" i="0" b="0">
                 <a:solidFill>
                   <a:srgbClr val="D4D4D4"/>
                 </a:solidFill>
@@ -14701,7 +14722,7 @@
               <a:t>s1</a:t>
             </a:r>
             <a:r>
-              <a:rPr sz="1400" i="0" b="0">
+              <a:rPr sz="1200" i="0" b="0">
                 <a:solidFill>
                   <a:srgbClr val="D4D4D4"/>
                 </a:solidFill>
@@ -14710,7 +14731,7 @@
               <a:t>[</a:t>
             </a:r>
             <a:r>
-              <a:rPr sz="1400" i="0" b="0">
+              <a:rPr sz="1200" i="0" b="0">
                 <a:solidFill>
                   <a:srgbClr val="D4D4D4"/>
                 </a:solidFill>
@@ -14719,7 +14740,7 @@
               <a:t>RF</a:t>
             </a:r>
             <a:r>
-              <a:rPr sz="1400" i="0" b="0">
+              <a:rPr sz="1200" i="0" b="0">
                 <a:solidFill>
                   <a:srgbClr val="D4D4D4"/>
                 </a:solidFill>
@@ -14728,7 +14749,7 @@
               <a:t>-</a:t>
             </a:r>
             <a:r>
-              <a:rPr sz="1400" i="0" b="0">
+              <a:rPr sz="1200" i="0" b="0">
                 <a:solidFill>
                   <a:srgbClr val="B5CEA8"/>
                 </a:solidFill>
@@ -14737,7 +14758,7 @@
               <a:t>07</a:t>
             </a:r>
             <a:r>
-              <a:rPr sz="1400" i="0" b="0">
+              <a:rPr sz="1200" i="0" b="0">
                 <a:solidFill>
                   <a:srgbClr val="D4D4D4"/>
                 </a:solidFill>
@@ -14746,7 +14767,7 @@
               <a:t> </a:t>
             </a:r>
             <a:r>
-              <a:rPr sz="1400" i="0" b="0">
+              <a:rPr sz="1200" i="0" b="0">
                 <a:solidFill>
                   <a:srgbClr val="D4D4D4"/>
                 </a:solidFill>
@@ -14755,7 +14776,7 @@
               <a:t>Reporte</a:t>
             </a:r>
             <a:r>
-              <a:rPr sz="1400" i="0" b="0">
+              <a:rPr sz="1200" i="0" b="0">
                 <a:solidFill>
                   <a:srgbClr val="D4D4D4"/>
                 </a:solidFill>
@@ -14764,7 +14785,7 @@
               <a:t> </a:t>
             </a:r>
             <a:r>
-              <a:rPr sz="1400" i="0" b="0">
+              <a:rPr sz="1200" i="0" b="0">
                 <a:solidFill>
                   <a:srgbClr val="D4D4D4"/>
                 </a:solidFill>
@@ -14773,7 +14794,7 @@
               <a:t>mensual</a:t>
             </a:r>
             <a:r>
-              <a:rPr sz="1400" i="0" b="0">
+              <a:rPr sz="1200" i="0" b="0">
                 <a:solidFill>
                   <a:srgbClr val="D4D4D4"/>
                 </a:solidFill>
@@ -14785,11 +14806,11 @@
           <a:p>
             <a:pPr>
               <a:spcAft>
-                <a:spcPts val="300"/>
+                <a:spcPts val="257"/>
               </a:spcAft>
             </a:pPr>
             <a:r>
-              <a:rPr sz="1400" i="0" b="0">
+              <a:rPr sz="1200" i="0" b="0">
                 <a:solidFill>
                   <a:srgbClr val="D4D4D4"/>
                 </a:solidFill>
@@ -14798,7 +14819,7 @@
               <a:t>  </a:t>
             </a:r>
             <a:r>
-              <a:rPr sz="1400" i="0" b="0">
+              <a:rPr sz="1200" i="0" b="0">
                 <a:solidFill>
                   <a:srgbClr val="D4D4D4"/>
                 </a:solidFill>
@@ -14810,11 +14831,11 @@
           <a:p>
             <a:pPr>
               <a:spcAft>
-                <a:spcPts val="300"/>
+                <a:spcPts val="257"/>
               </a:spcAft>
             </a:pPr>
             <a:r>
-              <a:rPr sz="1400" i="0" b="0">
+              <a:rPr sz="1200" i="0" b="0">
                 <a:solidFill>
                   <a:srgbClr val="D4D4D4"/>
                 </a:solidFill>
@@ -14823,7 +14844,7 @@
               <a:t>  </a:t>
             </a:r>
             <a:r>
-              <a:rPr sz="1400" i="0" b="0">
+              <a:rPr sz="1200" i="0" b="0">
                 <a:solidFill>
                   <a:srgbClr val="D4D4D4"/>
                 </a:solidFill>
@@ -14832,7 +14853,7 @@
               <a:t>subgraph</a:t>
             </a:r>
             <a:r>
-              <a:rPr sz="1400" i="0" b="0">
+              <a:rPr sz="1200" i="0" b="0">
                 <a:solidFill>
                   <a:srgbClr val="D4D4D4"/>
                 </a:solidFill>
@@ -14841,7 +14862,7 @@
               <a:t> </a:t>
             </a:r>
             <a:r>
-              <a:rPr sz="1400" i="0" b="0">
+              <a:rPr sz="1200" i="0" b="0">
                 <a:solidFill>
                   <a:srgbClr val="D4D4D4"/>
                 </a:solidFill>
@@ -14850,7 +14871,7 @@
               <a:t>could</a:t>
             </a:r>
             <a:r>
-              <a:rPr sz="1400" i="0" b="0">
+              <a:rPr sz="1200" i="0" b="0">
                 <a:solidFill>
                   <a:srgbClr val="D4D4D4"/>
                 </a:solidFill>
@@ -14859,7 +14880,7 @@
               <a:t>[</a:t>
             </a:r>
             <a:r>
-              <a:rPr sz="1400" i="0" b="0">
+              <a:rPr sz="1200" i="0" b="0">
                 <a:solidFill>
                   <a:srgbClr val="D4D4D4"/>
                 </a:solidFill>
@@ -14868,7 +14889,7 @@
               <a:t>Could</a:t>
             </a:r>
             <a:r>
-              <a:rPr sz="1400" i="0" b="0">
+              <a:rPr sz="1200" i="0" b="0">
                 <a:solidFill>
                   <a:srgbClr val="D4D4D4"/>
                 </a:solidFill>
@@ -14877,7 +14898,7 @@
               <a:t> - </a:t>
             </a:r>
             <a:r>
-              <a:rPr sz="1400" i="0" b="0">
+              <a:rPr sz="1200" i="0" b="0">
                 <a:solidFill>
                   <a:srgbClr val="D4D4D4"/>
                 </a:solidFill>
@@ -14886,7 +14907,7 @@
               <a:t>si</a:t>
             </a:r>
             <a:r>
-              <a:rPr sz="1400" i="0" b="0">
+              <a:rPr sz="1200" i="0" b="0">
                 <a:solidFill>
                   <a:srgbClr val="D4D4D4"/>
                 </a:solidFill>
@@ -14895,7 +14916,7 @@
               <a:t> </a:t>
             </a:r>
             <a:r>
-              <a:rPr sz="1400" i="0" b="0">
+              <a:rPr sz="1200" i="0" b="0">
                 <a:solidFill>
                   <a:srgbClr val="D4D4D4"/>
                 </a:solidFill>
@@ -14904,7 +14925,7 @@
               <a:t>sobra</a:t>
             </a:r>
             <a:r>
-              <a:rPr sz="1400" i="0" b="0">
+              <a:rPr sz="1200" i="0" b="0">
                 <a:solidFill>
                   <a:srgbClr val="D4D4D4"/>
                 </a:solidFill>
@@ -14913,7 +14934,7 @@
               <a:t> </a:t>
             </a:r>
             <a:r>
-              <a:rPr sz="1400" i="0" b="0">
+              <a:rPr sz="1200" i="0" b="0">
                 <a:solidFill>
                   <a:srgbClr val="D4D4D4"/>
                 </a:solidFill>
@@ -14922,7 +14943,7 @@
               <a:t>tiempo</a:t>
             </a:r>
             <a:r>
-              <a:rPr sz="1400" i="0" b="0">
+              <a:rPr sz="1200" i="0" b="0">
                 <a:solidFill>
                   <a:srgbClr val="D4D4D4"/>
                 </a:solidFill>
@@ -14934,11 +14955,11 @@
           <a:p>
             <a:pPr>
               <a:spcAft>
-                <a:spcPts val="300"/>
+                <a:spcPts val="257"/>
               </a:spcAft>
             </a:pPr>
             <a:r>
-              <a:rPr sz="1400" i="0" b="0">
+              <a:rPr sz="1200" i="0" b="0">
                 <a:solidFill>
                   <a:srgbClr val="D4D4D4"/>
                 </a:solidFill>
@@ -14947,7 +14968,7 @@
               <a:t>    </a:t>
             </a:r>
             <a:r>
-              <a:rPr sz="1400" i="0" b="0">
+              <a:rPr sz="1200" i="0" b="0">
                 <a:solidFill>
                   <a:srgbClr val="D4D4D4"/>
                 </a:solidFill>
@@ -14956,7 +14977,7 @@
               <a:t>c1</a:t>
             </a:r>
             <a:r>
-              <a:rPr sz="1400" i="0" b="0">
+              <a:rPr sz="1200" i="0" b="0">
                 <a:solidFill>
                   <a:srgbClr val="D4D4D4"/>
                 </a:solidFill>
@@ -14965,7 +14986,7 @@
               <a:t>[</a:t>
             </a:r>
             <a:r>
-              <a:rPr sz="1400" i="0" b="0">
+              <a:rPr sz="1200" i="0" b="0">
                 <a:solidFill>
                   <a:srgbClr val="D4D4D4"/>
                 </a:solidFill>
@@ -14974,7 +14995,7 @@
               <a:t>RF</a:t>
             </a:r>
             <a:r>
-              <a:rPr sz="1400" i="0" b="0">
+              <a:rPr sz="1200" i="0" b="0">
                 <a:solidFill>
                   <a:srgbClr val="D4D4D4"/>
                 </a:solidFill>
@@ -14983,7 +15004,7 @@
               <a:t>-</a:t>
             </a:r>
             <a:r>
-              <a:rPr sz="1400" i="0" b="0">
+              <a:rPr sz="1200" i="0" b="0">
                 <a:solidFill>
                   <a:srgbClr val="B5CEA8"/>
                 </a:solidFill>
@@ -14992,7 +15013,7 @@
               <a:t>11</a:t>
             </a:r>
             <a:r>
-              <a:rPr sz="1400" i="0" b="0">
+              <a:rPr sz="1200" i="0" b="0">
                 <a:solidFill>
                   <a:srgbClr val="D4D4D4"/>
                 </a:solidFill>
@@ -15001,7 +15022,7 @@
               <a:t> </a:t>
             </a:r>
             <a:r>
-              <a:rPr sz="1400" i="0" b="0">
+              <a:rPr sz="1200" i="0" b="0">
                 <a:solidFill>
                   <a:srgbClr val="D4D4D4"/>
                 </a:solidFill>
@@ -15010,7 +15031,7 @@
               <a:t>Exportar</a:t>
             </a:r>
             <a:r>
-              <a:rPr sz="1400" i="0" b="0">
+              <a:rPr sz="1200" i="0" b="0">
                 <a:solidFill>
                   <a:srgbClr val="D4D4D4"/>
                 </a:solidFill>
@@ -15019,7 +15040,7 @@
               <a:t> </a:t>
             </a:r>
             <a:r>
-              <a:rPr sz="1400" i="0" b="0">
+              <a:rPr sz="1200" i="0" b="0">
                 <a:solidFill>
                   <a:srgbClr val="D4D4D4"/>
                 </a:solidFill>
@@ -15028,7 +15049,7 @@
               <a:t>a</a:t>
             </a:r>
             <a:r>
-              <a:rPr sz="1400" i="0" b="0">
+              <a:rPr sz="1200" i="0" b="0">
                 <a:solidFill>
                   <a:srgbClr val="D4D4D4"/>
                 </a:solidFill>
@@ -15037,7 +15058,7 @@
               <a:t> </a:t>
             </a:r>
             <a:r>
-              <a:rPr sz="1400" i="0" b="0">
+              <a:rPr sz="1200" i="0" b="0">
                 <a:solidFill>
                   <a:srgbClr val="D4D4D4"/>
                 </a:solidFill>
@@ -15046,7 +15067,7 @@
               <a:t>Excel</a:t>
             </a:r>
             <a:r>
-              <a:rPr sz="1400" i="0" b="0">
+              <a:rPr sz="1200" i="0" b="0">
                 <a:solidFill>
                   <a:srgbClr val="D4D4D4"/>
                 </a:solidFill>
@@ -15058,11 +15079,11 @@
           <a:p>
             <a:pPr>
               <a:spcAft>
-                <a:spcPts val="300"/>
+                <a:spcPts val="257"/>
               </a:spcAft>
             </a:pPr>
             <a:r>
-              <a:rPr sz="1400" i="0" b="0">
+              <a:rPr sz="1200" i="0" b="0">
                 <a:solidFill>
                   <a:srgbClr val="D4D4D4"/>
                 </a:solidFill>
@@ -15071,7 +15092,7 @@
               <a:t>  </a:t>
             </a:r>
             <a:r>
-              <a:rPr sz="1400" i="0" b="0">
+              <a:rPr sz="1200" i="0" b="0">
                 <a:solidFill>
                   <a:srgbClr val="D4D4D4"/>
                 </a:solidFill>
@@ -15083,11 +15104,11 @@
           <a:p>
             <a:pPr>
               <a:spcAft>
-                <a:spcPts val="300"/>
+                <a:spcPts val="257"/>
               </a:spcAft>
             </a:pPr>
             <a:r>
-              <a:rPr sz="1400" i="0" b="0">
+              <a:rPr sz="1200" i="0" b="0">
                 <a:solidFill>
                   <a:srgbClr val="D4D4D4"/>
                 </a:solidFill>
@@ -15096,7 +15117,7 @@
               <a:t>  </a:t>
             </a:r>
             <a:r>
-              <a:rPr sz="1400" i="0" b="0">
+              <a:rPr sz="1200" i="0" b="0">
                 <a:solidFill>
                   <a:srgbClr val="D4D4D4"/>
                 </a:solidFill>
@@ -15105,7 +15126,7 @@
               <a:t>subgraph</a:t>
             </a:r>
             <a:r>
-              <a:rPr sz="1400" i="0" b="0">
+              <a:rPr sz="1200" i="0" b="0">
                 <a:solidFill>
                   <a:srgbClr val="D4D4D4"/>
                 </a:solidFill>
@@ -15114,7 +15135,7 @@
               <a:t> </a:t>
             </a:r>
             <a:r>
-              <a:rPr sz="1400" i="0" b="0">
+              <a:rPr sz="1200" i="0" b="0">
                 <a:solidFill>
                   <a:srgbClr val="D4D4D4"/>
                 </a:solidFill>
@@ -15123,7 +15144,7 @@
               <a:t>wont</a:t>
             </a:r>
             <a:r>
-              <a:rPr sz="1400" i="0" b="0">
+              <a:rPr sz="1200" i="0" b="0">
                 <a:solidFill>
                   <a:srgbClr val="D4D4D4"/>
                 </a:solidFill>
@@ -15132,7 +15153,7 @@
               <a:t>[</a:t>
             </a:r>
             <a:r>
-              <a:rPr sz="1400" i="0" b="0">
+              <a:rPr sz="1200" i="0" b="0">
                 <a:solidFill>
                   <a:srgbClr val="D4D4D4"/>
                 </a:solidFill>
@@ -15141,7 +15162,7 @@
               <a:t>Wont</a:t>
             </a:r>
             <a:r>
-              <a:rPr sz="1400" i="0" b="0">
+              <a:rPr sz="1200" i="0" b="0">
                 <a:solidFill>
                   <a:srgbClr val="D4D4D4"/>
                 </a:solidFill>
@@ -15150,7 +15171,7 @@
               <a:t> - </a:t>
             </a:r>
             <a:r>
-              <a:rPr sz="1400" i="0" b="0">
+              <a:rPr sz="1200" i="0" b="0">
                 <a:solidFill>
                   <a:srgbClr val="D4D4D4"/>
                 </a:solidFill>
@@ -15159,7 +15180,7 @@
               <a:t>fuera</a:t>
             </a:r>
             <a:r>
-              <a:rPr sz="1400" i="0" b="0">
+              <a:rPr sz="1200" i="0" b="0">
                 <a:solidFill>
                   <a:srgbClr val="D4D4D4"/>
                 </a:solidFill>
@@ -15168,7 +15189,7 @@
               <a:t> </a:t>
             </a:r>
             <a:r>
-              <a:rPr sz="1400" i="0" b="0">
+              <a:rPr sz="1200" i="0" b="0">
                 <a:solidFill>
                   <a:srgbClr val="D4D4D4"/>
                 </a:solidFill>
@@ -15177,7 +15198,7 @@
               <a:t>de</a:t>
             </a:r>
             <a:r>
-              <a:rPr sz="1400" i="0" b="0">
+              <a:rPr sz="1200" i="0" b="0">
                 <a:solidFill>
                   <a:srgbClr val="D4D4D4"/>
                 </a:solidFill>
@@ -15186,7 +15207,7 @@
               <a:t> </a:t>
             </a:r>
             <a:r>
-              <a:rPr sz="1400" i="0" b="0">
+              <a:rPr sz="1200" i="0" b="0">
                 <a:solidFill>
                   <a:srgbClr val="D4D4D4"/>
                 </a:solidFill>
@@ -15195,7 +15216,7 @@
               <a:t>este</a:t>
             </a:r>
             <a:r>
-              <a:rPr sz="1400" i="0" b="0">
+              <a:rPr sz="1200" i="0" b="0">
                 <a:solidFill>
                   <a:srgbClr val="D4D4D4"/>
                 </a:solidFill>
@@ -15204,7 +15225,7 @@
               <a:t> </a:t>
             </a:r>
             <a:r>
-              <a:rPr sz="1400" i="0" b="0">
+              <a:rPr sz="1200" i="0" b="0">
                 <a:solidFill>
                   <a:srgbClr val="D4D4D4"/>
                 </a:solidFill>
@@ -15213,7 +15234,7 @@
               <a:t>alcance</a:t>
             </a:r>
             <a:r>
-              <a:rPr sz="1400" i="0" b="0">
+              <a:rPr sz="1200" i="0" b="0">
                 <a:solidFill>
                   <a:srgbClr val="D4D4D4"/>
                 </a:solidFill>
@@ -15225,11 +15246,11 @@
           <a:p>
             <a:pPr>
               <a:spcAft>
-                <a:spcPts val="300"/>
+                <a:spcPts val="257"/>
               </a:spcAft>
             </a:pPr>
             <a:r>
-              <a:rPr sz="1400" i="0" b="0">
+              <a:rPr sz="1200" i="0" b="0">
                 <a:solidFill>
                   <a:srgbClr val="D4D4D4"/>
                 </a:solidFill>
@@ -15238,7 +15259,7 @@
               <a:t>    </a:t>
             </a:r>
             <a:r>
-              <a:rPr sz="1400" i="0" b="0">
+              <a:rPr sz="1200" i="0" b="0">
                 <a:solidFill>
                   <a:srgbClr val="D4D4D4"/>
                 </a:solidFill>
@@ -15247,7 +15268,7 @@
               <a:t>w1</a:t>
             </a:r>
             <a:r>
-              <a:rPr sz="1400" i="0" b="0">
+              <a:rPr sz="1200" i="0" b="0">
                 <a:solidFill>
                   <a:srgbClr val="D4D4D4"/>
                 </a:solidFill>
@@ -15256,7 +15277,7 @@
               <a:t>[</a:t>
             </a:r>
             <a:r>
-              <a:rPr sz="1400" i="0" b="0">
+              <a:rPr sz="1200" i="0" b="0">
                 <a:solidFill>
                   <a:srgbClr val="D4D4D4"/>
                 </a:solidFill>
@@ -15265,7 +15286,7 @@
               <a:t>RF</a:t>
             </a:r>
             <a:r>
-              <a:rPr sz="1400" i="0" b="0">
+              <a:rPr sz="1200" i="0" b="0">
                 <a:solidFill>
                   <a:srgbClr val="D4D4D4"/>
                 </a:solidFill>
@@ -15274,7 +15295,7 @@
               <a:t>-</a:t>
             </a:r>
             <a:r>
-              <a:rPr sz="1400" i="0" b="0">
+              <a:rPr sz="1200" i="0" b="0">
                 <a:solidFill>
                   <a:srgbClr val="B5CEA8"/>
                 </a:solidFill>
@@ -15283,7 +15304,7 @@
               <a:t>15</a:t>
             </a:r>
             <a:r>
-              <a:rPr sz="1400" i="0" b="0">
+              <a:rPr sz="1200" i="0" b="0">
                 <a:solidFill>
                   <a:srgbClr val="D4D4D4"/>
                 </a:solidFill>
@@ -15292,7 +15313,7 @@
               <a:t> </a:t>
             </a:r>
             <a:r>
-              <a:rPr sz="1400" i="0" b="0">
+              <a:rPr sz="1200" i="0" b="0">
                 <a:solidFill>
                   <a:srgbClr val="D4D4D4"/>
                 </a:solidFill>
@@ -15301,7 +15322,7 @@
               <a:t>App</a:t>
             </a:r>
             <a:r>
-              <a:rPr sz="1400" i="0" b="0">
+              <a:rPr sz="1200" i="0" b="0">
                 <a:solidFill>
                   <a:srgbClr val="D4D4D4"/>
                 </a:solidFill>
@@ -15310,7 +15331,7 @@
               <a:t> </a:t>
             </a:r>
             <a:r>
-              <a:rPr sz="1400" i="0" b="0">
+              <a:rPr sz="1200" i="0" b="0">
                 <a:solidFill>
                   <a:srgbClr val="D4D4D4"/>
                 </a:solidFill>
@@ -15319,7 +15340,7 @@
               <a:t>movil</a:t>
             </a:r>
             <a:r>
-              <a:rPr sz="1400" i="0" b="0">
+              <a:rPr sz="1200" i="0" b="0">
                 <a:solidFill>
                   <a:srgbClr val="D4D4D4"/>
                 </a:solidFill>
@@ -15331,11 +15352,11 @@
           <a:p>
             <a:pPr>
               <a:spcAft>
-                <a:spcPts val="300"/>
+                <a:spcPts val="257"/>
               </a:spcAft>
             </a:pPr>
             <a:r>
-              <a:rPr sz="1400" i="0" b="0">
+              <a:rPr sz="1200" i="0" b="0">
                 <a:solidFill>
                   <a:srgbClr val="D4D4D4"/>
                 </a:solidFill>
@@ -15344,7 +15365,7 @@
               <a:t>  </a:t>
             </a:r>
             <a:r>
-              <a:rPr sz="1400" i="0" b="0">
+              <a:rPr sz="1200" i="0" b="0">
                 <a:solidFill>
                   <a:srgbClr val="D4D4D4"/>
                 </a:solidFill>
@@ -15353,59 +15374,150 @@
               <a:t>end</a:t>
             </a:r>
           </a:p>
-          <a:p>
-            <a:pPr>
-              <a:spcAft>
-                <a:spcPts val="300"/>
-              </a:spcAft>
-            </a:pPr>
-            <a:r>
-              <a:rPr sz="1400" i="0" b="0">
-                <a:solidFill>
-                  <a:srgbClr val="D4D4D4"/>
-                </a:solidFill>
-                <a:latin typeface="Consolas"/>
-              </a:rPr>
-              <a:t/>
-            </a:r>
-          </a:p>
-          <a:p>
-            <a:pPr>
-              <a:spcAft>
-                <a:spcPts val="300"/>
-              </a:spcAft>
-            </a:pPr>
-            <a:r>
-              <a:rPr sz="1400" i="1" b="0">
-                <a:solidFill>
-                  <a:srgbClr val="6A9955"/>
-                </a:solidFill>
-                <a:latin typeface="Consolas"/>
-              </a:rPr>
-              <a:t>%% Wont NO es «nunca»: es «no en esta version», y va escrito para que</a:t>
-            </a:r>
-          </a:p>
-          <a:p>
-            <a:pPr>
-              <a:spcAft>
-                <a:spcPts val="300"/>
-              </a:spcAft>
-            </a:pPr>
-            <a:r>
-              <a:rPr sz="1400" i="1" b="0">
-                <a:solidFill>
-                  <a:srgbClr val="6A9955"/>
-                </a:solidFill>
-                <a:latin typeface="Consolas"/>
-              </a:rPr>
-              <a:t>%% nadie lo de por incluido. Es la mitad del valor de MoSCoW.</a:t>
-            </a:r>
-          </a:p>
-        </p:txBody>
-      </p:sp>
-      <p:sp>
-        <p:nvSpPr>
-          <p:cNvPr id="13" name="TextBox 12"/>
+        </p:txBody>
+      </p:sp>
+      <p:sp>
+        <p:nvSpPr>
+          <p:cNvPr id="13" name="Rounded Rectangle 12"/>
+          <p:cNvSpPr/>
+          <p:nvPr/>
+        </p:nvSpPr>
+        <p:spPr>
+          <a:xfrm>
+            <a:off x="7668579" y="1261872"/>
+            <a:ext cx="4120780" cy="3318569"/>
+          </a:xfrm>
+          <a:prstGeom prst="roundRect">
+            <a:avLst>
+              <a:gd name="adj" fmla="val 4000"/>
+            </a:avLst>
+          </a:prstGeom>
+          <a:solidFill>
+            <a:srgbClr val="E8EEF4"/>
+          </a:solidFill>
+          <a:ln>
+            <a:noFill/>
+          </a:ln>
+        </p:spPr>
+        <p:style>
+          <a:lnRef idx="1">
+            <a:schemeClr val="accent1"/>
+          </a:lnRef>
+          <a:fillRef idx="3">
+            <a:schemeClr val="accent1"/>
+          </a:fillRef>
+          <a:effectRef idx="2">
+            <a:schemeClr val="accent1"/>
+          </a:effectRef>
+          <a:fontRef idx="minor">
+            <a:schemeClr val="lt1"/>
+          </a:fontRef>
+        </p:style>
+        <p:txBody>
+          <a:bodyPr rtlCol="0" anchor="ctr"/>
+          <a:lstStyle/>
+          <a:p>
+            <a:pPr algn="ctr"/>
+          </a:p>
+        </p:txBody>
+      </p:sp>
+      <p:pic>
+        <p:nvPicPr>
+          <p:cNvPr id="14" name="Picture 13" descr="dg-moscow-paso1.png"/>
+          <p:cNvPicPr>
+            <a:picLocks noChangeAspect="1"/>
+          </p:cNvPicPr>
+          <p:nvPr/>
+        </p:nvPicPr>
+        <p:blipFill>
+          <a:blip r:embed="rId2"/>
+          <a:stretch>
+            <a:fillRect/>
+          </a:stretch>
+        </p:blipFill>
+        <p:spPr>
+          <a:xfrm>
+            <a:off x="7723443" y="1316736"/>
+            <a:ext cx="4011052" cy="3208841"/>
+          </a:xfrm>
+          <a:prstGeom prst="rect">
+            <a:avLst/>
+          </a:prstGeom>
+        </p:spPr>
+      </p:pic>
+      <p:sp>
+        <p:nvSpPr>
+          <p:cNvPr id="15" name="TextBox 14"/>
+          <p:cNvSpPr txBox="1"/>
+          <p:nvPr/>
+        </p:nvSpPr>
+        <p:spPr>
+          <a:xfrm>
+            <a:off x="7723443" y="4580441"/>
+            <a:ext cx="4011052" cy="320040"/>
+          </a:xfrm>
+          <a:prstGeom prst="rect">
+            <a:avLst/>
+          </a:prstGeom>
+          <a:noFill/>
+        </p:spPr>
+        <p:txBody>
+          <a:bodyPr wrap="square">
+            <a:spAutoFit/>
+          </a:bodyPr>
+          <a:lstStyle/>
+          <a:p>
+            <a:pPr algn="ctr"/>
+            <a:r>
+              <a:rPr sz="1200" b="0" i="1">
+                <a:solidFill>
+                  <a:srgbClr val="666666"/>
+                </a:solidFill>
+                <a:latin typeface="Calibri"/>
+              </a:rPr>
+              <a:t>Lo que dibuja este código</a:t>
+            </a:r>
+          </a:p>
+        </p:txBody>
+      </p:sp>
+      <p:sp>
+        <p:nvSpPr>
+          <p:cNvPr id="16" name="TextBox 15"/>
+          <p:cNvSpPr txBox="1"/>
+          <p:nvPr/>
+        </p:nvSpPr>
+        <p:spPr>
+          <a:xfrm>
+            <a:off x="457200" y="6035040"/>
+            <a:ext cx="11277295" cy="365760"/>
+          </a:xfrm>
+          <a:prstGeom prst="rect">
+            <a:avLst/>
+          </a:prstGeom>
+          <a:noFill/>
+        </p:spPr>
+        <p:txBody>
+          <a:bodyPr wrap="square">
+            <a:spAutoFit/>
+          </a:bodyPr>
+          <a:lstStyle/>
+          <a:p>
+            <a:pPr algn="ctr"/>
+            <a:r>
+              <a:rPr sz="1300" b="0" i="1">
+                <a:solidFill>
+                  <a:srgbClr val="666666"/>
+                </a:solidFill>
+                <a:latin typeface="Calibri"/>
+              </a:rPr>
+              <a:t>Wont no es «nunca»: es «no en esta version», y va escrito para que nadie lo de por incluido.</a:t>
+            </a:r>
+          </a:p>
+        </p:txBody>
+      </p:sp>
+      <p:sp>
+        <p:nvSpPr>
+          <p:cNvPr id="17" name="TextBox 16"/>
           <p:cNvSpPr txBox="1"/>
           <p:nvPr/>
         </p:nvSpPr>
